--- a/data/세일즈마케팅_예상매출현황.pptx
+++ b/data/세일즈마케팅_예상매출현황.pptx
@@ -13504,7 +13504,7 @@
                           <a:ea typeface="대명체 보통" panose="020B0600000101010101" pitchFamily="50" charset="-127"/>
                           <a:cs typeface="+mn-cs"/>
                         </a:rPr>
-                        <a:t>100,321</a:t>
+                        <a:t>106,488</a:t>
                       </a:r>
                     </a:p>
                   </a:txBody>
@@ -13630,7 +13630,7 @@
                           <a:ea typeface="대명체 보통" panose="020B0600000101010101" pitchFamily="50" charset="-127"/>
                           <a:cs typeface="+mn-cs"/>
                         </a:rPr>
-                        <a:t>15,054</a:t>
+                        <a:t>21,221</a:t>
                       </a:r>
                     </a:p>
                   </a:txBody>
@@ -13697,7 +13697,7 @@
                           <a:ea typeface="대명체 보통" panose="020B0600000101010101" pitchFamily="50" charset="-127"/>
                           <a:cs typeface="+mn-cs"/>
                         </a:rPr>
-                        <a:t>118%</a:t>
+                        <a:t>125%</a:t>
                       </a:r>
                     </a:p>
                   </a:txBody>
@@ -13890,7 +13890,7 @@
                           <a:ea typeface="대명체 보통" panose="020B0600000101010101" pitchFamily="50" charset="-127"/>
                           <a:cs typeface="+mn-cs"/>
                         </a:rPr>
-                        <a:t>27,899</a:t>
+                        <a:t>34,066</a:t>
                       </a:r>
                     </a:p>
                   </a:txBody>
@@ -13957,7 +13957,7 @@
                           <a:ea typeface="대명체 보통" panose="020B0600000101010101" pitchFamily="50" charset="-127"/>
                           <a:cs typeface="+mn-cs"/>
                         </a:rPr>
-                        <a:t>39%</a:t>
+                        <a:t>47%</a:t>
                       </a:r>
                     </a:p>
                   </a:txBody>
@@ -14954,7 +14954,7 @@
                           <a:ea typeface="대명체 보통" panose="020B0600000101010101" pitchFamily="50" charset="-127"/>
                           <a:cs typeface="+mn-cs"/>
                         </a:rPr>
-                        <a:t>57,070</a:t>
+                        <a:t>60,991</a:t>
                       </a:r>
                     </a:p>
                   </a:txBody>
@@ -15072,7 +15072,7 @@
                           <a:ea typeface="대명체 보통" panose="020B0600000101010101" pitchFamily="50" charset="-127"/>
                           <a:cs typeface="+mn-cs"/>
                         </a:rPr>
-                        <a:t>8,725</a:t>
+                        <a:t>12,646</a:t>
                       </a:r>
                     </a:p>
                   </a:txBody>
@@ -15135,7 +15135,7 @@
                           <a:ea typeface="대명체 보통" panose="020B0600000101010101" pitchFamily="50" charset="-127"/>
                           <a:cs typeface="+mn-cs"/>
                         </a:rPr>
-                        <a:t>118%</a:t>
+                        <a:t>126%</a:t>
                       </a:r>
                     </a:p>
                   </a:txBody>
@@ -15316,7 +15316,7 @@
                           <a:ea typeface="대명체 보통" panose="020B0600000101010101" pitchFamily="50" charset="-127"/>
                           <a:cs typeface="+mn-cs"/>
                         </a:rPr>
-                        <a:t>17,021</a:t>
+                        <a:t>20,942</a:t>
                       </a:r>
                     </a:p>
                   </a:txBody>
@@ -15379,7 +15379,7 @@
                           <a:ea typeface="대명체 보통" panose="020B0600000101010101" pitchFamily="50" charset="-127"/>
                           <a:cs typeface="+mn-cs"/>
                         </a:rPr>
-                        <a:t>43%</a:t>
+                        <a:t>52%</a:t>
                       </a:r>
                     </a:p>
                   </a:txBody>
@@ -16320,7 +16320,7 @@
                           <a:ea typeface="대명체 보통" panose="020B0600000101010101" pitchFamily="50" charset="-127"/>
                           <a:cs typeface="+mn-cs"/>
                         </a:rPr>
-                        <a:t>37,111</a:t>
+                        <a:t>38,399</a:t>
                       </a:r>
                     </a:p>
                   </a:txBody>
@@ -16430,7 +16430,7 @@
                           <a:ea typeface="대명체 보통" panose="020B0600000101010101" pitchFamily="50" charset="-127"/>
                           <a:cs typeface="+mn-cs"/>
                         </a:rPr>
-                        <a:t>5,871</a:t>
+                        <a:t>7,159</a:t>
                       </a:r>
                     </a:p>
                   </a:txBody>
@@ -16489,7 +16489,7 @@
                           <a:ea typeface="대명체 보통" panose="020B0600000101010101" pitchFamily="50" charset="-127"/>
                           <a:cs typeface="+mn-cs"/>
                         </a:rPr>
-                        <a:t>119%</a:t>
+                        <a:t>123%</a:t>
                       </a:r>
                     </a:p>
                   </a:txBody>
@@ -16658,7 +16658,7 @@
                           <a:ea typeface="대명체 보통" panose="020B0600000101010101" pitchFamily="50" charset="-127"/>
                           <a:cs typeface="+mn-cs"/>
                         </a:rPr>
-                        <a:t>9,590</a:t>
+                        <a:t>10,878</a:t>
                       </a:r>
                     </a:p>
                   </a:txBody>
@@ -16717,7 +16717,7 @@
                           <a:ea typeface="대명체 보통" panose="020B0600000101010101" pitchFamily="50" charset="-127"/>
                           <a:cs typeface="+mn-cs"/>
                         </a:rPr>
-                        <a:t>35%</a:t>
+                        <a:t>40%</a:t>
                       </a:r>
                     </a:p>
                   </a:txBody>
@@ -17734,7 +17734,7 @@
                           <a:ea typeface="대명체 보통" panose="020B0600000101010101" pitchFamily="50" charset="-127"/>
                           <a:cs typeface="+mn-cs"/>
                         </a:rPr>
-                        <a:t>6,140</a:t>
+                        <a:t>7,098</a:t>
                       </a:r>
                     </a:p>
                   </a:txBody>
@@ -17852,7 +17852,7 @@
                           <a:ea typeface="대명체 보통" panose="020B0600000101010101" pitchFamily="50" charset="-127"/>
                           <a:cs typeface="+mn-cs"/>
                         </a:rPr>
-                        <a:t>458</a:t>
+                        <a:t>1,416</a:t>
                       </a:r>
                       <a:endParaRPr lang="en-US" altLang="ko-KR" sz="700" b="0" i="0" u="none" strike="noStrike" kern="1200" dirty="0">
                         <a:solidFill>
@@ -17924,7 +17924,7 @@
                           <a:ea typeface="대명체 보통" panose="020B0600000101010101" pitchFamily="50" charset="-127"/>
                           <a:cs typeface="+mn-cs"/>
                         </a:rPr>
-                        <a:t>108%</a:t>
+                        <a:t>125%</a:t>
                       </a:r>
                     </a:p>
                   </a:txBody>
@@ -18105,7 +18105,7 @@
                           <a:ea typeface="대명체 보통" panose="020B0600000101010101" pitchFamily="50" charset="-127"/>
                           <a:cs typeface="+mn-cs"/>
                         </a:rPr>
-                        <a:t>1,288</a:t>
+                        <a:t>2,246</a:t>
                       </a:r>
                     </a:p>
                   </a:txBody>
@@ -18168,7 +18168,7 @@
                           <a:ea typeface="대명체 보통" panose="020B0600000101010101" pitchFamily="50" charset="-127"/>
                           <a:cs typeface="+mn-cs"/>
                         </a:rPr>
-                        <a:t>27%</a:t>
+                        <a:t>46%</a:t>
                       </a:r>
                     </a:p>
                   </a:txBody>

--- a/data/세일즈마케팅_예상매출현황.pptx
+++ b/data/세일즈마케팅_예상매출현황.pptx
@@ -4058,43 +4058,7 @@
                           <a:latin typeface="대명체 보통" panose="020B0600000101010101" pitchFamily="50" charset="-127"/>
                           <a:ea typeface="대명체 보통" panose="020B0600000101010101" pitchFamily="50" charset="-127"/>
                         </a:rPr>
-                        <a:t>당월 </a:t>
-                      </a:r>
-                      <a:r>
-                        <a:rPr lang="ko-KR" altLang="en-US" sz="800" b="1" i="0" u="none" strike="noStrike" dirty="0" smtClean="0">
-                          <a:ln>
-                            <a:solidFill>
-                              <a:schemeClr val="accent1">
-                                <a:alpha val="0"/>
-                              </a:schemeClr>
-                            </a:solidFill>
-                          </a:ln>
-                          <a:solidFill>
-                            <a:schemeClr val="bg1"/>
-                          </a:solidFill>
-                          <a:effectLst/>
-                          <a:latin typeface="대명체 보통" panose="020B0600000101010101" pitchFamily="50" charset="-127"/>
-                          <a:ea typeface="대명체 보통" panose="020B0600000101010101" pitchFamily="50" charset="-127"/>
-                        </a:rPr>
-                        <a:t>예상실적 </a:t>
-                      </a:r>
-                      <a:r>
-                        <a:rPr lang="en-US" altLang="ko-KR" sz="800" b="1" i="0" u="none" strike="noStrike" dirty="0" smtClean="0">
-                          <a:ln>
-                            <a:solidFill>
-                              <a:schemeClr val="accent1">
-                                <a:alpha val="0"/>
-                              </a:schemeClr>
-                            </a:solidFill>
-                          </a:ln>
-                          <a:solidFill>
-                            <a:schemeClr val="bg1"/>
-                          </a:solidFill>
-                          <a:effectLst/>
-                          <a:latin typeface="대명체 보통" panose="020B0600000101010101" pitchFamily="50" charset="-127"/>
-                          <a:ea typeface="대명체 보통" panose="020B0600000101010101" pitchFamily="50" charset="-127"/>
-                        </a:rPr>
-                        <a:t>(06.01~06.30)</a:t>
+                        <a:t>당월 예상실적 (06.01~06.30)</a:t>
                       </a:r>
                       <a:endParaRPr lang="en-US" altLang="ko-KR" sz="800" b="1" i="0" u="none" strike="noStrike" dirty="0">
                         <a:ln>
@@ -4346,25 +4310,7 @@
                           <a:latin typeface="대명체 보통" panose="020B0600000101010101" pitchFamily="50" charset="-127"/>
                           <a:ea typeface="대명체 보통" panose="020B0600000101010101" pitchFamily="50" charset="-127"/>
                         </a:rPr>
-                        <a:t>누계 실적 </a:t>
-                      </a:r>
-                      <a:r>
-                        <a:rPr lang="en-US" altLang="ko-KR" sz="800" b="1" i="0" u="none" strike="noStrike" dirty="0" smtClean="0">
-                          <a:ln>
-                            <a:solidFill>
-                              <a:schemeClr val="accent1">
-                                <a:alpha val="0"/>
-                              </a:schemeClr>
-                            </a:solidFill>
-                          </a:ln>
-                          <a:solidFill>
-                            <a:schemeClr val="bg1"/>
-                          </a:solidFill>
-                          <a:effectLst/>
-                          <a:latin typeface="대명체 보통" panose="020B0600000101010101" pitchFamily="50" charset="-127"/>
-                          <a:ea typeface="대명체 보통" panose="020B0600000101010101" pitchFamily="50" charset="-127"/>
-                        </a:rPr>
-                        <a:t>(01.01~06.30)</a:t>
+                        <a:t>누계 실적 (01.01~06.30)</a:t>
                       </a:r>
                       <a:endParaRPr lang="en-US" altLang="ko-KR" sz="800" b="1" i="0" u="none" strike="noStrike" dirty="0">
                         <a:ln>

--- a/data/세일즈마케팅_예상매출현황.pptx
+++ b/data/세일즈마케팅_예상매출현황.pptx
@@ -12756,7 +12756,7 @@
                           <a:ea typeface="대명체 보통" panose="020B0600000101010101" pitchFamily="50" charset="-127"/>
                           <a:cs typeface="+mn-cs"/>
                         </a:rPr>
-                        <a:t>16,036</a:t>
+                        <a:t>16,053</a:t>
                       </a:r>
                     </a:p>
                   </a:txBody>
@@ -12882,7 +12882,7 @@
                           <a:ea typeface="대명체 보통" panose="020B0600000101010101" pitchFamily="50" charset="-127"/>
                           <a:cs typeface="+mn-cs"/>
                         </a:rPr>
-                        <a:t>1,217</a:t>
+                        <a:t>1,234</a:t>
                       </a:r>
                     </a:p>
                   </a:txBody>
@@ -13142,7 +13142,7 @@
                           <a:ea typeface="대명체 보통" panose="020B0600000101010101" pitchFamily="50" charset="-127"/>
                           <a:cs typeface="+mn-cs"/>
                         </a:rPr>
-                        <a:t>3,015</a:t>
+                        <a:t>3,032</a:t>
                       </a:r>
                     </a:p>
                   </a:txBody>
@@ -13450,7 +13450,7 @@
                           <a:ea typeface="대명체 보통" panose="020B0600000101010101" pitchFamily="50" charset="-127"/>
                           <a:cs typeface="+mn-cs"/>
                         </a:rPr>
-                        <a:t>106,488</a:t>
+                        <a:t>106,504</a:t>
                       </a:r>
                     </a:p>
                   </a:txBody>
@@ -13576,7 +13576,7 @@
                           <a:ea typeface="대명체 보통" panose="020B0600000101010101" pitchFamily="50" charset="-127"/>
                           <a:cs typeface="+mn-cs"/>
                         </a:rPr>
-                        <a:t>21,221</a:t>
+                        <a:t>21,237</a:t>
                       </a:r>
                     </a:p>
                   </a:txBody>
@@ -13836,7 +13836,7 @@
                           <a:ea typeface="대명체 보통" panose="020B0600000101010101" pitchFamily="50" charset="-127"/>
                           <a:cs typeface="+mn-cs"/>
                         </a:rPr>
-                        <a:t>34,066</a:t>
+                        <a:t>34,082</a:t>
                       </a:r>
                     </a:p>
                   </a:txBody>
@@ -14237,7 +14237,7 @@
                           <a:ea typeface="대명체 보통" panose="020B0600000101010101" pitchFamily="50" charset="-127"/>
                           <a:cs typeface="+mn-cs"/>
                         </a:rPr>
-                        <a:t>9,289</a:t>
+                        <a:t>9,317</a:t>
                       </a:r>
                     </a:p>
                   </a:txBody>
@@ -14355,7 +14355,7 @@
                           <a:ea typeface="대명체 보통" panose="020B0600000101010101" pitchFamily="50" charset="-127"/>
                           <a:cs typeface="+mn-cs"/>
                         </a:rPr>
-                        <a:t>475</a:t>
+                        <a:t>503</a:t>
                       </a:r>
                       <a:endParaRPr lang="en-US" altLang="ko-KR" sz="700" b="0" i="0" u="none" strike="noStrike" kern="1200" dirty="0">
                         <a:solidFill>
@@ -14427,7 +14427,7 @@
                           <a:ea typeface="대명체 보통" panose="020B0600000101010101" pitchFamily="50" charset="-127"/>
                           <a:cs typeface="+mn-cs"/>
                         </a:rPr>
-                        <a:t>105%</a:t>
+                        <a:t>106%</a:t>
                       </a:r>
                     </a:p>
                   </a:txBody>
@@ -14608,7 +14608,7 @@
                           <a:ea typeface="대명체 보통" panose="020B0600000101010101" pitchFamily="50" charset="-127"/>
                           <a:cs typeface="+mn-cs"/>
                         </a:rPr>
-                        <a:t>1,681</a:t>
+                        <a:t>1,709</a:t>
                       </a:r>
                     </a:p>
                   </a:txBody>
@@ -14900,7 +14900,7 @@
                           <a:ea typeface="대명체 보통" panose="020B0600000101010101" pitchFamily="50" charset="-127"/>
                           <a:cs typeface="+mn-cs"/>
                         </a:rPr>
-                        <a:t>60,991</a:t>
+                        <a:t>61,019</a:t>
                       </a:r>
                     </a:p>
                   </a:txBody>
@@ -15018,7 +15018,7 @@
                           <a:ea typeface="대명체 보통" panose="020B0600000101010101" pitchFamily="50" charset="-127"/>
                           <a:cs typeface="+mn-cs"/>
                         </a:rPr>
-                        <a:t>12,646</a:t>
+                        <a:t>12,674</a:t>
                       </a:r>
                     </a:p>
                   </a:txBody>
@@ -15262,7 +15262,7 @@
                           <a:ea typeface="대명체 보통" panose="020B0600000101010101" pitchFamily="50" charset="-127"/>
                           <a:cs typeface="+mn-cs"/>
                         </a:rPr>
-                        <a:t>20,942</a:t>
+                        <a:t>20,970</a:t>
                       </a:r>
                     </a:p>
                   </a:txBody>
@@ -15643,7 +15643,7 @@
                           <a:ea typeface="대명체 보통" panose="020B0600000101010101" pitchFamily="50" charset="-127"/>
                           <a:cs typeface="+mn-cs"/>
                         </a:rPr>
-                        <a:t>6,156</a:t>
+                        <a:t>6,163</a:t>
                       </a:r>
                     </a:p>
                   </a:txBody>
@@ -15753,7 +15753,7 @@
                           <a:ea typeface="대명체 보통" panose="020B0600000101010101" pitchFamily="50" charset="-127"/>
                           <a:cs typeface="+mn-cs"/>
                         </a:rPr>
-                        <a:t>657</a:t>
+                        <a:t>664</a:t>
                       </a:r>
                       <a:endParaRPr lang="en-US" altLang="ko-KR" sz="700" b="0" i="0" u="none" strike="noStrike" kern="1200" dirty="0">
                         <a:solidFill>
@@ -15990,7 +15990,7 @@
                           <a:ea typeface="대명체 보통" panose="020B0600000101010101" pitchFamily="50" charset="-127"/>
                           <a:cs typeface="+mn-cs"/>
                         </a:rPr>
-                        <a:t>1,337</a:t>
+                        <a:t>1,344</a:t>
                       </a:r>
                     </a:p>
                   </a:txBody>
@@ -16266,7 +16266,7 @@
                           <a:ea typeface="대명체 보통" panose="020B0600000101010101" pitchFamily="50" charset="-127"/>
                           <a:cs typeface="+mn-cs"/>
                         </a:rPr>
-                        <a:t>38,399</a:t>
+                        <a:t>38,405</a:t>
                       </a:r>
                     </a:p>
                   </a:txBody>
@@ -16376,7 +16376,7 @@
                           <a:ea typeface="대명체 보통" panose="020B0600000101010101" pitchFamily="50" charset="-127"/>
                           <a:cs typeface="+mn-cs"/>
                         </a:rPr>
-                        <a:t>7,159</a:t>
+                        <a:t>7,165</a:t>
                       </a:r>
                     </a:p>
                   </a:txBody>
@@ -16604,7 +16604,7 @@
                           <a:ea typeface="대명체 보통" panose="020B0600000101010101" pitchFamily="50" charset="-127"/>
                           <a:cs typeface="+mn-cs"/>
                         </a:rPr>
-                        <a:t>10,878</a:t>
+                        <a:t>10,884</a:t>
                       </a:r>
                     </a:p>
                   </a:txBody>
@@ -16999,7 +16999,7 @@
                           <a:ea typeface="대명체 보통" panose="020B0600000101010101" pitchFamily="50" charset="-127"/>
                           <a:cs typeface="+mn-cs"/>
                         </a:rPr>
-                        <a:t>590</a:t>
+                        <a:t>572</a:t>
                       </a:r>
                       <a:endParaRPr lang="en-US" altLang="ko-KR" sz="700" b="0" i="0" u="none" strike="noStrike" kern="1200" dirty="0">
                         <a:solidFill>
@@ -17126,7 +17126,7 @@
                           <a:ea typeface="대명체 보통" panose="020B0600000101010101" pitchFamily="50" charset="-127"/>
                           <a:cs typeface="+mn-cs"/>
                         </a:rPr>
-                        <a:t>85</a:t>
+                        <a:t>67</a:t>
                       </a:r>
                       <a:endParaRPr lang="en-US" altLang="ko-KR" sz="700" b="0" i="0" u="none" strike="noStrike" kern="1200" dirty="0">
                         <a:solidFill>
@@ -17198,7 +17198,7 @@
                           <a:ea typeface="대명체 보통" panose="020B0600000101010101" pitchFamily="50" charset="-127"/>
                           <a:cs typeface="+mn-cs"/>
                         </a:rPr>
-                        <a:t>117%</a:t>
+                        <a:t>113%</a:t>
                       </a:r>
                     </a:p>
                   </a:txBody>
@@ -17388,7 +17388,7 @@
                           <a:ea typeface="대명체 보통" panose="020B0600000101010101" pitchFamily="50" charset="-127"/>
                           <a:cs typeface="+mn-cs"/>
                         </a:rPr>
-                        <a:t>-4</a:t>
+                        <a:t>-22</a:t>
                       </a:r>
                     </a:p>
                   </a:txBody>
@@ -17451,7 +17451,7 @@
                           <a:ea typeface="대명체 보통" panose="020B0600000101010101" pitchFamily="50" charset="-127"/>
                           <a:cs typeface="+mn-cs"/>
                         </a:rPr>
-                        <a:t>-1%</a:t>
+                        <a:t>-4%</a:t>
                       </a:r>
                     </a:p>
                   </a:txBody>
@@ -17680,7 +17680,7 @@
                           <a:ea typeface="대명체 보통" panose="020B0600000101010101" pitchFamily="50" charset="-127"/>
                           <a:cs typeface="+mn-cs"/>
                         </a:rPr>
-                        <a:t>7,098</a:t>
+                        <a:t>7,080</a:t>
                       </a:r>
                     </a:p>
                   </a:txBody>
@@ -17798,7 +17798,7 @@
                           <a:ea typeface="대명체 보통" panose="020B0600000101010101" pitchFamily="50" charset="-127"/>
                           <a:cs typeface="+mn-cs"/>
                         </a:rPr>
-                        <a:t>1,416</a:t>
+                        <a:t>1,398</a:t>
                       </a:r>
                       <a:endParaRPr lang="en-US" altLang="ko-KR" sz="700" b="0" i="0" u="none" strike="noStrike" kern="1200" dirty="0">
                         <a:solidFill>
@@ -18051,7 +18051,7 @@
                           <a:ea typeface="대명체 보통" panose="020B0600000101010101" pitchFamily="50" charset="-127"/>
                           <a:cs typeface="+mn-cs"/>
                         </a:rPr>
-                        <a:t>2,246</a:t>
+                        <a:t>2,228</a:t>
                       </a:r>
                     </a:p>
                   </a:txBody>

--- a/data/세일즈마케팅_예상매출현황.pptx
+++ b/data/세일즈마케팅_예상매출현황.pptx
@@ -4058,7 +4058,7 @@
                           <a:latin typeface="대명체 보통" panose="020B0600000101010101" pitchFamily="50" charset="-127"/>
                           <a:ea typeface="대명체 보통" panose="020B0600000101010101" pitchFamily="50" charset="-127"/>
                         </a:rPr>
-                        <a:t>당월 예상실적 (06.01~06.30)</a:t>
+                        <a:t>당월 예상실적 (07.01~07.31)</a:t>
                       </a:r>
                       <a:endParaRPr lang="en-US" altLang="ko-KR" sz="800" b="1" i="0" u="none" strike="noStrike" dirty="0">
                         <a:ln>
@@ -4310,7 +4310,7 @@
                           <a:latin typeface="대명체 보통" panose="020B0600000101010101" pitchFamily="50" charset="-127"/>
                           <a:ea typeface="대명체 보통" panose="020B0600000101010101" pitchFamily="50" charset="-127"/>
                         </a:rPr>
-                        <a:t>누계 실적 (01.01~06.30)</a:t>
+                        <a:t>누계 실적 (01.01~07.31)</a:t>
                       </a:r>
                       <a:endParaRPr lang="en-US" altLang="ko-KR" sz="800" b="1" i="0" u="none" strike="noStrike" dirty="0">
                         <a:ln>
@@ -12756,7 +12756,7 @@
                           <a:ea typeface="대명체 보통" panose="020B0600000101010101" pitchFamily="50" charset="-127"/>
                           <a:cs typeface="+mn-cs"/>
                         </a:rPr>
-                        <a:t>16,053</a:t>
+                        <a:t>16,217</a:t>
                       </a:r>
                     </a:p>
                   </a:txBody>
@@ -12882,7 +12882,7 @@
                           <a:ea typeface="대명체 보통" panose="020B0600000101010101" pitchFamily="50" charset="-127"/>
                           <a:cs typeface="+mn-cs"/>
                         </a:rPr>
-                        <a:t>1,234</a:t>
+                        <a:t>1,398</a:t>
                       </a:r>
                     </a:p>
                   </a:txBody>
@@ -12949,7 +12949,7 @@
                           <a:ea typeface="대명체 보통" panose="020B0600000101010101" pitchFamily="50" charset="-127"/>
                           <a:cs typeface="+mn-cs"/>
                         </a:rPr>
-                        <a:t>108%</a:t>
+                        <a:t>109%</a:t>
                       </a:r>
                     </a:p>
                   </a:txBody>
@@ -13142,7 +13142,7 @@
                           <a:ea typeface="대명체 보통" panose="020B0600000101010101" pitchFamily="50" charset="-127"/>
                           <a:cs typeface="+mn-cs"/>
                         </a:rPr>
-                        <a:t>3,032</a:t>
+                        <a:t>3,196</a:t>
                       </a:r>
                     </a:p>
                   </a:txBody>
@@ -13209,7 +13209,7 @@
                           <a:ea typeface="대명체 보통" panose="020B0600000101010101" pitchFamily="50" charset="-127"/>
                           <a:cs typeface="+mn-cs"/>
                         </a:rPr>
-                        <a:t>23%</a:t>
+                        <a:t>25%</a:t>
                       </a:r>
                     </a:p>
                   </a:txBody>
@@ -13450,7 +13450,7 @@
                           <a:ea typeface="대명체 보통" panose="020B0600000101010101" pitchFamily="50" charset="-127"/>
                           <a:cs typeface="+mn-cs"/>
                         </a:rPr>
-                        <a:t>106,504</a:t>
+                        <a:t>108,024</a:t>
                       </a:r>
                     </a:p>
                   </a:txBody>
@@ -13576,7 +13576,7 @@
                           <a:ea typeface="대명체 보통" panose="020B0600000101010101" pitchFamily="50" charset="-127"/>
                           <a:cs typeface="+mn-cs"/>
                         </a:rPr>
-                        <a:t>21,237</a:t>
+                        <a:t>22,757</a:t>
                       </a:r>
                     </a:p>
                   </a:txBody>
@@ -13643,7 +13643,7 @@
                           <a:ea typeface="대명체 보통" panose="020B0600000101010101" pitchFamily="50" charset="-127"/>
                           <a:cs typeface="+mn-cs"/>
                         </a:rPr>
-                        <a:t>125%</a:t>
+                        <a:t>127%</a:t>
                       </a:r>
                     </a:p>
                   </a:txBody>
@@ -13836,7 +13836,7 @@
                           <a:ea typeface="대명체 보통" panose="020B0600000101010101" pitchFamily="50" charset="-127"/>
                           <a:cs typeface="+mn-cs"/>
                         </a:rPr>
-                        <a:t>34,082</a:t>
+                        <a:t>35,602</a:t>
                       </a:r>
                     </a:p>
                   </a:txBody>
@@ -13903,7 +13903,7 @@
                           <a:ea typeface="대명체 보통" panose="020B0600000101010101" pitchFamily="50" charset="-127"/>
                           <a:cs typeface="+mn-cs"/>
                         </a:rPr>
-                        <a:t>47%</a:t>
+                        <a:t>49%</a:t>
                       </a:r>
                     </a:p>
                   </a:txBody>
@@ -14237,7 +14237,7 @@
                           <a:ea typeface="대명체 보통" panose="020B0600000101010101" pitchFamily="50" charset="-127"/>
                           <a:cs typeface="+mn-cs"/>
                         </a:rPr>
-                        <a:t>9,317</a:t>
+                        <a:t>9,353</a:t>
                       </a:r>
                     </a:p>
                   </a:txBody>
@@ -14355,7 +14355,7 @@
                           <a:ea typeface="대명체 보통" panose="020B0600000101010101" pitchFamily="50" charset="-127"/>
                           <a:cs typeface="+mn-cs"/>
                         </a:rPr>
-                        <a:t>503</a:t>
+                        <a:t>539</a:t>
                       </a:r>
                       <a:endParaRPr lang="en-US" altLang="ko-KR" sz="700" b="0" i="0" u="none" strike="noStrike" kern="1200" dirty="0">
                         <a:solidFill>
@@ -14608,7 +14608,7 @@
                           <a:ea typeface="대명체 보통" panose="020B0600000101010101" pitchFamily="50" charset="-127"/>
                           <a:cs typeface="+mn-cs"/>
                         </a:rPr>
-                        <a:t>1,709</a:t>
+                        <a:t>1,745</a:t>
                       </a:r>
                     </a:p>
                   </a:txBody>
@@ -14671,7 +14671,7 @@
                           <a:ea typeface="대명체 보통" panose="020B0600000101010101" pitchFamily="50" charset="-127"/>
                           <a:cs typeface="+mn-cs"/>
                         </a:rPr>
-                        <a:t>22%</a:t>
+                        <a:t>23%</a:t>
                       </a:r>
                     </a:p>
                   </a:txBody>
@@ -14900,7 +14900,7 @@
                           <a:ea typeface="대명체 보통" panose="020B0600000101010101" pitchFamily="50" charset="-127"/>
                           <a:cs typeface="+mn-cs"/>
                         </a:rPr>
-                        <a:t>61,019</a:t>
+                        <a:t>61,976</a:t>
                       </a:r>
                     </a:p>
                   </a:txBody>
@@ -15018,7 +15018,7 @@
                           <a:ea typeface="대명체 보통" panose="020B0600000101010101" pitchFamily="50" charset="-127"/>
                           <a:cs typeface="+mn-cs"/>
                         </a:rPr>
-                        <a:t>12,674</a:t>
+                        <a:t>13,631</a:t>
                       </a:r>
                     </a:p>
                   </a:txBody>
@@ -15081,7 +15081,7 @@
                           <a:ea typeface="대명체 보통" panose="020B0600000101010101" pitchFamily="50" charset="-127"/>
                           <a:cs typeface="+mn-cs"/>
                         </a:rPr>
-                        <a:t>126%</a:t>
+                        <a:t>128%</a:t>
                       </a:r>
                     </a:p>
                   </a:txBody>
@@ -15262,7 +15262,7 @@
                           <a:ea typeface="대명체 보통" panose="020B0600000101010101" pitchFamily="50" charset="-127"/>
                           <a:cs typeface="+mn-cs"/>
                         </a:rPr>
-                        <a:t>20,970</a:t>
+                        <a:t>21,927</a:t>
                       </a:r>
                     </a:p>
                   </a:txBody>
@@ -15325,7 +15325,7 @@
                           <a:ea typeface="대명체 보통" panose="020B0600000101010101" pitchFamily="50" charset="-127"/>
                           <a:cs typeface="+mn-cs"/>
                         </a:rPr>
-                        <a:t>52%</a:t>
+                        <a:t>55%</a:t>
                       </a:r>
                     </a:p>
                   </a:txBody>
@@ -15643,7 +15643,7 @@
                           <a:ea typeface="대명체 보통" panose="020B0600000101010101" pitchFamily="50" charset="-127"/>
                           <a:cs typeface="+mn-cs"/>
                         </a:rPr>
-                        <a:t>6,163</a:t>
+                        <a:t>6,267</a:t>
                       </a:r>
                     </a:p>
                   </a:txBody>
@@ -15753,7 +15753,7 @@
                           <a:ea typeface="대명체 보통" panose="020B0600000101010101" pitchFamily="50" charset="-127"/>
                           <a:cs typeface="+mn-cs"/>
                         </a:rPr>
-                        <a:t>664</a:t>
+                        <a:t>768</a:t>
                       </a:r>
                       <a:endParaRPr lang="en-US" altLang="ko-KR" sz="700" b="0" i="0" u="none" strike="noStrike" kern="1200" dirty="0">
                         <a:solidFill>
@@ -15821,7 +15821,7 @@
                           <a:ea typeface="대명체 보통" panose="020B0600000101010101" pitchFamily="50" charset="-127"/>
                           <a:cs typeface="+mn-cs"/>
                         </a:rPr>
-                        <a:t>112%</a:t>
+                        <a:t>114%</a:t>
                       </a:r>
                     </a:p>
                   </a:txBody>
@@ -15990,7 +15990,7 @@
                           <a:ea typeface="대명체 보통" panose="020B0600000101010101" pitchFamily="50" charset="-127"/>
                           <a:cs typeface="+mn-cs"/>
                         </a:rPr>
-                        <a:t>1,344</a:t>
+                        <a:t>1,448</a:t>
                       </a:r>
                     </a:p>
                   </a:txBody>
@@ -16049,7 +16049,7 @@
                           <a:ea typeface="대명체 보통" panose="020B0600000101010101" pitchFamily="50" charset="-127"/>
                           <a:cs typeface="+mn-cs"/>
                         </a:rPr>
-                        <a:t>28%</a:t>
+                        <a:t>30%</a:t>
                       </a:r>
                     </a:p>
                   </a:txBody>
@@ -16266,7 +16266,7 @@
                           <a:ea typeface="대명체 보통" panose="020B0600000101010101" pitchFamily="50" charset="-127"/>
                           <a:cs typeface="+mn-cs"/>
                         </a:rPr>
-                        <a:t>38,405</a:t>
+                        <a:t>38,825</a:t>
                       </a:r>
                     </a:p>
                   </a:txBody>
@@ -16376,7 +16376,7 @@
                           <a:ea typeface="대명체 보통" panose="020B0600000101010101" pitchFamily="50" charset="-127"/>
                           <a:cs typeface="+mn-cs"/>
                         </a:rPr>
-                        <a:t>7,165</a:t>
+                        <a:t>7,585</a:t>
                       </a:r>
                     </a:p>
                   </a:txBody>
@@ -16435,7 +16435,7 @@
                           <a:ea typeface="대명체 보통" panose="020B0600000101010101" pitchFamily="50" charset="-127"/>
                           <a:cs typeface="+mn-cs"/>
                         </a:rPr>
-                        <a:t>123%</a:t>
+                        <a:t>124%</a:t>
                       </a:r>
                     </a:p>
                   </a:txBody>
@@ -16604,7 +16604,7 @@
                           <a:ea typeface="대명체 보통" panose="020B0600000101010101" pitchFamily="50" charset="-127"/>
                           <a:cs typeface="+mn-cs"/>
                         </a:rPr>
-                        <a:t>10,884</a:t>
+                        <a:t>11,304</a:t>
                       </a:r>
                     </a:p>
                   </a:txBody>
@@ -16663,7 +16663,7 @@
                           <a:ea typeface="대명체 보통" panose="020B0600000101010101" pitchFamily="50" charset="-127"/>
                           <a:cs typeface="+mn-cs"/>
                         </a:rPr>
-                        <a:t>40%</a:t>
+                        <a:t>41%</a:t>
                       </a:r>
                     </a:p>
                   </a:txBody>
@@ -16999,7 +16999,7 @@
                           <a:ea typeface="대명체 보통" panose="020B0600000101010101" pitchFamily="50" charset="-127"/>
                           <a:cs typeface="+mn-cs"/>
                         </a:rPr>
-                        <a:t>572</a:t>
+                        <a:t>596</a:t>
                       </a:r>
                       <a:endParaRPr lang="en-US" altLang="ko-KR" sz="700" b="0" i="0" u="none" strike="noStrike" kern="1200" dirty="0">
                         <a:solidFill>
@@ -17126,7 +17126,7 @@
                           <a:ea typeface="대명체 보통" panose="020B0600000101010101" pitchFamily="50" charset="-127"/>
                           <a:cs typeface="+mn-cs"/>
                         </a:rPr>
-                        <a:t>67</a:t>
+                        <a:t>91</a:t>
                       </a:r>
                       <a:endParaRPr lang="en-US" altLang="ko-KR" sz="700" b="0" i="0" u="none" strike="noStrike" kern="1200" dirty="0">
                         <a:solidFill>
@@ -17198,7 +17198,7 @@
                           <a:ea typeface="대명체 보통" panose="020B0600000101010101" pitchFamily="50" charset="-127"/>
                           <a:cs typeface="+mn-cs"/>
                         </a:rPr>
-                        <a:t>113%</a:t>
+                        <a:t>118%</a:t>
                       </a:r>
                     </a:p>
                   </a:txBody>
@@ -17381,14 +17381,14 @@
                       <a:r>
                         <a:rPr lang="en-US" altLang="ko-KR" sz="700" b="0" i="0" u="none" strike="noStrike" kern="1200" dirty="0">
                           <a:solidFill>
-                            <a:srgbClr val="FF0000"/>
+                            <a:srgbClr val="000000"/>
                           </a:solidFill>
                           <a:effectLst/>
                           <a:latin typeface="대명체 보통" panose="020B0600000101010101" pitchFamily="50" charset="-127"/>
                           <a:ea typeface="대명체 보통" panose="020B0600000101010101" pitchFamily="50" charset="-127"/>
                           <a:cs typeface="+mn-cs"/>
                         </a:rPr>
-                        <a:t>-22</a:t>
+                        <a:t>2</a:t>
                       </a:r>
                     </a:p>
                   </a:txBody>
@@ -17444,14 +17444,14 @@
                       <a:r>
                         <a:rPr lang="en-US" altLang="ko-KR" sz="700" b="0" i="0" u="none" strike="noStrike" kern="1200" dirty="0">
                           <a:solidFill>
-                            <a:srgbClr val="FF0000"/>
+                            <a:srgbClr val="000000"/>
                           </a:solidFill>
                           <a:effectLst/>
                           <a:latin typeface="대명체 보통" panose="020B0600000101010101" pitchFamily="50" charset="-127"/>
                           <a:ea typeface="대명체 보통" panose="020B0600000101010101" pitchFamily="50" charset="-127"/>
                           <a:cs typeface="+mn-cs"/>
                         </a:rPr>
-                        <a:t>-4%</a:t>
+                        <a:t>0%</a:t>
                       </a:r>
                     </a:p>
                   </a:txBody>
@@ -17680,7 +17680,7 @@
                           <a:ea typeface="대명체 보통" panose="020B0600000101010101" pitchFamily="50" charset="-127"/>
                           <a:cs typeface="+mn-cs"/>
                         </a:rPr>
-                        <a:t>7,080</a:t>
+                        <a:t>7,223</a:t>
                       </a:r>
                     </a:p>
                   </a:txBody>
@@ -17798,7 +17798,7 @@
                           <a:ea typeface="대명체 보통" panose="020B0600000101010101" pitchFamily="50" charset="-127"/>
                           <a:cs typeface="+mn-cs"/>
                         </a:rPr>
-                        <a:t>1,398</a:t>
+                        <a:t>1,541</a:t>
                       </a:r>
                       <a:endParaRPr lang="en-US" altLang="ko-KR" sz="700" b="0" i="0" u="none" strike="noStrike" kern="1200" dirty="0">
                         <a:solidFill>
@@ -17870,7 +17870,7 @@
                           <a:ea typeface="대명체 보통" panose="020B0600000101010101" pitchFamily="50" charset="-127"/>
                           <a:cs typeface="+mn-cs"/>
                         </a:rPr>
-                        <a:t>125%</a:t>
+                        <a:t>127%</a:t>
                       </a:r>
                     </a:p>
                   </a:txBody>
@@ -18051,7 +18051,7 @@
                           <a:ea typeface="대명체 보통" panose="020B0600000101010101" pitchFamily="50" charset="-127"/>
                           <a:cs typeface="+mn-cs"/>
                         </a:rPr>
-                        <a:t>2,228</a:t>
+                        <a:t>2,371</a:t>
                       </a:r>
                     </a:p>
                   </a:txBody>
@@ -18114,7 +18114,7 @@
                           <a:ea typeface="대명체 보통" panose="020B0600000101010101" pitchFamily="50" charset="-127"/>
                           <a:cs typeface="+mn-cs"/>
                         </a:rPr>
-                        <a:t>46%</a:t>
+                        <a:t>49%</a:t>
                       </a:r>
                     </a:p>
                   </a:txBody>

--- a/data/세일즈마케팅_예상매출현황.pptx
+++ b/data/세일즈마케팅_예상매출현황.pptx
@@ -13450,7 +13450,7 @@
                           <a:ea typeface="대명체 보통" panose="020B0600000101010101" pitchFamily="50" charset="-127"/>
                           <a:cs typeface="+mn-cs"/>
                         </a:rPr>
-                        <a:t>108,024</a:t>
+                        <a:t>108,034</a:t>
                       </a:r>
                     </a:p>
                   </a:txBody>
@@ -13576,7 +13576,7 @@
                           <a:ea typeface="대명체 보통" panose="020B0600000101010101" pitchFamily="50" charset="-127"/>
                           <a:cs typeface="+mn-cs"/>
                         </a:rPr>
-                        <a:t>22,757</a:t>
+                        <a:t>22,767</a:t>
                       </a:r>
                     </a:p>
                   </a:txBody>
@@ -13836,7 +13836,7 @@
                           <a:ea typeface="대명체 보통" panose="020B0600000101010101" pitchFamily="50" charset="-127"/>
                           <a:cs typeface="+mn-cs"/>
                         </a:rPr>
-                        <a:t>35,602</a:t>
+                        <a:t>35,612</a:t>
                       </a:r>
                     </a:p>
                   </a:txBody>
@@ -14900,7 +14900,7 @@
                           <a:ea typeface="대명체 보통" panose="020B0600000101010101" pitchFamily="50" charset="-127"/>
                           <a:cs typeface="+mn-cs"/>
                         </a:rPr>
-                        <a:t>61,976</a:t>
+                        <a:t>61,979</a:t>
                       </a:r>
                     </a:p>
                   </a:txBody>
@@ -15018,7 +15018,7 @@
                           <a:ea typeface="대명체 보통" panose="020B0600000101010101" pitchFamily="50" charset="-127"/>
                           <a:cs typeface="+mn-cs"/>
                         </a:rPr>
-                        <a:t>13,631</a:t>
+                        <a:t>13,634</a:t>
                       </a:r>
                     </a:p>
                   </a:txBody>
@@ -15262,7 +15262,7 @@
                           <a:ea typeface="대명체 보통" panose="020B0600000101010101" pitchFamily="50" charset="-127"/>
                           <a:cs typeface="+mn-cs"/>
                         </a:rPr>
-                        <a:t>21,927</a:t>
+                        <a:t>21,930</a:t>
                       </a:r>
                     </a:p>
                   </a:txBody>
@@ -16266,7 +16266,7 @@
                           <a:ea typeface="대명체 보통" panose="020B0600000101010101" pitchFamily="50" charset="-127"/>
                           <a:cs typeface="+mn-cs"/>
                         </a:rPr>
-                        <a:t>38,825</a:t>
+                        <a:t>38,826</a:t>
                       </a:r>
                     </a:p>
                   </a:txBody>
@@ -16376,7 +16376,7 @@
                           <a:ea typeface="대명체 보통" panose="020B0600000101010101" pitchFamily="50" charset="-127"/>
                           <a:cs typeface="+mn-cs"/>
                         </a:rPr>
-                        <a:t>7,585</a:t>
+                        <a:t>7,586</a:t>
                       </a:r>
                     </a:p>
                   </a:txBody>
@@ -16604,7 +16604,7 @@
                           <a:ea typeface="대명체 보통" panose="020B0600000101010101" pitchFamily="50" charset="-127"/>
                           <a:cs typeface="+mn-cs"/>
                         </a:rPr>
-                        <a:t>11,304</a:t>
+                        <a:t>11,305</a:t>
                       </a:r>
                     </a:p>
                   </a:txBody>
@@ -17680,7 +17680,7 @@
                           <a:ea typeface="대명체 보통" panose="020B0600000101010101" pitchFamily="50" charset="-127"/>
                           <a:cs typeface="+mn-cs"/>
                         </a:rPr>
-                        <a:t>7,223</a:t>
+                        <a:t>7,229</a:t>
                       </a:r>
                     </a:p>
                   </a:txBody>
@@ -17798,7 +17798,7 @@
                           <a:ea typeface="대명체 보통" panose="020B0600000101010101" pitchFamily="50" charset="-127"/>
                           <a:cs typeface="+mn-cs"/>
                         </a:rPr>
-                        <a:t>1,541</a:t>
+                        <a:t>1,547</a:t>
                       </a:r>
                       <a:endParaRPr lang="en-US" altLang="ko-KR" sz="700" b="0" i="0" u="none" strike="noStrike" kern="1200" dirty="0">
                         <a:solidFill>
@@ -18051,7 +18051,7 @@
                           <a:ea typeface="대명체 보통" panose="020B0600000101010101" pitchFamily="50" charset="-127"/>
                           <a:cs typeface="+mn-cs"/>
                         </a:rPr>
-                        <a:t>2,371</a:t>
+                        <a:t>2,377</a:t>
                       </a:r>
                     </a:p>
                   </a:txBody>

--- a/data/세일즈마케팅_예상매출현황.pptx
+++ b/data/세일즈마케팅_예상매출현황.pptx
@@ -12756,7 +12756,7 @@
                           <a:ea typeface="대명체 보통" panose="020B0600000101010101" pitchFamily="50" charset="-127"/>
                           <a:cs typeface="+mn-cs"/>
                         </a:rPr>
-                        <a:t>16,217</a:t>
+                        <a:t>16,249</a:t>
                       </a:r>
                     </a:p>
                   </a:txBody>
@@ -12882,7 +12882,7 @@
                           <a:ea typeface="대명체 보통" panose="020B0600000101010101" pitchFamily="50" charset="-127"/>
                           <a:cs typeface="+mn-cs"/>
                         </a:rPr>
-                        <a:t>1,398</a:t>
+                        <a:t>1,430</a:t>
                       </a:r>
                     </a:p>
                   </a:txBody>
@@ -12949,7 +12949,7 @@
                           <a:ea typeface="대명체 보통" panose="020B0600000101010101" pitchFamily="50" charset="-127"/>
                           <a:cs typeface="+mn-cs"/>
                         </a:rPr>
-                        <a:t>109%</a:t>
+                        <a:t>110%</a:t>
                       </a:r>
                     </a:p>
                   </a:txBody>
@@ -13142,7 +13142,7 @@
                           <a:ea typeface="대명체 보통" panose="020B0600000101010101" pitchFamily="50" charset="-127"/>
                           <a:cs typeface="+mn-cs"/>
                         </a:rPr>
-                        <a:t>3,196</a:t>
+                        <a:t>3,228</a:t>
                       </a:r>
                     </a:p>
                   </a:txBody>
@@ -13450,7 +13450,7 @@
                           <a:ea typeface="대명체 보통" panose="020B0600000101010101" pitchFamily="50" charset="-127"/>
                           <a:cs typeface="+mn-cs"/>
                         </a:rPr>
-                        <a:t>108,034</a:t>
+                        <a:t>108,110</a:t>
                       </a:r>
                     </a:p>
                   </a:txBody>
@@ -13576,7 +13576,7 @@
                           <a:ea typeface="대명체 보통" panose="020B0600000101010101" pitchFamily="50" charset="-127"/>
                           <a:cs typeface="+mn-cs"/>
                         </a:rPr>
-                        <a:t>22,767</a:t>
+                        <a:t>22,843</a:t>
                       </a:r>
                     </a:p>
                   </a:txBody>
@@ -13836,7 +13836,7 @@
                           <a:ea typeface="대명체 보통" panose="020B0600000101010101" pitchFamily="50" charset="-127"/>
                           <a:cs typeface="+mn-cs"/>
                         </a:rPr>
-                        <a:t>35,612</a:t>
+                        <a:t>35,688</a:t>
                       </a:r>
                     </a:p>
                   </a:txBody>
@@ -14237,7 +14237,7 @@
                           <a:ea typeface="대명체 보통" panose="020B0600000101010101" pitchFamily="50" charset="-127"/>
                           <a:cs typeface="+mn-cs"/>
                         </a:rPr>
-                        <a:t>9,353</a:t>
+                        <a:t>9,370</a:t>
                       </a:r>
                     </a:p>
                   </a:txBody>
@@ -14355,7 +14355,7 @@
                           <a:ea typeface="대명체 보통" panose="020B0600000101010101" pitchFamily="50" charset="-127"/>
                           <a:cs typeface="+mn-cs"/>
                         </a:rPr>
-                        <a:t>539</a:t>
+                        <a:t>556</a:t>
                       </a:r>
                       <a:endParaRPr lang="en-US" altLang="ko-KR" sz="700" b="0" i="0" u="none" strike="noStrike" kern="1200" dirty="0">
                         <a:solidFill>
@@ -14608,7 +14608,7 @@
                           <a:ea typeface="대명체 보통" panose="020B0600000101010101" pitchFamily="50" charset="-127"/>
                           <a:cs typeface="+mn-cs"/>
                         </a:rPr>
-                        <a:t>1,745</a:t>
+                        <a:t>1,762</a:t>
                       </a:r>
                     </a:p>
                   </a:txBody>
@@ -14900,7 +14900,7 @@
                           <a:ea typeface="대명체 보통" panose="020B0600000101010101" pitchFamily="50" charset="-127"/>
                           <a:cs typeface="+mn-cs"/>
                         </a:rPr>
-                        <a:t>61,979</a:t>
+                        <a:t>62,049</a:t>
                       </a:r>
                     </a:p>
                   </a:txBody>
@@ -15018,7 +15018,7 @@
                           <a:ea typeface="대명체 보통" panose="020B0600000101010101" pitchFamily="50" charset="-127"/>
                           <a:cs typeface="+mn-cs"/>
                         </a:rPr>
-                        <a:t>13,634</a:t>
+                        <a:t>13,704</a:t>
                       </a:r>
                     </a:p>
                   </a:txBody>
@@ -15262,7 +15262,7 @@
                           <a:ea typeface="대명체 보통" panose="020B0600000101010101" pitchFamily="50" charset="-127"/>
                           <a:cs typeface="+mn-cs"/>
                         </a:rPr>
-                        <a:t>21,930</a:t>
+                        <a:t>22,000</a:t>
                       </a:r>
                     </a:p>
                   </a:txBody>
@@ -15643,7 +15643,7 @@
                           <a:ea typeface="대명체 보통" panose="020B0600000101010101" pitchFamily="50" charset="-127"/>
                           <a:cs typeface="+mn-cs"/>
                         </a:rPr>
-                        <a:t>6,267</a:t>
+                        <a:t>6,269</a:t>
                       </a:r>
                     </a:p>
                   </a:txBody>
@@ -15753,7 +15753,7 @@
                           <a:ea typeface="대명체 보통" panose="020B0600000101010101" pitchFamily="50" charset="-127"/>
                           <a:cs typeface="+mn-cs"/>
                         </a:rPr>
-                        <a:t>768</a:t>
+                        <a:t>770</a:t>
                       </a:r>
                       <a:endParaRPr lang="en-US" altLang="ko-KR" sz="700" b="0" i="0" u="none" strike="noStrike" kern="1200" dirty="0">
                         <a:solidFill>
@@ -15990,7 +15990,7 @@
                           <a:ea typeface="대명체 보통" panose="020B0600000101010101" pitchFamily="50" charset="-127"/>
                           <a:cs typeface="+mn-cs"/>
                         </a:rPr>
-                        <a:t>1,448</a:t>
+                        <a:t>1,450</a:t>
                       </a:r>
                     </a:p>
                   </a:txBody>
@@ -16266,7 +16266,7 @@
                           <a:ea typeface="대명체 보통" panose="020B0600000101010101" pitchFamily="50" charset="-127"/>
                           <a:cs typeface="+mn-cs"/>
                         </a:rPr>
-                        <a:t>38,826</a:t>
+                        <a:t>38,832</a:t>
                       </a:r>
                     </a:p>
                   </a:txBody>
@@ -16376,7 +16376,7 @@
                           <a:ea typeface="대명체 보통" panose="020B0600000101010101" pitchFamily="50" charset="-127"/>
                           <a:cs typeface="+mn-cs"/>
                         </a:rPr>
-                        <a:t>7,586</a:t>
+                        <a:t>7,592</a:t>
                       </a:r>
                     </a:p>
                   </a:txBody>
@@ -16604,7 +16604,7 @@
                           <a:ea typeface="대명체 보통" panose="020B0600000101010101" pitchFamily="50" charset="-127"/>
                           <a:cs typeface="+mn-cs"/>
                         </a:rPr>
-                        <a:t>11,305</a:t>
+                        <a:t>11,311</a:t>
                       </a:r>
                     </a:p>
                   </a:txBody>
@@ -16999,7 +16999,7 @@
                           <a:ea typeface="대명체 보통" panose="020B0600000101010101" pitchFamily="50" charset="-127"/>
                           <a:cs typeface="+mn-cs"/>
                         </a:rPr>
-                        <a:t>596</a:t>
+                        <a:t>609</a:t>
                       </a:r>
                       <a:endParaRPr lang="en-US" altLang="ko-KR" sz="700" b="0" i="0" u="none" strike="noStrike" kern="1200" dirty="0">
                         <a:solidFill>
@@ -17126,7 +17126,7 @@
                           <a:ea typeface="대명체 보통" panose="020B0600000101010101" pitchFamily="50" charset="-127"/>
                           <a:cs typeface="+mn-cs"/>
                         </a:rPr>
-                        <a:t>91</a:t>
+                        <a:t>104</a:t>
                       </a:r>
                       <a:endParaRPr lang="en-US" altLang="ko-KR" sz="700" b="0" i="0" u="none" strike="noStrike" kern="1200" dirty="0">
                         <a:solidFill>
@@ -17198,7 +17198,7 @@
                           <a:ea typeface="대명체 보통" panose="020B0600000101010101" pitchFamily="50" charset="-127"/>
                           <a:cs typeface="+mn-cs"/>
                         </a:rPr>
-                        <a:t>118%</a:t>
+                        <a:t>121%</a:t>
                       </a:r>
                     </a:p>
                   </a:txBody>
@@ -17388,7 +17388,7 @@
                           <a:ea typeface="대명체 보통" panose="020B0600000101010101" pitchFamily="50" charset="-127"/>
                           <a:cs typeface="+mn-cs"/>
                         </a:rPr>
-                        <a:t>2</a:t>
+                        <a:t>15</a:t>
                       </a:r>
                     </a:p>
                   </a:txBody>
@@ -17451,7 +17451,7 @@
                           <a:ea typeface="대명체 보통" panose="020B0600000101010101" pitchFamily="50" charset="-127"/>
                           <a:cs typeface="+mn-cs"/>
                         </a:rPr>
-                        <a:t>0%</a:t>
+                        <a:t>3%</a:t>
                       </a:r>
                     </a:p>
                   </a:txBody>

--- a/data/세일즈마케팅_예상매출현황.pptx
+++ b/data/세일즈마케팅_예상매출현황.pptx
@@ -13450,7 +13450,7 @@
                           <a:ea typeface="대명체 보통" panose="020B0600000101010101" pitchFamily="50" charset="-127"/>
                           <a:cs typeface="+mn-cs"/>
                         </a:rPr>
-                        <a:t>108,110</a:t>
+                        <a:t>103,092</a:t>
                       </a:r>
                     </a:p>
                   </a:txBody>
@@ -13576,7 +13576,7 @@
                           <a:ea typeface="대명체 보통" panose="020B0600000101010101" pitchFamily="50" charset="-127"/>
                           <a:cs typeface="+mn-cs"/>
                         </a:rPr>
-                        <a:t>22,843</a:t>
+                        <a:t>17,825</a:t>
                       </a:r>
                     </a:p>
                   </a:txBody>
@@ -13643,7 +13643,7 @@
                           <a:ea typeface="대명체 보통" panose="020B0600000101010101" pitchFamily="50" charset="-127"/>
                           <a:cs typeface="+mn-cs"/>
                         </a:rPr>
-                        <a:t>127%</a:t>
+                        <a:t>121%</a:t>
                       </a:r>
                     </a:p>
                   </a:txBody>
@@ -13836,7 +13836,7 @@
                           <a:ea typeface="대명체 보통" panose="020B0600000101010101" pitchFamily="50" charset="-127"/>
                           <a:cs typeface="+mn-cs"/>
                         </a:rPr>
-                        <a:t>35,688</a:t>
+                        <a:t>30,670</a:t>
                       </a:r>
                     </a:p>
                   </a:txBody>
@@ -13903,7 +13903,7 @@
                           <a:ea typeface="대명체 보통" panose="020B0600000101010101" pitchFamily="50" charset="-127"/>
                           <a:cs typeface="+mn-cs"/>
                         </a:rPr>
-                        <a:t>49%</a:t>
+                        <a:t>42%</a:t>
                       </a:r>
                     </a:p>
                   </a:txBody>
@@ -14900,7 +14900,7 @@
                           <a:ea typeface="대명체 보통" panose="020B0600000101010101" pitchFamily="50" charset="-127"/>
                           <a:cs typeface="+mn-cs"/>
                         </a:rPr>
-                        <a:t>62,049</a:t>
+                        <a:t>58,939</a:t>
                       </a:r>
                     </a:p>
                   </a:txBody>
@@ -15018,7 +15018,7 @@
                           <a:ea typeface="대명체 보통" panose="020B0600000101010101" pitchFamily="50" charset="-127"/>
                           <a:cs typeface="+mn-cs"/>
                         </a:rPr>
-                        <a:t>13,704</a:t>
+                        <a:t>10,594</a:t>
                       </a:r>
                     </a:p>
                   </a:txBody>
@@ -15081,7 +15081,7 @@
                           <a:ea typeface="대명체 보통" panose="020B0600000101010101" pitchFamily="50" charset="-127"/>
                           <a:cs typeface="+mn-cs"/>
                         </a:rPr>
-                        <a:t>128%</a:t>
+                        <a:t>122%</a:t>
                       </a:r>
                     </a:p>
                   </a:txBody>
@@ -15262,7 +15262,7 @@
                           <a:ea typeface="대명체 보통" panose="020B0600000101010101" pitchFamily="50" charset="-127"/>
                           <a:cs typeface="+mn-cs"/>
                         </a:rPr>
-                        <a:t>22,000</a:t>
+                        <a:t>18,890</a:t>
                       </a:r>
                     </a:p>
                   </a:txBody>
@@ -15325,7 +15325,7 @@
                           <a:ea typeface="대명체 보통" panose="020B0600000101010101" pitchFamily="50" charset="-127"/>
                           <a:cs typeface="+mn-cs"/>
                         </a:rPr>
-                        <a:t>55%</a:t>
+                        <a:t>47%</a:t>
                       </a:r>
                     </a:p>
                   </a:txBody>
@@ -16266,7 +16266,7 @@
                           <a:ea typeface="대명체 보통" panose="020B0600000101010101" pitchFamily="50" charset="-127"/>
                           <a:cs typeface="+mn-cs"/>
                         </a:rPr>
-                        <a:t>38,832</a:t>
+                        <a:t>37,727</a:t>
                       </a:r>
                     </a:p>
                   </a:txBody>
@@ -16376,7 +16376,7 @@
                           <a:ea typeface="대명체 보통" panose="020B0600000101010101" pitchFamily="50" charset="-127"/>
                           <a:cs typeface="+mn-cs"/>
                         </a:rPr>
-                        <a:t>7,592</a:t>
+                        <a:t>6,487</a:t>
                       </a:r>
                     </a:p>
                   </a:txBody>
@@ -16435,7 +16435,7 @@
                           <a:ea typeface="대명체 보통" panose="020B0600000101010101" pitchFamily="50" charset="-127"/>
                           <a:cs typeface="+mn-cs"/>
                         </a:rPr>
-                        <a:t>124%</a:t>
+                        <a:t>121%</a:t>
                       </a:r>
                     </a:p>
                   </a:txBody>
@@ -16604,7 +16604,7 @@
                           <a:ea typeface="대명체 보통" panose="020B0600000101010101" pitchFamily="50" charset="-127"/>
                           <a:cs typeface="+mn-cs"/>
                         </a:rPr>
-                        <a:t>11,311</a:t>
+                        <a:t>10,206</a:t>
                       </a:r>
                     </a:p>
                   </a:txBody>
@@ -16663,7 +16663,7 @@
                           <a:ea typeface="대명체 보통" panose="020B0600000101010101" pitchFamily="50" charset="-127"/>
                           <a:cs typeface="+mn-cs"/>
                         </a:rPr>
-                        <a:t>41%</a:t>
+                        <a:t>37%</a:t>
                       </a:r>
                     </a:p>
                   </a:txBody>
@@ -17680,7 +17680,7 @@
                           <a:ea typeface="대명체 보통" panose="020B0600000101010101" pitchFamily="50" charset="-127"/>
                           <a:cs typeface="+mn-cs"/>
                         </a:rPr>
-                        <a:t>7,229</a:t>
+                        <a:t>6,426</a:t>
                       </a:r>
                     </a:p>
                   </a:txBody>
@@ -17798,7 +17798,7 @@
                           <a:ea typeface="대명체 보통" panose="020B0600000101010101" pitchFamily="50" charset="-127"/>
                           <a:cs typeface="+mn-cs"/>
                         </a:rPr>
-                        <a:t>1,547</a:t>
+                        <a:t>744</a:t>
                       </a:r>
                       <a:endParaRPr lang="en-US" altLang="ko-KR" sz="700" b="0" i="0" u="none" strike="noStrike" kern="1200" dirty="0">
                         <a:solidFill>
@@ -17870,7 +17870,7 @@
                           <a:ea typeface="대명체 보통" panose="020B0600000101010101" pitchFamily="50" charset="-127"/>
                           <a:cs typeface="+mn-cs"/>
                         </a:rPr>
-                        <a:t>127%</a:t>
+                        <a:t>113%</a:t>
                       </a:r>
                     </a:p>
                   </a:txBody>
@@ -18051,7 +18051,7 @@
                           <a:ea typeface="대명체 보통" panose="020B0600000101010101" pitchFamily="50" charset="-127"/>
                           <a:cs typeface="+mn-cs"/>
                         </a:rPr>
-                        <a:t>2,377</a:t>
+                        <a:t>1,574</a:t>
                       </a:r>
                     </a:p>
                   </a:txBody>
@@ -18114,7 +18114,7 @@
                           <a:ea typeface="대명체 보통" panose="020B0600000101010101" pitchFamily="50" charset="-127"/>
                           <a:cs typeface="+mn-cs"/>
                         </a:rPr>
-                        <a:t>49%</a:t>
+                        <a:t>32%</a:t>
                       </a:r>
                     </a:p>
                   </a:txBody>

--- a/data/세일즈마케팅_예상매출현황.pptx
+++ b/data/세일즈마케팅_예상매출현황.pptx
@@ -13450,7 +13450,7 @@
                           <a:ea typeface="대명체 보통" panose="020B0600000101010101" pitchFamily="50" charset="-127"/>
                           <a:cs typeface="+mn-cs"/>
                         </a:rPr>
-                        <a:t>103,092</a:t>
+                        <a:t>108,110</a:t>
                       </a:r>
                     </a:p>
                   </a:txBody>
@@ -13576,7 +13576,7 @@
                           <a:ea typeface="대명체 보통" panose="020B0600000101010101" pitchFamily="50" charset="-127"/>
                           <a:cs typeface="+mn-cs"/>
                         </a:rPr>
-                        <a:t>17,825</a:t>
+                        <a:t>22,843</a:t>
                       </a:r>
                     </a:p>
                   </a:txBody>
@@ -13643,7 +13643,7 @@
                           <a:ea typeface="대명체 보통" panose="020B0600000101010101" pitchFamily="50" charset="-127"/>
                           <a:cs typeface="+mn-cs"/>
                         </a:rPr>
-                        <a:t>121%</a:t>
+                        <a:t>127%</a:t>
                       </a:r>
                     </a:p>
                   </a:txBody>
@@ -13836,7 +13836,7 @@
                           <a:ea typeface="대명체 보통" panose="020B0600000101010101" pitchFamily="50" charset="-127"/>
                           <a:cs typeface="+mn-cs"/>
                         </a:rPr>
-                        <a:t>30,670</a:t>
+                        <a:t>35,688</a:t>
                       </a:r>
                     </a:p>
                   </a:txBody>
@@ -13903,7 +13903,7 @@
                           <a:ea typeface="대명체 보통" panose="020B0600000101010101" pitchFamily="50" charset="-127"/>
                           <a:cs typeface="+mn-cs"/>
                         </a:rPr>
-                        <a:t>42%</a:t>
+                        <a:t>49%</a:t>
                       </a:r>
                     </a:p>
                   </a:txBody>
@@ -14900,7 +14900,7 @@
                           <a:ea typeface="대명체 보통" panose="020B0600000101010101" pitchFamily="50" charset="-127"/>
                           <a:cs typeface="+mn-cs"/>
                         </a:rPr>
-                        <a:t>58,939</a:t>
+                        <a:t>62,049</a:t>
                       </a:r>
                     </a:p>
                   </a:txBody>
@@ -15018,7 +15018,7 @@
                           <a:ea typeface="대명체 보통" panose="020B0600000101010101" pitchFamily="50" charset="-127"/>
                           <a:cs typeface="+mn-cs"/>
                         </a:rPr>
-                        <a:t>10,594</a:t>
+                        <a:t>13,704</a:t>
                       </a:r>
                     </a:p>
                   </a:txBody>
@@ -15081,7 +15081,7 @@
                           <a:ea typeface="대명체 보통" panose="020B0600000101010101" pitchFamily="50" charset="-127"/>
                           <a:cs typeface="+mn-cs"/>
                         </a:rPr>
-                        <a:t>122%</a:t>
+                        <a:t>128%</a:t>
                       </a:r>
                     </a:p>
                   </a:txBody>
@@ -15262,7 +15262,7 @@
                           <a:ea typeface="대명체 보통" panose="020B0600000101010101" pitchFamily="50" charset="-127"/>
                           <a:cs typeface="+mn-cs"/>
                         </a:rPr>
-                        <a:t>18,890</a:t>
+                        <a:t>22,000</a:t>
                       </a:r>
                     </a:p>
                   </a:txBody>
@@ -15325,7 +15325,7 @@
                           <a:ea typeface="대명체 보통" panose="020B0600000101010101" pitchFamily="50" charset="-127"/>
                           <a:cs typeface="+mn-cs"/>
                         </a:rPr>
-                        <a:t>47%</a:t>
+                        <a:t>55%</a:t>
                       </a:r>
                     </a:p>
                   </a:txBody>
@@ -16266,7 +16266,7 @@
                           <a:ea typeface="대명체 보통" panose="020B0600000101010101" pitchFamily="50" charset="-127"/>
                           <a:cs typeface="+mn-cs"/>
                         </a:rPr>
-                        <a:t>37,727</a:t>
+                        <a:t>38,832</a:t>
                       </a:r>
                     </a:p>
                   </a:txBody>
@@ -16376,7 +16376,7 @@
                           <a:ea typeface="대명체 보통" panose="020B0600000101010101" pitchFamily="50" charset="-127"/>
                           <a:cs typeface="+mn-cs"/>
                         </a:rPr>
-                        <a:t>6,487</a:t>
+                        <a:t>7,592</a:t>
                       </a:r>
                     </a:p>
                   </a:txBody>
@@ -16435,7 +16435,7 @@
                           <a:ea typeface="대명체 보통" panose="020B0600000101010101" pitchFamily="50" charset="-127"/>
                           <a:cs typeface="+mn-cs"/>
                         </a:rPr>
-                        <a:t>121%</a:t>
+                        <a:t>124%</a:t>
                       </a:r>
                     </a:p>
                   </a:txBody>
@@ -16604,7 +16604,7 @@
                           <a:ea typeface="대명체 보통" panose="020B0600000101010101" pitchFamily="50" charset="-127"/>
                           <a:cs typeface="+mn-cs"/>
                         </a:rPr>
-                        <a:t>10,206</a:t>
+                        <a:t>11,311</a:t>
                       </a:r>
                     </a:p>
                   </a:txBody>
@@ -16663,7 +16663,7 @@
                           <a:ea typeface="대명체 보통" panose="020B0600000101010101" pitchFamily="50" charset="-127"/>
                           <a:cs typeface="+mn-cs"/>
                         </a:rPr>
-                        <a:t>37%</a:t>
+                        <a:t>41%</a:t>
                       </a:r>
                     </a:p>
                   </a:txBody>
@@ -17680,7 +17680,7 @@
                           <a:ea typeface="대명체 보통" panose="020B0600000101010101" pitchFamily="50" charset="-127"/>
                           <a:cs typeface="+mn-cs"/>
                         </a:rPr>
-                        <a:t>6,426</a:t>
+                        <a:t>7,229</a:t>
                       </a:r>
                     </a:p>
                   </a:txBody>
@@ -17798,7 +17798,7 @@
                           <a:ea typeface="대명체 보통" panose="020B0600000101010101" pitchFamily="50" charset="-127"/>
                           <a:cs typeface="+mn-cs"/>
                         </a:rPr>
-                        <a:t>744</a:t>
+                        <a:t>1,547</a:t>
                       </a:r>
                       <a:endParaRPr lang="en-US" altLang="ko-KR" sz="700" b="0" i="0" u="none" strike="noStrike" kern="1200" dirty="0">
                         <a:solidFill>
@@ -17870,7 +17870,7 @@
                           <a:ea typeface="대명체 보통" panose="020B0600000101010101" pitchFamily="50" charset="-127"/>
                           <a:cs typeface="+mn-cs"/>
                         </a:rPr>
-                        <a:t>113%</a:t>
+                        <a:t>127%</a:t>
                       </a:r>
                     </a:p>
                   </a:txBody>
@@ -18051,7 +18051,7 @@
                           <a:ea typeface="대명체 보통" panose="020B0600000101010101" pitchFamily="50" charset="-127"/>
                           <a:cs typeface="+mn-cs"/>
                         </a:rPr>
-                        <a:t>1,574</a:t>
+                        <a:t>2,377</a:t>
                       </a:r>
                     </a:p>
                   </a:txBody>
@@ -18114,7 +18114,7 @@
                           <a:ea typeface="대명체 보통" panose="020B0600000101010101" pitchFamily="50" charset="-127"/>
                           <a:cs typeface="+mn-cs"/>
                         </a:rPr>
-                        <a:t>32%</a:t>
+                        <a:t>49%</a:t>
                       </a:r>
                     </a:p>
                   </a:txBody>

--- a/data/세일즈마케팅_예상매출현황.pptx
+++ b/data/세일즈마케팅_예상매출현황.pptx
@@ -13450,7 +13450,7 @@
                           <a:ea typeface="대명체 보통" panose="020B0600000101010101" pitchFamily="50" charset="-127"/>
                           <a:cs typeface="+mn-cs"/>
                         </a:rPr>
-                        <a:t>108,110</a:t>
+                        <a:t>108,124</a:t>
                       </a:r>
                     </a:p>
                   </a:txBody>
@@ -13576,7 +13576,7 @@
                           <a:ea typeface="대명체 보통" panose="020B0600000101010101" pitchFamily="50" charset="-127"/>
                           <a:cs typeface="+mn-cs"/>
                         </a:rPr>
-                        <a:t>22,843</a:t>
+                        <a:t>22,857</a:t>
                       </a:r>
                     </a:p>
                   </a:txBody>
@@ -13836,7 +13836,7 @@
                           <a:ea typeface="대명체 보통" panose="020B0600000101010101" pitchFamily="50" charset="-127"/>
                           <a:cs typeface="+mn-cs"/>
                         </a:rPr>
-                        <a:t>35,688</a:t>
+                        <a:t>35,702</a:t>
                       </a:r>
                     </a:p>
                   </a:txBody>
@@ -14900,7 +14900,7 @@
                           <a:ea typeface="대명체 보통" panose="020B0600000101010101" pitchFamily="50" charset="-127"/>
                           <a:cs typeface="+mn-cs"/>
                         </a:rPr>
-                        <a:t>62,049</a:t>
+                        <a:t>62,065</a:t>
                       </a:r>
                     </a:p>
                   </a:txBody>
@@ -15018,7 +15018,7 @@
                           <a:ea typeface="대명체 보통" panose="020B0600000101010101" pitchFamily="50" charset="-127"/>
                           <a:cs typeface="+mn-cs"/>
                         </a:rPr>
-                        <a:t>13,704</a:t>
+                        <a:t>13,720</a:t>
                       </a:r>
                     </a:p>
                   </a:txBody>
@@ -15262,7 +15262,7 @@
                           <a:ea typeface="대명체 보통" panose="020B0600000101010101" pitchFamily="50" charset="-127"/>
                           <a:cs typeface="+mn-cs"/>
                         </a:rPr>
-                        <a:t>22,000</a:t>
+                        <a:t>22,016</a:t>
                       </a:r>
                     </a:p>
                   </a:txBody>
@@ -17680,7 +17680,7 @@
                           <a:ea typeface="대명체 보통" panose="020B0600000101010101" pitchFamily="50" charset="-127"/>
                           <a:cs typeface="+mn-cs"/>
                         </a:rPr>
-                        <a:t>7,229</a:t>
+                        <a:t>7,227</a:t>
                       </a:r>
                     </a:p>
                   </a:txBody>
@@ -17798,7 +17798,7 @@
                           <a:ea typeface="대명체 보통" panose="020B0600000101010101" pitchFamily="50" charset="-127"/>
                           <a:cs typeface="+mn-cs"/>
                         </a:rPr>
-                        <a:t>1,547</a:t>
+                        <a:t>1,545</a:t>
                       </a:r>
                       <a:endParaRPr lang="en-US" altLang="ko-KR" sz="700" b="0" i="0" u="none" strike="noStrike" kern="1200" dirty="0">
                         <a:solidFill>
@@ -18051,7 +18051,7 @@
                           <a:ea typeface="대명체 보통" panose="020B0600000101010101" pitchFamily="50" charset="-127"/>
                           <a:cs typeface="+mn-cs"/>
                         </a:rPr>
-                        <a:t>2,377</a:t>
+                        <a:t>2,375</a:t>
                       </a:r>
                     </a:p>
                   </a:txBody>

--- a/data/세일즈마케팅_예상매출현황.pptx
+++ b/data/세일즈마케팅_예상매출현황.pptx
@@ -12756,7 +12756,7 @@
                           <a:ea typeface="대명체 보통" panose="020B0600000101010101" pitchFamily="50" charset="-127"/>
                           <a:cs typeface="+mn-cs"/>
                         </a:rPr>
-                        <a:t>16,249</a:t>
+                        <a:t>16,302</a:t>
                       </a:r>
                     </a:p>
                   </a:txBody>
@@ -12882,7 +12882,7 @@
                           <a:ea typeface="대명체 보통" panose="020B0600000101010101" pitchFamily="50" charset="-127"/>
                           <a:cs typeface="+mn-cs"/>
                         </a:rPr>
-                        <a:t>1,430</a:t>
+                        <a:t>1,483</a:t>
                       </a:r>
                     </a:p>
                   </a:txBody>
@@ -13142,7 +13142,7 @@
                           <a:ea typeface="대명체 보통" panose="020B0600000101010101" pitchFamily="50" charset="-127"/>
                           <a:cs typeface="+mn-cs"/>
                         </a:rPr>
-                        <a:t>3,228</a:t>
+                        <a:t>3,281</a:t>
                       </a:r>
                     </a:p>
                   </a:txBody>
@@ -13450,7 +13450,7 @@
                           <a:ea typeface="대명체 보통" panose="020B0600000101010101" pitchFamily="50" charset="-127"/>
                           <a:cs typeface="+mn-cs"/>
                         </a:rPr>
-                        <a:t>108,124</a:t>
+                        <a:t>108,178</a:t>
                       </a:r>
                     </a:p>
                   </a:txBody>
@@ -13576,7 +13576,7 @@
                           <a:ea typeface="대명체 보통" panose="020B0600000101010101" pitchFamily="50" charset="-127"/>
                           <a:cs typeface="+mn-cs"/>
                         </a:rPr>
-                        <a:t>22,857</a:t>
+                        <a:t>22,911</a:t>
                       </a:r>
                     </a:p>
                   </a:txBody>
@@ -13836,7 +13836,7 @@
                           <a:ea typeface="대명체 보통" panose="020B0600000101010101" pitchFamily="50" charset="-127"/>
                           <a:cs typeface="+mn-cs"/>
                         </a:rPr>
-                        <a:t>35,702</a:t>
+                        <a:t>35,756</a:t>
                       </a:r>
                     </a:p>
                   </a:txBody>
@@ -14237,7 +14237,7 @@
                           <a:ea typeface="대명체 보통" panose="020B0600000101010101" pitchFamily="50" charset="-127"/>
                           <a:cs typeface="+mn-cs"/>
                         </a:rPr>
-                        <a:t>9,370</a:t>
+                        <a:t>9,403</a:t>
                       </a:r>
                     </a:p>
                   </a:txBody>
@@ -14355,7 +14355,7 @@
                           <a:ea typeface="대명체 보통" panose="020B0600000101010101" pitchFamily="50" charset="-127"/>
                           <a:cs typeface="+mn-cs"/>
                         </a:rPr>
-                        <a:t>556</a:t>
+                        <a:t>589</a:t>
                       </a:r>
                       <a:endParaRPr lang="en-US" altLang="ko-KR" sz="700" b="0" i="0" u="none" strike="noStrike" kern="1200" dirty="0">
                         <a:solidFill>
@@ -14427,7 +14427,7 @@
                           <a:ea typeface="대명체 보통" panose="020B0600000101010101" pitchFamily="50" charset="-127"/>
                           <a:cs typeface="+mn-cs"/>
                         </a:rPr>
-                        <a:t>106%</a:t>
+                        <a:t>107%</a:t>
                       </a:r>
                     </a:p>
                   </a:txBody>
@@ -14608,7 +14608,7 @@
                           <a:ea typeface="대명체 보통" panose="020B0600000101010101" pitchFamily="50" charset="-127"/>
                           <a:cs typeface="+mn-cs"/>
                         </a:rPr>
-                        <a:t>1,762</a:t>
+                        <a:t>1,795</a:t>
                       </a:r>
                     </a:p>
                   </a:txBody>
@@ -14630,6 +14630,294 @@
                           <a:lumMod val="75000"/>
                         </a:schemeClr>
                       </a:solidFill>
+                      <a:prstDash val="solid"/>
+                      <a:round/>
+                      <a:headEnd type="none" w="med" len="med"/>
+                      <a:tailEnd type="none" w="med" len="med"/>
+                    </a:lnR>
+                    <a:lnT w="6350" cap="flat" cmpd="sng" algn="ctr">
+                      <a:solidFill>
+                        <a:schemeClr val="bg2">
+                          <a:lumMod val="75000"/>
+                        </a:schemeClr>
+                      </a:solidFill>
+                      <a:prstDash val="solid"/>
+                      <a:round/>
+                      <a:headEnd type="none" w="med" len="med"/>
+                      <a:tailEnd type="none" w="med" len="med"/>
+                    </a:lnT>
+                    <a:lnB w="6350" cap="flat" cmpd="sng" algn="ctr">
+                      <a:noFill/>
+                      <a:prstDash val="solid"/>
+                      <a:round/>
+                      <a:headEnd type="none" w="med" len="med"/>
+                      <a:tailEnd type="none" w="med" len="med"/>
+                    </a:lnB>
+                  </a:tcPr>
+                </a:tc>
+                <a:tc>
+                  <a:txBody>
+                    <a:bodyPr/>
+                    <a:lstStyle/>
+                    <a:p>
+                      <a:pPr algn="r" rtl="0" fontAlgn="ctr"/>
+                      <a:r>
+                        <a:rPr lang="en-US" altLang="ko-KR" sz="700" b="0" i="0" u="none" strike="noStrike" kern="1200">
+                          <a:solidFill>
+                            <a:srgbClr val="000000"/>
+                          </a:solidFill>
+                          <a:effectLst/>
+                          <a:latin typeface="대명체 보통" panose="020B0600000101010101" pitchFamily="50" charset="-127"/>
+                          <a:ea typeface="대명체 보통" panose="020B0600000101010101" pitchFamily="50" charset="-127"/>
+                          <a:cs typeface="+mn-cs"/>
+                        </a:rPr>
+                        <a:t>24%</a:t>
+                      </a:r>
+                    </a:p>
+                  </a:txBody>
+                  <a:tcPr marL="9525" marR="9525" marT="9525" marB="0" anchor="ctr">
+                    <a:lnL w="6350" cap="flat" cmpd="sng" algn="ctr">
+                      <a:solidFill>
+                        <a:schemeClr val="bg2">
+                          <a:lumMod val="75000"/>
+                        </a:schemeClr>
+                      </a:solidFill>
+                      <a:prstDash val="solid"/>
+                      <a:round/>
+                      <a:headEnd type="none" w="med" len="med"/>
+                      <a:tailEnd type="none" w="med" len="med"/>
+                    </a:lnL>
+                    <a:lnR w="6350" cap="flat" cmpd="sng" algn="ctr">
+                      <a:noFill/>
+                      <a:prstDash val="solid"/>
+                      <a:round/>
+                      <a:headEnd type="none" w="med" len="med"/>
+                      <a:tailEnd type="none" w="med" len="med"/>
+                    </a:lnR>
+                    <a:lnT w="6350" cap="flat" cmpd="sng" algn="ctr">
+                      <a:solidFill>
+                        <a:schemeClr val="bg2">
+                          <a:lumMod val="75000"/>
+                        </a:schemeClr>
+                      </a:solidFill>
+                      <a:prstDash val="solid"/>
+                      <a:round/>
+                      <a:headEnd type="none" w="med" len="med"/>
+                      <a:tailEnd type="none" w="med" len="med"/>
+                    </a:lnT>
+                    <a:lnB w="6350" cap="flat" cmpd="sng" algn="ctr">
+                      <a:noFill/>
+                      <a:prstDash val="solid"/>
+                      <a:round/>
+                      <a:headEnd type="none" w="med" len="med"/>
+                      <a:tailEnd type="none" w="med" len="med"/>
+                    </a:lnB>
+                  </a:tcPr>
+                </a:tc>
+                <a:tc>
+                  <a:txBody>
+                    <a:bodyPr/>
+                    <a:lstStyle/>
+                    <a:p>
+                      <a:pPr algn="r" fontAlgn="ctr"/>
+                      <a:endParaRPr lang="ko-KR" altLang="en-US" sz="700" b="0" i="0" u="none" strike="noStrike" kern="1200">
+                        <a:solidFill>
+                          <a:srgbClr val="000000"/>
+                        </a:solidFill>
+                        <a:effectLst/>
+                        <a:latin typeface="대명체 보통" panose="020B0600000101010101" pitchFamily="50" charset="-127"/>
+                        <a:ea typeface="대명체 보통" panose="020B0600000101010101" pitchFamily="50" charset="-127"/>
+                        <a:cs typeface="+mn-cs"/>
+                      </a:endParaRPr>
+                    </a:p>
+                  </a:txBody>
+                  <a:tcPr marL="9525" marR="9525" marT="9525" marB="0" anchor="ctr">
+                    <a:lnL w="6350" cap="flat" cmpd="sng" algn="ctr">
+                      <a:noFill/>
+                      <a:prstDash val="solid"/>
+                      <a:round/>
+                      <a:headEnd type="none" w="med" len="med"/>
+                      <a:tailEnd type="none" w="med" len="med"/>
+                    </a:lnL>
+                    <a:lnR w="6350" cap="flat" cmpd="sng" algn="ctr">
+                      <a:noFill/>
+                      <a:prstDash val="solid"/>
+                      <a:round/>
+                      <a:headEnd type="none" w="med" len="med"/>
+                      <a:tailEnd type="none" w="med" len="med"/>
+                    </a:lnR>
+                    <a:lnT w="6350" cap="flat" cmpd="sng" algn="ctr">
+                      <a:noFill/>
+                      <a:prstDash val="solid"/>
+                      <a:round/>
+                      <a:headEnd type="none" w="med" len="med"/>
+                      <a:tailEnd type="none" w="med" len="med"/>
+                    </a:lnT>
+                    <a:lnB w="6350" cap="flat" cmpd="sng" algn="ctr">
+                      <a:noFill/>
+                      <a:prstDash val="solid"/>
+                      <a:round/>
+                      <a:headEnd type="none" w="med" len="med"/>
+                      <a:tailEnd type="none" w="med" len="med"/>
+                    </a:lnB>
+                    <a:lnTlToBr w="12700" cmpd="sng">
+                      <a:noFill/>
+                      <a:prstDash val="solid"/>
+                    </a:lnTlToBr>
+                    <a:lnBlToTr w="12700" cmpd="sng">
+                      <a:noFill/>
+                      <a:prstDash val="solid"/>
+                    </a:lnBlToTr>
+                  </a:tcPr>
+                </a:tc>
+                <a:tc>
+                  <a:txBody>
+                    <a:bodyPr/>
+                    <a:lstStyle/>
+                    <a:p>
+                      <a:pPr algn="r" rtl="0" fontAlgn="ctr"/>
+                      <a:r>
+                        <a:rPr lang="en-US" altLang="ko-KR" sz="700" b="0" i="0" u="none" strike="noStrike" kern="1200">
+                          <a:solidFill>
+                            <a:srgbClr val="000000"/>
+                          </a:solidFill>
+                          <a:effectLst/>
+                          <a:latin typeface="대명체 보통" panose="020B0600000101010101" pitchFamily="50" charset="-127"/>
+                          <a:ea typeface="대명체 보통" panose="020B0600000101010101" pitchFamily="50" charset="-127"/>
+                          <a:cs typeface="+mn-cs"/>
+                        </a:rPr>
+                        <a:t>48,345</a:t>
+                      </a:r>
+                    </a:p>
+                  </a:txBody>
+                  <a:tcPr marL="9525" marR="9525" marT="9525" marB="0" anchor="ctr">
+                    <a:lnL w="6350" cap="flat" cmpd="sng" algn="ctr">
+                      <a:noFill/>
+                      <a:prstDash val="solid"/>
+                      <a:round/>
+                      <a:headEnd type="none" w="med" len="med"/>
+                      <a:tailEnd type="none" w="med" len="med"/>
+                    </a:lnL>
+                    <a:lnR w="6350" cap="flat" cmpd="sng" algn="ctr">
+                      <a:noFill/>
+                      <a:prstDash val="solid"/>
+                      <a:round/>
+                      <a:headEnd type="none" w="med" len="med"/>
+                      <a:tailEnd type="none" w="med" len="med"/>
+                    </a:lnR>
+                    <a:lnT w="6350" cap="flat" cmpd="sng" algn="ctr">
+                      <a:solidFill>
+                        <a:schemeClr val="bg2">
+                          <a:lumMod val="75000"/>
+                        </a:schemeClr>
+                      </a:solidFill>
+                      <a:prstDash val="solid"/>
+                      <a:round/>
+                      <a:headEnd type="none" w="med" len="med"/>
+                      <a:tailEnd type="none" w="med" len="med"/>
+                    </a:lnT>
+                    <a:lnB w="6350" cap="flat" cmpd="sng" algn="ctr">
+                      <a:noFill/>
+                      <a:prstDash val="solid"/>
+                      <a:round/>
+                      <a:headEnd type="none" w="med" len="med"/>
+                      <a:tailEnd type="none" w="med" len="med"/>
+                    </a:lnB>
+                  </a:tcPr>
+                </a:tc>
+                <a:tc>
+                  <a:txBody>
+                    <a:bodyPr/>
+                    <a:lstStyle/>
+                    <a:p>
+                      <a:pPr algn="r" rtl="0" fontAlgn="ctr"/>
+                      <a:r>
+                        <a:rPr lang="en-US" altLang="ko-KR" sz="700" b="0" i="0" u="none" strike="noStrike" kern="1200">
+                          <a:solidFill>
+                            <a:srgbClr val="000000"/>
+                          </a:solidFill>
+                          <a:effectLst/>
+                          <a:latin typeface="대명체 보통" panose="020B0600000101010101" pitchFamily="50" charset="-127"/>
+                          <a:ea typeface="대명체 보통" panose="020B0600000101010101" pitchFamily="50" charset="-127"/>
+                          <a:cs typeface="+mn-cs"/>
+                        </a:rPr>
+                        <a:t>14%</a:t>
+                      </a:r>
+                    </a:p>
+                  </a:txBody>
+                  <a:tcPr marL="9525" marR="9525" marT="9525" marB="0" anchor="ctr">
+                    <a:lnL w="6350" cap="flat" cmpd="sng" algn="ctr">
+                      <a:noFill/>
+                      <a:prstDash val="solid"/>
+                      <a:round/>
+                      <a:headEnd type="none" w="med" len="med"/>
+                      <a:tailEnd type="none" w="med" len="med"/>
+                    </a:lnL>
+                    <a:lnR w="6350" cap="flat" cmpd="sng" algn="ctr">
+                      <a:solidFill>
+                        <a:schemeClr val="bg2">
+                          <a:lumMod val="75000"/>
+                        </a:schemeClr>
+                      </a:solidFill>
+                      <a:prstDash val="solid"/>
+                      <a:round/>
+                      <a:headEnd type="none" w="med" len="med"/>
+                      <a:tailEnd type="none" w="med" len="med"/>
+                    </a:lnR>
+                    <a:lnT w="6350" cap="flat" cmpd="sng" algn="ctr">
+                      <a:solidFill>
+                        <a:schemeClr val="bg2">
+                          <a:lumMod val="75000"/>
+                        </a:schemeClr>
+                      </a:solidFill>
+                      <a:prstDash val="solid"/>
+                      <a:round/>
+                      <a:headEnd type="none" w="med" len="med"/>
+                      <a:tailEnd type="none" w="med" len="med"/>
+                    </a:lnT>
+                    <a:lnB w="6350" cap="flat" cmpd="sng" algn="ctr">
+                      <a:noFill/>
+                      <a:prstDash val="solid"/>
+                      <a:round/>
+                      <a:headEnd type="none" w="med" len="med"/>
+                      <a:tailEnd type="none" w="med" len="med"/>
+                    </a:lnB>
+                  </a:tcPr>
+                </a:tc>
+                <a:tc>
+                  <a:txBody>
+                    <a:bodyPr/>
+                    <a:lstStyle/>
+                    <a:p>
+                      <a:pPr algn="r" rtl="0" fontAlgn="ctr"/>
+                      <a:r>
+                        <a:rPr lang="en-US" altLang="ko-KR" sz="700" b="0" i="0" u="none" strike="noStrike" kern="1200">
+                          <a:solidFill>
+                            <a:srgbClr val="000000"/>
+                          </a:solidFill>
+                          <a:effectLst/>
+                          <a:latin typeface="대명체 보통" panose="020B0600000101010101" pitchFamily="50" charset="-127"/>
+                          <a:ea typeface="대명체 보통" panose="020B0600000101010101" pitchFamily="50" charset="-127"/>
+                          <a:cs typeface="+mn-cs"/>
+                        </a:rPr>
+                        <a:t>62,099</a:t>
+                      </a:r>
+                    </a:p>
+                  </a:txBody>
+                  <a:tcPr marL="9525" marR="9525" marT="9525" marB="0" anchor="ctr">
+                    <a:lnL w="6350" cap="flat" cmpd="sng" algn="ctr">
+                      <a:solidFill>
+                        <a:schemeClr val="bg2">
+                          <a:lumMod val="75000"/>
+                        </a:schemeClr>
+                      </a:solidFill>
+                      <a:prstDash val="solid"/>
+                      <a:round/>
+                      <a:headEnd type="none" w="med" len="med"/>
+                      <a:tailEnd type="none" w="med" len="med"/>
+                    </a:lnL>
+                    <a:lnR w="6350" cap="flat" cmpd="sng" algn="ctr">
+                      <a:noFill/>
                       <a:prstDash val="solid"/>
                       <a:round/>
                       <a:headEnd type="none" w="med" len="med"/>
@@ -14677,294 +14965,6 @@
                   </a:txBody>
                   <a:tcPr marL="9525" marR="9525" marT="9525" marB="0" anchor="ctr">
                     <a:lnL w="6350" cap="flat" cmpd="sng" algn="ctr">
-                      <a:solidFill>
-                        <a:schemeClr val="bg2">
-                          <a:lumMod val="75000"/>
-                        </a:schemeClr>
-                      </a:solidFill>
-                      <a:prstDash val="solid"/>
-                      <a:round/>
-                      <a:headEnd type="none" w="med" len="med"/>
-                      <a:tailEnd type="none" w="med" len="med"/>
-                    </a:lnL>
-                    <a:lnR w="6350" cap="flat" cmpd="sng" algn="ctr">
-                      <a:noFill/>
-                      <a:prstDash val="solid"/>
-                      <a:round/>
-                      <a:headEnd type="none" w="med" len="med"/>
-                      <a:tailEnd type="none" w="med" len="med"/>
-                    </a:lnR>
-                    <a:lnT w="6350" cap="flat" cmpd="sng" algn="ctr">
-                      <a:solidFill>
-                        <a:schemeClr val="bg2">
-                          <a:lumMod val="75000"/>
-                        </a:schemeClr>
-                      </a:solidFill>
-                      <a:prstDash val="solid"/>
-                      <a:round/>
-                      <a:headEnd type="none" w="med" len="med"/>
-                      <a:tailEnd type="none" w="med" len="med"/>
-                    </a:lnT>
-                    <a:lnB w="6350" cap="flat" cmpd="sng" algn="ctr">
-                      <a:noFill/>
-                      <a:prstDash val="solid"/>
-                      <a:round/>
-                      <a:headEnd type="none" w="med" len="med"/>
-                      <a:tailEnd type="none" w="med" len="med"/>
-                    </a:lnB>
-                  </a:tcPr>
-                </a:tc>
-                <a:tc>
-                  <a:txBody>
-                    <a:bodyPr/>
-                    <a:lstStyle/>
-                    <a:p>
-                      <a:pPr algn="r" fontAlgn="ctr"/>
-                      <a:endParaRPr lang="ko-KR" altLang="en-US" sz="700" b="0" i="0" u="none" strike="noStrike" kern="1200">
-                        <a:solidFill>
-                          <a:srgbClr val="000000"/>
-                        </a:solidFill>
-                        <a:effectLst/>
-                        <a:latin typeface="대명체 보통" panose="020B0600000101010101" pitchFamily="50" charset="-127"/>
-                        <a:ea typeface="대명체 보통" panose="020B0600000101010101" pitchFamily="50" charset="-127"/>
-                        <a:cs typeface="+mn-cs"/>
-                      </a:endParaRPr>
-                    </a:p>
-                  </a:txBody>
-                  <a:tcPr marL="9525" marR="9525" marT="9525" marB="0" anchor="ctr">
-                    <a:lnL w="6350" cap="flat" cmpd="sng" algn="ctr">
-                      <a:noFill/>
-                      <a:prstDash val="solid"/>
-                      <a:round/>
-                      <a:headEnd type="none" w="med" len="med"/>
-                      <a:tailEnd type="none" w="med" len="med"/>
-                    </a:lnL>
-                    <a:lnR w="6350" cap="flat" cmpd="sng" algn="ctr">
-                      <a:noFill/>
-                      <a:prstDash val="solid"/>
-                      <a:round/>
-                      <a:headEnd type="none" w="med" len="med"/>
-                      <a:tailEnd type="none" w="med" len="med"/>
-                    </a:lnR>
-                    <a:lnT w="6350" cap="flat" cmpd="sng" algn="ctr">
-                      <a:noFill/>
-                      <a:prstDash val="solid"/>
-                      <a:round/>
-                      <a:headEnd type="none" w="med" len="med"/>
-                      <a:tailEnd type="none" w="med" len="med"/>
-                    </a:lnT>
-                    <a:lnB w="6350" cap="flat" cmpd="sng" algn="ctr">
-                      <a:noFill/>
-                      <a:prstDash val="solid"/>
-                      <a:round/>
-                      <a:headEnd type="none" w="med" len="med"/>
-                      <a:tailEnd type="none" w="med" len="med"/>
-                    </a:lnB>
-                    <a:lnTlToBr w="12700" cmpd="sng">
-                      <a:noFill/>
-                      <a:prstDash val="solid"/>
-                    </a:lnTlToBr>
-                    <a:lnBlToTr w="12700" cmpd="sng">
-                      <a:noFill/>
-                      <a:prstDash val="solid"/>
-                    </a:lnBlToTr>
-                  </a:tcPr>
-                </a:tc>
-                <a:tc>
-                  <a:txBody>
-                    <a:bodyPr/>
-                    <a:lstStyle/>
-                    <a:p>
-                      <a:pPr algn="r" rtl="0" fontAlgn="ctr"/>
-                      <a:r>
-                        <a:rPr lang="en-US" altLang="ko-KR" sz="700" b="0" i="0" u="none" strike="noStrike" kern="1200">
-                          <a:solidFill>
-                            <a:srgbClr val="000000"/>
-                          </a:solidFill>
-                          <a:effectLst/>
-                          <a:latin typeface="대명체 보통" panose="020B0600000101010101" pitchFamily="50" charset="-127"/>
-                          <a:ea typeface="대명체 보통" panose="020B0600000101010101" pitchFamily="50" charset="-127"/>
-                          <a:cs typeface="+mn-cs"/>
-                        </a:rPr>
-                        <a:t>48,345</a:t>
-                      </a:r>
-                    </a:p>
-                  </a:txBody>
-                  <a:tcPr marL="9525" marR="9525" marT="9525" marB="0" anchor="ctr">
-                    <a:lnL w="6350" cap="flat" cmpd="sng" algn="ctr">
-                      <a:noFill/>
-                      <a:prstDash val="solid"/>
-                      <a:round/>
-                      <a:headEnd type="none" w="med" len="med"/>
-                      <a:tailEnd type="none" w="med" len="med"/>
-                    </a:lnL>
-                    <a:lnR w="6350" cap="flat" cmpd="sng" algn="ctr">
-                      <a:noFill/>
-                      <a:prstDash val="solid"/>
-                      <a:round/>
-                      <a:headEnd type="none" w="med" len="med"/>
-                      <a:tailEnd type="none" w="med" len="med"/>
-                    </a:lnR>
-                    <a:lnT w="6350" cap="flat" cmpd="sng" algn="ctr">
-                      <a:solidFill>
-                        <a:schemeClr val="bg2">
-                          <a:lumMod val="75000"/>
-                        </a:schemeClr>
-                      </a:solidFill>
-                      <a:prstDash val="solid"/>
-                      <a:round/>
-                      <a:headEnd type="none" w="med" len="med"/>
-                      <a:tailEnd type="none" w="med" len="med"/>
-                    </a:lnT>
-                    <a:lnB w="6350" cap="flat" cmpd="sng" algn="ctr">
-                      <a:noFill/>
-                      <a:prstDash val="solid"/>
-                      <a:round/>
-                      <a:headEnd type="none" w="med" len="med"/>
-                      <a:tailEnd type="none" w="med" len="med"/>
-                    </a:lnB>
-                  </a:tcPr>
-                </a:tc>
-                <a:tc>
-                  <a:txBody>
-                    <a:bodyPr/>
-                    <a:lstStyle/>
-                    <a:p>
-                      <a:pPr algn="r" rtl="0" fontAlgn="ctr"/>
-                      <a:r>
-                        <a:rPr lang="en-US" altLang="ko-KR" sz="700" b="0" i="0" u="none" strike="noStrike" kern="1200">
-                          <a:solidFill>
-                            <a:srgbClr val="000000"/>
-                          </a:solidFill>
-                          <a:effectLst/>
-                          <a:latin typeface="대명체 보통" panose="020B0600000101010101" pitchFamily="50" charset="-127"/>
-                          <a:ea typeface="대명체 보통" panose="020B0600000101010101" pitchFamily="50" charset="-127"/>
-                          <a:cs typeface="+mn-cs"/>
-                        </a:rPr>
-                        <a:t>14%</a:t>
-                      </a:r>
-                    </a:p>
-                  </a:txBody>
-                  <a:tcPr marL="9525" marR="9525" marT="9525" marB="0" anchor="ctr">
-                    <a:lnL w="6350" cap="flat" cmpd="sng" algn="ctr">
-                      <a:noFill/>
-                      <a:prstDash val="solid"/>
-                      <a:round/>
-                      <a:headEnd type="none" w="med" len="med"/>
-                      <a:tailEnd type="none" w="med" len="med"/>
-                    </a:lnL>
-                    <a:lnR w="6350" cap="flat" cmpd="sng" algn="ctr">
-                      <a:solidFill>
-                        <a:schemeClr val="bg2">
-                          <a:lumMod val="75000"/>
-                        </a:schemeClr>
-                      </a:solidFill>
-                      <a:prstDash val="solid"/>
-                      <a:round/>
-                      <a:headEnd type="none" w="med" len="med"/>
-                      <a:tailEnd type="none" w="med" len="med"/>
-                    </a:lnR>
-                    <a:lnT w="6350" cap="flat" cmpd="sng" algn="ctr">
-                      <a:solidFill>
-                        <a:schemeClr val="bg2">
-                          <a:lumMod val="75000"/>
-                        </a:schemeClr>
-                      </a:solidFill>
-                      <a:prstDash val="solid"/>
-                      <a:round/>
-                      <a:headEnd type="none" w="med" len="med"/>
-                      <a:tailEnd type="none" w="med" len="med"/>
-                    </a:lnT>
-                    <a:lnB w="6350" cap="flat" cmpd="sng" algn="ctr">
-                      <a:noFill/>
-                      <a:prstDash val="solid"/>
-                      <a:round/>
-                      <a:headEnd type="none" w="med" len="med"/>
-                      <a:tailEnd type="none" w="med" len="med"/>
-                    </a:lnB>
-                  </a:tcPr>
-                </a:tc>
-                <a:tc>
-                  <a:txBody>
-                    <a:bodyPr/>
-                    <a:lstStyle/>
-                    <a:p>
-                      <a:pPr algn="r" rtl="0" fontAlgn="ctr"/>
-                      <a:r>
-                        <a:rPr lang="en-US" altLang="ko-KR" sz="700" b="0" i="0" u="none" strike="noStrike" kern="1200">
-                          <a:solidFill>
-                            <a:srgbClr val="000000"/>
-                          </a:solidFill>
-                          <a:effectLst/>
-                          <a:latin typeface="대명체 보통" panose="020B0600000101010101" pitchFamily="50" charset="-127"/>
-                          <a:ea typeface="대명체 보통" panose="020B0600000101010101" pitchFamily="50" charset="-127"/>
-                          <a:cs typeface="+mn-cs"/>
-                        </a:rPr>
-                        <a:t>62,065</a:t>
-                      </a:r>
-                    </a:p>
-                  </a:txBody>
-                  <a:tcPr marL="9525" marR="9525" marT="9525" marB="0" anchor="ctr">
-                    <a:lnL w="6350" cap="flat" cmpd="sng" algn="ctr">
-                      <a:solidFill>
-                        <a:schemeClr val="bg2">
-                          <a:lumMod val="75000"/>
-                        </a:schemeClr>
-                      </a:solidFill>
-                      <a:prstDash val="solid"/>
-                      <a:round/>
-                      <a:headEnd type="none" w="med" len="med"/>
-                      <a:tailEnd type="none" w="med" len="med"/>
-                    </a:lnL>
-                    <a:lnR w="6350" cap="flat" cmpd="sng" algn="ctr">
-                      <a:noFill/>
-                      <a:prstDash val="solid"/>
-                      <a:round/>
-                      <a:headEnd type="none" w="med" len="med"/>
-                      <a:tailEnd type="none" w="med" len="med"/>
-                    </a:lnR>
-                    <a:lnT w="6350" cap="flat" cmpd="sng" algn="ctr">
-                      <a:solidFill>
-                        <a:schemeClr val="bg2">
-                          <a:lumMod val="75000"/>
-                        </a:schemeClr>
-                      </a:solidFill>
-                      <a:prstDash val="solid"/>
-                      <a:round/>
-                      <a:headEnd type="none" w="med" len="med"/>
-                      <a:tailEnd type="none" w="med" len="med"/>
-                    </a:lnT>
-                    <a:lnB w="6350" cap="flat" cmpd="sng" algn="ctr">
-                      <a:noFill/>
-                      <a:prstDash val="solid"/>
-                      <a:round/>
-                      <a:headEnd type="none" w="med" len="med"/>
-                      <a:tailEnd type="none" w="med" len="med"/>
-                    </a:lnB>
-                  </a:tcPr>
-                </a:tc>
-                <a:tc>
-                  <a:txBody>
-                    <a:bodyPr/>
-                    <a:lstStyle/>
-                    <a:p>
-                      <a:pPr algn="r" rtl="0" fontAlgn="ctr"/>
-                      <a:r>
-                        <a:rPr lang="en-US" altLang="ko-KR" sz="700" b="0" i="0" u="none" strike="noStrike" kern="1200">
-                          <a:solidFill>
-                            <a:srgbClr val="000000"/>
-                          </a:solidFill>
-                          <a:effectLst/>
-                          <a:latin typeface="대명체 보통" panose="020B0600000101010101" pitchFamily="50" charset="-127"/>
-                          <a:ea typeface="대명체 보통" panose="020B0600000101010101" pitchFamily="50" charset="-127"/>
-                          <a:cs typeface="+mn-cs"/>
-                        </a:rPr>
-                        <a:t>23%</a:t>
-                      </a:r>
-                    </a:p>
-                  </a:txBody>
-                  <a:tcPr marL="9525" marR="9525" marT="9525" marB="0" anchor="ctr">
-                    <a:lnL w="6350" cap="flat" cmpd="sng" algn="ctr">
                       <a:noFill/>
                       <a:prstDash val="solid"/>
                       <a:round/>
@@ -15018,7 +15018,7 @@
                           <a:ea typeface="대명체 보통" panose="020B0600000101010101" pitchFamily="50" charset="-127"/>
                           <a:cs typeface="+mn-cs"/>
                         </a:rPr>
-                        <a:t>13,720</a:t>
+                        <a:t>13,754</a:t>
                       </a:r>
                     </a:p>
                   </a:txBody>
@@ -15262,7 +15262,7 @@
                           <a:ea typeface="대명체 보통" panose="020B0600000101010101" pitchFamily="50" charset="-127"/>
                           <a:cs typeface="+mn-cs"/>
                         </a:rPr>
-                        <a:t>22,016</a:t>
+                        <a:t>22,050</a:t>
                       </a:r>
                     </a:p>
                   </a:txBody>
@@ -15643,7 +15643,7 @@
                           <a:ea typeface="대명체 보통" panose="020B0600000101010101" pitchFamily="50" charset="-127"/>
                           <a:cs typeface="+mn-cs"/>
                         </a:rPr>
-                        <a:t>6,269</a:t>
+                        <a:t>6,266</a:t>
                       </a:r>
                     </a:p>
                   </a:txBody>
@@ -15753,7 +15753,7 @@
                           <a:ea typeface="대명체 보통" panose="020B0600000101010101" pitchFamily="50" charset="-127"/>
                           <a:cs typeface="+mn-cs"/>
                         </a:rPr>
-                        <a:t>770</a:t>
+                        <a:t>767</a:t>
                       </a:r>
                       <a:endParaRPr lang="en-US" altLang="ko-KR" sz="700" b="0" i="0" u="none" strike="noStrike" kern="1200" dirty="0">
                         <a:solidFill>
@@ -15990,7 +15990,7 @@
                           <a:ea typeface="대명체 보통" panose="020B0600000101010101" pitchFamily="50" charset="-127"/>
                           <a:cs typeface="+mn-cs"/>
                         </a:rPr>
-                        <a:t>1,450</a:t>
+                        <a:t>1,447</a:t>
                       </a:r>
                     </a:p>
                   </a:txBody>
@@ -16266,7 +16266,7 @@
                           <a:ea typeface="대명체 보통" panose="020B0600000101010101" pitchFamily="50" charset="-127"/>
                           <a:cs typeface="+mn-cs"/>
                         </a:rPr>
-                        <a:t>38,832</a:t>
+                        <a:t>38,829</a:t>
                       </a:r>
                     </a:p>
                   </a:txBody>
@@ -16376,7 +16376,7 @@
                           <a:ea typeface="대명체 보통" panose="020B0600000101010101" pitchFamily="50" charset="-127"/>
                           <a:cs typeface="+mn-cs"/>
                         </a:rPr>
-                        <a:t>7,592</a:t>
+                        <a:t>7,589</a:t>
                       </a:r>
                     </a:p>
                   </a:txBody>
@@ -16604,7 +16604,7 @@
                           <a:ea typeface="대명체 보통" panose="020B0600000101010101" pitchFamily="50" charset="-127"/>
                           <a:cs typeface="+mn-cs"/>
                         </a:rPr>
-                        <a:t>11,311</a:t>
+                        <a:t>11,308</a:t>
                       </a:r>
                     </a:p>
                   </a:txBody>
@@ -16999,7 +16999,7 @@
                           <a:ea typeface="대명체 보통" panose="020B0600000101010101" pitchFamily="50" charset="-127"/>
                           <a:cs typeface="+mn-cs"/>
                         </a:rPr>
-                        <a:t>609</a:t>
+                        <a:t>632</a:t>
                       </a:r>
                       <a:endParaRPr lang="en-US" altLang="ko-KR" sz="700" b="0" i="0" u="none" strike="noStrike" kern="1200" dirty="0">
                         <a:solidFill>
@@ -17126,7 +17126,7 @@
                           <a:ea typeface="대명체 보통" panose="020B0600000101010101" pitchFamily="50" charset="-127"/>
                           <a:cs typeface="+mn-cs"/>
                         </a:rPr>
-                        <a:t>104</a:t>
+                        <a:t>127</a:t>
                       </a:r>
                       <a:endParaRPr lang="en-US" altLang="ko-KR" sz="700" b="0" i="0" u="none" strike="noStrike" kern="1200" dirty="0">
                         <a:solidFill>
@@ -17198,7 +17198,7 @@
                           <a:ea typeface="대명체 보통" panose="020B0600000101010101" pitchFamily="50" charset="-127"/>
                           <a:cs typeface="+mn-cs"/>
                         </a:rPr>
-                        <a:t>121%</a:t>
+                        <a:t>125%</a:t>
                       </a:r>
                     </a:p>
                   </a:txBody>
@@ -17388,7 +17388,7 @@
                           <a:ea typeface="대명체 보통" panose="020B0600000101010101" pitchFamily="50" charset="-127"/>
                           <a:cs typeface="+mn-cs"/>
                         </a:rPr>
-                        <a:t>15</a:t>
+                        <a:t>38</a:t>
                       </a:r>
                     </a:p>
                   </a:txBody>
@@ -17451,7 +17451,7 @@
                           <a:ea typeface="대명체 보통" panose="020B0600000101010101" pitchFamily="50" charset="-127"/>
                           <a:cs typeface="+mn-cs"/>
                         </a:rPr>
-                        <a:t>3%</a:t>
+                        <a:t>6%</a:t>
                       </a:r>
                     </a:p>
                   </a:txBody>
@@ -17680,7 +17680,7 @@
                           <a:ea typeface="대명체 보통" panose="020B0600000101010101" pitchFamily="50" charset="-127"/>
                           <a:cs typeface="+mn-cs"/>
                         </a:rPr>
-                        <a:t>7,227</a:t>
+                        <a:t>7,250</a:t>
                       </a:r>
                     </a:p>
                   </a:txBody>
@@ -17798,7 +17798,7 @@
                           <a:ea typeface="대명체 보통" panose="020B0600000101010101" pitchFamily="50" charset="-127"/>
                           <a:cs typeface="+mn-cs"/>
                         </a:rPr>
-                        <a:t>1,545</a:t>
+                        <a:t>1,568</a:t>
                       </a:r>
                       <a:endParaRPr lang="en-US" altLang="ko-KR" sz="700" b="0" i="0" u="none" strike="noStrike" kern="1200" dirty="0">
                         <a:solidFill>
@@ -17870,7 +17870,7 @@
                           <a:ea typeface="대명체 보통" panose="020B0600000101010101" pitchFamily="50" charset="-127"/>
                           <a:cs typeface="+mn-cs"/>
                         </a:rPr>
-                        <a:t>127%</a:t>
+                        <a:t>128%</a:t>
                       </a:r>
                     </a:p>
                   </a:txBody>
@@ -18051,7 +18051,7 @@
                           <a:ea typeface="대명체 보통" panose="020B0600000101010101" pitchFamily="50" charset="-127"/>
                           <a:cs typeface="+mn-cs"/>
                         </a:rPr>
-                        <a:t>2,375</a:t>
+                        <a:t>2,398</a:t>
                       </a:r>
                     </a:p>
                   </a:txBody>

--- a/data/세일즈마케팅_예상매출현황.pptx
+++ b/data/세일즈마케팅_예상매출현황.pptx
@@ -12756,7 +12756,7 @@
                           <a:ea typeface="대명체 보통" panose="020B0600000101010101" pitchFamily="50" charset="-127"/>
                           <a:cs typeface="+mn-cs"/>
                         </a:rPr>
-                        <a:t>16,302</a:t>
+                        <a:t>16,310</a:t>
                       </a:r>
                     </a:p>
                   </a:txBody>
@@ -12882,7 +12882,7 @@
                           <a:ea typeface="대명체 보통" panose="020B0600000101010101" pitchFamily="50" charset="-127"/>
                           <a:cs typeface="+mn-cs"/>
                         </a:rPr>
-                        <a:t>1,483</a:t>
+                        <a:t>1,491</a:t>
                       </a:r>
                     </a:p>
                   </a:txBody>
@@ -13142,7 +13142,7 @@
                           <a:ea typeface="대명체 보통" panose="020B0600000101010101" pitchFamily="50" charset="-127"/>
                           <a:cs typeface="+mn-cs"/>
                         </a:rPr>
-                        <a:t>3,281</a:t>
+                        <a:t>3,289</a:t>
                       </a:r>
                     </a:p>
                   </a:txBody>
@@ -13450,7 +13450,7 @@
                           <a:ea typeface="대명체 보통" panose="020B0600000101010101" pitchFamily="50" charset="-127"/>
                           <a:cs typeface="+mn-cs"/>
                         </a:rPr>
-                        <a:t>108,178</a:t>
+                        <a:t>108,186</a:t>
                       </a:r>
                     </a:p>
                   </a:txBody>
@@ -13576,7 +13576,7 @@
                           <a:ea typeface="대명체 보통" panose="020B0600000101010101" pitchFamily="50" charset="-127"/>
                           <a:cs typeface="+mn-cs"/>
                         </a:rPr>
-                        <a:t>22,911</a:t>
+                        <a:t>22,919</a:t>
                       </a:r>
                     </a:p>
                   </a:txBody>
@@ -13836,7 +13836,7 @@
                           <a:ea typeface="대명체 보통" panose="020B0600000101010101" pitchFamily="50" charset="-127"/>
                           <a:cs typeface="+mn-cs"/>
                         </a:rPr>
-                        <a:t>35,756</a:t>
+                        <a:t>35,764</a:t>
                       </a:r>
                     </a:p>
                   </a:txBody>
@@ -14237,7 +14237,7 @@
                           <a:ea typeface="대명체 보통" panose="020B0600000101010101" pitchFamily="50" charset="-127"/>
                           <a:cs typeface="+mn-cs"/>
                         </a:rPr>
-                        <a:t>9,403</a:t>
+                        <a:t>9,432</a:t>
                       </a:r>
                     </a:p>
                   </a:txBody>
@@ -14355,7 +14355,7 @@
                           <a:ea typeface="대명체 보통" panose="020B0600000101010101" pitchFamily="50" charset="-127"/>
                           <a:cs typeface="+mn-cs"/>
                         </a:rPr>
-                        <a:t>589</a:t>
+                        <a:t>618</a:t>
                       </a:r>
                       <a:endParaRPr lang="en-US" altLang="ko-KR" sz="700" b="0" i="0" u="none" strike="noStrike" kern="1200" dirty="0">
                         <a:solidFill>
@@ -14608,7 +14608,7 @@
                           <a:ea typeface="대명체 보통" panose="020B0600000101010101" pitchFamily="50" charset="-127"/>
                           <a:cs typeface="+mn-cs"/>
                         </a:rPr>
-                        <a:t>1,795</a:t>
+                        <a:t>1,824</a:t>
                       </a:r>
                     </a:p>
                   </a:txBody>
@@ -14900,7 +14900,7 @@
                           <a:ea typeface="대명체 보통" panose="020B0600000101010101" pitchFamily="50" charset="-127"/>
                           <a:cs typeface="+mn-cs"/>
                         </a:rPr>
-                        <a:t>62,099</a:t>
+                        <a:t>62,128</a:t>
                       </a:r>
                     </a:p>
                   </a:txBody>
@@ -15018,7 +15018,7 @@
                           <a:ea typeface="대명체 보통" panose="020B0600000101010101" pitchFamily="50" charset="-127"/>
                           <a:cs typeface="+mn-cs"/>
                         </a:rPr>
-                        <a:t>13,754</a:t>
+                        <a:t>13,783</a:t>
                       </a:r>
                     </a:p>
                   </a:txBody>
@@ -15081,7 +15081,7 @@
                           <a:ea typeface="대명체 보통" panose="020B0600000101010101" pitchFamily="50" charset="-127"/>
                           <a:cs typeface="+mn-cs"/>
                         </a:rPr>
-                        <a:t>128%</a:t>
+                        <a:t>129%</a:t>
                       </a:r>
                     </a:p>
                   </a:txBody>
@@ -15262,7 +15262,7 @@
                           <a:ea typeface="대명체 보통" panose="020B0600000101010101" pitchFamily="50" charset="-127"/>
                           <a:cs typeface="+mn-cs"/>
                         </a:rPr>
-                        <a:t>22,050</a:t>
+                        <a:t>22,079</a:t>
                       </a:r>
                     </a:p>
                   </a:txBody>
@@ -15643,7 +15643,7 @@
                           <a:ea typeface="대명체 보통" panose="020B0600000101010101" pitchFamily="50" charset="-127"/>
                           <a:cs typeface="+mn-cs"/>
                         </a:rPr>
-                        <a:t>6,266</a:t>
+                        <a:t>6,240</a:t>
                       </a:r>
                     </a:p>
                   </a:txBody>
@@ -15753,7 +15753,7 @@
                           <a:ea typeface="대명체 보통" panose="020B0600000101010101" pitchFamily="50" charset="-127"/>
                           <a:cs typeface="+mn-cs"/>
                         </a:rPr>
-                        <a:t>767</a:t>
+                        <a:t>741</a:t>
                       </a:r>
                       <a:endParaRPr lang="en-US" altLang="ko-KR" sz="700" b="0" i="0" u="none" strike="noStrike" kern="1200" dirty="0">
                         <a:solidFill>
@@ -15821,7 +15821,7 @@
                           <a:ea typeface="대명체 보통" panose="020B0600000101010101" pitchFamily="50" charset="-127"/>
                           <a:cs typeface="+mn-cs"/>
                         </a:rPr>
-                        <a:t>114%</a:t>
+                        <a:t>113%</a:t>
                       </a:r>
                     </a:p>
                   </a:txBody>
@@ -15990,7 +15990,7 @@
                           <a:ea typeface="대명체 보통" panose="020B0600000101010101" pitchFamily="50" charset="-127"/>
                           <a:cs typeface="+mn-cs"/>
                         </a:rPr>
-                        <a:t>1,447</a:t>
+                        <a:t>1,421</a:t>
                       </a:r>
                     </a:p>
                   </a:txBody>
@@ -16049,7 +16049,7 @@
                           <a:ea typeface="대명체 보통" panose="020B0600000101010101" pitchFamily="50" charset="-127"/>
                           <a:cs typeface="+mn-cs"/>
                         </a:rPr>
-                        <a:t>30%</a:t>
+                        <a:t>29%</a:t>
                       </a:r>
                     </a:p>
                   </a:txBody>
@@ -16266,7 +16266,7 @@
                           <a:ea typeface="대명체 보통" panose="020B0600000101010101" pitchFamily="50" charset="-127"/>
                           <a:cs typeface="+mn-cs"/>
                         </a:rPr>
-                        <a:t>38,829</a:t>
+                        <a:t>38,803</a:t>
                       </a:r>
                     </a:p>
                   </a:txBody>
@@ -16376,7 +16376,7 @@
                           <a:ea typeface="대명체 보통" panose="020B0600000101010101" pitchFamily="50" charset="-127"/>
                           <a:cs typeface="+mn-cs"/>
                         </a:rPr>
-                        <a:t>7,589</a:t>
+                        <a:t>7,563</a:t>
                       </a:r>
                     </a:p>
                   </a:txBody>
@@ -16604,7 +16604,7 @@
                           <a:ea typeface="대명체 보통" panose="020B0600000101010101" pitchFamily="50" charset="-127"/>
                           <a:cs typeface="+mn-cs"/>
                         </a:rPr>
-                        <a:t>11,308</a:t>
+                        <a:t>11,282</a:t>
                       </a:r>
                     </a:p>
                   </a:txBody>
@@ -16999,7 +16999,7 @@
                           <a:ea typeface="대명체 보통" panose="020B0600000101010101" pitchFamily="50" charset="-127"/>
                           <a:cs typeface="+mn-cs"/>
                         </a:rPr>
-                        <a:t>632</a:t>
+                        <a:t>637</a:t>
                       </a:r>
                       <a:endParaRPr lang="en-US" altLang="ko-KR" sz="700" b="0" i="0" u="none" strike="noStrike" kern="1200" dirty="0">
                         <a:solidFill>
@@ -17126,7 +17126,7 @@
                           <a:ea typeface="대명체 보통" panose="020B0600000101010101" pitchFamily="50" charset="-127"/>
                           <a:cs typeface="+mn-cs"/>
                         </a:rPr>
-                        <a:t>127</a:t>
+                        <a:t>132</a:t>
                       </a:r>
                       <a:endParaRPr lang="en-US" altLang="ko-KR" sz="700" b="0" i="0" u="none" strike="noStrike" kern="1200" dirty="0">
                         <a:solidFill>
@@ -17198,7 +17198,7 @@
                           <a:ea typeface="대명체 보통" panose="020B0600000101010101" pitchFamily="50" charset="-127"/>
                           <a:cs typeface="+mn-cs"/>
                         </a:rPr>
-                        <a:t>125%</a:t>
+                        <a:t>126%</a:t>
                       </a:r>
                     </a:p>
                   </a:txBody>
@@ -17388,7 +17388,7 @@
                           <a:ea typeface="대명체 보통" panose="020B0600000101010101" pitchFamily="50" charset="-127"/>
                           <a:cs typeface="+mn-cs"/>
                         </a:rPr>
-                        <a:t>38</a:t>
+                        <a:t>43</a:t>
                       </a:r>
                     </a:p>
                   </a:txBody>
@@ -17451,7 +17451,7 @@
                           <a:ea typeface="대명체 보통" panose="020B0600000101010101" pitchFamily="50" charset="-127"/>
                           <a:cs typeface="+mn-cs"/>
                         </a:rPr>
-                        <a:t>6%</a:t>
+                        <a:t>7%</a:t>
                       </a:r>
                     </a:p>
                   </a:txBody>
@@ -17680,7 +17680,7 @@
                           <a:ea typeface="대명체 보통" panose="020B0600000101010101" pitchFamily="50" charset="-127"/>
                           <a:cs typeface="+mn-cs"/>
                         </a:rPr>
-                        <a:t>7,250</a:t>
+                        <a:t>7,255</a:t>
                       </a:r>
                     </a:p>
                   </a:txBody>
@@ -17798,7 +17798,7 @@
                           <a:ea typeface="대명체 보통" panose="020B0600000101010101" pitchFamily="50" charset="-127"/>
                           <a:cs typeface="+mn-cs"/>
                         </a:rPr>
-                        <a:t>1,568</a:t>
+                        <a:t>1,573</a:t>
                       </a:r>
                       <a:endParaRPr lang="en-US" altLang="ko-KR" sz="700" b="0" i="0" u="none" strike="noStrike" kern="1200" dirty="0">
                         <a:solidFill>
@@ -18051,7 +18051,7 @@
                           <a:ea typeface="대명체 보통" panose="020B0600000101010101" pitchFamily="50" charset="-127"/>
                           <a:cs typeface="+mn-cs"/>
                         </a:rPr>
-                        <a:t>2,398</a:t>
+                        <a:t>2,403</a:t>
                       </a:r>
                     </a:p>
                   </a:txBody>
@@ -18114,7 +18114,7 @@
                           <a:ea typeface="대명체 보통" panose="020B0600000101010101" pitchFamily="50" charset="-127"/>
                           <a:cs typeface="+mn-cs"/>
                         </a:rPr>
-                        <a:t>49%</a:t>
+                        <a:t>50%</a:t>
                       </a:r>
                     </a:p>
                   </a:txBody>

--- a/data/세일즈마케팅_예상매출현황.pptx
+++ b/data/세일즈마케팅_예상매출현황.pptx
@@ -12756,7 +12756,7 @@
                           <a:ea typeface="대명체 보통" panose="020B0600000101010101" pitchFamily="50" charset="-127"/>
                           <a:cs typeface="+mn-cs"/>
                         </a:rPr>
-                        <a:t>16,310</a:t>
+                        <a:t>16,298</a:t>
                       </a:r>
                     </a:p>
                   </a:txBody>
@@ -12882,7 +12882,7 @@
                           <a:ea typeface="대명체 보통" panose="020B0600000101010101" pitchFamily="50" charset="-127"/>
                           <a:cs typeface="+mn-cs"/>
                         </a:rPr>
-                        <a:t>1,491</a:t>
+                        <a:t>1,479</a:t>
                       </a:r>
                     </a:p>
                   </a:txBody>
@@ -13142,7 +13142,7 @@
                           <a:ea typeface="대명체 보통" panose="020B0600000101010101" pitchFamily="50" charset="-127"/>
                           <a:cs typeface="+mn-cs"/>
                         </a:rPr>
-                        <a:t>3,289</a:t>
+                        <a:t>3,277</a:t>
                       </a:r>
                     </a:p>
                   </a:txBody>
@@ -13450,7 +13450,7 @@
                           <a:ea typeface="대명체 보통" panose="020B0600000101010101" pitchFamily="50" charset="-127"/>
                           <a:cs typeface="+mn-cs"/>
                         </a:rPr>
-                        <a:t>108,186</a:t>
+                        <a:t>108,175</a:t>
                       </a:r>
                     </a:p>
                   </a:txBody>
@@ -13576,7 +13576,7 @@
                           <a:ea typeface="대명체 보통" panose="020B0600000101010101" pitchFamily="50" charset="-127"/>
                           <a:cs typeface="+mn-cs"/>
                         </a:rPr>
-                        <a:t>22,919</a:t>
+                        <a:t>22,908</a:t>
                       </a:r>
                     </a:p>
                   </a:txBody>
@@ -13836,7 +13836,7 @@
                           <a:ea typeface="대명체 보통" panose="020B0600000101010101" pitchFamily="50" charset="-127"/>
                           <a:cs typeface="+mn-cs"/>
                         </a:rPr>
-                        <a:t>35,764</a:t>
+                        <a:t>35,753</a:t>
                       </a:r>
                     </a:p>
                   </a:txBody>
@@ -14237,7 +14237,7 @@
                           <a:ea typeface="대명체 보통" panose="020B0600000101010101" pitchFamily="50" charset="-127"/>
                           <a:cs typeface="+mn-cs"/>
                         </a:rPr>
-                        <a:t>9,432</a:t>
+                        <a:t>9,425</a:t>
                       </a:r>
                     </a:p>
                   </a:txBody>
@@ -14355,7 +14355,7 @@
                           <a:ea typeface="대명체 보통" panose="020B0600000101010101" pitchFamily="50" charset="-127"/>
                           <a:cs typeface="+mn-cs"/>
                         </a:rPr>
-                        <a:t>618</a:t>
+                        <a:t>611</a:t>
                       </a:r>
                       <a:endParaRPr lang="en-US" altLang="ko-KR" sz="700" b="0" i="0" u="none" strike="noStrike" kern="1200" dirty="0">
                         <a:solidFill>
@@ -14608,7 +14608,7 @@
                           <a:ea typeface="대명체 보통" panose="020B0600000101010101" pitchFamily="50" charset="-127"/>
                           <a:cs typeface="+mn-cs"/>
                         </a:rPr>
-                        <a:t>1,824</a:t>
+                        <a:t>1,817</a:t>
                       </a:r>
                     </a:p>
                   </a:txBody>
@@ -14900,7 +14900,7 @@
                           <a:ea typeface="대명체 보통" panose="020B0600000101010101" pitchFamily="50" charset="-127"/>
                           <a:cs typeface="+mn-cs"/>
                         </a:rPr>
-                        <a:t>62,128</a:t>
+                        <a:t>62,121</a:t>
                       </a:r>
                     </a:p>
                   </a:txBody>
@@ -15018,7 +15018,7 @@
                           <a:ea typeface="대명체 보통" panose="020B0600000101010101" pitchFamily="50" charset="-127"/>
                           <a:cs typeface="+mn-cs"/>
                         </a:rPr>
-                        <a:t>13,783</a:t>
+                        <a:t>13,776</a:t>
                       </a:r>
                     </a:p>
                   </a:txBody>
@@ -15081,7 +15081,7 @@
                           <a:ea typeface="대명체 보통" panose="020B0600000101010101" pitchFamily="50" charset="-127"/>
                           <a:cs typeface="+mn-cs"/>
                         </a:rPr>
-                        <a:t>129%</a:t>
+                        <a:t>128%</a:t>
                       </a:r>
                     </a:p>
                   </a:txBody>
@@ -15262,7 +15262,7 @@
                           <a:ea typeface="대명체 보통" panose="020B0600000101010101" pitchFamily="50" charset="-127"/>
                           <a:cs typeface="+mn-cs"/>
                         </a:rPr>
-                        <a:t>22,079</a:t>
+                        <a:t>22,072</a:t>
                       </a:r>
                     </a:p>
                   </a:txBody>
@@ -15643,7 +15643,7 @@
                           <a:ea typeface="대명체 보통" panose="020B0600000101010101" pitchFamily="50" charset="-127"/>
                           <a:cs typeface="+mn-cs"/>
                         </a:rPr>
-                        <a:t>6,240</a:t>
+                        <a:t>6,237</a:t>
                       </a:r>
                     </a:p>
                   </a:txBody>
@@ -15753,7 +15753,7 @@
                           <a:ea typeface="대명체 보통" panose="020B0600000101010101" pitchFamily="50" charset="-127"/>
                           <a:cs typeface="+mn-cs"/>
                         </a:rPr>
-                        <a:t>741</a:t>
+                        <a:t>738</a:t>
                       </a:r>
                       <a:endParaRPr lang="en-US" altLang="ko-KR" sz="700" b="0" i="0" u="none" strike="noStrike" kern="1200" dirty="0">
                         <a:solidFill>
@@ -15990,7 +15990,7 @@
                           <a:ea typeface="대명체 보통" panose="020B0600000101010101" pitchFamily="50" charset="-127"/>
                           <a:cs typeface="+mn-cs"/>
                         </a:rPr>
-                        <a:t>1,421</a:t>
+                        <a:t>1,418</a:t>
                       </a:r>
                     </a:p>
                   </a:txBody>
@@ -16266,7 +16266,7 @@
                           <a:ea typeface="대명체 보통" panose="020B0600000101010101" pitchFamily="50" charset="-127"/>
                           <a:cs typeface="+mn-cs"/>
                         </a:rPr>
-                        <a:t>38,803</a:t>
+                        <a:t>38,800</a:t>
                       </a:r>
                     </a:p>
                   </a:txBody>
@@ -16376,7 +16376,7 @@
                           <a:ea typeface="대명체 보통" panose="020B0600000101010101" pitchFamily="50" charset="-127"/>
                           <a:cs typeface="+mn-cs"/>
                         </a:rPr>
-                        <a:t>7,563</a:t>
+                        <a:t>7,560</a:t>
                       </a:r>
                     </a:p>
                   </a:txBody>
@@ -16604,7 +16604,7 @@
                           <a:ea typeface="대명체 보통" panose="020B0600000101010101" pitchFamily="50" charset="-127"/>
                           <a:cs typeface="+mn-cs"/>
                         </a:rPr>
-                        <a:t>11,282</a:t>
+                        <a:t>11,279</a:t>
                       </a:r>
                     </a:p>
                   </a:txBody>
@@ -16999,7 +16999,7 @@
                           <a:ea typeface="대명체 보통" panose="020B0600000101010101" pitchFamily="50" charset="-127"/>
                           <a:cs typeface="+mn-cs"/>
                         </a:rPr>
-                        <a:t>637</a:t>
+                        <a:t>635</a:t>
                       </a:r>
                       <a:endParaRPr lang="en-US" altLang="ko-KR" sz="700" b="0" i="0" u="none" strike="noStrike" kern="1200" dirty="0">
                         <a:solidFill>
@@ -17126,7 +17126,7 @@
                           <a:ea typeface="대명체 보통" panose="020B0600000101010101" pitchFamily="50" charset="-127"/>
                           <a:cs typeface="+mn-cs"/>
                         </a:rPr>
-                        <a:t>132</a:t>
+                        <a:t>130</a:t>
                       </a:r>
                       <a:endParaRPr lang="en-US" altLang="ko-KR" sz="700" b="0" i="0" u="none" strike="noStrike" kern="1200" dirty="0">
                         <a:solidFill>
@@ -17388,7 +17388,7 @@
                           <a:ea typeface="대명체 보통" panose="020B0600000101010101" pitchFamily="50" charset="-127"/>
                           <a:cs typeface="+mn-cs"/>
                         </a:rPr>
-                        <a:t>43</a:t>
+                        <a:t>41</a:t>
                       </a:r>
                     </a:p>
                   </a:txBody>
@@ -17680,7 +17680,7 @@
                           <a:ea typeface="대명체 보통" panose="020B0600000101010101" pitchFamily="50" charset="-127"/>
                           <a:cs typeface="+mn-cs"/>
                         </a:rPr>
-                        <a:t>7,255</a:t>
+                        <a:t>7,254</a:t>
                       </a:r>
                     </a:p>
                   </a:txBody>
@@ -17798,7 +17798,7 @@
                           <a:ea typeface="대명체 보통" panose="020B0600000101010101" pitchFamily="50" charset="-127"/>
                           <a:cs typeface="+mn-cs"/>
                         </a:rPr>
-                        <a:t>1,573</a:t>
+                        <a:t>1,572</a:t>
                       </a:r>
                       <a:endParaRPr lang="en-US" altLang="ko-KR" sz="700" b="0" i="0" u="none" strike="noStrike" kern="1200" dirty="0">
                         <a:solidFill>
@@ -18051,7 +18051,7 @@
                           <a:ea typeface="대명체 보통" panose="020B0600000101010101" pitchFamily="50" charset="-127"/>
                           <a:cs typeface="+mn-cs"/>
                         </a:rPr>
-                        <a:t>2,403</a:t>
+                        <a:t>2,402</a:t>
                       </a:r>
                     </a:p>
                   </a:txBody>

--- a/data/세일즈마케팅_예상매출현황.pptx
+++ b/data/세일즈마케팅_예상매출현황.pptx
@@ -12756,7 +12756,7 @@
                           <a:ea typeface="대명체 보통" panose="020B0600000101010101" pitchFamily="50" charset="-127"/>
                           <a:cs typeface="+mn-cs"/>
                         </a:rPr>
-                        <a:t>16,298</a:t>
+                        <a:t>16,267</a:t>
                       </a:r>
                     </a:p>
                   </a:txBody>
@@ -12882,7 +12882,7 @@
                           <a:ea typeface="대명체 보통" panose="020B0600000101010101" pitchFamily="50" charset="-127"/>
                           <a:cs typeface="+mn-cs"/>
                         </a:rPr>
-                        <a:t>1,479</a:t>
+                        <a:t>1,448</a:t>
                       </a:r>
                     </a:p>
                   </a:txBody>
@@ -13142,7 +13142,7 @@
                           <a:ea typeface="대명체 보통" panose="020B0600000101010101" pitchFamily="50" charset="-127"/>
                           <a:cs typeface="+mn-cs"/>
                         </a:rPr>
-                        <a:t>3,277</a:t>
+                        <a:t>3,246</a:t>
                       </a:r>
                     </a:p>
                   </a:txBody>
@@ -13450,7 +13450,7 @@
                           <a:ea typeface="대명체 보통" panose="020B0600000101010101" pitchFamily="50" charset="-127"/>
                           <a:cs typeface="+mn-cs"/>
                         </a:rPr>
-                        <a:t>108,175</a:t>
+                        <a:t>108,143</a:t>
                       </a:r>
                     </a:p>
                   </a:txBody>
@@ -13576,7 +13576,7 @@
                           <a:ea typeface="대명체 보통" panose="020B0600000101010101" pitchFamily="50" charset="-127"/>
                           <a:cs typeface="+mn-cs"/>
                         </a:rPr>
-                        <a:t>22,908</a:t>
+                        <a:t>22,876</a:t>
                       </a:r>
                     </a:p>
                   </a:txBody>
@@ -13836,7 +13836,7 @@
                           <a:ea typeface="대명체 보통" panose="020B0600000101010101" pitchFamily="50" charset="-127"/>
                           <a:cs typeface="+mn-cs"/>
                         </a:rPr>
-                        <a:t>35,753</a:t>
+                        <a:t>35,721</a:t>
                       </a:r>
                     </a:p>
                   </a:txBody>
@@ -14237,7 +14237,7 @@
                           <a:ea typeface="대명체 보통" panose="020B0600000101010101" pitchFamily="50" charset="-127"/>
                           <a:cs typeface="+mn-cs"/>
                         </a:rPr>
-                        <a:t>9,425</a:t>
+                        <a:t>9,408</a:t>
                       </a:r>
                     </a:p>
                   </a:txBody>
@@ -14355,7 +14355,7 @@
                           <a:ea typeface="대명체 보통" panose="020B0600000101010101" pitchFamily="50" charset="-127"/>
                           <a:cs typeface="+mn-cs"/>
                         </a:rPr>
-                        <a:t>611</a:t>
+                        <a:t>594</a:t>
                       </a:r>
                       <a:endParaRPr lang="en-US" altLang="ko-KR" sz="700" b="0" i="0" u="none" strike="noStrike" kern="1200" dirty="0">
                         <a:solidFill>
@@ -14608,7 +14608,7 @@
                           <a:ea typeface="대명체 보통" panose="020B0600000101010101" pitchFamily="50" charset="-127"/>
                           <a:cs typeface="+mn-cs"/>
                         </a:rPr>
-                        <a:t>1,817</a:t>
+                        <a:t>1,800</a:t>
                       </a:r>
                     </a:p>
                   </a:txBody>
@@ -14900,7 +14900,7 @@
                           <a:ea typeface="대명체 보통" panose="020B0600000101010101" pitchFamily="50" charset="-127"/>
                           <a:cs typeface="+mn-cs"/>
                         </a:rPr>
-                        <a:t>62,121</a:t>
+                        <a:t>62,104</a:t>
                       </a:r>
                     </a:p>
                   </a:txBody>
@@ -15018,7 +15018,7 @@
                           <a:ea typeface="대명체 보통" panose="020B0600000101010101" pitchFamily="50" charset="-127"/>
                           <a:cs typeface="+mn-cs"/>
                         </a:rPr>
-                        <a:t>13,776</a:t>
+                        <a:t>13,759</a:t>
                       </a:r>
                     </a:p>
                   </a:txBody>
@@ -15262,7 +15262,7 @@
                           <a:ea typeface="대명체 보통" panose="020B0600000101010101" pitchFamily="50" charset="-127"/>
                           <a:cs typeface="+mn-cs"/>
                         </a:rPr>
-                        <a:t>22,072</a:t>
+                        <a:t>22,055</a:t>
                       </a:r>
                     </a:p>
                   </a:txBody>
@@ -15643,7 +15643,7 @@
                           <a:ea typeface="대명체 보통" panose="020B0600000101010101" pitchFamily="50" charset="-127"/>
                           <a:cs typeface="+mn-cs"/>
                         </a:rPr>
-                        <a:t>6,237</a:t>
+                        <a:t>6,224</a:t>
                       </a:r>
                     </a:p>
                   </a:txBody>
@@ -15753,7 +15753,7 @@
                           <a:ea typeface="대명체 보통" panose="020B0600000101010101" pitchFamily="50" charset="-127"/>
                           <a:cs typeface="+mn-cs"/>
                         </a:rPr>
-                        <a:t>738</a:t>
+                        <a:t>725</a:t>
                       </a:r>
                       <a:endParaRPr lang="en-US" altLang="ko-KR" sz="700" b="0" i="0" u="none" strike="noStrike" kern="1200" dirty="0">
                         <a:solidFill>
@@ -15990,7 +15990,7 @@
                           <a:ea typeface="대명체 보통" panose="020B0600000101010101" pitchFamily="50" charset="-127"/>
                           <a:cs typeface="+mn-cs"/>
                         </a:rPr>
-                        <a:t>1,418</a:t>
+                        <a:t>1,405</a:t>
                       </a:r>
                     </a:p>
                   </a:txBody>
@@ -16266,7 +16266,7 @@
                           <a:ea typeface="대명체 보통" panose="020B0600000101010101" pitchFamily="50" charset="-127"/>
                           <a:cs typeface="+mn-cs"/>
                         </a:rPr>
-                        <a:t>38,800</a:t>
+                        <a:t>38,787</a:t>
                       </a:r>
                     </a:p>
                   </a:txBody>
@@ -16376,7 +16376,7 @@
                           <a:ea typeface="대명체 보통" panose="020B0600000101010101" pitchFamily="50" charset="-127"/>
                           <a:cs typeface="+mn-cs"/>
                         </a:rPr>
-                        <a:t>7,560</a:t>
+                        <a:t>7,547</a:t>
                       </a:r>
                     </a:p>
                   </a:txBody>
@@ -16604,7 +16604,7 @@
                           <a:ea typeface="대명체 보통" panose="020B0600000101010101" pitchFamily="50" charset="-127"/>
                           <a:cs typeface="+mn-cs"/>
                         </a:rPr>
-                        <a:t>11,279</a:t>
+                        <a:t>11,266</a:t>
                       </a:r>
                     </a:p>
                   </a:txBody>
@@ -16999,7 +16999,7 @@
                           <a:ea typeface="대명체 보통" panose="020B0600000101010101" pitchFamily="50" charset="-127"/>
                           <a:cs typeface="+mn-cs"/>
                         </a:rPr>
-                        <a:t>635</a:t>
+                        <a:t>634</a:t>
                       </a:r>
                       <a:endParaRPr lang="en-US" altLang="ko-KR" sz="700" b="0" i="0" u="none" strike="noStrike" kern="1200" dirty="0">
                         <a:solidFill>
@@ -17126,7 +17126,7 @@
                           <a:ea typeface="대명체 보통" panose="020B0600000101010101" pitchFamily="50" charset="-127"/>
                           <a:cs typeface="+mn-cs"/>
                         </a:rPr>
-                        <a:t>130</a:t>
+                        <a:t>129</a:t>
                       </a:r>
                       <a:endParaRPr lang="en-US" altLang="ko-KR" sz="700" b="0" i="0" u="none" strike="noStrike" kern="1200" dirty="0">
                         <a:solidFill>
@@ -17388,7 +17388,7 @@
                           <a:ea typeface="대명체 보통" panose="020B0600000101010101" pitchFamily="50" charset="-127"/>
                           <a:cs typeface="+mn-cs"/>
                         </a:rPr>
-                        <a:t>41</a:t>
+                        <a:t>40</a:t>
                       </a:r>
                     </a:p>
                   </a:txBody>
@@ -17680,7 +17680,7 @@
                           <a:ea typeface="대명체 보통" panose="020B0600000101010101" pitchFamily="50" charset="-127"/>
                           <a:cs typeface="+mn-cs"/>
                         </a:rPr>
-                        <a:t>7,254</a:t>
+                        <a:t>7,252</a:t>
                       </a:r>
                     </a:p>
                   </a:txBody>
@@ -17798,7 +17798,7 @@
                           <a:ea typeface="대명체 보통" panose="020B0600000101010101" pitchFamily="50" charset="-127"/>
                           <a:cs typeface="+mn-cs"/>
                         </a:rPr>
-                        <a:t>1,572</a:t>
+                        <a:t>1,570</a:t>
                       </a:r>
                       <a:endParaRPr lang="en-US" altLang="ko-KR" sz="700" b="0" i="0" u="none" strike="noStrike" kern="1200" dirty="0">
                         <a:solidFill>
@@ -18051,7 +18051,7 @@
                           <a:ea typeface="대명체 보통" panose="020B0600000101010101" pitchFamily="50" charset="-127"/>
                           <a:cs typeface="+mn-cs"/>
                         </a:rPr>
-                        <a:t>2,402</a:t>
+                        <a:t>2,400</a:t>
                       </a:r>
                     </a:p>
                   </a:txBody>
@@ -18114,7 +18114,7 @@
                           <a:ea typeface="대명체 보통" panose="020B0600000101010101" pitchFamily="50" charset="-127"/>
                           <a:cs typeface="+mn-cs"/>
                         </a:rPr>
-                        <a:t>50%</a:t>
+                        <a:t>49%</a:t>
                       </a:r>
                     </a:p>
                   </a:txBody>

--- a/data/세일즈마케팅_예상매출현황.pptx
+++ b/data/세일즈마케팅_예상매출현황.pptx
@@ -12756,7 +12756,7 @@
                           <a:ea typeface="대명체 보통" panose="020B0600000101010101" pitchFamily="50" charset="-127"/>
                           <a:cs typeface="+mn-cs"/>
                         </a:rPr>
-                        <a:t>16,267</a:t>
+                        <a:t>16,233</a:t>
                       </a:r>
                     </a:p>
                   </a:txBody>
@@ -12882,7 +12882,7 @@
                           <a:ea typeface="대명체 보통" panose="020B0600000101010101" pitchFamily="50" charset="-127"/>
                           <a:cs typeface="+mn-cs"/>
                         </a:rPr>
-                        <a:t>1,448</a:t>
+                        <a:t>1,414</a:t>
                       </a:r>
                     </a:p>
                   </a:txBody>
@@ -13142,7 +13142,7 @@
                           <a:ea typeface="대명체 보통" panose="020B0600000101010101" pitchFamily="50" charset="-127"/>
                           <a:cs typeface="+mn-cs"/>
                         </a:rPr>
-                        <a:t>3,246</a:t>
+                        <a:t>3,212</a:t>
                       </a:r>
                     </a:p>
                   </a:txBody>
@@ -13450,7 +13450,7 @@
                           <a:ea typeface="대명체 보통" panose="020B0600000101010101" pitchFamily="50" charset="-127"/>
                           <a:cs typeface="+mn-cs"/>
                         </a:rPr>
-                        <a:t>108,143</a:t>
+                        <a:t>108,110</a:t>
                       </a:r>
                     </a:p>
                   </a:txBody>
@@ -13576,7 +13576,7 @@
                           <a:ea typeface="대명체 보통" panose="020B0600000101010101" pitchFamily="50" charset="-127"/>
                           <a:cs typeface="+mn-cs"/>
                         </a:rPr>
-                        <a:t>22,876</a:t>
+                        <a:t>22,843</a:t>
                       </a:r>
                     </a:p>
                   </a:txBody>
@@ -13836,7 +13836,7 @@
                           <a:ea typeface="대명체 보통" panose="020B0600000101010101" pitchFamily="50" charset="-127"/>
                           <a:cs typeface="+mn-cs"/>
                         </a:rPr>
-                        <a:t>35,721</a:t>
+                        <a:t>35,688</a:t>
                       </a:r>
                     </a:p>
                   </a:txBody>
@@ -14237,7 +14237,7 @@
                           <a:ea typeface="대명체 보통" panose="020B0600000101010101" pitchFamily="50" charset="-127"/>
                           <a:cs typeface="+mn-cs"/>
                         </a:rPr>
-                        <a:t>9,408</a:t>
+                        <a:t>9,385</a:t>
                       </a:r>
                     </a:p>
                   </a:txBody>
@@ -14355,7 +14355,7 @@
                           <a:ea typeface="대명체 보통" panose="020B0600000101010101" pitchFamily="50" charset="-127"/>
                           <a:cs typeface="+mn-cs"/>
                         </a:rPr>
-                        <a:t>594</a:t>
+                        <a:t>571</a:t>
                       </a:r>
                       <a:endParaRPr lang="en-US" altLang="ko-KR" sz="700" b="0" i="0" u="none" strike="noStrike" kern="1200" dirty="0">
                         <a:solidFill>
@@ -14427,7 +14427,7 @@
                           <a:ea typeface="대명체 보통" panose="020B0600000101010101" pitchFamily="50" charset="-127"/>
                           <a:cs typeface="+mn-cs"/>
                         </a:rPr>
-                        <a:t>107%</a:t>
+                        <a:t>106%</a:t>
                       </a:r>
                     </a:p>
                   </a:txBody>
@@ -14608,7 +14608,7 @@
                           <a:ea typeface="대명체 보통" panose="020B0600000101010101" pitchFamily="50" charset="-127"/>
                           <a:cs typeface="+mn-cs"/>
                         </a:rPr>
-                        <a:t>1,800</a:t>
+                        <a:t>1,777</a:t>
                       </a:r>
                     </a:p>
                   </a:txBody>
@@ -14671,7 +14671,7 @@
                           <a:ea typeface="대명체 보통" panose="020B0600000101010101" pitchFamily="50" charset="-127"/>
                           <a:cs typeface="+mn-cs"/>
                         </a:rPr>
-                        <a:t>24%</a:t>
+                        <a:t>23%</a:t>
                       </a:r>
                     </a:p>
                   </a:txBody>
@@ -14900,7 +14900,7 @@
                           <a:ea typeface="대명체 보통" panose="020B0600000101010101" pitchFamily="50" charset="-127"/>
                           <a:cs typeface="+mn-cs"/>
                         </a:rPr>
-                        <a:t>62,104</a:t>
+                        <a:t>62,081</a:t>
                       </a:r>
                     </a:p>
                   </a:txBody>
@@ -15018,7 +15018,7 @@
                           <a:ea typeface="대명체 보통" panose="020B0600000101010101" pitchFamily="50" charset="-127"/>
                           <a:cs typeface="+mn-cs"/>
                         </a:rPr>
-                        <a:t>13,759</a:t>
+                        <a:t>13,736</a:t>
                       </a:r>
                     </a:p>
                   </a:txBody>
@@ -15262,7 +15262,7 @@
                           <a:ea typeface="대명체 보통" panose="020B0600000101010101" pitchFamily="50" charset="-127"/>
                           <a:cs typeface="+mn-cs"/>
                         </a:rPr>
-                        <a:t>22,055</a:t>
+                        <a:t>22,032</a:t>
                       </a:r>
                     </a:p>
                   </a:txBody>
@@ -15643,7 +15643,7 @@
                           <a:ea typeface="대명체 보통" panose="020B0600000101010101" pitchFamily="50" charset="-127"/>
                           <a:cs typeface="+mn-cs"/>
                         </a:rPr>
-                        <a:t>6,224</a:t>
+                        <a:t>6,212</a:t>
                       </a:r>
                     </a:p>
                   </a:txBody>
@@ -15753,7 +15753,7 @@
                           <a:ea typeface="대명체 보통" panose="020B0600000101010101" pitchFamily="50" charset="-127"/>
                           <a:cs typeface="+mn-cs"/>
                         </a:rPr>
-                        <a:t>725</a:t>
+                        <a:t>713</a:t>
                       </a:r>
                       <a:endParaRPr lang="en-US" altLang="ko-KR" sz="700" b="0" i="0" u="none" strike="noStrike" kern="1200" dirty="0">
                         <a:solidFill>
@@ -15990,7 +15990,7 @@
                           <a:ea typeface="대명체 보통" panose="020B0600000101010101" pitchFamily="50" charset="-127"/>
                           <a:cs typeface="+mn-cs"/>
                         </a:rPr>
-                        <a:t>1,405</a:t>
+                        <a:t>1,393</a:t>
                       </a:r>
                     </a:p>
                   </a:txBody>
@@ -16266,7 +16266,7 @@
                           <a:ea typeface="대명체 보통" panose="020B0600000101010101" pitchFamily="50" charset="-127"/>
                           <a:cs typeface="+mn-cs"/>
                         </a:rPr>
-                        <a:t>38,787</a:t>
+                        <a:t>38,775</a:t>
                       </a:r>
                     </a:p>
                   </a:txBody>
@@ -16376,7 +16376,7 @@
                           <a:ea typeface="대명체 보통" panose="020B0600000101010101" pitchFamily="50" charset="-127"/>
                           <a:cs typeface="+mn-cs"/>
                         </a:rPr>
-                        <a:t>7,547</a:t>
+                        <a:t>7,535</a:t>
                       </a:r>
                     </a:p>
                   </a:txBody>
@@ -16604,7 +16604,7 @@
                           <a:ea typeface="대명체 보통" panose="020B0600000101010101" pitchFamily="50" charset="-127"/>
                           <a:cs typeface="+mn-cs"/>
                         </a:rPr>
-                        <a:t>11,266</a:t>
+                        <a:t>11,254</a:t>
                       </a:r>
                     </a:p>
                   </a:txBody>
@@ -16999,7 +16999,7 @@
                           <a:ea typeface="대명체 보통" panose="020B0600000101010101" pitchFamily="50" charset="-127"/>
                           <a:cs typeface="+mn-cs"/>
                         </a:rPr>
-                        <a:t>634</a:t>
+                        <a:t>635</a:t>
                       </a:r>
                       <a:endParaRPr lang="en-US" altLang="ko-KR" sz="700" b="0" i="0" u="none" strike="noStrike" kern="1200" dirty="0">
                         <a:solidFill>
@@ -17126,7 +17126,7 @@
                           <a:ea typeface="대명체 보통" panose="020B0600000101010101" pitchFamily="50" charset="-127"/>
                           <a:cs typeface="+mn-cs"/>
                         </a:rPr>
-                        <a:t>129</a:t>
+                        <a:t>130</a:t>
                       </a:r>
                       <a:endParaRPr lang="en-US" altLang="ko-KR" sz="700" b="0" i="0" u="none" strike="noStrike" kern="1200" dirty="0">
                         <a:solidFill>
@@ -17388,7 +17388,7 @@
                           <a:ea typeface="대명체 보통" panose="020B0600000101010101" pitchFamily="50" charset="-127"/>
                           <a:cs typeface="+mn-cs"/>
                         </a:rPr>
-                        <a:t>40</a:t>
+                        <a:t>41</a:t>
                       </a:r>
                     </a:p>
                   </a:txBody>
@@ -17680,7 +17680,7 @@
                           <a:ea typeface="대명체 보통" panose="020B0600000101010101" pitchFamily="50" charset="-127"/>
                           <a:cs typeface="+mn-cs"/>
                         </a:rPr>
-                        <a:t>7,252</a:t>
+                        <a:t>7,254</a:t>
                       </a:r>
                     </a:p>
                   </a:txBody>
@@ -17798,7 +17798,7 @@
                           <a:ea typeface="대명체 보통" panose="020B0600000101010101" pitchFamily="50" charset="-127"/>
                           <a:cs typeface="+mn-cs"/>
                         </a:rPr>
-                        <a:t>1,570</a:t>
+                        <a:t>1,572</a:t>
                       </a:r>
                       <a:endParaRPr lang="en-US" altLang="ko-KR" sz="700" b="0" i="0" u="none" strike="noStrike" kern="1200" dirty="0">
                         <a:solidFill>
@@ -18051,7 +18051,7 @@
                           <a:ea typeface="대명체 보통" panose="020B0600000101010101" pitchFamily="50" charset="-127"/>
                           <a:cs typeface="+mn-cs"/>
                         </a:rPr>
-                        <a:t>2,400</a:t>
+                        <a:t>2,402</a:t>
                       </a:r>
                     </a:p>
                   </a:txBody>
@@ -18114,7 +18114,7 @@
                           <a:ea typeface="대명체 보통" panose="020B0600000101010101" pitchFamily="50" charset="-127"/>
                           <a:cs typeface="+mn-cs"/>
                         </a:rPr>
-                        <a:t>49%</a:t>
+                        <a:t>50%</a:t>
                       </a:r>
                     </a:p>
                   </a:txBody>

--- a/data/세일즈마케팅_예상매출현황.pptx
+++ b/data/세일즈마케팅_예상매출현황.pptx
@@ -4058,7 +4058,7 @@
                           <a:latin typeface="대명체 보통" panose="020B0600000101010101" pitchFamily="50" charset="-127"/>
                           <a:ea typeface="대명체 보통" panose="020B0600000101010101" pitchFamily="50" charset="-127"/>
                         </a:rPr>
-                        <a:t>당월 예상실적 (07.01~07.31)</a:t>
+                        <a:t>당월 예상실적 (08.01~08.31)</a:t>
                       </a:r>
                       <a:endParaRPr lang="en-US" altLang="ko-KR" sz="800" b="1" i="0" u="none" strike="noStrike" dirty="0">
                         <a:ln>
@@ -4310,7 +4310,7 @@
                           <a:latin typeface="대명체 보통" panose="020B0600000101010101" pitchFamily="50" charset="-127"/>
                           <a:ea typeface="대명체 보통" panose="020B0600000101010101" pitchFamily="50" charset="-127"/>
                         </a:rPr>
-                        <a:t>누계 실적 (01.01~07.31)</a:t>
+                        <a:t>누계 실적 (01.01~08.31)</a:t>
                       </a:r>
                       <a:endParaRPr lang="en-US" altLang="ko-KR" sz="800" b="1" i="0" u="none" strike="noStrike" dirty="0">
                         <a:ln>
@@ -12756,7 +12756,7 @@
                           <a:ea typeface="대명체 보통" panose="020B0600000101010101" pitchFamily="50" charset="-127"/>
                           <a:cs typeface="+mn-cs"/>
                         </a:rPr>
-                        <a:t>16,233</a:t>
+                        <a:t>16,275</a:t>
                       </a:r>
                     </a:p>
                   </a:txBody>
@@ -12882,7 +12882,7 @@
                           <a:ea typeface="대명체 보통" panose="020B0600000101010101" pitchFamily="50" charset="-127"/>
                           <a:cs typeface="+mn-cs"/>
                         </a:rPr>
-                        <a:t>1,414</a:t>
+                        <a:t>1,456</a:t>
                       </a:r>
                     </a:p>
                   </a:txBody>
@@ -13142,7 +13142,7 @@
                           <a:ea typeface="대명체 보통" panose="020B0600000101010101" pitchFamily="50" charset="-127"/>
                           <a:cs typeface="+mn-cs"/>
                         </a:rPr>
-                        <a:t>3,212</a:t>
+                        <a:t>3,254</a:t>
                       </a:r>
                     </a:p>
                   </a:txBody>
@@ -13450,7 +13450,7 @@
                           <a:ea typeface="대명체 보통" panose="020B0600000101010101" pitchFamily="50" charset="-127"/>
                           <a:cs typeface="+mn-cs"/>
                         </a:rPr>
-                        <a:t>108,110</a:t>
+                        <a:t>109,689</a:t>
                       </a:r>
                     </a:p>
                   </a:txBody>
@@ -13576,7 +13576,7 @@
                           <a:ea typeface="대명체 보통" panose="020B0600000101010101" pitchFamily="50" charset="-127"/>
                           <a:cs typeface="+mn-cs"/>
                         </a:rPr>
-                        <a:t>22,843</a:t>
+                        <a:t>24,422</a:t>
                       </a:r>
                     </a:p>
                   </a:txBody>
@@ -13643,7 +13643,7 @@
                           <a:ea typeface="대명체 보통" panose="020B0600000101010101" pitchFamily="50" charset="-127"/>
                           <a:cs typeface="+mn-cs"/>
                         </a:rPr>
-                        <a:t>127%</a:t>
+                        <a:t>129%</a:t>
                       </a:r>
                     </a:p>
                   </a:txBody>
@@ -13836,7 +13836,7 @@
                           <a:ea typeface="대명체 보통" panose="020B0600000101010101" pitchFamily="50" charset="-127"/>
                           <a:cs typeface="+mn-cs"/>
                         </a:rPr>
-                        <a:t>35,688</a:t>
+                        <a:t>37,267</a:t>
                       </a:r>
                     </a:p>
                   </a:txBody>
@@ -13903,7 +13903,7 @@
                           <a:ea typeface="대명체 보통" panose="020B0600000101010101" pitchFamily="50" charset="-127"/>
                           <a:cs typeface="+mn-cs"/>
                         </a:rPr>
-                        <a:t>49%</a:t>
+                        <a:t>51%</a:t>
                       </a:r>
                     </a:p>
                   </a:txBody>
@@ -14237,7 +14237,7 @@
                           <a:ea typeface="대명체 보통" panose="020B0600000101010101" pitchFamily="50" charset="-127"/>
                           <a:cs typeface="+mn-cs"/>
                         </a:rPr>
-                        <a:t>9,385</a:t>
+                        <a:t>9,419</a:t>
                       </a:r>
                     </a:p>
                   </a:txBody>
@@ -14355,7 +14355,7 @@
                           <a:ea typeface="대명체 보통" panose="020B0600000101010101" pitchFamily="50" charset="-127"/>
                           <a:cs typeface="+mn-cs"/>
                         </a:rPr>
-                        <a:t>571</a:t>
+                        <a:t>605</a:t>
                       </a:r>
                       <a:endParaRPr lang="en-US" altLang="ko-KR" sz="700" b="0" i="0" u="none" strike="noStrike" kern="1200" dirty="0">
                         <a:solidFill>
@@ -14427,7 +14427,7 @@
                           <a:ea typeface="대명체 보통" panose="020B0600000101010101" pitchFamily="50" charset="-127"/>
                           <a:cs typeface="+mn-cs"/>
                         </a:rPr>
-                        <a:t>106%</a:t>
+                        <a:t>107%</a:t>
                       </a:r>
                     </a:p>
                   </a:txBody>
@@ -14608,7 +14608,7 @@
                           <a:ea typeface="대명체 보통" panose="020B0600000101010101" pitchFamily="50" charset="-127"/>
                           <a:cs typeface="+mn-cs"/>
                         </a:rPr>
-                        <a:t>1,777</a:t>
+                        <a:t>1,811</a:t>
                       </a:r>
                     </a:p>
                   </a:txBody>
@@ -14630,6 +14630,294 @@
                           <a:lumMod val="75000"/>
                         </a:schemeClr>
                       </a:solidFill>
+                      <a:prstDash val="solid"/>
+                      <a:round/>
+                      <a:headEnd type="none" w="med" len="med"/>
+                      <a:tailEnd type="none" w="med" len="med"/>
+                    </a:lnR>
+                    <a:lnT w="6350" cap="flat" cmpd="sng" algn="ctr">
+                      <a:solidFill>
+                        <a:schemeClr val="bg2">
+                          <a:lumMod val="75000"/>
+                        </a:schemeClr>
+                      </a:solidFill>
+                      <a:prstDash val="solid"/>
+                      <a:round/>
+                      <a:headEnd type="none" w="med" len="med"/>
+                      <a:tailEnd type="none" w="med" len="med"/>
+                    </a:lnT>
+                    <a:lnB w="6350" cap="flat" cmpd="sng" algn="ctr">
+                      <a:noFill/>
+                      <a:prstDash val="solid"/>
+                      <a:round/>
+                      <a:headEnd type="none" w="med" len="med"/>
+                      <a:tailEnd type="none" w="med" len="med"/>
+                    </a:lnB>
+                  </a:tcPr>
+                </a:tc>
+                <a:tc>
+                  <a:txBody>
+                    <a:bodyPr/>
+                    <a:lstStyle/>
+                    <a:p>
+                      <a:pPr algn="r" rtl="0" fontAlgn="ctr"/>
+                      <a:r>
+                        <a:rPr lang="en-US" altLang="ko-KR" sz="700" b="0" i="0" u="none" strike="noStrike" kern="1200">
+                          <a:solidFill>
+                            <a:srgbClr val="000000"/>
+                          </a:solidFill>
+                          <a:effectLst/>
+                          <a:latin typeface="대명체 보통" panose="020B0600000101010101" pitchFamily="50" charset="-127"/>
+                          <a:ea typeface="대명체 보통" panose="020B0600000101010101" pitchFamily="50" charset="-127"/>
+                          <a:cs typeface="+mn-cs"/>
+                        </a:rPr>
+                        <a:t>24%</a:t>
+                      </a:r>
+                    </a:p>
+                  </a:txBody>
+                  <a:tcPr marL="9525" marR="9525" marT="9525" marB="0" anchor="ctr">
+                    <a:lnL w="6350" cap="flat" cmpd="sng" algn="ctr">
+                      <a:solidFill>
+                        <a:schemeClr val="bg2">
+                          <a:lumMod val="75000"/>
+                        </a:schemeClr>
+                      </a:solidFill>
+                      <a:prstDash val="solid"/>
+                      <a:round/>
+                      <a:headEnd type="none" w="med" len="med"/>
+                      <a:tailEnd type="none" w="med" len="med"/>
+                    </a:lnL>
+                    <a:lnR w="6350" cap="flat" cmpd="sng" algn="ctr">
+                      <a:noFill/>
+                      <a:prstDash val="solid"/>
+                      <a:round/>
+                      <a:headEnd type="none" w="med" len="med"/>
+                      <a:tailEnd type="none" w="med" len="med"/>
+                    </a:lnR>
+                    <a:lnT w="6350" cap="flat" cmpd="sng" algn="ctr">
+                      <a:solidFill>
+                        <a:schemeClr val="bg2">
+                          <a:lumMod val="75000"/>
+                        </a:schemeClr>
+                      </a:solidFill>
+                      <a:prstDash val="solid"/>
+                      <a:round/>
+                      <a:headEnd type="none" w="med" len="med"/>
+                      <a:tailEnd type="none" w="med" len="med"/>
+                    </a:lnT>
+                    <a:lnB w="6350" cap="flat" cmpd="sng" algn="ctr">
+                      <a:noFill/>
+                      <a:prstDash val="solid"/>
+                      <a:round/>
+                      <a:headEnd type="none" w="med" len="med"/>
+                      <a:tailEnd type="none" w="med" len="med"/>
+                    </a:lnB>
+                  </a:tcPr>
+                </a:tc>
+                <a:tc>
+                  <a:txBody>
+                    <a:bodyPr/>
+                    <a:lstStyle/>
+                    <a:p>
+                      <a:pPr algn="r" fontAlgn="ctr"/>
+                      <a:endParaRPr lang="ko-KR" altLang="en-US" sz="700" b="0" i="0" u="none" strike="noStrike" kern="1200">
+                        <a:solidFill>
+                          <a:srgbClr val="000000"/>
+                        </a:solidFill>
+                        <a:effectLst/>
+                        <a:latin typeface="대명체 보통" panose="020B0600000101010101" pitchFamily="50" charset="-127"/>
+                        <a:ea typeface="대명체 보통" panose="020B0600000101010101" pitchFamily="50" charset="-127"/>
+                        <a:cs typeface="+mn-cs"/>
+                      </a:endParaRPr>
+                    </a:p>
+                  </a:txBody>
+                  <a:tcPr marL="9525" marR="9525" marT="9525" marB="0" anchor="ctr">
+                    <a:lnL w="6350" cap="flat" cmpd="sng" algn="ctr">
+                      <a:noFill/>
+                      <a:prstDash val="solid"/>
+                      <a:round/>
+                      <a:headEnd type="none" w="med" len="med"/>
+                      <a:tailEnd type="none" w="med" len="med"/>
+                    </a:lnL>
+                    <a:lnR w="6350" cap="flat" cmpd="sng" algn="ctr">
+                      <a:noFill/>
+                      <a:prstDash val="solid"/>
+                      <a:round/>
+                      <a:headEnd type="none" w="med" len="med"/>
+                      <a:tailEnd type="none" w="med" len="med"/>
+                    </a:lnR>
+                    <a:lnT w="6350" cap="flat" cmpd="sng" algn="ctr">
+                      <a:noFill/>
+                      <a:prstDash val="solid"/>
+                      <a:round/>
+                      <a:headEnd type="none" w="med" len="med"/>
+                      <a:tailEnd type="none" w="med" len="med"/>
+                    </a:lnT>
+                    <a:lnB w="6350" cap="flat" cmpd="sng" algn="ctr">
+                      <a:noFill/>
+                      <a:prstDash val="solid"/>
+                      <a:round/>
+                      <a:headEnd type="none" w="med" len="med"/>
+                      <a:tailEnd type="none" w="med" len="med"/>
+                    </a:lnB>
+                    <a:lnTlToBr w="12700" cmpd="sng">
+                      <a:noFill/>
+                      <a:prstDash val="solid"/>
+                    </a:lnTlToBr>
+                    <a:lnBlToTr w="12700" cmpd="sng">
+                      <a:noFill/>
+                      <a:prstDash val="solid"/>
+                    </a:lnBlToTr>
+                  </a:tcPr>
+                </a:tc>
+                <a:tc>
+                  <a:txBody>
+                    <a:bodyPr/>
+                    <a:lstStyle/>
+                    <a:p>
+                      <a:pPr algn="r" rtl="0" fontAlgn="ctr"/>
+                      <a:r>
+                        <a:rPr lang="en-US" altLang="ko-KR" sz="700" b="0" i="0" u="none" strike="noStrike" kern="1200">
+                          <a:solidFill>
+                            <a:srgbClr val="000000"/>
+                          </a:solidFill>
+                          <a:effectLst/>
+                          <a:latin typeface="대명체 보통" panose="020B0600000101010101" pitchFamily="50" charset="-127"/>
+                          <a:ea typeface="대명체 보통" panose="020B0600000101010101" pitchFamily="50" charset="-127"/>
+                          <a:cs typeface="+mn-cs"/>
+                        </a:rPr>
+                        <a:t>48,345</a:t>
+                      </a:r>
+                    </a:p>
+                  </a:txBody>
+                  <a:tcPr marL="9525" marR="9525" marT="9525" marB="0" anchor="ctr">
+                    <a:lnL w="6350" cap="flat" cmpd="sng" algn="ctr">
+                      <a:noFill/>
+                      <a:prstDash val="solid"/>
+                      <a:round/>
+                      <a:headEnd type="none" w="med" len="med"/>
+                      <a:tailEnd type="none" w="med" len="med"/>
+                    </a:lnL>
+                    <a:lnR w="6350" cap="flat" cmpd="sng" algn="ctr">
+                      <a:noFill/>
+                      <a:prstDash val="solid"/>
+                      <a:round/>
+                      <a:headEnd type="none" w="med" len="med"/>
+                      <a:tailEnd type="none" w="med" len="med"/>
+                    </a:lnR>
+                    <a:lnT w="6350" cap="flat" cmpd="sng" algn="ctr">
+                      <a:solidFill>
+                        <a:schemeClr val="bg2">
+                          <a:lumMod val="75000"/>
+                        </a:schemeClr>
+                      </a:solidFill>
+                      <a:prstDash val="solid"/>
+                      <a:round/>
+                      <a:headEnd type="none" w="med" len="med"/>
+                      <a:tailEnd type="none" w="med" len="med"/>
+                    </a:lnT>
+                    <a:lnB w="6350" cap="flat" cmpd="sng" algn="ctr">
+                      <a:noFill/>
+                      <a:prstDash val="solid"/>
+                      <a:round/>
+                      <a:headEnd type="none" w="med" len="med"/>
+                      <a:tailEnd type="none" w="med" len="med"/>
+                    </a:lnB>
+                  </a:tcPr>
+                </a:tc>
+                <a:tc>
+                  <a:txBody>
+                    <a:bodyPr/>
+                    <a:lstStyle/>
+                    <a:p>
+                      <a:pPr algn="r" rtl="0" fontAlgn="ctr"/>
+                      <a:r>
+                        <a:rPr lang="en-US" altLang="ko-KR" sz="700" b="0" i="0" u="none" strike="noStrike" kern="1200">
+                          <a:solidFill>
+                            <a:srgbClr val="000000"/>
+                          </a:solidFill>
+                          <a:effectLst/>
+                          <a:latin typeface="대명체 보통" panose="020B0600000101010101" pitchFamily="50" charset="-127"/>
+                          <a:ea typeface="대명체 보통" panose="020B0600000101010101" pitchFamily="50" charset="-127"/>
+                          <a:cs typeface="+mn-cs"/>
+                        </a:rPr>
+                        <a:t>14%</a:t>
+                      </a:r>
+                    </a:p>
+                  </a:txBody>
+                  <a:tcPr marL="9525" marR="9525" marT="9525" marB="0" anchor="ctr">
+                    <a:lnL w="6350" cap="flat" cmpd="sng" algn="ctr">
+                      <a:noFill/>
+                      <a:prstDash val="solid"/>
+                      <a:round/>
+                      <a:headEnd type="none" w="med" len="med"/>
+                      <a:tailEnd type="none" w="med" len="med"/>
+                    </a:lnL>
+                    <a:lnR w="6350" cap="flat" cmpd="sng" algn="ctr">
+                      <a:solidFill>
+                        <a:schemeClr val="bg2">
+                          <a:lumMod val="75000"/>
+                        </a:schemeClr>
+                      </a:solidFill>
+                      <a:prstDash val="solid"/>
+                      <a:round/>
+                      <a:headEnd type="none" w="med" len="med"/>
+                      <a:tailEnd type="none" w="med" len="med"/>
+                    </a:lnR>
+                    <a:lnT w="6350" cap="flat" cmpd="sng" algn="ctr">
+                      <a:solidFill>
+                        <a:schemeClr val="bg2">
+                          <a:lumMod val="75000"/>
+                        </a:schemeClr>
+                      </a:solidFill>
+                      <a:prstDash val="solid"/>
+                      <a:round/>
+                      <a:headEnd type="none" w="med" len="med"/>
+                      <a:tailEnd type="none" w="med" len="med"/>
+                    </a:lnT>
+                    <a:lnB w="6350" cap="flat" cmpd="sng" algn="ctr">
+                      <a:noFill/>
+                      <a:prstDash val="solid"/>
+                      <a:round/>
+                      <a:headEnd type="none" w="med" len="med"/>
+                      <a:tailEnd type="none" w="med" len="med"/>
+                    </a:lnB>
+                  </a:tcPr>
+                </a:tc>
+                <a:tc>
+                  <a:txBody>
+                    <a:bodyPr/>
+                    <a:lstStyle/>
+                    <a:p>
+                      <a:pPr algn="r" rtl="0" fontAlgn="ctr"/>
+                      <a:r>
+                        <a:rPr lang="en-US" altLang="ko-KR" sz="700" b="0" i="0" u="none" strike="noStrike" kern="1200">
+                          <a:solidFill>
+                            <a:srgbClr val="000000"/>
+                          </a:solidFill>
+                          <a:effectLst/>
+                          <a:latin typeface="대명체 보통" panose="020B0600000101010101" pitchFamily="50" charset="-127"/>
+                          <a:ea typeface="대명체 보통" panose="020B0600000101010101" pitchFamily="50" charset="-127"/>
+                          <a:cs typeface="+mn-cs"/>
+                        </a:rPr>
+                        <a:t>63,105</a:t>
+                      </a:r>
+                    </a:p>
+                  </a:txBody>
+                  <a:tcPr marL="9525" marR="9525" marT="9525" marB="0" anchor="ctr">
+                    <a:lnL w="6350" cap="flat" cmpd="sng" algn="ctr">
+                      <a:solidFill>
+                        <a:schemeClr val="bg2">
+                          <a:lumMod val="75000"/>
+                        </a:schemeClr>
+                      </a:solidFill>
+                      <a:prstDash val="solid"/>
+                      <a:round/>
+                      <a:headEnd type="none" w="med" len="med"/>
+                      <a:tailEnd type="none" w="med" len="med"/>
+                    </a:lnL>
+                    <a:lnR w="6350" cap="flat" cmpd="sng" algn="ctr">
+                      <a:noFill/>
                       <a:prstDash val="solid"/>
                       <a:round/>
                       <a:headEnd type="none" w="med" len="med"/>
@@ -14677,97 +14965,104 @@
                   </a:txBody>
                   <a:tcPr marL="9525" marR="9525" marT="9525" marB="0" anchor="ctr">
                     <a:lnL w="6350" cap="flat" cmpd="sng" algn="ctr">
-                      <a:solidFill>
-                        <a:schemeClr val="bg2">
-                          <a:lumMod val="75000"/>
-                        </a:schemeClr>
-                      </a:solidFill>
-                      <a:prstDash val="solid"/>
-                      <a:round/>
-                      <a:headEnd type="none" w="med" len="med"/>
-                      <a:tailEnd type="none" w="med" len="med"/>
-                    </a:lnL>
-                    <a:lnR w="6350" cap="flat" cmpd="sng" algn="ctr">
-                      <a:noFill/>
-                      <a:prstDash val="solid"/>
-                      <a:round/>
-                      <a:headEnd type="none" w="med" len="med"/>
-                      <a:tailEnd type="none" w="med" len="med"/>
-                    </a:lnR>
-                    <a:lnT w="6350" cap="flat" cmpd="sng" algn="ctr">
-                      <a:solidFill>
-                        <a:schemeClr val="bg2">
-                          <a:lumMod val="75000"/>
-                        </a:schemeClr>
-                      </a:solidFill>
-                      <a:prstDash val="solid"/>
-                      <a:round/>
-                      <a:headEnd type="none" w="med" len="med"/>
-                      <a:tailEnd type="none" w="med" len="med"/>
-                    </a:lnT>
-                    <a:lnB w="6350" cap="flat" cmpd="sng" algn="ctr">
-                      <a:noFill/>
-                      <a:prstDash val="solid"/>
-                      <a:round/>
-                      <a:headEnd type="none" w="med" len="med"/>
-                      <a:tailEnd type="none" w="med" len="med"/>
-                    </a:lnB>
-                  </a:tcPr>
-                </a:tc>
-                <a:tc>
-                  <a:txBody>
-                    <a:bodyPr/>
-                    <a:lstStyle/>
-                    <a:p>
-                      <a:pPr algn="r" fontAlgn="ctr"/>
-                      <a:endParaRPr lang="ko-KR" altLang="en-US" sz="700" b="0" i="0" u="none" strike="noStrike" kern="1200">
-                        <a:solidFill>
-                          <a:srgbClr val="000000"/>
-                        </a:solidFill>
-                        <a:effectLst/>
-                        <a:latin typeface="대명체 보통" panose="020B0600000101010101" pitchFamily="50" charset="-127"/>
-                        <a:ea typeface="대명체 보통" panose="020B0600000101010101" pitchFamily="50" charset="-127"/>
-                        <a:cs typeface="+mn-cs"/>
-                      </a:endParaRPr>
+                      <a:noFill/>
+                      <a:prstDash val="solid"/>
+                      <a:round/>
+                      <a:headEnd type="none" w="med" len="med"/>
+                      <a:tailEnd type="none" w="med" len="med"/>
+                    </a:lnL>
+                    <a:lnR w="6350" cap="flat" cmpd="sng" algn="ctr">
+                      <a:solidFill>
+                        <a:schemeClr val="bg2">
+                          <a:lumMod val="75000"/>
+                        </a:schemeClr>
+                      </a:solidFill>
+                      <a:prstDash val="solid"/>
+                      <a:round/>
+                      <a:headEnd type="none" w="med" len="med"/>
+                      <a:tailEnd type="none" w="med" len="med"/>
+                    </a:lnR>
+                    <a:lnT w="6350" cap="flat" cmpd="sng" algn="ctr">
+                      <a:solidFill>
+                        <a:schemeClr val="bg2">
+                          <a:lumMod val="75000"/>
+                        </a:schemeClr>
+                      </a:solidFill>
+                      <a:prstDash val="solid"/>
+                      <a:round/>
+                      <a:headEnd type="none" w="med" len="med"/>
+                      <a:tailEnd type="none" w="med" len="med"/>
+                    </a:lnT>
+                    <a:lnB w="6350" cap="flat" cmpd="sng" algn="ctr">
+                      <a:noFill/>
+                      <a:prstDash val="solid"/>
+                      <a:round/>
+                      <a:headEnd type="none" w="med" len="med"/>
+                      <a:tailEnd type="none" w="med" len="med"/>
+                    </a:lnB>
+                  </a:tcPr>
+                </a:tc>
+                <a:tc>
+                  <a:txBody>
+                    <a:bodyPr/>
+                    <a:lstStyle/>
+                    <a:p>
+                      <a:pPr algn="r" rtl="0" fontAlgn="ctr"/>
+                      <a:r>
+                        <a:rPr lang="ko-KR" altLang="en-US" sz="700" b="0" i="0" u="none" strike="noStrike" kern="1200">
+                          <a:solidFill>
+                            <a:srgbClr val="000000"/>
+                          </a:solidFill>
+                          <a:effectLst/>
+                          <a:latin typeface="대명체 보통" panose="020B0600000101010101" pitchFamily="50" charset="-127"/>
+                          <a:ea typeface="대명체 보통" panose="020B0600000101010101" pitchFamily="50" charset="-127"/>
+                          <a:cs typeface="+mn-cs"/>
+                        </a:rPr>
+                        <a:t>14,760</a:t>
+                      </a:r>
                     </a:p>
                   </a:txBody>
                   <a:tcPr marL="9525" marR="9525" marT="9525" marB="0" anchor="ctr">
                     <a:lnL w="6350" cap="flat" cmpd="sng" algn="ctr">
-                      <a:noFill/>
-                      <a:prstDash val="solid"/>
-                      <a:round/>
-                      <a:headEnd type="none" w="med" len="med"/>
-                      <a:tailEnd type="none" w="med" len="med"/>
-                    </a:lnL>
-                    <a:lnR w="6350" cap="flat" cmpd="sng" algn="ctr">
-                      <a:noFill/>
-                      <a:prstDash val="solid"/>
-                      <a:round/>
-                      <a:headEnd type="none" w="med" len="med"/>
-                      <a:tailEnd type="none" w="med" len="med"/>
-                    </a:lnR>
-                    <a:lnT w="6350" cap="flat" cmpd="sng" algn="ctr">
-                      <a:noFill/>
-                      <a:prstDash val="solid"/>
-                      <a:round/>
-                      <a:headEnd type="none" w="med" len="med"/>
-                      <a:tailEnd type="none" w="med" len="med"/>
-                    </a:lnT>
-                    <a:lnB w="6350" cap="flat" cmpd="sng" algn="ctr">
-                      <a:noFill/>
-                      <a:prstDash val="solid"/>
-                      <a:round/>
-                      <a:headEnd type="none" w="med" len="med"/>
-                      <a:tailEnd type="none" w="med" len="med"/>
-                    </a:lnB>
-                    <a:lnTlToBr w="12700" cmpd="sng">
-                      <a:noFill/>
-                      <a:prstDash val="solid"/>
-                    </a:lnTlToBr>
-                    <a:lnBlToTr w="12700" cmpd="sng">
-                      <a:noFill/>
-                      <a:prstDash val="solid"/>
-                    </a:lnBlToTr>
+                      <a:solidFill>
+                        <a:schemeClr val="bg2">
+                          <a:lumMod val="75000"/>
+                        </a:schemeClr>
+                      </a:solidFill>
+                      <a:prstDash val="solid"/>
+                      <a:round/>
+                      <a:headEnd type="none" w="med" len="med"/>
+                      <a:tailEnd type="none" w="med" len="med"/>
+                    </a:lnL>
+                    <a:lnR w="6350" cap="flat" cmpd="sng" algn="ctr">
+                      <a:solidFill>
+                        <a:schemeClr val="bg2">
+                          <a:lumMod val="75000"/>
+                        </a:schemeClr>
+                      </a:solidFill>
+                      <a:prstDash val="solid"/>
+                      <a:round/>
+                      <a:headEnd type="none" w="med" len="med"/>
+                      <a:tailEnd type="none" w="med" len="med"/>
+                    </a:lnR>
+                    <a:lnT w="6350" cap="flat" cmpd="sng" algn="ctr">
+                      <a:solidFill>
+                        <a:schemeClr val="bg2">
+                          <a:lumMod val="75000"/>
+                        </a:schemeClr>
+                      </a:solidFill>
+                      <a:prstDash val="solid"/>
+                      <a:round/>
+                      <a:headEnd type="none" w="med" len="med"/>
+                      <a:tailEnd type="none" w="med" len="med"/>
+                    </a:lnT>
+                    <a:lnB w="6350" cap="flat" cmpd="sng" algn="ctr">
+                      <a:noFill/>
+                      <a:prstDash val="solid"/>
+                      <a:round/>
+                      <a:headEnd type="none" w="med" len="med"/>
+                      <a:tailEnd type="none" w="med" len="med"/>
+                    </a:lnB>
                   </a:tcPr>
                 </a:tc>
                 <a:tc>
@@ -14786,302 +15081,7 @@
                           <a:ea typeface="대명체 보통" panose="020B0600000101010101" pitchFamily="50" charset="-127"/>
                           <a:cs typeface="+mn-cs"/>
                         </a:rPr>
-                        <a:t>48,345</a:t>
-                      </a:r>
-                    </a:p>
-                  </a:txBody>
-                  <a:tcPr marL="9525" marR="9525" marT="9525" marB="0" anchor="ctr">
-                    <a:lnL w="6350" cap="flat" cmpd="sng" algn="ctr">
-                      <a:noFill/>
-                      <a:prstDash val="solid"/>
-                      <a:round/>
-                      <a:headEnd type="none" w="med" len="med"/>
-                      <a:tailEnd type="none" w="med" len="med"/>
-                    </a:lnL>
-                    <a:lnR w="6350" cap="flat" cmpd="sng" algn="ctr">
-                      <a:noFill/>
-                      <a:prstDash val="solid"/>
-                      <a:round/>
-                      <a:headEnd type="none" w="med" len="med"/>
-                      <a:tailEnd type="none" w="med" len="med"/>
-                    </a:lnR>
-                    <a:lnT w="6350" cap="flat" cmpd="sng" algn="ctr">
-                      <a:solidFill>
-                        <a:schemeClr val="bg2">
-                          <a:lumMod val="75000"/>
-                        </a:schemeClr>
-                      </a:solidFill>
-                      <a:prstDash val="solid"/>
-                      <a:round/>
-                      <a:headEnd type="none" w="med" len="med"/>
-                      <a:tailEnd type="none" w="med" len="med"/>
-                    </a:lnT>
-                    <a:lnB w="6350" cap="flat" cmpd="sng" algn="ctr">
-                      <a:noFill/>
-                      <a:prstDash val="solid"/>
-                      <a:round/>
-                      <a:headEnd type="none" w="med" len="med"/>
-                      <a:tailEnd type="none" w="med" len="med"/>
-                    </a:lnB>
-                  </a:tcPr>
-                </a:tc>
-                <a:tc>
-                  <a:txBody>
-                    <a:bodyPr/>
-                    <a:lstStyle/>
-                    <a:p>
-                      <a:pPr algn="r" rtl="0" fontAlgn="ctr"/>
-                      <a:r>
-                        <a:rPr lang="en-US" altLang="ko-KR" sz="700" b="0" i="0" u="none" strike="noStrike" kern="1200">
-                          <a:solidFill>
-                            <a:srgbClr val="000000"/>
-                          </a:solidFill>
-                          <a:effectLst/>
-                          <a:latin typeface="대명체 보통" panose="020B0600000101010101" pitchFamily="50" charset="-127"/>
-                          <a:ea typeface="대명체 보통" panose="020B0600000101010101" pitchFamily="50" charset="-127"/>
-                          <a:cs typeface="+mn-cs"/>
-                        </a:rPr>
-                        <a:t>14%</a:t>
-                      </a:r>
-                    </a:p>
-                  </a:txBody>
-                  <a:tcPr marL="9525" marR="9525" marT="9525" marB="0" anchor="ctr">
-                    <a:lnL w="6350" cap="flat" cmpd="sng" algn="ctr">
-                      <a:noFill/>
-                      <a:prstDash val="solid"/>
-                      <a:round/>
-                      <a:headEnd type="none" w="med" len="med"/>
-                      <a:tailEnd type="none" w="med" len="med"/>
-                    </a:lnL>
-                    <a:lnR w="6350" cap="flat" cmpd="sng" algn="ctr">
-                      <a:solidFill>
-                        <a:schemeClr val="bg2">
-                          <a:lumMod val="75000"/>
-                        </a:schemeClr>
-                      </a:solidFill>
-                      <a:prstDash val="solid"/>
-                      <a:round/>
-                      <a:headEnd type="none" w="med" len="med"/>
-                      <a:tailEnd type="none" w="med" len="med"/>
-                    </a:lnR>
-                    <a:lnT w="6350" cap="flat" cmpd="sng" algn="ctr">
-                      <a:solidFill>
-                        <a:schemeClr val="bg2">
-                          <a:lumMod val="75000"/>
-                        </a:schemeClr>
-                      </a:solidFill>
-                      <a:prstDash val="solid"/>
-                      <a:round/>
-                      <a:headEnd type="none" w="med" len="med"/>
-                      <a:tailEnd type="none" w="med" len="med"/>
-                    </a:lnT>
-                    <a:lnB w="6350" cap="flat" cmpd="sng" algn="ctr">
-                      <a:noFill/>
-                      <a:prstDash val="solid"/>
-                      <a:round/>
-                      <a:headEnd type="none" w="med" len="med"/>
-                      <a:tailEnd type="none" w="med" len="med"/>
-                    </a:lnB>
-                  </a:tcPr>
-                </a:tc>
-                <a:tc>
-                  <a:txBody>
-                    <a:bodyPr/>
-                    <a:lstStyle/>
-                    <a:p>
-                      <a:pPr algn="r" rtl="0" fontAlgn="ctr"/>
-                      <a:r>
-                        <a:rPr lang="en-US" altLang="ko-KR" sz="700" b="0" i="0" u="none" strike="noStrike" kern="1200">
-                          <a:solidFill>
-                            <a:srgbClr val="000000"/>
-                          </a:solidFill>
-                          <a:effectLst/>
-                          <a:latin typeface="대명체 보통" panose="020B0600000101010101" pitchFamily="50" charset="-127"/>
-                          <a:ea typeface="대명체 보통" panose="020B0600000101010101" pitchFamily="50" charset="-127"/>
-                          <a:cs typeface="+mn-cs"/>
-                        </a:rPr>
-                        <a:t>62,081</a:t>
-                      </a:r>
-                    </a:p>
-                  </a:txBody>
-                  <a:tcPr marL="9525" marR="9525" marT="9525" marB="0" anchor="ctr">
-                    <a:lnL w="6350" cap="flat" cmpd="sng" algn="ctr">
-                      <a:solidFill>
-                        <a:schemeClr val="bg2">
-                          <a:lumMod val="75000"/>
-                        </a:schemeClr>
-                      </a:solidFill>
-                      <a:prstDash val="solid"/>
-                      <a:round/>
-                      <a:headEnd type="none" w="med" len="med"/>
-                      <a:tailEnd type="none" w="med" len="med"/>
-                    </a:lnL>
-                    <a:lnR w="6350" cap="flat" cmpd="sng" algn="ctr">
-                      <a:noFill/>
-                      <a:prstDash val="solid"/>
-                      <a:round/>
-                      <a:headEnd type="none" w="med" len="med"/>
-                      <a:tailEnd type="none" w="med" len="med"/>
-                    </a:lnR>
-                    <a:lnT w="6350" cap="flat" cmpd="sng" algn="ctr">
-                      <a:solidFill>
-                        <a:schemeClr val="bg2">
-                          <a:lumMod val="75000"/>
-                        </a:schemeClr>
-                      </a:solidFill>
-                      <a:prstDash val="solid"/>
-                      <a:round/>
-                      <a:headEnd type="none" w="med" len="med"/>
-                      <a:tailEnd type="none" w="med" len="med"/>
-                    </a:lnT>
-                    <a:lnB w="6350" cap="flat" cmpd="sng" algn="ctr">
-                      <a:noFill/>
-                      <a:prstDash val="solid"/>
-                      <a:round/>
-                      <a:headEnd type="none" w="med" len="med"/>
-                      <a:tailEnd type="none" w="med" len="med"/>
-                    </a:lnB>
-                  </a:tcPr>
-                </a:tc>
-                <a:tc>
-                  <a:txBody>
-                    <a:bodyPr/>
-                    <a:lstStyle/>
-                    <a:p>
-                      <a:pPr algn="r" rtl="0" fontAlgn="ctr"/>
-                      <a:r>
-                        <a:rPr lang="en-US" altLang="ko-KR" sz="700" b="0" i="0" u="none" strike="noStrike" kern="1200">
-                          <a:solidFill>
-                            <a:srgbClr val="000000"/>
-                          </a:solidFill>
-                          <a:effectLst/>
-                          <a:latin typeface="대명체 보통" panose="020B0600000101010101" pitchFamily="50" charset="-127"/>
-                          <a:ea typeface="대명체 보통" panose="020B0600000101010101" pitchFamily="50" charset="-127"/>
-                          <a:cs typeface="+mn-cs"/>
-                        </a:rPr>
-                        <a:t>23%</a:t>
-                      </a:r>
-                    </a:p>
-                  </a:txBody>
-                  <a:tcPr marL="9525" marR="9525" marT="9525" marB="0" anchor="ctr">
-                    <a:lnL w="6350" cap="flat" cmpd="sng" algn="ctr">
-                      <a:noFill/>
-                      <a:prstDash val="solid"/>
-                      <a:round/>
-                      <a:headEnd type="none" w="med" len="med"/>
-                      <a:tailEnd type="none" w="med" len="med"/>
-                    </a:lnL>
-                    <a:lnR w="6350" cap="flat" cmpd="sng" algn="ctr">
-                      <a:solidFill>
-                        <a:schemeClr val="bg2">
-                          <a:lumMod val="75000"/>
-                        </a:schemeClr>
-                      </a:solidFill>
-                      <a:prstDash val="solid"/>
-                      <a:round/>
-                      <a:headEnd type="none" w="med" len="med"/>
-                      <a:tailEnd type="none" w="med" len="med"/>
-                    </a:lnR>
-                    <a:lnT w="6350" cap="flat" cmpd="sng" algn="ctr">
-                      <a:solidFill>
-                        <a:schemeClr val="bg2">
-                          <a:lumMod val="75000"/>
-                        </a:schemeClr>
-                      </a:solidFill>
-                      <a:prstDash val="solid"/>
-                      <a:round/>
-                      <a:headEnd type="none" w="med" len="med"/>
-                      <a:tailEnd type="none" w="med" len="med"/>
-                    </a:lnT>
-                    <a:lnB w="6350" cap="flat" cmpd="sng" algn="ctr">
-                      <a:noFill/>
-                      <a:prstDash val="solid"/>
-                      <a:round/>
-                      <a:headEnd type="none" w="med" len="med"/>
-                      <a:tailEnd type="none" w="med" len="med"/>
-                    </a:lnB>
-                  </a:tcPr>
-                </a:tc>
-                <a:tc>
-                  <a:txBody>
-                    <a:bodyPr/>
-                    <a:lstStyle/>
-                    <a:p>
-                      <a:pPr algn="r" rtl="0" fontAlgn="ctr"/>
-                      <a:r>
-                        <a:rPr lang="ko-KR" altLang="en-US" sz="700" b="0" i="0" u="none" strike="noStrike" kern="1200">
-                          <a:solidFill>
-                            <a:srgbClr val="000000"/>
-                          </a:solidFill>
-                          <a:effectLst/>
-                          <a:latin typeface="대명체 보통" panose="020B0600000101010101" pitchFamily="50" charset="-127"/>
-                          <a:ea typeface="대명체 보통" panose="020B0600000101010101" pitchFamily="50" charset="-127"/>
-                          <a:cs typeface="+mn-cs"/>
-                        </a:rPr>
-                        <a:t>13,736</a:t>
-                      </a:r>
-                    </a:p>
-                  </a:txBody>
-                  <a:tcPr marL="9525" marR="9525" marT="9525" marB="0" anchor="ctr">
-                    <a:lnL w="6350" cap="flat" cmpd="sng" algn="ctr">
-                      <a:solidFill>
-                        <a:schemeClr val="bg2">
-                          <a:lumMod val="75000"/>
-                        </a:schemeClr>
-                      </a:solidFill>
-                      <a:prstDash val="solid"/>
-                      <a:round/>
-                      <a:headEnd type="none" w="med" len="med"/>
-                      <a:tailEnd type="none" w="med" len="med"/>
-                    </a:lnL>
-                    <a:lnR w="6350" cap="flat" cmpd="sng" algn="ctr">
-                      <a:solidFill>
-                        <a:schemeClr val="bg2">
-                          <a:lumMod val="75000"/>
-                        </a:schemeClr>
-                      </a:solidFill>
-                      <a:prstDash val="solid"/>
-                      <a:round/>
-                      <a:headEnd type="none" w="med" len="med"/>
-                      <a:tailEnd type="none" w="med" len="med"/>
-                    </a:lnR>
-                    <a:lnT w="6350" cap="flat" cmpd="sng" algn="ctr">
-                      <a:solidFill>
-                        <a:schemeClr val="bg2">
-                          <a:lumMod val="75000"/>
-                        </a:schemeClr>
-                      </a:solidFill>
-                      <a:prstDash val="solid"/>
-                      <a:round/>
-                      <a:headEnd type="none" w="med" len="med"/>
-                      <a:tailEnd type="none" w="med" len="med"/>
-                    </a:lnT>
-                    <a:lnB w="6350" cap="flat" cmpd="sng" algn="ctr">
-                      <a:noFill/>
-                      <a:prstDash val="solid"/>
-                      <a:round/>
-                      <a:headEnd type="none" w="med" len="med"/>
-                      <a:tailEnd type="none" w="med" len="med"/>
-                    </a:lnB>
-                  </a:tcPr>
-                </a:tc>
-                <a:tc>
-                  <a:txBody>
-                    <a:bodyPr/>
-                    <a:lstStyle/>
-                    <a:p>
-                      <a:pPr algn="r" rtl="0" fontAlgn="ctr"/>
-                      <a:r>
-                        <a:rPr lang="en-US" altLang="ko-KR" sz="700" b="0" i="0" u="none" strike="noStrike" kern="1200">
-                          <a:solidFill>
-                            <a:srgbClr val="000000"/>
-                          </a:solidFill>
-                          <a:effectLst/>
-                          <a:latin typeface="대명체 보통" panose="020B0600000101010101" pitchFamily="50" charset="-127"/>
-                          <a:ea typeface="대명체 보통" panose="020B0600000101010101" pitchFamily="50" charset="-127"/>
-                          <a:cs typeface="+mn-cs"/>
-                        </a:rPr>
-                        <a:t>128%</a:t>
+                        <a:t>131%</a:t>
                       </a:r>
                     </a:p>
                   </a:txBody>
@@ -15262,7 +15262,7 @@
                           <a:ea typeface="대명체 보통" panose="020B0600000101010101" pitchFamily="50" charset="-127"/>
                           <a:cs typeface="+mn-cs"/>
                         </a:rPr>
-                        <a:t>22,032</a:t>
+                        <a:t>23,056</a:t>
                       </a:r>
                     </a:p>
                   </a:txBody>
@@ -15325,7 +15325,7 @@
                           <a:ea typeface="대명체 보통" panose="020B0600000101010101" pitchFamily="50" charset="-127"/>
                           <a:cs typeface="+mn-cs"/>
                         </a:rPr>
-                        <a:t>55%</a:t>
+                        <a:t>58%</a:t>
                       </a:r>
                     </a:p>
                   </a:txBody>
@@ -15643,7 +15643,7 @@
                           <a:ea typeface="대명체 보통" panose="020B0600000101010101" pitchFamily="50" charset="-127"/>
                           <a:cs typeface="+mn-cs"/>
                         </a:rPr>
-                        <a:t>6,212</a:t>
+                        <a:t>6,246</a:t>
                       </a:r>
                     </a:p>
                   </a:txBody>
@@ -15753,7 +15753,7 @@
                           <a:ea typeface="대명체 보통" panose="020B0600000101010101" pitchFamily="50" charset="-127"/>
                           <a:cs typeface="+mn-cs"/>
                         </a:rPr>
-                        <a:t>713</a:t>
+                        <a:t>747</a:t>
                       </a:r>
                       <a:endParaRPr lang="en-US" altLang="ko-KR" sz="700" b="0" i="0" u="none" strike="noStrike" kern="1200" dirty="0">
                         <a:solidFill>
@@ -15821,7 +15821,7 @@
                           <a:ea typeface="대명체 보통" panose="020B0600000101010101" pitchFamily="50" charset="-127"/>
                           <a:cs typeface="+mn-cs"/>
                         </a:rPr>
-                        <a:t>113%</a:t>
+                        <a:t>114%</a:t>
                       </a:r>
                     </a:p>
                   </a:txBody>
@@ -15990,7 +15990,7 @@
                           <a:ea typeface="대명체 보통" panose="020B0600000101010101" pitchFamily="50" charset="-127"/>
                           <a:cs typeface="+mn-cs"/>
                         </a:rPr>
-                        <a:t>1,393</a:t>
+                        <a:t>1,427</a:t>
                       </a:r>
                     </a:p>
                   </a:txBody>
@@ -16049,7 +16049,7 @@
                           <a:ea typeface="대명체 보통" panose="020B0600000101010101" pitchFamily="50" charset="-127"/>
                           <a:cs typeface="+mn-cs"/>
                         </a:rPr>
-                        <a:t>29%</a:t>
+                        <a:t>30%</a:t>
                       </a:r>
                     </a:p>
                   </a:txBody>
@@ -16266,7 +16266,7 @@
                           <a:ea typeface="대명체 보통" panose="020B0600000101010101" pitchFamily="50" charset="-127"/>
                           <a:cs typeface="+mn-cs"/>
                         </a:rPr>
-                        <a:t>38,775</a:t>
+                        <a:t>39,174</a:t>
                       </a:r>
                     </a:p>
                   </a:txBody>
@@ -16376,7 +16376,7 @@
                           <a:ea typeface="대명체 보통" panose="020B0600000101010101" pitchFamily="50" charset="-127"/>
                           <a:cs typeface="+mn-cs"/>
                         </a:rPr>
-                        <a:t>7,535</a:t>
+                        <a:t>7,934</a:t>
                       </a:r>
                     </a:p>
                   </a:txBody>
@@ -16435,7 +16435,7 @@
                           <a:ea typeface="대명체 보통" panose="020B0600000101010101" pitchFamily="50" charset="-127"/>
                           <a:cs typeface="+mn-cs"/>
                         </a:rPr>
-                        <a:t>124%</a:t>
+                        <a:t>125%</a:t>
                       </a:r>
                     </a:p>
                   </a:txBody>
@@ -16604,7 +16604,7 @@
                           <a:ea typeface="대명체 보통" panose="020B0600000101010101" pitchFamily="50" charset="-127"/>
                           <a:cs typeface="+mn-cs"/>
                         </a:rPr>
-                        <a:t>11,254</a:t>
+                        <a:t>11,653</a:t>
                       </a:r>
                     </a:p>
                   </a:txBody>
@@ -16663,7 +16663,7 @@
                           <a:ea typeface="대명체 보통" panose="020B0600000101010101" pitchFamily="50" charset="-127"/>
                           <a:cs typeface="+mn-cs"/>
                         </a:rPr>
-                        <a:t>41%</a:t>
+                        <a:t>42%</a:t>
                       </a:r>
                     </a:p>
                   </a:txBody>
@@ -16999,7 +16999,7 @@
                           <a:ea typeface="대명체 보통" panose="020B0600000101010101" pitchFamily="50" charset="-127"/>
                           <a:cs typeface="+mn-cs"/>
                         </a:rPr>
-                        <a:t>635</a:t>
+                        <a:t>609</a:t>
                       </a:r>
                       <a:endParaRPr lang="en-US" altLang="ko-KR" sz="700" b="0" i="0" u="none" strike="noStrike" kern="1200" dirty="0">
                         <a:solidFill>
@@ -17126,7 +17126,7 @@
                           <a:ea typeface="대명체 보통" panose="020B0600000101010101" pitchFamily="50" charset="-127"/>
                           <a:cs typeface="+mn-cs"/>
                         </a:rPr>
-                        <a:t>130</a:t>
+                        <a:t>104</a:t>
                       </a:r>
                       <a:endParaRPr lang="en-US" altLang="ko-KR" sz="700" b="0" i="0" u="none" strike="noStrike" kern="1200" dirty="0">
                         <a:solidFill>
@@ -17198,7 +17198,7 @@
                           <a:ea typeface="대명체 보통" panose="020B0600000101010101" pitchFamily="50" charset="-127"/>
                           <a:cs typeface="+mn-cs"/>
                         </a:rPr>
-                        <a:t>126%</a:t>
+                        <a:t>121%</a:t>
                       </a:r>
                     </a:p>
                   </a:txBody>
@@ -17388,7 +17388,7 @@
                           <a:ea typeface="대명체 보통" panose="020B0600000101010101" pitchFamily="50" charset="-127"/>
                           <a:cs typeface="+mn-cs"/>
                         </a:rPr>
-                        <a:t>41</a:t>
+                        <a:t>15</a:t>
                       </a:r>
                     </a:p>
                   </a:txBody>
@@ -17451,7 +17451,7 @@
                           <a:ea typeface="대명체 보통" panose="020B0600000101010101" pitchFamily="50" charset="-127"/>
                           <a:cs typeface="+mn-cs"/>
                         </a:rPr>
-                        <a:t>7%</a:t>
+                        <a:t>3%</a:t>
                       </a:r>
                     </a:p>
                   </a:txBody>
@@ -17680,7 +17680,7 @@
                           <a:ea typeface="대명체 보통" panose="020B0600000101010101" pitchFamily="50" charset="-127"/>
                           <a:cs typeface="+mn-cs"/>
                         </a:rPr>
-                        <a:t>7,254</a:t>
+                        <a:t>7,410</a:t>
                       </a:r>
                     </a:p>
                   </a:txBody>
@@ -17798,7 +17798,7 @@
                           <a:ea typeface="대명체 보통" panose="020B0600000101010101" pitchFamily="50" charset="-127"/>
                           <a:cs typeface="+mn-cs"/>
                         </a:rPr>
-                        <a:t>1,572</a:t>
+                        <a:t>1,728</a:t>
                       </a:r>
                       <a:endParaRPr lang="en-US" altLang="ko-KR" sz="700" b="0" i="0" u="none" strike="noStrike" kern="1200" dirty="0">
                         <a:solidFill>
@@ -17870,7 +17870,7 @@
                           <a:ea typeface="대명체 보통" panose="020B0600000101010101" pitchFamily="50" charset="-127"/>
                           <a:cs typeface="+mn-cs"/>
                         </a:rPr>
-                        <a:t>128%</a:t>
+                        <a:t>130%</a:t>
                       </a:r>
                     </a:p>
                   </a:txBody>
@@ -18051,7 +18051,7 @@
                           <a:ea typeface="대명체 보통" panose="020B0600000101010101" pitchFamily="50" charset="-127"/>
                           <a:cs typeface="+mn-cs"/>
                         </a:rPr>
-                        <a:t>2,402</a:t>
+                        <a:t>2,558</a:t>
                       </a:r>
                     </a:p>
                   </a:txBody>
@@ -18114,7 +18114,7 @@
                           <a:ea typeface="대명체 보통" panose="020B0600000101010101" pitchFamily="50" charset="-127"/>
                           <a:cs typeface="+mn-cs"/>
                         </a:rPr>
-                        <a:t>50%</a:t>
+                        <a:t>53%</a:t>
                       </a:r>
                     </a:p>
                   </a:txBody>

--- a/data/세일즈마케팅_예상매출현황.pptx
+++ b/data/세일즈마케팅_예상매출현황.pptx
@@ -12630,7 +12630,7 @@
                           <a:ea typeface="대명체 보통" panose="020B0600000101010101" pitchFamily="50" charset="-127"/>
                           <a:cs typeface="+mn-cs"/>
                         </a:rPr>
-                        <a:t>14,819</a:t>
+                        <a:t>23,859</a:t>
                       </a:r>
                     </a:p>
                   </a:txBody>
@@ -12756,7 +12756,7 @@
                           <a:ea typeface="대명체 보통" panose="020B0600000101010101" pitchFamily="50" charset="-127"/>
                           <a:cs typeface="+mn-cs"/>
                         </a:rPr>
-                        <a:t>16,275</a:t>
+                        <a:t>26,932</a:t>
                       </a:r>
                     </a:p>
                   </a:txBody>
@@ -12882,7 +12882,7 @@
                           <a:ea typeface="대명체 보통" panose="020B0600000101010101" pitchFamily="50" charset="-127"/>
                           <a:cs typeface="+mn-cs"/>
                         </a:rPr>
-                        <a:t>1,456</a:t>
+                        <a:t>3,073</a:t>
                       </a:r>
                     </a:p>
                   </a:txBody>
@@ -12949,7 +12949,7 @@
                           <a:ea typeface="대명체 보통" panose="020B0600000101010101" pitchFamily="50" charset="-127"/>
                           <a:cs typeface="+mn-cs"/>
                         </a:rPr>
-                        <a:t>110%</a:t>
+                        <a:t>113%</a:t>
                       </a:r>
                     </a:p>
                   </a:txBody>
@@ -13016,7 +13016,7 @@
                           <a:ea typeface="대명체 보통" panose="020B0600000101010101" pitchFamily="50" charset="-127"/>
                           <a:cs typeface="+mn-cs"/>
                         </a:rPr>
-                        <a:t>13,021</a:t>
+                        <a:t>14,412</a:t>
                       </a:r>
                     </a:p>
                   </a:txBody>
@@ -13142,7 +13142,7 @@
                           <a:ea typeface="대명체 보통" panose="020B0600000101010101" pitchFamily="50" charset="-127"/>
                           <a:cs typeface="+mn-cs"/>
                         </a:rPr>
-                        <a:t>3,254</a:t>
+                        <a:t>12,520</a:t>
                       </a:r>
                     </a:p>
                   </a:txBody>
@@ -13209,7 +13209,7 @@
                           <a:ea typeface="대명체 보통" panose="020B0600000101010101" pitchFamily="50" charset="-127"/>
                           <a:cs typeface="+mn-cs"/>
                         </a:rPr>
-                        <a:t>25%</a:t>
+                        <a:t>87%</a:t>
                       </a:r>
                     </a:p>
                   </a:txBody>
@@ -13328,7 +13328,7 @@
                           <a:ea typeface="대명체 보통" panose="020B0600000101010101" pitchFamily="50" charset="-127"/>
                           <a:cs typeface="+mn-cs"/>
                         </a:rPr>
-                        <a:t>85,267</a:t>
+                        <a:t>124,921</a:t>
                       </a:r>
                     </a:p>
                   </a:txBody>
@@ -13450,7 +13450,7 @@
                           <a:ea typeface="대명체 보통" panose="020B0600000101010101" pitchFamily="50" charset="-127"/>
                           <a:cs typeface="+mn-cs"/>
                         </a:rPr>
-                        <a:t>109,689</a:t>
+                        <a:t>140,988</a:t>
                       </a:r>
                     </a:p>
                   </a:txBody>
@@ -13576,7 +13576,7 @@
                           <a:ea typeface="대명체 보통" panose="020B0600000101010101" pitchFamily="50" charset="-127"/>
                           <a:cs typeface="+mn-cs"/>
                         </a:rPr>
-                        <a:t>24,422</a:t>
+                        <a:t>16,067</a:t>
                       </a:r>
                     </a:p>
                   </a:txBody>
@@ -13643,7 +13643,7 @@
                           <a:ea typeface="대명체 보통" panose="020B0600000101010101" pitchFamily="50" charset="-127"/>
                           <a:cs typeface="+mn-cs"/>
                         </a:rPr>
-                        <a:t>129%</a:t>
+                        <a:t>113%</a:t>
                       </a:r>
                     </a:p>
                   </a:txBody>
@@ -13710,7 +13710,7 @@
                           <a:ea typeface="대명체 보통" panose="020B0600000101010101" pitchFamily="50" charset="-127"/>
                           <a:cs typeface="+mn-cs"/>
                         </a:rPr>
-                        <a:t>72,422</a:t>
+                        <a:t>95,529</a:t>
                       </a:r>
                     </a:p>
                   </a:txBody>
@@ -13836,7 +13836,7 @@
                           <a:ea typeface="대명체 보통" panose="020B0600000101010101" pitchFamily="50" charset="-127"/>
                           <a:cs typeface="+mn-cs"/>
                         </a:rPr>
-                        <a:t>37,267</a:t>
+                        <a:t>45,459</a:t>
                       </a:r>
                     </a:p>
                   </a:txBody>
@@ -13903,7 +13903,7 @@
                           <a:ea typeface="대명체 보통" panose="020B0600000101010101" pitchFamily="50" charset="-127"/>
                           <a:cs typeface="+mn-cs"/>
                         </a:rPr>
-                        <a:t>51%</a:t>
+                        <a:t>48%</a:t>
                       </a:r>
                     </a:p>
                   </a:txBody>
@@ -14119,7 +14119,7 @@
                           <a:ea typeface="대명체 보통" panose="020B0600000101010101" pitchFamily="50" charset="-127"/>
                           <a:cs typeface="+mn-cs"/>
                         </a:rPr>
-                        <a:t>8,814</a:t>
+                        <a:t>14,604</a:t>
                       </a:r>
                     </a:p>
                   </a:txBody>
@@ -14237,7 +14237,7 @@
                           <a:ea typeface="대명체 보통" panose="020B0600000101010101" pitchFamily="50" charset="-127"/>
                           <a:cs typeface="+mn-cs"/>
                         </a:rPr>
-                        <a:t>9,419</a:t>
+                        <a:t>16,580</a:t>
                       </a:r>
                     </a:p>
                   </a:txBody>
@@ -14355,7 +14355,7 @@
                           <a:ea typeface="대명체 보통" panose="020B0600000101010101" pitchFamily="50" charset="-127"/>
                           <a:cs typeface="+mn-cs"/>
                         </a:rPr>
-                        <a:t>605</a:t>
+                        <a:t>1,976</a:t>
                       </a:r>
                       <a:endParaRPr lang="en-US" altLang="ko-KR" sz="700" b="0" i="0" u="none" strike="noStrike" kern="1200" dirty="0">
                         <a:solidFill>
@@ -14427,7 +14427,7 @@
                           <a:ea typeface="대명체 보통" panose="020B0600000101010101" pitchFamily="50" charset="-127"/>
                           <a:cs typeface="+mn-cs"/>
                         </a:rPr>
-                        <a:t>107%</a:t>
+                        <a:t>114%</a:t>
                       </a:r>
                     </a:p>
                   </a:txBody>
@@ -14490,7 +14490,7 @@
                           <a:ea typeface="대명체 보통" panose="020B0600000101010101" pitchFamily="50" charset="-127"/>
                           <a:cs typeface="+mn-cs"/>
                         </a:rPr>
-                        <a:t>7,608</a:t>
+                        <a:t>8,704</a:t>
                       </a:r>
                     </a:p>
                   </a:txBody>
@@ -14608,7 +14608,7 @@
                           <a:ea typeface="대명체 보통" panose="020B0600000101010101" pitchFamily="50" charset="-127"/>
                           <a:cs typeface="+mn-cs"/>
                         </a:rPr>
-                        <a:t>1,811</a:t>
+                        <a:t>7,877</a:t>
                       </a:r>
                     </a:p>
                   </a:txBody>
@@ -14671,7 +14671,7 @@
                           <a:ea typeface="대명체 보통" panose="020B0600000101010101" pitchFamily="50" charset="-127"/>
                           <a:cs typeface="+mn-cs"/>
                         </a:rPr>
-                        <a:t>24%</a:t>
+                        <a:t>90%</a:t>
                       </a:r>
                     </a:p>
                   </a:txBody>
@@ -14786,7 +14786,7 @@
                           <a:ea typeface="대명체 보통" panose="020B0600000101010101" pitchFamily="50" charset="-127"/>
                           <a:cs typeface="+mn-cs"/>
                         </a:rPr>
-                        <a:t>48,345</a:t>
+                        <a:t>72,351</a:t>
                       </a:r>
                     </a:p>
                   </a:txBody>
@@ -14900,7 +14900,7 @@
                           <a:ea typeface="대명체 보통" panose="020B0600000101010101" pitchFamily="50" charset="-127"/>
                           <a:cs typeface="+mn-cs"/>
                         </a:rPr>
-                        <a:t>63,105</a:t>
+                        <a:t>82,918</a:t>
                       </a:r>
                     </a:p>
                   </a:txBody>
@@ -15018,7 +15018,7 @@
                           <a:ea typeface="대명체 보통" panose="020B0600000101010101" pitchFamily="50" charset="-127"/>
                           <a:cs typeface="+mn-cs"/>
                         </a:rPr>
-                        <a:t>14,760</a:t>
+                        <a:t>10,567</a:t>
                       </a:r>
                     </a:p>
                   </a:txBody>
@@ -15081,7 +15081,7 @@
                           <a:ea typeface="대명체 보통" panose="020B0600000101010101" pitchFamily="50" charset="-127"/>
                           <a:cs typeface="+mn-cs"/>
                         </a:rPr>
-                        <a:t>131%</a:t>
+                        <a:t>115%</a:t>
                       </a:r>
                     </a:p>
                   </a:txBody>
@@ -15144,7 +15144,7 @@
                           <a:ea typeface="대명체 보통" panose="020B0600000101010101" pitchFamily="50" charset="-127"/>
                           <a:cs typeface="+mn-cs"/>
                         </a:rPr>
-                        <a:t>40,049</a:t>
+                        <a:t>54,245</a:t>
                       </a:r>
                     </a:p>
                   </a:txBody>
@@ -15262,7 +15262,7 @@
                           <a:ea typeface="대명체 보통" panose="020B0600000101010101" pitchFamily="50" charset="-127"/>
                           <a:cs typeface="+mn-cs"/>
                         </a:rPr>
-                        <a:t>23,056</a:t>
+                        <a:t>28,673</a:t>
                       </a:r>
                     </a:p>
                   </a:txBody>
@@ -15325,7 +15325,7 @@
                           <a:ea typeface="대명체 보통" panose="020B0600000101010101" pitchFamily="50" charset="-127"/>
                           <a:cs typeface="+mn-cs"/>
                         </a:rPr>
-                        <a:t>58%</a:t>
+                        <a:t>53%</a:t>
                       </a:r>
                     </a:p>
                   </a:txBody>
@@ -15533,7 +15533,7 @@
                           <a:ea typeface="대명체 보통" panose="020B0600000101010101" pitchFamily="50" charset="-127"/>
                           <a:cs typeface="+mn-cs"/>
                         </a:rPr>
-                        <a:t>5,499</a:t>
+                        <a:t>8,857</a:t>
                       </a:r>
                     </a:p>
                   </a:txBody>
@@ -15643,7 +15643,7 @@
                           <a:ea typeface="대명체 보통" panose="020B0600000101010101" pitchFamily="50" charset="-127"/>
                           <a:cs typeface="+mn-cs"/>
                         </a:rPr>
-                        <a:t>6,246</a:t>
+                        <a:t>9,833</a:t>
                       </a:r>
                     </a:p>
                   </a:txBody>
@@ -15753,7 +15753,7 @@
                           <a:ea typeface="대명체 보통" panose="020B0600000101010101" pitchFamily="50" charset="-127"/>
                           <a:cs typeface="+mn-cs"/>
                         </a:rPr>
-                        <a:t>747</a:t>
+                        <a:t>976</a:t>
                       </a:r>
                       <a:endParaRPr lang="en-US" altLang="ko-KR" sz="700" b="0" i="0" u="none" strike="noStrike" kern="1200" dirty="0">
                         <a:solidFill>
@@ -15821,7 +15821,7 @@
                           <a:ea typeface="대명체 보통" panose="020B0600000101010101" pitchFamily="50" charset="-127"/>
                           <a:cs typeface="+mn-cs"/>
                         </a:rPr>
-                        <a:t>114%</a:t>
+                        <a:t>111%</a:t>
                       </a:r>
                     </a:p>
                   </a:txBody>
@@ -15880,7 +15880,7 @@
                           <a:ea typeface="대명체 보통" panose="020B0600000101010101" pitchFamily="50" charset="-127"/>
                           <a:cs typeface="+mn-cs"/>
                         </a:rPr>
-                        <a:t>4,819</a:t>
+                        <a:t>5,448</a:t>
                       </a:r>
                     </a:p>
                   </a:txBody>
@@ -15990,7 +15990,7 @@
                           <a:ea typeface="대명체 보통" panose="020B0600000101010101" pitchFamily="50" charset="-127"/>
                           <a:cs typeface="+mn-cs"/>
                         </a:rPr>
-                        <a:t>1,427</a:t>
+                        <a:t>4,385</a:t>
                       </a:r>
                     </a:p>
                   </a:txBody>
@@ -16049,7 +16049,7 @@
                           <a:ea typeface="대명체 보통" panose="020B0600000101010101" pitchFamily="50" charset="-127"/>
                           <a:cs typeface="+mn-cs"/>
                         </a:rPr>
-                        <a:t>30%</a:t>
+                        <a:t>80%</a:t>
                       </a:r>
                     </a:p>
                   </a:txBody>
@@ -16160,7 +16160,7 @@
                           <a:ea typeface="대명체 보통" panose="020B0600000101010101" pitchFamily="50" charset="-127"/>
                           <a:cs typeface="+mn-cs"/>
                         </a:rPr>
-                        <a:t>31,240</a:t>
+                        <a:t>49,103</a:t>
                       </a:r>
                     </a:p>
                   </a:txBody>
@@ -16266,7 +16266,7 @@
                           <a:ea typeface="대명체 보통" panose="020B0600000101010101" pitchFamily="50" charset="-127"/>
                           <a:cs typeface="+mn-cs"/>
                         </a:rPr>
-                        <a:t>39,174</a:t>
+                        <a:t>52,925</a:t>
                       </a:r>
                     </a:p>
                   </a:txBody>
@@ -16376,7 +16376,7 @@
                           <a:ea typeface="대명체 보통" panose="020B0600000101010101" pitchFamily="50" charset="-127"/>
                           <a:cs typeface="+mn-cs"/>
                         </a:rPr>
-                        <a:t>7,934</a:t>
+                        <a:t>3,821</a:t>
                       </a:r>
                     </a:p>
                   </a:txBody>
@@ -16435,7 +16435,7 @@
                           <a:ea typeface="대명체 보통" panose="020B0600000101010101" pitchFamily="50" charset="-127"/>
                           <a:cs typeface="+mn-cs"/>
                         </a:rPr>
-                        <a:t>125%</a:t>
+                        <a:t>108%</a:t>
                       </a:r>
                     </a:p>
                   </a:txBody>
@@ -16494,7 +16494,7 @@
                           <a:ea typeface="대명체 보통" panose="020B0600000101010101" pitchFamily="50" charset="-127"/>
                           <a:cs typeface="+mn-cs"/>
                         </a:rPr>
-                        <a:t>27,521</a:t>
+                        <a:t>38,186</a:t>
                       </a:r>
                     </a:p>
                   </a:txBody>
@@ -16604,7 +16604,7 @@
                           <a:ea typeface="대명체 보통" panose="020B0600000101010101" pitchFamily="50" charset="-127"/>
                           <a:cs typeface="+mn-cs"/>
                         </a:rPr>
-                        <a:t>11,653</a:t>
+                        <a:t>14,738</a:t>
                       </a:r>
                     </a:p>
                   </a:txBody>
@@ -16663,7 +16663,7 @@
                           <a:ea typeface="대명체 보통" panose="020B0600000101010101" pitchFamily="50" charset="-127"/>
                           <a:cs typeface="+mn-cs"/>
                         </a:rPr>
-                        <a:t>42%</a:t>
+                        <a:t>39%</a:t>
                       </a:r>
                     </a:p>
                   </a:txBody>
@@ -16872,7 +16872,7 @@
                           <a:ea typeface="대명체 보통" panose="020B0600000101010101" pitchFamily="50" charset="-127"/>
                           <a:cs typeface="+mn-cs"/>
                         </a:rPr>
-                        <a:t>505 </a:t>
+                        <a:t>399</a:t>
                       </a:r>
                       <a:endParaRPr lang="en-US" altLang="ko-KR" sz="700" b="0" i="0" u="none" strike="noStrike" kern="1200" dirty="0">
                         <a:solidFill>
@@ -16999,7 +16999,7 @@
                           <a:ea typeface="대명체 보통" panose="020B0600000101010101" pitchFamily="50" charset="-127"/>
                           <a:cs typeface="+mn-cs"/>
                         </a:rPr>
-                        <a:t>609</a:t>
+                        <a:t>519</a:t>
                       </a:r>
                       <a:endParaRPr lang="en-US" altLang="ko-KR" sz="700" b="0" i="0" u="none" strike="noStrike" kern="1200" dirty="0">
                         <a:solidFill>
@@ -17126,7 +17126,7 @@
                           <a:ea typeface="대명체 보통" panose="020B0600000101010101" pitchFamily="50" charset="-127"/>
                           <a:cs typeface="+mn-cs"/>
                         </a:rPr>
-                        <a:t>104</a:t>
+                        <a:t>120</a:t>
                       </a:r>
                       <a:endParaRPr lang="en-US" altLang="ko-KR" sz="700" b="0" i="0" u="none" strike="noStrike" kern="1200" dirty="0">
                         <a:solidFill>
@@ -17198,7 +17198,7 @@
                           <a:ea typeface="대명체 보통" panose="020B0600000101010101" pitchFamily="50" charset="-127"/>
                           <a:cs typeface="+mn-cs"/>
                         </a:rPr>
-                        <a:t>121%</a:t>
+                        <a:t>130%</a:t>
                       </a:r>
                     </a:p>
                   </a:txBody>
@@ -17261,7 +17261,7 @@
                           <a:ea typeface="대명체 보통" panose="020B0600000101010101" pitchFamily="50" charset="-127"/>
                           <a:cs typeface="+mn-cs"/>
                         </a:rPr>
-                        <a:t>594 </a:t>
+                        <a:t>260</a:t>
                       </a:r>
                       <a:endParaRPr lang="en-US" altLang="ko-KR" sz="700" b="0" i="0" u="none" strike="noStrike" kern="1200" dirty="0">
                         <a:solidFill>
@@ -17388,7 +17388,7 @@
                           <a:ea typeface="대명체 보통" panose="020B0600000101010101" pitchFamily="50" charset="-127"/>
                           <a:cs typeface="+mn-cs"/>
                         </a:rPr>
-                        <a:t>15</a:t>
+                        <a:t>258</a:t>
                       </a:r>
                     </a:p>
                   </a:txBody>
@@ -17451,7 +17451,7 @@
                           <a:ea typeface="대명체 보통" panose="020B0600000101010101" pitchFamily="50" charset="-127"/>
                           <a:cs typeface="+mn-cs"/>
                         </a:rPr>
-                        <a:t>3%</a:t>
+                        <a:t>99%</a:t>
                       </a:r>
                     </a:p>
                   </a:txBody>
@@ -17566,7 +17566,7 @@
                           <a:ea typeface="대명체 보통" panose="020B0600000101010101" pitchFamily="50" charset="-127"/>
                           <a:cs typeface="+mn-cs"/>
                         </a:rPr>
-                        <a:t>5,682</a:t>
+                        <a:t>3,467</a:t>
                       </a:r>
                     </a:p>
                   </a:txBody>
@@ -17680,7 +17680,7 @@
                           <a:ea typeface="대명체 보통" panose="020B0600000101010101" pitchFamily="50" charset="-127"/>
                           <a:cs typeface="+mn-cs"/>
                         </a:rPr>
-                        <a:t>7,410</a:t>
+                        <a:t>5,146</a:t>
                       </a:r>
                     </a:p>
                   </a:txBody>
@@ -17798,7 +17798,7 @@
                           <a:ea typeface="대명체 보통" panose="020B0600000101010101" pitchFamily="50" charset="-127"/>
                           <a:cs typeface="+mn-cs"/>
                         </a:rPr>
-                        <a:t>1,728</a:t>
+                        <a:t>1,679</a:t>
                       </a:r>
                       <a:endParaRPr lang="en-US" altLang="ko-KR" sz="700" b="0" i="0" u="none" strike="noStrike" kern="1200" dirty="0">
                         <a:solidFill>
@@ -17870,7 +17870,7 @@
                           <a:ea typeface="대명체 보통" panose="020B0600000101010101" pitchFamily="50" charset="-127"/>
                           <a:cs typeface="+mn-cs"/>
                         </a:rPr>
-                        <a:t>130%</a:t>
+                        <a:t>148%</a:t>
                       </a:r>
                     </a:p>
                   </a:txBody>
@@ -17933,7 +17933,7 @@
                           <a:ea typeface="대명체 보통" panose="020B0600000101010101" pitchFamily="50" charset="-127"/>
                           <a:cs typeface="+mn-cs"/>
                         </a:rPr>
-                        <a:t>4,852</a:t>
+                        <a:t>3,098</a:t>
                       </a:r>
                     </a:p>
                   </a:txBody>
@@ -18051,7 +18051,7 @@
                           <a:ea typeface="대명체 보통" panose="020B0600000101010101" pitchFamily="50" charset="-127"/>
                           <a:cs typeface="+mn-cs"/>
                         </a:rPr>
-                        <a:t>2,558</a:t>
+                        <a:t>2,047</a:t>
                       </a:r>
                     </a:p>
                   </a:txBody>
@@ -18114,7 +18114,7 @@
                           <a:ea typeface="대명체 보통" panose="020B0600000101010101" pitchFamily="50" charset="-127"/>
                           <a:cs typeface="+mn-cs"/>
                         </a:rPr>
-                        <a:t>53%</a:t>
+                        <a:t>66%</a:t>
                       </a:r>
                     </a:p>
                   </a:txBody>

--- a/data/세일즈마케팅_예상매출현황.pptx
+++ b/data/세일즈마케팅_예상매출현황.pptx
@@ -12756,7 +12756,7 @@
                           <a:ea typeface="대명체 보통" panose="020B0600000101010101" pitchFamily="50" charset="-127"/>
                           <a:cs typeface="+mn-cs"/>
                         </a:rPr>
-                        <a:t>26,932</a:t>
+                        <a:t>26,847</a:t>
                       </a:r>
                     </a:p>
                   </a:txBody>
@@ -12882,7 +12882,7 @@
                           <a:ea typeface="대명체 보통" panose="020B0600000101010101" pitchFamily="50" charset="-127"/>
                           <a:cs typeface="+mn-cs"/>
                         </a:rPr>
-                        <a:t>3,073</a:t>
+                        <a:t>2,988</a:t>
                       </a:r>
                     </a:p>
                   </a:txBody>
@@ -13016,7 +13016,7 @@
                           <a:ea typeface="대명체 보통" panose="020B0600000101010101" pitchFamily="50" charset="-127"/>
                           <a:cs typeface="+mn-cs"/>
                         </a:rPr>
-                        <a:t>14,412</a:t>
+                        <a:t>14,728</a:t>
                       </a:r>
                     </a:p>
                   </a:txBody>
@@ -13142,7 +13142,7 @@
                           <a:ea typeface="대명체 보통" panose="020B0600000101010101" pitchFamily="50" charset="-127"/>
                           <a:cs typeface="+mn-cs"/>
                         </a:rPr>
-                        <a:t>12,520</a:t>
+                        <a:t>12,119</a:t>
                       </a:r>
                     </a:p>
                   </a:txBody>
@@ -13209,7 +13209,7 @@
                           <a:ea typeface="대명체 보통" panose="020B0600000101010101" pitchFamily="50" charset="-127"/>
                           <a:cs typeface="+mn-cs"/>
                         </a:rPr>
-                        <a:t>87%</a:t>
+                        <a:t>82%</a:t>
                       </a:r>
                     </a:p>
                   </a:txBody>
@@ -13450,7 +13450,7 @@
                           <a:ea typeface="대명체 보통" panose="020B0600000101010101" pitchFamily="50" charset="-127"/>
                           <a:cs typeface="+mn-cs"/>
                         </a:rPr>
-                        <a:t>140,988</a:t>
+                        <a:t>140,909</a:t>
                       </a:r>
                     </a:p>
                   </a:txBody>
@@ -13576,7 +13576,7 @@
                           <a:ea typeface="대명체 보통" panose="020B0600000101010101" pitchFamily="50" charset="-127"/>
                           <a:cs typeface="+mn-cs"/>
                         </a:rPr>
-                        <a:t>16,067</a:t>
+                        <a:t>15,988</a:t>
                       </a:r>
                     </a:p>
                   </a:txBody>
@@ -13710,7 +13710,7 @@
                           <a:ea typeface="대명체 보통" panose="020B0600000101010101" pitchFamily="50" charset="-127"/>
                           <a:cs typeface="+mn-cs"/>
                         </a:rPr>
-                        <a:t>95,529</a:t>
+                        <a:t>95,882</a:t>
                       </a:r>
                     </a:p>
                   </a:txBody>
@@ -13836,7 +13836,7 @@
                           <a:ea typeface="대명체 보통" panose="020B0600000101010101" pitchFamily="50" charset="-127"/>
                           <a:cs typeface="+mn-cs"/>
                         </a:rPr>
-                        <a:t>45,459</a:t>
+                        <a:t>45,027</a:t>
                       </a:r>
                     </a:p>
                   </a:txBody>
@@ -13903,7 +13903,7 @@
                           <a:ea typeface="대명체 보통" panose="020B0600000101010101" pitchFamily="50" charset="-127"/>
                           <a:cs typeface="+mn-cs"/>
                         </a:rPr>
-                        <a:t>48%</a:t>
+                        <a:t>47%</a:t>
                       </a:r>
                     </a:p>
                   </a:txBody>
@@ -14237,7 +14237,7 @@
                           <a:ea typeface="대명체 보통" panose="020B0600000101010101" pitchFamily="50" charset="-127"/>
                           <a:cs typeface="+mn-cs"/>
                         </a:rPr>
-                        <a:t>16,580</a:t>
+                        <a:t>16,537</a:t>
                       </a:r>
                     </a:p>
                   </a:txBody>
@@ -14355,7 +14355,7 @@
                           <a:ea typeface="대명체 보통" panose="020B0600000101010101" pitchFamily="50" charset="-127"/>
                           <a:cs typeface="+mn-cs"/>
                         </a:rPr>
-                        <a:t>1,976</a:t>
+                        <a:t>1,934</a:t>
                       </a:r>
                       <a:endParaRPr lang="en-US" altLang="ko-KR" sz="700" b="0" i="0" u="none" strike="noStrike" kern="1200" dirty="0">
                         <a:solidFill>
@@ -14427,7 +14427,7 @@
                           <a:ea typeface="대명체 보통" panose="020B0600000101010101" pitchFamily="50" charset="-127"/>
                           <a:cs typeface="+mn-cs"/>
                         </a:rPr>
-                        <a:t>114%</a:t>
+                        <a:t>113%</a:t>
                       </a:r>
                     </a:p>
                   </a:txBody>
@@ -14490,7 +14490,7 @@
                           <a:ea typeface="대명체 보통" panose="020B0600000101010101" pitchFamily="50" charset="-127"/>
                           <a:cs typeface="+mn-cs"/>
                         </a:rPr>
-                        <a:t>8,704</a:t>
+                        <a:t>8,895</a:t>
                       </a:r>
                     </a:p>
                   </a:txBody>
@@ -14608,7 +14608,7 @@
                           <a:ea typeface="대명체 보통" panose="020B0600000101010101" pitchFamily="50" charset="-127"/>
                           <a:cs typeface="+mn-cs"/>
                         </a:rPr>
-                        <a:t>7,877</a:t>
+                        <a:t>7,642</a:t>
                       </a:r>
                     </a:p>
                   </a:txBody>
@@ -14671,7 +14671,7 @@
                           <a:ea typeface="대명체 보통" panose="020B0600000101010101" pitchFamily="50" charset="-127"/>
                           <a:cs typeface="+mn-cs"/>
                         </a:rPr>
-                        <a:t>90%</a:t>
+                        <a:t>86%</a:t>
                       </a:r>
                     </a:p>
                   </a:txBody>
@@ -14900,7 +14900,7 @@
                           <a:ea typeface="대명체 보통" panose="020B0600000101010101" pitchFamily="50" charset="-127"/>
                           <a:cs typeface="+mn-cs"/>
                         </a:rPr>
-                        <a:t>82,918</a:t>
+                        <a:t>82,878</a:t>
                       </a:r>
                     </a:p>
                   </a:txBody>
@@ -15018,7 +15018,7 @@
                           <a:ea typeface="대명체 보통" panose="020B0600000101010101" pitchFamily="50" charset="-127"/>
                           <a:cs typeface="+mn-cs"/>
                         </a:rPr>
-                        <a:t>10,567</a:t>
+                        <a:t>10,527</a:t>
                       </a:r>
                     </a:p>
                   </a:txBody>
@@ -15144,7 +15144,7 @@
                           <a:ea typeface="대명체 보통" panose="020B0600000101010101" pitchFamily="50" charset="-127"/>
                           <a:cs typeface="+mn-cs"/>
                         </a:rPr>
-                        <a:t>54,245</a:t>
+                        <a:t>54,460</a:t>
                       </a:r>
                     </a:p>
                   </a:txBody>
@@ -15262,7 +15262,7 @@
                           <a:ea typeface="대명체 보통" panose="020B0600000101010101" pitchFamily="50" charset="-127"/>
                           <a:cs typeface="+mn-cs"/>
                         </a:rPr>
-                        <a:t>28,673</a:t>
+                        <a:t>28,419</a:t>
                       </a:r>
                     </a:p>
                   </a:txBody>
@@ -15325,7 +15325,7 @@
                           <a:ea typeface="대명체 보통" panose="020B0600000101010101" pitchFamily="50" charset="-127"/>
                           <a:cs typeface="+mn-cs"/>
                         </a:rPr>
-                        <a:t>53%</a:t>
+                        <a:t>52%</a:t>
                       </a:r>
                     </a:p>
                   </a:txBody>
@@ -15643,7 +15643,7 @@
                           <a:ea typeface="대명체 보통" panose="020B0600000101010101" pitchFamily="50" charset="-127"/>
                           <a:cs typeface="+mn-cs"/>
                         </a:rPr>
-                        <a:t>9,833</a:t>
+                        <a:t>9,790</a:t>
                       </a:r>
                     </a:p>
                   </a:txBody>
@@ -15753,7 +15753,7 @@
                           <a:ea typeface="대명체 보통" panose="020B0600000101010101" pitchFamily="50" charset="-127"/>
                           <a:cs typeface="+mn-cs"/>
                         </a:rPr>
-                        <a:t>976</a:t>
+                        <a:t>933</a:t>
                       </a:r>
                       <a:endParaRPr lang="en-US" altLang="ko-KR" sz="700" b="0" i="0" u="none" strike="noStrike" kern="1200" dirty="0">
                         <a:solidFill>
@@ -15880,7 +15880,7 @@
                           <a:ea typeface="대명체 보통" panose="020B0600000101010101" pitchFamily="50" charset="-127"/>
                           <a:cs typeface="+mn-cs"/>
                         </a:rPr>
-                        <a:t>5,448</a:t>
+                        <a:t>5,571</a:t>
                       </a:r>
                     </a:p>
                   </a:txBody>
@@ -15990,7 +15990,7 @@
                           <a:ea typeface="대명체 보통" panose="020B0600000101010101" pitchFamily="50" charset="-127"/>
                           <a:cs typeface="+mn-cs"/>
                         </a:rPr>
-                        <a:t>4,385</a:t>
+                        <a:t>4,219</a:t>
                       </a:r>
                     </a:p>
                   </a:txBody>
@@ -16049,7 +16049,7 @@
                           <a:ea typeface="대명체 보통" panose="020B0600000101010101" pitchFamily="50" charset="-127"/>
                           <a:cs typeface="+mn-cs"/>
                         </a:rPr>
-                        <a:t>80%</a:t>
+                        <a:t>76%</a:t>
                       </a:r>
                     </a:p>
                   </a:txBody>
@@ -16266,7 +16266,7 @@
                           <a:ea typeface="대명체 보통" panose="020B0600000101010101" pitchFamily="50" charset="-127"/>
                           <a:cs typeface="+mn-cs"/>
                         </a:rPr>
-                        <a:t>52,925</a:t>
+                        <a:t>52,885</a:t>
                       </a:r>
                     </a:p>
                   </a:txBody>
@@ -16376,7 +16376,7 @@
                           <a:ea typeface="대명체 보통" panose="020B0600000101010101" pitchFamily="50" charset="-127"/>
                           <a:cs typeface="+mn-cs"/>
                         </a:rPr>
-                        <a:t>3,821</a:t>
+                        <a:t>3,782</a:t>
                       </a:r>
                     </a:p>
                   </a:txBody>
@@ -16494,7 +16494,7 @@
                           <a:ea typeface="대명체 보통" panose="020B0600000101010101" pitchFamily="50" charset="-127"/>
                           <a:cs typeface="+mn-cs"/>
                         </a:rPr>
-                        <a:t>38,186</a:t>
+                        <a:t>38,322</a:t>
                       </a:r>
                     </a:p>
                   </a:txBody>
@@ -16604,7 +16604,7 @@
                           <a:ea typeface="대명체 보통" panose="020B0600000101010101" pitchFamily="50" charset="-127"/>
                           <a:cs typeface="+mn-cs"/>
                         </a:rPr>
-                        <a:t>14,738</a:t>
+                        <a:t>14,563</a:t>
                       </a:r>
                     </a:p>
                   </a:txBody>
@@ -16663,7 +16663,7 @@
                           <a:ea typeface="대명체 보통" panose="020B0600000101010101" pitchFamily="50" charset="-127"/>
                           <a:cs typeface="+mn-cs"/>
                         </a:rPr>
-                        <a:t>39%</a:t>
+                        <a:t>38%</a:t>
                       </a:r>
                     </a:p>
                   </a:txBody>
@@ -16999,7 +16999,7 @@
                           <a:ea typeface="대명체 보통" panose="020B0600000101010101" pitchFamily="50" charset="-127"/>
                           <a:cs typeface="+mn-cs"/>
                         </a:rPr>
-                        <a:t>519</a:t>
+                        <a:t>520</a:t>
                       </a:r>
                       <a:endParaRPr lang="en-US" altLang="ko-KR" sz="700" b="0" i="0" u="none" strike="noStrike" kern="1200" dirty="0">
                         <a:solidFill>
@@ -17126,7 +17126,7 @@
                           <a:ea typeface="대명체 보통" panose="020B0600000101010101" pitchFamily="50" charset="-127"/>
                           <a:cs typeface="+mn-cs"/>
                         </a:rPr>
-                        <a:t>120</a:t>
+                        <a:t>121</a:t>
                       </a:r>
                       <a:endParaRPr lang="en-US" altLang="ko-KR" sz="700" b="0" i="0" u="none" strike="noStrike" kern="1200" dirty="0">
                         <a:solidFill>
@@ -17261,7 +17261,7 @@
                           <a:ea typeface="대명체 보통" panose="020B0600000101010101" pitchFamily="50" charset="-127"/>
                           <a:cs typeface="+mn-cs"/>
                         </a:rPr>
-                        <a:t>260</a:t>
+                        <a:t>262</a:t>
                       </a:r>
                       <a:endParaRPr lang="en-US" altLang="ko-KR" sz="700" b="0" i="0" u="none" strike="noStrike" kern="1200" dirty="0">
                         <a:solidFill>
@@ -17451,7 +17451,7 @@
                           <a:ea typeface="대명체 보통" panose="020B0600000101010101" pitchFamily="50" charset="-127"/>
                           <a:cs typeface="+mn-cs"/>
                         </a:rPr>
-                        <a:t>99%</a:t>
+                        <a:t>98%</a:t>
                       </a:r>
                     </a:p>
                   </a:txBody>
@@ -17798,7 +17798,7 @@
                           <a:ea typeface="대명체 보통" panose="020B0600000101010101" pitchFamily="50" charset="-127"/>
                           <a:cs typeface="+mn-cs"/>
                         </a:rPr>
-                        <a:t>1,679</a:t>
+                        <a:t>1,678</a:t>
                       </a:r>
                       <a:endParaRPr lang="en-US" altLang="ko-KR" sz="700" b="0" i="0" u="none" strike="noStrike" kern="1200" dirty="0">
                         <a:solidFill>
@@ -17933,7 +17933,7 @@
                           <a:ea typeface="대명체 보통" panose="020B0600000101010101" pitchFamily="50" charset="-127"/>
                           <a:cs typeface="+mn-cs"/>
                         </a:rPr>
-                        <a:t>3,098</a:t>
+                        <a:t>3,100</a:t>
                       </a:r>
                     </a:p>
                   </a:txBody>
@@ -18051,7 +18051,7 @@
                           <a:ea typeface="대명체 보통" panose="020B0600000101010101" pitchFamily="50" charset="-127"/>
                           <a:cs typeface="+mn-cs"/>
                         </a:rPr>
-                        <a:t>2,047</a:t>
+                        <a:t>2,045</a:t>
                       </a:r>
                     </a:p>
                   </a:txBody>

--- a/data/세일즈마케팅_예상매출현황.pptx
+++ b/data/세일즈마케팅_예상매출현황.pptx
@@ -12756,7 +12756,7 @@
                           <a:ea typeface="대명체 보통" panose="020B0600000101010101" pitchFamily="50" charset="-127"/>
                           <a:cs typeface="+mn-cs"/>
                         </a:rPr>
-                        <a:t>26,847</a:t>
+                        <a:t>29,526</a:t>
                       </a:r>
                     </a:p>
                   </a:txBody>
@@ -12882,7 +12882,7 @@
                           <a:ea typeface="대명체 보통" panose="020B0600000101010101" pitchFamily="50" charset="-127"/>
                           <a:cs typeface="+mn-cs"/>
                         </a:rPr>
-                        <a:t>2,988</a:t>
+                        <a:t>5,667</a:t>
                       </a:r>
                     </a:p>
                   </a:txBody>
@@ -12949,7 +12949,7 @@
                           <a:ea typeface="대명체 보통" panose="020B0600000101010101" pitchFamily="50" charset="-127"/>
                           <a:cs typeface="+mn-cs"/>
                         </a:rPr>
-                        <a:t>113%</a:t>
+                        <a:t>124%</a:t>
                       </a:r>
                     </a:p>
                   </a:txBody>
@@ -13142,7 +13142,7 @@
                           <a:ea typeface="대명체 보통" panose="020B0600000101010101" pitchFamily="50" charset="-127"/>
                           <a:cs typeface="+mn-cs"/>
                         </a:rPr>
-                        <a:t>12,119</a:t>
+                        <a:t>14,798</a:t>
                       </a:r>
                     </a:p>
                   </a:txBody>
@@ -13209,7 +13209,7 @@
                           <a:ea typeface="대명체 보통" panose="020B0600000101010101" pitchFamily="50" charset="-127"/>
                           <a:cs typeface="+mn-cs"/>
                         </a:rPr>
-                        <a:t>82%</a:t>
+                        <a:t>100%</a:t>
                       </a:r>
                     </a:p>
                   </a:txBody>
@@ -13450,7 +13450,7 @@
                           <a:ea typeface="대명체 보통" panose="020B0600000101010101" pitchFamily="50" charset="-127"/>
                           <a:cs typeface="+mn-cs"/>
                         </a:rPr>
-                        <a:t>140,909</a:t>
+                        <a:t>145,981</a:t>
                       </a:r>
                     </a:p>
                   </a:txBody>
@@ -13576,7 +13576,7 @@
                           <a:ea typeface="대명체 보통" panose="020B0600000101010101" pitchFamily="50" charset="-127"/>
                           <a:cs typeface="+mn-cs"/>
                         </a:rPr>
-                        <a:t>15,988</a:t>
+                        <a:t>21,060</a:t>
                       </a:r>
                     </a:p>
                   </a:txBody>
@@ -13643,7 +13643,7 @@
                           <a:ea typeface="대명체 보통" panose="020B0600000101010101" pitchFamily="50" charset="-127"/>
                           <a:cs typeface="+mn-cs"/>
                         </a:rPr>
-                        <a:t>113%</a:t>
+                        <a:t>117%</a:t>
                       </a:r>
                     </a:p>
                   </a:txBody>
@@ -13710,7 +13710,7 @@
                           <a:ea typeface="대명체 보통" panose="020B0600000101010101" pitchFamily="50" charset="-127"/>
                           <a:cs typeface="+mn-cs"/>
                         </a:rPr>
-                        <a:t>95,882</a:t>
+                        <a:t>95,892</a:t>
                       </a:r>
                     </a:p>
                   </a:txBody>
@@ -13836,7 +13836,7 @@
                           <a:ea typeface="대명체 보통" panose="020B0600000101010101" pitchFamily="50" charset="-127"/>
                           <a:cs typeface="+mn-cs"/>
                         </a:rPr>
-                        <a:t>45,027</a:t>
+                        <a:t>50,089</a:t>
                       </a:r>
                     </a:p>
                   </a:txBody>
@@ -13903,7 +13903,7 @@
                           <a:ea typeface="대명체 보통" panose="020B0600000101010101" pitchFamily="50" charset="-127"/>
                           <a:cs typeface="+mn-cs"/>
                         </a:rPr>
-                        <a:t>47%</a:t>
+                        <a:t>52%</a:t>
                       </a:r>
                     </a:p>
                   </a:txBody>
@@ -14237,7 +14237,7 @@
                           <a:ea typeface="대명체 보통" panose="020B0600000101010101" pitchFamily="50" charset="-127"/>
                           <a:cs typeface="+mn-cs"/>
                         </a:rPr>
-                        <a:t>16,537</a:t>
+                        <a:t>17,284</a:t>
                       </a:r>
                     </a:p>
                   </a:txBody>
@@ -14355,7 +14355,7 @@
                           <a:ea typeface="대명체 보통" panose="020B0600000101010101" pitchFamily="50" charset="-127"/>
                           <a:cs typeface="+mn-cs"/>
                         </a:rPr>
-                        <a:t>1,934</a:t>
+                        <a:t>2,681</a:t>
                       </a:r>
                       <a:endParaRPr lang="en-US" altLang="ko-KR" sz="700" b="0" i="0" u="none" strike="noStrike" kern="1200" dirty="0">
                         <a:solidFill>
@@ -14427,7 +14427,7 @@
                           <a:ea typeface="대명체 보통" panose="020B0600000101010101" pitchFamily="50" charset="-127"/>
                           <a:cs typeface="+mn-cs"/>
                         </a:rPr>
-                        <a:t>113%</a:t>
+                        <a:t>118%</a:t>
                       </a:r>
                     </a:p>
                   </a:txBody>
@@ -14608,7 +14608,7 @@
                           <a:ea typeface="대명체 보통" panose="020B0600000101010101" pitchFamily="50" charset="-127"/>
                           <a:cs typeface="+mn-cs"/>
                         </a:rPr>
-                        <a:t>7,642</a:t>
+                        <a:t>8,390</a:t>
                       </a:r>
                     </a:p>
                   </a:txBody>
@@ -14671,7 +14671,7 @@
                           <a:ea typeface="대명체 보통" panose="020B0600000101010101" pitchFamily="50" charset="-127"/>
                           <a:cs typeface="+mn-cs"/>
                         </a:rPr>
-                        <a:t>86%</a:t>
+                        <a:t>94%</a:t>
                       </a:r>
                     </a:p>
                   </a:txBody>
@@ -14900,7 +14900,7 @@
                           <a:ea typeface="대명체 보통" panose="020B0600000101010101" pitchFamily="50" charset="-127"/>
                           <a:cs typeface="+mn-cs"/>
                         </a:rPr>
-                        <a:t>82,878</a:t>
+                        <a:t>84,998</a:t>
                       </a:r>
                     </a:p>
                   </a:txBody>
@@ -15018,7 +15018,7 @@
                           <a:ea typeface="대명체 보통" panose="020B0600000101010101" pitchFamily="50" charset="-127"/>
                           <a:cs typeface="+mn-cs"/>
                         </a:rPr>
-                        <a:t>10,527</a:t>
+                        <a:t>12,647</a:t>
                       </a:r>
                     </a:p>
                   </a:txBody>
@@ -15081,7 +15081,7 @@
                           <a:ea typeface="대명체 보통" panose="020B0600000101010101" pitchFamily="50" charset="-127"/>
                           <a:cs typeface="+mn-cs"/>
                         </a:rPr>
-                        <a:t>115%</a:t>
+                        <a:t>117%</a:t>
                       </a:r>
                     </a:p>
                   </a:txBody>
@@ -15144,7 +15144,7 @@
                           <a:ea typeface="대명체 보통" panose="020B0600000101010101" pitchFamily="50" charset="-127"/>
                           <a:cs typeface="+mn-cs"/>
                         </a:rPr>
-                        <a:t>54,460</a:t>
+                        <a:t>54,468</a:t>
                       </a:r>
                     </a:p>
                   </a:txBody>
@@ -15262,7 +15262,7 @@
                           <a:ea typeface="대명체 보통" panose="020B0600000101010101" pitchFamily="50" charset="-127"/>
                           <a:cs typeface="+mn-cs"/>
                         </a:rPr>
-                        <a:t>28,419</a:t>
+                        <a:t>30,530</a:t>
                       </a:r>
                     </a:p>
                   </a:txBody>
@@ -15325,7 +15325,7 @@
                           <a:ea typeface="대명체 보통" panose="020B0600000101010101" pitchFamily="50" charset="-127"/>
                           <a:cs typeface="+mn-cs"/>
                         </a:rPr>
-                        <a:t>52%</a:t>
+                        <a:t>56%</a:t>
                       </a:r>
                     </a:p>
                   </a:txBody>
@@ -15643,7 +15643,7 @@
                           <a:ea typeface="대명체 보통" panose="020B0600000101010101" pitchFamily="50" charset="-127"/>
                           <a:cs typeface="+mn-cs"/>
                         </a:rPr>
-                        <a:t>9,790</a:t>
+                        <a:t>11,469</a:t>
                       </a:r>
                     </a:p>
                   </a:txBody>
@@ -15753,7 +15753,7 @@
                           <a:ea typeface="대명체 보통" panose="020B0600000101010101" pitchFamily="50" charset="-127"/>
                           <a:cs typeface="+mn-cs"/>
                         </a:rPr>
-                        <a:t>933</a:t>
+                        <a:t>2,613</a:t>
                       </a:r>
                       <a:endParaRPr lang="en-US" altLang="ko-KR" sz="700" b="0" i="0" u="none" strike="noStrike" kern="1200" dirty="0">
                         <a:solidFill>
@@ -15821,7 +15821,7 @@
                           <a:ea typeface="대명체 보통" panose="020B0600000101010101" pitchFamily="50" charset="-127"/>
                           <a:cs typeface="+mn-cs"/>
                         </a:rPr>
-                        <a:t>111%</a:t>
+                        <a:t>129%</a:t>
                       </a:r>
                     </a:p>
                   </a:txBody>
@@ -15990,7 +15990,7 @@
                           <a:ea typeface="대명체 보통" panose="020B0600000101010101" pitchFamily="50" charset="-127"/>
                           <a:cs typeface="+mn-cs"/>
                         </a:rPr>
-                        <a:t>4,219</a:t>
+                        <a:t>5,898</a:t>
                       </a:r>
                     </a:p>
                   </a:txBody>
@@ -16049,7 +16049,7 @@
                           <a:ea typeface="대명체 보통" panose="020B0600000101010101" pitchFamily="50" charset="-127"/>
                           <a:cs typeface="+mn-cs"/>
                         </a:rPr>
-                        <a:t>76%</a:t>
+                        <a:t>106%</a:t>
                       </a:r>
                     </a:p>
                   </a:txBody>
@@ -16266,7 +16266,7 @@
                           <a:ea typeface="대명체 보통" panose="020B0600000101010101" pitchFamily="50" charset="-127"/>
                           <a:cs typeface="+mn-cs"/>
                         </a:rPr>
-                        <a:t>52,885</a:t>
+                        <a:t>55,557</a:t>
                       </a:r>
                     </a:p>
                   </a:txBody>
@@ -16376,7 +16376,7 @@
                           <a:ea typeface="대명체 보통" panose="020B0600000101010101" pitchFamily="50" charset="-127"/>
                           <a:cs typeface="+mn-cs"/>
                         </a:rPr>
-                        <a:t>3,782</a:t>
+                        <a:t>6,454</a:t>
                       </a:r>
                     </a:p>
                   </a:txBody>
@@ -16435,7 +16435,7 @@
                           <a:ea typeface="대명체 보통" panose="020B0600000101010101" pitchFamily="50" charset="-127"/>
                           <a:cs typeface="+mn-cs"/>
                         </a:rPr>
-                        <a:t>108%</a:t>
+                        <a:t>113%</a:t>
                       </a:r>
                     </a:p>
                   </a:txBody>
@@ -16494,7 +16494,7 @@
                           <a:ea typeface="대명체 보통" panose="020B0600000101010101" pitchFamily="50" charset="-127"/>
                           <a:cs typeface="+mn-cs"/>
                         </a:rPr>
-                        <a:t>38,322</a:t>
+                        <a:t>38,324</a:t>
                       </a:r>
                     </a:p>
                   </a:txBody>
@@ -16604,7 +16604,7 @@
                           <a:ea typeface="대명체 보통" panose="020B0600000101010101" pitchFamily="50" charset="-127"/>
                           <a:cs typeface="+mn-cs"/>
                         </a:rPr>
-                        <a:t>14,563</a:t>
+                        <a:t>17,233</a:t>
                       </a:r>
                     </a:p>
                   </a:txBody>
@@ -16663,7 +16663,7 @@
                           <a:ea typeface="대명체 보통" panose="020B0600000101010101" pitchFamily="50" charset="-127"/>
                           <a:cs typeface="+mn-cs"/>
                         </a:rPr>
-                        <a:t>38%</a:t>
+                        <a:t>45%</a:t>
                       </a:r>
                     </a:p>
                   </a:txBody>
@@ -16999,7 +16999,7 @@
                           <a:ea typeface="대명체 보통" panose="020B0600000101010101" pitchFamily="50" charset="-127"/>
                           <a:cs typeface="+mn-cs"/>
                         </a:rPr>
-                        <a:t>520</a:t>
+                        <a:t>772</a:t>
                       </a:r>
                       <a:endParaRPr lang="en-US" altLang="ko-KR" sz="700" b="0" i="0" u="none" strike="noStrike" kern="1200" dirty="0">
                         <a:solidFill>
@@ -17126,7 +17126,7 @@
                           <a:ea typeface="대명체 보통" panose="020B0600000101010101" pitchFamily="50" charset="-127"/>
                           <a:cs typeface="+mn-cs"/>
                         </a:rPr>
-                        <a:t>121</a:t>
+                        <a:t>373</a:t>
                       </a:r>
                       <a:endParaRPr lang="en-US" altLang="ko-KR" sz="700" b="0" i="0" u="none" strike="noStrike" kern="1200" dirty="0">
                         <a:solidFill>
@@ -17198,7 +17198,7 @@
                           <a:ea typeface="대명체 보통" panose="020B0600000101010101" pitchFamily="50" charset="-127"/>
                           <a:cs typeface="+mn-cs"/>
                         </a:rPr>
-                        <a:t>130%</a:t>
+                        <a:t>194%</a:t>
                       </a:r>
                     </a:p>
                   </a:txBody>
@@ -17388,7 +17388,7 @@
                           <a:ea typeface="대명체 보통" panose="020B0600000101010101" pitchFamily="50" charset="-127"/>
                           <a:cs typeface="+mn-cs"/>
                         </a:rPr>
-                        <a:t>258</a:t>
+                        <a:t>510</a:t>
                       </a:r>
                     </a:p>
                   </a:txBody>
@@ -17451,7 +17451,7 @@
                           <a:ea typeface="대명체 보통" panose="020B0600000101010101" pitchFamily="50" charset="-127"/>
                           <a:cs typeface="+mn-cs"/>
                         </a:rPr>
-                        <a:t>98%</a:t>
+                        <a:t>195%</a:t>
                       </a:r>
                     </a:p>
                   </a:txBody>
@@ -17680,7 +17680,7 @@
                           <a:ea typeface="대명체 보통" panose="020B0600000101010101" pitchFamily="50" charset="-127"/>
                           <a:cs typeface="+mn-cs"/>
                         </a:rPr>
-                        <a:t>5,146</a:t>
+                        <a:t>5,426</a:t>
                       </a:r>
                     </a:p>
                   </a:txBody>
@@ -17798,7 +17798,7 @@
                           <a:ea typeface="대명체 보통" panose="020B0600000101010101" pitchFamily="50" charset="-127"/>
                           <a:cs typeface="+mn-cs"/>
                         </a:rPr>
-                        <a:t>1,678</a:t>
+                        <a:t>1,959</a:t>
                       </a:r>
                       <a:endParaRPr lang="en-US" altLang="ko-KR" sz="700" b="0" i="0" u="none" strike="noStrike" kern="1200" dirty="0">
                         <a:solidFill>
@@ -17870,7 +17870,7 @@
                           <a:ea typeface="대명체 보통" panose="020B0600000101010101" pitchFamily="50" charset="-127"/>
                           <a:cs typeface="+mn-cs"/>
                         </a:rPr>
-                        <a:t>148%</a:t>
+                        <a:t>156%</a:t>
                       </a:r>
                     </a:p>
                   </a:txBody>
@@ -18051,7 +18051,7 @@
                           <a:ea typeface="대명체 보통" panose="020B0600000101010101" pitchFamily="50" charset="-127"/>
                           <a:cs typeface="+mn-cs"/>
                         </a:rPr>
-                        <a:t>2,045</a:t>
+                        <a:t>2,326</a:t>
                       </a:r>
                     </a:p>
                   </a:txBody>
@@ -18114,7 +18114,7 @@
                           <a:ea typeface="대명체 보통" panose="020B0600000101010101" pitchFamily="50" charset="-127"/>
                           <a:cs typeface="+mn-cs"/>
                         </a:rPr>
-                        <a:t>66%</a:t>
+                        <a:t>75%</a:t>
                       </a:r>
                     </a:p>
                   </a:txBody>

--- a/data/세일즈마케팅_예상매출현황.pptx
+++ b/data/세일즈마케팅_예상매출현황.pptx
@@ -12756,7 +12756,7 @@
                           <a:ea typeface="대명체 보통" panose="020B0600000101010101" pitchFamily="50" charset="-127"/>
                           <a:cs typeface="+mn-cs"/>
                         </a:rPr>
-                        <a:t>29,526</a:t>
+                        <a:t>29,128</a:t>
                       </a:r>
                     </a:p>
                   </a:txBody>
@@ -12882,7 +12882,7 @@
                           <a:ea typeface="대명체 보통" panose="020B0600000101010101" pitchFamily="50" charset="-127"/>
                           <a:cs typeface="+mn-cs"/>
                         </a:rPr>
-                        <a:t>5,667</a:t>
+                        <a:t>5,269</a:t>
                       </a:r>
                     </a:p>
                   </a:txBody>
@@ -12949,7 +12949,7 @@
                           <a:ea typeface="대명체 보통" panose="020B0600000101010101" pitchFamily="50" charset="-127"/>
                           <a:cs typeface="+mn-cs"/>
                         </a:rPr>
-                        <a:t>124%</a:t>
+                        <a:t>122%</a:t>
                       </a:r>
                     </a:p>
                   </a:txBody>
@@ -13016,7 +13016,7 @@
                           <a:ea typeface="대명체 보통" panose="020B0600000101010101" pitchFamily="50" charset="-127"/>
                           <a:cs typeface="+mn-cs"/>
                         </a:rPr>
-                        <a:t>14,728</a:t>
+                        <a:t>15,568</a:t>
                       </a:r>
                     </a:p>
                   </a:txBody>
@@ -13142,7 +13142,7 @@
                           <a:ea typeface="대명체 보통" panose="020B0600000101010101" pitchFamily="50" charset="-127"/>
                           <a:cs typeface="+mn-cs"/>
                         </a:rPr>
-                        <a:t>14,798</a:t>
+                        <a:t>13,560</a:t>
                       </a:r>
                     </a:p>
                   </a:txBody>
@@ -13209,7 +13209,7 @@
                           <a:ea typeface="대명체 보통" panose="020B0600000101010101" pitchFamily="50" charset="-127"/>
                           <a:cs typeface="+mn-cs"/>
                         </a:rPr>
-                        <a:t>100%</a:t>
+                        <a:t>87%</a:t>
                       </a:r>
                     </a:p>
                   </a:txBody>
@@ -13450,7 +13450,7 @@
                           <a:ea typeface="대명체 보통" panose="020B0600000101010101" pitchFamily="50" charset="-127"/>
                           <a:cs typeface="+mn-cs"/>
                         </a:rPr>
-                        <a:t>145,981</a:t>
+                        <a:t>145,599</a:t>
                       </a:r>
                     </a:p>
                   </a:txBody>
@@ -13576,7 +13576,7 @@
                           <a:ea typeface="대명체 보통" panose="020B0600000101010101" pitchFamily="50" charset="-127"/>
                           <a:cs typeface="+mn-cs"/>
                         </a:rPr>
-                        <a:t>21,060</a:t>
+                        <a:t>20,678</a:t>
                       </a:r>
                     </a:p>
                   </a:txBody>
@@ -13710,7 +13710,7 @@
                           <a:ea typeface="대명체 보통" panose="020B0600000101010101" pitchFamily="50" charset="-127"/>
                           <a:cs typeface="+mn-cs"/>
                         </a:rPr>
-                        <a:t>95,892</a:t>
+                        <a:t>96,732</a:t>
                       </a:r>
                     </a:p>
                   </a:txBody>
@@ -13836,7 +13836,7 @@
                           <a:ea typeface="대명체 보통" panose="020B0600000101010101" pitchFamily="50" charset="-127"/>
                           <a:cs typeface="+mn-cs"/>
                         </a:rPr>
-                        <a:t>50,089</a:t>
+                        <a:t>48,867</a:t>
                       </a:r>
                     </a:p>
                   </a:txBody>
@@ -13903,7 +13903,7 @@
                           <a:ea typeface="대명체 보통" panose="020B0600000101010101" pitchFamily="50" charset="-127"/>
                           <a:cs typeface="+mn-cs"/>
                         </a:rPr>
-                        <a:t>52%</a:t>
+                        <a:t>51%</a:t>
                       </a:r>
                     </a:p>
                   </a:txBody>
@@ -14237,7 +14237,7 @@
                           <a:ea typeface="대명체 보통" panose="020B0600000101010101" pitchFamily="50" charset="-127"/>
                           <a:cs typeface="+mn-cs"/>
                         </a:rPr>
-                        <a:t>17,284</a:t>
+                        <a:t>17,093</a:t>
                       </a:r>
                     </a:p>
                   </a:txBody>
@@ -14355,7 +14355,7 @@
                           <a:ea typeface="대명체 보통" panose="020B0600000101010101" pitchFamily="50" charset="-127"/>
                           <a:cs typeface="+mn-cs"/>
                         </a:rPr>
-                        <a:t>2,681</a:t>
+                        <a:t>2,490</a:t>
                       </a:r>
                       <a:endParaRPr lang="en-US" altLang="ko-KR" sz="700" b="0" i="0" u="none" strike="noStrike" kern="1200" dirty="0">
                         <a:solidFill>
@@ -14427,7 +14427,7 @@
                           <a:ea typeface="대명체 보통" panose="020B0600000101010101" pitchFamily="50" charset="-127"/>
                           <a:cs typeface="+mn-cs"/>
                         </a:rPr>
-                        <a:t>118%</a:t>
+                        <a:t>117%</a:t>
                       </a:r>
                     </a:p>
                   </a:txBody>
@@ -14490,7 +14490,7 @@
                           <a:ea typeface="대명체 보통" panose="020B0600000101010101" pitchFamily="50" charset="-127"/>
                           <a:cs typeface="+mn-cs"/>
                         </a:rPr>
-                        <a:t>8,895</a:t>
+                        <a:t>9,373</a:t>
                       </a:r>
                     </a:p>
                   </a:txBody>
@@ -14608,7 +14608,7 @@
                           <a:ea typeface="대명체 보통" panose="020B0600000101010101" pitchFamily="50" charset="-127"/>
                           <a:cs typeface="+mn-cs"/>
                         </a:rPr>
-                        <a:t>8,390</a:t>
+                        <a:t>7,720</a:t>
                       </a:r>
                     </a:p>
                   </a:txBody>
@@ -14671,7 +14671,7 @@
                           <a:ea typeface="대명체 보통" panose="020B0600000101010101" pitchFamily="50" charset="-127"/>
                           <a:cs typeface="+mn-cs"/>
                         </a:rPr>
-                        <a:t>94%</a:t>
+                        <a:t>82%</a:t>
                       </a:r>
                     </a:p>
                   </a:txBody>
@@ -14900,7 +14900,7 @@
                           <a:ea typeface="대명체 보통" panose="020B0600000101010101" pitchFamily="50" charset="-127"/>
                           <a:cs typeface="+mn-cs"/>
                         </a:rPr>
-                        <a:t>84,998</a:t>
+                        <a:t>84,816</a:t>
                       </a:r>
                     </a:p>
                   </a:txBody>
@@ -15018,7 +15018,7 @@
                           <a:ea typeface="대명체 보통" panose="020B0600000101010101" pitchFamily="50" charset="-127"/>
                           <a:cs typeface="+mn-cs"/>
                         </a:rPr>
-                        <a:t>12,647</a:t>
+                        <a:t>12,465</a:t>
                       </a:r>
                     </a:p>
                   </a:txBody>
@@ -15144,7 +15144,7 @@
                           <a:ea typeface="대명체 보통" panose="020B0600000101010101" pitchFamily="50" charset="-127"/>
                           <a:cs typeface="+mn-cs"/>
                         </a:rPr>
-                        <a:t>54,468</a:t>
+                        <a:t>54,946</a:t>
                       </a:r>
                     </a:p>
                   </a:txBody>
@@ -15262,7 +15262,7 @@
                           <a:ea typeface="대명체 보통" panose="020B0600000101010101" pitchFamily="50" charset="-127"/>
                           <a:cs typeface="+mn-cs"/>
                         </a:rPr>
-                        <a:t>30,530</a:t>
+                        <a:t>29,870</a:t>
                       </a:r>
                     </a:p>
                   </a:txBody>
@@ -15325,7 +15325,7 @@
                           <a:ea typeface="대명체 보통" panose="020B0600000101010101" pitchFamily="50" charset="-127"/>
                           <a:cs typeface="+mn-cs"/>
                         </a:rPr>
-                        <a:t>56%</a:t>
+                        <a:t>54%</a:t>
                       </a:r>
                     </a:p>
                   </a:txBody>
@@ -15643,7 +15643,7 @@
                           <a:ea typeface="대명체 보통" panose="020B0600000101010101" pitchFamily="50" charset="-127"/>
                           <a:cs typeface="+mn-cs"/>
                         </a:rPr>
-                        <a:t>11,469</a:t>
+                        <a:t>11,323</a:t>
                       </a:r>
                     </a:p>
                   </a:txBody>
@@ -15753,7 +15753,7 @@
                           <a:ea typeface="대명체 보통" panose="020B0600000101010101" pitchFamily="50" charset="-127"/>
                           <a:cs typeface="+mn-cs"/>
                         </a:rPr>
-                        <a:t>2,613</a:t>
+                        <a:t>2,466</a:t>
                       </a:r>
                       <a:endParaRPr lang="en-US" altLang="ko-KR" sz="700" b="0" i="0" u="none" strike="noStrike" kern="1200" dirty="0">
                         <a:solidFill>
@@ -15821,7 +15821,7 @@
                           <a:ea typeface="대명체 보통" panose="020B0600000101010101" pitchFamily="50" charset="-127"/>
                           <a:cs typeface="+mn-cs"/>
                         </a:rPr>
-                        <a:t>129%</a:t>
+                        <a:t>128%</a:t>
                       </a:r>
                     </a:p>
                   </a:txBody>
@@ -15880,7 +15880,7 @@
                           <a:ea typeface="대명체 보통" panose="020B0600000101010101" pitchFamily="50" charset="-127"/>
                           <a:cs typeface="+mn-cs"/>
                         </a:rPr>
-                        <a:t>5,571</a:t>
+                        <a:t>5,915</a:t>
                       </a:r>
                     </a:p>
                   </a:txBody>
@@ -15990,7 +15990,7 @@
                           <a:ea typeface="대명체 보통" panose="020B0600000101010101" pitchFamily="50" charset="-127"/>
                           <a:cs typeface="+mn-cs"/>
                         </a:rPr>
-                        <a:t>5,898</a:t>
+                        <a:t>5,407</a:t>
                       </a:r>
                     </a:p>
                   </a:txBody>
@@ -16049,7 +16049,7 @@
                           <a:ea typeface="대명체 보통" panose="020B0600000101010101" pitchFamily="50" charset="-127"/>
                           <a:cs typeface="+mn-cs"/>
                         </a:rPr>
-                        <a:t>106%</a:t>
+                        <a:t>91%</a:t>
                       </a:r>
                     </a:p>
                   </a:txBody>
@@ -16266,7 +16266,7 @@
                           <a:ea typeface="대명체 보통" panose="020B0600000101010101" pitchFamily="50" charset="-127"/>
                           <a:cs typeface="+mn-cs"/>
                         </a:rPr>
-                        <a:t>55,557</a:t>
+                        <a:t>55,417</a:t>
                       </a:r>
                     </a:p>
                   </a:txBody>
@@ -16376,7 +16376,7 @@
                           <a:ea typeface="대명체 보통" panose="020B0600000101010101" pitchFamily="50" charset="-127"/>
                           <a:cs typeface="+mn-cs"/>
                         </a:rPr>
-                        <a:t>6,454</a:t>
+                        <a:t>6,314</a:t>
                       </a:r>
                     </a:p>
                   </a:txBody>
@@ -16494,7 +16494,7 @@
                           <a:ea typeface="대명체 보통" panose="020B0600000101010101" pitchFamily="50" charset="-127"/>
                           <a:cs typeface="+mn-cs"/>
                         </a:rPr>
-                        <a:t>38,324</a:t>
+                        <a:t>38,668</a:t>
                       </a:r>
                     </a:p>
                   </a:txBody>
@@ -16604,7 +16604,7 @@
                           <a:ea typeface="대명체 보통" panose="020B0600000101010101" pitchFamily="50" charset="-127"/>
                           <a:cs typeface="+mn-cs"/>
                         </a:rPr>
-                        <a:t>17,233</a:t>
+                        <a:t>16,749</a:t>
                       </a:r>
                     </a:p>
                   </a:txBody>
@@ -16663,7 +16663,7 @@
                           <a:ea typeface="대명체 보통" panose="020B0600000101010101" pitchFamily="50" charset="-127"/>
                           <a:cs typeface="+mn-cs"/>
                         </a:rPr>
-                        <a:t>45%</a:t>
+                        <a:t>43%</a:t>
                       </a:r>
                     </a:p>
                   </a:txBody>
@@ -16999,7 +16999,7 @@
                           <a:ea typeface="대명체 보통" panose="020B0600000101010101" pitchFamily="50" charset="-127"/>
                           <a:cs typeface="+mn-cs"/>
                         </a:rPr>
-                        <a:t>772</a:t>
+                        <a:t>712</a:t>
                       </a:r>
                       <a:endParaRPr lang="en-US" altLang="ko-KR" sz="700" b="0" i="0" u="none" strike="noStrike" kern="1200" dirty="0">
                         <a:solidFill>
@@ -17126,7 +17126,7 @@
                           <a:ea typeface="대명체 보통" panose="020B0600000101010101" pitchFamily="50" charset="-127"/>
                           <a:cs typeface="+mn-cs"/>
                         </a:rPr>
-                        <a:t>373</a:t>
+                        <a:t>314</a:t>
                       </a:r>
                       <a:endParaRPr lang="en-US" altLang="ko-KR" sz="700" b="0" i="0" u="none" strike="noStrike" kern="1200" dirty="0">
                         <a:solidFill>
@@ -17198,7 +17198,7 @@
                           <a:ea typeface="대명체 보통" panose="020B0600000101010101" pitchFamily="50" charset="-127"/>
                           <a:cs typeface="+mn-cs"/>
                         </a:rPr>
-                        <a:t>194%</a:t>
+                        <a:t>179%</a:t>
                       </a:r>
                     </a:p>
                   </a:txBody>
@@ -17261,7 +17261,7 @@
                           <a:ea typeface="대명체 보통" panose="020B0600000101010101" pitchFamily="50" charset="-127"/>
                           <a:cs typeface="+mn-cs"/>
                         </a:rPr>
-                        <a:t>262</a:t>
+                        <a:t>279</a:t>
                       </a:r>
                       <a:endParaRPr lang="en-US" altLang="ko-KR" sz="700" b="0" i="0" u="none" strike="noStrike" kern="1200" dirty="0">
                         <a:solidFill>
@@ -17388,7 +17388,7 @@
                           <a:ea typeface="대명체 보통" panose="020B0600000101010101" pitchFamily="50" charset="-127"/>
                           <a:cs typeface="+mn-cs"/>
                         </a:rPr>
-                        <a:t>510</a:t>
+                        <a:t>433</a:t>
                       </a:r>
                     </a:p>
                   </a:txBody>
@@ -17451,7 +17451,7 @@
                           <a:ea typeface="대명체 보통" panose="020B0600000101010101" pitchFamily="50" charset="-127"/>
                           <a:cs typeface="+mn-cs"/>
                         </a:rPr>
-                        <a:t>195%</a:t>
+                        <a:t>155%</a:t>
                       </a:r>
                     </a:p>
                   </a:txBody>
@@ -17680,7 +17680,7 @@
                           <a:ea typeface="대명체 보통" panose="020B0600000101010101" pitchFamily="50" charset="-127"/>
                           <a:cs typeface="+mn-cs"/>
                         </a:rPr>
-                        <a:t>5,426</a:t>
+                        <a:t>5,366</a:t>
                       </a:r>
                     </a:p>
                   </a:txBody>
@@ -17798,7 +17798,7 @@
                           <a:ea typeface="대명체 보통" panose="020B0600000101010101" pitchFamily="50" charset="-127"/>
                           <a:cs typeface="+mn-cs"/>
                         </a:rPr>
-                        <a:t>1,959</a:t>
+                        <a:t>1,899</a:t>
                       </a:r>
                       <a:endParaRPr lang="en-US" altLang="ko-KR" sz="700" b="0" i="0" u="none" strike="noStrike" kern="1200" dirty="0">
                         <a:solidFill>
@@ -17870,7 +17870,7 @@
                           <a:ea typeface="대명체 보통" panose="020B0600000101010101" pitchFamily="50" charset="-127"/>
                           <a:cs typeface="+mn-cs"/>
                         </a:rPr>
-                        <a:t>156%</a:t>
+                        <a:t>155%</a:t>
                       </a:r>
                     </a:p>
                   </a:txBody>
@@ -17933,7 +17933,7 @@
                           <a:ea typeface="대명체 보통" panose="020B0600000101010101" pitchFamily="50" charset="-127"/>
                           <a:cs typeface="+mn-cs"/>
                         </a:rPr>
-                        <a:t>3,100</a:t>
+                        <a:t>3,117</a:t>
                       </a:r>
                     </a:p>
                   </a:txBody>
@@ -18051,7 +18051,7 @@
                           <a:ea typeface="대명체 보통" panose="020B0600000101010101" pitchFamily="50" charset="-127"/>
                           <a:cs typeface="+mn-cs"/>
                         </a:rPr>
-                        <a:t>2,326</a:t>
+                        <a:t>2,248</a:t>
                       </a:r>
                     </a:p>
                   </a:txBody>
@@ -18114,7 +18114,7 @@
                           <a:ea typeface="대명체 보통" panose="020B0600000101010101" pitchFamily="50" charset="-127"/>
                           <a:cs typeface="+mn-cs"/>
                         </a:rPr>
-                        <a:t>75%</a:t>
+                        <a:t>72%</a:t>
                       </a:r>
                     </a:p>
                   </a:txBody>

--- a/data/세일즈마케팅_예상매출현황.pptx
+++ b/data/세일즈마케팅_예상매출현황.pptx
@@ -12756,7 +12756,7 @@
                           <a:ea typeface="대명체 보통" panose="020B0600000101010101" pitchFamily="50" charset="-127"/>
                           <a:cs typeface="+mn-cs"/>
                         </a:rPr>
-                        <a:t>29,128</a:t>
+                        <a:t>29,135</a:t>
                       </a:r>
                     </a:p>
                   </a:txBody>
@@ -12882,7 +12882,7 @@
                           <a:ea typeface="대명체 보통" panose="020B0600000101010101" pitchFamily="50" charset="-127"/>
                           <a:cs typeface="+mn-cs"/>
                         </a:rPr>
-                        <a:t>5,269</a:t>
+                        <a:t>5,276</a:t>
                       </a:r>
                     </a:p>
                   </a:txBody>
@@ -13016,7 +13016,7 @@
                           <a:ea typeface="대명체 보통" panose="020B0600000101010101" pitchFamily="50" charset="-127"/>
                           <a:cs typeface="+mn-cs"/>
                         </a:rPr>
-                        <a:t>15,568</a:t>
+                        <a:t>15,876</a:t>
                       </a:r>
                     </a:p>
                   </a:txBody>
@@ -13142,7 +13142,7 @@
                           <a:ea typeface="대명체 보통" panose="020B0600000101010101" pitchFamily="50" charset="-127"/>
                           <a:cs typeface="+mn-cs"/>
                         </a:rPr>
-                        <a:t>13,560</a:t>
+                        <a:t>13,259</a:t>
                       </a:r>
                     </a:p>
                   </a:txBody>
@@ -13209,7 +13209,7 @@
                           <a:ea typeface="대명체 보통" panose="020B0600000101010101" pitchFamily="50" charset="-127"/>
                           <a:cs typeface="+mn-cs"/>
                         </a:rPr>
-                        <a:t>87%</a:t>
+                        <a:t>84%</a:t>
                       </a:r>
                     </a:p>
                   </a:txBody>
@@ -13450,7 +13450,7 @@
                           <a:ea typeface="대명체 보통" panose="020B0600000101010101" pitchFamily="50" charset="-127"/>
                           <a:cs typeface="+mn-cs"/>
                         </a:rPr>
-                        <a:t>145,599</a:t>
+                        <a:t>145,606</a:t>
                       </a:r>
                     </a:p>
                   </a:txBody>
@@ -13576,7 +13576,7 @@
                           <a:ea typeface="대명체 보통" panose="020B0600000101010101" pitchFamily="50" charset="-127"/>
                           <a:cs typeface="+mn-cs"/>
                         </a:rPr>
-                        <a:t>20,678</a:t>
+                        <a:t>20,684</a:t>
                       </a:r>
                     </a:p>
                   </a:txBody>
@@ -13710,7 +13710,7 @@
                           <a:ea typeface="대명체 보통" panose="020B0600000101010101" pitchFamily="50" charset="-127"/>
                           <a:cs typeface="+mn-cs"/>
                         </a:rPr>
-                        <a:t>96,732</a:t>
+                        <a:t>97,040</a:t>
                       </a:r>
                     </a:p>
                   </a:txBody>
@@ -13836,7 +13836,7 @@
                           <a:ea typeface="대명체 보통" panose="020B0600000101010101" pitchFamily="50" charset="-127"/>
                           <a:cs typeface="+mn-cs"/>
                         </a:rPr>
-                        <a:t>48,867</a:t>
+                        <a:t>48,566</a:t>
                       </a:r>
                     </a:p>
                   </a:txBody>
@@ -13903,7 +13903,7 @@
                           <a:ea typeface="대명체 보통" panose="020B0600000101010101" pitchFamily="50" charset="-127"/>
                           <a:cs typeface="+mn-cs"/>
                         </a:rPr>
-                        <a:t>51%</a:t>
+                        <a:t>50%</a:t>
                       </a:r>
                     </a:p>
                   </a:txBody>
@@ -14237,7 +14237,7 @@
                           <a:ea typeface="대명체 보통" panose="020B0600000101010101" pitchFamily="50" charset="-127"/>
                           <a:cs typeface="+mn-cs"/>
                         </a:rPr>
-                        <a:t>17,093</a:t>
+                        <a:t>17,118</a:t>
                       </a:r>
                     </a:p>
                   </a:txBody>
@@ -14355,7 +14355,7 @@
                           <a:ea typeface="대명체 보통" panose="020B0600000101010101" pitchFamily="50" charset="-127"/>
                           <a:cs typeface="+mn-cs"/>
                         </a:rPr>
-                        <a:t>2,490</a:t>
+                        <a:t>2,514</a:t>
                       </a:r>
                       <a:endParaRPr lang="en-US" altLang="ko-KR" sz="700" b="0" i="0" u="none" strike="noStrike" kern="1200" dirty="0">
                         <a:solidFill>
@@ -14490,7 +14490,7 @@
                           <a:ea typeface="대명체 보통" panose="020B0600000101010101" pitchFamily="50" charset="-127"/>
                           <a:cs typeface="+mn-cs"/>
                         </a:rPr>
-                        <a:t>9,373</a:t>
+                        <a:t>9,530</a:t>
                       </a:r>
                     </a:p>
                   </a:txBody>
@@ -14608,7 +14608,7 @@
                           <a:ea typeface="대명체 보통" panose="020B0600000101010101" pitchFamily="50" charset="-127"/>
                           <a:cs typeface="+mn-cs"/>
                         </a:rPr>
-                        <a:t>7,720</a:t>
+                        <a:t>7,588</a:t>
                       </a:r>
                     </a:p>
                   </a:txBody>
@@ -14671,7 +14671,7 @@
                           <a:ea typeface="대명체 보통" panose="020B0600000101010101" pitchFamily="50" charset="-127"/>
                           <a:cs typeface="+mn-cs"/>
                         </a:rPr>
-                        <a:t>82%</a:t>
+                        <a:t>80%</a:t>
                       </a:r>
                     </a:p>
                   </a:txBody>
@@ -14900,7 +14900,7 @@
                           <a:ea typeface="대명체 보통" panose="020B0600000101010101" pitchFamily="50" charset="-127"/>
                           <a:cs typeface="+mn-cs"/>
                         </a:rPr>
-                        <a:t>84,816</a:t>
+                        <a:t>84,840</a:t>
                       </a:r>
                     </a:p>
                   </a:txBody>
@@ -15018,7 +15018,7 @@
                           <a:ea typeface="대명체 보통" panose="020B0600000101010101" pitchFamily="50" charset="-127"/>
                           <a:cs typeface="+mn-cs"/>
                         </a:rPr>
-                        <a:t>12,465</a:t>
+                        <a:t>12,489</a:t>
                       </a:r>
                     </a:p>
                   </a:txBody>
@@ -15144,7 +15144,7 @@
                           <a:ea typeface="대명체 보통" panose="020B0600000101010101" pitchFamily="50" charset="-127"/>
                           <a:cs typeface="+mn-cs"/>
                         </a:rPr>
-                        <a:t>54,946</a:t>
+                        <a:t>55,103</a:t>
                       </a:r>
                     </a:p>
                   </a:txBody>
@@ -15262,7 +15262,7 @@
                           <a:ea typeface="대명체 보통" panose="020B0600000101010101" pitchFamily="50" charset="-127"/>
                           <a:cs typeface="+mn-cs"/>
                         </a:rPr>
-                        <a:t>29,870</a:t>
+                        <a:t>29,737</a:t>
                       </a:r>
                     </a:p>
                   </a:txBody>
@@ -15643,7 +15643,7 @@
                           <a:ea typeface="대명체 보통" panose="020B0600000101010101" pitchFamily="50" charset="-127"/>
                           <a:cs typeface="+mn-cs"/>
                         </a:rPr>
-                        <a:t>11,323</a:t>
+                        <a:t>11,327</a:t>
                       </a:r>
                     </a:p>
                   </a:txBody>
@@ -15753,7 +15753,7 @@
                           <a:ea typeface="대명체 보통" panose="020B0600000101010101" pitchFamily="50" charset="-127"/>
                           <a:cs typeface="+mn-cs"/>
                         </a:rPr>
-                        <a:t>2,466</a:t>
+                        <a:t>2,470</a:t>
                       </a:r>
                       <a:endParaRPr lang="en-US" altLang="ko-KR" sz="700" b="0" i="0" u="none" strike="noStrike" kern="1200" dirty="0">
                         <a:solidFill>
@@ -15880,7 +15880,7 @@
                           <a:ea typeface="대명체 보통" panose="020B0600000101010101" pitchFamily="50" charset="-127"/>
                           <a:cs typeface="+mn-cs"/>
                         </a:rPr>
-                        <a:t>5,915</a:t>
+                        <a:t>6,066</a:t>
                       </a:r>
                     </a:p>
                   </a:txBody>
@@ -15990,7 +15990,7 @@
                           <a:ea typeface="대명체 보통" panose="020B0600000101010101" pitchFamily="50" charset="-127"/>
                           <a:cs typeface="+mn-cs"/>
                         </a:rPr>
-                        <a:t>5,407</a:t>
+                        <a:t>5,260</a:t>
                       </a:r>
                     </a:p>
                   </a:txBody>
@@ -16049,7 +16049,7 @@
                           <a:ea typeface="대명체 보통" panose="020B0600000101010101" pitchFamily="50" charset="-127"/>
                           <a:cs typeface="+mn-cs"/>
                         </a:rPr>
-                        <a:t>91%</a:t>
+                        <a:t>87%</a:t>
                       </a:r>
                     </a:p>
                   </a:txBody>
@@ -16266,7 +16266,7 @@
                           <a:ea typeface="대명체 보통" panose="020B0600000101010101" pitchFamily="50" charset="-127"/>
                           <a:cs typeface="+mn-cs"/>
                         </a:rPr>
-                        <a:t>55,417</a:t>
+                        <a:t>55,421</a:t>
                       </a:r>
                     </a:p>
                   </a:txBody>
@@ -16376,7 +16376,7 @@
                           <a:ea typeface="대명체 보통" panose="020B0600000101010101" pitchFamily="50" charset="-127"/>
                           <a:cs typeface="+mn-cs"/>
                         </a:rPr>
-                        <a:t>6,314</a:t>
+                        <a:t>6,318</a:t>
                       </a:r>
                     </a:p>
                   </a:txBody>
@@ -16494,7 +16494,7 @@
                           <a:ea typeface="대명체 보통" panose="020B0600000101010101" pitchFamily="50" charset="-127"/>
                           <a:cs typeface="+mn-cs"/>
                         </a:rPr>
-                        <a:t>38,668</a:t>
+                        <a:t>38,820</a:t>
                       </a:r>
                     </a:p>
                   </a:txBody>
@@ -16604,7 +16604,7 @@
                           <a:ea typeface="대명체 보통" panose="020B0600000101010101" pitchFamily="50" charset="-127"/>
                           <a:cs typeface="+mn-cs"/>
                         </a:rPr>
-                        <a:t>16,749</a:t>
+                        <a:t>16,602</a:t>
                       </a:r>
                     </a:p>
                   </a:txBody>
@@ -16999,7 +16999,7 @@
                           <a:ea typeface="대명체 보통" panose="020B0600000101010101" pitchFamily="50" charset="-127"/>
                           <a:cs typeface="+mn-cs"/>
                         </a:rPr>
-                        <a:t>712</a:t>
+                        <a:t>691</a:t>
                       </a:r>
                       <a:endParaRPr lang="en-US" altLang="ko-KR" sz="700" b="0" i="0" u="none" strike="noStrike" kern="1200" dirty="0">
                         <a:solidFill>
@@ -17126,7 +17126,7 @@
                           <a:ea typeface="대명체 보통" panose="020B0600000101010101" pitchFamily="50" charset="-127"/>
                           <a:cs typeface="+mn-cs"/>
                         </a:rPr>
-                        <a:t>314</a:t>
+                        <a:t>292</a:t>
                       </a:r>
                       <a:endParaRPr lang="en-US" altLang="ko-KR" sz="700" b="0" i="0" u="none" strike="noStrike" kern="1200" dirty="0">
                         <a:solidFill>
@@ -17198,7 +17198,7 @@
                           <a:ea typeface="대명체 보통" panose="020B0600000101010101" pitchFamily="50" charset="-127"/>
                           <a:cs typeface="+mn-cs"/>
                         </a:rPr>
-                        <a:t>179%</a:t>
+                        <a:t>173%</a:t>
                       </a:r>
                     </a:p>
                   </a:txBody>
@@ -17388,7 +17388,7 @@
                           <a:ea typeface="대명체 보통" panose="020B0600000101010101" pitchFamily="50" charset="-127"/>
                           <a:cs typeface="+mn-cs"/>
                         </a:rPr>
-                        <a:t>433</a:t>
+                        <a:t>411</a:t>
                       </a:r>
                     </a:p>
                   </a:txBody>
@@ -17451,7 +17451,7 @@
                           <a:ea typeface="대명체 보통" panose="020B0600000101010101" pitchFamily="50" charset="-127"/>
                           <a:cs typeface="+mn-cs"/>
                         </a:rPr>
-                        <a:t>155%</a:t>
+                        <a:t>147%</a:t>
                       </a:r>
                     </a:p>
                   </a:txBody>
@@ -17680,7 +17680,7 @@
                           <a:ea typeface="대명체 보통" panose="020B0600000101010101" pitchFamily="50" charset="-127"/>
                           <a:cs typeface="+mn-cs"/>
                         </a:rPr>
-                        <a:t>5,366</a:t>
+                        <a:t>5,344</a:t>
                       </a:r>
                     </a:p>
                   </a:txBody>
@@ -17798,7 +17798,7 @@
                           <a:ea typeface="대명체 보통" panose="020B0600000101010101" pitchFamily="50" charset="-127"/>
                           <a:cs typeface="+mn-cs"/>
                         </a:rPr>
-                        <a:t>1,899</a:t>
+                        <a:t>1,877</a:t>
                       </a:r>
                       <a:endParaRPr lang="en-US" altLang="ko-KR" sz="700" b="0" i="0" u="none" strike="noStrike" kern="1200" dirty="0">
                         <a:solidFill>
@@ -17870,7 +17870,7 @@
                           <a:ea typeface="대명체 보통" panose="020B0600000101010101" pitchFamily="50" charset="-127"/>
                           <a:cs typeface="+mn-cs"/>
                         </a:rPr>
-                        <a:t>155%</a:t>
+                        <a:t>154%</a:t>
                       </a:r>
                     </a:p>
                   </a:txBody>
@@ -17933,7 +17933,7 @@
                           <a:ea typeface="대명체 보통" panose="020B0600000101010101" pitchFamily="50" charset="-127"/>
                           <a:cs typeface="+mn-cs"/>
                         </a:rPr>
-                        <a:t>3,117</a:t>
+                        <a:t>3,118</a:t>
                       </a:r>
                     </a:p>
                   </a:txBody>
@@ -18051,7 +18051,7 @@
                           <a:ea typeface="대명체 보통" panose="020B0600000101010101" pitchFamily="50" charset="-127"/>
                           <a:cs typeface="+mn-cs"/>
                         </a:rPr>
-                        <a:t>2,248</a:t>
+                        <a:t>2,226</a:t>
                       </a:r>
                     </a:p>
                   </a:txBody>
@@ -18114,7 +18114,7 @@
                           <a:ea typeface="대명체 보통" panose="020B0600000101010101" pitchFamily="50" charset="-127"/>
                           <a:cs typeface="+mn-cs"/>
                         </a:rPr>
-                        <a:t>72%</a:t>
+                        <a:t>71%</a:t>
                       </a:r>
                     </a:p>
                   </a:txBody>

--- a/data/세일즈마케팅_예상매출현황.pptx
+++ b/data/세일즈마케팅_예상매출현황.pptx
@@ -12756,7 +12756,7 @@
                           <a:ea typeface="대명체 보통" panose="020B0600000101010101" pitchFamily="50" charset="-127"/>
                           <a:cs typeface="+mn-cs"/>
                         </a:rPr>
-                        <a:t>29,135</a:t>
+                        <a:t>29,150</a:t>
                       </a:r>
                     </a:p>
                   </a:txBody>
@@ -12882,7 +12882,7 @@
                           <a:ea typeface="대명체 보통" panose="020B0600000101010101" pitchFamily="50" charset="-127"/>
                           <a:cs typeface="+mn-cs"/>
                         </a:rPr>
-                        <a:t>5,276</a:t>
+                        <a:t>5,291</a:t>
                       </a:r>
                     </a:p>
                   </a:txBody>
@@ -13142,7 +13142,7 @@
                           <a:ea typeface="대명체 보통" panose="020B0600000101010101" pitchFamily="50" charset="-127"/>
                           <a:cs typeface="+mn-cs"/>
                         </a:rPr>
-                        <a:t>13,259</a:t>
+                        <a:t>13,274</a:t>
                       </a:r>
                     </a:p>
                   </a:txBody>
@@ -13450,7 +13450,7 @@
                           <a:ea typeface="대명체 보통" panose="020B0600000101010101" pitchFamily="50" charset="-127"/>
                           <a:cs typeface="+mn-cs"/>
                         </a:rPr>
-                        <a:t>145,606</a:t>
+                        <a:t>145,619</a:t>
                       </a:r>
                     </a:p>
                   </a:txBody>
@@ -13576,7 +13576,7 @@
                           <a:ea typeface="대명체 보통" panose="020B0600000101010101" pitchFamily="50" charset="-127"/>
                           <a:cs typeface="+mn-cs"/>
                         </a:rPr>
-                        <a:t>20,684</a:t>
+                        <a:t>20,697</a:t>
                       </a:r>
                     </a:p>
                   </a:txBody>
@@ -13836,7 +13836,7 @@
                           <a:ea typeface="대명체 보통" panose="020B0600000101010101" pitchFamily="50" charset="-127"/>
                           <a:cs typeface="+mn-cs"/>
                         </a:rPr>
-                        <a:t>48,566</a:t>
+                        <a:t>48,579</a:t>
                       </a:r>
                     </a:p>
                   </a:txBody>
@@ -14237,7 +14237,7 @@
                           <a:ea typeface="대명체 보통" panose="020B0600000101010101" pitchFamily="50" charset="-127"/>
                           <a:cs typeface="+mn-cs"/>
                         </a:rPr>
-                        <a:t>17,118</a:t>
+                        <a:t>17,114</a:t>
                       </a:r>
                     </a:p>
                   </a:txBody>
@@ -14355,7 +14355,7 @@
                           <a:ea typeface="대명체 보통" panose="020B0600000101010101" pitchFamily="50" charset="-127"/>
                           <a:cs typeface="+mn-cs"/>
                         </a:rPr>
-                        <a:t>2,514</a:t>
+                        <a:t>2,510</a:t>
                       </a:r>
                       <a:endParaRPr lang="en-US" altLang="ko-KR" sz="700" b="0" i="0" u="none" strike="noStrike" kern="1200" dirty="0">
                         <a:solidFill>
@@ -14608,7 +14608,7 @@
                           <a:ea typeface="대명체 보통" panose="020B0600000101010101" pitchFamily="50" charset="-127"/>
                           <a:cs typeface="+mn-cs"/>
                         </a:rPr>
-                        <a:t>7,588</a:t>
+                        <a:t>7,584</a:t>
                       </a:r>
                     </a:p>
                   </a:txBody>
@@ -14900,7 +14900,7 @@
                           <a:ea typeface="대명체 보통" panose="020B0600000101010101" pitchFamily="50" charset="-127"/>
                           <a:cs typeface="+mn-cs"/>
                         </a:rPr>
-                        <a:t>84,840</a:t>
+                        <a:t>84,836</a:t>
                       </a:r>
                     </a:p>
                   </a:txBody>
@@ -15018,7 +15018,7 @@
                           <a:ea typeface="대명체 보통" panose="020B0600000101010101" pitchFamily="50" charset="-127"/>
                           <a:cs typeface="+mn-cs"/>
                         </a:rPr>
-                        <a:t>12,489</a:t>
+                        <a:t>12,485</a:t>
                       </a:r>
                     </a:p>
                   </a:txBody>
@@ -15262,7 +15262,7 @@
                           <a:ea typeface="대명체 보통" panose="020B0600000101010101" pitchFamily="50" charset="-127"/>
                           <a:cs typeface="+mn-cs"/>
                         </a:rPr>
-                        <a:t>29,737</a:t>
+                        <a:t>29,733</a:t>
                       </a:r>
                     </a:p>
                   </a:txBody>
@@ -15643,7 +15643,7 @@
                           <a:ea typeface="대명체 보통" panose="020B0600000101010101" pitchFamily="50" charset="-127"/>
                           <a:cs typeface="+mn-cs"/>
                         </a:rPr>
-                        <a:t>11,327</a:t>
+                        <a:t>11,345</a:t>
                       </a:r>
                     </a:p>
                   </a:txBody>
@@ -15753,7 +15753,7 @@
                           <a:ea typeface="대명체 보통" panose="020B0600000101010101" pitchFamily="50" charset="-127"/>
                           <a:cs typeface="+mn-cs"/>
                         </a:rPr>
-                        <a:t>2,470</a:t>
+                        <a:t>2,488</a:t>
                       </a:r>
                       <a:endParaRPr lang="en-US" altLang="ko-KR" sz="700" b="0" i="0" u="none" strike="noStrike" kern="1200" dirty="0">
                         <a:solidFill>
@@ -15990,7 +15990,7 @@
                           <a:ea typeface="대명체 보통" panose="020B0600000101010101" pitchFamily="50" charset="-127"/>
                           <a:cs typeface="+mn-cs"/>
                         </a:rPr>
-                        <a:t>5,260</a:t>
+                        <a:t>5,278</a:t>
                       </a:r>
                     </a:p>
                   </a:txBody>
@@ -16266,7 +16266,7 @@
                           <a:ea typeface="대명체 보통" panose="020B0600000101010101" pitchFamily="50" charset="-127"/>
                           <a:cs typeface="+mn-cs"/>
                         </a:rPr>
-                        <a:t>55,421</a:t>
+                        <a:t>55,438</a:t>
                       </a:r>
                     </a:p>
                   </a:txBody>
@@ -16376,7 +16376,7 @@
                           <a:ea typeface="대명체 보통" panose="020B0600000101010101" pitchFamily="50" charset="-127"/>
                           <a:cs typeface="+mn-cs"/>
                         </a:rPr>
-                        <a:t>6,318</a:t>
+                        <a:t>6,335</a:t>
                       </a:r>
                     </a:p>
                   </a:txBody>
@@ -16604,7 +16604,7 @@
                           <a:ea typeface="대명체 보통" panose="020B0600000101010101" pitchFamily="50" charset="-127"/>
                           <a:cs typeface="+mn-cs"/>
                         </a:rPr>
-                        <a:t>16,602</a:t>
+                        <a:t>16,619</a:t>
                       </a:r>
                     </a:p>
                   </a:txBody>
@@ -16999,7 +16999,7 @@
                           <a:ea typeface="대명체 보통" panose="020B0600000101010101" pitchFamily="50" charset="-127"/>
                           <a:cs typeface="+mn-cs"/>
                         </a:rPr>
-                        <a:t>691</a:t>
+                        <a:t>692</a:t>
                       </a:r>
                       <a:endParaRPr lang="en-US" altLang="ko-KR" sz="700" b="0" i="0" u="none" strike="noStrike" kern="1200" dirty="0">
                         <a:solidFill>
@@ -17126,7 +17126,7 @@
                           <a:ea typeface="대명체 보통" panose="020B0600000101010101" pitchFamily="50" charset="-127"/>
                           <a:cs typeface="+mn-cs"/>
                         </a:rPr>
-                        <a:t>292</a:t>
+                        <a:t>293</a:t>
                       </a:r>
                       <a:endParaRPr lang="en-US" altLang="ko-KR" sz="700" b="0" i="0" u="none" strike="noStrike" kern="1200" dirty="0">
                         <a:solidFill>
@@ -17388,7 +17388,7 @@
                           <a:ea typeface="대명체 보통" panose="020B0600000101010101" pitchFamily="50" charset="-127"/>
                           <a:cs typeface="+mn-cs"/>
                         </a:rPr>
-                        <a:t>411</a:t>
+                        <a:t>412</a:t>
                       </a:r>
                     </a:p>
                   </a:txBody>
@@ -17451,7 +17451,7 @@
                           <a:ea typeface="대명체 보통" panose="020B0600000101010101" pitchFamily="50" charset="-127"/>
                           <a:cs typeface="+mn-cs"/>
                         </a:rPr>
-                        <a:t>147%</a:t>
+                        <a:t>148%</a:t>
                       </a:r>
                     </a:p>
                   </a:txBody>

--- a/data/세일즈마케팅_예상매출현황.pptx
+++ b/data/세일즈마케팅_예상매출현황.pptx
@@ -12756,7 +12756,7 @@
                           <a:ea typeface="대명체 보통" panose="020B0600000101010101" pitchFamily="50" charset="-127"/>
                           <a:cs typeface="+mn-cs"/>
                         </a:rPr>
-                        <a:t>29,150</a:t>
+                        <a:t>28,980</a:t>
                       </a:r>
                     </a:p>
                   </a:txBody>
@@ -12882,7 +12882,7 @@
                           <a:ea typeface="대명체 보통" panose="020B0600000101010101" pitchFamily="50" charset="-127"/>
                           <a:cs typeface="+mn-cs"/>
                         </a:rPr>
-                        <a:t>5,291</a:t>
+                        <a:t>5,121</a:t>
                       </a:r>
                     </a:p>
                   </a:txBody>
@@ -12949,7 +12949,7 @@
                           <a:ea typeface="대명체 보통" panose="020B0600000101010101" pitchFamily="50" charset="-127"/>
                           <a:cs typeface="+mn-cs"/>
                         </a:rPr>
-                        <a:t>122%</a:t>
+                        <a:t>121%</a:t>
                       </a:r>
                     </a:p>
                   </a:txBody>
@@ -13016,7 +13016,7 @@
                           <a:ea typeface="대명체 보통" panose="020B0600000101010101" pitchFamily="50" charset="-127"/>
                           <a:cs typeface="+mn-cs"/>
                         </a:rPr>
-                        <a:t>15,876</a:t>
+                        <a:t>16,446</a:t>
                       </a:r>
                     </a:p>
                   </a:txBody>
@@ -13142,7 +13142,7 @@
                           <a:ea typeface="대명체 보통" panose="020B0600000101010101" pitchFamily="50" charset="-127"/>
                           <a:cs typeface="+mn-cs"/>
                         </a:rPr>
-                        <a:t>13,274</a:t>
+                        <a:t>12,534</a:t>
                       </a:r>
                     </a:p>
                   </a:txBody>
@@ -13209,7 +13209,7 @@
                           <a:ea typeface="대명체 보통" panose="020B0600000101010101" pitchFamily="50" charset="-127"/>
                           <a:cs typeface="+mn-cs"/>
                         </a:rPr>
-                        <a:t>84%</a:t>
+                        <a:t>76%</a:t>
                       </a:r>
                     </a:p>
                   </a:txBody>
@@ -13450,7 +13450,7 @@
                           <a:ea typeface="대명체 보통" panose="020B0600000101010101" pitchFamily="50" charset="-127"/>
                           <a:cs typeface="+mn-cs"/>
                         </a:rPr>
-                        <a:t>145,619</a:t>
+                        <a:t>145,449</a:t>
                       </a:r>
                     </a:p>
                   </a:txBody>
@@ -13576,7 +13576,7 @@
                           <a:ea typeface="대명체 보통" panose="020B0600000101010101" pitchFamily="50" charset="-127"/>
                           <a:cs typeface="+mn-cs"/>
                         </a:rPr>
-                        <a:t>20,697</a:t>
+                        <a:t>20,527</a:t>
                       </a:r>
                     </a:p>
                   </a:txBody>
@@ -13643,7 +13643,7 @@
                           <a:ea typeface="대명체 보통" panose="020B0600000101010101" pitchFamily="50" charset="-127"/>
                           <a:cs typeface="+mn-cs"/>
                         </a:rPr>
-                        <a:t>117%</a:t>
+                        <a:t>116%</a:t>
                       </a:r>
                     </a:p>
                   </a:txBody>
@@ -13710,7 +13710,7 @@
                           <a:ea typeface="대명체 보통" panose="020B0600000101010101" pitchFamily="50" charset="-127"/>
                           <a:cs typeface="+mn-cs"/>
                         </a:rPr>
-                        <a:t>97,040</a:t>
+                        <a:t>97,610</a:t>
                       </a:r>
                     </a:p>
                   </a:txBody>
@@ -13836,7 +13836,7 @@
                           <a:ea typeface="대명체 보통" panose="020B0600000101010101" pitchFamily="50" charset="-127"/>
                           <a:cs typeface="+mn-cs"/>
                         </a:rPr>
-                        <a:t>48,579</a:t>
+                        <a:t>47,839</a:t>
                       </a:r>
                     </a:p>
                   </a:txBody>
@@ -13903,7 +13903,7 @@
                           <a:ea typeface="대명체 보통" panose="020B0600000101010101" pitchFamily="50" charset="-127"/>
                           <a:cs typeface="+mn-cs"/>
                         </a:rPr>
-                        <a:t>50%</a:t>
+                        <a:t>49%</a:t>
                       </a:r>
                     </a:p>
                   </a:txBody>
@@ -14237,7 +14237,7 @@
                           <a:ea typeface="대명체 보통" panose="020B0600000101010101" pitchFamily="50" charset="-127"/>
                           <a:cs typeface="+mn-cs"/>
                         </a:rPr>
-                        <a:t>17,114</a:t>
+                        <a:t>17,065</a:t>
                       </a:r>
                     </a:p>
                   </a:txBody>
@@ -14355,7 +14355,7 @@
                           <a:ea typeface="대명체 보통" panose="020B0600000101010101" pitchFamily="50" charset="-127"/>
                           <a:cs typeface="+mn-cs"/>
                         </a:rPr>
-                        <a:t>2,510</a:t>
+                        <a:t>2,461</a:t>
                       </a:r>
                       <a:endParaRPr lang="en-US" altLang="ko-KR" sz="700" b="0" i="0" u="none" strike="noStrike" kern="1200" dirty="0">
                         <a:solidFill>
@@ -14490,7 +14490,7 @@
                           <a:ea typeface="대명체 보통" panose="020B0600000101010101" pitchFamily="50" charset="-127"/>
                           <a:cs typeface="+mn-cs"/>
                         </a:rPr>
-                        <a:t>9,530</a:t>
+                        <a:t>9,883</a:t>
                       </a:r>
                     </a:p>
                   </a:txBody>
@@ -14608,7 +14608,7 @@
                           <a:ea typeface="대명체 보통" panose="020B0600000101010101" pitchFamily="50" charset="-127"/>
                           <a:cs typeface="+mn-cs"/>
                         </a:rPr>
-                        <a:t>7,584</a:t>
+                        <a:t>7,182</a:t>
                       </a:r>
                     </a:p>
                   </a:txBody>
@@ -14671,7 +14671,7 @@
                           <a:ea typeface="대명체 보통" panose="020B0600000101010101" pitchFamily="50" charset="-127"/>
                           <a:cs typeface="+mn-cs"/>
                         </a:rPr>
-                        <a:t>80%</a:t>
+                        <a:t>73%</a:t>
                       </a:r>
                     </a:p>
                   </a:txBody>
@@ -14900,7 +14900,7 @@
                           <a:ea typeface="대명체 보통" panose="020B0600000101010101" pitchFamily="50" charset="-127"/>
                           <a:cs typeface="+mn-cs"/>
                         </a:rPr>
-                        <a:t>84,836</a:t>
+                        <a:t>84,787</a:t>
                       </a:r>
                     </a:p>
                   </a:txBody>
@@ -15018,7 +15018,7 @@
                           <a:ea typeface="대명체 보통" panose="020B0600000101010101" pitchFamily="50" charset="-127"/>
                           <a:cs typeface="+mn-cs"/>
                         </a:rPr>
-                        <a:t>12,485</a:t>
+                        <a:t>12,436</a:t>
                       </a:r>
                     </a:p>
                   </a:txBody>
@@ -15144,7 +15144,7 @@
                           <a:ea typeface="대명체 보통" panose="020B0600000101010101" pitchFamily="50" charset="-127"/>
                           <a:cs typeface="+mn-cs"/>
                         </a:rPr>
-                        <a:t>55,103</a:t>
+                        <a:t>55,455</a:t>
                       </a:r>
                     </a:p>
                   </a:txBody>
@@ -15262,7 +15262,7 @@
                           <a:ea typeface="대명체 보통" panose="020B0600000101010101" pitchFamily="50" charset="-127"/>
                           <a:cs typeface="+mn-cs"/>
                         </a:rPr>
-                        <a:t>29,733</a:t>
+                        <a:t>29,332</a:t>
                       </a:r>
                     </a:p>
                   </a:txBody>
@@ -15325,7 +15325,7 @@
                           <a:ea typeface="대명체 보통" panose="020B0600000101010101" pitchFamily="50" charset="-127"/>
                           <a:cs typeface="+mn-cs"/>
                         </a:rPr>
-                        <a:t>54%</a:t>
+                        <a:t>53%</a:t>
                       </a:r>
                     </a:p>
                   </a:txBody>
@@ -15643,7 +15643,7 @@
                           <a:ea typeface="대명체 보통" panose="020B0600000101010101" pitchFamily="50" charset="-127"/>
                           <a:cs typeface="+mn-cs"/>
                         </a:rPr>
-                        <a:t>11,345</a:t>
+                        <a:t>11,274</a:t>
                       </a:r>
                     </a:p>
                   </a:txBody>
@@ -15753,7 +15753,7 @@
                           <a:ea typeface="대명체 보통" panose="020B0600000101010101" pitchFamily="50" charset="-127"/>
                           <a:cs typeface="+mn-cs"/>
                         </a:rPr>
-                        <a:t>2,488</a:t>
+                        <a:t>2,418</a:t>
                       </a:r>
                       <a:endParaRPr lang="en-US" altLang="ko-KR" sz="700" b="0" i="0" u="none" strike="noStrike" kern="1200" dirty="0">
                         <a:solidFill>
@@ -15821,7 +15821,7 @@
                           <a:ea typeface="대명체 보통" panose="020B0600000101010101" pitchFamily="50" charset="-127"/>
                           <a:cs typeface="+mn-cs"/>
                         </a:rPr>
-                        <a:t>128%</a:t>
+                        <a:t>127%</a:t>
                       </a:r>
                     </a:p>
                   </a:txBody>
@@ -15880,7 +15880,7 @@
                           <a:ea typeface="대명체 보통" panose="020B0600000101010101" pitchFamily="50" charset="-127"/>
                           <a:cs typeface="+mn-cs"/>
                         </a:rPr>
-                        <a:t>6,066</a:t>
+                        <a:t>6,262</a:t>
                       </a:r>
                     </a:p>
                   </a:txBody>
@@ -15990,7 +15990,7 @@
                           <a:ea typeface="대명체 보통" panose="020B0600000101010101" pitchFamily="50" charset="-127"/>
                           <a:cs typeface="+mn-cs"/>
                         </a:rPr>
-                        <a:t>5,278</a:t>
+                        <a:t>5,012</a:t>
                       </a:r>
                     </a:p>
                   </a:txBody>
@@ -16049,7 +16049,7 @@
                           <a:ea typeface="대명체 보통" panose="020B0600000101010101" pitchFamily="50" charset="-127"/>
                           <a:cs typeface="+mn-cs"/>
                         </a:rPr>
-                        <a:t>87%</a:t>
+                        <a:t>80%</a:t>
                       </a:r>
                     </a:p>
                   </a:txBody>
@@ -16266,7 +16266,7 @@
                           <a:ea typeface="대명체 보통" panose="020B0600000101010101" pitchFamily="50" charset="-127"/>
                           <a:cs typeface="+mn-cs"/>
                         </a:rPr>
-                        <a:t>55,438</a:t>
+                        <a:t>55,368</a:t>
                       </a:r>
                     </a:p>
                   </a:txBody>
@@ -16376,7 +16376,7 @@
                           <a:ea typeface="대명체 보통" panose="020B0600000101010101" pitchFamily="50" charset="-127"/>
                           <a:cs typeface="+mn-cs"/>
                         </a:rPr>
-                        <a:t>6,335</a:t>
+                        <a:t>6,265</a:t>
                       </a:r>
                     </a:p>
                   </a:txBody>
@@ -16494,7 +16494,7 @@
                           <a:ea typeface="대명체 보통" panose="020B0600000101010101" pitchFamily="50" charset="-127"/>
                           <a:cs typeface="+mn-cs"/>
                         </a:rPr>
-                        <a:t>38,820</a:t>
+                        <a:t>39,015</a:t>
                       </a:r>
                     </a:p>
                   </a:txBody>
@@ -16604,7 +16604,7 @@
                           <a:ea typeface="대명체 보통" panose="020B0600000101010101" pitchFamily="50" charset="-127"/>
                           <a:cs typeface="+mn-cs"/>
                         </a:rPr>
-                        <a:t>16,619</a:t>
+                        <a:t>16,353</a:t>
                       </a:r>
                     </a:p>
                   </a:txBody>
@@ -16663,7 +16663,7 @@
                           <a:ea typeface="대명체 보통" panose="020B0600000101010101" pitchFamily="50" charset="-127"/>
                           <a:cs typeface="+mn-cs"/>
                         </a:rPr>
-                        <a:t>43%</a:t>
+                        <a:t>42%</a:t>
                       </a:r>
                     </a:p>
                   </a:txBody>
@@ -16999,7 +16999,7 @@
                           <a:ea typeface="대명체 보통" panose="020B0600000101010101" pitchFamily="50" charset="-127"/>
                           <a:cs typeface="+mn-cs"/>
                         </a:rPr>
-                        <a:t>692</a:t>
+                        <a:t>641</a:t>
                       </a:r>
                       <a:endParaRPr lang="en-US" altLang="ko-KR" sz="700" b="0" i="0" u="none" strike="noStrike" kern="1200" dirty="0">
                         <a:solidFill>
@@ -17126,7 +17126,7 @@
                           <a:ea typeface="대명체 보통" panose="020B0600000101010101" pitchFamily="50" charset="-127"/>
                           <a:cs typeface="+mn-cs"/>
                         </a:rPr>
-                        <a:t>293</a:t>
+                        <a:t>242</a:t>
                       </a:r>
                       <a:endParaRPr lang="en-US" altLang="ko-KR" sz="700" b="0" i="0" u="none" strike="noStrike" kern="1200" dirty="0">
                         <a:solidFill>
@@ -17198,7 +17198,7 @@
                           <a:ea typeface="대명체 보통" panose="020B0600000101010101" pitchFamily="50" charset="-127"/>
                           <a:cs typeface="+mn-cs"/>
                         </a:rPr>
-                        <a:t>173%</a:t>
+                        <a:t>161%</a:t>
                       </a:r>
                     </a:p>
                   </a:txBody>
@@ -17261,7 +17261,7 @@
                           <a:ea typeface="대명체 보통" panose="020B0600000101010101" pitchFamily="50" charset="-127"/>
                           <a:cs typeface="+mn-cs"/>
                         </a:rPr>
-                        <a:t>279</a:t>
+                        <a:t>301</a:t>
                       </a:r>
                       <a:endParaRPr lang="en-US" altLang="ko-KR" sz="700" b="0" i="0" u="none" strike="noStrike" kern="1200" dirty="0">
                         <a:solidFill>
@@ -17388,7 +17388,7 @@
                           <a:ea typeface="대명체 보통" panose="020B0600000101010101" pitchFamily="50" charset="-127"/>
                           <a:cs typeface="+mn-cs"/>
                         </a:rPr>
-                        <a:t>412</a:t>
+                        <a:t>340</a:t>
                       </a:r>
                     </a:p>
                   </a:txBody>
@@ -17451,7 +17451,7 @@
                           <a:ea typeface="대명체 보통" panose="020B0600000101010101" pitchFamily="50" charset="-127"/>
                           <a:cs typeface="+mn-cs"/>
                         </a:rPr>
-                        <a:t>148%</a:t>
+                        <a:t>113%</a:t>
                       </a:r>
                     </a:p>
                   </a:txBody>
@@ -17680,7 +17680,7 @@
                           <a:ea typeface="대명체 보통" panose="020B0600000101010101" pitchFamily="50" charset="-127"/>
                           <a:cs typeface="+mn-cs"/>
                         </a:rPr>
-                        <a:t>5,344</a:t>
+                        <a:t>5,293</a:t>
                       </a:r>
                     </a:p>
                   </a:txBody>
@@ -17798,7 +17798,7 @@
                           <a:ea typeface="대명체 보통" panose="020B0600000101010101" pitchFamily="50" charset="-127"/>
                           <a:cs typeface="+mn-cs"/>
                         </a:rPr>
-                        <a:t>1,877</a:t>
+                        <a:t>1,826</a:t>
                       </a:r>
                       <a:endParaRPr lang="en-US" altLang="ko-KR" sz="700" b="0" i="0" u="none" strike="noStrike" kern="1200" dirty="0">
                         <a:solidFill>
@@ -17870,7 +17870,7 @@
                           <a:ea typeface="대명체 보통" panose="020B0600000101010101" pitchFamily="50" charset="-127"/>
                           <a:cs typeface="+mn-cs"/>
                         </a:rPr>
-                        <a:t>154%</a:t>
+                        <a:t>153%</a:t>
                       </a:r>
                     </a:p>
                   </a:txBody>
@@ -17933,7 +17933,7 @@
                           <a:ea typeface="대명체 보통" panose="020B0600000101010101" pitchFamily="50" charset="-127"/>
                           <a:cs typeface="+mn-cs"/>
                         </a:rPr>
-                        <a:t>3,118</a:t>
+                        <a:t>3,139</a:t>
                       </a:r>
                     </a:p>
                   </a:txBody>
@@ -18051,7 +18051,7 @@
                           <a:ea typeface="대명체 보통" panose="020B0600000101010101" pitchFamily="50" charset="-127"/>
                           <a:cs typeface="+mn-cs"/>
                         </a:rPr>
-                        <a:t>2,226</a:t>
+                        <a:t>2,154</a:t>
                       </a:r>
                     </a:p>
                   </a:txBody>
@@ -18114,7 +18114,7 @@
                           <a:ea typeface="대명체 보통" panose="020B0600000101010101" pitchFamily="50" charset="-127"/>
                           <a:cs typeface="+mn-cs"/>
                         </a:rPr>
-                        <a:t>71%</a:t>
+                        <a:t>69%</a:t>
                       </a:r>
                     </a:p>
                   </a:txBody>

--- a/data/세일즈마케팅_예상매출현황.pptx
+++ b/data/세일즈마케팅_예상매출현황.pptx
@@ -12756,7 +12756,7 @@
                           <a:ea typeface="대명체 보통" panose="020B0600000101010101" pitchFamily="50" charset="-127"/>
                           <a:cs typeface="+mn-cs"/>
                         </a:rPr>
-                        <a:t>28,980</a:t>
+                        <a:t>28,699</a:t>
                       </a:r>
                     </a:p>
                   </a:txBody>
@@ -12882,7 +12882,7 @@
                           <a:ea typeface="대명체 보통" panose="020B0600000101010101" pitchFamily="50" charset="-127"/>
                           <a:cs typeface="+mn-cs"/>
                         </a:rPr>
-                        <a:t>5,121</a:t>
+                        <a:t>4,840</a:t>
                       </a:r>
                     </a:p>
                   </a:txBody>
@@ -12949,7 +12949,7 @@
                           <a:ea typeface="대명체 보통" panose="020B0600000101010101" pitchFamily="50" charset="-127"/>
                           <a:cs typeface="+mn-cs"/>
                         </a:rPr>
-                        <a:t>121%</a:t>
+                        <a:t>120%</a:t>
                       </a:r>
                     </a:p>
                   </a:txBody>
@@ -13016,7 +13016,7 @@
                           <a:ea typeface="대명체 보통" panose="020B0600000101010101" pitchFamily="50" charset="-127"/>
                           <a:cs typeface="+mn-cs"/>
                         </a:rPr>
-                        <a:t>16,446</a:t>
+                        <a:t>16,850</a:t>
                       </a:r>
                     </a:p>
                   </a:txBody>
@@ -13142,7 +13142,7 @@
                           <a:ea typeface="대명체 보통" panose="020B0600000101010101" pitchFamily="50" charset="-127"/>
                           <a:cs typeface="+mn-cs"/>
                         </a:rPr>
-                        <a:t>12,534</a:t>
+                        <a:t>11,849</a:t>
                       </a:r>
                     </a:p>
                   </a:txBody>
@@ -13209,7 +13209,7 @@
                           <a:ea typeface="대명체 보통" panose="020B0600000101010101" pitchFamily="50" charset="-127"/>
                           <a:cs typeface="+mn-cs"/>
                         </a:rPr>
-                        <a:t>76%</a:t>
+                        <a:t>70%</a:t>
                       </a:r>
                     </a:p>
                   </a:txBody>
@@ -13450,7 +13450,7 @@
                           <a:ea typeface="대명체 보통" panose="020B0600000101010101" pitchFamily="50" charset="-127"/>
                           <a:cs typeface="+mn-cs"/>
                         </a:rPr>
-                        <a:t>145,449</a:t>
+                        <a:t>145,168</a:t>
                       </a:r>
                     </a:p>
                   </a:txBody>
@@ -13576,7 +13576,7 @@
                           <a:ea typeface="대명체 보통" panose="020B0600000101010101" pitchFamily="50" charset="-127"/>
                           <a:cs typeface="+mn-cs"/>
                         </a:rPr>
-                        <a:t>20,527</a:t>
+                        <a:t>20,247</a:t>
                       </a:r>
                     </a:p>
                   </a:txBody>
@@ -13710,7 +13710,7 @@
                           <a:ea typeface="대명체 보통" panose="020B0600000101010101" pitchFamily="50" charset="-127"/>
                           <a:cs typeface="+mn-cs"/>
                         </a:rPr>
-                        <a:t>97,610</a:t>
+                        <a:t>98,014</a:t>
                       </a:r>
                     </a:p>
                   </a:txBody>
@@ -13836,7 +13836,7 @@
                           <a:ea typeface="대명체 보통" panose="020B0600000101010101" pitchFamily="50" charset="-127"/>
                           <a:cs typeface="+mn-cs"/>
                         </a:rPr>
-                        <a:t>47,839</a:t>
+                        <a:t>47,154</a:t>
                       </a:r>
                     </a:p>
                   </a:txBody>
@@ -13903,7 +13903,7 @@
                           <a:ea typeface="대명체 보통" panose="020B0600000101010101" pitchFamily="50" charset="-127"/>
                           <a:cs typeface="+mn-cs"/>
                         </a:rPr>
-                        <a:t>49%</a:t>
+                        <a:t>48%</a:t>
                       </a:r>
                     </a:p>
                   </a:txBody>
@@ -14237,7 +14237,7 @@
                           <a:ea typeface="대명체 보통" panose="020B0600000101010101" pitchFamily="50" charset="-127"/>
                           <a:cs typeface="+mn-cs"/>
                         </a:rPr>
-                        <a:t>17,065</a:t>
+                        <a:t>16,906</a:t>
                       </a:r>
                     </a:p>
                   </a:txBody>
@@ -14355,7 +14355,7 @@
                           <a:ea typeface="대명체 보통" panose="020B0600000101010101" pitchFamily="50" charset="-127"/>
                           <a:cs typeface="+mn-cs"/>
                         </a:rPr>
-                        <a:t>2,461</a:t>
+                        <a:t>2,303</a:t>
                       </a:r>
                       <a:endParaRPr lang="en-US" altLang="ko-KR" sz="700" b="0" i="0" u="none" strike="noStrike" kern="1200" dirty="0">
                         <a:solidFill>
@@ -14427,7 +14427,7 @@
                           <a:ea typeface="대명체 보통" panose="020B0600000101010101" pitchFamily="50" charset="-127"/>
                           <a:cs typeface="+mn-cs"/>
                         </a:rPr>
-                        <a:t>117%</a:t>
+                        <a:t>116%</a:t>
                       </a:r>
                     </a:p>
                   </a:txBody>
@@ -14490,7 +14490,7 @@
                           <a:ea typeface="대명체 보통" panose="020B0600000101010101" pitchFamily="50" charset="-127"/>
                           <a:cs typeface="+mn-cs"/>
                         </a:rPr>
-                        <a:t>9,883</a:t>
+                        <a:t>10,174</a:t>
                       </a:r>
                     </a:p>
                   </a:txBody>
@@ -14608,7 +14608,7 @@
                           <a:ea typeface="대명체 보통" panose="020B0600000101010101" pitchFamily="50" charset="-127"/>
                           <a:cs typeface="+mn-cs"/>
                         </a:rPr>
-                        <a:t>7,182</a:t>
+                        <a:t>6,732</a:t>
                       </a:r>
                     </a:p>
                   </a:txBody>
@@ -14671,7 +14671,7 @@
                           <a:ea typeface="대명체 보통" panose="020B0600000101010101" pitchFamily="50" charset="-127"/>
                           <a:cs typeface="+mn-cs"/>
                         </a:rPr>
-                        <a:t>73%</a:t>
+                        <a:t>66%</a:t>
                       </a:r>
                     </a:p>
                   </a:txBody>
@@ -14900,7 +14900,7 @@
                           <a:ea typeface="대명체 보통" panose="020B0600000101010101" pitchFamily="50" charset="-127"/>
                           <a:cs typeface="+mn-cs"/>
                         </a:rPr>
-                        <a:t>84,787</a:t>
+                        <a:t>84,629</a:t>
                       </a:r>
                     </a:p>
                   </a:txBody>
@@ -15018,7 +15018,7 @@
                           <a:ea typeface="대명체 보통" panose="020B0600000101010101" pitchFamily="50" charset="-127"/>
                           <a:cs typeface="+mn-cs"/>
                         </a:rPr>
-                        <a:t>12,436</a:t>
+                        <a:t>12,278</a:t>
                       </a:r>
                     </a:p>
                   </a:txBody>
@@ -15144,7 +15144,7 @@
                           <a:ea typeface="대명체 보통" panose="020B0600000101010101" pitchFamily="50" charset="-127"/>
                           <a:cs typeface="+mn-cs"/>
                         </a:rPr>
-                        <a:t>55,455</a:t>
+                        <a:t>55,747</a:t>
                       </a:r>
                     </a:p>
                   </a:txBody>
@@ -15262,7 +15262,7 @@
                           <a:ea typeface="대명체 보통" panose="020B0600000101010101" pitchFamily="50" charset="-127"/>
                           <a:cs typeface="+mn-cs"/>
                         </a:rPr>
-                        <a:t>29,332</a:t>
+                        <a:t>28,882</a:t>
                       </a:r>
                     </a:p>
                   </a:txBody>
@@ -15325,7 +15325,7 @@
                           <a:ea typeface="대명체 보통" panose="020B0600000101010101" pitchFamily="50" charset="-127"/>
                           <a:cs typeface="+mn-cs"/>
                         </a:rPr>
-                        <a:t>53%</a:t>
+                        <a:t>52%</a:t>
                       </a:r>
                     </a:p>
                   </a:txBody>
@@ -15643,7 +15643,7 @@
                           <a:ea typeface="대명체 보통" panose="020B0600000101010101" pitchFamily="50" charset="-127"/>
                           <a:cs typeface="+mn-cs"/>
                         </a:rPr>
-                        <a:t>11,274</a:t>
+                        <a:t>11,184</a:t>
                       </a:r>
                     </a:p>
                   </a:txBody>
@@ -15753,7 +15753,7 @@
                           <a:ea typeface="대명체 보통" panose="020B0600000101010101" pitchFamily="50" charset="-127"/>
                           <a:cs typeface="+mn-cs"/>
                         </a:rPr>
-                        <a:t>2,418</a:t>
+                        <a:t>2,327</a:t>
                       </a:r>
                       <a:endParaRPr lang="en-US" altLang="ko-KR" sz="700" b="0" i="0" u="none" strike="noStrike" kern="1200" dirty="0">
                         <a:solidFill>
@@ -15821,7 +15821,7 @@
                           <a:ea typeface="대명체 보통" panose="020B0600000101010101" pitchFamily="50" charset="-127"/>
                           <a:cs typeface="+mn-cs"/>
                         </a:rPr>
-                        <a:t>127%</a:t>
+                        <a:t>126%</a:t>
                       </a:r>
                     </a:p>
                   </a:txBody>
@@ -15880,7 +15880,7 @@
                           <a:ea typeface="대명체 보통" panose="020B0600000101010101" pitchFamily="50" charset="-127"/>
                           <a:cs typeface="+mn-cs"/>
                         </a:rPr>
-                        <a:t>6,262</a:t>
+                        <a:t>6,366</a:t>
                       </a:r>
                     </a:p>
                   </a:txBody>
@@ -15990,7 +15990,7 @@
                           <a:ea typeface="대명체 보통" panose="020B0600000101010101" pitchFamily="50" charset="-127"/>
                           <a:cs typeface="+mn-cs"/>
                         </a:rPr>
-                        <a:t>5,012</a:t>
+                        <a:t>4,818</a:t>
                       </a:r>
                     </a:p>
                   </a:txBody>
@@ -16049,7 +16049,7 @@
                           <a:ea typeface="대명체 보통" panose="020B0600000101010101" pitchFamily="50" charset="-127"/>
                           <a:cs typeface="+mn-cs"/>
                         </a:rPr>
-                        <a:t>80%</a:t>
+                        <a:t>76%</a:t>
                       </a:r>
                     </a:p>
                   </a:txBody>
@@ -16266,7 +16266,7 @@
                           <a:ea typeface="대명체 보통" panose="020B0600000101010101" pitchFamily="50" charset="-127"/>
                           <a:cs typeface="+mn-cs"/>
                         </a:rPr>
-                        <a:t>55,368</a:t>
+                        <a:t>55,278</a:t>
                       </a:r>
                     </a:p>
                   </a:txBody>
@@ -16376,7 +16376,7 @@
                           <a:ea typeface="대명체 보통" panose="020B0600000101010101" pitchFamily="50" charset="-127"/>
                           <a:cs typeface="+mn-cs"/>
                         </a:rPr>
-                        <a:t>6,265</a:t>
+                        <a:t>6,174</a:t>
                       </a:r>
                     </a:p>
                   </a:txBody>
@@ -16494,7 +16494,7 @@
                           <a:ea typeface="대명체 보통" panose="020B0600000101010101" pitchFamily="50" charset="-127"/>
                           <a:cs typeface="+mn-cs"/>
                         </a:rPr>
-                        <a:t>39,015</a:t>
+                        <a:t>39,119</a:t>
                       </a:r>
                     </a:p>
                   </a:txBody>
@@ -16604,7 +16604,7 @@
                           <a:ea typeface="대명체 보통" panose="020B0600000101010101" pitchFamily="50" charset="-127"/>
                           <a:cs typeface="+mn-cs"/>
                         </a:rPr>
-                        <a:t>16,353</a:t>
+                        <a:t>16,158</a:t>
                       </a:r>
                     </a:p>
                   </a:txBody>
@@ -16663,7 +16663,7 @@
                           <a:ea typeface="대명체 보통" panose="020B0600000101010101" pitchFamily="50" charset="-127"/>
                           <a:cs typeface="+mn-cs"/>
                         </a:rPr>
-                        <a:t>42%</a:t>
+                        <a:t>41%</a:t>
                       </a:r>
                     </a:p>
                   </a:txBody>
@@ -16999,7 +16999,7 @@
                           <a:ea typeface="대명체 보통" panose="020B0600000101010101" pitchFamily="50" charset="-127"/>
                           <a:cs typeface="+mn-cs"/>
                         </a:rPr>
-                        <a:t>641</a:t>
+                        <a:t>609</a:t>
                       </a:r>
                       <a:endParaRPr lang="en-US" altLang="ko-KR" sz="700" b="0" i="0" u="none" strike="noStrike" kern="1200" dirty="0">
                         <a:solidFill>
@@ -17126,7 +17126,7 @@
                           <a:ea typeface="대명체 보통" panose="020B0600000101010101" pitchFamily="50" charset="-127"/>
                           <a:cs typeface="+mn-cs"/>
                         </a:rPr>
-                        <a:t>242</a:t>
+                        <a:t>210</a:t>
                       </a:r>
                       <a:endParaRPr lang="en-US" altLang="ko-KR" sz="700" b="0" i="0" u="none" strike="noStrike" kern="1200" dirty="0">
                         <a:solidFill>
@@ -17198,7 +17198,7 @@
                           <a:ea typeface="대명체 보통" panose="020B0600000101010101" pitchFamily="50" charset="-127"/>
                           <a:cs typeface="+mn-cs"/>
                         </a:rPr>
-                        <a:t>161%</a:t>
+                        <a:t>153%</a:t>
                       </a:r>
                     </a:p>
                   </a:txBody>
@@ -17261,7 +17261,7 @@
                           <a:ea typeface="대명체 보통" panose="020B0600000101010101" pitchFamily="50" charset="-127"/>
                           <a:cs typeface="+mn-cs"/>
                         </a:rPr>
-                        <a:t>301</a:t>
+                        <a:t>310</a:t>
                       </a:r>
                       <a:endParaRPr lang="en-US" altLang="ko-KR" sz="700" b="0" i="0" u="none" strike="noStrike" kern="1200" dirty="0">
                         <a:solidFill>
@@ -17388,7 +17388,7 @@
                           <a:ea typeface="대명체 보통" panose="020B0600000101010101" pitchFamily="50" charset="-127"/>
                           <a:cs typeface="+mn-cs"/>
                         </a:rPr>
-                        <a:t>340</a:t>
+                        <a:t>299</a:t>
                       </a:r>
                     </a:p>
                   </a:txBody>
@@ -17451,7 +17451,7 @@
                           <a:ea typeface="대명체 보통" panose="020B0600000101010101" pitchFamily="50" charset="-127"/>
                           <a:cs typeface="+mn-cs"/>
                         </a:rPr>
-                        <a:t>113%</a:t>
+                        <a:t>97%</a:t>
                       </a:r>
                     </a:p>
                   </a:txBody>
@@ -17680,7 +17680,7 @@
                           <a:ea typeface="대명체 보통" panose="020B0600000101010101" pitchFamily="50" charset="-127"/>
                           <a:cs typeface="+mn-cs"/>
                         </a:rPr>
-                        <a:t>5,293</a:t>
+                        <a:t>5,261</a:t>
                       </a:r>
                     </a:p>
                   </a:txBody>
@@ -17798,7 +17798,7 @@
                           <a:ea typeface="대명체 보통" panose="020B0600000101010101" pitchFamily="50" charset="-127"/>
                           <a:cs typeface="+mn-cs"/>
                         </a:rPr>
-                        <a:t>1,826</a:t>
+                        <a:t>1,794</a:t>
                       </a:r>
                       <a:endParaRPr lang="en-US" altLang="ko-KR" sz="700" b="0" i="0" u="none" strike="noStrike" kern="1200" dirty="0">
                         <a:solidFill>
@@ -17870,7 +17870,7 @@
                           <a:ea typeface="대명체 보통" panose="020B0600000101010101" pitchFamily="50" charset="-127"/>
                           <a:cs typeface="+mn-cs"/>
                         </a:rPr>
-                        <a:t>153%</a:t>
+                        <a:t>152%</a:t>
                       </a:r>
                     </a:p>
                   </a:txBody>
@@ -17933,7 +17933,7 @@
                           <a:ea typeface="대명체 보통" panose="020B0600000101010101" pitchFamily="50" charset="-127"/>
                           <a:cs typeface="+mn-cs"/>
                         </a:rPr>
-                        <a:t>3,139</a:t>
+                        <a:t>3,148</a:t>
                       </a:r>
                     </a:p>
                   </a:txBody>
@@ -18051,7 +18051,7 @@
                           <a:ea typeface="대명체 보통" panose="020B0600000101010101" pitchFamily="50" charset="-127"/>
                           <a:cs typeface="+mn-cs"/>
                         </a:rPr>
-                        <a:t>2,154</a:t>
+                        <a:t>2,113</a:t>
                       </a:r>
                     </a:p>
                   </a:txBody>
@@ -18114,7 +18114,7 @@
                           <a:ea typeface="대명체 보통" panose="020B0600000101010101" pitchFamily="50" charset="-127"/>
                           <a:cs typeface="+mn-cs"/>
                         </a:rPr>
-                        <a:t>69%</a:t>
+                        <a:t>67%</a:t>
                       </a:r>
                     </a:p>
                   </a:txBody>

--- a/data/세일즈마케팅_예상매출현황.pptx
+++ b/data/세일즈마케팅_예상매출현황.pptx
@@ -12756,7 +12756,7 @@
                           <a:ea typeface="대명체 보통" panose="020B0600000101010101" pitchFamily="50" charset="-127"/>
                           <a:cs typeface="+mn-cs"/>
                         </a:rPr>
-                        <a:t>28,699</a:t>
+                        <a:t>62,122</a:t>
                       </a:r>
                     </a:p>
                   </a:txBody>
@@ -12882,7 +12882,7 @@
                           <a:ea typeface="대명체 보통" panose="020B0600000101010101" pitchFamily="50" charset="-127"/>
                           <a:cs typeface="+mn-cs"/>
                         </a:rPr>
-                        <a:t>4,840</a:t>
+                        <a:t>38,263</a:t>
                       </a:r>
                     </a:p>
                   </a:txBody>
@@ -12949,7 +12949,7 @@
                           <a:ea typeface="대명체 보통" panose="020B0600000101010101" pitchFamily="50" charset="-127"/>
                           <a:cs typeface="+mn-cs"/>
                         </a:rPr>
-                        <a:t>120%</a:t>
+                        <a:t>260%</a:t>
                       </a:r>
                     </a:p>
                   </a:txBody>
@@ -13016,7 +13016,7 @@
                           <a:ea typeface="대명체 보통" panose="020B0600000101010101" pitchFamily="50" charset="-127"/>
                           <a:cs typeface="+mn-cs"/>
                         </a:rPr>
-                        <a:t>16,850</a:t>
+                        <a:t>17,100</a:t>
                       </a:r>
                     </a:p>
                   </a:txBody>
@@ -13142,7 +13142,7 @@
                           <a:ea typeface="대명체 보통" panose="020B0600000101010101" pitchFamily="50" charset="-127"/>
                           <a:cs typeface="+mn-cs"/>
                         </a:rPr>
-                        <a:t>11,849</a:t>
+                        <a:t>45,023</a:t>
                       </a:r>
                     </a:p>
                   </a:txBody>
@@ -13209,7 +13209,7 @@
                           <a:ea typeface="대명체 보통" panose="020B0600000101010101" pitchFamily="50" charset="-127"/>
                           <a:cs typeface="+mn-cs"/>
                         </a:rPr>
-                        <a:t>70%</a:t>
+                        <a:t>263%</a:t>
                       </a:r>
                     </a:p>
                   </a:txBody>
@@ -13450,7 +13450,7 @@
                           <a:ea typeface="대명체 보통" panose="020B0600000101010101" pitchFamily="50" charset="-127"/>
                           <a:cs typeface="+mn-cs"/>
                         </a:rPr>
-                        <a:t>145,168</a:t>
+                        <a:t>178,591</a:t>
                       </a:r>
                     </a:p>
                   </a:txBody>
@@ -13576,7 +13576,7 @@
                           <a:ea typeface="대명체 보통" panose="020B0600000101010101" pitchFamily="50" charset="-127"/>
                           <a:cs typeface="+mn-cs"/>
                         </a:rPr>
-                        <a:t>20,247</a:t>
+                        <a:t>53,670</a:t>
                       </a:r>
                     </a:p>
                   </a:txBody>
@@ -13643,7 +13643,7 @@
                           <a:ea typeface="대명체 보통" panose="020B0600000101010101" pitchFamily="50" charset="-127"/>
                           <a:cs typeface="+mn-cs"/>
                         </a:rPr>
-                        <a:t>116%</a:t>
+                        <a:t>143%</a:t>
                       </a:r>
                     </a:p>
                   </a:txBody>
@@ -13710,7 +13710,7 @@
                           <a:ea typeface="대명체 보통" panose="020B0600000101010101" pitchFamily="50" charset="-127"/>
                           <a:cs typeface="+mn-cs"/>
                         </a:rPr>
-                        <a:t>98,014</a:t>
+                        <a:t>98,264</a:t>
                       </a:r>
                     </a:p>
                   </a:txBody>
@@ -13836,7 +13836,7 @@
                           <a:ea typeface="대명체 보통" panose="020B0600000101010101" pitchFamily="50" charset="-127"/>
                           <a:cs typeface="+mn-cs"/>
                         </a:rPr>
-                        <a:t>47,154</a:t>
+                        <a:t>80,327</a:t>
                       </a:r>
                     </a:p>
                   </a:txBody>
@@ -13903,7 +13903,7 @@
                           <a:ea typeface="대명체 보통" panose="020B0600000101010101" pitchFamily="50" charset="-127"/>
                           <a:cs typeface="+mn-cs"/>
                         </a:rPr>
-                        <a:t>48%</a:t>
+                        <a:t>82%</a:t>
                       </a:r>
                     </a:p>
                   </a:txBody>
@@ -14237,7 +14237,7 @@
                           <a:ea typeface="대명체 보통" panose="020B0600000101010101" pitchFamily="50" charset="-127"/>
                           <a:cs typeface="+mn-cs"/>
                         </a:rPr>
-                        <a:t>16,906</a:t>
+                        <a:t>39,107</a:t>
                       </a:r>
                     </a:p>
                   </a:txBody>
@@ -14355,7 +14355,7 @@
                           <a:ea typeface="대명체 보통" panose="020B0600000101010101" pitchFamily="50" charset="-127"/>
                           <a:cs typeface="+mn-cs"/>
                         </a:rPr>
-                        <a:t>2,303</a:t>
+                        <a:t>24,503</a:t>
                       </a:r>
                       <a:endParaRPr lang="en-US" altLang="ko-KR" sz="700" b="0" i="0" u="none" strike="noStrike" kern="1200" dirty="0">
                         <a:solidFill>
@@ -14427,7 +14427,7 @@
                           <a:ea typeface="대명체 보통" panose="020B0600000101010101" pitchFamily="50" charset="-127"/>
                           <a:cs typeface="+mn-cs"/>
                         </a:rPr>
-                        <a:t>116%</a:t>
+                        <a:t>268%</a:t>
                       </a:r>
                     </a:p>
                   </a:txBody>
@@ -14490,7 +14490,7 @@
                           <a:ea typeface="대명체 보통" panose="020B0600000101010101" pitchFamily="50" charset="-127"/>
                           <a:cs typeface="+mn-cs"/>
                         </a:rPr>
-                        <a:t>10,174</a:t>
+                        <a:t>10,324</a:t>
                       </a:r>
                     </a:p>
                   </a:txBody>
@@ -14608,7 +14608,7 @@
                           <a:ea typeface="대명체 보통" panose="020B0600000101010101" pitchFamily="50" charset="-127"/>
                           <a:cs typeface="+mn-cs"/>
                         </a:rPr>
-                        <a:t>6,732</a:t>
+                        <a:t>28,783</a:t>
                       </a:r>
                     </a:p>
                   </a:txBody>
@@ -14671,7 +14671,7 @@
                           <a:ea typeface="대명체 보통" panose="020B0600000101010101" pitchFamily="50" charset="-127"/>
                           <a:cs typeface="+mn-cs"/>
                         </a:rPr>
-                        <a:t>66%</a:t>
+                        <a:t>279%</a:t>
                       </a:r>
                     </a:p>
                   </a:txBody>
@@ -14900,7 +14900,7 @@
                           <a:ea typeface="대명체 보통" panose="020B0600000101010101" pitchFamily="50" charset="-127"/>
                           <a:cs typeface="+mn-cs"/>
                         </a:rPr>
-                        <a:t>84,629</a:t>
+                        <a:t>106,829</a:t>
                       </a:r>
                     </a:p>
                   </a:txBody>
@@ -15018,7 +15018,7 @@
                           <a:ea typeface="대명체 보통" panose="020B0600000101010101" pitchFamily="50" charset="-127"/>
                           <a:cs typeface="+mn-cs"/>
                         </a:rPr>
-                        <a:t>12,278</a:t>
+                        <a:t>34,478</a:t>
                       </a:r>
                     </a:p>
                   </a:txBody>
@@ -15081,7 +15081,7 @@
                           <a:ea typeface="대명체 보통" panose="020B0600000101010101" pitchFamily="50" charset="-127"/>
                           <a:cs typeface="+mn-cs"/>
                         </a:rPr>
-                        <a:t>117%</a:t>
+                        <a:t>148%</a:t>
                       </a:r>
                     </a:p>
                   </a:txBody>
@@ -15144,7 +15144,7 @@
                           <a:ea typeface="대명체 보통" panose="020B0600000101010101" pitchFamily="50" charset="-127"/>
                           <a:cs typeface="+mn-cs"/>
                         </a:rPr>
-                        <a:t>55,747</a:t>
+                        <a:t>55,896</a:t>
                       </a:r>
                     </a:p>
                   </a:txBody>
@@ -15262,7 +15262,7 @@
                           <a:ea typeface="대명체 보통" panose="020B0600000101010101" pitchFamily="50" charset="-127"/>
                           <a:cs typeface="+mn-cs"/>
                         </a:rPr>
-                        <a:t>28,882</a:t>
+                        <a:t>50,933</a:t>
                       </a:r>
                     </a:p>
                   </a:txBody>
@@ -15325,7 +15325,7 @@
                           <a:ea typeface="대명체 보통" panose="020B0600000101010101" pitchFamily="50" charset="-127"/>
                           <a:cs typeface="+mn-cs"/>
                         </a:rPr>
-                        <a:t>52%</a:t>
+                        <a:t>91%</a:t>
                       </a:r>
                     </a:p>
                   </a:txBody>
@@ -15643,7 +15643,7 @@
                           <a:ea typeface="대명체 보통" panose="020B0600000101010101" pitchFamily="50" charset="-127"/>
                           <a:cs typeface="+mn-cs"/>
                         </a:rPr>
-                        <a:t>11,184</a:t>
+                        <a:t>22,407</a:t>
                       </a:r>
                     </a:p>
                   </a:txBody>
@@ -15753,7 +15753,7 @@
                           <a:ea typeface="대명체 보통" panose="020B0600000101010101" pitchFamily="50" charset="-127"/>
                           <a:cs typeface="+mn-cs"/>
                         </a:rPr>
-                        <a:t>2,327</a:t>
+                        <a:t>13,550</a:t>
                       </a:r>
                       <a:endParaRPr lang="en-US" altLang="ko-KR" sz="700" b="0" i="0" u="none" strike="noStrike" kern="1200" dirty="0">
                         <a:solidFill>
@@ -15821,7 +15821,7 @@
                           <a:ea typeface="대명체 보통" panose="020B0600000101010101" pitchFamily="50" charset="-127"/>
                           <a:cs typeface="+mn-cs"/>
                         </a:rPr>
-                        <a:t>126%</a:t>
+                        <a:t>253%</a:t>
                       </a:r>
                     </a:p>
                   </a:txBody>
@@ -15880,7 +15880,7 @@
                           <a:ea typeface="대명체 보통" panose="020B0600000101010101" pitchFamily="50" charset="-127"/>
                           <a:cs typeface="+mn-cs"/>
                         </a:rPr>
-                        <a:t>6,366</a:t>
+                        <a:t>6,455</a:t>
                       </a:r>
                     </a:p>
                   </a:txBody>
@@ -15990,7 +15990,7 @@
                           <a:ea typeface="대명체 보통" panose="020B0600000101010101" pitchFamily="50" charset="-127"/>
                           <a:cs typeface="+mn-cs"/>
                         </a:rPr>
-                        <a:t>4,818</a:t>
+                        <a:t>15,952</a:t>
                       </a:r>
                     </a:p>
                   </a:txBody>
@@ -16049,7 +16049,7 @@
                           <a:ea typeface="대명체 보통" panose="020B0600000101010101" pitchFamily="50" charset="-127"/>
                           <a:cs typeface="+mn-cs"/>
                         </a:rPr>
-                        <a:t>76%</a:t>
+                        <a:t>247%</a:t>
                       </a:r>
                     </a:p>
                   </a:txBody>
@@ -16266,7 +16266,7 @@
                           <a:ea typeface="대명체 보통" panose="020B0600000101010101" pitchFamily="50" charset="-127"/>
                           <a:cs typeface="+mn-cs"/>
                         </a:rPr>
-                        <a:t>55,278</a:t>
+                        <a:t>66,501</a:t>
                       </a:r>
                     </a:p>
                   </a:txBody>
@@ -16376,7 +16376,7 @@
                           <a:ea typeface="대명체 보통" panose="020B0600000101010101" pitchFamily="50" charset="-127"/>
                           <a:cs typeface="+mn-cs"/>
                         </a:rPr>
-                        <a:t>6,174</a:t>
+                        <a:t>17,398</a:t>
                       </a:r>
                     </a:p>
                   </a:txBody>
@@ -16435,7 +16435,7 @@
                           <a:ea typeface="대명체 보통" panose="020B0600000101010101" pitchFamily="50" charset="-127"/>
                           <a:cs typeface="+mn-cs"/>
                         </a:rPr>
-                        <a:t>113%</a:t>
+                        <a:t>135%</a:t>
                       </a:r>
                     </a:p>
                   </a:txBody>
@@ -16494,7 +16494,7 @@
                           <a:ea typeface="대명체 보통" panose="020B0600000101010101" pitchFamily="50" charset="-127"/>
                           <a:cs typeface="+mn-cs"/>
                         </a:rPr>
-                        <a:t>39,119</a:t>
+                        <a:t>39,209</a:t>
                       </a:r>
                     </a:p>
                   </a:txBody>
@@ -16604,7 +16604,7 @@
                           <a:ea typeface="대명체 보통" panose="020B0600000101010101" pitchFamily="50" charset="-127"/>
                           <a:cs typeface="+mn-cs"/>
                         </a:rPr>
-                        <a:t>16,158</a:t>
+                        <a:t>27,292</a:t>
                       </a:r>
                     </a:p>
                   </a:txBody>
@@ -16663,7 +16663,7 @@
                           <a:ea typeface="대명체 보통" panose="020B0600000101010101" pitchFamily="50" charset="-127"/>
                           <a:cs typeface="+mn-cs"/>
                         </a:rPr>
-                        <a:t>41%</a:t>
+                        <a:t>70%</a:t>
                       </a:r>
                     </a:p>
                   </a:txBody>
@@ -17261,7 +17261,7 @@
                           <a:ea typeface="대명체 보통" panose="020B0600000101010101" pitchFamily="50" charset="-127"/>
                           <a:cs typeface="+mn-cs"/>
                         </a:rPr>
-                        <a:t>310</a:t>
+                        <a:t>321</a:t>
                       </a:r>
                       <a:endParaRPr lang="en-US" altLang="ko-KR" sz="700" b="0" i="0" u="none" strike="noStrike" kern="1200" dirty="0">
                         <a:solidFill>
@@ -17388,7 +17388,7 @@
                           <a:ea typeface="대명체 보통" panose="020B0600000101010101" pitchFamily="50" charset="-127"/>
                           <a:cs typeface="+mn-cs"/>
                         </a:rPr>
-                        <a:t>299</a:t>
+                        <a:t>288</a:t>
                       </a:r>
                     </a:p>
                   </a:txBody>
@@ -17451,7 +17451,7 @@
                           <a:ea typeface="대명체 보통" panose="020B0600000101010101" pitchFamily="50" charset="-127"/>
                           <a:cs typeface="+mn-cs"/>
                         </a:rPr>
-                        <a:t>97%</a:t>
+                        <a:t>90%</a:t>
                       </a:r>
                     </a:p>
                   </a:txBody>
@@ -17933,7 +17933,7 @@
                           <a:ea typeface="대명체 보통" panose="020B0600000101010101" pitchFamily="50" charset="-127"/>
                           <a:cs typeface="+mn-cs"/>
                         </a:rPr>
-                        <a:t>3,148</a:t>
+                        <a:t>3,159</a:t>
                       </a:r>
                     </a:p>
                   </a:txBody>
@@ -18051,7 +18051,7 @@
                           <a:ea typeface="대명체 보통" panose="020B0600000101010101" pitchFamily="50" charset="-127"/>
                           <a:cs typeface="+mn-cs"/>
                         </a:rPr>
-                        <a:t>2,113</a:t>
+                        <a:t>2,102</a:t>
                       </a:r>
                     </a:p>
                   </a:txBody>

--- a/data/세일즈마케팅_예상매출현황.pptx
+++ b/data/세일즈마케팅_예상매출현황.pptx
@@ -12756,7 +12756,7 @@
                           <a:ea typeface="대명체 보통" panose="020B0600000101010101" pitchFamily="50" charset="-127"/>
                           <a:cs typeface="+mn-cs"/>
                         </a:rPr>
-                        <a:t>62,122</a:t>
+                        <a:t>68,837</a:t>
                       </a:r>
                     </a:p>
                   </a:txBody>
@@ -12882,7 +12882,7 @@
                           <a:ea typeface="대명체 보통" panose="020B0600000101010101" pitchFamily="50" charset="-127"/>
                           <a:cs typeface="+mn-cs"/>
                         </a:rPr>
-                        <a:t>38,263</a:t>
+                        <a:t>44,978</a:t>
                       </a:r>
                     </a:p>
                   </a:txBody>
@@ -12949,7 +12949,7 @@
                           <a:ea typeface="대명체 보통" panose="020B0600000101010101" pitchFamily="50" charset="-127"/>
                           <a:cs typeface="+mn-cs"/>
                         </a:rPr>
-                        <a:t>260%</a:t>
+                        <a:t>289%</a:t>
                       </a:r>
                     </a:p>
                   </a:txBody>
@@ -13016,7 +13016,7 @@
                           <a:ea typeface="대명체 보통" panose="020B0600000101010101" pitchFamily="50" charset="-127"/>
                           <a:cs typeface="+mn-cs"/>
                         </a:rPr>
-                        <a:t>17,100</a:t>
+                        <a:t>17,815</a:t>
                       </a:r>
                     </a:p>
                   </a:txBody>
@@ -13142,7 +13142,7 @@
                           <a:ea typeface="대명체 보통" panose="020B0600000101010101" pitchFamily="50" charset="-127"/>
                           <a:cs typeface="+mn-cs"/>
                         </a:rPr>
-                        <a:t>45,023</a:t>
+                        <a:t>51,023</a:t>
                       </a:r>
                     </a:p>
                   </a:txBody>
@@ -13209,7 +13209,7 @@
                           <a:ea typeface="대명체 보통" panose="020B0600000101010101" pitchFamily="50" charset="-127"/>
                           <a:cs typeface="+mn-cs"/>
                         </a:rPr>
-                        <a:t>263%</a:t>
+                        <a:t>286%</a:t>
                       </a:r>
                     </a:p>
                   </a:txBody>
@@ -13450,7 +13450,7 @@
                           <a:ea typeface="대명체 보통" panose="020B0600000101010101" pitchFamily="50" charset="-127"/>
                           <a:cs typeface="+mn-cs"/>
                         </a:rPr>
-                        <a:t>178,591</a:t>
+                        <a:t>185,306</a:t>
                       </a:r>
                     </a:p>
                   </a:txBody>
@@ -13576,7 +13576,7 @@
                           <a:ea typeface="대명체 보통" panose="020B0600000101010101" pitchFamily="50" charset="-127"/>
                           <a:cs typeface="+mn-cs"/>
                         </a:rPr>
-                        <a:t>53,670</a:t>
+                        <a:t>60,385</a:t>
                       </a:r>
                     </a:p>
                   </a:txBody>
@@ -13643,7 +13643,7 @@
                           <a:ea typeface="대명체 보통" panose="020B0600000101010101" pitchFamily="50" charset="-127"/>
                           <a:cs typeface="+mn-cs"/>
                         </a:rPr>
-                        <a:t>143%</a:t>
+                        <a:t>148%</a:t>
                       </a:r>
                     </a:p>
                   </a:txBody>
@@ -13710,7 +13710,7 @@
                           <a:ea typeface="대명체 보통" panose="020B0600000101010101" pitchFamily="50" charset="-127"/>
                           <a:cs typeface="+mn-cs"/>
                         </a:rPr>
-                        <a:t>98,264</a:t>
+                        <a:t>98,979</a:t>
                       </a:r>
                     </a:p>
                   </a:txBody>
@@ -13836,7 +13836,7 @@
                           <a:ea typeface="대명체 보통" panose="020B0600000101010101" pitchFamily="50" charset="-127"/>
                           <a:cs typeface="+mn-cs"/>
                         </a:rPr>
-                        <a:t>80,327</a:t>
+                        <a:t>86,327</a:t>
                       </a:r>
                     </a:p>
                   </a:txBody>
@@ -13903,7 +13903,7 @@
                           <a:ea typeface="대명체 보통" panose="020B0600000101010101" pitchFamily="50" charset="-127"/>
                           <a:cs typeface="+mn-cs"/>
                         </a:rPr>
-                        <a:t>82%</a:t>
+                        <a:t>87%</a:t>
                       </a:r>
                     </a:p>
                   </a:txBody>
@@ -14237,7 +14237,7 @@
                           <a:ea typeface="대명체 보통" panose="020B0600000101010101" pitchFamily="50" charset="-127"/>
                           <a:cs typeface="+mn-cs"/>
                         </a:rPr>
-                        <a:t>39,107</a:t>
+                        <a:t>46,090</a:t>
                       </a:r>
                     </a:p>
                   </a:txBody>
@@ -14355,7 +14355,7 @@
                           <a:ea typeface="대명체 보통" panose="020B0600000101010101" pitchFamily="50" charset="-127"/>
                           <a:cs typeface="+mn-cs"/>
                         </a:rPr>
-                        <a:t>24,503</a:t>
+                        <a:t>31,487</a:t>
                       </a:r>
                       <a:endParaRPr lang="en-US" altLang="ko-KR" sz="700" b="0" i="0" u="none" strike="noStrike" kern="1200" dirty="0">
                         <a:solidFill>
@@ -14427,7 +14427,7 @@
                           <a:ea typeface="대명체 보통" panose="020B0600000101010101" pitchFamily="50" charset="-127"/>
                           <a:cs typeface="+mn-cs"/>
                         </a:rPr>
-                        <a:t>268%</a:t>
+                        <a:t>316%</a:t>
                       </a:r>
                     </a:p>
                   </a:txBody>
@@ -14490,7 +14490,7 @@
                           <a:ea typeface="대명체 보통" panose="020B0600000101010101" pitchFamily="50" charset="-127"/>
                           <a:cs typeface="+mn-cs"/>
                         </a:rPr>
-                        <a:t>10,324</a:t>
+                        <a:t>10,774</a:t>
                       </a:r>
                     </a:p>
                   </a:txBody>
@@ -14608,7 +14608,7 @@
                           <a:ea typeface="대명체 보통" panose="020B0600000101010101" pitchFamily="50" charset="-127"/>
                           <a:cs typeface="+mn-cs"/>
                         </a:rPr>
-                        <a:t>28,783</a:t>
+                        <a:t>35,317</a:t>
                       </a:r>
                     </a:p>
                   </a:txBody>
@@ -14671,7 +14671,7 @@
                           <a:ea typeface="대명체 보통" panose="020B0600000101010101" pitchFamily="50" charset="-127"/>
                           <a:cs typeface="+mn-cs"/>
                         </a:rPr>
-                        <a:t>279%</a:t>
+                        <a:t>328%</a:t>
                       </a:r>
                     </a:p>
                   </a:txBody>
@@ -14900,7 +14900,7 @@
                           <a:ea typeface="대명체 보통" panose="020B0600000101010101" pitchFamily="50" charset="-127"/>
                           <a:cs typeface="+mn-cs"/>
                         </a:rPr>
-                        <a:t>106,829</a:t>
+                        <a:t>113,813</a:t>
                       </a:r>
                     </a:p>
                   </a:txBody>
@@ -15018,7 +15018,7 @@
                           <a:ea typeface="대명체 보통" panose="020B0600000101010101" pitchFamily="50" charset="-127"/>
                           <a:cs typeface="+mn-cs"/>
                         </a:rPr>
-                        <a:t>34,478</a:t>
+                        <a:t>41,462</a:t>
                       </a:r>
                     </a:p>
                   </a:txBody>
@@ -15081,7 +15081,7 @@
                           <a:ea typeface="대명체 보통" panose="020B0600000101010101" pitchFamily="50" charset="-127"/>
                           <a:cs typeface="+mn-cs"/>
                         </a:rPr>
-                        <a:t>148%</a:t>
+                        <a:t>157%</a:t>
                       </a:r>
                     </a:p>
                   </a:txBody>
@@ -15144,7 +15144,7 @@
                           <a:ea typeface="대명체 보통" panose="020B0600000101010101" pitchFamily="50" charset="-127"/>
                           <a:cs typeface="+mn-cs"/>
                         </a:rPr>
-                        <a:t>55,896</a:t>
+                        <a:t>56,346</a:t>
                       </a:r>
                     </a:p>
                   </a:txBody>
@@ -15262,7 +15262,7 @@
                           <a:ea typeface="대명체 보통" panose="020B0600000101010101" pitchFamily="50" charset="-127"/>
                           <a:cs typeface="+mn-cs"/>
                         </a:rPr>
-                        <a:t>50,933</a:t>
+                        <a:t>57,467</a:t>
                       </a:r>
                     </a:p>
                   </a:txBody>
@@ -15325,7 +15325,7 @@
                           <a:ea typeface="대명체 보통" panose="020B0600000101010101" pitchFamily="50" charset="-127"/>
                           <a:cs typeface="+mn-cs"/>
                         </a:rPr>
-                        <a:t>91%</a:t>
+                        <a:t>102%</a:t>
                       </a:r>
                     </a:p>
                   </a:txBody>
@@ -15643,7 +15643,7 @@
                           <a:ea typeface="대명체 보통" panose="020B0600000101010101" pitchFamily="50" charset="-127"/>
                           <a:cs typeface="+mn-cs"/>
                         </a:rPr>
-                        <a:t>22,407</a:t>
+                        <a:t>22,165</a:t>
                       </a:r>
                     </a:p>
                   </a:txBody>
@@ -15753,7 +15753,7 @@
                           <a:ea typeface="대명체 보통" panose="020B0600000101010101" pitchFamily="50" charset="-127"/>
                           <a:cs typeface="+mn-cs"/>
                         </a:rPr>
-                        <a:t>13,550</a:t>
+                        <a:t>13,308</a:t>
                       </a:r>
                       <a:endParaRPr lang="en-US" altLang="ko-KR" sz="700" b="0" i="0" u="none" strike="noStrike" kern="1200" dirty="0">
                         <a:solidFill>
@@ -15821,7 +15821,7 @@
                           <a:ea typeface="대명체 보통" panose="020B0600000101010101" pitchFamily="50" charset="-127"/>
                           <a:cs typeface="+mn-cs"/>
                         </a:rPr>
-                        <a:t>253%</a:t>
+                        <a:t>250%</a:t>
                       </a:r>
                     </a:p>
                   </a:txBody>
@@ -15880,7 +15880,7 @@
                           <a:ea typeface="대명체 보통" panose="020B0600000101010101" pitchFamily="50" charset="-127"/>
                           <a:cs typeface="+mn-cs"/>
                         </a:rPr>
-                        <a:t>6,455</a:t>
+                        <a:t>6,710</a:t>
                       </a:r>
                     </a:p>
                   </a:txBody>
@@ -15990,7 +15990,7 @@
                           <a:ea typeface="대명체 보통" panose="020B0600000101010101" pitchFamily="50" charset="-127"/>
                           <a:cs typeface="+mn-cs"/>
                         </a:rPr>
-                        <a:t>15,952</a:t>
+                        <a:t>15,454</a:t>
                       </a:r>
                     </a:p>
                   </a:txBody>
@@ -16049,7 +16049,7 @@
                           <a:ea typeface="대명체 보통" panose="020B0600000101010101" pitchFamily="50" charset="-127"/>
                           <a:cs typeface="+mn-cs"/>
                         </a:rPr>
-                        <a:t>247%</a:t>
+                        <a:t>230%</a:t>
                       </a:r>
                     </a:p>
                   </a:txBody>
@@ -16266,7 +16266,7 @@
                           <a:ea typeface="대명체 보통" panose="020B0600000101010101" pitchFamily="50" charset="-127"/>
                           <a:cs typeface="+mn-cs"/>
                         </a:rPr>
-                        <a:t>66,501</a:t>
+                        <a:t>66,258</a:t>
                       </a:r>
                     </a:p>
                   </a:txBody>
@@ -16376,7 +16376,7 @@
                           <a:ea typeface="대명체 보통" panose="020B0600000101010101" pitchFamily="50" charset="-127"/>
                           <a:cs typeface="+mn-cs"/>
                         </a:rPr>
-                        <a:t>17,398</a:t>
+                        <a:t>17,155</a:t>
                       </a:r>
                     </a:p>
                   </a:txBody>
@@ -16494,7 +16494,7 @@
                           <a:ea typeface="대명체 보통" panose="020B0600000101010101" pitchFamily="50" charset="-127"/>
                           <a:cs typeface="+mn-cs"/>
                         </a:rPr>
-                        <a:t>39,209</a:t>
+                        <a:t>39,464</a:t>
                       </a:r>
                     </a:p>
                   </a:txBody>
@@ -16604,7 +16604,7 @@
                           <a:ea typeface="대명체 보통" panose="020B0600000101010101" pitchFamily="50" charset="-127"/>
                           <a:cs typeface="+mn-cs"/>
                         </a:rPr>
-                        <a:t>27,292</a:t>
+                        <a:t>26,795</a:t>
                       </a:r>
                     </a:p>
                   </a:txBody>
@@ -16663,7 +16663,7 @@
                           <a:ea typeface="대명체 보통" panose="020B0600000101010101" pitchFamily="50" charset="-127"/>
                           <a:cs typeface="+mn-cs"/>
                         </a:rPr>
-                        <a:t>70%</a:t>
+                        <a:t>68%</a:t>
                       </a:r>
                     </a:p>
                   </a:txBody>
@@ -16999,7 +16999,7 @@
                           <a:ea typeface="대명체 보통" panose="020B0600000101010101" pitchFamily="50" charset="-127"/>
                           <a:cs typeface="+mn-cs"/>
                         </a:rPr>
-                        <a:t>609</a:t>
+                        <a:t>582</a:t>
                       </a:r>
                       <a:endParaRPr lang="en-US" altLang="ko-KR" sz="700" b="0" i="0" u="none" strike="noStrike" kern="1200" dirty="0">
                         <a:solidFill>
@@ -17126,7 +17126,7 @@
                           <a:ea typeface="대명체 보통" panose="020B0600000101010101" pitchFamily="50" charset="-127"/>
                           <a:cs typeface="+mn-cs"/>
                         </a:rPr>
-                        <a:t>210</a:t>
+                        <a:t>183</a:t>
                       </a:r>
                       <a:endParaRPr lang="en-US" altLang="ko-KR" sz="700" b="0" i="0" u="none" strike="noStrike" kern="1200" dirty="0">
                         <a:solidFill>
@@ -17198,7 +17198,7 @@
                           <a:ea typeface="대명체 보통" panose="020B0600000101010101" pitchFamily="50" charset="-127"/>
                           <a:cs typeface="+mn-cs"/>
                         </a:rPr>
-                        <a:t>153%</a:t>
+                        <a:t>146%</a:t>
                       </a:r>
                     </a:p>
                   </a:txBody>
@@ -17261,7 +17261,7 @@
                           <a:ea typeface="대명체 보통" panose="020B0600000101010101" pitchFamily="50" charset="-127"/>
                           <a:cs typeface="+mn-cs"/>
                         </a:rPr>
-                        <a:t>321</a:t>
+                        <a:t>331</a:t>
                       </a:r>
                       <a:endParaRPr lang="en-US" altLang="ko-KR" sz="700" b="0" i="0" u="none" strike="noStrike" kern="1200" dirty="0">
                         <a:solidFill>
@@ -17388,7 +17388,7 @@
                           <a:ea typeface="대명체 보통" panose="020B0600000101010101" pitchFamily="50" charset="-127"/>
                           <a:cs typeface="+mn-cs"/>
                         </a:rPr>
-                        <a:t>288</a:t>
+                        <a:t>251</a:t>
                       </a:r>
                     </a:p>
                   </a:txBody>
@@ -17451,7 +17451,7 @@
                           <a:ea typeface="대명체 보통" panose="020B0600000101010101" pitchFamily="50" charset="-127"/>
                           <a:cs typeface="+mn-cs"/>
                         </a:rPr>
-                        <a:t>90%</a:t>
+                        <a:t>76%</a:t>
                       </a:r>
                     </a:p>
                   </a:txBody>
@@ -17680,7 +17680,7 @@
                           <a:ea typeface="대명체 보통" panose="020B0600000101010101" pitchFamily="50" charset="-127"/>
                           <a:cs typeface="+mn-cs"/>
                         </a:rPr>
-                        <a:t>5,261</a:t>
+                        <a:t>5,235</a:t>
                       </a:r>
                     </a:p>
                   </a:txBody>
@@ -17798,7 +17798,7 @@
                           <a:ea typeface="대명체 보통" panose="020B0600000101010101" pitchFamily="50" charset="-127"/>
                           <a:cs typeface="+mn-cs"/>
                         </a:rPr>
-                        <a:t>1,794</a:t>
+                        <a:t>1,768</a:t>
                       </a:r>
                       <a:endParaRPr lang="en-US" altLang="ko-KR" sz="700" b="0" i="0" u="none" strike="noStrike" kern="1200" dirty="0">
                         <a:solidFill>
@@ -17870,7 +17870,7 @@
                           <a:ea typeface="대명체 보통" panose="020B0600000101010101" pitchFamily="50" charset="-127"/>
                           <a:cs typeface="+mn-cs"/>
                         </a:rPr>
-                        <a:t>152%</a:t>
+                        <a:t>151%</a:t>
                       </a:r>
                     </a:p>
                   </a:txBody>
@@ -17933,7 +17933,7 @@
                           <a:ea typeface="대명체 보통" panose="020B0600000101010101" pitchFamily="50" charset="-127"/>
                           <a:cs typeface="+mn-cs"/>
                         </a:rPr>
-                        <a:t>3,159</a:t>
+                        <a:t>3,169</a:t>
                       </a:r>
                     </a:p>
                   </a:txBody>
@@ -18051,7 +18051,7 @@
                           <a:ea typeface="대명체 보통" panose="020B0600000101010101" pitchFamily="50" charset="-127"/>
                           <a:cs typeface="+mn-cs"/>
                         </a:rPr>
-                        <a:t>2,102</a:t>
+                        <a:t>2,066</a:t>
                       </a:r>
                     </a:p>
                   </a:txBody>
@@ -18114,7 +18114,7 @@
                           <a:ea typeface="대명체 보통" panose="020B0600000101010101" pitchFamily="50" charset="-127"/>
                           <a:cs typeface="+mn-cs"/>
                         </a:rPr>
-                        <a:t>67%</a:t>
+                        <a:t>65%</a:t>
                       </a:r>
                     </a:p>
                   </a:txBody>

--- a/data/세일즈마케팅_예상매출현황.pptx
+++ b/data/세일즈마케팅_예상매출현황.pptx
@@ -12756,7 +12756,7 @@
                           <a:ea typeface="대명체 보통" panose="020B0600000101010101" pitchFamily="50" charset="-127"/>
                           <a:cs typeface="+mn-cs"/>
                         </a:rPr>
-                        <a:t>68,837</a:t>
+                        <a:t>69,132</a:t>
                       </a:r>
                     </a:p>
                   </a:txBody>
@@ -12882,7 +12882,7 @@
                           <a:ea typeface="대명체 보통" panose="020B0600000101010101" pitchFamily="50" charset="-127"/>
                           <a:cs typeface="+mn-cs"/>
                         </a:rPr>
-                        <a:t>44,978</a:t>
+                        <a:t>45,272</a:t>
                       </a:r>
                     </a:p>
                   </a:txBody>
@@ -12949,7 +12949,7 @@
                           <a:ea typeface="대명체 보통" panose="020B0600000101010101" pitchFamily="50" charset="-127"/>
                           <a:cs typeface="+mn-cs"/>
                         </a:rPr>
-                        <a:t>289%</a:t>
+                        <a:t>290%</a:t>
                       </a:r>
                     </a:p>
                   </a:txBody>
@@ -13016,7 +13016,7 @@
                           <a:ea typeface="대명체 보통" panose="020B0600000101010101" pitchFamily="50" charset="-127"/>
                           <a:cs typeface="+mn-cs"/>
                         </a:rPr>
-                        <a:t>17,815</a:t>
+                        <a:t>18,056</a:t>
                       </a:r>
                     </a:p>
                   </a:txBody>
@@ -13142,7 +13142,7 @@
                           <a:ea typeface="대명체 보통" panose="020B0600000101010101" pitchFamily="50" charset="-127"/>
                           <a:cs typeface="+mn-cs"/>
                         </a:rPr>
-                        <a:t>51,023</a:t>
+                        <a:t>51,076</a:t>
                       </a:r>
                     </a:p>
                   </a:txBody>
@@ -13209,7 +13209,7 @@
                           <a:ea typeface="대명체 보통" panose="020B0600000101010101" pitchFamily="50" charset="-127"/>
                           <a:cs typeface="+mn-cs"/>
                         </a:rPr>
-                        <a:t>286%</a:t>
+                        <a:t>283%</a:t>
                       </a:r>
                     </a:p>
                   </a:txBody>
@@ -13450,7 +13450,7 @@
                           <a:ea typeface="대명체 보통" panose="020B0600000101010101" pitchFamily="50" charset="-127"/>
                           <a:cs typeface="+mn-cs"/>
                         </a:rPr>
-                        <a:t>185,306</a:t>
+                        <a:t>185,600</a:t>
                       </a:r>
                     </a:p>
                   </a:txBody>
@@ -13576,7 +13576,7 @@
                           <a:ea typeface="대명체 보통" panose="020B0600000101010101" pitchFamily="50" charset="-127"/>
                           <a:cs typeface="+mn-cs"/>
                         </a:rPr>
-                        <a:t>60,385</a:t>
+                        <a:t>60,679</a:t>
                       </a:r>
                     </a:p>
                   </a:txBody>
@@ -13643,7 +13643,7 @@
                           <a:ea typeface="대명체 보통" panose="020B0600000101010101" pitchFamily="50" charset="-127"/>
                           <a:cs typeface="+mn-cs"/>
                         </a:rPr>
-                        <a:t>148%</a:t>
+                        <a:t>149%</a:t>
                       </a:r>
                     </a:p>
                   </a:txBody>
@@ -13710,7 +13710,7 @@
                           <a:ea typeface="대명체 보통" panose="020B0600000101010101" pitchFamily="50" charset="-127"/>
                           <a:cs typeface="+mn-cs"/>
                         </a:rPr>
-                        <a:t>98,979</a:t>
+                        <a:t>99,220</a:t>
                       </a:r>
                     </a:p>
                   </a:txBody>
@@ -13836,7 +13836,7 @@
                           <a:ea typeface="대명체 보통" panose="020B0600000101010101" pitchFamily="50" charset="-127"/>
                           <a:cs typeface="+mn-cs"/>
                         </a:rPr>
-                        <a:t>86,327</a:t>
+                        <a:t>86,381</a:t>
                       </a:r>
                     </a:p>
                   </a:txBody>
@@ -14237,7 +14237,7 @@
                           <a:ea typeface="대명체 보통" panose="020B0600000101010101" pitchFamily="50" charset="-127"/>
                           <a:cs typeface="+mn-cs"/>
                         </a:rPr>
-                        <a:t>46,090</a:t>
+                        <a:t>46,368</a:t>
                       </a:r>
                     </a:p>
                   </a:txBody>
@@ -14355,7 +14355,7 @@
                           <a:ea typeface="대명체 보통" panose="020B0600000101010101" pitchFamily="50" charset="-127"/>
                           <a:cs typeface="+mn-cs"/>
                         </a:rPr>
-                        <a:t>31,487</a:t>
+                        <a:t>31,764</a:t>
                       </a:r>
                       <a:endParaRPr lang="en-US" altLang="ko-KR" sz="700" b="0" i="0" u="none" strike="noStrike" kern="1200" dirty="0">
                         <a:solidFill>
@@ -14427,7 +14427,7 @@
                           <a:ea typeface="대명체 보통" panose="020B0600000101010101" pitchFamily="50" charset="-127"/>
                           <a:cs typeface="+mn-cs"/>
                         </a:rPr>
-                        <a:t>316%</a:t>
+                        <a:t>318%</a:t>
                       </a:r>
                     </a:p>
                   </a:txBody>
@@ -14490,7 +14490,7 @@
                           <a:ea typeface="대명체 보통" panose="020B0600000101010101" pitchFamily="50" charset="-127"/>
                           <a:cs typeface="+mn-cs"/>
                         </a:rPr>
-                        <a:t>10,774</a:t>
+                        <a:t>10,940</a:t>
                       </a:r>
                     </a:p>
                   </a:txBody>
@@ -14608,7 +14608,7 @@
                           <a:ea typeface="대명체 보통" panose="020B0600000101010101" pitchFamily="50" charset="-127"/>
                           <a:cs typeface="+mn-cs"/>
                         </a:rPr>
-                        <a:t>35,317</a:t>
+                        <a:t>35,428</a:t>
                       </a:r>
                     </a:p>
                   </a:txBody>
@@ -14671,7 +14671,7 @@
                           <a:ea typeface="대명체 보통" panose="020B0600000101010101" pitchFamily="50" charset="-127"/>
                           <a:cs typeface="+mn-cs"/>
                         </a:rPr>
-                        <a:t>328%</a:t>
+                        <a:t>324%</a:t>
                       </a:r>
                     </a:p>
                   </a:txBody>
@@ -14900,7 +14900,7 @@
                           <a:ea typeface="대명체 보통" panose="020B0600000101010101" pitchFamily="50" charset="-127"/>
                           <a:cs typeface="+mn-cs"/>
                         </a:rPr>
-                        <a:t>113,813</a:t>
+                        <a:t>114,090</a:t>
                       </a:r>
                     </a:p>
                   </a:txBody>
@@ -15018,7 +15018,7 @@
                           <a:ea typeface="대명체 보통" panose="020B0600000101010101" pitchFamily="50" charset="-127"/>
                           <a:cs typeface="+mn-cs"/>
                         </a:rPr>
-                        <a:t>41,462</a:t>
+                        <a:t>41,739</a:t>
                       </a:r>
                     </a:p>
                   </a:txBody>
@@ -15081,7 +15081,7 @@
                           <a:ea typeface="대명체 보통" panose="020B0600000101010101" pitchFamily="50" charset="-127"/>
                           <a:cs typeface="+mn-cs"/>
                         </a:rPr>
-                        <a:t>157%</a:t>
+                        <a:t>158%</a:t>
                       </a:r>
                     </a:p>
                   </a:txBody>
@@ -15144,7 +15144,7 @@
                           <a:ea typeface="대명체 보통" panose="020B0600000101010101" pitchFamily="50" charset="-127"/>
                           <a:cs typeface="+mn-cs"/>
                         </a:rPr>
-                        <a:t>56,346</a:t>
+                        <a:t>56,513</a:t>
                       </a:r>
                     </a:p>
                   </a:txBody>
@@ -15262,7 +15262,7 @@
                           <a:ea typeface="대명체 보통" panose="020B0600000101010101" pitchFamily="50" charset="-127"/>
                           <a:cs typeface="+mn-cs"/>
                         </a:rPr>
-                        <a:t>57,467</a:t>
+                        <a:t>57,578</a:t>
                       </a:r>
                     </a:p>
                   </a:txBody>
@@ -15643,7 +15643,7 @@
                           <a:ea typeface="대명체 보통" panose="020B0600000101010101" pitchFamily="50" charset="-127"/>
                           <a:cs typeface="+mn-cs"/>
                         </a:rPr>
-                        <a:t>22,165</a:t>
+                        <a:t>22,179</a:t>
                       </a:r>
                     </a:p>
                   </a:txBody>
@@ -15753,7 +15753,7 @@
                           <a:ea typeface="대명체 보통" panose="020B0600000101010101" pitchFamily="50" charset="-127"/>
                           <a:cs typeface="+mn-cs"/>
                         </a:rPr>
-                        <a:t>13,308</a:t>
+                        <a:t>13,322</a:t>
                       </a:r>
                       <a:endParaRPr lang="en-US" altLang="ko-KR" sz="700" b="0" i="0" u="none" strike="noStrike" kern="1200" dirty="0">
                         <a:solidFill>
@@ -15880,7 +15880,7 @@
                           <a:ea typeface="대명체 보통" panose="020B0600000101010101" pitchFamily="50" charset="-127"/>
                           <a:cs typeface="+mn-cs"/>
                         </a:rPr>
-                        <a:t>6,710</a:t>
+                        <a:t>6,785</a:t>
                       </a:r>
                     </a:p>
                   </a:txBody>
@@ -15990,7 +15990,7 @@
                           <a:ea typeface="대명체 보통" panose="020B0600000101010101" pitchFamily="50" charset="-127"/>
                           <a:cs typeface="+mn-cs"/>
                         </a:rPr>
-                        <a:t>15,454</a:t>
+                        <a:t>15,394</a:t>
                       </a:r>
                     </a:p>
                   </a:txBody>
@@ -16049,7 +16049,7 @@
                           <a:ea typeface="대명체 보통" panose="020B0600000101010101" pitchFamily="50" charset="-127"/>
                           <a:cs typeface="+mn-cs"/>
                         </a:rPr>
-                        <a:t>230%</a:t>
+                        <a:t>227%</a:t>
                       </a:r>
                     </a:p>
                   </a:txBody>
@@ -16266,7 +16266,7 @@
                           <a:ea typeface="대명체 보통" panose="020B0600000101010101" pitchFamily="50" charset="-127"/>
                           <a:cs typeface="+mn-cs"/>
                         </a:rPr>
-                        <a:t>66,258</a:t>
+                        <a:t>66,273</a:t>
                       </a:r>
                     </a:p>
                   </a:txBody>
@@ -16376,7 +16376,7 @@
                           <a:ea typeface="대명체 보통" panose="020B0600000101010101" pitchFamily="50" charset="-127"/>
                           <a:cs typeface="+mn-cs"/>
                         </a:rPr>
-                        <a:t>17,155</a:t>
+                        <a:t>17,170</a:t>
                       </a:r>
                     </a:p>
                   </a:txBody>
@@ -16494,7 +16494,7 @@
                           <a:ea typeface="대명체 보통" panose="020B0600000101010101" pitchFamily="50" charset="-127"/>
                           <a:cs typeface="+mn-cs"/>
                         </a:rPr>
-                        <a:t>39,464</a:t>
+                        <a:t>39,538</a:t>
                       </a:r>
                     </a:p>
                   </a:txBody>
@@ -16604,7 +16604,7 @@
                           <a:ea typeface="대명체 보통" panose="020B0600000101010101" pitchFamily="50" charset="-127"/>
                           <a:cs typeface="+mn-cs"/>
                         </a:rPr>
-                        <a:t>26,795</a:t>
+                        <a:t>26,735</a:t>
                       </a:r>
                     </a:p>
                   </a:txBody>
@@ -16999,7 +16999,7 @@
                           <a:ea typeface="대명체 보통" panose="020B0600000101010101" pitchFamily="50" charset="-127"/>
                           <a:cs typeface="+mn-cs"/>
                         </a:rPr>
-                        <a:t>582</a:t>
+                        <a:t>585</a:t>
                       </a:r>
                       <a:endParaRPr lang="en-US" altLang="ko-KR" sz="700" b="0" i="0" u="none" strike="noStrike" kern="1200" dirty="0">
                         <a:solidFill>
@@ -17126,7 +17126,7 @@
                           <a:ea typeface="대명체 보통" panose="020B0600000101010101" pitchFamily="50" charset="-127"/>
                           <a:cs typeface="+mn-cs"/>
                         </a:rPr>
-                        <a:t>183</a:t>
+                        <a:t>186</a:t>
                       </a:r>
                       <a:endParaRPr lang="en-US" altLang="ko-KR" sz="700" b="0" i="0" u="none" strike="noStrike" kern="1200" dirty="0">
                         <a:solidFill>
@@ -17198,7 +17198,7 @@
                           <a:ea typeface="대명체 보통" panose="020B0600000101010101" pitchFamily="50" charset="-127"/>
                           <a:cs typeface="+mn-cs"/>
                         </a:rPr>
-                        <a:t>146%</a:t>
+                        <a:t>147%</a:t>
                       </a:r>
                     </a:p>
                   </a:txBody>
@@ -17388,7 +17388,7 @@
                           <a:ea typeface="대명체 보통" panose="020B0600000101010101" pitchFamily="50" charset="-127"/>
                           <a:cs typeface="+mn-cs"/>
                         </a:rPr>
-                        <a:t>251</a:t>
+                        <a:t>254</a:t>
                       </a:r>
                     </a:p>
                   </a:txBody>
@@ -17451,7 +17451,7 @@
                           <a:ea typeface="대명체 보통" panose="020B0600000101010101" pitchFamily="50" charset="-127"/>
                           <a:cs typeface="+mn-cs"/>
                         </a:rPr>
-                        <a:t>76%</a:t>
+                        <a:t>77%</a:t>
                       </a:r>
                     </a:p>
                   </a:txBody>
@@ -17680,7 +17680,7 @@
                           <a:ea typeface="대명체 보통" panose="020B0600000101010101" pitchFamily="50" charset="-127"/>
                           <a:cs typeface="+mn-cs"/>
                         </a:rPr>
-                        <a:t>5,235</a:t>
+                        <a:t>5,237</a:t>
                       </a:r>
                     </a:p>
                   </a:txBody>
@@ -17798,7 +17798,7 @@
                           <a:ea typeface="대명체 보통" panose="020B0600000101010101" pitchFamily="50" charset="-127"/>
                           <a:cs typeface="+mn-cs"/>
                         </a:rPr>
-                        <a:t>1,768</a:t>
+                        <a:t>1,770</a:t>
                       </a:r>
                       <a:endParaRPr lang="en-US" altLang="ko-KR" sz="700" b="0" i="0" u="none" strike="noStrike" kern="1200" dirty="0">
                         <a:solidFill>
@@ -18051,7 +18051,7 @@
                           <a:ea typeface="대명체 보통" panose="020B0600000101010101" pitchFamily="50" charset="-127"/>
                           <a:cs typeface="+mn-cs"/>
                         </a:rPr>
-                        <a:t>2,066</a:t>
+                        <a:t>2,068</a:t>
                       </a:r>
                     </a:p>
                   </a:txBody>

--- a/data/세일즈마케팅_예상매출현황.pptx
+++ b/data/세일즈마케팅_예상매출현황.pptx
@@ -12756,7 +12756,7 @@
                           <a:ea typeface="대명체 보통" panose="020B0600000101010101" pitchFamily="50" charset="-127"/>
                           <a:cs typeface="+mn-cs"/>
                         </a:rPr>
-                        <a:t>69,132</a:t>
+                        <a:t>69,122</a:t>
                       </a:r>
                     </a:p>
                   </a:txBody>
@@ -12882,7 +12882,7 @@
                           <a:ea typeface="대명체 보통" panose="020B0600000101010101" pitchFamily="50" charset="-127"/>
                           <a:cs typeface="+mn-cs"/>
                         </a:rPr>
-                        <a:t>45,272</a:t>
+                        <a:t>45,262</a:t>
                       </a:r>
                     </a:p>
                   </a:txBody>
@@ -13142,7 +13142,7 @@
                           <a:ea typeface="대명체 보통" panose="020B0600000101010101" pitchFamily="50" charset="-127"/>
                           <a:cs typeface="+mn-cs"/>
                         </a:rPr>
-                        <a:t>51,076</a:t>
+                        <a:t>51,066</a:t>
                       </a:r>
                     </a:p>
                   </a:txBody>
@@ -13450,7 +13450,7 @@
                           <a:ea typeface="대명체 보통" panose="020B0600000101010101" pitchFamily="50" charset="-127"/>
                           <a:cs typeface="+mn-cs"/>
                         </a:rPr>
-                        <a:t>185,600</a:t>
+                        <a:t>185,589</a:t>
                       </a:r>
                     </a:p>
                   </a:txBody>
@@ -13576,7 +13576,7 @@
                           <a:ea typeface="대명체 보통" panose="020B0600000101010101" pitchFamily="50" charset="-127"/>
                           <a:cs typeface="+mn-cs"/>
                         </a:rPr>
-                        <a:t>60,679</a:t>
+                        <a:t>60,668</a:t>
                       </a:r>
                     </a:p>
                   </a:txBody>
@@ -13836,7 +13836,7 @@
                           <a:ea typeface="대명체 보통" panose="020B0600000101010101" pitchFamily="50" charset="-127"/>
                           <a:cs typeface="+mn-cs"/>
                         </a:rPr>
-                        <a:t>86,381</a:t>
+                        <a:t>86,370</a:t>
                       </a:r>
                     </a:p>
                   </a:txBody>
@@ -14237,7 +14237,7 @@
                           <a:ea typeface="대명체 보통" panose="020B0600000101010101" pitchFamily="50" charset="-127"/>
                           <a:cs typeface="+mn-cs"/>
                         </a:rPr>
-                        <a:t>46,368</a:t>
+                        <a:t>46,360</a:t>
                       </a:r>
                     </a:p>
                   </a:txBody>
@@ -14355,7 +14355,7 @@
                           <a:ea typeface="대명체 보통" panose="020B0600000101010101" pitchFamily="50" charset="-127"/>
                           <a:cs typeface="+mn-cs"/>
                         </a:rPr>
-                        <a:t>31,764</a:t>
+                        <a:t>31,756</a:t>
                       </a:r>
                       <a:endParaRPr lang="en-US" altLang="ko-KR" sz="700" b="0" i="0" u="none" strike="noStrike" kern="1200" dirty="0">
                         <a:solidFill>
@@ -14427,7 +14427,7 @@
                           <a:ea typeface="대명체 보통" panose="020B0600000101010101" pitchFamily="50" charset="-127"/>
                           <a:cs typeface="+mn-cs"/>
                         </a:rPr>
-                        <a:t>318%</a:t>
+                        <a:t>317%</a:t>
                       </a:r>
                     </a:p>
                   </a:txBody>
@@ -14608,7 +14608,7 @@
                           <a:ea typeface="대명체 보통" panose="020B0600000101010101" pitchFamily="50" charset="-127"/>
                           <a:cs typeface="+mn-cs"/>
                         </a:rPr>
-                        <a:t>35,428</a:t>
+                        <a:t>35,420</a:t>
                       </a:r>
                     </a:p>
                   </a:txBody>
@@ -14900,7 +14900,7 @@
                           <a:ea typeface="대명체 보통" panose="020B0600000101010101" pitchFamily="50" charset="-127"/>
                           <a:cs typeface="+mn-cs"/>
                         </a:rPr>
-                        <a:t>114,090</a:t>
+                        <a:t>114,081</a:t>
                       </a:r>
                     </a:p>
                   </a:txBody>
@@ -15018,7 +15018,7 @@
                           <a:ea typeface="대명체 보통" panose="020B0600000101010101" pitchFamily="50" charset="-127"/>
                           <a:cs typeface="+mn-cs"/>
                         </a:rPr>
-                        <a:t>41,739</a:t>
+                        <a:t>41,730</a:t>
                       </a:r>
                     </a:p>
                   </a:txBody>
@@ -15262,7 +15262,7 @@
                           <a:ea typeface="대명체 보통" panose="020B0600000101010101" pitchFamily="50" charset="-127"/>
                           <a:cs typeface="+mn-cs"/>
                         </a:rPr>
-                        <a:t>57,578</a:t>
+                        <a:t>57,569</a:t>
                       </a:r>
                     </a:p>
                   </a:txBody>
@@ -15643,7 +15643,7 @@
                           <a:ea typeface="대명체 보통" panose="020B0600000101010101" pitchFamily="50" charset="-127"/>
                           <a:cs typeface="+mn-cs"/>
                         </a:rPr>
-                        <a:t>22,179</a:t>
+                        <a:t>22,189</a:t>
                       </a:r>
                     </a:p>
                   </a:txBody>
@@ -15753,7 +15753,7 @@
                           <a:ea typeface="대명체 보통" panose="020B0600000101010101" pitchFamily="50" charset="-127"/>
                           <a:cs typeface="+mn-cs"/>
                         </a:rPr>
-                        <a:t>13,322</a:t>
+                        <a:t>13,332</a:t>
                       </a:r>
                       <a:endParaRPr lang="en-US" altLang="ko-KR" sz="700" b="0" i="0" u="none" strike="noStrike" kern="1200" dirty="0">
                         <a:solidFill>
@@ -15821,7 +15821,7 @@
                           <a:ea typeface="대명체 보통" panose="020B0600000101010101" pitchFamily="50" charset="-127"/>
                           <a:cs typeface="+mn-cs"/>
                         </a:rPr>
-                        <a:t>250%</a:t>
+                        <a:t>251%</a:t>
                       </a:r>
                     </a:p>
                   </a:txBody>
@@ -15990,7 +15990,7 @@
                           <a:ea typeface="대명체 보통" panose="020B0600000101010101" pitchFamily="50" charset="-127"/>
                           <a:cs typeface="+mn-cs"/>
                         </a:rPr>
-                        <a:t>15,394</a:t>
+                        <a:t>15,404</a:t>
                       </a:r>
                     </a:p>
                   </a:txBody>
@@ -16266,7 +16266,7 @@
                           <a:ea typeface="대명체 보통" panose="020B0600000101010101" pitchFamily="50" charset="-127"/>
                           <a:cs typeface="+mn-cs"/>
                         </a:rPr>
-                        <a:t>66,273</a:t>
+                        <a:t>66,283</a:t>
                       </a:r>
                     </a:p>
                   </a:txBody>
@@ -16376,7 +16376,7 @@
                           <a:ea typeface="대명체 보통" panose="020B0600000101010101" pitchFamily="50" charset="-127"/>
                           <a:cs typeface="+mn-cs"/>
                         </a:rPr>
-                        <a:t>17,170</a:t>
+                        <a:t>17,180</a:t>
                       </a:r>
                     </a:p>
                   </a:txBody>
@@ -16604,7 +16604,7 @@
                           <a:ea typeface="대명체 보통" panose="020B0600000101010101" pitchFamily="50" charset="-127"/>
                           <a:cs typeface="+mn-cs"/>
                         </a:rPr>
-                        <a:t>26,735</a:t>
+                        <a:t>26,745</a:t>
                       </a:r>
                     </a:p>
                   </a:txBody>
@@ -16999,7 +16999,7 @@
                           <a:ea typeface="대명체 보통" panose="020B0600000101010101" pitchFamily="50" charset="-127"/>
                           <a:cs typeface="+mn-cs"/>
                         </a:rPr>
-                        <a:t>585</a:t>
+                        <a:t>573</a:t>
                       </a:r>
                       <a:endParaRPr lang="en-US" altLang="ko-KR" sz="700" b="0" i="0" u="none" strike="noStrike" kern="1200" dirty="0">
                         <a:solidFill>
@@ -17126,7 +17126,7 @@
                           <a:ea typeface="대명체 보통" panose="020B0600000101010101" pitchFamily="50" charset="-127"/>
                           <a:cs typeface="+mn-cs"/>
                         </a:rPr>
-                        <a:t>186</a:t>
+                        <a:t>174</a:t>
                       </a:r>
                       <a:endParaRPr lang="en-US" altLang="ko-KR" sz="700" b="0" i="0" u="none" strike="noStrike" kern="1200" dirty="0">
                         <a:solidFill>
@@ -17198,7 +17198,7 @@
                           <a:ea typeface="대명체 보통" panose="020B0600000101010101" pitchFamily="50" charset="-127"/>
                           <a:cs typeface="+mn-cs"/>
                         </a:rPr>
-                        <a:t>147%</a:t>
+                        <a:t>144%</a:t>
                       </a:r>
                     </a:p>
                   </a:txBody>
@@ -17388,7 +17388,7 @@
                           <a:ea typeface="대명체 보통" panose="020B0600000101010101" pitchFamily="50" charset="-127"/>
                           <a:cs typeface="+mn-cs"/>
                         </a:rPr>
-                        <a:t>254</a:t>
+                        <a:t>242</a:t>
                       </a:r>
                     </a:p>
                   </a:txBody>
@@ -17451,7 +17451,7 @@
                           <a:ea typeface="대명체 보통" panose="020B0600000101010101" pitchFamily="50" charset="-127"/>
                           <a:cs typeface="+mn-cs"/>
                         </a:rPr>
-                        <a:t>77%</a:t>
+                        <a:t>73%</a:t>
                       </a:r>
                     </a:p>
                   </a:txBody>
@@ -17680,7 +17680,7 @@
                           <a:ea typeface="대명체 보통" panose="020B0600000101010101" pitchFamily="50" charset="-127"/>
                           <a:cs typeface="+mn-cs"/>
                         </a:rPr>
-                        <a:t>5,237</a:t>
+                        <a:t>5,225</a:t>
                       </a:r>
                     </a:p>
                   </a:txBody>
@@ -17798,7 +17798,7 @@
                           <a:ea typeface="대명체 보통" panose="020B0600000101010101" pitchFamily="50" charset="-127"/>
                           <a:cs typeface="+mn-cs"/>
                         </a:rPr>
-                        <a:t>1,770</a:t>
+                        <a:t>1,758</a:t>
                       </a:r>
                       <a:endParaRPr lang="en-US" altLang="ko-KR" sz="700" b="0" i="0" u="none" strike="noStrike" kern="1200" dirty="0">
                         <a:solidFill>
@@ -18051,7 +18051,7 @@
                           <a:ea typeface="대명체 보통" panose="020B0600000101010101" pitchFamily="50" charset="-127"/>
                           <a:cs typeface="+mn-cs"/>
                         </a:rPr>
-                        <a:t>2,068</a:t>
+                        <a:t>2,056</a:t>
                       </a:r>
                     </a:p>
                   </a:txBody>

--- a/data/세일즈마케팅_예상매출현황.pptx
+++ b/data/세일즈마케팅_예상매출현황.pptx
@@ -12756,7 +12756,7 @@
                           <a:ea typeface="대명체 보통" panose="020B0600000101010101" pitchFamily="50" charset="-127"/>
                           <a:cs typeface="+mn-cs"/>
                         </a:rPr>
-                        <a:t>69,122</a:t>
+                        <a:t>55,035</a:t>
                       </a:r>
                     </a:p>
                   </a:txBody>
@@ -12882,7 +12882,7 @@
                           <a:ea typeface="대명체 보통" panose="020B0600000101010101" pitchFamily="50" charset="-127"/>
                           <a:cs typeface="+mn-cs"/>
                         </a:rPr>
-                        <a:t>45,262</a:t>
+                        <a:t>31,176</a:t>
                       </a:r>
                     </a:p>
                   </a:txBody>
@@ -12949,7 +12949,7 @@
                           <a:ea typeface="대명체 보통" panose="020B0600000101010101" pitchFamily="50" charset="-127"/>
                           <a:cs typeface="+mn-cs"/>
                         </a:rPr>
-                        <a:t>290%</a:t>
+                        <a:t>231%</a:t>
                       </a:r>
                     </a:p>
                   </a:txBody>
@@ -13016,7 +13016,7 @@
                           <a:ea typeface="대명체 보통" panose="020B0600000101010101" pitchFamily="50" charset="-127"/>
                           <a:cs typeface="+mn-cs"/>
                         </a:rPr>
-                        <a:t>18,056</a:t>
+                        <a:t>18,374</a:t>
                       </a:r>
                     </a:p>
                   </a:txBody>
@@ -13142,7 +13142,7 @@
                           <a:ea typeface="대명체 보통" panose="020B0600000101010101" pitchFamily="50" charset="-127"/>
                           <a:cs typeface="+mn-cs"/>
                         </a:rPr>
-                        <a:t>51,066</a:t>
+                        <a:t>36,661</a:t>
                       </a:r>
                     </a:p>
                   </a:txBody>
@@ -13209,7 +13209,7 @@
                           <a:ea typeface="대명체 보통" panose="020B0600000101010101" pitchFamily="50" charset="-127"/>
                           <a:cs typeface="+mn-cs"/>
                         </a:rPr>
-                        <a:t>283%</a:t>
+                        <a:t>200%</a:t>
                       </a:r>
                     </a:p>
                   </a:txBody>
@@ -13450,7 +13450,7 @@
                           <a:ea typeface="대명체 보통" panose="020B0600000101010101" pitchFamily="50" charset="-127"/>
                           <a:cs typeface="+mn-cs"/>
                         </a:rPr>
-                        <a:t>185,589</a:t>
+                        <a:t>171,503</a:t>
                       </a:r>
                     </a:p>
                   </a:txBody>
@@ -13576,7 +13576,7 @@
                           <a:ea typeface="대명체 보통" panose="020B0600000101010101" pitchFamily="50" charset="-127"/>
                           <a:cs typeface="+mn-cs"/>
                         </a:rPr>
-                        <a:t>60,668</a:t>
+                        <a:t>46,581</a:t>
                       </a:r>
                     </a:p>
                   </a:txBody>
@@ -13643,7 +13643,7 @@
                           <a:ea typeface="대명체 보통" panose="020B0600000101010101" pitchFamily="50" charset="-127"/>
                           <a:cs typeface="+mn-cs"/>
                         </a:rPr>
-                        <a:t>149%</a:t>
+                        <a:t>137%</a:t>
                       </a:r>
                     </a:p>
                   </a:txBody>
@@ -13710,7 +13710,7 @@
                           <a:ea typeface="대명체 보통" panose="020B0600000101010101" pitchFamily="50" charset="-127"/>
                           <a:cs typeface="+mn-cs"/>
                         </a:rPr>
-                        <a:t>99,220</a:t>
+                        <a:t>99,538</a:t>
                       </a:r>
                     </a:p>
                   </a:txBody>
@@ -13836,7 +13836,7 @@
                           <a:ea typeface="대명체 보통" panose="020B0600000101010101" pitchFamily="50" charset="-127"/>
                           <a:cs typeface="+mn-cs"/>
                         </a:rPr>
-                        <a:t>86,370</a:t>
+                        <a:t>71,965</a:t>
                       </a:r>
                     </a:p>
                   </a:txBody>
@@ -13903,7 +13903,7 @@
                           <a:ea typeface="대명체 보통" panose="020B0600000101010101" pitchFamily="50" charset="-127"/>
                           <a:cs typeface="+mn-cs"/>
                         </a:rPr>
-                        <a:t>87%</a:t>
+                        <a:t>72%</a:t>
                       </a:r>
                     </a:p>
                   </a:txBody>
@@ -14237,7 +14237,7 @@
                           <a:ea typeface="대명체 보통" panose="020B0600000101010101" pitchFamily="50" charset="-127"/>
                           <a:cs typeface="+mn-cs"/>
                         </a:rPr>
-                        <a:t>46,360</a:t>
+                        <a:t>37,716</a:t>
                       </a:r>
                     </a:p>
                   </a:txBody>
@@ -14355,7 +14355,7 @@
                           <a:ea typeface="대명체 보통" panose="020B0600000101010101" pitchFamily="50" charset="-127"/>
                           <a:cs typeface="+mn-cs"/>
                         </a:rPr>
-                        <a:t>31,756</a:t>
+                        <a:t>23,113</a:t>
                       </a:r>
                       <a:endParaRPr lang="en-US" altLang="ko-KR" sz="700" b="0" i="0" u="none" strike="noStrike" kern="1200" dirty="0">
                         <a:solidFill>
@@ -14427,7 +14427,7 @@
                           <a:ea typeface="대명체 보통" panose="020B0600000101010101" pitchFamily="50" charset="-127"/>
                           <a:cs typeface="+mn-cs"/>
                         </a:rPr>
-                        <a:t>317%</a:t>
+                        <a:t>258%</a:t>
                       </a:r>
                     </a:p>
                   </a:txBody>
@@ -14490,7 +14490,7 @@
                           <a:ea typeface="대명체 보통" panose="020B0600000101010101" pitchFamily="50" charset="-127"/>
                           <a:cs typeface="+mn-cs"/>
                         </a:rPr>
-                        <a:t>10,940</a:t>
+                        <a:t>11,179</a:t>
                       </a:r>
                     </a:p>
                   </a:txBody>
@@ -14608,7 +14608,7 @@
                           <a:ea typeface="대명체 보통" panose="020B0600000101010101" pitchFamily="50" charset="-127"/>
                           <a:cs typeface="+mn-cs"/>
                         </a:rPr>
-                        <a:t>35,420</a:t>
+                        <a:t>26,538</a:t>
                       </a:r>
                     </a:p>
                   </a:txBody>
@@ -14671,7 +14671,7 @@
                           <a:ea typeface="대명체 보통" panose="020B0600000101010101" pitchFamily="50" charset="-127"/>
                           <a:cs typeface="+mn-cs"/>
                         </a:rPr>
-                        <a:t>324%</a:t>
+                        <a:t>237%</a:t>
                       </a:r>
                     </a:p>
                   </a:txBody>
@@ -14900,7 +14900,7 @@
                           <a:ea typeface="대명체 보통" panose="020B0600000101010101" pitchFamily="50" charset="-127"/>
                           <a:cs typeface="+mn-cs"/>
                         </a:rPr>
-                        <a:t>114,081</a:t>
+                        <a:t>105,438</a:t>
                       </a:r>
                     </a:p>
                   </a:txBody>
@@ -15018,7 +15018,7 @@
                           <a:ea typeface="대명체 보통" panose="020B0600000101010101" pitchFamily="50" charset="-127"/>
                           <a:cs typeface="+mn-cs"/>
                         </a:rPr>
-                        <a:t>41,730</a:t>
+                        <a:t>33,087</a:t>
                       </a:r>
                     </a:p>
                   </a:txBody>
@@ -15081,7 +15081,7 @@
                           <a:ea typeface="대명체 보통" panose="020B0600000101010101" pitchFamily="50" charset="-127"/>
                           <a:cs typeface="+mn-cs"/>
                         </a:rPr>
-                        <a:t>158%</a:t>
+                        <a:t>146%</a:t>
                       </a:r>
                     </a:p>
                   </a:txBody>
@@ -15144,7 +15144,7 @@
                           <a:ea typeface="대명체 보통" panose="020B0600000101010101" pitchFamily="50" charset="-127"/>
                           <a:cs typeface="+mn-cs"/>
                         </a:rPr>
-                        <a:t>56,513</a:t>
+                        <a:t>56,751</a:t>
                       </a:r>
                     </a:p>
                   </a:txBody>
@@ -15262,7 +15262,7 @@
                           <a:ea typeface="대명체 보통" panose="020B0600000101010101" pitchFamily="50" charset="-127"/>
                           <a:cs typeface="+mn-cs"/>
                         </a:rPr>
-                        <a:t>57,569</a:t>
+                        <a:t>48,687</a:t>
                       </a:r>
                     </a:p>
                   </a:txBody>
@@ -15325,7 +15325,7 @@
                           <a:ea typeface="대명체 보통" panose="020B0600000101010101" pitchFamily="50" charset="-127"/>
                           <a:cs typeface="+mn-cs"/>
                         </a:rPr>
-                        <a:t>102%</a:t>
+                        <a:t>86%</a:t>
                       </a:r>
                     </a:p>
                   </a:txBody>
@@ -15643,7 +15643,7 @@
                           <a:ea typeface="대명체 보통" panose="020B0600000101010101" pitchFamily="50" charset="-127"/>
                           <a:cs typeface="+mn-cs"/>
                         </a:rPr>
-                        <a:t>22,189</a:t>
+                        <a:t>16,736</a:t>
                       </a:r>
                     </a:p>
                   </a:txBody>
@@ -15753,7 +15753,7 @@
                           <a:ea typeface="대명체 보통" panose="020B0600000101010101" pitchFamily="50" charset="-127"/>
                           <a:cs typeface="+mn-cs"/>
                         </a:rPr>
-                        <a:t>13,332</a:t>
+                        <a:t>7,879</a:t>
                       </a:r>
                       <a:endParaRPr lang="en-US" altLang="ko-KR" sz="700" b="0" i="0" u="none" strike="noStrike" kern="1200" dirty="0">
                         <a:solidFill>
@@ -15821,7 +15821,7 @@
                           <a:ea typeface="대명체 보통" panose="020B0600000101010101" pitchFamily="50" charset="-127"/>
                           <a:cs typeface="+mn-cs"/>
                         </a:rPr>
-                        <a:t>251%</a:t>
+                        <a:t>189%</a:t>
                       </a:r>
                     </a:p>
                   </a:txBody>
@@ -15880,7 +15880,7 @@
                           <a:ea typeface="대명체 보통" panose="020B0600000101010101" pitchFamily="50" charset="-127"/>
                           <a:cs typeface="+mn-cs"/>
                         </a:rPr>
-                        <a:t>6,785</a:t>
+                        <a:t>6,853</a:t>
                       </a:r>
                     </a:p>
                   </a:txBody>
@@ -15990,7 +15990,7 @@
                           <a:ea typeface="대명체 보통" panose="020B0600000101010101" pitchFamily="50" charset="-127"/>
                           <a:cs typeface="+mn-cs"/>
                         </a:rPr>
-                        <a:t>15,404</a:t>
+                        <a:t>9,883</a:t>
                       </a:r>
                     </a:p>
                   </a:txBody>
@@ -16049,7 +16049,7 @@
                           <a:ea typeface="대명체 보통" panose="020B0600000101010101" pitchFamily="50" charset="-127"/>
                           <a:cs typeface="+mn-cs"/>
                         </a:rPr>
-                        <a:t>227%</a:t>
+                        <a:t>144%</a:t>
                       </a:r>
                     </a:p>
                   </a:txBody>
@@ -16266,7 +16266,7 @@
                           <a:ea typeface="대명체 보통" panose="020B0600000101010101" pitchFamily="50" charset="-127"/>
                           <a:cs typeface="+mn-cs"/>
                         </a:rPr>
-                        <a:t>66,283</a:t>
+                        <a:t>60,829</a:t>
                       </a:r>
                     </a:p>
                   </a:txBody>
@@ -16376,7 +16376,7 @@
                           <a:ea typeface="대명체 보통" panose="020B0600000101010101" pitchFamily="50" charset="-127"/>
                           <a:cs typeface="+mn-cs"/>
                         </a:rPr>
-                        <a:t>17,180</a:t>
+                        <a:t>11,726</a:t>
                       </a:r>
                     </a:p>
                   </a:txBody>
@@ -16435,7 +16435,7 @@
                           <a:ea typeface="대명체 보통" panose="020B0600000101010101" pitchFamily="50" charset="-127"/>
                           <a:cs typeface="+mn-cs"/>
                         </a:rPr>
-                        <a:t>135%</a:t>
+                        <a:t>124%</a:t>
                       </a:r>
                     </a:p>
                   </a:txBody>
@@ -16494,7 +16494,7 @@
                           <a:ea typeface="대명체 보통" panose="020B0600000101010101" pitchFamily="50" charset="-127"/>
                           <a:cs typeface="+mn-cs"/>
                         </a:rPr>
-                        <a:t>39,538</a:t>
+                        <a:t>39,606</a:t>
                       </a:r>
                     </a:p>
                   </a:txBody>
@@ -16604,7 +16604,7 @@
                           <a:ea typeface="대명체 보통" panose="020B0600000101010101" pitchFamily="50" charset="-127"/>
                           <a:cs typeface="+mn-cs"/>
                         </a:rPr>
-                        <a:t>26,745</a:t>
+                        <a:t>21,223</a:t>
                       </a:r>
                     </a:p>
                   </a:txBody>
@@ -16663,7 +16663,7 @@
                           <a:ea typeface="대명체 보통" panose="020B0600000101010101" pitchFamily="50" charset="-127"/>
                           <a:cs typeface="+mn-cs"/>
                         </a:rPr>
-                        <a:t>68%</a:t>
+                        <a:t>54%</a:t>
                       </a:r>
                     </a:p>
                   </a:txBody>
@@ -16999,7 +16999,7 @@
                           <a:ea typeface="대명체 보통" panose="020B0600000101010101" pitchFamily="50" charset="-127"/>
                           <a:cs typeface="+mn-cs"/>
                         </a:rPr>
-                        <a:t>573</a:t>
+                        <a:t>583</a:t>
                       </a:r>
                       <a:endParaRPr lang="en-US" altLang="ko-KR" sz="700" b="0" i="0" u="none" strike="noStrike" kern="1200" dirty="0">
                         <a:solidFill>
@@ -17126,7 +17126,7 @@
                           <a:ea typeface="대명체 보통" panose="020B0600000101010101" pitchFamily="50" charset="-127"/>
                           <a:cs typeface="+mn-cs"/>
                         </a:rPr>
-                        <a:t>174</a:t>
+                        <a:t>184</a:t>
                       </a:r>
                       <a:endParaRPr lang="en-US" altLang="ko-KR" sz="700" b="0" i="0" u="none" strike="noStrike" kern="1200" dirty="0">
                         <a:solidFill>
@@ -17198,7 +17198,7 @@
                           <a:ea typeface="대명체 보통" panose="020B0600000101010101" pitchFamily="50" charset="-127"/>
                           <a:cs typeface="+mn-cs"/>
                         </a:rPr>
-                        <a:t>144%</a:t>
+                        <a:t>146%</a:t>
                       </a:r>
                     </a:p>
                   </a:txBody>
@@ -17261,7 +17261,7 @@
                           <a:ea typeface="대명체 보통" panose="020B0600000101010101" pitchFamily="50" charset="-127"/>
                           <a:cs typeface="+mn-cs"/>
                         </a:rPr>
-                        <a:t>331</a:t>
+                        <a:t>342</a:t>
                       </a:r>
                       <a:endParaRPr lang="en-US" altLang="ko-KR" sz="700" b="0" i="0" u="none" strike="noStrike" kern="1200" dirty="0">
                         <a:solidFill>
@@ -17388,7 +17388,7 @@
                           <a:ea typeface="대명체 보통" panose="020B0600000101010101" pitchFamily="50" charset="-127"/>
                           <a:cs typeface="+mn-cs"/>
                         </a:rPr>
-                        <a:t>242</a:t>
+                        <a:t>241</a:t>
                       </a:r>
                     </a:p>
                   </a:txBody>
@@ -17451,7 +17451,7 @@
                           <a:ea typeface="대명체 보통" panose="020B0600000101010101" pitchFamily="50" charset="-127"/>
                           <a:cs typeface="+mn-cs"/>
                         </a:rPr>
-                        <a:t>73%</a:t>
+                        <a:t>71%</a:t>
                       </a:r>
                     </a:p>
                   </a:txBody>
@@ -17680,7 +17680,7 @@
                           <a:ea typeface="대명체 보통" panose="020B0600000101010101" pitchFamily="50" charset="-127"/>
                           <a:cs typeface="+mn-cs"/>
                         </a:rPr>
-                        <a:t>5,225</a:t>
+                        <a:t>5,235</a:t>
                       </a:r>
                     </a:p>
                   </a:txBody>
@@ -17798,7 +17798,7 @@
                           <a:ea typeface="대명체 보통" panose="020B0600000101010101" pitchFamily="50" charset="-127"/>
                           <a:cs typeface="+mn-cs"/>
                         </a:rPr>
-                        <a:t>1,758</a:t>
+                        <a:t>1,768</a:t>
                       </a:r>
                       <a:endParaRPr lang="en-US" altLang="ko-KR" sz="700" b="0" i="0" u="none" strike="noStrike" kern="1200" dirty="0">
                         <a:solidFill>
@@ -17933,7 +17933,7 @@
                           <a:ea typeface="대명체 보통" panose="020B0600000101010101" pitchFamily="50" charset="-127"/>
                           <a:cs typeface="+mn-cs"/>
                         </a:rPr>
-                        <a:t>3,169</a:t>
+                        <a:t>3,180</a:t>
                       </a:r>
                     </a:p>
                   </a:txBody>
@@ -18051,7 +18051,7 @@
                           <a:ea typeface="대명체 보통" panose="020B0600000101010101" pitchFamily="50" charset="-127"/>
                           <a:cs typeface="+mn-cs"/>
                         </a:rPr>
-                        <a:t>2,056</a:t>
+                        <a:t>2,055</a:t>
                       </a:r>
                     </a:p>
                   </a:txBody>

--- a/data/세일즈마케팅_예상매출현황.pptx
+++ b/data/세일즈마케팅_예상매출현황.pptx
@@ -12756,7 +12756,7 @@
                           <a:ea typeface="대명체 보통" panose="020B0600000101010101" pitchFamily="50" charset="-127"/>
                           <a:cs typeface="+mn-cs"/>
                         </a:rPr>
-                        <a:t>55,035</a:t>
+                        <a:t>72,069</a:t>
                       </a:r>
                     </a:p>
                   </a:txBody>
@@ -12882,7 +12882,7 @@
                           <a:ea typeface="대명체 보통" panose="020B0600000101010101" pitchFamily="50" charset="-127"/>
                           <a:cs typeface="+mn-cs"/>
                         </a:rPr>
-                        <a:t>31,176</a:t>
+                        <a:t>48,210</a:t>
                       </a:r>
                     </a:p>
                   </a:txBody>
@@ -12949,7 +12949,7 @@
                           <a:ea typeface="대명체 보통" panose="020B0600000101010101" pitchFamily="50" charset="-127"/>
                           <a:cs typeface="+mn-cs"/>
                         </a:rPr>
-                        <a:t>231%</a:t>
+                        <a:t>302%</a:t>
                       </a:r>
                     </a:p>
                   </a:txBody>
@@ -13016,7 +13016,7 @@
                           <a:ea typeface="대명체 보통" panose="020B0600000101010101" pitchFamily="50" charset="-127"/>
                           <a:cs typeface="+mn-cs"/>
                         </a:rPr>
-                        <a:t>18,374</a:t>
+                        <a:t>18,622</a:t>
                       </a:r>
                     </a:p>
                   </a:txBody>
@@ -13142,7 +13142,7 @@
                           <a:ea typeface="대명체 보통" panose="020B0600000101010101" pitchFamily="50" charset="-127"/>
                           <a:cs typeface="+mn-cs"/>
                         </a:rPr>
-                        <a:t>36,661</a:t>
+                        <a:t>53,447</a:t>
                       </a:r>
                     </a:p>
                   </a:txBody>
@@ -13209,7 +13209,7 @@
                           <a:ea typeface="대명체 보통" panose="020B0600000101010101" pitchFamily="50" charset="-127"/>
                           <a:cs typeface="+mn-cs"/>
                         </a:rPr>
-                        <a:t>200%</a:t>
+                        <a:t>287%</a:t>
                       </a:r>
                     </a:p>
                   </a:txBody>
@@ -13450,7 +13450,7 @@
                           <a:ea typeface="대명체 보통" panose="020B0600000101010101" pitchFamily="50" charset="-127"/>
                           <a:cs typeface="+mn-cs"/>
                         </a:rPr>
-                        <a:t>171,503</a:t>
+                        <a:t>188,537</a:t>
                       </a:r>
                     </a:p>
                   </a:txBody>
@@ -13576,7 +13576,7 @@
                           <a:ea typeface="대명체 보통" panose="020B0600000101010101" pitchFamily="50" charset="-127"/>
                           <a:cs typeface="+mn-cs"/>
                         </a:rPr>
-                        <a:t>46,581</a:t>
+                        <a:t>63,615</a:t>
                       </a:r>
                     </a:p>
                   </a:txBody>
@@ -13643,7 +13643,7 @@
                           <a:ea typeface="대명체 보통" panose="020B0600000101010101" pitchFamily="50" charset="-127"/>
                           <a:cs typeface="+mn-cs"/>
                         </a:rPr>
-                        <a:t>137%</a:t>
+                        <a:t>151%</a:t>
                       </a:r>
                     </a:p>
                   </a:txBody>
@@ -13710,7 +13710,7 @@
                           <a:ea typeface="대명체 보통" panose="020B0600000101010101" pitchFamily="50" charset="-127"/>
                           <a:cs typeface="+mn-cs"/>
                         </a:rPr>
-                        <a:t>99,538</a:t>
+                        <a:t>99,786</a:t>
                       </a:r>
                     </a:p>
                   </a:txBody>
@@ -13836,7 +13836,7 @@
                           <a:ea typeface="대명체 보통" panose="020B0600000101010101" pitchFamily="50" charset="-127"/>
                           <a:cs typeface="+mn-cs"/>
                         </a:rPr>
-                        <a:t>71,965</a:t>
+                        <a:t>88,751</a:t>
                       </a:r>
                     </a:p>
                   </a:txBody>
@@ -13903,7 +13903,7 @@
                           <a:ea typeface="대명체 보통" panose="020B0600000101010101" pitchFamily="50" charset="-127"/>
                           <a:cs typeface="+mn-cs"/>
                         </a:rPr>
-                        <a:t>72%</a:t>
+                        <a:t>89%</a:t>
                       </a:r>
                     </a:p>
                   </a:txBody>
@@ -14237,7 +14237,7 @@
                           <a:ea typeface="대명체 보통" panose="020B0600000101010101" pitchFamily="50" charset="-127"/>
                           <a:cs typeface="+mn-cs"/>
                         </a:rPr>
-                        <a:t>37,716</a:t>
+                        <a:t>53,799</a:t>
                       </a:r>
                     </a:p>
                   </a:txBody>
@@ -14355,7 +14355,7 @@
                           <a:ea typeface="대명체 보통" panose="020B0600000101010101" pitchFamily="50" charset="-127"/>
                           <a:cs typeface="+mn-cs"/>
                         </a:rPr>
-                        <a:t>23,113</a:t>
+                        <a:t>39,196</a:t>
                       </a:r>
                       <a:endParaRPr lang="en-US" altLang="ko-KR" sz="700" b="0" i="0" u="none" strike="noStrike" kern="1200" dirty="0">
                         <a:solidFill>
@@ -14427,7 +14427,7 @@
                           <a:ea typeface="대명체 보통" panose="020B0600000101010101" pitchFamily="50" charset="-127"/>
                           <a:cs typeface="+mn-cs"/>
                         </a:rPr>
-                        <a:t>258%</a:t>
+                        <a:t>368%</a:t>
                       </a:r>
                     </a:p>
                   </a:txBody>
@@ -14490,7 +14490,7 @@
                           <a:ea typeface="대명체 보통" panose="020B0600000101010101" pitchFamily="50" charset="-127"/>
                           <a:cs typeface="+mn-cs"/>
                         </a:rPr>
-                        <a:t>11,179</a:t>
+                        <a:t>11,338</a:t>
                       </a:r>
                     </a:p>
                   </a:txBody>
@@ -14608,7 +14608,7 @@
                           <a:ea typeface="대명체 보통" panose="020B0600000101010101" pitchFamily="50" charset="-127"/>
                           <a:cs typeface="+mn-cs"/>
                         </a:rPr>
-                        <a:t>26,538</a:t>
+                        <a:t>42,461</a:t>
                       </a:r>
                     </a:p>
                   </a:txBody>
@@ -14671,7 +14671,7 @@
                           <a:ea typeface="대명체 보통" panose="020B0600000101010101" pitchFamily="50" charset="-127"/>
                           <a:cs typeface="+mn-cs"/>
                         </a:rPr>
-                        <a:t>237%</a:t>
+                        <a:t>374%</a:t>
                       </a:r>
                     </a:p>
                   </a:txBody>
@@ -14900,7 +14900,7 @@
                           <a:ea typeface="대명체 보통" panose="020B0600000101010101" pitchFamily="50" charset="-127"/>
                           <a:cs typeface="+mn-cs"/>
                         </a:rPr>
-                        <a:t>105,438</a:t>
+                        <a:t>121,521</a:t>
                       </a:r>
                     </a:p>
                   </a:txBody>
@@ -15018,7 +15018,7 @@
                           <a:ea typeface="대명체 보통" panose="020B0600000101010101" pitchFamily="50" charset="-127"/>
                           <a:cs typeface="+mn-cs"/>
                         </a:rPr>
-                        <a:t>33,087</a:t>
+                        <a:t>49,170</a:t>
                       </a:r>
                     </a:p>
                   </a:txBody>
@@ -15081,7 +15081,7 @@
                           <a:ea typeface="대명체 보통" panose="020B0600000101010101" pitchFamily="50" charset="-127"/>
                           <a:cs typeface="+mn-cs"/>
                         </a:rPr>
-                        <a:t>146%</a:t>
+                        <a:t>168%</a:t>
                       </a:r>
                     </a:p>
                   </a:txBody>
@@ -15144,7 +15144,7 @@
                           <a:ea typeface="대명체 보통" panose="020B0600000101010101" pitchFamily="50" charset="-127"/>
                           <a:cs typeface="+mn-cs"/>
                         </a:rPr>
-                        <a:t>56,751</a:t>
+                        <a:t>56,911</a:t>
                       </a:r>
                     </a:p>
                   </a:txBody>
@@ -15262,7 +15262,7 @@
                           <a:ea typeface="대명체 보통" panose="020B0600000101010101" pitchFamily="50" charset="-127"/>
                           <a:cs typeface="+mn-cs"/>
                         </a:rPr>
-                        <a:t>48,687</a:t>
+                        <a:t>64,610</a:t>
                       </a:r>
                     </a:p>
                   </a:txBody>
@@ -15325,7 +15325,7 @@
                           <a:ea typeface="대명체 보통" panose="020B0600000101010101" pitchFamily="50" charset="-127"/>
                           <a:cs typeface="+mn-cs"/>
                         </a:rPr>
-                        <a:t>86%</a:t>
+                        <a:t>114%</a:t>
                       </a:r>
                     </a:p>
                   </a:txBody>
@@ -15643,7 +15643,7 @@
                           <a:ea typeface="대명체 보통" panose="020B0600000101010101" pitchFamily="50" charset="-127"/>
                           <a:cs typeface="+mn-cs"/>
                         </a:rPr>
-                        <a:t>16,736</a:t>
+                        <a:t>17,691</a:t>
                       </a:r>
                     </a:p>
                   </a:txBody>
@@ -15753,7 +15753,7 @@
                           <a:ea typeface="대명체 보통" panose="020B0600000101010101" pitchFamily="50" charset="-127"/>
                           <a:cs typeface="+mn-cs"/>
                         </a:rPr>
-                        <a:t>7,879</a:t>
+                        <a:t>8,834</a:t>
                       </a:r>
                       <a:endParaRPr lang="en-US" altLang="ko-KR" sz="700" b="0" i="0" u="none" strike="noStrike" kern="1200" dirty="0">
                         <a:solidFill>
@@ -15821,7 +15821,7 @@
                           <a:ea typeface="대명체 보통" panose="020B0600000101010101" pitchFamily="50" charset="-127"/>
                           <a:cs typeface="+mn-cs"/>
                         </a:rPr>
-                        <a:t>189%</a:t>
+                        <a:t>200%</a:t>
                       </a:r>
                     </a:p>
                   </a:txBody>
@@ -15880,7 +15880,7 @@
                           <a:ea typeface="대명체 보통" panose="020B0600000101010101" pitchFamily="50" charset="-127"/>
                           <a:cs typeface="+mn-cs"/>
                         </a:rPr>
-                        <a:t>6,853</a:t>
+                        <a:t>6,934</a:t>
                       </a:r>
                     </a:p>
                   </a:txBody>
@@ -15990,7 +15990,7 @@
                           <a:ea typeface="대명체 보통" panose="020B0600000101010101" pitchFamily="50" charset="-127"/>
                           <a:cs typeface="+mn-cs"/>
                         </a:rPr>
-                        <a:t>9,883</a:t>
+                        <a:t>10,757</a:t>
                       </a:r>
                     </a:p>
                   </a:txBody>
@@ -16049,7 +16049,7 @@
                           <a:ea typeface="대명체 보통" panose="020B0600000101010101" pitchFamily="50" charset="-127"/>
                           <a:cs typeface="+mn-cs"/>
                         </a:rPr>
-                        <a:t>144%</a:t>
+                        <a:t>155%</a:t>
                       </a:r>
                     </a:p>
                   </a:txBody>
@@ -16266,7 +16266,7 @@
                           <a:ea typeface="대명체 보통" panose="020B0600000101010101" pitchFamily="50" charset="-127"/>
                           <a:cs typeface="+mn-cs"/>
                         </a:rPr>
-                        <a:t>60,829</a:t>
+                        <a:t>61,784</a:t>
                       </a:r>
                     </a:p>
                   </a:txBody>
@@ -16376,7 +16376,7 @@
                           <a:ea typeface="대명체 보통" panose="020B0600000101010101" pitchFamily="50" charset="-127"/>
                           <a:cs typeface="+mn-cs"/>
                         </a:rPr>
-                        <a:t>11,726</a:t>
+                        <a:t>12,681</a:t>
                       </a:r>
                     </a:p>
                   </a:txBody>
@@ -16435,7 +16435,7 @@
                           <a:ea typeface="대명체 보통" panose="020B0600000101010101" pitchFamily="50" charset="-127"/>
                           <a:cs typeface="+mn-cs"/>
                         </a:rPr>
-                        <a:t>124%</a:t>
+                        <a:t>126%</a:t>
                       </a:r>
                     </a:p>
                   </a:txBody>
@@ -16494,7 +16494,7 @@
                           <a:ea typeface="대명체 보통" panose="020B0600000101010101" pitchFamily="50" charset="-127"/>
                           <a:cs typeface="+mn-cs"/>
                         </a:rPr>
-                        <a:t>39,606</a:t>
+                        <a:t>39,687</a:t>
                       </a:r>
                     </a:p>
                   </a:txBody>
@@ -16604,7 +16604,7 @@
                           <a:ea typeface="대명체 보통" panose="020B0600000101010101" pitchFamily="50" charset="-127"/>
                           <a:cs typeface="+mn-cs"/>
                         </a:rPr>
-                        <a:t>21,223</a:t>
+                        <a:t>22,097</a:t>
                       </a:r>
                     </a:p>
                   </a:txBody>
@@ -16663,7 +16663,7 @@
                           <a:ea typeface="대명체 보통" panose="020B0600000101010101" pitchFamily="50" charset="-127"/>
                           <a:cs typeface="+mn-cs"/>
                         </a:rPr>
-                        <a:t>54%</a:t>
+                        <a:t>56%</a:t>
                       </a:r>
                     </a:p>
                   </a:txBody>
@@ -16999,7 +16999,7 @@
                           <a:ea typeface="대명체 보통" panose="020B0600000101010101" pitchFamily="50" charset="-127"/>
                           <a:cs typeface="+mn-cs"/>
                         </a:rPr>
-                        <a:t>583</a:t>
+                        <a:t>579</a:t>
                       </a:r>
                       <a:endParaRPr lang="en-US" altLang="ko-KR" sz="700" b="0" i="0" u="none" strike="noStrike" kern="1200" dirty="0">
                         <a:solidFill>
@@ -17126,7 +17126,7 @@
                           <a:ea typeface="대명체 보통" panose="020B0600000101010101" pitchFamily="50" charset="-127"/>
                           <a:cs typeface="+mn-cs"/>
                         </a:rPr>
-                        <a:t>184</a:t>
+                        <a:t>180</a:t>
                       </a:r>
                       <a:endParaRPr lang="en-US" altLang="ko-KR" sz="700" b="0" i="0" u="none" strike="noStrike" kern="1200" dirty="0">
                         <a:solidFill>
@@ -17198,7 +17198,7 @@
                           <a:ea typeface="대명체 보통" panose="020B0600000101010101" pitchFamily="50" charset="-127"/>
                           <a:cs typeface="+mn-cs"/>
                         </a:rPr>
-                        <a:t>146%</a:t>
+                        <a:t>145%</a:t>
                       </a:r>
                     </a:p>
                   </a:txBody>
@@ -17261,7 +17261,7 @@
                           <a:ea typeface="대명체 보통" panose="020B0600000101010101" pitchFamily="50" charset="-127"/>
                           <a:cs typeface="+mn-cs"/>
                         </a:rPr>
-                        <a:t>342</a:t>
+                        <a:t>350</a:t>
                       </a:r>
                       <a:endParaRPr lang="en-US" altLang="ko-KR" sz="700" b="0" i="0" u="none" strike="noStrike" kern="1200" dirty="0">
                         <a:solidFill>
@@ -17388,7 +17388,7 @@
                           <a:ea typeface="대명체 보통" panose="020B0600000101010101" pitchFamily="50" charset="-127"/>
                           <a:cs typeface="+mn-cs"/>
                         </a:rPr>
-                        <a:t>241</a:t>
+                        <a:t>229</a:t>
                       </a:r>
                     </a:p>
                   </a:txBody>
@@ -17451,7 +17451,7 @@
                           <a:ea typeface="대명체 보통" panose="020B0600000101010101" pitchFamily="50" charset="-127"/>
                           <a:cs typeface="+mn-cs"/>
                         </a:rPr>
-                        <a:t>71%</a:t>
+                        <a:t>66%</a:t>
                       </a:r>
                     </a:p>
                   </a:txBody>
@@ -17680,7 +17680,7 @@
                           <a:ea typeface="대명체 보통" panose="020B0600000101010101" pitchFamily="50" charset="-127"/>
                           <a:cs typeface="+mn-cs"/>
                         </a:rPr>
-                        <a:t>5,235</a:t>
+                        <a:t>5,232</a:t>
                       </a:r>
                     </a:p>
                   </a:txBody>
@@ -17798,7 +17798,7 @@
                           <a:ea typeface="대명체 보통" panose="020B0600000101010101" pitchFamily="50" charset="-127"/>
                           <a:cs typeface="+mn-cs"/>
                         </a:rPr>
-                        <a:t>1,768</a:t>
+                        <a:t>1,764</a:t>
                       </a:r>
                       <a:endParaRPr lang="en-US" altLang="ko-KR" sz="700" b="0" i="0" u="none" strike="noStrike" kern="1200" dirty="0">
                         <a:solidFill>
@@ -17933,7 +17933,7 @@
                           <a:ea typeface="대명체 보통" panose="020B0600000101010101" pitchFamily="50" charset="-127"/>
                           <a:cs typeface="+mn-cs"/>
                         </a:rPr>
-                        <a:t>3,180</a:t>
+                        <a:t>3,188</a:t>
                       </a:r>
                     </a:p>
                   </a:txBody>
@@ -18051,7 +18051,7 @@
                           <a:ea typeface="대명체 보통" panose="020B0600000101010101" pitchFamily="50" charset="-127"/>
                           <a:cs typeface="+mn-cs"/>
                         </a:rPr>
-                        <a:t>2,055</a:t>
+                        <a:t>2,043</a:t>
                       </a:r>
                     </a:p>
                   </a:txBody>
@@ -18114,7 +18114,7 @@
                           <a:ea typeface="대명체 보통" panose="020B0600000101010101" pitchFamily="50" charset="-127"/>
                           <a:cs typeface="+mn-cs"/>
                         </a:rPr>
-                        <a:t>65%</a:t>
+                        <a:t>64%</a:t>
                       </a:r>
                     </a:p>
                   </a:txBody>

--- a/data/세일즈마케팅_예상매출현황.pptx
+++ b/data/세일즈마케팅_예상매출현황.pptx
@@ -12756,7 +12756,7 @@
                           <a:ea typeface="대명체 보통" panose="020B0600000101010101" pitchFamily="50" charset="-127"/>
                           <a:cs typeface="+mn-cs"/>
                         </a:rPr>
-                        <a:t>72,069</a:t>
+                        <a:t>30,700</a:t>
                       </a:r>
                     </a:p>
                   </a:txBody>
@@ -12882,7 +12882,7 @@
                           <a:ea typeface="대명체 보통" panose="020B0600000101010101" pitchFamily="50" charset="-127"/>
                           <a:cs typeface="+mn-cs"/>
                         </a:rPr>
-                        <a:t>48,210</a:t>
+                        <a:t>6,841</a:t>
                       </a:r>
                     </a:p>
                   </a:txBody>
@@ -12949,7 +12949,7 @@
                           <a:ea typeface="대명체 보통" panose="020B0600000101010101" pitchFamily="50" charset="-127"/>
                           <a:cs typeface="+mn-cs"/>
                         </a:rPr>
-                        <a:t>302%</a:t>
+                        <a:t>129%</a:t>
                       </a:r>
                     </a:p>
                   </a:txBody>
@@ -13016,7 +13016,7 @@
                           <a:ea typeface="대명체 보통" panose="020B0600000101010101" pitchFamily="50" charset="-127"/>
                           <a:cs typeface="+mn-cs"/>
                         </a:rPr>
-                        <a:t>18,622</a:t>
+                        <a:t>19,349</a:t>
                       </a:r>
                     </a:p>
                   </a:txBody>
@@ -13142,7 +13142,7 @@
                           <a:ea typeface="대명체 보통" panose="020B0600000101010101" pitchFamily="50" charset="-127"/>
                           <a:cs typeface="+mn-cs"/>
                         </a:rPr>
-                        <a:t>53,447</a:t>
+                        <a:t>11,351</a:t>
                       </a:r>
                     </a:p>
                   </a:txBody>
@@ -13209,7 +13209,7 @@
                           <a:ea typeface="대명체 보통" panose="020B0600000101010101" pitchFamily="50" charset="-127"/>
                           <a:cs typeface="+mn-cs"/>
                         </a:rPr>
-                        <a:t>287%</a:t>
+                        <a:t>59%</a:t>
                       </a:r>
                     </a:p>
                   </a:txBody>
@@ -13450,7 +13450,7 @@
                           <a:ea typeface="대명체 보통" panose="020B0600000101010101" pitchFamily="50" charset="-127"/>
                           <a:cs typeface="+mn-cs"/>
                         </a:rPr>
-                        <a:t>188,537</a:t>
+                        <a:t>147,168</a:t>
                       </a:r>
                     </a:p>
                   </a:txBody>
@@ -13576,7 +13576,7 @@
                           <a:ea typeface="대명체 보통" panose="020B0600000101010101" pitchFamily="50" charset="-127"/>
                           <a:cs typeface="+mn-cs"/>
                         </a:rPr>
-                        <a:t>63,615</a:t>
+                        <a:t>22,247</a:t>
                       </a:r>
                     </a:p>
                   </a:txBody>
@@ -13643,7 +13643,7 @@
                           <a:ea typeface="대명체 보통" panose="020B0600000101010101" pitchFamily="50" charset="-127"/>
                           <a:cs typeface="+mn-cs"/>
                         </a:rPr>
-                        <a:t>151%</a:t>
+                        <a:t>118%</a:t>
                       </a:r>
                     </a:p>
                   </a:txBody>
@@ -13710,7 +13710,7 @@
                           <a:ea typeface="대명체 보통" panose="020B0600000101010101" pitchFamily="50" charset="-127"/>
                           <a:cs typeface="+mn-cs"/>
                         </a:rPr>
-                        <a:t>99,786</a:t>
+                        <a:t>100,513</a:t>
                       </a:r>
                     </a:p>
                   </a:txBody>
@@ -13836,7 +13836,7 @@
                           <a:ea typeface="대명체 보통" panose="020B0600000101010101" pitchFamily="50" charset="-127"/>
                           <a:cs typeface="+mn-cs"/>
                         </a:rPr>
-                        <a:t>88,751</a:t>
+                        <a:t>46,655</a:t>
                       </a:r>
                     </a:p>
                   </a:txBody>
@@ -13903,7 +13903,7 @@
                           <a:ea typeface="대명체 보통" panose="020B0600000101010101" pitchFamily="50" charset="-127"/>
                           <a:cs typeface="+mn-cs"/>
                         </a:rPr>
-                        <a:t>89%</a:t>
+                        <a:t>46%</a:t>
                       </a:r>
                     </a:p>
                   </a:txBody>
@@ -14237,7 +14237,7 @@
                           <a:ea typeface="대명체 보통" panose="020B0600000101010101" pitchFamily="50" charset="-127"/>
                           <a:cs typeface="+mn-cs"/>
                         </a:rPr>
-                        <a:t>53,799</a:t>
+                        <a:t>18,426</a:t>
                       </a:r>
                     </a:p>
                   </a:txBody>
@@ -14355,7 +14355,7 @@
                           <a:ea typeface="대명체 보통" panose="020B0600000101010101" pitchFamily="50" charset="-127"/>
                           <a:cs typeface="+mn-cs"/>
                         </a:rPr>
-                        <a:t>39,196</a:t>
+                        <a:t>3,823</a:t>
                       </a:r>
                       <a:endParaRPr lang="en-US" altLang="ko-KR" sz="700" b="0" i="0" u="none" strike="noStrike" kern="1200" dirty="0">
                         <a:solidFill>
@@ -14427,7 +14427,7 @@
                           <a:ea typeface="대명체 보통" panose="020B0600000101010101" pitchFamily="50" charset="-127"/>
                           <a:cs typeface="+mn-cs"/>
                         </a:rPr>
-                        <a:t>368%</a:t>
+                        <a:t>126%</a:t>
                       </a:r>
                     </a:p>
                   </a:txBody>
@@ -14490,7 +14490,7 @@
                           <a:ea typeface="대명체 보통" panose="020B0600000101010101" pitchFamily="50" charset="-127"/>
                           <a:cs typeface="+mn-cs"/>
                         </a:rPr>
-                        <a:t>11,338</a:t>
+                        <a:t>11,800</a:t>
                       </a:r>
                     </a:p>
                   </a:txBody>
@@ -14608,7 +14608,7 @@
                           <a:ea typeface="대명체 보통" panose="020B0600000101010101" pitchFamily="50" charset="-127"/>
                           <a:cs typeface="+mn-cs"/>
                         </a:rPr>
-                        <a:t>42,461</a:t>
+                        <a:t>6,626</a:t>
                       </a:r>
                     </a:p>
                   </a:txBody>
@@ -14671,7 +14671,7 @@
                           <a:ea typeface="대명체 보통" panose="020B0600000101010101" pitchFamily="50" charset="-127"/>
                           <a:cs typeface="+mn-cs"/>
                         </a:rPr>
-                        <a:t>374%</a:t>
+                        <a:t>56%</a:t>
                       </a:r>
                     </a:p>
                   </a:txBody>
@@ -14900,7 +14900,7 @@
                           <a:ea typeface="대명체 보통" panose="020B0600000101010101" pitchFamily="50" charset="-127"/>
                           <a:cs typeface="+mn-cs"/>
                         </a:rPr>
-                        <a:t>121,521</a:t>
+                        <a:t>86,148</a:t>
                       </a:r>
                     </a:p>
                   </a:txBody>
@@ -15018,7 +15018,7 @@
                           <a:ea typeface="대명체 보통" panose="020B0600000101010101" pitchFamily="50" charset="-127"/>
                           <a:cs typeface="+mn-cs"/>
                         </a:rPr>
-                        <a:t>49,170</a:t>
+                        <a:t>13,797</a:t>
                       </a:r>
                     </a:p>
                   </a:txBody>
@@ -15081,7 +15081,7 @@
                           <a:ea typeface="대명체 보통" panose="020B0600000101010101" pitchFamily="50" charset="-127"/>
                           <a:cs typeface="+mn-cs"/>
                         </a:rPr>
-                        <a:t>168%</a:t>
+                        <a:t>119%</a:t>
                       </a:r>
                     </a:p>
                   </a:txBody>
@@ -15144,7 +15144,7 @@
                           <a:ea typeface="대명체 보통" panose="020B0600000101010101" pitchFamily="50" charset="-127"/>
                           <a:cs typeface="+mn-cs"/>
                         </a:rPr>
-                        <a:t>56,911</a:t>
+                        <a:t>57,373</a:t>
                       </a:r>
                     </a:p>
                   </a:txBody>
@@ -15262,7 +15262,7 @@
                           <a:ea typeface="대명체 보통" panose="020B0600000101010101" pitchFamily="50" charset="-127"/>
                           <a:cs typeface="+mn-cs"/>
                         </a:rPr>
-                        <a:t>64,610</a:t>
+                        <a:t>28,775</a:t>
                       </a:r>
                     </a:p>
                   </a:txBody>
@@ -15325,7 +15325,7 @@
                           <a:ea typeface="대명체 보통" panose="020B0600000101010101" pitchFamily="50" charset="-127"/>
                           <a:cs typeface="+mn-cs"/>
                         </a:rPr>
-                        <a:t>114%</a:t>
+                        <a:t>50%</a:t>
                       </a:r>
                     </a:p>
                   </a:txBody>
@@ -15643,7 +15643,7 @@
                           <a:ea typeface="대명체 보통" panose="020B0600000101010101" pitchFamily="50" charset="-127"/>
                           <a:cs typeface="+mn-cs"/>
                         </a:rPr>
-                        <a:t>17,691</a:t>
+                        <a:t>11,717</a:t>
                       </a:r>
                     </a:p>
                   </a:txBody>
@@ -15753,7 +15753,7 @@
                           <a:ea typeface="대명체 보통" panose="020B0600000101010101" pitchFamily="50" charset="-127"/>
                           <a:cs typeface="+mn-cs"/>
                         </a:rPr>
-                        <a:t>8,834</a:t>
+                        <a:t>2,860</a:t>
                       </a:r>
                       <a:endParaRPr lang="en-US" altLang="ko-KR" sz="700" b="0" i="0" u="none" strike="noStrike" kern="1200" dirty="0">
                         <a:solidFill>
@@ -15821,7 +15821,7 @@
                           <a:ea typeface="대명체 보통" panose="020B0600000101010101" pitchFamily="50" charset="-127"/>
                           <a:cs typeface="+mn-cs"/>
                         </a:rPr>
-                        <a:t>200%</a:t>
+                        <a:t>132%</a:t>
                       </a:r>
                     </a:p>
                   </a:txBody>
@@ -15880,7 +15880,7 @@
                           <a:ea typeface="대명체 보통" panose="020B0600000101010101" pitchFamily="50" charset="-127"/>
                           <a:cs typeface="+mn-cs"/>
                         </a:rPr>
-                        <a:t>6,934</a:t>
+                        <a:t>7,195</a:t>
                       </a:r>
                     </a:p>
                   </a:txBody>
@@ -15990,7 +15990,7 @@
                           <a:ea typeface="대명체 보통" panose="020B0600000101010101" pitchFamily="50" charset="-127"/>
                           <a:cs typeface="+mn-cs"/>
                         </a:rPr>
-                        <a:t>10,757</a:t>
+                        <a:t>4,522</a:t>
                       </a:r>
                     </a:p>
                   </a:txBody>
@@ -16049,7 +16049,7 @@
                           <a:ea typeface="대명체 보통" panose="020B0600000101010101" pitchFamily="50" charset="-127"/>
                           <a:cs typeface="+mn-cs"/>
                         </a:rPr>
-                        <a:t>155%</a:t>
+                        <a:t>63%</a:t>
                       </a:r>
                     </a:p>
                   </a:txBody>
@@ -16266,7 +16266,7 @@
                           <a:ea typeface="대명체 보통" panose="020B0600000101010101" pitchFamily="50" charset="-127"/>
                           <a:cs typeface="+mn-cs"/>
                         </a:rPr>
-                        <a:t>61,784</a:t>
+                        <a:t>55,811</a:t>
                       </a:r>
                     </a:p>
                   </a:txBody>
@@ -16376,7 +16376,7 @@
                           <a:ea typeface="대명체 보통" panose="020B0600000101010101" pitchFamily="50" charset="-127"/>
                           <a:cs typeface="+mn-cs"/>
                         </a:rPr>
-                        <a:t>12,681</a:t>
+                        <a:t>6,707</a:t>
                       </a:r>
                     </a:p>
                   </a:txBody>
@@ -16435,7 +16435,7 @@
                           <a:ea typeface="대명체 보통" panose="020B0600000101010101" pitchFamily="50" charset="-127"/>
                           <a:cs typeface="+mn-cs"/>
                         </a:rPr>
-                        <a:t>126%</a:t>
+                        <a:t>114%</a:t>
                       </a:r>
                     </a:p>
                   </a:txBody>
@@ -16494,7 +16494,7 @@
                           <a:ea typeface="대명체 보통" panose="020B0600000101010101" pitchFamily="50" charset="-127"/>
                           <a:cs typeface="+mn-cs"/>
                         </a:rPr>
-                        <a:t>39,687</a:t>
+                        <a:t>39,948</a:t>
                       </a:r>
                     </a:p>
                   </a:txBody>
@@ -16604,7 +16604,7 @@
                           <a:ea typeface="대명체 보통" panose="020B0600000101010101" pitchFamily="50" charset="-127"/>
                           <a:cs typeface="+mn-cs"/>
                         </a:rPr>
-                        <a:t>22,097</a:t>
+                        <a:t>15,862</a:t>
                       </a:r>
                     </a:p>
                   </a:txBody>
@@ -16663,7 +16663,7 @@
                           <a:ea typeface="대명체 보통" panose="020B0600000101010101" pitchFamily="50" charset="-127"/>
                           <a:cs typeface="+mn-cs"/>
                         </a:rPr>
-                        <a:t>56%</a:t>
+                        <a:t>40%</a:t>
                       </a:r>
                     </a:p>
                   </a:txBody>
@@ -16999,7 +16999,7 @@
                           <a:ea typeface="대명체 보통" panose="020B0600000101010101" pitchFamily="50" charset="-127"/>
                           <a:cs typeface="+mn-cs"/>
                         </a:rPr>
-                        <a:t>579</a:t>
+                        <a:t>557</a:t>
                       </a:r>
                       <a:endParaRPr lang="en-US" altLang="ko-KR" sz="700" b="0" i="0" u="none" strike="noStrike" kern="1200" dirty="0">
                         <a:solidFill>
@@ -17126,7 +17126,7 @@
                           <a:ea typeface="대명체 보통" panose="020B0600000101010101" pitchFamily="50" charset="-127"/>
                           <a:cs typeface="+mn-cs"/>
                         </a:rPr>
-                        <a:t>180</a:t>
+                        <a:t>158</a:t>
                       </a:r>
                       <a:endParaRPr lang="en-US" altLang="ko-KR" sz="700" b="0" i="0" u="none" strike="noStrike" kern="1200" dirty="0">
                         <a:solidFill>
@@ -17198,7 +17198,7 @@
                           <a:ea typeface="대명체 보통" panose="020B0600000101010101" pitchFamily="50" charset="-127"/>
                           <a:cs typeface="+mn-cs"/>
                         </a:rPr>
-                        <a:t>145%</a:t>
+                        <a:t>140%</a:t>
                       </a:r>
                     </a:p>
                   </a:txBody>
@@ -17261,7 +17261,7 @@
                           <a:ea typeface="대명체 보통" panose="020B0600000101010101" pitchFamily="50" charset="-127"/>
                           <a:cs typeface="+mn-cs"/>
                         </a:rPr>
-                        <a:t>350</a:t>
+                        <a:t>354</a:t>
                       </a:r>
                       <a:endParaRPr lang="en-US" altLang="ko-KR" sz="700" b="0" i="0" u="none" strike="noStrike" kern="1200" dirty="0">
                         <a:solidFill>
@@ -17388,7 +17388,7 @@
                           <a:ea typeface="대명체 보통" panose="020B0600000101010101" pitchFamily="50" charset="-127"/>
                           <a:cs typeface="+mn-cs"/>
                         </a:rPr>
-                        <a:t>229</a:t>
+                        <a:t>203</a:t>
                       </a:r>
                     </a:p>
                   </a:txBody>
@@ -17451,7 +17451,7 @@
                           <a:ea typeface="대명체 보통" panose="020B0600000101010101" pitchFamily="50" charset="-127"/>
                           <a:cs typeface="+mn-cs"/>
                         </a:rPr>
-                        <a:t>66%</a:t>
+                        <a:t>57%</a:t>
                       </a:r>
                     </a:p>
                   </a:txBody>
@@ -17680,7 +17680,7 @@
                           <a:ea typeface="대명체 보통" panose="020B0600000101010101" pitchFamily="50" charset="-127"/>
                           <a:cs typeface="+mn-cs"/>
                         </a:rPr>
-                        <a:t>5,232</a:t>
+                        <a:t>5,210</a:t>
                       </a:r>
                     </a:p>
                   </a:txBody>
@@ -17798,7 +17798,7 @@
                           <a:ea typeface="대명체 보통" panose="020B0600000101010101" pitchFamily="50" charset="-127"/>
                           <a:cs typeface="+mn-cs"/>
                         </a:rPr>
-                        <a:t>1,764</a:t>
+                        <a:t>1,742</a:t>
                       </a:r>
                       <a:endParaRPr lang="en-US" altLang="ko-KR" sz="700" b="0" i="0" u="none" strike="noStrike" kern="1200" dirty="0">
                         <a:solidFill>
@@ -17870,7 +17870,7 @@
                           <a:ea typeface="대명체 보통" panose="020B0600000101010101" pitchFamily="50" charset="-127"/>
                           <a:cs typeface="+mn-cs"/>
                         </a:rPr>
-                        <a:t>151%</a:t>
+                        <a:t>150%</a:t>
                       </a:r>
                     </a:p>
                   </a:txBody>
@@ -17933,7 +17933,7 @@
                           <a:ea typeface="대명체 보통" panose="020B0600000101010101" pitchFamily="50" charset="-127"/>
                           <a:cs typeface="+mn-cs"/>
                         </a:rPr>
-                        <a:t>3,188</a:t>
+                        <a:t>3,193</a:t>
                       </a:r>
                     </a:p>
                   </a:txBody>
@@ -18051,7 +18051,7 @@
                           <a:ea typeface="대명체 보통" panose="020B0600000101010101" pitchFamily="50" charset="-127"/>
                           <a:cs typeface="+mn-cs"/>
                         </a:rPr>
-                        <a:t>2,043</a:t>
+                        <a:t>2,017</a:t>
                       </a:r>
                     </a:p>
                   </a:txBody>
@@ -18114,7 +18114,7 @@
                           <a:ea typeface="대명체 보통" panose="020B0600000101010101" pitchFamily="50" charset="-127"/>
                           <a:cs typeface="+mn-cs"/>
                         </a:rPr>
-                        <a:t>64%</a:t>
+                        <a:t>63%</a:t>
                       </a:r>
                     </a:p>
                   </a:txBody>

--- a/data/세일즈마케팅_예상매출현황.pptx
+++ b/data/세일즈마케팅_예상매출현황.pptx
@@ -12756,7 +12756,7 @@
                           <a:ea typeface="대명체 보통" panose="020B0600000101010101" pitchFamily="50" charset="-127"/>
                           <a:cs typeface="+mn-cs"/>
                         </a:rPr>
-                        <a:t>30,700</a:t>
+                        <a:t>29,891</a:t>
                       </a:r>
                     </a:p>
                   </a:txBody>
@@ -12882,7 +12882,7 @@
                           <a:ea typeface="대명체 보통" panose="020B0600000101010101" pitchFamily="50" charset="-127"/>
                           <a:cs typeface="+mn-cs"/>
                         </a:rPr>
-                        <a:t>6,841</a:t>
+                        <a:t>6,031</a:t>
                       </a:r>
                     </a:p>
                   </a:txBody>
@@ -12949,7 +12949,7 @@
                           <a:ea typeface="대명체 보통" panose="020B0600000101010101" pitchFamily="50" charset="-127"/>
                           <a:cs typeface="+mn-cs"/>
                         </a:rPr>
-                        <a:t>129%</a:t>
+                        <a:t>125%</a:t>
                       </a:r>
                     </a:p>
                   </a:txBody>
@@ -13016,7 +13016,7 @@
                           <a:ea typeface="대명체 보통" panose="020B0600000101010101" pitchFamily="50" charset="-127"/>
                           <a:cs typeface="+mn-cs"/>
                         </a:rPr>
-                        <a:t>19,349</a:t>
+                        <a:t>19,557</a:t>
                       </a:r>
                     </a:p>
                   </a:txBody>
@@ -13142,7 +13142,7 @@
                           <a:ea typeface="대명체 보통" panose="020B0600000101010101" pitchFamily="50" charset="-127"/>
                           <a:cs typeface="+mn-cs"/>
                         </a:rPr>
-                        <a:t>11,351</a:t>
+                        <a:t>10,333</a:t>
                       </a:r>
                     </a:p>
                   </a:txBody>
@@ -13209,7 +13209,7 @@
                           <a:ea typeface="대명체 보통" panose="020B0600000101010101" pitchFamily="50" charset="-127"/>
                           <a:cs typeface="+mn-cs"/>
                         </a:rPr>
-                        <a:t>59%</a:t>
+                        <a:t>53%</a:t>
                       </a:r>
                     </a:p>
                   </a:txBody>
@@ -13450,7 +13450,7 @@
                           <a:ea typeface="대명체 보통" panose="020B0600000101010101" pitchFamily="50" charset="-127"/>
                           <a:cs typeface="+mn-cs"/>
                         </a:rPr>
-                        <a:t>147,168</a:t>
+                        <a:t>146,358</a:t>
                       </a:r>
                     </a:p>
                   </a:txBody>
@@ -13576,7 +13576,7 @@
                           <a:ea typeface="대명체 보통" panose="020B0600000101010101" pitchFamily="50" charset="-127"/>
                           <a:cs typeface="+mn-cs"/>
                         </a:rPr>
-                        <a:t>22,247</a:t>
+                        <a:t>21,437</a:t>
                       </a:r>
                     </a:p>
                   </a:txBody>
@@ -13643,7 +13643,7 @@
                           <a:ea typeface="대명체 보통" panose="020B0600000101010101" pitchFamily="50" charset="-127"/>
                           <a:cs typeface="+mn-cs"/>
                         </a:rPr>
-                        <a:t>118%</a:t>
+                        <a:t>117%</a:t>
                       </a:r>
                     </a:p>
                   </a:txBody>
@@ -13710,7 +13710,7 @@
                           <a:ea typeface="대명체 보통" panose="020B0600000101010101" pitchFamily="50" charset="-127"/>
                           <a:cs typeface="+mn-cs"/>
                         </a:rPr>
-                        <a:t>100,513</a:t>
+                        <a:t>100,721</a:t>
                       </a:r>
                     </a:p>
                   </a:txBody>
@@ -13836,7 +13836,7 @@
                           <a:ea typeface="대명체 보통" panose="020B0600000101010101" pitchFamily="50" charset="-127"/>
                           <a:cs typeface="+mn-cs"/>
                         </a:rPr>
-                        <a:t>46,655</a:t>
+                        <a:t>45,637</a:t>
                       </a:r>
                     </a:p>
                   </a:txBody>
@@ -13903,7 +13903,7 @@
                           <a:ea typeface="대명체 보통" panose="020B0600000101010101" pitchFamily="50" charset="-127"/>
                           <a:cs typeface="+mn-cs"/>
                         </a:rPr>
-                        <a:t>46%</a:t>
+                        <a:t>45%</a:t>
                       </a:r>
                     </a:p>
                   </a:txBody>
@@ -14237,7 +14237,7 @@
                           <a:ea typeface="대명체 보통" panose="020B0600000101010101" pitchFamily="50" charset="-127"/>
                           <a:cs typeface="+mn-cs"/>
                         </a:rPr>
-                        <a:t>18,426</a:t>
+                        <a:t>17,939</a:t>
                       </a:r>
                     </a:p>
                   </a:txBody>
@@ -14355,7 +14355,7 @@
                           <a:ea typeface="대명체 보통" panose="020B0600000101010101" pitchFamily="50" charset="-127"/>
                           <a:cs typeface="+mn-cs"/>
                         </a:rPr>
-                        <a:t>3,823</a:t>
+                        <a:t>3,336</a:t>
                       </a:r>
                       <a:endParaRPr lang="en-US" altLang="ko-KR" sz="700" b="0" i="0" u="none" strike="noStrike" kern="1200" dirty="0">
                         <a:solidFill>
@@ -14427,7 +14427,7 @@
                           <a:ea typeface="대명체 보통" panose="020B0600000101010101" pitchFamily="50" charset="-127"/>
                           <a:cs typeface="+mn-cs"/>
                         </a:rPr>
-                        <a:t>126%</a:t>
+                        <a:t>123%</a:t>
                       </a:r>
                     </a:p>
                   </a:txBody>
@@ -14490,7 +14490,7 @@
                           <a:ea typeface="대명체 보통" panose="020B0600000101010101" pitchFamily="50" charset="-127"/>
                           <a:cs typeface="+mn-cs"/>
                         </a:rPr>
-                        <a:t>11,800</a:t>
+                        <a:t>11,938</a:t>
                       </a:r>
                     </a:p>
                   </a:txBody>
@@ -14608,7 +14608,7 @@
                           <a:ea typeface="대명체 보통" panose="020B0600000101010101" pitchFamily="50" charset="-127"/>
                           <a:cs typeface="+mn-cs"/>
                         </a:rPr>
-                        <a:t>6,626</a:t>
+                        <a:t>6,002</a:t>
                       </a:r>
                     </a:p>
                   </a:txBody>
@@ -14671,7 +14671,7 @@
                           <a:ea typeface="대명체 보통" panose="020B0600000101010101" pitchFamily="50" charset="-127"/>
                           <a:cs typeface="+mn-cs"/>
                         </a:rPr>
-                        <a:t>56%</a:t>
+                        <a:t>50%</a:t>
                       </a:r>
                     </a:p>
                   </a:txBody>
@@ -14900,7 +14900,7 @@
                           <a:ea typeface="대명체 보통" panose="020B0600000101010101" pitchFamily="50" charset="-127"/>
                           <a:cs typeface="+mn-cs"/>
                         </a:rPr>
-                        <a:t>86,148</a:t>
+                        <a:t>85,661</a:t>
                       </a:r>
                     </a:p>
                   </a:txBody>
@@ -15018,7 +15018,7 @@
                           <a:ea typeface="대명체 보통" panose="020B0600000101010101" pitchFamily="50" charset="-127"/>
                           <a:cs typeface="+mn-cs"/>
                         </a:rPr>
-                        <a:t>13,797</a:t>
+                        <a:t>13,310</a:t>
                       </a:r>
                     </a:p>
                   </a:txBody>
@@ -15081,7 +15081,7 @@
                           <a:ea typeface="대명체 보통" panose="020B0600000101010101" pitchFamily="50" charset="-127"/>
                           <a:cs typeface="+mn-cs"/>
                         </a:rPr>
-                        <a:t>119%</a:t>
+                        <a:t>118%</a:t>
                       </a:r>
                     </a:p>
                   </a:txBody>
@@ -15144,7 +15144,7 @@
                           <a:ea typeface="대명체 보통" panose="020B0600000101010101" pitchFamily="50" charset="-127"/>
                           <a:cs typeface="+mn-cs"/>
                         </a:rPr>
-                        <a:t>57,373</a:t>
+                        <a:t>57,510</a:t>
                       </a:r>
                     </a:p>
                   </a:txBody>
@@ -15262,7 +15262,7 @@
                           <a:ea typeface="대명체 보통" panose="020B0600000101010101" pitchFamily="50" charset="-127"/>
                           <a:cs typeface="+mn-cs"/>
                         </a:rPr>
-                        <a:t>28,775</a:t>
+                        <a:t>28,151</a:t>
                       </a:r>
                     </a:p>
                   </a:txBody>
@@ -15325,7 +15325,7 @@
                           <a:ea typeface="대명체 보통" panose="020B0600000101010101" pitchFamily="50" charset="-127"/>
                           <a:cs typeface="+mn-cs"/>
                         </a:rPr>
-                        <a:t>50%</a:t>
+                        <a:t>49%</a:t>
                       </a:r>
                     </a:p>
                   </a:txBody>
@@ -15643,7 +15643,7 @@
                           <a:ea typeface="대명체 보통" panose="020B0600000101010101" pitchFamily="50" charset="-127"/>
                           <a:cs typeface="+mn-cs"/>
                         </a:rPr>
-                        <a:t>11,717</a:t>
+                        <a:t>11,402</a:t>
                       </a:r>
                     </a:p>
                   </a:txBody>
@@ -15753,7 +15753,7 @@
                           <a:ea typeface="대명체 보통" panose="020B0600000101010101" pitchFamily="50" charset="-127"/>
                           <a:cs typeface="+mn-cs"/>
                         </a:rPr>
-                        <a:t>2,860</a:t>
+                        <a:t>2,545</a:t>
                       </a:r>
                       <a:endParaRPr lang="en-US" altLang="ko-KR" sz="700" b="0" i="0" u="none" strike="noStrike" kern="1200" dirty="0">
                         <a:solidFill>
@@ -15821,7 +15821,7 @@
                           <a:ea typeface="대명체 보통" panose="020B0600000101010101" pitchFamily="50" charset="-127"/>
                           <a:cs typeface="+mn-cs"/>
                         </a:rPr>
-                        <a:t>132%</a:t>
+                        <a:t>129%</a:t>
                       </a:r>
                     </a:p>
                   </a:txBody>
@@ -15880,7 +15880,7 @@
                           <a:ea typeface="대명체 보통" panose="020B0600000101010101" pitchFamily="50" charset="-127"/>
                           <a:cs typeface="+mn-cs"/>
                         </a:rPr>
-                        <a:t>7,195</a:t>
+                        <a:t>7,264</a:t>
                       </a:r>
                     </a:p>
                   </a:txBody>
@@ -15990,7 +15990,7 @@
                           <a:ea typeface="대명체 보통" panose="020B0600000101010101" pitchFamily="50" charset="-127"/>
                           <a:cs typeface="+mn-cs"/>
                         </a:rPr>
-                        <a:t>4,522</a:t>
+                        <a:t>4,138</a:t>
                       </a:r>
                     </a:p>
                   </a:txBody>
@@ -16049,7 +16049,7 @@
                           <a:ea typeface="대명체 보통" panose="020B0600000101010101" pitchFamily="50" charset="-127"/>
                           <a:cs typeface="+mn-cs"/>
                         </a:rPr>
-                        <a:t>63%</a:t>
+                        <a:t>57%</a:t>
                       </a:r>
                     </a:p>
                   </a:txBody>
@@ -16266,7 +16266,7 @@
                           <a:ea typeface="대명체 보통" panose="020B0600000101010101" pitchFamily="50" charset="-127"/>
                           <a:cs typeface="+mn-cs"/>
                         </a:rPr>
-                        <a:t>55,811</a:t>
+                        <a:t>55,496</a:t>
                       </a:r>
                     </a:p>
                   </a:txBody>
@@ -16376,7 +16376,7 @@
                           <a:ea typeface="대명체 보통" panose="020B0600000101010101" pitchFamily="50" charset="-127"/>
                           <a:cs typeface="+mn-cs"/>
                         </a:rPr>
-                        <a:t>6,707</a:t>
+                        <a:t>6,393</a:t>
                       </a:r>
                     </a:p>
                   </a:txBody>
@@ -16435,7 +16435,7 @@
                           <a:ea typeface="대명체 보통" panose="020B0600000101010101" pitchFamily="50" charset="-127"/>
                           <a:cs typeface="+mn-cs"/>
                         </a:rPr>
-                        <a:t>114%</a:t>
+                        <a:t>113%</a:t>
                       </a:r>
                     </a:p>
                   </a:txBody>
@@ -16494,7 +16494,7 @@
                           <a:ea typeface="대명체 보통" panose="020B0600000101010101" pitchFamily="50" charset="-127"/>
                           <a:cs typeface="+mn-cs"/>
                         </a:rPr>
-                        <a:t>39,948</a:t>
+                        <a:t>40,017</a:t>
                       </a:r>
                     </a:p>
                   </a:txBody>
@@ -16604,7 +16604,7 @@
                           <a:ea typeface="대명체 보통" panose="020B0600000101010101" pitchFamily="50" charset="-127"/>
                           <a:cs typeface="+mn-cs"/>
                         </a:rPr>
-                        <a:t>15,862</a:t>
+                        <a:t>15,478</a:t>
                       </a:r>
                     </a:p>
                   </a:txBody>
@@ -16663,7 +16663,7 @@
                           <a:ea typeface="대명체 보통" panose="020B0600000101010101" pitchFamily="50" charset="-127"/>
                           <a:cs typeface="+mn-cs"/>
                         </a:rPr>
-                        <a:t>40%</a:t>
+                        <a:t>39%</a:t>
                       </a:r>
                     </a:p>
                   </a:txBody>
@@ -16999,7 +16999,7 @@
                           <a:ea typeface="대명체 보통" panose="020B0600000101010101" pitchFamily="50" charset="-127"/>
                           <a:cs typeface="+mn-cs"/>
                         </a:rPr>
-                        <a:t>557</a:t>
+                        <a:t>549</a:t>
                       </a:r>
                       <a:endParaRPr lang="en-US" altLang="ko-KR" sz="700" b="0" i="0" u="none" strike="noStrike" kern="1200" dirty="0">
                         <a:solidFill>
@@ -17126,7 +17126,7 @@
                           <a:ea typeface="대명체 보통" panose="020B0600000101010101" pitchFamily="50" charset="-127"/>
                           <a:cs typeface="+mn-cs"/>
                         </a:rPr>
-                        <a:t>158</a:t>
+                        <a:t>150</a:t>
                       </a:r>
                       <a:endParaRPr lang="en-US" altLang="ko-KR" sz="700" b="0" i="0" u="none" strike="noStrike" kern="1200" dirty="0">
                         <a:solidFill>
@@ -17198,7 +17198,7 @@
                           <a:ea typeface="대명체 보통" panose="020B0600000101010101" pitchFamily="50" charset="-127"/>
                           <a:cs typeface="+mn-cs"/>
                         </a:rPr>
-                        <a:t>140%</a:t>
+                        <a:t>138%</a:t>
                       </a:r>
                     </a:p>
                   </a:txBody>
@@ -17261,7 +17261,7 @@
                           <a:ea typeface="대명체 보통" panose="020B0600000101010101" pitchFamily="50" charset="-127"/>
                           <a:cs typeface="+mn-cs"/>
                         </a:rPr>
-                        <a:t>354</a:t>
+                        <a:t>356</a:t>
                       </a:r>
                       <a:endParaRPr lang="en-US" altLang="ko-KR" sz="700" b="0" i="0" u="none" strike="noStrike" kern="1200" dirty="0">
                         <a:solidFill>
@@ -17388,7 +17388,7 @@
                           <a:ea typeface="대명체 보통" panose="020B0600000101010101" pitchFamily="50" charset="-127"/>
                           <a:cs typeface="+mn-cs"/>
                         </a:rPr>
-                        <a:t>203</a:t>
+                        <a:t>194</a:t>
                       </a:r>
                     </a:p>
                   </a:txBody>
@@ -17451,7 +17451,7 @@
                           <a:ea typeface="대명체 보통" panose="020B0600000101010101" pitchFamily="50" charset="-127"/>
                           <a:cs typeface="+mn-cs"/>
                         </a:rPr>
-                        <a:t>57%</a:t>
+                        <a:t>54%</a:t>
                       </a:r>
                     </a:p>
                   </a:txBody>
@@ -17680,7 +17680,7 @@
                           <a:ea typeface="대명체 보통" panose="020B0600000101010101" pitchFamily="50" charset="-127"/>
                           <a:cs typeface="+mn-cs"/>
                         </a:rPr>
-                        <a:t>5,210</a:t>
+                        <a:t>5,202</a:t>
                       </a:r>
                     </a:p>
                   </a:txBody>
@@ -17798,7 +17798,7 @@
                           <a:ea typeface="대명체 보통" panose="020B0600000101010101" pitchFamily="50" charset="-127"/>
                           <a:cs typeface="+mn-cs"/>
                         </a:rPr>
-                        <a:t>1,742</a:t>
+                        <a:t>1,734</a:t>
                       </a:r>
                       <a:endParaRPr lang="en-US" altLang="ko-KR" sz="700" b="0" i="0" u="none" strike="noStrike" kern="1200" dirty="0">
                         <a:solidFill>
@@ -17933,7 +17933,7 @@
                           <a:ea typeface="대명체 보통" panose="020B0600000101010101" pitchFamily="50" charset="-127"/>
                           <a:cs typeface="+mn-cs"/>
                         </a:rPr>
-                        <a:t>3,193</a:t>
+                        <a:t>3,194</a:t>
                       </a:r>
                     </a:p>
                   </a:txBody>
@@ -18051,7 +18051,7 @@
                           <a:ea typeface="대명체 보통" panose="020B0600000101010101" pitchFamily="50" charset="-127"/>
                           <a:cs typeface="+mn-cs"/>
                         </a:rPr>
-                        <a:t>2,017</a:t>
+                        <a:t>2,008</a:t>
                       </a:r>
                     </a:p>
                   </a:txBody>

--- a/data/세일즈마케팅_예상매출현황.pptx
+++ b/data/세일즈마케팅_예상매출현황.pptx
@@ -12756,7 +12756,7 @@
                           <a:ea typeface="대명체 보통" panose="020B0600000101010101" pitchFamily="50" charset="-127"/>
                           <a:cs typeface="+mn-cs"/>
                         </a:rPr>
-                        <a:t>29,891</a:t>
+                        <a:t>29,876</a:t>
                       </a:r>
                     </a:p>
                   </a:txBody>
@@ -12882,7 +12882,7 @@
                           <a:ea typeface="대명체 보통" panose="020B0600000101010101" pitchFamily="50" charset="-127"/>
                           <a:cs typeface="+mn-cs"/>
                         </a:rPr>
-                        <a:t>6,031</a:t>
+                        <a:t>6,016</a:t>
                       </a:r>
                     </a:p>
                   </a:txBody>
@@ -13142,7 +13142,7 @@
                           <a:ea typeface="대명체 보통" panose="020B0600000101010101" pitchFamily="50" charset="-127"/>
                           <a:cs typeface="+mn-cs"/>
                         </a:rPr>
-                        <a:t>10,333</a:t>
+                        <a:t>10,318</a:t>
                       </a:r>
                     </a:p>
                   </a:txBody>
@@ -13450,7 +13450,7 @@
                           <a:ea typeface="대명체 보통" panose="020B0600000101010101" pitchFamily="50" charset="-127"/>
                           <a:cs typeface="+mn-cs"/>
                         </a:rPr>
-                        <a:t>146,358</a:t>
+                        <a:t>146,345</a:t>
                       </a:r>
                     </a:p>
                   </a:txBody>
@@ -13576,7 +13576,7 @@
                           <a:ea typeface="대명체 보통" panose="020B0600000101010101" pitchFamily="50" charset="-127"/>
                           <a:cs typeface="+mn-cs"/>
                         </a:rPr>
-                        <a:t>21,437</a:t>
+                        <a:t>21,424</a:t>
                       </a:r>
                     </a:p>
                   </a:txBody>
@@ -13836,7 +13836,7 @@
                           <a:ea typeface="대명체 보통" panose="020B0600000101010101" pitchFamily="50" charset="-127"/>
                           <a:cs typeface="+mn-cs"/>
                         </a:rPr>
-                        <a:t>45,637</a:t>
+                        <a:t>45,624</a:t>
                       </a:r>
                     </a:p>
                   </a:txBody>
@@ -14237,7 +14237,7 @@
                           <a:ea typeface="대명체 보통" panose="020B0600000101010101" pitchFamily="50" charset="-127"/>
                           <a:cs typeface="+mn-cs"/>
                         </a:rPr>
-                        <a:t>17,939</a:t>
+                        <a:t>17,928</a:t>
                       </a:r>
                     </a:p>
                   </a:txBody>
@@ -14355,7 +14355,7 @@
                           <a:ea typeface="대명체 보통" panose="020B0600000101010101" pitchFamily="50" charset="-127"/>
                           <a:cs typeface="+mn-cs"/>
                         </a:rPr>
-                        <a:t>3,336</a:t>
+                        <a:t>3,325</a:t>
                       </a:r>
                       <a:endParaRPr lang="en-US" altLang="ko-KR" sz="700" b="0" i="0" u="none" strike="noStrike" kern="1200" dirty="0">
                         <a:solidFill>
@@ -14608,7 +14608,7 @@
                           <a:ea typeface="대명체 보통" panose="020B0600000101010101" pitchFamily="50" charset="-127"/>
                           <a:cs typeface="+mn-cs"/>
                         </a:rPr>
-                        <a:t>6,002</a:t>
+                        <a:t>5,991</a:t>
                       </a:r>
                     </a:p>
                   </a:txBody>
@@ -14900,7 +14900,7 @@
                           <a:ea typeface="대명체 보통" panose="020B0600000101010101" pitchFamily="50" charset="-127"/>
                           <a:cs typeface="+mn-cs"/>
                         </a:rPr>
-                        <a:t>85,661</a:t>
+                        <a:t>85,650</a:t>
                       </a:r>
                     </a:p>
                   </a:txBody>
@@ -15018,7 +15018,7 @@
                           <a:ea typeface="대명체 보통" panose="020B0600000101010101" pitchFamily="50" charset="-127"/>
                           <a:cs typeface="+mn-cs"/>
                         </a:rPr>
-                        <a:t>13,310</a:t>
+                        <a:t>13,299</a:t>
                       </a:r>
                     </a:p>
                   </a:txBody>
@@ -15262,7 +15262,7 @@
                           <a:ea typeface="대명체 보통" panose="020B0600000101010101" pitchFamily="50" charset="-127"/>
                           <a:cs typeface="+mn-cs"/>
                         </a:rPr>
-                        <a:t>28,151</a:t>
+                        <a:t>28,140</a:t>
                       </a:r>
                     </a:p>
                   </a:txBody>
@@ -15643,7 +15643,7 @@
                           <a:ea typeface="대명체 보통" panose="020B0600000101010101" pitchFamily="50" charset="-127"/>
                           <a:cs typeface="+mn-cs"/>
                         </a:rPr>
-                        <a:t>11,402</a:t>
+                        <a:t>11,397</a:t>
                       </a:r>
                     </a:p>
                   </a:txBody>
@@ -15753,7 +15753,7 @@
                           <a:ea typeface="대명체 보통" panose="020B0600000101010101" pitchFamily="50" charset="-127"/>
                           <a:cs typeface="+mn-cs"/>
                         </a:rPr>
-                        <a:t>2,545</a:t>
+                        <a:t>2,540</a:t>
                       </a:r>
                       <a:endParaRPr lang="en-US" altLang="ko-KR" sz="700" b="0" i="0" u="none" strike="noStrike" kern="1200" dirty="0">
                         <a:solidFill>
@@ -15990,7 +15990,7 @@
                           <a:ea typeface="대명체 보통" panose="020B0600000101010101" pitchFamily="50" charset="-127"/>
                           <a:cs typeface="+mn-cs"/>
                         </a:rPr>
-                        <a:t>4,138</a:t>
+                        <a:t>4,133</a:t>
                       </a:r>
                     </a:p>
                   </a:txBody>
@@ -16266,7 +16266,7 @@
                           <a:ea typeface="대명체 보통" panose="020B0600000101010101" pitchFamily="50" charset="-127"/>
                           <a:cs typeface="+mn-cs"/>
                         </a:rPr>
-                        <a:t>55,496</a:t>
+                        <a:t>55,492</a:t>
                       </a:r>
                     </a:p>
                   </a:txBody>
@@ -16376,7 +16376,7 @@
                           <a:ea typeface="대명체 보통" panose="020B0600000101010101" pitchFamily="50" charset="-127"/>
                           <a:cs typeface="+mn-cs"/>
                         </a:rPr>
-                        <a:t>6,393</a:t>
+                        <a:t>6,389</a:t>
                       </a:r>
                     </a:p>
                   </a:txBody>
@@ -16604,7 +16604,7 @@
                           <a:ea typeface="대명체 보통" panose="020B0600000101010101" pitchFamily="50" charset="-127"/>
                           <a:cs typeface="+mn-cs"/>
                         </a:rPr>
-                        <a:t>15,478</a:t>
+                        <a:t>15,474</a:t>
                       </a:r>
                     </a:p>
                   </a:txBody>
@@ -16999,7 +16999,7 @@
                           <a:ea typeface="대명체 보통" panose="020B0600000101010101" pitchFamily="50" charset="-127"/>
                           <a:cs typeface="+mn-cs"/>
                         </a:rPr>
-                        <a:t>549</a:t>
+                        <a:t>550</a:t>
                       </a:r>
                       <a:endParaRPr lang="en-US" altLang="ko-KR" sz="700" b="0" i="0" u="none" strike="noStrike" kern="1200" dirty="0">
                         <a:solidFill>
@@ -17126,7 +17126,7 @@
                           <a:ea typeface="대명체 보통" panose="020B0600000101010101" pitchFamily="50" charset="-127"/>
                           <a:cs typeface="+mn-cs"/>
                         </a:rPr>
-                        <a:t>150</a:t>
+                        <a:t>151</a:t>
                       </a:r>
                       <a:endParaRPr lang="en-US" altLang="ko-KR" sz="700" b="0" i="0" u="none" strike="noStrike" kern="1200" dirty="0">
                         <a:solidFill>
@@ -17388,7 +17388,7 @@
                           <a:ea typeface="대명체 보통" panose="020B0600000101010101" pitchFamily="50" charset="-127"/>
                           <a:cs typeface="+mn-cs"/>
                         </a:rPr>
-                        <a:t>194</a:t>
+                        <a:t>195</a:t>
                       </a:r>
                     </a:p>
                   </a:txBody>
@@ -17451,7 +17451,7 @@
                           <a:ea typeface="대명체 보통" panose="020B0600000101010101" pitchFamily="50" charset="-127"/>
                           <a:cs typeface="+mn-cs"/>
                         </a:rPr>
-                        <a:t>54%</a:t>
+                        <a:t>55%</a:t>
                       </a:r>
                     </a:p>
                   </a:txBody>
@@ -17680,7 +17680,7 @@
                           <a:ea typeface="대명체 보통" panose="020B0600000101010101" pitchFamily="50" charset="-127"/>
                           <a:cs typeface="+mn-cs"/>
                         </a:rPr>
-                        <a:t>5,202</a:t>
+                        <a:t>5,204</a:t>
                       </a:r>
                     </a:p>
                   </a:txBody>
@@ -17798,7 +17798,7 @@
                           <a:ea typeface="대명체 보통" panose="020B0600000101010101" pitchFamily="50" charset="-127"/>
                           <a:cs typeface="+mn-cs"/>
                         </a:rPr>
-                        <a:t>1,734</a:t>
+                        <a:t>1,736</a:t>
                       </a:r>
                       <a:endParaRPr lang="en-US" altLang="ko-KR" sz="700" b="0" i="0" u="none" strike="noStrike" kern="1200" dirty="0">
                         <a:solidFill>
@@ -18051,7 +18051,7 @@
                           <a:ea typeface="대명체 보통" panose="020B0600000101010101" pitchFamily="50" charset="-127"/>
                           <a:cs typeface="+mn-cs"/>
                         </a:rPr>
-                        <a:t>2,008</a:t>
+                        <a:t>2,010</a:t>
                       </a:r>
                     </a:p>
                   </a:txBody>

--- a/data/세일즈마케팅_예상매출현황.pptx
+++ b/data/세일즈마케팅_예상매출현황.pptx
@@ -12756,7 +12756,7 @@
                           <a:ea typeface="대명체 보통" panose="020B0600000101010101" pitchFamily="50" charset="-127"/>
                           <a:cs typeface="+mn-cs"/>
                         </a:rPr>
-                        <a:t>29,876</a:t>
+                        <a:t>26,839</a:t>
                       </a:r>
                     </a:p>
                   </a:txBody>
@@ -12882,7 +12882,7 @@
                           <a:ea typeface="대명체 보통" panose="020B0600000101010101" pitchFamily="50" charset="-127"/>
                           <a:cs typeface="+mn-cs"/>
                         </a:rPr>
-                        <a:t>6,016</a:t>
+                        <a:t>2,979</a:t>
                       </a:r>
                     </a:p>
                   </a:txBody>
@@ -12949,7 +12949,7 @@
                           <a:ea typeface="대명체 보통" panose="020B0600000101010101" pitchFamily="50" charset="-127"/>
                           <a:cs typeface="+mn-cs"/>
                         </a:rPr>
-                        <a:t>125%</a:t>
+                        <a:t>112%</a:t>
                       </a:r>
                     </a:p>
                   </a:txBody>
@@ -13016,7 +13016,7 @@
                           <a:ea typeface="대명체 보통" panose="020B0600000101010101" pitchFamily="50" charset="-127"/>
                           <a:cs typeface="+mn-cs"/>
                         </a:rPr>
-                        <a:t>19,557</a:t>
+                        <a:t>19,796</a:t>
                       </a:r>
                     </a:p>
                   </a:txBody>
@@ -13142,7 +13142,7 @@
                           <a:ea typeface="대명체 보통" panose="020B0600000101010101" pitchFamily="50" charset="-127"/>
                           <a:cs typeface="+mn-cs"/>
                         </a:rPr>
-                        <a:t>10,318</a:t>
+                        <a:t>7,043</a:t>
                       </a:r>
                     </a:p>
                   </a:txBody>
@@ -13209,7 +13209,7 @@
                           <a:ea typeface="대명체 보통" panose="020B0600000101010101" pitchFamily="50" charset="-127"/>
                           <a:cs typeface="+mn-cs"/>
                         </a:rPr>
-                        <a:t>53%</a:t>
+                        <a:t>36%</a:t>
                       </a:r>
                     </a:p>
                   </a:txBody>
@@ -13450,7 +13450,7 @@
                           <a:ea typeface="대명체 보통" panose="020B0600000101010101" pitchFamily="50" charset="-127"/>
                           <a:cs typeface="+mn-cs"/>
                         </a:rPr>
-                        <a:t>146,345</a:t>
+                        <a:t>143,308</a:t>
                       </a:r>
                     </a:p>
                   </a:txBody>
@@ -13576,7 +13576,7 @@
                           <a:ea typeface="대명체 보통" panose="020B0600000101010101" pitchFamily="50" charset="-127"/>
                           <a:cs typeface="+mn-cs"/>
                         </a:rPr>
-                        <a:t>21,424</a:t>
+                        <a:t>18,387</a:t>
                       </a:r>
                     </a:p>
                   </a:txBody>
@@ -13643,7 +13643,7 @@
                           <a:ea typeface="대명체 보통" panose="020B0600000101010101" pitchFamily="50" charset="-127"/>
                           <a:cs typeface="+mn-cs"/>
                         </a:rPr>
-                        <a:t>117%</a:t>
+                        <a:t>115%</a:t>
                       </a:r>
                     </a:p>
                   </a:txBody>
@@ -13710,7 +13710,7 @@
                           <a:ea typeface="대명체 보통" panose="020B0600000101010101" pitchFamily="50" charset="-127"/>
                           <a:cs typeface="+mn-cs"/>
                         </a:rPr>
-                        <a:t>100,721</a:t>
+                        <a:t>100,960</a:t>
                       </a:r>
                     </a:p>
                   </a:txBody>
@@ -13836,7 +13836,7 @@
                           <a:ea typeface="대명체 보통" panose="020B0600000101010101" pitchFamily="50" charset="-127"/>
                           <a:cs typeface="+mn-cs"/>
                         </a:rPr>
-                        <a:t>45,624</a:t>
+                        <a:t>42,348</a:t>
                       </a:r>
                     </a:p>
                   </a:txBody>
@@ -13903,7 +13903,7 @@
                           <a:ea typeface="대명체 보통" panose="020B0600000101010101" pitchFamily="50" charset="-127"/>
                           <a:cs typeface="+mn-cs"/>
                         </a:rPr>
-                        <a:t>45%</a:t>
+                        <a:t>42%</a:t>
                       </a:r>
                     </a:p>
                   </a:txBody>
@@ -14237,7 +14237,7 @@
                           <a:ea typeface="대명체 보통" panose="020B0600000101010101" pitchFamily="50" charset="-127"/>
                           <a:cs typeface="+mn-cs"/>
                         </a:rPr>
-                        <a:t>17,928</a:t>
+                        <a:t>15,940</a:t>
                       </a:r>
                     </a:p>
                   </a:txBody>
@@ -14355,7 +14355,7 @@
                           <a:ea typeface="대명체 보통" panose="020B0600000101010101" pitchFamily="50" charset="-127"/>
                           <a:cs typeface="+mn-cs"/>
                         </a:rPr>
-                        <a:t>3,325</a:t>
+                        <a:t>1,336</a:t>
                       </a:r>
                       <a:endParaRPr lang="en-US" altLang="ko-KR" sz="700" b="0" i="0" u="none" strike="noStrike" kern="1200" dirty="0">
                         <a:solidFill>
@@ -14427,7 +14427,7 @@
                           <a:ea typeface="대명체 보통" panose="020B0600000101010101" pitchFamily="50" charset="-127"/>
                           <a:cs typeface="+mn-cs"/>
                         </a:rPr>
-                        <a:t>123%</a:t>
+                        <a:t>109%</a:t>
                       </a:r>
                     </a:p>
                   </a:txBody>
@@ -14490,7 +14490,7 @@
                           <a:ea typeface="대명체 보통" panose="020B0600000101010101" pitchFamily="50" charset="-127"/>
                           <a:cs typeface="+mn-cs"/>
                         </a:rPr>
-                        <a:t>11,938</a:t>
+                        <a:t>12,067</a:t>
                       </a:r>
                     </a:p>
                   </a:txBody>
@@ -14608,7 +14608,7 @@
                           <a:ea typeface="대명체 보통" panose="020B0600000101010101" pitchFamily="50" charset="-127"/>
                           <a:cs typeface="+mn-cs"/>
                         </a:rPr>
-                        <a:t>5,991</a:t>
+                        <a:t>3,873</a:t>
                       </a:r>
                     </a:p>
                   </a:txBody>
@@ -14671,7 +14671,7 @@
                           <a:ea typeface="대명체 보통" panose="020B0600000101010101" pitchFamily="50" charset="-127"/>
                           <a:cs typeface="+mn-cs"/>
                         </a:rPr>
-                        <a:t>50%</a:t>
+                        <a:t>32%</a:t>
                       </a:r>
                     </a:p>
                   </a:txBody>
@@ -14900,7 +14900,7 @@
                           <a:ea typeface="대명체 보통" panose="020B0600000101010101" pitchFamily="50" charset="-127"/>
                           <a:cs typeface="+mn-cs"/>
                         </a:rPr>
-                        <a:t>85,650</a:t>
+                        <a:t>83,661</a:t>
                       </a:r>
                     </a:p>
                   </a:txBody>
@@ -15018,7 +15018,7 @@
                           <a:ea typeface="대명체 보통" panose="020B0600000101010101" pitchFamily="50" charset="-127"/>
                           <a:cs typeface="+mn-cs"/>
                         </a:rPr>
-                        <a:t>13,299</a:t>
+                        <a:t>11,310</a:t>
                       </a:r>
                     </a:p>
                   </a:txBody>
@@ -15081,7 +15081,7 @@
                           <a:ea typeface="대명체 보통" panose="020B0600000101010101" pitchFamily="50" charset="-127"/>
                           <a:cs typeface="+mn-cs"/>
                         </a:rPr>
-                        <a:t>118%</a:t>
+                        <a:t>116%</a:t>
                       </a:r>
                     </a:p>
                   </a:txBody>
@@ -15144,7 +15144,7 @@
                           <a:ea typeface="대명체 보통" panose="020B0600000101010101" pitchFamily="50" charset="-127"/>
                           <a:cs typeface="+mn-cs"/>
                         </a:rPr>
-                        <a:t>57,510</a:t>
+                        <a:t>57,640</a:t>
                       </a:r>
                     </a:p>
                   </a:txBody>
@@ -15262,7 +15262,7 @@
                           <a:ea typeface="대명체 보통" panose="020B0600000101010101" pitchFamily="50" charset="-127"/>
                           <a:cs typeface="+mn-cs"/>
                         </a:rPr>
-                        <a:t>28,140</a:t>
+                        <a:t>26,022</a:t>
                       </a:r>
                     </a:p>
                   </a:txBody>
@@ -15325,7 +15325,7 @@
                           <a:ea typeface="대명체 보통" panose="020B0600000101010101" pitchFamily="50" charset="-127"/>
                           <a:cs typeface="+mn-cs"/>
                         </a:rPr>
-                        <a:t>49%</a:t>
+                        <a:t>45%</a:t>
                       </a:r>
                     </a:p>
                   </a:txBody>
@@ -15643,7 +15643,7 @@
                           <a:ea typeface="대명체 보통" panose="020B0600000101010101" pitchFamily="50" charset="-127"/>
                           <a:cs typeface="+mn-cs"/>
                         </a:rPr>
-                        <a:t>11,397</a:t>
+                        <a:t>10,349</a:t>
                       </a:r>
                     </a:p>
                   </a:txBody>
@@ -15753,7 +15753,7 @@
                           <a:ea typeface="대명체 보통" panose="020B0600000101010101" pitchFamily="50" charset="-127"/>
                           <a:cs typeface="+mn-cs"/>
                         </a:rPr>
-                        <a:t>2,540</a:t>
+                        <a:t>1,492</a:t>
                       </a:r>
                       <a:endParaRPr lang="en-US" altLang="ko-KR" sz="700" b="0" i="0" u="none" strike="noStrike" kern="1200" dirty="0">
                         <a:solidFill>
@@ -15821,7 +15821,7 @@
                           <a:ea typeface="대명체 보통" panose="020B0600000101010101" pitchFamily="50" charset="-127"/>
                           <a:cs typeface="+mn-cs"/>
                         </a:rPr>
-                        <a:t>129%</a:t>
+                        <a:t>117%</a:t>
                       </a:r>
                     </a:p>
                   </a:txBody>
@@ -15880,7 +15880,7 @@
                           <a:ea typeface="대명체 보통" panose="020B0600000101010101" pitchFamily="50" charset="-127"/>
                           <a:cs typeface="+mn-cs"/>
                         </a:rPr>
-                        <a:t>7,264</a:t>
+                        <a:t>7,358</a:t>
                       </a:r>
                     </a:p>
                   </a:txBody>
@@ -15990,7 +15990,7 @@
                           <a:ea typeface="대명체 보통" panose="020B0600000101010101" pitchFamily="50" charset="-127"/>
                           <a:cs typeface="+mn-cs"/>
                         </a:rPr>
-                        <a:t>4,133</a:t>
+                        <a:t>2,990</a:t>
                       </a:r>
                     </a:p>
                   </a:txBody>
@@ -16049,7 +16049,7 @@
                           <a:ea typeface="대명체 보통" panose="020B0600000101010101" pitchFamily="50" charset="-127"/>
                           <a:cs typeface="+mn-cs"/>
                         </a:rPr>
-                        <a:t>57%</a:t>
+                        <a:t>41%</a:t>
                       </a:r>
                     </a:p>
                   </a:txBody>
@@ -16266,7 +16266,7 @@
                           <a:ea typeface="대명체 보통" panose="020B0600000101010101" pitchFamily="50" charset="-127"/>
                           <a:cs typeface="+mn-cs"/>
                         </a:rPr>
-                        <a:t>55,492</a:t>
+                        <a:t>54,443</a:t>
                       </a:r>
                     </a:p>
                   </a:txBody>
@@ -16376,7 +16376,7 @@
                           <a:ea typeface="대명체 보통" panose="020B0600000101010101" pitchFamily="50" charset="-127"/>
                           <a:cs typeface="+mn-cs"/>
                         </a:rPr>
-                        <a:t>6,389</a:t>
+                        <a:t>5,340</a:t>
                       </a:r>
                     </a:p>
                   </a:txBody>
@@ -16435,7 +16435,7 @@
                           <a:ea typeface="대명체 보통" panose="020B0600000101010101" pitchFamily="50" charset="-127"/>
                           <a:cs typeface="+mn-cs"/>
                         </a:rPr>
-                        <a:t>113%</a:t>
+                        <a:t>111%</a:t>
                       </a:r>
                     </a:p>
                   </a:txBody>
@@ -16494,7 +16494,7 @@
                           <a:ea typeface="대명체 보통" panose="020B0600000101010101" pitchFamily="50" charset="-127"/>
                           <a:cs typeface="+mn-cs"/>
                         </a:rPr>
-                        <a:t>40,017</a:t>
+                        <a:t>40,111</a:t>
                       </a:r>
                     </a:p>
                   </a:txBody>
@@ -16604,7 +16604,7 @@
                           <a:ea typeface="대명체 보통" panose="020B0600000101010101" pitchFamily="50" charset="-127"/>
                           <a:cs typeface="+mn-cs"/>
                         </a:rPr>
-                        <a:t>15,474</a:t>
+                        <a:t>14,332</a:t>
                       </a:r>
                     </a:p>
                   </a:txBody>
@@ -16663,7 +16663,7 @@
                           <a:ea typeface="대명체 보통" panose="020B0600000101010101" pitchFamily="50" charset="-127"/>
                           <a:cs typeface="+mn-cs"/>
                         </a:rPr>
-                        <a:t>39%</a:t>
+                        <a:t>36%</a:t>
                       </a:r>
                     </a:p>
                   </a:txBody>
@@ -17261,7 +17261,7 @@
                           <a:ea typeface="대명체 보통" panose="020B0600000101010101" pitchFamily="50" charset="-127"/>
                           <a:cs typeface="+mn-cs"/>
                         </a:rPr>
-                        <a:t>356</a:t>
+                        <a:t>371</a:t>
                       </a:r>
                       <a:endParaRPr lang="en-US" altLang="ko-KR" sz="700" b="0" i="0" u="none" strike="noStrike" kern="1200" dirty="0">
                         <a:solidFill>
@@ -17388,7 +17388,7 @@
                           <a:ea typeface="대명체 보통" panose="020B0600000101010101" pitchFamily="50" charset="-127"/>
                           <a:cs typeface="+mn-cs"/>
                         </a:rPr>
-                        <a:t>195</a:t>
+                        <a:t>179</a:t>
                       </a:r>
                     </a:p>
                   </a:txBody>
@@ -17451,7 +17451,7 @@
                           <a:ea typeface="대명체 보통" panose="020B0600000101010101" pitchFamily="50" charset="-127"/>
                           <a:cs typeface="+mn-cs"/>
                         </a:rPr>
-                        <a:t>55%</a:t>
+                        <a:t>48%</a:t>
                       </a:r>
                     </a:p>
                   </a:txBody>
@@ -17798,7 +17798,7 @@
                           <a:ea typeface="대명체 보통" panose="020B0600000101010101" pitchFamily="50" charset="-127"/>
                           <a:cs typeface="+mn-cs"/>
                         </a:rPr>
-                        <a:t>1,736</a:t>
+                        <a:t>1,737</a:t>
                       </a:r>
                       <a:endParaRPr lang="en-US" altLang="ko-KR" sz="700" b="0" i="0" u="none" strike="noStrike" kern="1200" dirty="0">
                         <a:solidFill>
@@ -17933,7 +17933,7 @@
                           <a:ea typeface="대명체 보통" panose="020B0600000101010101" pitchFamily="50" charset="-127"/>
                           <a:cs typeface="+mn-cs"/>
                         </a:rPr>
-                        <a:t>3,194</a:t>
+                        <a:t>3,209</a:t>
                       </a:r>
                     </a:p>
                   </a:txBody>
@@ -18051,7 +18051,7 @@
                           <a:ea typeface="대명체 보통" panose="020B0600000101010101" pitchFamily="50" charset="-127"/>
                           <a:cs typeface="+mn-cs"/>
                         </a:rPr>
-                        <a:t>2,010</a:t>
+                        <a:t>1,995</a:t>
                       </a:r>
                     </a:p>
                   </a:txBody>
@@ -18114,7 +18114,7 @@
                           <a:ea typeface="대명체 보통" panose="020B0600000101010101" pitchFamily="50" charset="-127"/>
                           <a:cs typeface="+mn-cs"/>
                         </a:rPr>
-                        <a:t>63%</a:t>
+                        <a:t>62%</a:t>
                       </a:r>
                     </a:p>
                   </a:txBody>

--- a/data/세일즈마케팅_예상매출현황.pptx
+++ b/data/세일즈마케팅_예상매출현황.pptx
@@ -12756,7 +12756,7 @@
                           <a:ea typeface="대명체 보통" panose="020B0600000101010101" pitchFamily="50" charset="-127"/>
                           <a:cs typeface="+mn-cs"/>
                         </a:rPr>
-                        <a:t>26,839</a:t>
+                        <a:t>26,524</a:t>
                       </a:r>
                     </a:p>
                   </a:txBody>
@@ -12882,7 +12882,7 @@
                           <a:ea typeface="대명체 보통" panose="020B0600000101010101" pitchFamily="50" charset="-127"/>
                           <a:cs typeface="+mn-cs"/>
                         </a:rPr>
-                        <a:t>2,979</a:t>
+                        <a:t>2,665</a:t>
                       </a:r>
                     </a:p>
                   </a:txBody>
@@ -12949,7 +12949,7 @@
                           <a:ea typeface="대명체 보통" panose="020B0600000101010101" pitchFamily="50" charset="-127"/>
                           <a:cs typeface="+mn-cs"/>
                         </a:rPr>
-                        <a:t>112%</a:t>
+                        <a:t>111%</a:t>
                       </a:r>
                     </a:p>
                   </a:txBody>
@@ -13016,7 +13016,7 @@
                           <a:ea typeface="대명체 보통" panose="020B0600000101010101" pitchFamily="50" charset="-127"/>
                           <a:cs typeface="+mn-cs"/>
                         </a:rPr>
-                        <a:t>19,796</a:t>
+                        <a:t>20,057</a:t>
                       </a:r>
                     </a:p>
                   </a:txBody>
@@ -13142,7 +13142,7 @@
                           <a:ea typeface="대명체 보통" panose="020B0600000101010101" pitchFamily="50" charset="-127"/>
                           <a:cs typeface="+mn-cs"/>
                         </a:rPr>
-                        <a:t>7,043</a:t>
+                        <a:t>6,468</a:t>
                       </a:r>
                     </a:p>
                   </a:txBody>
@@ -13209,7 +13209,7 @@
                           <a:ea typeface="대명체 보통" panose="020B0600000101010101" pitchFamily="50" charset="-127"/>
                           <a:cs typeface="+mn-cs"/>
                         </a:rPr>
-                        <a:t>36%</a:t>
+                        <a:t>32%</a:t>
                       </a:r>
                     </a:p>
                   </a:txBody>
@@ -13450,7 +13450,7 @@
                           <a:ea typeface="대명체 보통" panose="020B0600000101010101" pitchFamily="50" charset="-127"/>
                           <a:cs typeface="+mn-cs"/>
                         </a:rPr>
-                        <a:t>143,308</a:t>
+                        <a:t>142,994</a:t>
                       </a:r>
                     </a:p>
                   </a:txBody>
@@ -13576,7 +13576,7 @@
                           <a:ea typeface="대명체 보통" panose="020B0600000101010101" pitchFamily="50" charset="-127"/>
                           <a:cs typeface="+mn-cs"/>
                         </a:rPr>
-                        <a:t>18,387</a:t>
+                        <a:t>18,073</a:t>
                       </a:r>
                     </a:p>
                   </a:txBody>
@@ -13643,7 +13643,7 @@
                           <a:ea typeface="대명체 보통" panose="020B0600000101010101" pitchFamily="50" charset="-127"/>
                           <a:cs typeface="+mn-cs"/>
                         </a:rPr>
-                        <a:t>115%</a:t>
+                        <a:t>114%</a:t>
                       </a:r>
                     </a:p>
                   </a:txBody>
@@ -13710,7 +13710,7 @@
                           <a:ea typeface="대명체 보통" panose="020B0600000101010101" pitchFamily="50" charset="-127"/>
                           <a:cs typeface="+mn-cs"/>
                         </a:rPr>
-                        <a:t>100,960</a:t>
+                        <a:t>101,221</a:t>
                       </a:r>
                     </a:p>
                   </a:txBody>
@@ -13836,7 +13836,7 @@
                           <a:ea typeface="대명체 보통" panose="020B0600000101010101" pitchFamily="50" charset="-127"/>
                           <a:cs typeface="+mn-cs"/>
                         </a:rPr>
-                        <a:t>42,348</a:t>
+                        <a:t>41,773</a:t>
                       </a:r>
                     </a:p>
                   </a:txBody>
@@ -13903,7 +13903,7 @@
                           <a:ea typeface="대명체 보통" panose="020B0600000101010101" pitchFamily="50" charset="-127"/>
                           <a:cs typeface="+mn-cs"/>
                         </a:rPr>
-                        <a:t>42%</a:t>
+                        <a:t>41%</a:t>
                       </a:r>
                     </a:p>
                   </a:txBody>
@@ -14237,7 +14237,7 @@
                           <a:ea typeface="대명체 보통" panose="020B0600000101010101" pitchFamily="50" charset="-127"/>
                           <a:cs typeface="+mn-cs"/>
                         </a:rPr>
-                        <a:t>15,940</a:t>
+                        <a:t>15,765</a:t>
                       </a:r>
                     </a:p>
                   </a:txBody>
@@ -14355,7 +14355,7 @@
                           <a:ea typeface="대명체 보통" panose="020B0600000101010101" pitchFamily="50" charset="-127"/>
                           <a:cs typeface="+mn-cs"/>
                         </a:rPr>
-                        <a:t>1,336</a:t>
+                        <a:t>1,162</a:t>
                       </a:r>
                       <a:endParaRPr lang="en-US" altLang="ko-KR" sz="700" b="0" i="0" u="none" strike="noStrike" kern="1200" dirty="0">
                         <a:solidFill>
@@ -14427,7 +14427,7 @@
                           <a:ea typeface="대명체 보통" panose="020B0600000101010101" pitchFamily="50" charset="-127"/>
                           <a:cs typeface="+mn-cs"/>
                         </a:rPr>
-                        <a:t>109%</a:t>
+                        <a:t>108%</a:t>
                       </a:r>
                     </a:p>
                   </a:txBody>
@@ -14490,7 +14490,7 @@
                           <a:ea typeface="대명체 보통" panose="020B0600000101010101" pitchFamily="50" charset="-127"/>
                           <a:cs typeface="+mn-cs"/>
                         </a:rPr>
-                        <a:t>12,067</a:t>
+                        <a:t>12,251</a:t>
                       </a:r>
                     </a:p>
                   </a:txBody>
@@ -14608,7 +14608,7 @@
                           <a:ea typeface="대명체 보통" panose="020B0600000101010101" pitchFamily="50" charset="-127"/>
                           <a:cs typeface="+mn-cs"/>
                         </a:rPr>
-                        <a:t>3,873</a:t>
+                        <a:t>3,514</a:t>
                       </a:r>
                     </a:p>
                   </a:txBody>
@@ -14671,7 +14671,7 @@
                           <a:ea typeface="대명체 보통" panose="020B0600000101010101" pitchFamily="50" charset="-127"/>
                           <a:cs typeface="+mn-cs"/>
                         </a:rPr>
-                        <a:t>32%</a:t>
+                        <a:t>29%</a:t>
                       </a:r>
                     </a:p>
                   </a:txBody>
@@ -14900,7 +14900,7 @@
                           <a:ea typeface="대명체 보통" panose="020B0600000101010101" pitchFamily="50" charset="-127"/>
                           <a:cs typeface="+mn-cs"/>
                         </a:rPr>
-                        <a:t>83,661</a:t>
+                        <a:t>83,487</a:t>
                       </a:r>
                     </a:p>
                   </a:txBody>
@@ -15018,7 +15018,7 @@
                           <a:ea typeface="대명체 보통" panose="020B0600000101010101" pitchFamily="50" charset="-127"/>
                           <a:cs typeface="+mn-cs"/>
                         </a:rPr>
-                        <a:t>11,310</a:t>
+                        <a:t>11,136</a:t>
                       </a:r>
                     </a:p>
                   </a:txBody>
@@ -15081,7 +15081,7 @@
                           <a:ea typeface="대명체 보통" panose="020B0600000101010101" pitchFamily="50" charset="-127"/>
                           <a:cs typeface="+mn-cs"/>
                         </a:rPr>
-                        <a:t>116%</a:t>
+                        <a:t>115%</a:t>
                       </a:r>
                     </a:p>
                   </a:txBody>
@@ -15144,7 +15144,7 @@
                           <a:ea typeface="대명체 보통" panose="020B0600000101010101" pitchFamily="50" charset="-127"/>
                           <a:cs typeface="+mn-cs"/>
                         </a:rPr>
-                        <a:t>57,640</a:t>
+                        <a:t>57,824</a:t>
                       </a:r>
                     </a:p>
                   </a:txBody>
@@ -15262,7 +15262,7 @@
                           <a:ea typeface="대명체 보통" panose="020B0600000101010101" pitchFamily="50" charset="-127"/>
                           <a:cs typeface="+mn-cs"/>
                         </a:rPr>
-                        <a:t>26,022</a:t>
+                        <a:t>25,663</a:t>
                       </a:r>
                     </a:p>
                   </a:txBody>
@@ -15325,7 +15325,7 @@
                           <a:ea typeface="대명체 보통" panose="020B0600000101010101" pitchFamily="50" charset="-127"/>
                           <a:cs typeface="+mn-cs"/>
                         </a:rPr>
-                        <a:t>45%</a:t>
+                        <a:t>44%</a:t>
                       </a:r>
                     </a:p>
                   </a:txBody>
@@ -15643,7 +15643,7 @@
                           <a:ea typeface="대명체 보통" panose="020B0600000101010101" pitchFamily="50" charset="-127"/>
                           <a:cs typeface="+mn-cs"/>
                         </a:rPr>
-                        <a:t>10,349</a:t>
+                        <a:t>10,214</a:t>
                       </a:r>
                     </a:p>
                   </a:txBody>
@@ -15753,7 +15753,7 @@
                           <a:ea typeface="대명체 보통" panose="020B0600000101010101" pitchFamily="50" charset="-127"/>
                           <a:cs typeface="+mn-cs"/>
                         </a:rPr>
-                        <a:t>1,492</a:t>
+                        <a:t>1,357</a:t>
                       </a:r>
                       <a:endParaRPr lang="en-US" altLang="ko-KR" sz="700" b="0" i="0" u="none" strike="noStrike" kern="1200" dirty="0">
                         <a:solidFill>
@@ -15821,7 +15821,7 @@
                           <a:ea typeface="대명체 보통" panose="020B0600000101010101" pitchFamily="50" charset="-127"/>
                           <a:cs typeface="+mn-cs"/>
                         </a:rPr>
-                        <a:t>117%</a:t>
+                        <a:t>115%</a:t>
                       </a:r>
                     </a:p>
                   </a:txBody>
@@ -15880,7 +15880,7 @@
                           <a:ea typeface="대명체 보통" panose="020B0600000101010101" pitchFamily="50" charset="-127"/>
                           <a:cs typeface="+mn-cs"/>
                         </a:rPr>
-                        <a:t>7,358</a:t>
+                        <a:t>7,432</a:t>
                       </a:r>
                     </a:p>
                   </a:txBody>
@@ -15990,7 +15990,7 @@
                           <a:ea typeface="대명체 보통" panose="020B0600000101010101" pitchFamily="50" charset="-127"/>
                           <a:cs typeface="+mn-cs"/>
                         </a:rPr>
-                        <a:t>2,990</a:t>
+                        <a:t>2,782</a:t>
                       </a:r>
                     </a:p>
                   </a:txBody>
@@ -16049,7 +16049,7 @@
                           <a:ea typeface="대명체 보통" panose="020B0600000101010101" pitchFamily="50" charset="-127"/>
                           <a:cs typeface="+mn-cs"/>
                         </a:rPr>
-                        <a:t>41%</a:t>
+                        <a:t>37%</a:t>
                       </a:r>
                     </a:p>
                   </a:txBody>
@@ -16266,7 +16266,7 @@
                           <a:ea typeface="대명체 보통" panose="020B0600000101010101" pitchFamily="50" charset="-127"/>
                           <a:cs typeface="+mn-cs"/>
                         </a:rPr>
-                        <a:t>54,443</a:t>
+                        <a:t>54,309</a:t>
                       </a:r>
                     </a:p>
                   </a:txBody>
@@ -16376,7 +16376,7 @@
                           <a:ea typeface="대명체 보통" panose="020B0600000101010101" pitchFamily="50" charset="-127"/>
                           <a:cs typeface="+mn-cs"/>
                         </a:rPr>
-                        <a:t>5,340</a:t>
+                        <a:t>5,206</a:t>
                       </a:r>
                     </a:p>
                   </a:txBody>
@@ -16494,7 +16494,7 @@
                           <a:ea typeface="대명체 보통" panose="020B0600000101010101" pitchFamily="50" charset="-127"/>
                           <a:cs typeface="+mn-cs"/>
                         </a:rPr>
-                        <a:t>40,111</a:t>
+                        <a:t>40,185</a:t>
                       </a:r>
                     </a:p>
                   </a:txBody>
@@ -16604,7 +16604,7 @@
                           <a:ea typeface="대명체 보통" panose="020B0600000101010101" pitchFamily="50" charset="-127"/>
                           <a:cs typeface="+mn-cs"/>
                         </a:rPr>
-                        <a:t>14,332</a:t>
+                        <a:t>14,124</a:t>
                       </a:r>
                     </a:p>
                   </a:txBody>
@@ -16663,7 +16663,7 @@
                           <a:ea typeface="대명체 보통" panose="020B0600000101010101" pitchFamily="50" charset="-127"/>
                           <a:cs typeface="+mn-cs"/>
                         </a:rPr>
-                        <a:t>36%</a:t>
+                        <a:t>35%</a:t>
                       </a:r>
                     </a:p>
                   </a:txBody>
@@ -16999,7 +16999,7 @@
                           <a:ea typeface="대명체 보통" panose="020B0600000101010101" pitchFamily="50" charset="-127"/>
                           <a:cs typeface="+mn-cs"/>
                         </a:rPr>
-                        <a:t>550</a:t>
+                        <a:t>545</a:t>
                       </a:r>
                       <a:endParaRPr lang="en-US" altLang="ko-KR" sz="700" b="0" i="0" u="none" strike="noStrike" kern="1200" dirty="0">
                         <a:solidFill>
@@ -17126,7 +17126,7 @@
                           <a:ea typeface="대명체 보통" panose="020B0600000101010101" pitchFamily="50" charset="-127"/>
                           <a:cs typeface="+mn-cs"/>
                         </a:rPr>
-                        <a:t>151</a:t>
+                        <a:t>146</a:t>
                       </a:r>
                       <a:endParaRPr lang="en-US" altLang="ko-KR" sz="700" b="0" i="0" u="none" strike="noStrike" kern="1200" dirty="0">
                         <a:solidFill>
@@ -17198,7 +17198,7 @@
                           <a:ea typeface="대명체 보통" panose="020B0600000101010101" pitchFamily="50" charset="-127"/>
                           <a:cs typeface="+mn-cs"/>
                         </a:rPr>
-                        <a:t>138%</a:t>
+                        <a:t>137%</a:t>
                       </a:r>
                     </a:p>
                   </a:txBody>
@@ -17261,7 +17261,7 @@
                           <a:ea typeface="대명체 보통" panose="020B0600000101010101" pitchFamily="50" charset="-127"/>
                           <a:cs typeface="+mn-cs"/>
                         </a:rPr>
-                        <a:t>371</a:t>
+                        <a:t>373</a:t>
                       </a:r>
                       <a:endParaRPr lang="en-US" altLang="ko-KR" sz="700" b="0" i="0" u="none" strike="noStrike" kern="1200" dirty="0">
                         <a:solidFill>
@@ -17388,7 +17388,7 @@
                           <a:ea typeface="대명체 보통" panose="020B0600000101010101" pitchFamily="50" charset="-127"/>
                           <a:cs typeface="+mn-cs"/>
                         </a:rPr>
-                        <a:t>179</a:t>
+                        <a:t>172</a:t>
                       </a:r>
                     </a:p>
                   </a:txBody>
@@ -17451,7 +17451,7 @@
                           <a:ea typeface="대명체 보통" panose="020B0600000101010101" pitchFamily="50" charset="-127"/>
                           <a:cs typeface="+mn-cs"/>
                         </a:rPr>
-                        <a:t>48%</a:t>
+                        <a:t>46%</a:t>
                       </a:r>
                     </a:p>
                   </a:txBody>
@@ -17680,7 +17680,7 @@
                           <a:ea typeface="대명체 보통" panose="020B0600000101010101" pitchFamily="50" charset="-127"/>
                           <a:cs typeface="+mn-cs"/>
                         </a:rPr>
-                        <a:t>5,204</a:t>
+                        <a:t>5,198</a:t>
                       </a:r>
                     </a:p>
                   </a:txBody>
@@ -17798,7 +17798,7 @@
                           <a:ea typeface="대명체 보통" panose="020B0600000101010101" pitchFamily="50" charset="-127"/>
                           <a:cs typeface="+mn-cs"/>
                         </a:rPr>
-                        <a:t>1,737</a:t>
+                        <a:t>1,731</a:t>
                       </a:r>
                       <a:endParaRPr lang="en-US" altLang="ko-KR" sz="700" b="0" i="0" u="none" strike="noStrike" kern="1200" dirty="0">
                         <a:solidFill>
@@ -17933,7 +17933,7 @@
                           <a:ea typeface="대명체 보통" panose="020B0600000101010101" pitchFamily="50" charset="-127"/>
                           <a:cs typeface="+mn-cs"/>
                         </a:rPr>
-                        <a:t>3,209</a:t>
+                        <a:t>3,212</a:t>
                       </a:r>
                     </a:p>
                   </a:txBody>
@@ -18051,7 +18051,7 @@
                           <a:ea typeface="대명체 보통" panose="020B0600000101010101" pitchFamily="50" charset="-127"/>
                           <a:cs typeface="+mn-cs"/>
                         </a:rPr>
-                        <a:t>1,995</a:t>
+                        <a:t>1,987</a:t>
                       </a:r>
                     </a:p>
                   </a:txBody>

--- a/data/세일즈마케팅_예상매출현황.pptx
+++ b/data/세일즈마케팅_예상매출현황.pptx
@@ -12756,7 +12756,7 @@
                           <a:ea typeface="대명체 보통" panose="020B0600000101010101" pitchFamily="50" charset="-127"/>
                           <a:cs typeface="+mn-cs"/>
                         </a:rPr>
-                        <a:t>26,524</a:t>
+                        <a:t>26,009</a:t>
                       </a:r>
                     </a:p>
                   </a:txBody>
@@ -12882,7 +12882,7 @@
                           <a:ea typeface="대명체 보통" panose="020B0600000101010101" pitchFamily="50" charset="-127"/>
                           <a:cs typeface="+mn-cs"/>
                         </a:rPr>
-                        <a:t>2,665</a:t>
+                        <a:t>2,150</a:t>
                       </a:r>
                     </a:p>
                   </a:txBody>
@@ -12949,7 +12949,7 @@
                           <a:ea typeface="대명체 보통" panose="020B0600000101010101" pitchFamily="50" charset="-127"/>
                           <a:cs typeface="+mn-cs"/>
                         </a:rPr>
-                        <a:t>111%</a:t>
+                        <a:t>109%</a:t>
                       </a:r>
                     </a:p>
                   </a:txBody>
@@ -13016,7 +13016,7 @@
                           <a:ea typeface="대명체 보통" panose="020B0600000101010101" pitchFamily="50" charset="-127"/>
                           <a:cs typeface="+mn-cs"/>
                         </a:rPr>
-                        <a:t>20,057</a:t>
+                        <a:t>20,534</a:t>
                       </a:r>
                     </a:p>
                   </a:txBody>
@@ -13142,7 +13142,7 @@
                           <a:ea typeface="대명체 보통" panose="020B0600000101010101" pitchFamily="50" charset="-127"/>
                           <a:cs typeface="+mn-cs"/>
                         </a:rPr>
-                        <a:t>6,468</a:t>
+                        <a:t>5,475</a:t>
                       </a:r>
                     </a:p>
                   </a:txBody>
@@ -13209,7 +13209,7 @@
                           <a:ea typeface="대명체 보통" panose="020B0600000101010101" pitchFamily="50" charset="-127"/>
                           <a:cs typeface="+mn-cs"/>
                         </a:rPr>
-                        <a:t>32%</a:t>
+                        <a:t>27%</a:t>
                       </a:r>
                     </a:p>
                   </a:txBody>
@@ -13450,7 +13450,7 @@
                           <a:ea typeface="대명체 보통" panose="020B0600000101010101" pitchFamily="50" charset="-127"/>
                           <a:cs typeface="+mn-cs"/>
                         </a:rPr>
-                        <a:t>142,994</a:t>
+                        <a:t>142,479</a:t>
                       </a:r>
                     </a:p>
                   </a:txBody>
@@ -13576,7 +13576,7 @@
                           <a:ea typeface="대명체 보통" panose="020B0600000101010101" pitchFamily="50" charset="-127"/>
                           <a:cs typeface="+mn-cs"/>
                         </a:rPr>
-                        <a:t>18,073</a:t>
+                        <a:t>17,557</a:t>
                       </a:r>
                     </a:p>
                   </a:txBody>
@@ -13710,7 +13710,7 @@
                           <a:ea typeface="대명체 보통" panose="020B0600000101010101" pitchFamily="50" charset="-127"/>
                           <a:cs typeface="+mn-cs"/>
                         </a:rPr>
-                        <a:t>101,221</a:t>
+                        <a:t>101,698</a:t>
                       </a:r>
                     </a:p>
                   </a:txBody>
@@ -13836,7 +13836,7 @@
                           <a:ea typeface="대명체 보통" panose="020B0600000101010101" pitchFamily="50" charset="-127"/>
                           <a:cs typeface="+mn-cs"/>
                         </a:rPr>
-                        <a:t>41,773</a:t>
+                        <a:t>40,780</a:t>
                       </a:r>
                     </a:p>
                   </a:txBody>
@@ -13903,7 +13903,7 @@
                           <a:ea typeface="대명체 보통" panose="020B0600000101010101" pitchFamily="50" charset="-127"/>
                           <a:cs typeface="+mn-cs"/>
                         </a:rPr>
-                        <a:t>41%</a:t>
+                        <a:t>40%</a:t>
                       </a:r>
                     </a:p>
                   </a:txBody>
@@ -14237,7 +14237,7 @@
                           <a:ea typeface="대명체 보통" panose="020B0600000101010101" pitchFamily="50" charset="-127"/>
                           <a:cs typeface="+mn-cs"/>
                         </a:rPr>
-                        <a:t>15,765</a:t>
+                        <a:t>15,504</a:t>
                       </a:r>
                     </a:p>
                   </a:txBody>
@@ -14355,7 +14355,7 @@
                           <a:ea typeface="대명체 보통" panose="020B0600000101010101" pitchFamily="50" charset="-127"/>
                           <a:cs typeface="+mn-cs"/>
                         </a:rPr>
-                        <a:t>1,162</a:t>
+                        <a:t>900</a:t>
                       </a:r>
                       <a:endParaRPr lang="en-US" altLang="ko-KR" sz="700" b="0" i="0" u="none" strike="noStrike" kern="1200" dirty="0">
                         <a:solidFill>
@@ -14427,7 +14427,7 @@
                           <a:ea typeface="대명체 보통" panose="020B0600000101010101" pitchFamily="50" charset="-127"/>
                           <a:cs typeface="+mn-cs"/>
                         </a:rPr>
-                        <a:t>108%</a:t>
+                        <a:t>106%</a:t>
                       </a:r>
                     </a:p>
                   </a:txBody>
@@ -14490,7 +14490,7 @@
                           <a:ea typeface="대명체 보통" panose="020B0600000101010101" pitchFamily="50" charset="-127"/>
                           <a:cs typeface="+mn-cs"/>
                         </a:rPr>
-                        <a:t>12,251</a:t>
+                        <a:t>12,597</a:t>
                       </a:r>
                     </a:p>
                   </a:txBody>
@@ -14608,7 +14608,7 @@
                           <a:ea typeface="대명체 보통" panose="020B0600000101010101" pitchFamily="50" charset="-127"/>
                           <a:cs typeface="+mn-cs"/>
                         </a:rPr>
-                        <a:t>3,514</a:t>
+                        <a:t>2,907</a:t>
                       </a:r>
                     </a:p>
                   </a:txBody>
@@ -14671,7 +14671,7 @@
                           <a:ea typeface="대명체 보통" panose="020B0600000101010101" pitchFamily="50" charset="-127"/>
                           <a:cs typeface="+mn-cs"/>
                         </a:rPr>
-                        <a:t>29%</a:t>
+                        <a:t>23%</a:t>
                       </a:r>
                     </a:p>
                   </a:txBody>
@@ -14900,7 +14900,7 @@
                           <a:ea typeface="대명체 보통" panose="020B0600000101010101" pitchFamily="50" charset="-127"/>
                           <a:cs typeface="+mn-cs"/>
                         </a:rPr>
-                        <a:t>83,487</a:t>
+                        <a:t>83,225</a:t>
                       </a:r>
                     </a:p>
                   </a:txBody>
@@ -15018,7 +15018,7 @@
                           <a:ea typeface="대명체 보통" panose="020B0600000101010101" pitchFamily="50" charset="-127"/>
                           <a:cs typeface="+mn-cs"/>
                         </a:rPr>
-                        <a:t>11,136</a:t>
+                        <a:t>10,874</a:t>
                       </a:r>
                     </a:p>
                   </a:txBody>
@@ -15144,7 +15144,7 @@
                           <a:ea typeface="대명체 보통" panose="020B0600000101010101" pitchFamily="50" charset="-127"/>
                           <a:cs typeface="+mn-cs"/>
                         </a:rPr>
-                        <a:t>57,824</a:t>
+                        <a:t>58,169</a:t>
                       </a:r>
                     </a:p>
                   </a:txBody>
@@ -15262,7 +15262,7 @@
                           <a:ea typeface="대명체 보통" panose="020B0600000101010101" pitchFamily="50" charset="-127"/>
                           <a:cs typeface="+mn-cs"/>
                         </a:rPr>
-                        <a:t>25,663</a:t>
+                        <a:t>25,056</a:t>
                       </a:r>
                     </a:p>
                   </a:txBody>
@@ -15325,7 +15325,7 @@
                           <a:ea typeface="대명체 보통" panose="020B0600000101010101" pitchFamily="50" charset="-127"/>
                           <a:cs typeface="+mn-cs"/>
                         </a:rPr>
-                        <a:t>44%</a:t>
+                        <a:t>43%</a:t>
                       </a:r>
                     </a:p>
                   </a:txBody>
@@ -15643,7 +15643,7 @@
                           <a:ea typeface="대명체 보통" panose="020B0600000101010101" pitchFamily="50" charset="-127"/>
                           <a:cs typeface="+mn-cs"/>
                         </a:rPr>
-                        <a:t>10,214</a:t>
+                        <a:t>9,977</a:t>
                       </a:r>
                     </a:p>
                   </a:txBody>
@@ -15753,7 +15753,7 @@
                           <a:ea typeface="대명체 보통" panose="020B0600000101010101" pitchFamily="50" charset="-127"/>
                           <a:cs typeface="+mn-cs"/>
                         </a:rPr>
-                        <a:t>1,357</a:t>
+                        <a:t>1,120</a:t>
                       </a:r>
                       <a:endParaRPr lang="en-US" altLang="ko-KR" sz="700" b="0" i="0" u="none" strike="noStrike" kern="1200" dirty="0">
                         <a:solidFill>
@@ -15821,7 +15821,7 @@
                           <a:ea typeface="대명체 보통" panose="020B0600000101010101" pitchFamily="50" charset="-127"/>
                           <a:cs typeface="+mn-cs"/>
                         </a:rPr>
-                        <a:t>115%</a:t>
+                        <a:t>113%</a:t>
                       </a:r>
                     </a:p>
                   </a:txBody>
@@ -15880,7 +15880,7 @@
                           <a:ea typeface="대명체 보통" panose="020B0600000101010101" pitchFamily="50" charset="-127"/>
                           <a:cs typeface="+mn-cs"/>
                         </a:rPr>
-                        <a:t>7,432</a:t>
+                        <a:t>7,556</a:t>
                       </a:r>
                     </a:p>
                   </a:txBody>
@@ -15990,7 +15990,7 @@
                           <a:ea typeface="대명체 보통" panose="020B0600000101010101" pitchFamily="50" charset="-127"/>
                           <a:cs typeface="+mn-cs"/>
                         </a:rPr>
-                        <a:t>2,782</a:t>
+                        <a:t>2,421</a:t>
                       </a:r>
                     </a:p>
                   </a:txBody>
@@ -16049,7 +16049,7 @@
                           <a:ea typeface="대명체 보통" panose="020B0600000101010101" pitchFamily="50" charset="-127"/>
                           <a:cs typeface="+mn-cs"/>
                         </a:rPr>
-                        <a:t>37%</a:t>
+                        <a:t>32%</a:t>
                       </a:r>
                     </a:p>
                   </a:txBody>
@@ -16266,7 +16266,7 @@
                           <a:ea typeface="대명체 보통" panose="020B0600000101010101" pitchFamily="50" charset="-127"/>
                           <a:cs typeface="+mn-cs"/>
                         </a:rPr>
-                        <a:t>54,309</a:t>
+                        <a:t>54,072</a:t>
                       </a:r>
                     </a:p>
                   </a:txBody>
@@ -16376,7 +16376,7 @@
                           <a:ea typeface="대명체 보통" panose="020B0600000101010101" pitchFamily="50" charset="-127"/>
                           <a:cs typeface="+mn-cs"/>
                         </a:rPr>
-                        <a:t>5,206</a:t>
+                        <a:t>4,969</a:t>
                       </a:r>
                     </a:p>
                   </a:txBody>
@@ -16435,7 +16435,7 @@
                           <a:ea typeface="대명체 보통" panose="020B0600000101010101" pitchFamily="50" charset="-127"/>
                           <a:cs typeface="+mn-cs"/>
                         </a:rPr>
-                        <a:t>111%</a:t>
+                        <a:t>110%</a:t>
                       </a:r>
                     </a:p>
                   </a:txBody>
@@ -16494,7 +16494,7 @@
                           <a:ea typeface="대명체 보통" panose="020B0600000101010101" pitchFamily="50" charset="-127"/>
                           <a:cs typeface="+mn-cs"/>
                         </a:rPr>
-                        <a:t>40,185</a:t>
+                        <a:t>40,309</a:t>
                       </a:r>
                     </a:p>
                   </a:txBody>
@@ -16604,7 +16604,7 @@
                           <a:ea typeface="대명체 보통" panose="020B0600000101010101" pitchFamily="50" charset="-127"/>
                           <a:cs typeface="+mn-cs"/>
                         </a:rPr>
-                        <a:t>14,124</a:t>
+                        <a:t>13,763</a:t>
                       </a:r>
                     </a:p>
                   </a:txBody>
@@ -16663,7 +16663,7 @@
                           <a:ea typeface="대명체 보통" panose="020B0600000101010101" pitchFamily="50" charset="-127"/>
                           <a:cs typeface="+mn-cs"/>
                         </a:rPr>
-                        <a:t>35%</a:t>
+                        <a:t>34%</a:t>
                       </a:r>
                     </a:p>
                   </a:txBody>
@@ -16999,7 +16999,7 @@
                           <a:ea typeface="대명체 보통" panose="020B0600000101010101" pitchFamily="50" charset="-127"/>
                           <a:cs typeface="+mn-cs"/>
                         </a:rPr>
-                        <a:t>545</a:t>
+                        <a:t>528</a:t>
                       </a:r>
                       <a:endParaRPr lang="en-US" altLang="ko-KR" sz="700" b="0" i="0" u="none" strike="noStrike" kern="1200" dirty="0">
                         <a:solidFill>
@@ -17126,7 +17126,7 @@
                           <a:ea typeface="대명체 보통" panose="020B0600000101010101" pitchFamily="50" charset="-127"/>
                           <a:cs typeface="+mn-cs"/>
                         </a:rPr>
-                        <a:t>146</a:t>
+                        <a:t>129</a:t>
                       </a:r>
                       <a:endParaRPr lang="en-US" altLang="ko-KR" sz="700" b="0" i="0" u="none" strike="noStrike" kern="1200" dirty="0">
                         <a:solidFill>
@@ -17198,7 +17198,7 @@
                           <a:ea typeface="대명체 보통" panose="020B0600000101010101" pitchFamily="50" charset="-127"/>
                           <a:cs typeface="+mn-cs"/>
                         </a:rPr>
-                        <a:t>137%</a:t>
+                        <a:t>132%</a:t>
                       </a:r>
                     </a:p>
                   </a:txBody>
@@ -17261,7 +17261,7 @@
                           <a:ea typeface="대명체 보통" panose="020B0600000101010101" pitchFamily="50" charset="-127"/>
                           <a:cs typeface="+mn-cs"/>
                         </a:rPr>
-                        <a:t>373</a:t>
+                        <a:t>382</a:t>
                       </a:r>
                       <a:endParaRPr lang="en-US" altLang="ko-KR" sz="700" b="0" i="0" u="none" strike="noStrike" kern="1200" dirty="0">
                         <a:solidFill>
@@ -17388,7 +17388,7 @@
                           <a:ea typeface="대명체 보통" panose="020B0600000101010101" pitchFamily="50" charset="-127"/>
                           <a:cs typeface="+mn-cs"/>
                         </a:rPr>
-                        <a:t>172</a:t>
+                        <a:t>146</a:t>
                       </a:r>
                     </a:p>
                   </a:txBody>
@@ -17451,7 +17451,7 @@
                           <a:ea typeface="대명체 보통" panose="020B0600000101010101" pitchFamily="50" charset="-127"/>
                           <a:cs typeface="+mn-cs"/>
                         </a:rPr>
-                        <a:t>46%</a:t>
+                        <a:t>38%</a:t>
                       </a:r>
                     </a:p>
                   </a:txBody>
@@ -17680,7 +17680,7 @@
                           <a:ea typeface="대명체 보통" panose="020B0600000101010101" pitchFamily="50" charset="-127"/>
                           <a:cs typeface="+mn-cs"/>
                         </a:rPr>
-                        <a:t>5,198</a:t>
+                        <a:t>5,181</a:t>
                       </a:r>
                     </a:p>
                   </a:txBody>
@@ -17798,7 +17798,7 @@
                           <a:ea typeface="대명체 보통" panose="020B0600000101010101" pitchFamily="50" charset="-127"/>
                           <a:cs typeface="+mn-cs"/>
                         </a:rPr>
-                        <a:t>1,731</a:t>
+                        <a:t>1,714</a:t>
                       </a:r>
                       <a:endParaRPr lang="en-US" altLang="ko-KR" sz="700" b="0" i="0" u="none" strike="noStrike" kern="1200" dirty="0">
                         <a:solidFill>
@@ -17870,7 +17870,7 @@
                           <a:ea typeface="대명체 보통" panose="020B0600000101010101" pitchFamily="50" charset="-127"/>
                           <a:cs typeface="+mn-cs"/>
                         </a:rPr>
-                        <a:t>150%</a:t>
+                        <a:t>149%</a:t>
                       </a:r>
                     </a:p>
                   </a:txBody>
@@ -17933,7 +17933,7 @@
                           <a:ea typeface="대명체 보통" panose="020B0600000101010101" pitchFamily="50" charset="-127"/>
                           <a:cs typeface="+mn-cs"/>
                         </a:rPr>
-                        <a:t>3,212</a:t>
+                        <a:t>3,220</a:t>
                       </a:r>
                     </a:p>
                   </a:txBody>
@@ -18051,7 +18051,7 @@
                           <a:ea typeface="대명체 보통" panose="020B0600000101010101" pitchFamily="50" charset="-127"/>
                           <a:cs typeface="+mn-cs"/>
                         </a:rPr>
-                        <a:t>1,987</a:t>
+                        <a:t>1,961</a:t>
                       </a:r>
                     </a:p>
                   </a:txBody>
@@ -18114,7 +18114,7 @@
                           <a:ea typeface="대명체 보통" panose="020B0600000101010101" pitchFamily="50" charset="-127"/>
                           <a:cs typeface="+mn-cs"/>
                         </a:rPr>
-                        <a:t>62%</a:t>
+                        <a:t>61%</a:t>
                       </a:r>
                     </a:p>
                   </a:txBody>

--- a/data/세일즈마케팅_예상매출현황.pptx
+++ b/data/세일즈마케팅_예상매출현황.pptx
@@ -12756,7 +12756,7 @@
                           <a:ea typeface="대명체 보통" panose="020B0600000101010101" pitchFamily="50" charset="-127"/>
                           <a:cs typeface="+mn-cs"/>
                         </a:rPr>
-                        <a:t>26,009</a:t>
+                        <a:t>25,934</a:t>
                       </a:r>
                     </a:p>
                   </a:txBody>
@@ -12882,7 +12882,7 @@
                           <a:ea typeface="대명체 보통" panose="020B0600000101010101" pitchFamily="50" charset="-127"/>
                           <a:cs typeface="+mn-cs"/>
                         </a:rPr>
-                        <a:t>2,150</a:t>
+                        <a:t>2,074</a:t>
                       </a:r>
                     </a:p>
                   </a:txBody>
@@ -13016,7 +13016,7 @@
                           <a:ea typeface="대명체 보통" panose="020B0600000101010101" pitchFamily="50" charset="-127"/>
                           <a:cs typeface="+mn-cs"/>
                         </a:rPr>
-                        <a:t>20,534</a:t>
+                        <a:t>20,675</a:t>
                       </a:r>
                     </a:p>
                   </a:txBody>
@@ -13142,7 +13142,7 @@
                           <a:ea typeface="대명체 보통" panose="020B0600000101010101" pitchFamily="50" charset="-127"/>
                           <a:cs typeface="+mn-cs"/>
                         </a:rPr>
-                        <a:t>5,475</a:t>
+                        <a:t>5,259</a:t>
                       </a:r>
                     </a:p>
                   </a:txBody>
@@ -13164,6 +13164,570 @@
                           <a:lumMod val="75000"/>
                         </a:schemeClr>
                       </a:solidFill>
+                      <a:prstDash val="solid"/>
+                      <a:round/>
+                      <a:headEnd type="none" w="med" len="med"/>
+                      <a:tailEnd type="none" w="med" len="med"/>
+                    </a:lnR>
+                    <a:lnT w="6350" cap="flat" cmpd="sng" algn="ctr">
+                      <a:solidFill>
+                        <a:schemeClr val="bg2">
+                          <a:lumMod val="75000"/>
+                        </a:schemeClr>
+                      </a:solidFill>
+                      <a:prstDash val="solid"/>
+                      <a:round/>
+                      <a:headEnd type="none" w="med" len="med"/>
+                      <a:tailEnd type="none" w="med" len="med"/>
+                    </a:lnT>
+                    <a:lnB w="6350" cap="flat" cmpd="sng" algn="ctr">
+                      <a:solidFill>
+                        <a:schemeClr val="bg2">
+                          <a:lumMod val="75000"/>
+                        </a:schemeClr>
+                      </a:solidFill>
+                      <a:prstDash val="solid"/>
+                      <a:round/>
+                      <a:headEnd type="none" w="med" len="med"/>
+                      <a:tailEnd type="none" w="med" len="med"/>
+                    </a:lnB>
+                  </a:tcPr>
+                </a:tc>
+                <a:tc>
+                  <a:txBody>
+                    <a:bodyPr/>
+                    <a:lstStyle/>
+                    <a:p>
+                      <a:pPr algn="r" rtl="0" fontAlgn="ctr"/>
+                      <a:r>
+                        <a:rPr lang="en-US" altLang="ko-KR" sz="700" b="0" i="0" u="none" strike="noStrike" kern="1200">
+                          <a:solidFill>
+                            <a:srgbClr val="000000"/>
+                          </a:solidFill>
+                          <a:effectLst/>
+                          <a:latin typeface="대명체 보통" panose="020B0600000101010101" pitchFamily="50" charset="-127"/>
+                          <a:ea typeface="대명체 보통" panose="020B0600000101010101" pitchFamily="50" charset="-127"/>
+                          <a:cs typeface="+mn-cs"/>
+                        </a:rPr>
+                        <a:t>25%</a:t>
+                      </a:r>
+                    </a:p>
+                  </a:txBody>
+                  <a:tcPr marL="9525" marR="9525" marT="9525" marB="0" anchor="ctr">
+                    <a:lnL w="6350" cap="flat" cmpd="sng" algn="ctr">
+                      <a:solidFill>
+                        <a:schemeClr val="bg2">
+                          <a:lumMod val="75000"/>
+                        </a:schemeClr>
+                      </a:solidFill>
+                      <a:prstDash val="solid"/>
+                      <a:round/>
+                      <a:headEnd type="none" w="med" len="med"/>
+                      <a:tailEnd type="none" w="med" len="med"/>
+                    </a:lnL>
+                    <a:lnR w="6350" cap="flat" cmpd="sng" algn="ctr">
+                      <a:noFill/>
+                      <a:prstDash val="solid"/>
+                      <a:round/>
+                      <a:headEnd type="none" w="med" len="med"/>
+                      <a:tailEnd type="none" w="med" len="med"/>
+                    </a:lnR>
+                    <a:lnT w="6350" cap="flat" cmpd="sng" algn="ctr">
+                      <a:solidFill>
+                        <a:schemeClr val="bg2">
+                          <a:lumMod val="75000"/>
+                        </a:schemeClr>
+                      </a:solidFill>
+                      <a:prstDash val="solid"/>
+                      <a:round/>
+                      <a:headEnd type="none" w="med" len="med"/>
+                      <a:tailEnd type="none" w="med" len="med"/>
+                    </a:lnT>
+                    <a:lnB w="6350" cap="flat" cmpd="sng" algn="ctr">
+                      <a:solidFill>
+                        <a:schemeClr val="bg2">
+                          <a:lumMod val="75000"/>
+                        </a:schemeClr>
+                      </a:solidFill>
+                      <a:prstDash val="solid"/>
+                      <a:round/>
+                      <a:headEnd type="none" w="med" len="med"/>
+                      <a:tailEnd type="none" w="med" len="med"/>
+                    </a:lnB>
+                  </a:tcPr>
+                </a:tc>
+                <a:tc>
+                  <a:txBody>
+                    <a:bodyPr/>
+                    <a:lstStyle/>
+                    <a:p>
+                      <a:pPr algn="r" fontAlgn="ctr"/>
+                      <a:endParaRPr lang="ko-KR" altLang="en-US" sz="700" b="0" i="0" u="none" strike="noStrike" kern="1200">
+                        <a:solidFill>
+                          <a:srgbClr val="000000"/>
+                        </a:solidFill>
+                        <a:effectLst/>
+                        <a:latin typeface="대명체 보통" panose="020B0600000101010101" pitchFamily="50" charset="-127"/>
+                        <a:ea typeface="대명체 보통" panose="020B0600000101010101" pitchFamily="50" charset="-127"/>
+                        <a:cs typeface="+mn-cs"/>
+                      </a:endParaRPr>
+                    </a:p>
+                  </a:txBody>
+                  <a:tcPr marL="9525" marR="9525" marT="9525" marB="0" anchor="ctr">
+                    <a:lnL w="6350" cap="flat" cmpd="sng" algn="ctr">
+                      <a:noFill/>
+                      <a:prstDash val="solid"/>
+                      <a:round/>
+                      <a:headEnd type="none" w="med" len="med"/>
+                      <a:tailEnd type="none" w="med" len="med"/>
+                    </a:lnL>
+                    <a:lnR w="6350" cap="flat" cmpd="sng" algn="ctr">
+                      <a:noFill/>
+                      <a:prstDash val="solid"/>
+                      <a:round/>
+                      <a:headEnd type="none" w="med" len="med"/>
+                      <a:tailEnd type="none" w="med" len="med"/>
+                    </a:lnR>
+                    <a:lnT w="6350" cap="flat" cmpd="sng" algn="ctr">
+                      <a:noFill/>
+                      <a:prstDash val="solid"/>
+                      <a:round/>
+                      <a:headEnd type="none" w="med" len="med"/>
+                      <a:tailEnd type="none" w="med" len="med"/>
+                    </a:lnT>
+                    <a:lnB w="6350" cap="flat" cmpd="sng" algn="ctr">
+                      <a:noFill/>
+                      <a:prstDash val="solid"/>
+                      <a:round/>
+                      <a:headEnd type="none" w="med" len="med"/>
+                      <a:tailEnd type="none" w="med" len="med"/>
+                    </a:lnB>
+                    <a:lnTlToBr w="12700" cmpd="sng">
+                      <a:noFill/>
+                      <a:prstDash val="solid"/>
+                    </a:lnTlToBr>
+                    <a:lnBlToTr w="12700" cmpd="sng">
+                      <a:noFill/>
+                      <a:prstDash val="solid"/>
+                    </a:lnBlToTr>
+                  </a:tcPr>
+                </a:tc>
+                <a:tc>
+                  <a:txBody>
+                    <a:bodyPr/>
+                    <a:lstStyle/>
+                    <a:p>
+                      <a:pPr algn="r" rtl="0" fontAlgn="ctr"/>
+                      <a:r>
+                        <a:rPr lang="en-US" altLang="ko-KR" sz="700" b="0" i="0" u="none" strike="noStrike" kern="1200">
+                          <a:solidFill>
+                            <a:srgbClr val="000000"/>
+                          </a:solidFill>
+                          <a:effectLst/>
+                          <a:latin typeface="대명체 보통" panose="020B0600000101010101" pitchFamily="50" charset="-127"/>
+                          <a:ea typeface="대명체 보통" panose="020B0600000101010101" pitchFamily="50" charset="-127"/>
+                          <a:cs typeface="+mn-cs"/>
+                        </a:rPr>
+                        <a:t>124,921</a:t>
+                      </a:r>
+                    </a:p>
+                  </a:txBody>
+                  <a:tcPr marL="9525" marR="9525" marT="9525" marB="0" anchor="ctr">
+                    <a:lnL w="6350" cap="flat" cmpd="sng" algn="ctr">
+                      <a:noFill/>
+                      <a:prstDash val="solid"/>
+                      <a:round/>
+                      <a:headEnd type="none" w="med" len="med"/>
+                      <a:tailEnd type="none" w="med" len="med"/>
+                    </a:lnL>
+                    <a:lnR w="6350" cap="flat" cmpd="sng" algn="ctr">
+                      <a:noFill/>
+                      <a:prstDash val="solid"/>
+                      <a:round/>
+                      <a:headEnd type="none" w="med" len="med"/>
+                      <a:tailEnd type="none" w="med" len="med"/>
+                    </a:lnR>
+                    <a:lnT w="6350" cap="flat" cmpd="sng" algn="ctr">
+                      <a:solidFill>
+                        <a:schemeClr val="bg2">
+                          <a:lumMod val="75000"/>
+                        </a:schemeClr>
+                      </a:solidFill>
+                      <a:prstDash val="solid"/>
+                      <a:round/>
+                      <a:headEnd type="none" w="med" len="med"/>
+                      <a:tailEnd type="none" w="med" len="med"/>
+                    </a:lnT>
+                    <a:lnB w="6350" cap="flat" cmpd="sng" algn="ctr">
+                      <a:solidFill>
+                        <a:schemeClr val="bg2">
+                          <a:lumMod val="75000"/>
+                        </a:schemeClr>
+                      </a:solidFill>
+                      <a:prstDash val="solid"/>
+                      <a:round/>
+                      <a:headEnd type="none" w="med" len="med"/>
+                      <a:tailEnd type="none" w="med" len="med"/>
+                    </a:lnB>
+                  </a:tcPr>
+                </a:tc>
+                <a:tc>
+                  <a:txBody>
+                    <a:bodyPr/>
+                    <a:lstStyle/>
+                    <a:p>
+                      <a:pPr algn="r" rtl="0" fontAlgn="ctr"/>
+                      <a:r>
+                        <a:rPr lang="en-US" altLang="ko-KR" sz="700" b="0" i="0" u="none" strike="noStrike" kern="1200">
+                          <a:solidFill>
+                            <a:srgbClr val="000000"/>
+                          </a:solidFill>
+                          <a:effectLst/>
+                          <a:latin typeface="대명체 보통" panose="020B0600000101010101" pitchFamily="50" charset="-127"/>
+                          <a:ea typeface="대명체 보통" panose="020B0600000101010101" pitchFamily="50" charset="-127"/>
+                          <a:cs typeface="+mn-cs"/>
+                        </a:rPr>
+                        <a:t>26%</a:t>
+                      </a:r>
+                    </a:p>
+                  </a:txBody>
+                  <a:tcPr marL="9525" marR="9525" marT="9525" marB="0" anchor="ctr">
+                    <a:lnL w="6350" cap="flat" cmpd="sng" algn="ctr">
+                      <a:noFill/>
+                      <a:prstDash val="solid"/>
+                      <a:round/>
+                      <a:headEnd type="none" w="med" len="med"/>
+                      <a:tailEnd type="none" w="med" len="med"/>
+                    </a:lnL>
+                    <a:lnR w="6350" cap="flat" cmpd="sng" algn="ctr">
+                      <a:solidFill>
+                        <a:schemeClr val="bg2">
+                          <a:lumMod val="75000"/>
+                        </a:schemeClr>
+                      </a:solidFill>
+                      <a:prstDash val="solid"/>
+                      <a:round/>
+                      <a:headEnd type="none" w="med" len="med"/>
+                      <a:tailEnd type="none" w="med" len="med"/>
+                    </a:lnR>
+                    <a:lnT w="6350" cap="flat" cmpd="sng" algn="ctr">
+                      <a:solidFill>
+                        <a:schemeClr val="bg2">
+                          <a:lumMod val="75000"/>
+                        </a:schemeClr>
+                      </a:solidFill>
+                      <a:prstDash val="solid"/>
+                      <a:round/>
+                      <a:headEnd type="none" w="med" len="med"/>
+                      <a:tailEnd type="none" w="med" len="med"/>
+                    </a:lnT>
+                    <a:lnB w="6350" cap="flat" cmpd="sng" algn="ctr">
+                      <a:solidFill>
+                        <a:schemeClr val="bg2">
+                          <a:lumMod val="75000"/>
+                        </a:schemeClr>
+                      </a:solidFill>
+                      <a:prstDash val="solid"/>
+                      <a:round/>
+                      <a:headEnd type="none" w="med" len="med"/>
+                      <a:tailEnd type="none" w="med" len="med"/>
+                    </a:lnB>
+                  </a:tcPr>
+                </a:tc>
+                <a:tc>
+                  <a:txBody>
+                    <a:bodyPr/>
+                    <a:lstStyle/>
+                    <a:p>
+                      <a:pPr algn="r" rtl="0" fontAlgn="ctr"/>
+                      <a:r>
+                        <a:rPr lang="en-US" altLang="ko-KR" sz="700" b="0" i="0" u="none" strike="noStrike" kern="1200">
+                          <a:solidFill>
+                            <a:srgbClr val="000000"/>
+                          </a:solidFill>
+                          <a:effectLst/>
+                          <a:latin typeface="대명체 보통" panose="020B0600000101010101" pitchFamily="50" charset="-127"/>
+                          <a:ea typeface="대명체 보통" panose="020B0600000101010101" pitchFamily="50" charset="-127"/>
+                          <a:cs typeface="+mn-cs"/>
+                        </a:rPr>
+                        <a:t>142,403</a:t>
+                      </a:r>
+                    </a:p>
+                  </a:txBody>
+                  <a:tcPr marL="9525" marR="9525" marT="9525" marB="0" anchor="ctr">
+                    <a:lnL w="6350" cap="flat" cmpd="sng" algn="ctr">
+                      <a:solidFill>
+                        <a:schemeClr val="bg2">
+                          <a:lumMod val="75000"/>
+                        </a:schemeClr>
+                      </a:solidFill>
+                      <a:prstDash val="solid"/>
+                      <a:round/>
+                      <a:headEnd type="none" w="med" len="med"/>
+                      <a:tailEnd type="none" w="med" len="med"/>
+                    </a:lnL>
+                    <a:lnR w="6350" cap="flat" cmpd="sng" algn="ctr">
+                      <a:noFill/>
+                      <a:prstDash val="solid"/>
+                      <a:round/>
+                      <a:headEnd type="none" w="med" len="med"/>
+                      <a:tailEnd type="none" w="med" len="med"/>
+                    </a:lnR>
+                    <a:lnT w="6350" cap="flat" cmpd="sng" algn="ctr">
+                      <a:solidFill>
+                        <a:schemeClr val="bg2">
+                          <a:lumMod val="75000"/>
+                        </a:schemeClr>
+                      </a:solidFill>
+                      <a:prstDash val="solid"/>
+                      <a:round/>
+                      <a:headEnd type="none" w="med" len="med"/>
+                      <a:tailEnd type="none" w="med" len="med"/>
+                    </a:lnT>
+                    <a:lnB w="6350" cap="flat" cmpd="sng" algn="ctr">
+                      <a:solidFill>
+                        <a:schemeClr val="bg2">
+                          <a:lumMod val="75000"/>
+                        </a:schemeClr>
+                      </a:solidFill>
+                      <a:prstDash val="solid"/>
+                      <a:round/>
+                      <a:headEnd type="none" w="med" len="med"/>
+                      <a:tailEnd type="none" w="med" len="med"/>
+                    </a:lnB>
+                  </a:tcPr>
+                </a:tc>
+                <a:tc>
+                  <a:txBody>
+                    <a:bodyPr/>
+                    <a:lstStyle/>
+                    <a:p>
+                      <a:pPr algn="r" rtl="0" fontAlgn="ctr"/>
+                      <a:r>
+                        <a:rPr lang="en-US" altLang="ko-KR" sz="700" b="0" i="0" u="none" strike="noStrike" kern="1200">
+                          <a:solidFill>
+                            <a:srgbClr val="000000"/>
+                          </a:solidFill>
+                          <a:effectLst/>
+                          <a:latin typeface="대명체 보통" panose="020B0600000101010101" pitchFamily="50" charset="-127"/>
+                          <a:ea typeface="대명체 보통" panose="020B0600000101010101" pitchFamily="50" charset="-127"/>
+                          <a:cs typeface="+mn-cs"/>
+                        </a:rPr>
+                        <a:t>40%</a:t>
+                      </a:r>
+                    </a:p>
+                  </a:txBody>
+                  <a:tcPr marL="9525" marR="9525" marT="9525" marB="0" anchor="ctr">
+                    <a:lnL w="6350" cap="flat" cmpd="sng" algn="ctr">
+                      <a:noFill/>
+                      <a:prstDash val="solid"/>
+                      <a:round/>
+                      <a:headEnd type="none" w="med" len="med"/>
+                      <a:tailEnd type="none" w="med" len="med"/>
+                    </a:lnL>
+                    <a:lnR w="6350" cap="flat" cmpd="sng" algn="ctr">
+                      <a:solidFill>
+                        <a:schemeClr val="bg2">
+                          <a:lumMod val="75000"/>
+                        </a:schemeClr>
+                      </a:solidFill>
+                      <a:prstDash val="solid"/>
+                      <a:round/>
+                      <a:headEnd type="none" w="med" len="med"/>
+                      <a:tailEnd type="none" w="med" len="med"/>
+                    </a:lnR>
+                    <a:lnT w="6350" cap="flat" cmpd="sng" algn="ctr">
+                      <a:solidFill>
+                        <a:schemeClr val="bg2">
+                          <a:lumMod val="75000"/>
+                        </a:schemeClr>
+                      </a:solidFill>
+                      <a:prstDash val="solid"/>
+                      <a:round/>
+                      <a:headEnd type="none" w="med" len="med"/>
+                      <a:tailEnd type="none" w="med" len="med"/>
+                    </a:lnT>
+                    <a:lnB w="6350" cap="flat" cmpd="sng" algn="ctr">
+                      <a:solidFill>
+                        <a:schemeClr val="bg2">
+                          <a:lumMod val="75000"/>
+                        </a:schemeClr>
+                      </a:solidFill>
+                      <a:prstDash val="solid"/>
+                      <a:round/>
+                      <a:headEnd type="none" w="med" len="med"/>
+                      <a:tailEnd type="none" w="med" len="med"/>
+                    </a:lnB>
+                  </a:tcPr>
+                </a:tc>
+                <a:tc>
+                  <a:txBody>
+                    <a:bodyPr/>
+                    <a:lstStyle/>
+                    <a:p>
+                      <a:pPr algn="r" rtl="0" fontAlgn="ctr"/>
+                      <a:r>
+                        <a:rPr lang="en-US" altLang="ko-KR" sz="700" b="0" i="0" u="none" strike="noStrike" kern="1200">
+                          <a:solidFill>
+                            <a:srgbClr val="000000"/>
+                          </a:solidFill>
+                          <a:effectLst/>
+                          <a:latin typeface="대명체 보통" panose="020B0600000101010101" pitchFamily="50" charset="-127"/>
+                          <a:ea typeface="대명체 보통" panose="020B0600000101010101" pitchFamily="50" charset="-127"/>
+                          <a:cs typeface="+mn-cs"/>
+                        </a:rPr>
+                        <a:t>17,482</a:t>
+                      </a:r>
+                    </a:p>
+                  </a:txBody>
+                  <a:tcPr marL="9525" marR="9525" marT="9525" marB="0" anchor="ctr">
+                    <a:lnL w="6350" cap="flat" cmpd="sng" algn="ctr">
+                      <a:solidFill>
+                        <a:schemeClr val="bg2">
+                          <a:lumMod val="75000"/>
+                        </a:schemeClr>
+                      </a:solidFill>
+                      <a:prstDash val="solid"/>
+                      <a:round/>
+                      <a:headEnd type="none" w="med" len="med"/>
+                      <a:tailEnd type="none" w="med" len="med"/>
+                    </a:lnL>
+                    <a:lnR w="6350" cap="flat" cmpd="sng" algn="ctr">
+                      <a:solidFill>
+                        <a:schemeClr val="bg2">
+                          <a:lumMod val="75000"/>
+                        </a:schemeClr>
+                      </a:solidFill>
+                      <a:prstDash val="solid"/>
+                      <a:round/>
+                      <a:headEnd type="none" w="med" len="med"/>
+                      <a:tailEnd type="none" w="med" len="med"/>
+                    </a:lnR>
+                    <a:lnT w="6350" cap="flat" cmpd="sng" algn="ctr">
+                      <a:solidFill>
+                        <a:schemeClr val="bg2">
+                          <a:lumMod val="75000"/>
+                        </a:schemeClr>
+                      </a:solidFill>
+                      <a:prstDash val="solid"/>
+                      <a:round/>
+                      <a:headEnd type="none" w="med" len="med"/>
+                      <a:tailEnd type="none" w="med" len="med"/>
+                    </a:lnT>
+                    <a:lnB w="6350" cap="flat" cmpd="sng" algn="ctr">
+                      <a:solidFill>
+                        <a:schemeClr val="bg2">
+                          <a:lumMod val="75000"/>
+                        </a:schemeClr>
+                      </a:solidFill>
+                      <a:prstDash val="solid"/>
+                      <a:round/>
+                      <a:headEnd type="none" w="med" len="med"/>
+                      <a:tailEnd type="none" w="med" len="med"/>
+                    </a:lnB>
+                  </a:tcPr>
+                </a:tc>
+                <a:tc>
+                  <a:txBody>
+                    <a:bodyPr/>
+                    <a:lstStyle/>
+                    <a:p>
+                      <a:pPr algn="r" rtl="0" fontAlgn="ctr"/>
+                      <a:r>
+                        <a:rPr lang="en-US" altLang="ko-KR" sz="700" b="0" i="0" u="none" strike="noStrike" kern="1200">
+                          <a:solidFill>
+                            <a:srgbClr val="000000"/>
+                          </a:solidFill>
+                          <a:effectLst/>
+                          <a:latin typeface="대명체 보통" panose="020B0600000101010101" pitchFamily="50" charset="-127"/>
+                          <a:ea typeface="대명체 보통" panose="020B0600000101010101" pitchFamily="50" charset="-127"/>
+                          <a:cs typeface="+mn-cs"/>
+                        </a:rPr>
+                        <a:t>114%</a:t>
+                      </a:r>
+                    </a:p>
+                  </a:txBody>
+                  <a:tcPr marL="9525" marR="9525" marT="9525" marB="0" anchor="ctr">
+                    <a:lnL w="6350" cap="flat" cmpd="sng" algn="ctr">
+                      <a:solidFill>
+                        <a:schemeClr val="bg2">
+                          <a:lumMod val="75000"/>
+                        </a:schemeClr>
+                      </a:solidFill>
+                      <a:prstDash val="solid"/>
+                      <a:round/>
+                      <a:headEnd type="none" w="med" len="med"/>
+                      <a:tailEnd type="none" w="med" len="med"/>
+                    </a:lnL>
+                    <a:lnR w="6350" cap="flat" cmpd="sng" algn="ctr">
+                      <a:solidFill>
+                        <a:schemeClr val="bg2">
+                          <a:lumMod val="75000"/>
+                        </a:schemeClr>
+                      </a:solidFill>
+                      <a:prstDash val="solid"/>
+                      <a:round/>
+                      <a:headEnd type="none" w="med" len="med"/>
+                      <a:tailEnd type="none" w="med" len="med"/>
+                    </a:lnR>
+                    <a:lnT w="6350" cap="flat" cmpd="sng" algn="ctr">
+                      <a:solidFill>
+                        <a:schemeClr val="bg2">
+                          <a:lumMod val="75000"/>
+                        </a:schemeClr>
+                      </a:solidFill>
+                      <a:prstDash val="solid"/>
+                      <a:round/>
+                      <a:headEnd type="none" w="med" len="med"/>
+                      <a:tailEnd type="none" w="med" len="med"/>
+                    </a:lnT>
+                    <a:lnB w="6350" cap="flat" cmpd="sng" algn="ctr">
+                      <a:solidFill>
+                        <a:schemeClr val="bg2">
+                          <a:lumMod val="75000"/>
+                        </a:schemeClr>
+                      </a:solidFill>
+                      <a:prstDash val="solid"/>
+                      <a:round/>
+                      <a:headEnd type="none" w="med" len="med"/>
+                      <a:tailEnd type="none" w="med" len="med"/>
+                    </a:lnB>
+                  </a:tcPr>
+                </a:tc>
+                <a:tc>
+                  <a:txBody>
+                    <a:bodyPr/>
+                    <a:lstStyle/>
+                    <a:p>
+                      <a:pPr algn="r" rtl="0" fontAlgn="ctr"/>
+                      <a:r>
+                        <a:rPr lang="en-US" altLang="ko-KR" sz="700" b="0" i="0" u="none" strike="noStrike" kern="1200">
+                          <a:solidFill>
+                            <a:srgbClr val="000000"/>
+                          </a:solidFill>
+                          <a:effectLst/>
+                          <a:latin typeface="대명체 보통" panose="020B0600000101010101" pitchFamily="50" charset="-127"/>
+                          <a:ea typeface="대명체 보통" panose="020B0600000101010101" pitchFamily="50" charset="-127"/>
+                          <a:cs typeface="+mn-cs"/>
+                        </a:rPr>
+                        <a:t>101,839</a:t>
+                      </a:r>
+                    </a:p>
+                  </a:txBody>
+                  <a:tcPr marL="9525" marR="9525" marT="9525" marB="0" anchor="ctr">
+                    <a:lnL w="6350" cap="flat" cmpd="sng" algn="ctr">
+                      <a:solidFill>
+                        <a:schemeClr val="bg2">
+                          <a:lumMod val="75000"/>
+                        </a:schemeClr>
+                      </a:solidFill>
+                      <a:prstDash val="solid"/>
+                      <a:round/>
+                      <a:headEnd type="none" w="med" len="med"/>
+                      <a:tailEnd type="none" w="med" len="med"/>
+                    </a:lnL>
+                    <a:lnR w="6350" cap="flat" cmpd="sng" algn="ctr">
+                      <a:noFill/>
                       <a:prstDash val="solid"/>
                       <a:round/>
                       <a:headEnd type="none" w="med" len="med"/>
@@ -13215,101 +13779,45 @@
                   </a:txBody>
                   <a:tcPr marL="9525" marR="9525" marT="9525" marB="0" anchor="ctr">
                     <a:lnL w="6350" cap="flat" cmpd="sng" algn="ctr">
-                      <a:solidFill>
-                        <a:schemeClr val="bg2">
-                          <a:lumMod val="75000"/>
-                        </a:schemeClr>
-                      </a:solidFill>
-                      <a:prstDash val="solid"/>
-                      <a:round/>
-                      <a:headEnd type="none" w="med" len="med"/>
-                      <a:tailEnd type="none" w="med" len="med"/>
-                    </a:lnL>
-                    <a:lnR w="6350" cap="flat" cmpd="sng" algn="ctr">
-                      <a:noFill/>
-                      <a:prstDash val="solid"/>
-                      <a:round/>
-                      <a:headEnd type="none" w="med" len="med"/>
-                      <a:tailEnd type="none" w="med" len="med"/>
-                    </a:lnR>
-                    <a:lnT w="6350" cap="flat" cmpd="sng" algn="ctr">
-                      <a:solidFill>
-                        <a:schemeClr val="bg2">
-                          <a:lumMod val="75000"/>
-                        </a:schemeClr>
-                      </a:solidFill>
-                      <a:prstDash val="solid"/>
-                      <a:round/>
-                      <a:headEnd type="none" w="med" len="med"/>
-                      <a:tailEnd type="none" w="med" len="med"/>
-                    </a:lnT>
-                    <a:lnB w="6350" cap="flat" cmpd="sng" algn="ctr">
-                      <a:solidFill>
-                        <a:schemeClr val="bg2">
-                          <a:lumMod val="75000"/>
-                        </a:schemeClr>
-                      </a:solidFill>
-                      <a:prstDash val="solid"/>
-                      <a:round/>
-                      <a:headEnd type="none" w="med" len="med"/>
-                      <a:tailEnd type="none" w="med" len="med"/>
-                    </a:lnB>
-                  </a:tcPr>
-                </a:tc>
-                <a:tc>
-                  <a:txBody>
-                    <a:bodyPr/>
-                    <a:lstStyle/>
-                    <a:p>
-                      <a:pPr algn="r" fontAlgn="ctr"/>
-                      <a:endParaRPr lang="ko-KR" altLang="en-US" sz="700" b="0" i="0" u="none" strike="noStrike" kern="1200">
-                        <a:solidFill>
-                          <a:srgbClr val="000000"/>
-                        </a:solidFill>
-                        <a:effectLst/>
-                        <a:latin typeface="대명체 보통" panose="020B0600000101010101" pitchFamily="50" charset="-127"/>
-                        <a:ea typeface="대명체 보통" panose="020B0600000101010101" pitchFamily="50" charset="-127"/>
-                        <a:cs typeface="+mn-cs"/>
-                      </a:endParaRPr>
-                    </a:p>
-                  </a:txBody>
-                  <a:tcPr marL="9525" marR="9525" marT="9525" marB="0" anchor="ctr">
-                    <a:lnL w="6350" cap="flat" cmpd="sng" algn="ctr">
-                      <a:noFill/>
-                      <a:prstDash val="solid"/>
-                      <a:round/>
-                      <a:headEnd type="none" w="med" len="med"/>
-                      <a:tailEnd type="none" w="med" len="med"/>
-                    </a:lnL>
-                    <a:lnR w="6350" cap="flat" cmpd="sng" algn="ctr">
-                      <a:noFill/>
-                      <a:prstDash val="solid"/>
-                      <a:round/>
-                      <a:headEnd type="none" w="med" len="med"/>
-                      <a:tailEnd type="none" w="med" len="med"/>
-                    </a:lnR>
-                    <a:lnT w="6350" cap="flat" cmpd="sng" algn="ctr">
-                      <a:noFill/>
-                      <a:prstDash val="solid"/>
-                      <a:round/>
-                      <a:headEnd type="none" w="med" len="med"/>
-                      <a:tailEnd type="none" w="med" len="med"/>
-                    </a:lnT>
-                    <a:lnB w="6350" cap="flat" cmpd="sng" algn="ctr">
-                      <a:noFill/>
-                      <a:prstDash val="solid"/>
-                      <a:round/>
-                      <a:headEnd type="none" w="med" len="med"/>
-                      <a:tailEnd type="none" w="med" len="med"/>
-                    </a:lnB>
-                    <a:lnTlToBr w="12700" cmpd="sng">
-                      <a:noFill/>
-                      <a:prstDash val="solid"/>
-                    </a:lnTlToBr>
-                    <a:lnBlToTr w="12700" cmpd="sng">
-                      <a:noFill/>
-                      <a:prstDash val="solid"/>
-                    </a:lnBlToTr>
+                      <a:noFill/>
+                      <a:prstDash val="solid"/>
+                      <a:round/>
+                      <a:headEnd type="none" w="med" len="med"/>
+                      <a:tailEnd type="none" w="med" len="med"/>
+                    </a:lnL>
+                    <a:lnR w="6350" cap="flat" cmpd="sng" algn="ctr">
+                      <a:solidFill>
+                        <a:schemeClr val="bg2">
+                          <a:lumMod val="75000"/>
+                        </a:schemeClr>
+                      </a:solidFill>
+                      <a:prstDash val="solid"/>
+                      <a:round/>
+                      <a:headEnd type="none" w="med" len="med"/>
+                      <a:tailEnd type="none" w="med" len="med"/>
+                    </a:lnR>
+                    <a:lnT w="6350" cap="flat" cmpd="sng" algn="ctr">
+                      <a:solidFill>
+                        <a:schemeClr val="bg2">
+                          <a:lumMod val="75000"/>
+                        </a:schemeClr>
+                      </a:solidFill>
+                      <a:prstDash val="solid"/>
+                      <a:round/>
+                      <a:headEnd type="none" w="med" len="med"/>
+                      <a:tailEnd type="none" w="med" len="med"/>
+                    </a:lnT>
+                    <a:lnB w="6350" cap="flat" cmpd="sng" algn="ctr">
+                      <a:solidFill>
+                        <a:schemeClr val="bg2">
+                          <a:lumMod val="75000"/>
+                        </a:schemeClr>
+                      </a:solidFill>
+                      <a:prstDash val="solid"/>
+                      <a:round/>
+                      <a:headEnd type="none" w="med" len="med"/>
+                      <a:tailEnd type="none" w="med" len="med"/>
+                    </a:lnB>
                   </a:tcPr>
                 </a:tc>
                 <a:tc>
@@ -13328,515 +13836,7 @@
                           <a:ea typeface="대명체 보통" panose="020B0600000101010101" pitchFamily="50" charset="-127"/>
                           <a:cs typeface="+mn-cs"/>
                         </a:rPr>
-                        <a:t>124,921</a:t>
-                      </a:r>
-                    </a:p>
-                  </a:txBody>
-                  <a:tcPr marL="9525" marR="9525" marT="9525" marB="0" anchor="ctr">
-                    <a:lnL w="6350" cap="flat" cmpd="sng" algn="ctr">
-                      <a:noFill/>
-                      <a:prstDash val="solid"/>
-                      <a:round/>
-                      <a:headEnd type="none" w="med" len="med"/>
-                      <a:tailEnd type="none" w="med" len="med"/>
-                    </a:lnL>
-                    <a:lnR w="6350" cap="flat" cmpd="sng" algn="ctr">
-                      <a:noFill/>
-                      <a:prstDash val="solid"/>
-                      <a:round/>
-                      <a:headEnd type="none" w="med" len="med"/>
-                      <a:tailEnd type="none" w="med" len="med"/>
-                    </a:lnR>
-                    <a:lnT w="6350" cap="flat" cmpd="sng" algn="ctr">
-                      <a:solidFill>
-                        <a:schemeClr val="bg2">
-                          <a:lumMod val="75000"/>
-                        </a:schemeClr>
-                      </a:solidFill>
-                      <a:prstDash val="solid"/>
-                      <a:round/>
-                      <a:headEnd type="none" w="med" len="med"/>
-                      <a:tailEnd type="none" w="med" len="med"/>
-                    </a:lnT>
-                    <a:lnB w="6350" cap="flat" cmpd="sng" algn="ctr">
-                      <a:solidFill>
-                        <a:schemeClr val="bg2">
-                          <a:lumMod val="75000"/>
-                        </a:schemeClr>
-                      </a:solidFill>
-                      <a:prstDash val="solid"/>
-                      <a:round/>
-                      <a:headEnd type="none" w="med" len="med"/>
-                      <a:tailEnd type="none" w="med" len="med"/>
-                    </a:lnB>
-                  </a:tcPr>
-                </a:tc>
-                <a:tc>
-                  <a:txBody>
-                    <a:bodyPr/>
-                    <a:lstStyle/>
-                    <a:p>
-                      <a:pPr algn="r" rtl="0" fontAlgn="ctr"/>
-                      <a:r>
-                        <a:rPr lang="en-US" altLang="ko-KR" sz="700" b="0" i="0" u="none" strike="noStrike" kern="1200">
-                          <a:solidFill>
-                            <a:srgbClr val="000000"/>
-                          </a:solidFill>
-                          <a:effectLst/>
-                          <a:latin typeface="대명체 보통" panose="020B0600000101010101" pitchFamily="50" charset="-127"/>
-                          <a:ea typeface="대명체 보통" panose="020B0600000101010101" pitchFamily="50" charset="-127"/>
-                          <a:cs typeface="+mn-cs"/>
-                        </a:rPr>
-                        <a:t>26%</a:t>
-                      </a:r>
-                    </a:p>
-                  </a:txBody>
-                  <a:tcPr marL="9525" marR="9525" marT="9525" marB="0" anchor="ctr">
-                    <a:lnL w="6350" cap="flat" cmpd="sng" algn="ctr">
-                      <a:noFill/>
-                      <a:prstDash val="solid"/>
-                      <a:round/>
-                      <a:headEnd type="none" w="med" len="med"/>
-                      <a:tailEnd type="none" w="med" len="med"/>
-                    </a:lnL>
-                    <a:lnR w="6350" cap="flat" cmpd="sng" algn="ctr">
-                      <a:solidFill>
-                        <a:schemeClr val="bg2">
-                          <a:lumMod val="75000"/>
-                        </a:schemeClr>
-                      </a:solidFill>
-                      <a:prstDash val="solid"/>
-                      <a:round/>
-                      <a:headEnd type="none" w="med" len="med"/>
-                      <a:tailEnd type="none" w="med" len="med"/>
-                    </a:lnR>
-                    <a:lnT w="6350" cap="flat" cmpd="sng" algn="ctr">
-                      <a:solidFill>
-                        <a:schemeClr val="bg2">
-                          <a:lumMod val="75000"/>
-                        </a:schemeClr>
-                      </a:solidFill>
-                      <a:prstDash val="solid"/>
-                      <a:round/>
-                      <a:headEnd type="none" w="med" len="med"/>
-                      <a:tailEnd type="none" w="med" len="med"/>
-                    </a:lnT>
-                    <a:lnB w="6350" cap="flat" cmpd="sng" algn="ctr">
-                      <a:solidFill>
-                        <a:schemeClr val="bg2">
-                          <a:lumMod val="75000"/>
-                        </a:schemeClr>
-                      </a:solidFill>
-                      <a:prstDash val="solid"/>
-                      <a:round/>
-                      <a:headEnd type="none" w="med" len="med"/>
-                      <a:tailEnd type="none" w="med" len="med"/>
-                    </a:lnB>
-                  </a:tcPr>
-                </a:tc>
-                <a:tc>
-                  <a:txBody>
-                    <a:bodyPr/>
-                    <a:lstStyle/>
-                    <a:p>
-                      <a:pPr algn="r" rtl="0" fontAlgn="ctr"/>
-                      <a:r>
-                        <a:rPr lang="en-US" altLang="ko-KR" sz="700" b="0" i="0" u="none" strike="noStrike" kern="1200">
-                          <a:solidFill>
-                            <a:srgbClr val="000000"/>
-                          </a:solidFill>
-                          <a:effectLst/>
-                          <a:latin typeface="대명체 보통" panose="020B0600000101010101" pitchFamily="50" charset="-127"/>
-                          <a:ea typeface="대명체 보통" panose="020B0600000101010101" pitchFamily="50" charset="-127"/>
-                          <a:cs typeface="+mn-cs"/>
-                        </a:rPr>
-                        <a:t>142,479</a:t>
-                      </a:r>
-                    </a:p>
-                  </a:txBody>
-                  <a:tcPr marL="9525" marR="9525" marT="9525" marB="0" anchor="ctr">
-                    <a:lnL w="6350" cap="flat" cmpd="sng" algn="ctr">
-                      <a:solidFill>
-                        <a:schemeClr val="bg2">
-                          <a:lumMod val="75000"/>
-                        </a:schemeClr>
-                      </a:solidFill>
-                      <a:prstDash val="solid"/>
-                      <a:round/>
-                      <a:headEnd type="none" w="med" len="med"/>
-                      <a:tailEnd type="none" w="med" len="med"/>
-                    </a:lnL>
-                    <a:lnR w="6350" cap="flat" cmpd="sng" algn="ctr">
-                      <a:noFill/>
-                      <a:prstDash val="solid"/>
-                      <a:round/>
-                      <a:headEnd type="none" w="med" len="med"/>
-                      <a:tailEnd type="none" w="med" len="med"/>
-                    </a:lnR>
-                    <a:lnT w="6350" cap="flat" cmpd="sng" algn="ctr">
-                      <a:solidFill>
-                        <a:schemeClr val="bg2">
-                          <a:lumMod val="75000"/>
-                        </a:schemeClr>
-                      </a:solidFill>
-                      <a:prstDash val="solid"/>
-                      <a:round/>
-                      <a:headEnd type="none" w="med" len="med"/>
-                      <a:tailEnd type="none" w="med" len="med"/>
-                    </a:lnT>
-                    <a:lnB w="6350" cap="flat" cmpd="sng" algn="ctr">
-                      <a:solidFill>
-                        <a:schemeClr val="bg2">
-                          <a:lumMod val="75000"/>
-                        </a:schemeClr>
-                      </a:solidFill>
-                      <a:prstDash val="solid"/>
-                      <a:round/>
-                      <a:headEnd type="none" w="med" len="med"/>
-                      <a:tailEnd type="none" w="med" len="med"/>
-                    </a:lnB>
-                  </a:tcPr>
-                </a:tc>
-                <a:tc>
-                  <a:txBody>
-                    <a:bodyPr/>
-                    <a:lstStyle/>
-                    <a:p>
-                      <a:pPr algn="r" rtl="0" fontAlgn="ctr"/>
-                      <a:r>
-                        <a:rPr lang="en-US" altLang="ko-KR" sz="700" b="0" i="0" u="none" strike="noStrike" kern="1200">
-                          <a:solidFill>
-                            <a:srgbClr val="000000"/>
-                          </a:solidFill>
-                          <a:effectLst/>
-                          <a:latin typeface="대명체 보통" panose="020B0600000101010101" pitchFamily="50" charset="-127"/>
-                          <a:ea typeface="대명체 보통" panose="020B0600000101010101" pitchFamily="50" charset="-127"/>
-                          <a:cs typeface="+mn-cs"/>
-                        </a:rPr>
-                        <a:t>40%</a:t>
-                      </a:r>
-                    </a:p>
-                  </a:txBody>
-                  <a:tcPr marL="9525" marR="9525" marT="9525" marB="0" anchor="ctr">
-                    <a:lnL w="6350" cap="flat" cmpd="sng" algn="ctr">
-                      <a:noFill/>
-                      <a:prstDash val="solid"/>
-                      <a:round/>
-                      <a:headEnd type="none" w="med" len="med"/>
-                      <a:tailEnd type="none" w="med" len="med"/>
-                    </a:lnL>
-                    <a:lnR w="6350" cap="flat" cmpd="sng" algn="ctr">
-                      <a:solidFill>
-                        <a:schemeClr val="bg2">
-                          <a:lumMod val="75000"/>
-                        </a:schemeClr>
-                      </a:solidFill>
-                      <a:prstDash val="solid"/>
-                      <a:round/>
-                      <a:headEnd type="none" w="med" len="med"/>
-                      <a:tailEnd type="none" w="med" len="med"/>
-                    </a:lnR>
-                    <a:lnT w="6350" cap="flat" cmpd="sng" algn="ctr">
-                      <a:solidFill>
-                        <a:schemeClr val="bg2">
-                          <a:lumMod val="75000"/>
-                        </a:schemeClr>
-                      </a:solidFill>
-                      <a:prstDash val="solid"/>
-                      <a:round/>
-                      <a:headEnd type="none" w="med" len="med"/>
-                      <a:tailEnd type="none" w="med" len="med"/>
-                    </a:lnT>
-                    <a:lnB w="6350" cap="flat" cmpd="sng" algn="ctr">
-                      <a:solidFill>
-                        <a:schemeClr val="bg2">
-                          <a:lumMod val="75000"/>
-                        </a:schemeClr>
-                      </a:solidFill>
-                      <a:prstDash val="solid"/>
-                      <a:round/>
-                      <a:headEnd type="none" w="med" len="med"/>
-                      <a:tailEnd type="none" w="med" len="med"/>
-                    </a:lnB>
-                  </a:tcPr>
-                </a:tc>
-                <a:tc>
-                  <a:txBody>
-                    <a:bodyPr/>
-                    <a:lstStyle/>
-                    <a:p>
-                      <a:pPr algn="r" rtl="0" fontAlgn="ctr"/>
-                      <a:r>
-                        <a:rPr lang="en-US" altLang="ko-KR" sz="700" b="0" i="0" u="none" strike="noStrike" kern="1200">
-                          <a:solidFill>
-                            <a:srgbClr val="000000"/>
-                          </a:solidFill>
-                          <a:effectLst/>
-                          <a:latin typeface="대명체 보통" panose="020B0600000101010101" pitchFamily="50" charset="-127"/>
-                          <a:ea typeface="대명체 보통" panose="020B0600000101010101" pitchFamily="50" charset="-127"/>
-                          <a:cs typeface="+mn-cs"/>
-                        </a:rPr>
-                        <a:t>17,557</a:t>
-                      </a:r>
-                    </a:p>
-                  </a:txBody>
-                  <a:tcPr marL="9525" marR="9525" marT="9525" marB="0" anchor="ctr">
-                    <a:lnL w="6350" cap="flat" cmpd="sng" algn="ctr">
-                      <a:solidFill>
-                        <a:schemeClr val="bg2">
-                          <a:lumMod val="75000"/>
-                        </a:schemeClr>
-                      </a:solidFill>
-                      <a:prstDash val="solid"/>
-                      <a:round/>
-                      <a:headEnd type="none" w="med" len="med"/>
-                      <a:tailEnd type="none" w="med" len="med"/>
-                    </a:lnL>
-                    <a:lnR w="6350" cap="flat" cmpd="sng" algn="ctr">
-                      <a:solidFill>
-                        <a:schemeClr val="bg2">
-                          <a:lumMod val="75000"/>
-                        </a:schemeClr>
-                      </a:solidFill>
-                      <a:prstDash val="solid"/>
-                      <a:round/>
-                      <a:headEnd type="none" w="med" len="med"/>
-                      <a:tailEnd type="none" w="med" len="med"/>
-                    </a:lnR>
-                    <a:lnT w="6350" cap="flat" cmpd="sng" algn="ctr">
-                      <a:solidFill>
-                        <a:schemeClr val="bg2">
-                          <a:lumMod val="75000"/>
-                        </a:schemeClr>
-                      </a:solidFill>
-                      <a:prstDash val="solid"/>
-                      <a:round/>
-                      <a:headEnd type="none" w="med" len="med"/>
-                      <a:tailEnd type="none" w="med" len="med"/>
-                    </a:lnT>
-                    <a:lnB w="6350" cap="flat" cmpd="sng" algn="ctr">
-                      <a:solidFill>
-                        <a:schemeClr val="bg2">
-                          <a:lumMod val="75000"/>
-                        </a:schemeClr>
-                      </a:solidFill>
-                      <a:prstDash val="solid"/>
-                      <a:round/>
-                      <a:headEnd type="none" w="med" len="med"/>
-                      <a:tailEnd type="none" w="med" len="med"/>
-                    </a:lnB>
-                  </a:tcPr>
-                </a:tc>
-                <a:tc>
-                  <a:txBody>
-                    <a:bodyPr/>
-                    <a:lstStyle/>
-                    <a:p>
-                      <a:pPr algn="r" rtl="0" fontAlgn="ctr"/>
-                      <a:r>
-                        <a:rPr lang="en-US" altLang="ko-KR" sz="700" b="0" i="0" u="none" strike="noStrike" kern="1200">
-                          <a:solidFill>
-                            <a:srgbClr val="000000"/>
-                          </a:solidFill>
-                          <a:effectLst/>
-                          <a:latin typeface="대명체 보통" panose="020B0600000101010101" pitchFamily="50" charset="-127"/>
-                          <a:ea typeface="대명체 보통" panose="020B0600000101010101" pitchFamily="50" charset="-127"/>
-                          <a:cs typeface="+mn-cs"/>
-                        </a:rPr>
-                        <a:t>114%</a:t>
-                      </a:r>
-                    </a:p>
-                  </a:txBody>
-                  <a:tcPr marL="9525" marR="9525" marT="9525" marB="0" anchor="ctr">
-                    <a:lnL w="6350" cap="flat" cmpd="sng" algn="ctr">
-                      <a:solidFill>
-                        <a:schemeClr val="bg2">
-                          <a:lumMod val="75000"/>
-                        </a:schemeClr>
-                      </a:solidFill>
-                      <a:prstDash val="solid"/>
-                      <a:round/>
-                      <a:headEnd type="none" w="med" len="med"/>
-                      <a:tailEnd type="none" w="med" len="med"/>
-                    </a:lnL>
-                    <a:lnR w="6350" cap="flat" cmpd="sng" algn="ctr">
-                      <a:solidFill>
-                        <a:schemeClr val="bg2">
-                          <a:lumMod val="75000"/>
-                        </a:schemeClr>
-                      </a:solidFill>
-                      <a:prstDash val="solid"/>
-                      <a:round/>
-                      <a:headEnd type="none" w="med" len="med"/>
-                      <a:tailEnd type="none" w="med" len="med"/>
-                    </a:lnR>
-                    <a:lnT w="6350" cap="flat" cmpd="sng" algn="ctr">
-                      <a:solidFill>
-                        <a:schemeClr val="bg2">
-                          <a:lumMod val="75000"/>
-                        </a:schemeClr>
-                      </a:solidFill>
-                      <a:prstDash val="solid"/>
-                      <a:round/>
-                      <a:headEnd type="none" w="med" len="med"/>
-                      <a:tailEnd type="none" w="med" len="med"/>
-                    </a:lnT>
-                    <a:lnB w="6350" cap="flat" cmpd="sng" algn="ctr">
-                      <a:solidFill>
-                        <a:schemeClr val="bg2">
-                          <a:lumMod val="75000"/>
-                        </a:schemeClr>
-                      </a:solidFill>
-                      <a:prstDash val="solid"/>
-                      <a:round/>
-                      <a:headEnd type="none" w="med" len="med"/>
-                      <a:tailEnd type="none" w="med" len="med"/>
-                    </a:lnB>
-                  </a:tcPr>
-                </a:tc>
-                <a:tc>
-                  <a:txBody>
-                    <a:bodyPr/>
-                    <a:lstStyle/>
-                    <a:p>
-                      <a:pPr algn="r" rtl="0" fontAlgn="ctr"/>
-                      <a:r>
-                        <a:rPr lang="en-US" altLang="ko-KR" sz="700" b="0" i="0" u="none" strike="noStrike" kern="1200">
-                          <a:solidFill>
-                            <a:srgbClr val="000000"/>
-                          </a:solidFill>
-                          <a:effectLst/>
-                          <a:latin typeface="대명체 보통" panose="020B0600000101010101" pitchFamily="50" charset="-127"/>
-                          <a:ea typeface="대명체 보통" panose="020B0600000101010101" pitchFamily="50" charset="-127"/>
-                          <a:cs typeface="+mn-cs"/>
-                        </a:rPr>
-                        <a:t>101,698</a:t>
-                      </a:r>
-                    </a:p>
-                  </a:txBody>
-                  <a:tcPr marL="9525" marR="9525" marT="9525" marB="0" anchor="ctr">
-                    <a:lnL w="6350" cap="flat" cmpd="sng" algn="ctr">
-                      <a:solidFill>
-                        <a:schemeClr val="bg2">
-                          <a:lumMod val="75000"/>
-                        </a:schemeClr>
-                      </a:solidFill>
-                      <a:prstDash val="solid"/>
-                      <a:round/>
-                      <a:headEnd type="none" w="med" len="med"/>
-                      <a:tailEnd type="none" w="med" len="med"/>
-                    </a:lnL>
-                    <a:lnR w="6350" cap="flat" cmpd="sng" algn="ctr">
-                      <a:noFill/>
-                      <a:prstDash val="solid"/>
-                      <a:round/>
-                      <a:headEnd type="none" w="med" len="med"/>
-                      <a:tailEnd type="none" w="med" len="med"/>
-                    </a:lnR>
-                    <a:lnT w="6350" cap="flat" cmpd="sng" algn="ctr">
-                      <a:solidFill>
-                        <a:schemeClr val="bg2">
-                          <a:lumMod val="75000"/>
-                        </a:schemeClr>
-                      </a:solidFill>
-                      <a:prstDash val="solid"/>
-                      <a:round/>
-                      <a:headEnd type="none" w="med" len="med"/>
-                      <a:tailEnd type="none" w="med" len="med"/>
-                    </a:lnT>
-                    <a:lnB w="6350" cap="flat" cmpd="sng" algn="ctr">
-                      <a:solidFill>
-                        <a:schemeClr val="bg2">
-                          <a:lumMod val="75000"/>
-                        </a:schemeClr>
-                      </a:solidFill>
-                      <a:prstDash val="solid"/>
-                      <a:round/>
-                      <a:headEnd type="none" w="med" len="med"/>
-                      <a:tailEnd type="none" w="med" len="med"/>
-                    </a:lnB>
-                  </a:tcPr>
-                </a:tc>
-                <a:tc>
-                  <a:txBody>
-                    <a:bodyPr/>
-                    <a:lstStyle/>
-                    <a:p>
-                      <a:pPr algn="r" rtl="0" fontAlgn="ctr"/>
-                      <a:r>
-                        <a:rPr lang="en-US" altLang="ko-KR" sz="700" b="0" i="0" u="none" strike="noStrike" kern="1200">
-                          <a:solidFill>
-                            <a:srgbClr val="000000"/>
-                          </a:solidFill>
-                          <a:effectLst/>
-                          <a:latin typeface="대명체 보통" panose="020B0600000101010101" pitchFamily="50" charset="-127"/>
-                          <a:ea typeface="대명체 보통" panose="020B0600000101010101" pitchFamily="50" charset="-127"/>
-                          <a:cs typeface="+mn-cs"/>
-                        </a:rPr>
-                        <a:t>27%</a:t>
-                      </a:r>
-                    </a:p>
-                  </a:txBody>
-                  <a:tcPr marL="9525" marR="9525" marT="9525" marB="0" anchor="ctr">
-                    <a:lnL w="6350" cap="flat" cmpd="sng" algn="ctr">
-                      <a:noFill/>
-                      <a:prstDash val="solid"/>
-                      <a:round/>
-                      <a:headEnd type="none" w="med" len="med"/>
-                      <a:tailEnd type="none" w="med" len="med"/>
-                    </a:lnL>
-                    <a:lnR w="6350" cap="flat" cmpd="sng" algn="ctr">
-                      <a:solidFill>
-                        <a:schemeClr val="bg2">
-                          <a:lumMod val="75000"/>
-                        </a:schemeClr>
-                      </a:solidFill>
-                      <a:prstDash val="solid"/>
-                      <a:round/>
-                      <a:headEnd type="none" w="med" len="med"/>
-                      <a:tailEnd type="none" w="med" len="med"/>
-                    </a:lnR>
-                    <a:lnT w="6350" cap="flat" cmpd="sng" algn="ctr">
-                      <a:solidFill>
-                        <a:schemeClr val="bg2">
-                          <a:lumMod val="75000"/>
-                        </a:schemeClr>
-                      </a:solidFill>
-                      <a:prstDash val="solid"/>
-                      <a:round/>
-                      <a:headEnd type="none" w="med" len="med"/>
-                      <a:tailEnd type="none" w="med" len="med"/>
-                    </a:lnT>
-                    <a:lnB w="6350" cap="flat" cmpd="sng" algn="ctr">
-                      <a:solidFill>
-                        <a:schemeClr val="bg2">
-                          <a:lumMod val="75000"/>
-                        </a:schemeClr>
-                      </a:solidFill>
-                      <a:prstDash val="solid"/>
-                      <a:round/>
-                      <a:headEnd type="none" w="med" len="med"/>
-                      <a:tailEnd type="none" w="med" len="med"/>
-                    </a:lnB>
-                  </a:tcPr>
-                </a:tc>
-                <a:tc>
-                  <a:txBody>
-                    <a:bodyPr/>
-                    <a:lstStyle/>
-                    <a:p>
-                      <a:pPr algn="r" rtl="0" fontAlgn="ctr"/>
-                      <a:r>
-                        <a:rPr lang="en-US" altLang="ko-KR" sz="700" b="0" i="0" u="none" strike="noStrike" kern="1200">
-                          <a:solidFill>
-                            <a:srgbClr val="000000"/>
-                          </a:solidFill>
-                          <a:effectLst/>
-                          <a:latin typeface="대명체 보통" panose="020B0600000101010101" pitchFamily="50" charset="-127"/>
-                          <a:ea typeface="대명체 보통" panose="020B0600000101010101" pitchFamily="50" charset="-127"/>
-                          <a:cs typeface="+mn-cs"/>
-                        </a:rPr>
-                        <a:t>40,780</a:t>
+                        <a:t>40,564</a:t>
                       </a:r>
                     </a:p>
                   </a:txBody>
@@ -14237,7 +14237,7 @@
                           <a:ea typeface="대명체 보통" panose="020B0600000101010101" pitchFamily="50" charset="-127"/>
                           <a:cs typeface="+mn-cs"/>
                         </a:rPr>
-                        <a:t>15,504</a:t>
+                        <a:t>15,464</a:t>
                       </a:r>
                     </a:p>
                   </a:txBody>
@@ -14355,7 +14355,7 @@
                           <a:ea typeface="대명체 보통" panose="020B0600000101010101" pitchFamily="50" charset="-127"/>
                           <a:cs typeface="+mn-cs"/>
                         </a:rPr>
-                        <a:t>900</a:t>
+                        <a:t>860</a:t>
                       </a:r>
                       <a:endParaRPr lang="en-US" altLang="ko-KR" sz="700" b="0" i="0" u="none" strike="noStrike" kern="1200" dirty="0">
                         <a:solidFill>
@@ -14490,7 +14490,7 @@
                           <a:ea typeface="대명체 보통" panose="020B0600000101010101" pitchFamily="50" charset="-127"/>
                           <a:cs typeface="+mn-cs"/>
                         </a:rPr>
-                        <a:t>12,597</a:t>
+                        <a:t>12,692</a:t>
                       </a:r>
                     </a:p>
                   </a:txBody>
@@ -14608,7 +14608,7 @@
                           <a:ea typeface="대명체 보통" panose="020B0600000101010101" pitchFamily="50" charset="-127"/>
                           <a:cs typeface="+mn-cs"/>
                         </a:rPr>
-                        <a:t>2,907</a:t>
+                        <a:t>2,772</a:t>
                       </a:r>
                     </a:p>
                   </a:txBody>
@@ -14630,6 +14630,294 @@
                           <a:lumMod val="75000"/>
                         </a:schemeClr>
                       </a:solidFill>
+                      <a:prstDash val="solid"/>
+                      <a:round/>
+                      <a:headEnd type="none" w="med" len="med"/>
+                      <a:tailEnd type="none" w="med" len="med"/>
+                    </a:lnR>
+                    <a:lnT w="6350" cap="flat" cmpd="sng" algn="ctr">
+                      <a:solidFill>
+                        <a:schemeClr val="bg2">
+                          <a:lumMod val="75000"/>
+                        </a:schemeClr>
+                      </a:solidFill>
+                      <a:prstDash val="solid"/>
+                      <a:round/>
+                      <a:headEnd type="none" w="med" len="med"/>
+                      <a:tailEnd type="none" w="med" len="med"/>
+                    </a:lnT>
+                    <a:lnB w="6350" cap="flat" cmpd="sng" algn="ctr">
+                      <a:noFill/>
+                      <a:prstDash val="solid"/>
+                      <a:round/>
+                      <a:headEnd type="none" w="med" len="med"/>
+                      <a:tailEnd type="none" w="med" len="med"/>
+                    </a:lnB>
+                  </a:tcPr>
+                </a:tc>
+                <a:tc>
+                  <a:txBody>
+                    <a:bodyPr/>
+                    <a:lstStyle/>
+                    <a:p>
+                      <a:pPr algn="r" rtl="0" fontAlgn="ctr"/>
+                      <a:r>
+                        <a:rPr lang="en-US" altLang="ko-KR" sz="700" b="0" i="0" u="none" strike="noStrike" kern="1200">
+                          <a:solidFill>
+                            <a:srgbClr val="000000"/>
+                          </a:solidFill>
+                          <a:effectLst/>
+                          <a:latin typeface="대명체 보통" panose="020B0600000101010101" pitchFamily="50" charset="-127"/>
+                          <a:ea typeface="대명체 보통" panose="020B0600000101010101" pitchFamily="50" charset="-127"/>
+                          <a:cs typeface="+mn-cs"/>
+                        </a:rPr>
+                        <a:t>22%</a:t>
+                      </a:r>
+                    </a:p>
+                  </a:txBody>
+                  <a:tcPr marL="9525" marR="9525" marT="9525" marB="0" anchor="ctr">
+                    <a:lnL w="6350" cap="flat" cmpd="sng" algn="ctr">
+                      <a:solidFill>
+                        <a:schemeClr val="bg2">
+                          <a:lumMod val="75000"/>
+                        </a:schemeClr>
+                      </a:solidFill>
+                      <a:prstDash val="solid"/>
+                      <a:round/>
+                      <a:headEnd type="none" w="med" len="med"/>
+                      <a:tailEnd type="none" w="med" len="med"/>
+                    </a:lnL>
+                    <a:lnR w="6350" cap="flat" cmpd="sng" algn="ctr">
+                      <a:noFill/>
+                      <a:prstDash val="solid"/>
+                      <a:round/>
+                      <a:headEnd type="none" w="med" len="med"/>
+                      <a:tailEnd type="none" w="med" len="med"/>
+                    </a:lnR>
+                    <a:lnT w="6350" cap="flat" cmpd="sng" algn="ctr">
+                      <a:solidFill>
+                        <a:schemeClr val="bg2">
+                          <a:lumMod val="75000"/>
+                        </a:schemeClr>
+                      </a:solidFill>
+                      <a:prstDash val="solid"/>
+                      <a:round/>
+                      <a:headEnd type="none" w="med" len="med"/>
+                      <a:tailEnd type="none" w="med" len="med"/>
+                    </a:lnT>
+                    <a:lnB w="6350" cap="flat" cmpd="sng" algn="ctr">
+                      <a:noFill/>
+                      <a:prstDash val="solid"/>
+                      <a:round/>
+                      <a:headEnd type="none" w="med" len="med"/>
+                      <a:tailEnd type="none" w="med" len="med"/>
+                    </a:lnB>
+                  </a:tcPr>
+                </a:tc>
+                <a:tc>
+                  <a:txBody>
+                    <a:bodyPr/>
+                    <a:lstStyle/>
+                    <a:p>
+                      <a:pPr algn="r" fontAlgn="ctr"/>
+                      <a:endParaRPr lang="ko-KR" altLang="en-US" sz="700" b="0" i="0" u="none" strike="noStrike" kern="1200">
+                        <a:solidFill>
+                          <a:srgbClr val="000000"/>
+                        </a:solidFill>
+                        <a:effectLst/>
+                        <a:latin typeface="대명체 보통" panose="020B0600000101010101" pitchFamily="50" charset="-127"/>
+                        <a:ea typeface="대명체 보통" panose="020B0600000101010101" pitchFamily="50" charset="-127"/>
+                        <a:cs typeface="+mn-cs"/>
+                      </a:endParaRPr>
+                    </a:p>
+                  </a:txBody>
+                  <a:tcPr marL="9525" marR="9525" marT="9525" marB="0" anchor="ctr">
+                    <a:lnL w="6350" cap="flat" cmpd="sng" algn="ctr">
+                      <a:noFill/>
+                      <a:prstDash val="solid"/>
+                      <a:round/>
+                      <a:headEnd type="none" w="med" len="med"/>
+                      <a:tailEnd type="none" w="med" len="med"/>
+                    </a:lnL>
+                    <a:lnR w="6350" cap="flat" cmpd="sng" algn="ctr">
+                      <a:noFill/>
+                      <a:prstDash val="solid"/>
+                      <a:round/>
+                      <a:headEnd type="none" w="med" len="med"/>
+                      <a:tailEnd type="none" w="med" len="med"/>
+                    </a:lnR>
+                    <a:lnT w="6350" cap="flat" cmpd="sng" algn="ctr">
+                      <a:noFill/>
+                      <a:prstDash val="solid"/>
+                      <a:round/>
+                      <a:headEnd type="none" w="med" len="med"/>
+                      <a:tailEnd type="none" w="med" len="med"/>
+                    </a:lnT>
+                    <a:lnB w="6350" cap="flat" cmpd="sng" algn="ctr">
+                      <a:noFill/>
+                      <a:prstDash val="solid"/>
+                      <a:round/>
+                      <a:headEnd type="none" w="med" len="med"/>
+                      <a:tailEnd type="none" w="med" len="med"/>
+                    </a:lnB>
+                    <a:lnTlToBr w="12700" cmpd="sng">
+                      <a:noFill/>
+                      <a:prstDash val="solid"/>
+                    </a:lnTlToBr>
+                    <a:lnBlToTr w="12700" cmpd="sng">
+                      <a:noFill/>
+                      <a:prstDash val="solid"/>
+                    </a:lnBlToTr>
+                  </a:tcPr>
+                </a:tc>
+                <a:tc>
+                  <a:txBody>
+                    <a:bodyPr/>
+                    <a:lstStyle/>
+                    <a:p>
+                      <a:pPr algn="r" rtl="0" fontAlgn="ctr"/>
+                      <a:r>
+                        <a:rPr lang="en-US" altLang="ko-KR" sz="700" b="0" i="0" u="none" strike="noStrike" kern="1200">
+                          <a:solidFill>
+                            <a:srgbClr val="000000"/>
+                          </a:solidFill>
+                          <a:effectLst/>
+                          <a:latin typeface="대명체 보통" panose="020B0600000101010101" pitchFamily="50" charset="-127"/>
+                          <a:ea typeface="대명체 보통" panose="020B0600000101010101" pitchFamily="50" charset="-127"/>
+                          <a:cs typeface="+mn-cs"/>
+                        </a:rPr>
+                        <a:t>72,351</a:t>
+                      </a:r>
+                    </a:p>
+                  </a:txBody>
+                  <a:tcPr marL="9525" marR="9525" marT="9525" marB="0" anchor="ctr">
+                    <a:lnL w="6350" cap="flat" cmpd="sng" algn="ctr">
+                      <a:noFill/>
+                      <a:prstDash val="solid"/>
+                      <a:round/>
+                      <a:headEnd type="none" w="med" len="med"/>
+                      <a:tailEnd type="none" w="med" len="med"/>
+                    </a:lnL>
+                    <a:lnR w="6350" cap="flat" cmpd="sng" algn="ctr">
+                      <a:noFill/>
+                      <a:prstDash val="solid"/>
+                      <a:round/>
+                      <a:headEnd type="none" w="med" len="med"/>
+                      <a:tailEnd type="none" w="med" len="med"/>
+                    </a:lnR>
+                    <a:lnT w="6350" cap="flat" cmpd="sng" algn="ctr">
+                      <a:solidFill>
+                        <a:schemeClr val="bg2">
+                          <a:lumMod val="75000"/>
+                        </a:schemeClr>
+                      </a:solidFill>
+                      <a:prstDash val="solid"/>
+                      <a:round/>
+                      <a:headEnd type="none" w="med" len="med"/>
+                      <a:tailEnd type="none" w="med" len="med"/>
+                    </a:lnT>
+                    <a:lnB w="6350" cap="flat" cmpd="sng" algn="ctr">
+                      <a:noFill/>
+                      <a:prstDash val="solid"/>
+                      <a:round/>
+                      <a:headEnd type="none" w="med" len="med"/>
+                      <a:tailEnd type="none" w="med" len="med"/>
+                    </a:lnB>
+                  </a:tcPr>
+                </a:tc>
+                <a:tc>
+                  <a:txBody>
+                    <a:bodyPr/>
+                    <a:lstStyle/>
+                    <a:p>
+                      <a:pPr algn="r" rtl="0" fontAlgn="ctr"/>
+                      <a:r>
+                        <a:rPr lang="en-US" altLang="ko-KR" sz="700" b="0" i="0" u="none" strike="noStrike" kern="1200">
+                          <a:solidFill>
+                            <a:srgbClr val="000000"/>
+                          </a:solidFill>
+                          <a:effectLst/>
+                          <a:latin typeface="대명체 보통" panose="020B0600000101010101" pitchFamily="50" charset="-127"/>
+                          <a:ea typeface="대명체 보통" panose="020B0600000101010101" pitchFamily="50" charset="-127"/>
+                          <a:cs typeface="+mn-cs"/>
+                        </a:rPr>
+                        <a:t>14%</a:t>
+                      </a:r>
+                    </a:p>
+                  </a:txBody>
+                  <a:tcPr marL="9525" marR="9525" marT="9525" marB="0" anchor="ctr">
+                    <a:lnL w="6350" cap="flat" cmpd="sng" algn="ctr">
+                      <a:noFill/>
+                      <a:prstDash val="solid"/>
+                      <a:round/>
+                      <a:headEnd type="none" w="med" len="med"/>
+                      <a:tailEnd type="none" w="med" len="med"/>
+                    </a:lnL>
+                    <a:lnR w="6350" cap="flat" cmpd="sng" algn="ctr">
+                      <a:solidFill>
+                        <a:schemeClr val="bg2">
+                          <a:lumMod val="75000"/>
+                        </a:schemeClr>
+                      </a:solidFill>
+                      <a:prstDash val="solid"/>
+                      <a:round/>
+                      <a:headEnd type="none" w="med" len="med"/>
+                      <a:tailEnd type="none" w="med" len="med"/>
+                    </a:lnR>
+                    <a:lnT w="6350" cap="flat" cmpd="sng" algn="ctr">
+                      <a:solidFill>
+                        <a:schemeClr val="bg2">
+                          <a:lumMod val="75000"/>
+                        </a:schemeClr>
+                      </a:solidFill>
+                      <a:prstDash val="solid"/>
+                      <a:round/>
+                      <a:headEnd type="none" w="med" len="med"/>
+                      <a:tailEnd type="none" w="med" len="med"/>
+                    </a:lnT>
+                    <a:lnB w="6350" cap="flat" cmpd="sng" algn="ctr">
+                      <a:noFill/>
+                      <a:prstDash val="solid"/>
+                      <a:round/>
+                      <a:headEnd type="none" w="med" len="med"/>
+                      <a:tailEnd type="none" w="med" len="med"/>
+                    </a:lnB>
+                  </a:tcPr>
+                </a:tc>
+                <a:tc>
+                  <a:txBody>
+                    <a:bodyPr/>
+                    <a:lstStyle/>
+                    <a:p>
+                      <a:pPr algn="r" rtl="0" fontAlgn="ctr"/>
+                      <a:r>
+                        <a:rPr lang="en-US" altLang="ko-KR" sz="700" b="0" i="0" u="none" strike="noStrike" kern="1200">
+                          <a:solidFill>
+                            <a:srgbClr val="000000"/>
+                          </a:solidFill>
+                          <a:effectLst/>
+                          <a:latin typeface="대명체 보통" panose="020B0600000101010101" pitchFamily="50" charset="-127"/>
+                          <a:ea typeface="대명체 보통" panose="020B0600000101010101" pitchFamily="50" charset="-127"/>
+                          <a:cs typeface="+mn-cs"/>
+                        </a:rPr>
+                        <a:t>83,186</a:t>
+                      </a:r>
+                    </a:p>
+                  </a:txBody>
+                  <a:tcPr marL="9525" marR="9525" marT="9525" marB="0" anchor="ctr">
+                    <a:lnL w="6350" cap="flat" cmpd="sng" algn="ctr">
+                      <a:solidFill>
+                        <a:schemeClr val="bg2">
+                          <a:lumMod val="75000"/>
+                        </a:schemeClr>
+                      </a:solidFill>
+                      <a:prstDash val="solid"/>
+                      <a:round/>
+                      <a:headEnd type="none" w="med" len="med"/>
+                      <a:tailEnd type="none" w="med" len="med"/>
+                    </a:lnL>
+                    <a:lnR w="6350" cap="flat" cmpd="sng" algn="ctr">
+                      <a:noFill/>
                       <a:prstDash val="solid"/>
                       <a:round/>
                       <a:headEnd type="none" w="med" len="med"/>
@@ -14677,294 +14965,6 @@
                   </a:txBody>
                   <a:tcPr marL="9525" marR="9525" marT="9525" marB="0" anchor="ctr">
                     <a:lnL w="6350" cap="flat" cmpd="sng" algn="ctr">
-                      <a:solidFill>
-                        <a:schemeClr val="bg2">
-                          <a:lumMod val="75000"/>
-                        </a:schemeClr>
-                      </a:solidFill>
-                      <a:prstDash val="solid"/>
-                      <a:round/>
-                      <a:headEnd type="none" w="med" len="med"/>
-                      <a:tailEnd type="none" w="med" len="med"/>
-                    </a:lnL>
-                    <a:lnR w="6350" cap="flat" cmpd="sng" algn="ctr">
-                      <a:noFill/>
-                      <a:prstDash val="solid"/>
-                      <a:round/>
-                      <a:headEnd type="none" w="med" len="med"/>
-                      <a:tailEnd type="none" w="med" len="med"/>
-                    </a:lnR>
-                    <a:lnT w="6350" cap="flat" cmpd="sng" algn="ctr">
-                      <a:solidFill>
-                        <a:schemeClr val="bg2">
-                          <a:lumMod val="75000"/>
-                        </a:schemeClr>
-                      </a:solidFill>
-                      <a:prstDash val="solid"/>
-                      <a:round/>
-                      <a:headEnd type="none" w="med" len="med"/>
-                      <a:tailEnd type="none" w="med" len="med"/>
-                    </a:lnT>
-                    <a:lnB w="6350" cap="flat" cmpd="sng" algn="ctr">
-                      <a:noFill/>
-                      <a:prstDash val="solid"/>
-                      <a:round/>
-                      <a:headEnd type="none" w="med" len="med"/>
-                      <a:tailEnd type="none" w="med" len="med"/>
-                    </a:lnB>
-                  </a:tcPr>
-                </a:tc>
-                <a:tc>
-                  <a:txBody>
-                    <a:bodyPr/>
-                    <a:lstStyle/>
-                    <a:p>
-                      <a:pPr algn="r" fontAlgn="ctr"/>
-                      <a:endParaRPr lang="ko-KR" altLang="en-US" sz="700" b="0" i="0" u="none" strike="noStrike" kern="1200">
-                        <a:solidFill>
-                          <a:srgbClr val="000000"/>
-                        </a:solidFill>
-                        <a:effectLst/>
-                        <a:latin typeface="대명체 보통" panose="020B0600000101010101" pitchFamily="50" charset="-127"/>
-                        <a:ea typeface="대명체 보통" panose="020B0600000101010101" pitchFamily="50" charset="-127"/>
-                        <a:cs typeface="+mn-cs"/>
-                      </a:endParaRPr>
-                    </a:p>
-                  </a:txBody>
-                  <a:tcPr marL="9525" marR="9525" marT="9525" marB="0" anchor="ctr">
-                    <a:lnL w="6350" cap="flat" cmpd="sng" algn="ctr">
-                      <a:noFill/>
-                      <a:prstDash val="solid"/>
-                      <a:round/>
-                      <a:headEnd type="none" w="med" len="med"/>
-                      <a:tailEnd type="none" w="med" len="med"/>
-                    </a:lnL>
-                    <a:lnR w="6350" cap="flat" cmpd="sng" algn="ctr">
-                      <a:noFill/>
-                      <a:prstDash val="solid"/>
-                      <a:round/>
-                      <a:headEnd type="none" w="med" len="med"/>
-                      <a:tailEnd type="none" w="med" len="med"/>
-                    </a:lnR>
-                    <a:lnT w="6350" cap="flat" cmpd="sng" algn="ctr">
-                      <a:noFill/>
-                      <a:prstDash val="solid"/>
-                      <a:round/>
-                      <a:headEnd type="none" w="med" len="med"/>
-                      <a:tailEnd type="none" w="med" len="med"/>
-                    </a:lnT>
-                    <a:lnB w="6350" cap="flat" cmpd="sng" algn="ctr">
-                      <a:noFill/>
-                      <a:prstDash val="solid"/>
-                      <a:round/>
-                      <a:headEnd type="none" w="med" len="med"/>
-                      <a:tailEnd type="none" w="med" len="med"/>
-                    </a:lnB>
-                    <a:lnTlToBr w="12700" cmpd="sng">
-                      <a:noFill/>
-                      <a:prstDash val="solid"/>
-                    </a:lnTlToBr>
-                    <a:lnBlToTr w="12700" cmpd="sng">
-                      <a:noFill/>
-                      <a:prstDash val="solid"/>
-                    </a:lnBlToTr>
-                  </a:tcPr>
-                </a:tc>
-                <a:tc>
-                  <a:txBody>
-                    <a:bodyPr/>
-                    <a:lstStyle/>
-                    <a:p>
-                      <a:pPr algn="r" rtl="0" fontAlgn="ctr"/>
-                      <a:r>
-                        <a:rPr lang="en-US" altLang="ko-KR" sz="700" b="0" i="0" u="none" strike="noStrike" kern="1200">
-                          <a:solidFill>
-                            <a:srgbClr val="000000"/>
-                          </a:solidFill>
-                          <a:effectLst/>
-                          <a:latin typeface="대명체 보통" panose="020B0600000101010101" pitchFamily="50" charset="-127"/>
-                          <a:ea typeface="대명체 보통" panose="020B0600000101010101" pitchFamily="50" charset="-127"/>
-                          <a:cs typeface="+mn-cs"/>
-                        </a:rPr>
-                        <a:t>72,351</a:t>
-                      </a:r>
-                    </a:p>
-                  </a:txBody>
-                  <a:tcPr marL="9525" marR="9525" marT="9525" marB="0" anchor="ctr">
-                    <a:lnL w="6350" cap="flat" cmpd="sng" algn="ctr">
-                      <a:noFill/>
-                      <a:prstDash val="solid"/>
-                      <a:round/>
-                      <a:headEnd type="none" w="med" len="med"/>
-                      <a:tailEnd type="none" w="med" len="med"/>
-                    </a:lnL>
-                    <a:lnR w="6350" cap="flat" cmpd="sng" algn="ctr">
-                      <a:noFill/>
-                      <a:prstDash val="solid"/>
-                      <a:round/>
-                      <a:headEnd type="none" w="med" len="med"/>
-                      <a:tailEnd type="none" w="med" len="med"/>
-                    </a:lnR>
-                    <a:lnT w="6350" cap="flat" cmpd="sng" algn="ctr">
-                      <a:solidFill>
-                        <a:schemeClr val="bg2">
-                          <a:lumMod val="75000"/>
-                        </a:schemeClr>
-                      </a:solidFill>
-                      <a:prstDash val="solid"/>
-                      <a:round/>
-                      <a:headEnd type="none" w="med" len="med"/>
-                      <a:tailEnd type="none" w="med" len="med"/>
-                    </a:lnT>
-                    <a:lnB w="6350" cap="flat" cmpd="sng" algn="ctr">
-                      <a:noFill/>
-                      <a:prstDash val="solid"/>
-                      <a:round/>
-                      <a:headEnd type="none" w="med" len="med"/>
-                      <a:tailEnd type="none" w="med" len="med"/>
-                    </a:lnB>
-                  </a:tcPr>
-                </a:tc>
-                <a:tc>
-                  <a:txBody>
-                    <a:bodyPr/>
-                    <a:lstStyle/>
-                    <a:p>
-                      <a:pPr algn="r" rtl="0" fontAlgn="ctr"/>
-                      <a:r>
-                        <a:rPr lang="en-US" altLang="ko-KR" sz="700" b="0" i="0" u="none" strike="noStrike" kern="1200">
-                          <a:solidFill>
-                            <a:srgbClr val="000000"/>
-                          </a:solidFill>
-                          <a:effectLst/>
-                          <a:latin typeface="대명체 보통" panose="020B0600000101010101" pitchFamily="50" charset="-127"/>
-                          <a:ea typeface="대명체 보통" panose="020B0600000101010101" pitchFamily="50" charset="-127"/>
-                          <a:cs typeface="+mn-cs"/>
-                        </a:rPr>
-                        <a:t>14%</a:t>
-                      </a:r>
-                    </a:p>
-                  </a:txBody>
-                  <a:tcPr marL="9525" marR="9525" marT="9525" marB="0" anchor="ctr">
-                    <a:lnL w="6350" cap="flat" cmpd="sng" algn="ctr">
-                      <a:noFill/>
-                      <a:prstDash val="solid"/>
-                      <a:round/>
-                      <a:headEnd type="none" w="med" len="med"/>
-                      <a:tailEnd type="none" w="med" len="med"/>
-                    </a:lnL>
-                    <a:lnR w="6350" cap="flat" cmpd="sng" algn="ctr">
-                      <a:solidFill>
-                        <a:schemeClr val="bg2">
-                          <a:lumMod val="75000"/>
-                        </a:schemeClr>
-                      </a:solidFill>
-                      <a:prstDash val="solid"/>
-                      <a:round/>
-                      <a:headEnd type="none" w="med" len="med"/>
-                      <a:tailEnd type="none" w="med" len="med"/>
-                    </a:lnR>
-                    <a:lnT w="6350" cap="flat" cmpd="sng" algn="ctr">
-                      <a:solidFill>
-                        <a:schemeClr val="bg2">
-                          <a:lumMod val="75000"/>
-                        </a:schemeClr>
-                      </a:solidFill>
-                      <a:prstDash val="solid"/>
-                      <a:round/>
-                      <a:headEnd type="none" w="med" len="med"/>
-                      <a:tailEnd type="none" w="med" len="med"/>
-                    </a:lnT>
-                    <a:lnB w="6350" cap="flat" cmpd="sng" algn="ctr">
-                      <a:noFill/>
-                      <a:prstDash val="solid"/>
-                      <a:round/>
-                      <a:headEnd type="none" w="med" len="med"/>
-                      <a:tailEnd type="none" w="med" len="med"/>
-                    </a:lnB>
-                  </a:tcPr>
-                </a:tc>
-                <a:tc>
-                  <a:txBody>
-                    <a:bodyPr/>
-                    <a:lstStyle/>
-                    <a:p>
-                      <a:pPr algn="r" rtl="0" fontAlgn="ctr"/>
-                      <a:r>
-                        <a:rPr lang="en-US" altLang="ko-KR" sz="700" b="0" i="0" u="none" strike="noStrike" kern="1200">
-                          <a:solidFill>
-                            <a:srgbClr val="000000"/>
-                          </a:solidFill>
-                          <a:effectLst/>
-                          <a:latin typeface="대명체 보통" panose="020B0600000101010101" pitchFamily="50" charset="-127"/>
-                          <a:ea typeface="대명체 보통" panose="020B0600000101010101" pitchFamily="50" charset="-127"/>
-                          <a:cs typeface="+mn-cs"/>
-                        </a:rPr>
-                        <a:t>83,225</a:t>
-                      </a:r>
-                    </a:p>
-                  </a:txBody>
-                  <a:tcPr marL="9525" marR="9525" marT="9525" marB="0" anchor="ctr">
-                    <a:lnL w="6350" cap="flat" cmpd="sng" algn="ctr">
-                      <a:solidFill>
-                        <a:schemeClr val="bg2">
-                          <a:lumMod val="75000"/>
-                        </a:schemeClr>
-                      </a:solidFill>
-                      <a:prstDash val="solid"/>
-                      <a:round/>
-                      <a:headEnd type="none" w="med" len="med"/>
-                      <a:tailEnd type="none" w="med" len="med"/>
-                    </a:lnL>
-                    <a:lnR w="6350" cap="flat" cmpd="sng" algn="ctr">
-                      <a:noFill/>
-                      <a:prstDash val="solid"/>
-                      <a:round/>
-                      <a:headEnd type="none" w="med" len="med"/>
-                      <a:tailEnd type="none" w="med" len="med"/>
-                    </a:lnR>
-                    <a:lnT w="6350" cap="flat" cmpd="sng" algn="ctr">
-                      <a:solidFill>
-                        <a:schemeClr val="bg2">
-                          <a:lumMod val="75000"/>
-                        </a:schemeClr>
-                      </a:solidFill>
-                      <a:prstDash val="solid"/>
-                      <a:round/>
-                      <a:headEnd type="none" w="med" len="med"/>
-                      <a:tailEnd type="none" w="med" len="med"/>
-                    </a:lnT>
-                    <a:lnB w="6350" cap="flat" cmpd="sng" algn="ctr">
-                      <a:noFill/>
-                      <a:prstDash val="solid"/>
-                      <a:round/>
-                      <a:headEnd type="none" w="med" len="med"/>
-                      <a:tailEnd type="none" w="med" len="med"/>
-                    </a:lnB>
-                  </a:tcPr>
-                </a:tc>
-                <a:tc>
-                  <a:txBody>
-                    <a:bodyPr/>
-                    <a:lstStyle/>
-                    <a:p>
-                      <a:pPr algn="r" rtl="0" fontAlgn="ctr"/>
-                      <a:r>
-                        <a:rPr lang="en-US" altLang="ko-KR" sz="700" b="0" i="0" u="none" strike="noStrike" kern="1200">
-                          <a:solidFill>
-                            <a:srgbClr val="000000"/>
-                          </a:solidFill>
-                          <a:effectLst/>
-                          <a:latin typeface="대명체 보통" panose="020B0600000101010101" pitchFamily="50" charset="-127"/>
-                          <a:ea typeface="대명체 보통" panose="020B0600000101010101" pitchFamily="50" charset="-127"/>
-                          <a:cs typeface="+mn-cs"/>
-                        </a:rPr>
-                        <a:t>23%</a:t>
-                      </a:r>
-                    </a:p>
-                  </a:txBody>
-                  <a:tcPr marL="9525" marR="9525" marT="9525" marB="0" anchor="ctr">
-                    <a:lnL w="6350" cap="flat" cmpd="sng" algn="ctr">
                       <a:noFill/>
                       <a:prstDash val="solid"/>
                       <a:round/>
@@ -15018,7 +15018,7 @@
                           <a:ea typeface="대명체 보통" panose="020B0600000101010101" pitchFamily="50" charset="-127"/>
                           <a:cs typeface="+mn-cs"/>
                         </a:rPr>
-                        <a:t>10,874</a:t>
+                        <a:t>10,835</a:t>
                       </a:r>
                     </a:p>
                   </a:txBody>
@@ -15144,7 +15144,7 @@
                           <a:ea typeface="대명체 보통" panose="020B0600000101010101" pitchFamily="50" charset="-127"/>
                           <a:cs typeface="+mn-cs"/>
                         </a:rPr>
-                        <a:t>58,169</a:t>
+                        <a:t>58,265</a:t>
                       </a:r>
                     </a:p>
                   </a:txBody>
@@ -15262,7 +15262,7 @@
                           <a:ea typeface="대명체 보통" panose="020B0600000101010101" pitchFamily="50" charset="-127"/>
                           <a:cs typeface="+mn-cs"/>
                         </a:rPr>
-                        <a:t>25,056</a:t>
+                        <a:t>24,921</a:t>
                       </a:r>
                     </a:p>
                   </a:txBody>
@@ -15643,7 +15643,7 @@
                           <a:ea typeface="대명체 보통" panose="020B0600000101010101" pitchFamily="50" charset="-127"/>
                           <a:cs typeface="+mn-cs"/>
                         </a:rPr>
-                        <a:t>9,977</a:t>
+                        <a:t>9,944</a:t>
                       </a:r>
                     </a:p>
                   </a:txBody>
@@ -15753,7 +15753,7 @@
                           <a:ea typeface="대명체 보통" panose="020B0600000101010101" pitchFamily="50" charset="-127"/>
                           <a:cs typeface="+mn-cs"/>
                         </a:rPr>
-                        <a:t>1,120</a:t>
+                        <a:t>1,087</a:t>
                       </a:r>
                       <a:endParaRPr lang="en-US" altLang="ko-KR" sz="700" b="0" i="0" u="none" strike="noStrike" kern="1200" dirty="0">
                         <a:solidFill>
@@ -15821,7 +15821,7 @@
                           <a:ea typeface="대명체 보통" panose="020B0600000101010101" pitchFamily="50" charset="-127"/>
                           <a:cs typeface="+mn-cs"/>
                         </a:rPr>
-                        <a:t>113%</a:t>
+                        <a:t>112%</a:t>
                       </a:r>
                     </a:p>
                   </a:txBody>
@@ -15880,7 +15880,7 @@
                           <a:ea typeface="대명체 보통" panose="020B0600000101010101" pitchFamily="50" charset="-127"/>
                           <a:cs typeface="+mn-cs"/>
                         </a:rPr>
-                        <a:t>7,556</a:t>
+                        <a:t>7,601</a:t>
                       </a:r>
                     </a:p>
                   </a:txBody>
@@ -15990,7 +15990,7 @@
                           <a:ea typeface="대명체 보통" panose="020B0600000101010101" pitchFamily="50" charset="-127"/>
                           <a:cs typeface="+mn-cs"/>
                         </a:rPr>
-                        <a:t>2,421</a:t>
+                        <a:t>2,343</a:t>
                       </a:r>
                     </a:p>
                   </a:txBody>
@@ -16049,7 +16049,7 @@
                           <a:ea typeface="대명체 보통" panose="020B0600000101010101" pitchFamily="50" charset="-127"/>
                           <a:cs typeface="+mn-cs"/>
                         </a:rPr>
-                        <a:t>32%</a:t>
+                        <a:t>31%</a:t>
                       </a:r>
                     </a:p>
                   </a:txBody>
@@ -16266,7 +16266,7 @@
                           <a:ea typeface="대명체 보통" panose="020B0600000101010101" pitchFamily="50" charset="-127"/>
                           <a:cs typeface="+mn-cs"/>
                         </a:rPr>
-                        <a:t>54,072</a:t>
+                        <a:t>54,039</a:t>
                       </a:r>
                     </a:p>
                   </a:txBody>
@@ -16376,7 +16376,7 @@
                           <a:ea typeface="대명체 보통" panose="020B0600000101010101" pitchFamily="50" charset="-127"/>
                           <a:cs typeface="+mn-cs"/>
                         </a:rPr>
-                        <a:t>4,969</a:t>
+                        <a:t>4,936</a:t>
                       </a:r>
                     </a:p>
                   </a:txBody>
@@ -16494,7 +16494,7 @@
                           <a:ea typeface="대명체 보통" panose="020B0600000101010101" pitchFamily="50" charset="-127"/>
                           <a:cs typeface="+mn-cs"/>
                         </a:rPr>
-                        <a:t>40,309</a:t>
+                        <a:t>40,354</a:t>
                       </a:r>
                     </a:p>
                   </a:txBody>
@@ -16604,7 +16604,7 @@
                           <a:ea typeface="대명체 보통" panose="020B0600000101010101" pitchFamily="50" charset="-127"/>
                           <a:cs typeface="+mn-cs"/>
                         </a:rPr>
-                        <a:t>13,763</a:t>
+                        <a:t>13,685</a:t>
                       </a:r>
                     </a:p>
                   </a:txBody>
@@ -16999,7 +16999,7 @@
                           <a:ea typeface="대명체 보통" panose="020B0600000101010101" pitchFamily="50" charset="-127"/>
                           <a:cs typeface="+mn-cs"/>
                         </a:rPr>
-                        <a:t>528</a:t>
+                        <a:t>525</a:t>
                       </a:r>
                       <a:endParaRPr lang="en-US" altLang="ko-KR" sz="700" b="0" i="0" u="none" strike="noStrike" kern="1200" dirty="0">
                         <a:solidFill>
@@ -17126,7 +17126,7 @@
                           <a:ea typeface="대명체 보통" panose="020B0600000101010101" pitchFamily="50" charset="-127"/>
                           <a:cs typeface="+mn-cs"/>
                         </a:rPr>
-                        <a:t>129</a:t>
+                        <a:t>127</a:t>
                       </a:r>
                       <a:endParaRPr lang="en-US" altLang="ko-KR" sz="700" b="0" i="0" u="none" strike="noStrike" kern="1200" dirty="0">
                         <a:solidFill>
@@ -17388,7 +17388,7 @@
                           <a:ea typeface="대명체 보통" panose="020B0600000101010101" pitchFamily="50" charset="-127"/>
                           <a:cs typeface="+mn-cs"/>
                         </a:rPr>
-                        <a:t>146</a:t>
+                        <a:t>143</a:t>
                       </a:r>
                     </a:p>
                   </a:txBody>
@@ -17451,7 +17451,7 @@
                           <a:ea typeface="대명체 보통" panose="020B0600000101010101" pitchFamily="50" charset="-127"/>
                           <a:cs typeface="+mn-cs"/>
                         </a:rPr>
-                        <a:t>38%</a:t>
+                        <a:t>37%</a:t>
                       </a:r>
                     </a:p>
                   </a:txBody>
@@ -17680,7 +17680,7 @@
                           <a:ea typeface="대명체 보통" panose="020B0600000101010101" pitchFamily="50" charset="-127"/>
                           <a:cs typeface="+mn-cs"/>
                         </a:rPr>
-                        <a:t>5,181</a:t>
+                        <a:t>5,179</a:t>
                       </a:r>
                     </a:p>
                   </a:txBody>
@@ -17798,7 +17798,7 @@
                           <a:ea typeface="대명체 보통" panose="020B0600000101010101" pitchFamily="50" charset="-127"/>
                           <a:cs typeface="+mn-cs"/>
                         </a:rPr>
-                        <a:t>1,714</a:t>
+                        <a:t>1,712</a:t>
                       </a:r>
                       <a:endParaRPr lang="en-US" altLang="ko-KR" sz="700" b="0" i="0" u="none" strike="noStrike" kern="1200" dirty="0">
                         <a:solidFill>
@@ -17933,7 +17933,7 @@
                           <a:ea typeface="대명체 보통" panose="020B0600000101010101" pitchFamily="50" charset="-127"/>
                           <a:cs typeface="+mn-cs"/>
                         </a:rPr>
-                        <a:t>3,220</a:t>
+                        <a:t>3,221</a:t>
                       </a:r>
                     </a:p>
                   </a:txBody>
@@ -18051,7 +18051,7 @@
                           <a:ea typeface="대명체 보통" panose="020B0600000101010101" pitchFamily="50" charset="-127"/>
                           <a:cs typeface="+mn-cs"/>
                         </a:rPr>
-                        <a:t>1,961</a:t>
+                        <a:t>1,958</a:t>
                       </a:r>
                     </a:p>
                   </a:txBody>

--- a/data/세일즈마케팅_예상매출현황.pptx
+++ b/data/세일즈마케팅_예상매출현황.pptx
@@ -12756,7 +12756,7 @@
                           <a:ea typeface="대명체 보통" panose="020B0600000101010101" pitchFamily="50" charset="-127"/>
                           <a:cs typeface="+mn-cs"/>
                         </a:rPr>
-                        <a:t>25,934</a:t>
+                        <a:t>25,806</a:t>
                       </a:r>
                     </a:p>
                   </a:txBody>
@@ -12882,7 +12882,7 @@
                           <a:ea typeface="대명체 보통" panose="020B0600000101010101" pitchFamily="50" charset="-127"/>
                           <a:cs typeface="+mn-cs"/>
                         </a:rPr>
-                        <a:t>2,074</a:t>
+                        <a:t>1,947</a:t>
                       </a:r>
                     </a:p>
                   </a:txBody>
@@ -12949,7 +12949,7 @@
                           <a:ea typeface="대명체 보통" panose="020B0600000101010101" pitchFamily="50" charset="-127"/>
                           <a:cs typeface="+mn-cs"/>
                         </a:rPr>
-                        <a:t>109%</a:t>
+                        <a:t>108%</a:t>
                       </a:r>
                     </a:p>
                   </a:txBody>
@@ -13016,7 +13016,7 @@
                           <a:ea typeface="대명체 보통" panose="020B0600000101010101" pitchFamily="50" charset="-127"/>
                           <a:cs typeface="+mn-cs"/>
                         </a:rPr>
-                        <a:t>20,675</a:t>
+                        <a:t>20,829</a:t>
                       </a:r>
                     </a:p>
                   </a:txBody>
@@ -13142,7 +13142,7 @@
                           <a:ea typeface="대명체 보통" panose="020B0600000101010101" pitchFamily="50" charset="-127"/>
                           <a:cs typeface="+mn-cs"/>
                         </a:rPr>
-                        <a:t>5,259</a:t>
+                        <a:t>4,977</a:t>
                       </a:r>
                     </a:p>
                   </a:txBody>
@@ -13209,7 +13209,7 @@
                           <a:ea typeface="대명체 보통" panose="020B0600000101010101" pitchFamily="50" charset="-127"/>
                           <a:cs typeface="+mn-cs"/>
                         </a:rPr>
-                        <a:t>25%</a:t>
+                        <a:t>24%</a:t>
                       </a:r>
                     </a:p>
                   </a:txBody>
@@ -13450,7 +13450,7 @@
                           <a:ea typeface="대명체 보통" panose="020B0600000101010101" pitchFamily="50" charset="-127"/>
                           <a:cs typeface="+mn-cs"/>
                         </a:rPr>
-                        <a:t>142,403</a:t>
+                        <a:t>142,276</a:t>
                       </a:r>
                     </a:p>
                   </a:txBody>
@@ -13576,7 +13576,7 @@
                           <a:ea typeface="대명체 보통" panose="020B0600000101010101" pitchFamily="50" charset="-127"/>
                           <a:cs typeface="+mn-cs"/>
                         </a:rPr>
-                        <a:t>17,482</a:t>
+                        <a:t>17,354</a:t>
                       </a:r>
                     </a:p>
                   </a:txBody>
@@ -13710,7 +13710,7 @@
                           <a:ea typeface="대명체 보통" panose="020B0600000101010101" pitchFamily="50" charset="-127"/>
                           <a:cs typeface="+mn-cs"/>
                         </a:rPr>
-                        <a:t>101,839</a:t>
+                        <a:t>101,993</a:t>
                       </a:r>
                     </a:p>
                   </a:txBody>
@@ -13836,7 +13836,7 @@
                           <a:ea typeface="대명체 보통" panose="020B0600000101010101" pitchFamily="50" charset="-127"/>
                           <a:cs typeface="+mn-cs"/>
                         </a:rPr>
-                        <a:t>40,564</a:t>
+                        <a:t>40,283</a:t>
                       </a:r>
                     </a:p>
                   </a:txBody>
@@ -13903,7 +13903,7 @@
                           <a:ea typeface="대명체 보통" panose="020B0600000101010101" pitchFamily="50" charset="-127"/>
                           <a:cs typeface="+mn-cs"/>
                         </a:rPr>
-                        <a:t>40%</a:t>
+                        <a:t>39%</a:t>
                       </a:r>
                     </a:p>
                   </a:txBody>
@@ -14237,7 +14237,7 @@
                           <a:ea typeface="대명체 보통" panose="020B0600000101010101" pitchFamily="50" charset="-127"/>
                           <a:cs typeface="+mn-cs"/>
                         </a:rPr>
-                        <a:t>15,464</a:t>
+                        <a:t>15,394</a:t>
                       </a:r>
                     </a:p>
                   </a:txBody>
@@ -14355,7 +14355,7 @@
                           <a:ea typeface="대명체 보통" panose="020B0600000101010101" pitchFamily="50" charset="-127"/>
                           <a:cs typeface="+mn-cs"/>
                         </a:rPr>
-                        <a:t>860</a:t>
+                        <a:t>790</a:t>
                       </a:r>
                       <a:endParaRPr lang="en-US" altLang="ko-KR" sz="700" b="0" i="0" u="none" strike="noStrike" kern="1200" dirty="0">
                         <a:solidFill>
@@ -14427,7 +14427,7 @@
                           <a:ea typeface="대명체 보통" panose="020B0600000101010101" pitchFamily="50" charset="-127"/>
                           <a:cs typeface="+mn-cs"/>
                         </a:rPr>
-                        <a:t>106%</a:t>
+                        <a:t>105%</a:t>
                       </a:r>
                     </a:p>
                   </a:txBody>
@@ -14490,7 +14490,7 @@
                           <a:ea typeface="대명체 보통" panose="020B0600000101010101" pitchFamily="50" charset="-127"/>
                           <a:cs typeface="+mn-cs"/>
                         </a:rPr>
-                        <a:t>12,692</a:t>
+                        <a:t>12,795</a:t>
                       </a:r>
                     </a:p>
                   </a:txBody>
@@ -14608,7 +14608,7 @@
                           <a:ea typeface="대명체 보통" panose="020B0600000101010101" pitchFamily="50" charset="-127"/>
                           <a:cs typeface="+mn-cs"/>
                         </a:rPr>
-                        <a:t>2,772</a:t>
+                        <a:t>2,600</a:t>
                       </a:r>
                     </a:p>
                   </a:txBody>
@@ -14671,7 +14671,7 @@
                           <a:ea typeface="대명체 보통" panose="020B0600000101010101" pitchFamily="50" charset="-127"/>
                           <a:cs typeface="+mn-cs"/>
                         </a:rPr>
-                        <a:t>22%</a:t>
+                        <a:t>20%</a:t>
                       </a:r>
                     </a:p>
                   </a:txBody>
@@ -14900,7 +14900,7 @@
                           <a:ea typeface="대명체 보통" panose="020B0600000101010101" pitchFamily="50" charset="-127"/>
                           <a:cs typeface="+mn-cs"/>
                         </a:rPr>
-                        <a:t>83,186</a:t>
+                        <a:t>83,116</a:t>
                       </a:r>
                     </a:p>
                   </a:txBody>
@@ -15018,7 +15018,7 @@
                           <a:ea typeface="대명체 보통" panose="020B0600000101010101" pitchFamily="50" charset="-127"/>
                           <a:cs typeface="+mn-cs"/>
                         </a:rPr>
-                        <a:t>10,835</a:t>
+                        <a:t>10,765</a:t>
                       </a:r>
                     </a:p>
                   </a:txBody>
@@ -15144,7 +15144,7 @@
                           <a:ea typeface="대명체 보통" panose="020B0600000101010101" pitchFamily="50" charset="-127"/>
                           <a:cs typeface="+mn-cs"/>
                         </a:rPr>
-                        <a:t>58,265</a:t>
+                        <a:t>58,367</a:t>
                       </a:r>
                     </a:p>
                   </a:txBody>
@@ -15262,7 +15262,7 @@
                           <a:ea typeface="대명체 보통" panose="020B0600000101010101" pitchFamily="50" charset="-127"/>
                           <a:cs typeface="+mn-cs"/>
                         </a:rPr>
-                        <a:t>24,921</a:t>
+                        <a:t>24,748</a:t>
                       </a:r>
                     </a:p>
                   </a:txBody>
@@ -15325,7 +15325,7 @@
                           <a:ea typeface="대명체 보통" panose="020B0600000101010101" pitchFamily="50" charset="-127"/>
                           <a:cs typeface="+mn-cs"/>
                         </a:rPr>
-                        <a:t>43%</a:t>
+                        <a:t>42%</a:t>
                       </a:r>
                     </a:p>
                   </a:txBody>
@@ -15643,7 +15643,7 @@
                           <a:ea typeface="대명체 보통" panose="020B0600000101010101" pitchFamily="50" charset="-127"/>
                           <a:cs typeface="+mn-cs"/>
                         </a:rPr>
-                        <a:t>9,944</a:t>
+                        <a:t>9,893</a:t>
                       </a:r>
                     </a:p>
                   </a:txBody>
@@ -15753,7 +15753,7 @@
                           <a:ea typeface="대명체 보통" panose="020B0600000101010101" pitchFamily="50" charset="-127"/>
                           <a:cs typeface="+mn-cs"/>
                         </a:rPr>
-                        <a:t>1,087</a:t>
+                        <a:t>1,036</a:t>
                       </a:r>
                       <a:endParaRPr lang="en-US" altLang="ko-KR" sz="700" b="0" i="0" u="none" strike="noStrike" kern="1200" dirty="0">
                         <a:solidFill>
@@ -15880,7 +15880,7 @@
                           <a:ea typeface="대명체 보통" panose="020B0600000101010101" pitchFamily="50" charset="-127"/>
                           <a:cs typeface="+mn-cs"/>
                         </a:rPr>
-                        <a:t>7,601</a:t>
+                        <a:t>7,652</a:t>
                       </a:r>
                     </a:p>
                   </a:txBody>
@@ -15990,7 +15990,7 @@
                           <a:ea typeface="대명체 보통" panose="020B0600000101010101" pitchFamily="50" charset="-127"/>
                           <a:cs typeface="+mn-cs"/>
                         </a:rPr>
-                        <a:t>2,343</a:t>
+                        <a:t>2,241</a:t>
                       </a:r>
                     </a:p>
                   </a:txBody>
@@ -16049,7 +16049,7 @@
                           <a:ea typeface="대명체 보통" panose="020B0600000101010101" pitchFamily="50" charset="-127"/>
                           <a:cs typeface="+mn-cs"/>
                         </a:rPr>
-                        <a:t>31%</a:t>
+                        <a:t>29%</a:t>
                       </a:r>
                     </a:p>
                   </a:txBody>
@@ -16266,7 +16266,7 @@
                           <a:ea typeface="대명체 보통" panose="020B0600000101010101" pitchFamily="50" charset="-127"/>
                           <a:cs typeface="+mn-cs"/>
                         </a:rPr>
-                        <a:t>54,039</a:t>
+                        <a:t>53,988</a:t>
                       </a:r>
                     </a:p>
                   </a:txBody>
@@ -16376,7 +16376,7 @@
                           <a:ea typeface="대명체 보통" panose="020B0600000101010101" pitchFamily="50" charset="-127"/>
                           <a:cs typeface="+mn-cs"/>
                         </a:rPr>
-                        <a:t>4,936</a:t>
+                        <a:t>4,884</a:t>
                       </a:r>
                     </a:p>
                   </a:txBody>
@@ -16494,7 +16494,7 @@
                           <a:ea typeface="대명체 보통" panose="020B0600000101010101" pitchFamily="50" charset="-127"/>
                           <a:cs typeface="+mn-cs"/>
                         </a:rPr>
-                        <a:t>40,354</a:t>
+                        <a:t>40,405</a:t>
                       </a:r>
                     </a:p>
                   </a:txBody>
@@ -16604,7 +16604,7 @@
                           <a:ea typeface="대명체 보통" panose="020B0600000101010101" pitchFamily="50" charset="-127"/>
                           <a:cs typeface="+mn-cs"/>
                         </a:rPr>
-                        <a:t>13,685</a:t>
+                        <a:t>13,582</a:t>
                       </a:r>
                     </a:p>
                   </a:txBody>
@@ -16999,7 +16999,7 @@
                           <a:ea typeface="대명체 보통" panose="020B0600000101010101" pitchFamily="50" charset="-127"/>
                           <a:cs typeface="+mn-cs"/>
                         </a:rPr>
-                        <a:t>525</a:t>
+                        <a:t>519</a:t>
                       </a:r>
                       <a:endParaRPr lang="en-US" altLang="ko-KR" sz="700" b="0" i="0" u="none" strike="noStrike" kern="1200" dirty="0">
                         <a:solidFill>
@@ -17126,7 +17126,7 @@
                           <a:ea typeface="대명체 보통" panose="020B0600000101010101" pitchFamily="50" charset="-127"/>
                           <a:cs typeface="+mn-cs"/>
                         </a:rPr>
-                        <a:t>127</a:t>
+                        <a:t>120</a:t>
                       </a:r>
                       <a:endParaRPr lang="en-US" altLang="ko-KR" sz="700" b="0" i="0" u="none" strike="noStrike" kern="1200" dirty="0">
                         <a:solidFill>
@@ -17198,7 +17198,7 @@
                           <a:ea typeface="대명체 보통" panose="020B0600000101010101" pitchFamily="50" charset="-127"/>
                           <a:cs typeface="+mn-cs"/>
                         </a:rPr>
-                        <a:t>132%</a:t>
+                        <a:t>130%</a:t>
                       </a:r>
                     </a:p>
                   </a:txBody>
@@ -17388,7 +17388,7 @@
                           <a:ea typeface="대명체 보통" panose="020B0600000101010101" pitchFamily="50" charset="-127"/>
                           <a:cs typeface="+mn-cs"/>
                         </a:rPr>
-                        <a:t>143</a:t>
+                        <a:t>137</a:t>
                       </a:r>
                     </a:p>
                   </a:txBody>
@@ -17451,7 +17451,7 @@
                           <a:ea typeface="대명체 보통" panose="020B0600000101010101" pitchFamily="50" charset="-127"/>
                           <a:cs typeface="+mn-cs"/>
                         </a:rPr>
-                        <a:t>37%</a:t>
+                        <a:t>36%</a:t>
                       </a:r>
                     </a:p>
                   </a:txBody>
@@ -17680,7 +17680,7 @@
                           <a:ea typeface="대명체 보통" panose="020B0600000101010101" pitchFamily="50" charset="-127"/>
                           <a:cs typeface="+mn-cs"/>
                         </a:rPr>
-                        <a:t>5,179</a:t>
+                        <a:t>5,172</a:t>
                       </a:r>
                     </a:p>
                   </a:txBody>
@@ -17798,7 +17798,7 @@
                           <a:ea typeface="대명체 보통" panose="020B0600000101010101" pitchFamily="50" charset="-127"/>
                           <a:cs typeface="+mn-cs"/>
                         </a:rPr>
-                        <a:t>1,712</a:t>
+                        <a:t>1,705</a:t>
                       </a:r>
                       <a:endParaRPr lang="en-US" altLang="ko-KR" sz="700" b="0" i="0" u="none" strike="noStrike" kern="1200" dirty="0">
                         <a:solidFill>
@@ -18051,7 +18051,7 @@
                           <a:ea typeface="대명체 보통" panose="020B0600000101010101" pitchFamily="50" charset="-127"/>
                           <a:cs typeface="+mn-cs"/>
                         </a:rPr>
-                        <a:t>1,958</a:t>
+                        <a:t>1,952</a:t>
                       </a:r>
                     </a:p>
                   </a:txBody>

--- a/data/세일즈마케팅_예상매출현황.pptx
+++ b/data/세일즈마케팅_예상매출현황.pptx
@@ -12756,7 +12756,7 @@
                           <a:ea typeface="대명체 보통" panose="020B0600000101010101" pitchFamily="50" charset="-127"/>
                           <a:cs typeface="+mn-cs"/>
                         </a:rPr>
-                        <a:t>25,806</a:t>
+                        <a:t>25,797</a:t>
                       </a:r>
                     </a:p>
                   </a:txBody>
@@ -12882,7 +12882,7 @@
                           <a:ea typeface="대명체 보통" panose="020B0600000101010101" pitchFamily="50" charset="-127"/>
                           <a:cs typeface="+mn-cs"/>
                         </a:rPr>
-                        <a:t>1,947</a:t>
+                        <a:t>1,938</a:t>
                       </a:r>
                     </a:p>
                   </a:txBody>
@@ -13142,7 +13142,7 @@
                           <a:ea typeface="대명체 보통" panose="020B0600000101010101" pitchFamily="50" charset="-127"/>
                           <a:cs typeface="+mn-cs"/>
                         </a:rPr>
-                        <a:t>4,977</a:t>
+                        <a:t>4,968</a:t>
                       </a:r>
                     </a:p>
                   </a:txBody>
@@ -13450,7 +13450,7 @@
                           <a:ea typeface="대명체 보통" panose="020B0600000101010101" pitchFamily="50" charset="-127"/>
                           <a:cs typeface="+mn-cs"/>
                         </a:rPr>
-                        <a:t>142,276</a:t>
+                        <a:t>142,267</a:t>
                       </a:r>
                     </a:p>
                   </a:txBody>
@@ -13576,7 +13576,7 @@
                           <a:ea typeface="대명체 보통" panose="020B0600000101010101" pitchFamily="50" charset="-127"/>
                           <a:cs typeface="+mn-cs"/>
                         </a:rPr>
-                        <a:t>17,354</a:t>
+                        <a:t>17,345</a:t>
                       </a:r>
                     </a:p>
                   </a:txBody>
@@ -13836,7 +13836,7 @@
                           <a:ea typeface="대명체 보통" panose="020B0600000101010101" pitchFamily="50" charset="-127"/>
                           <a:cs typeface="+mn-cs"/>
                         </a:rPr>
-                        <a:t>40,283</a:t>
+                        <a:t>40,274</a:t>
                       </a:r>
                     </a:p>
                   </a:txBody>
@@ -14237,7 +14237,7 @@
                           <a:ea typeface="대명체 보통" panose="020B0600000101010101" pitchFamily="50" charset="-127"/>
                           <a:cs typeface="+mn-cs"/>
                         </a:rPr>
-                        <a:t>15,394</a:t>
+                        <a:t>15,391</a:t>
                       </a:r>
                     </a:p>
                   </a:txBody>
@@ -14355,7 +14355,7 @@
                           <a:ea typeface="대명체 보통" panose="020B0600000101010101" pitchFamily="50" charset="-127"/>
                           <a:cs typeface="+mn-cs"/>
                         </a:rPr>
-                        <a:t>790</a:t>
+                        <a:t>787</a:t>
                       </a:r>
                       <a:endParaRPr lang="en-US" altLang="ko-KR" sz="700" b="0" i="0" u="none" strike="noStrike" kern="1200" dirty="0">
                         <a:solidFill>
@@ -14608,7 +14608,7 @@
                           <a:ea typeface="대명체 보통" panose="020B0600000101010101" pitchFamily="50" charset="-127"/>
                           <a:cs typeface="+mn-cs"/>
                         </a:rPr>
-                        <a:t>2,600</a:t>
+                        <a:t>2,597</a:t>
                       </a:r>
                     </a:p>
                   </a:txBody>
@@ -14900,7 +14900,7 @@
                           <a:ea typeface="대명체 보통" panose="020B0600000101010101" pitchFamily="50" charset="-127"/>
                           <a:cs typeface="+mn-cs"/>
                         </a:rPr>
-                        <a:t>83,116</a:t>
+                        <a:t>83,114</a:t>
                       </a:r>
                     </a:p>
                   </a:txBody>
@@ -15018,7 +15018,7 @@
                           <a:ea typeface="대명체 보통" panose="020B0600000101010101" pitchFamily="50" charset="-127"/>
                           <a:cs typeface="+mn-cs"/>
                         </a:rPr>
-                        <a:t>10,765</a:t>
+                        <a:t>10,763</a:t>
                       </a:r>
                     </a:p>
                   </a:txBody>
@@ -15262,7 +15262,7 @@
                           <a:ea typeface="대명체 보통" panose="020B0600000101010101" pitchFamily="50" charset="-127"/>
                           <a:cs typeface="+mn-cs"/>
                         </a:rPr>
-                        <a:t>24,748</a:t>
+                        <a:t>24,746</a:t>
                       </a:r>
                     </a:p>
                   </a:txBody>
@@ -15643,7 +15643,7 @@
                           <a:ea typeface="대명체 보통" panose="020B0600000101010101" pitchFamily="50" charset="-127"/>
                           <a:cs typeface="+mn-cs"/>
                         </a:rPr>
-                        <a:t>9,893</a:t>
+                        <a:t>9,891</a:t>
                       </a:r>
                     </a:p>
                   </a:txBody>
@@ -15753,7 +15753,7 @@
                           <a:ea typeface="대명체 보통" panose="020B0600000101010101" pitchFamily="50" charset="-127"/>
                           <a:cs typeface="+mn-cs"/>
                         </a:rPr>
-                        <a:t>1,036</a:t>
+                        <a:t>1,034</a:t>
                       </a:r>
                       <a:endParaRPr lang="en-US" altLang="ko-KR" sz="700" b="0" i="0" u="none" strike="noStrike" kern="1200" dirty="0">
                         <a:solidFill>
@@ -15990,7 +15990,7 @@
                           <a:ea typeface="대명체 보통" panose="020B0600000101010101" pitchFamily="50" charset="-127"/>
                           <a:cs typeface="+mn-cs"/>
                         </a:rPr>
-                        <a:t>2,241</a:t>
+                        <a:t>2,239</a:t>
                       </a:r>
                     </a:p>
                   </a:txBody>
@@ -16266,7 +16266,7 @@
                           <a:ea typeface="대명체 보통" panose="020B0600000101010101" pitchFamily="50" charset="-127"/>
                           <a:cs typeface="+mn-cs"/>
                         </a:rPr>
-                        <a:t>53,988</a:t>
+                        <a:t>53,985</a:t>
                       </a:r>
                     </a:p>
                   </a:txBody>
@@ -16376,7 +16376,7 @@
                           <a:ea typeface="대명체 보통" panose="020B0600000101010101" pitchFamily="50" charset="-127"/>
                           <a:cs typeface="+mn-cs"/>
                         </a:rPr>
-                        <a:t>4,884</a:t>
+                        <a:t>4,881</a:t>
                       </a:r>
                     </a:p>
                   </a:txBody>
@@ -16604,7 +16604,7 @@
                           <a:ea typeface="대명체 보통" panose="020B0600000101010101" pitchFamily="50" charset="-127"/>
                           <a:cs typeface="+mn-cs"/>
                         </a:rPr>
-                        <a:t>13,582</a:t>
+                        <a:t>13,579</a:t>
                       </a:r>
                     </a:p>
                   </a:txBody>
@@ -16999,7 +16999,7 @@
                           <a:ea typeface="대명체 보통" panose="020B0600000101010101" pitchFamily="50" charset="-127"/>
                           <a:cs typeface="+mn-cs"/>
                         </a:rPr>
-                        <a:t>519</a:t>
+                        <a:t>515</a:t>
                       </a:r>
                       <a:endParaRPr lang="en-US" altLang="ko-KR" sz="700" b="0" i="0" u="none" strike="noStrike" kern="1200" dirty="0">
                         <a:solidFill>
@@ -17126,7 +17126,7 @@
                           <a:ea typeface="대명체 보통" panose="020B0600000101010101" pitchFamily="50" charset="-127"/>
                           <a:cs typeface="+mn-cs"/>
                         </a:rPr>
-                        <a:t>120</a:t>
+                        <a:t>116</a:t>
                       </a:r>
                       <a:endParaRPr lang="en-US" altLang="ko-KR" sz="700" b="0" i="0" u="none" strike="noStrike" kern="1200" dirty="0">
                         <a:solidFill>
@@ -17198,7 +17198,7 @@
                           <a:ea typeface="대명체 보통" panose="020B0600000101010101" pitchFamily="50" charset="-127"/>
                           <a:cs typeface="+mn-cs"/>
                         </a:rPr>
-                        <a:t>130%</a:t>
+                        <a:t>129%</a:t>
                       </a:r>
                     </a:p>
                   </a:txBody>
@@ -17388,7 +17388,7 @@
                           <a:ea typeface="대명체 보통" panose="020B0600000101010101" pitchFamily="50" charset="-127"/>
                           <a:cs typeface="+mn-cs"/>
                         </a:rPr>
-                        <a:t>137</a:t>
+                        <a:t>133</a:t>
                       </a:r>
                     </a:p>
                   </a:txBody>
@@ -17451,7 +17451,7 @@
                           <a:ea typeface="대명체 보통" panose="020B0600000101010101" pitchFamily="50" charset="-127"/>
                           <a:cs typeface="+mn-cs"/>
                         </a:rPr>
-                        <a:t>36%</a:t>
+                        <a:t>35%</a:t>
                       </a:r>
                     </a:p>
                   </a:txBody>
@@ -17680,7 +17680,7 @@
                           <a:ea typeface="대명체 보통" panose="020B0600000101010101" pitchFamily="50" charset="-127"/>
                           <a:cs typeface="+mn-cs"/>
                         </a:rPr>
-                        <a:t>5,172</a:t>
+                        <a:t>5,168</a:t>
                       </a:r>
                     </a:p>
                   </a:txBody>
@@ -17798,7 +17798,7 @@
                           <a:ea typeface="대명체 보통" panose="020B0600000101010101" pitchFamily="50" charset="-127"/>
                           <a:cs typeface="+mn-cs"/>
                         </a:rPr>
-                        <a:t>1,705</a:t>
+                        <a:t>1,701</a:t>
                       </a:r>
                       <a:endParaRPr lang="en-US" altLang="ko-KR" sz="700" b="0" i="0" u="none" strike="noStrike" kern="1200" dirty="0">
                         <a:solidFill>
@@ -18051,7 +18051,7 @@
                           <a:ea typeface="대명체 보통" panose="020B0600000101010101" pitchFamily="50" charset="-127"/>
                           <a:cs typeface="+mn-cs"/>
                         </a:rPr>
-                        <a:t>1,952</a:t>
+                        <a:t>1,948</a:t>
                       </a:r>
                     </a:p>
                   </a:txBody>
@@ -18114,7 +18114,7 @@
                           <a:ea typeface="대명체 보통" panose="020B0600000101010101" pitchFamily="50" charset="-127"/>
                           <a:cs typeface="+mn-cs"/>
                         </a:rPr>
-                        <a:t>61%</a:t>
+                        <a:t>60%</a:t>
                       </a:r>
                     </a:p>
                   </a:txBody>

--- a/data/세일즈마케팅_예상매출현황.pptx
+++ b/data/세일즈마케팅_예상매출현황.pptx
@@ -12756,7 +12756,7 @@
                           <a:ea typeface="대명체 보통" panose="020B0600000101010101" pitchFamily="50" charset="-127"/>
                           <a:cs typeface="+mn-cs"/>
                         </a:rPr>
-                        <a:t>25,797</a:t>
+                        <a:t>25,701</a:t>
                       </a:r>
                     </a:p>
                   </a:txBody>
@@ -12882,7 +12882,7 @@
                           <a:ea typeface="대명체 보통" panose="020B0600000101010101" pitchFamily="50" charset="-127"/>
                           <a:cs typeface="+mn-cs"/>
                         </a:rPr>
-                        <a:t>1,938</a:t>
+                        <a:t>1,842</a:t>
                       </a:r>
                     </a:p>
                   </a:txBody>
@@ -13016,7 +13016,7 @@
                           <a:ea typeface="대명체 보통" panose="020B0600000101010101" pitchFamily="50" charset="-127"/>
                           <a:cs typeface="+mn-cs"/>
                         </a:rPr>
-                        <a:t>20,829</a:t>
+                        <a:t>20,965</a:t>
                       </a:r>
                     </a:p>
                   </a:txBody>
@@ -13142,7 +13142,7 @@
                           <a:ea typeface="대명체 보통" panose="020B0600000101010101" pitchFamily="50" charset="-127"/>
                           <a:cs typeface="+mn-cs"/>
                         </a:rPr>
-                        <a:t>4,968</a:t>
+                        <a:t>4,735</a:t>
                       </a:r>
                     </a:p>
                   </a:txBody>
@@ -13209,7 +13209,7 @@
                           <a:ea typeface="대명체 보통" panose="020B0600000101010101" pitchFamily="50" charset="-127"/>
                           <a:cs typeface="+mn-cs"/>
                         </a:rPr>
-                        <a:t>24%</a:t>
+                        <a:t>23%</a:t>
                       </a:r>
                     </a:p>
                   </a:txBody>
@@ -13450,7 +13450,7 @@
                           <a:ea typeface="대명체 보통" panose="020B0600000101010101" pitchFamily="50" charset="-127"/>
                           <a:cs typeface="+mn-cs"/>
                         </a:rPr>
-                        <a:t>142,267</a:t>
+                        <a:t>142,171</a:t>
                       </a:r>
                     </a:p>
                   </a:txBody>
@@ -13576,7 +13576,7 @@
                           <a:ea typeface="대명체 보통" panose="020B0600000101010101" pitchFamily="50" charset="-127"/>
                           <a:cs typeface="+mn-cs"/>
                         </a:rPr>
-                        <a:t>17,345</a:t>
+                        <a:t>17,249</a:t>
                       </a:r>
                     </a:p>
                   </a:txBody>
@@ -13710,7 +13710,7 @@
                           <a:ea typeface="대명체 보통" panose="020B0600000101010101" pitchFamily="50" charset="-127"/>
                           <a:cs typeface="+mn-cs"/>
                         </a:rPr>
-                        <a:t>101,993</a:t>
+                        <a:t>102,130</a:t>
                       </a:r>
                     </a:p>
                   </a:txBody>
@@ -13836,7 +13836,7 @@
                           <a:ea typeface="대명체 보통" panose="020B0600000101010101" pitchFamily="50" charset="-127"/>
                           <a:cs typeface="+mn-cs"/>
                         </a:rPr>
-                        <a:t>40,274</a:t>
+                        <a:t>40,041</a:t>
                       </a:r>
                     </a:p>
                   </a:txBody>
@@ -14237,7 +14237,7 @@
                           <a:ea typeface="대명체 보통" panose="020B0600000101010101" pitchFamily="50" charset="-127"/>
                           <a:cs typeface="+mn-cs"/>
                         </a:rPr>
-                        <a:t>15,391</a:t>
+                        <a:t>15,332</a:t>
                       </a:r>
                     </a:p>
                   </a:txBody>
@@ -14355,7 +14355,7 @@
                           <a:ea typeface="대명체 보통" panose="020B0600000101010101" pitchFamily="50" charset="-127"/>
                           <a:cs typeface="+mn-cs"/>
                         </a:rPr>
-                        <a:t>787</a:t>
+                        <a:t>728</a:t>
                       </a:r>
                       <a:endParaRPr lang="en-US" altLang="ko-KR" sz="700" b="0" i="0" u="none" strike="noStrike" kern="1200" dirty="0">
                         <a:solidFill>
@@ -14490,7 +14490,7 @@
                           <a:ea typeface="대명체 보통" panose="020B0600000101010101" pitchFamily="50" charset="-127"/>
                           <a:cs typeface="+mn-cs"/>
                         </a:rPr>
-                        <a:t>12,795</a:t>
+                        <a:t>12,885</a:t>
                       </a:r>
                     </a:p>
                   </a:txBody>
@@ -14608,7 +14608,7 @@
                           <a:ea typeface="대명체 보통" panose="020B0600000101010101" pitchFamily="50" charset="-127"/>
                           <a:cs typeface="+mn-cs"/>
                         </a:rPr>
-                        <a:t>2,597</a:t>
+                        <a:t>2,446</a:t>
                       </a:r>
                     </a:p>
                   </a:txBody>
@@ -14671,7 +14671,7 @@
                           <a:ea typeface="대명체 보통" panose="020B0600000101010101" pitchFamily="50" charset="-127"/>
                           <a:cs typeface="+mn-cs"/>
                         </a:rPr>
-                        <a:t>20%</a:t>
+                        <a:t>19%</a:t>
                       </a:r>
                     </a:p>
                   </a:txBody>
@@ -14900,7 +14900,7 @@
                           <a:ea typeface="대명체 보통" panose="020B0600000101010101" pitchFamily="50" charset="-127"/>
                           <a:cs typeface="+mn-cs"/>
                         </a:rPr>
-                        <a:t>83,114</a:t>
+                        <a:t>83,054</a:t>
                       </a:r>
                     </a:p>
                   </a:txBody>
@@ -15018,7 +15018,7 @@
                           <a:ea typeface="대명체 보통" panose="020B0600000101010101" pitchFamily="50" charset="-127"/>
                           <a:cs typeface="+mn-cs"/>
                         </a:rPr>
-                        <a:t>10,763</a:t>
+                        <a:t>10,703</a:t>
                       </a:r>
                     </a:p>
                   </a:txBody>
@@ -15144,7 +15144,7 @@
                           <a:ea typeface="대명체 보통" panose="020B0600000101010101" pitchFamily="50" charset="-127"/>
                           <a:cs typeface="+mn-cs"/>
                         </a:rPr>
-                        <a:t>58,367</a:t>
+                        <a:t>58,458</a:t>
                       </a:r>
                     </a:p>
                   </a:txBody>
@@ -15262,7 +15262,7 @@
                           <a:ea typeface="대명체 보통" panose="020B0600000101010101" pitchFamily="50" charset="-127"/>
                           <a:cs typeface="+mn-cs"/>
                         </a:rPr>
-                        <a:t>24,746</a:t>
+                        <a:t>24,596</a:t>
                       </a:r>
                     </a:p>
                   </a:txBody>
@@ -15643,7 +15643,7 @@
                           <a:ea typeface="대명체 보통" panose="020B0600000101010101" pitchFamily="50" charset="-127"/>
                           <a:cs typeface="+mn-cs"/>
                         </a:rPr>
-                        <a:t>9,891</a:t>
+                        <a:t>9,859</a:t>
                       </a:r>
                     </a:p>
                   </a:txBody>
@@ -15753,7 +15753,7 @@
                           <a:ea typeface="대명체 보통" panose="020B0600000101010101" pitchFamily="50" charset="-127"/>
                           <a:cs typeface="+mn-cs"/>
                         </a:rPr>
-                        <a:t>1,034</a:t>
+                        <a:t>1,002</a:t>
                       </a:r>
                       <a:endParaRPr lang="en-US" altLang="ko-KR" sz="700" b="0" i="0" u="none" strike="noStrike" kern="1200" dirty="0">
                         <a:solidFill>
@@ -15821,7 +15821,7 @@
                           <a:ea typeface="대명체 보통" panose="020B0600000101010101" pitchFamily="50" charset="-127"/>
                           <a:cs typeface="+mn-cs"/>
                         </a:rPr>
-                        <a:t>112%</a:t>
+                        <a:t>111%</a:t>
                       </a:r>
                     </a:p>
                   </a:txBody>
@@ -15880,7 +15880,7 @@
                           <a:ea typeface="대명체 보통" panose="020B0600000101010101" pitchFamily="50" charset="-127"/>
                           <a:cs typeface="+mn-cs"/>
                         </a:rPr>
-                        <a:t>7,652</a:t>
+                        <a:t>7,694</a:t>
                       </a:r>
                     </a:p>
                   </a:txBody>
@@ -15990,7 +15990,7 @@
                           <a:ea typeface="대명체 보통" panose="020B0600000101010101" pitchFamily="50" charset="-127"/>
                           <a:cs typeface="+mn-cs"/>
                         </a:rPr>
-                        <a:t>2,239</a:t>
+                        <a:t>2,165</a:t>
                       </a:r>
                     </a:p>
                   </a:txBody>
@@ -16049,7 +16049,7 @@
                           <a:ea typeface="대명체 보통" panose="020B0600000101010101" pitchFamily="50" charset="-127"/>
                           <a:cs typeface="+mn-cs"/>
                         </a:rPr>
-                        <a:t>29%</a:t>
+                        <a:t>28%</a:t>
                       </a:r>
                     </a:p>
                   </a:txBody>
@@ -16266,7 +16266,7 @@
                           <a:ea typeface="대명체 보통" panose="020B0600000101010101" pitchFamily="50" charset="-127"/>
                           <a:cs typeface="+mn-cs"/>
                         </a:rPr>
-                        <a:t>53,985</a:t>
+                        <a:t>53,953</a:t>
                       </a:r>
                     </a:p>
                   </a:txBody>
@@ -16376,7 +16376,7 @@
                           <a:ea typeface="대명체 보통" panose="020B0600000101010101" pitchFamily="50" charset="-127"/>
                           <a:cs typeface="+mn-cs"/>
                         </a:rPr>
-                        <a:t>4,881</a:t>
+                        <a:t>4,849</a:t>
                       </a:r>
                     </a:p>
                   </a:txBody>
@@ -16494,7 +16494,7 @@
                           <a:ea typeface="대명체 보통" panose="020B0600000101010101" pitchFamily="50" charset="-127"/>
                           <a:cs typeface="+mn-cs"/>
                         </a:rPr>
-                        <a:t>40,405</a:t>
+                        <a:t>40,447</a:t>
                       </a:r>
                     </a:p>
                   </a:txBody>
@@ -16604,7 +16604,7 @@
                           <a:ea typeface="대명체 보통" panose="020B0600000101010101" pitchFamily="50" charset="-127"/>
                           <a:cs typeface="+mn-cs"/>
                         </a:rPr>
-                        <a:t>13,579</a:t>
+                        <a:t>13,506</a:t>
                       </a:r>
                     </a:p>
                   </a:txBody>
@@ -16663,7 +16663,7 @@
                           <a:ea typeface="대명체 보통" panose="020B0600000101010101" pitchFamily="50" charset="-127"/>
                           <a:cs typeface="+mn-cs"/>
                         </a:rPr>
-                        <a:t>34%</a:t>
+                        <a:t>33%</a:t>
                       </a:r>
                     </a:p>
                   </a:txBody>
@@ -16999,7 +16999,7 @@
                           <a:ea typeface="대명체 보통" panose="020B0600000101010101" pitchFamily="50" charset="-127"/>
                           <a:cs typeface="+mn-cs"/>
                         </a:rPr>
-                        <a:t>515</a:t>
+                        <a:t>510</a:t>
                       </a:r>
                       <a:endParaRPr lang="en-US" altLang="ko-KR" sz="700" b="0" i="0" u="none" strike="noStrike" kern="1200" dirty="0">
                         <a:solidFill>
@@ -17126,7 +17126,7 @@
                           <a:ea typeface="대명체 보통" panose="020B0600000101010101" pitchFamily="50" charset="-127"/>
                           <a:cs typeface="+mn-cs"/>
                         </a:rPr>
-                        <a:t>116</a:t>
+                        <a:t>112</a:t>
                       </a:r>
                       <a:endParaRPr lang="en-US" altLang="ko-KR" sz="700" b="0" i="0" u="none" strike="noStrike" kern="1200" dirty="0">
                         <a:solidFill>
@@ -17198,7 +17198,7 @@
                           <a:ea typeface="대명체 보통" panose="020B0600000101010101" pitchFamily="50" charset="-127"/>
                           <a:cs typeface="+mn-cs"/>
                         </a:rPr>
-                        <a:t>129%</a:t>
+                        <a:t>128%</a:t>
                       </a:r>
                     </a:p>
                   </a:txBody>
@@ -17261,7 +17261,7 @@
                           <a:ea typeface="대명체 보통" panose="020B0600000101010101" pitchFamily="50" charset="-127"/>
                           <a:cs typeface="+mn-cs"/>
                         </a:rPr>
-                        <a:t>382</a:t>
+                        <a:t>386</a:t>
                       </a:r>
                       <a:endParaRPr lang="en-US" altLang="ko-KR" sz="700" b="0" i="0" u="none" strike="noStrike" kern="1200" dirty="0">
                         <a:solidFill>
@@ -17388,7 +17388,7 @@
                           <a:ea typeface="대명체 보통" panose="020B0600000101010101" pitchFamily="50" charset="-127"/>
                           <a:cs typeface="+mn-cs"/>
                         </a:rPr>
-                        <a:t>133</a:t>
+                        <a:t>124</a:t>
                       </a:r>
                     </a:p>
                   </a:txBody>
@@ -17451,7 +17451,7 @@
                           <a:ea typeface="대명체 보통" panose="020B0600000101010101" pitchFamily="50" charset="-127"/>
                           <a:cs typeface="+mn-cs"/>
                         </a:rPr>
-                        <a:t>35%</a:t>
+                        <a:t>32%</a:t>
                       </a:r>
                     </a:p>
                   </a:txBody>
@@ -17680,7 +17680,7 @@
                           <a:ea typeface="대명체 보통" panose="020B0600000101010101" pitchFamily="50" charset="-127"/>
                           <a:cs typeface="+mn-cs"/>
                         </a:rPr>
-                        <a:t>5,168</a:t>
+                        <a:t>5,164</a:t>
                       </a:r>
                     </a:p>
                   </a:txBody>
@@ -17798,7 +17798,7 @@
                           <a:ea typeface="대명체 보통" panose="020B0600000101010101" pitchFamily="50" charset="-127"/>
                           <a:cs typeface="+mn-cs"/>
                         </a:rPr>
-                        <a:t>1,701</a:t>
+                        <a:t>1,697</a:t>
                       </a:r>
                       <a:endParaRPr lang="en-US" altLang="ko-KR" sz="700" b="0" i="0" u="none" strike="noStrike" kern="1200" dirty="0">
                         <a:solidFill>
@@ -17933,7 +17933,7 @@
                           <a:ea typeface="대명체 보통" panose="020B0600000101010101" pitchFamily="50" charset="-127"/>
                           <a:cs typeface="+mn-cs"/>
                         </a:rPr>
-                        <a:t>3,221</a:t>
+                        <a:t>3,225</a:t>
                       </a:r>
                     </a:p>
                   </a:txBody>
@@ -18051,7 +18051,7 @@
                           <a:ea typeface="대명체 보통" panose="020B0600000101010101" pitchFamily="50" charset="-127"/>
                           <a:cs typeface="+mn-cs"/>
                         </a:rPr>
-                        <a:t>1,948</a:t>
+                        <a:t>1,939</a:t>
                       </a:r>
                     </a:p>
                   </a:txBody>

--- a/data/세일즈마케팅_예상매출현황.pptx
+++ b/data/세일즈마케팅_예상매출현황.pptx
@@ -4058,7 +4058,7 @@
                           <a:latin typeface="대명체 보통" panose="020B0600000101010101" pitchFamily="50" charset="-127"/>
                           <a:ea typeface="대명체 보통" panose="020B0600000101010101" pitchFamily="50" charset="-127"/>
                         </a:rPr>
-                        <a:t>당월 예상실적 (08.01~08.31)</a:t>
+                        <a:t>당월 예상실적 (09.01~09.30)</a:t>
                       </a:r>
                       <a:endParaRPr lang="en-US" altLang="ko-KR" sz="800" b="1" i="0" u="none" strike="noStrike" dirty="0">
                         <a:ln>
@@ -4310,7 +4310,7 @@
                           <a:latin typeface="대명체 보통" panose="020B0600000101010101" pitchFamily="50" charset="-127"/>
                           <a:ea typeface="대명체 보통" panose="020B0600000101010101" pitchFamily="50" charset="-127"/>
                         </a:rPr>
-                        <a:t>누계 실적 (01.01~08.31)</a:t>
+                        <a:t>누계 실적 (01.01~09.30)</a:t>
                       </a:r>
                       <a:endParaRPr lang="en-US" altLang="ko-KR" sz="800" b="1" i="0" u="none" strike="noStrike" dirty="0">
                         <a:ln>
@@ -12630,7 +12630,7 @@
                           <a:ea typeface="대명체 보통" panose="020B0600000101010101" pitchFamily="50" charset="-127"/>
                           <a:cs typeface="+mn-cs"/>
                         </a:rPr>
-                        <a:t>23,859</a:t>
+                        <a:t>14,106</a:t>
                       </a:r>
                     </a:p>
                   </a:txBody>
@@ -12756,7 +12756,7 @@
                           <a:ea typeface="대명체 보통" panose="020B0600000101010101" pitchFamily="50" charset="-127"/>
                           <a:cs typeface="+mn-cs"/>
                         </a:rPr>
-                        <a:t>25,701</a:t>
+                        <a:t>15,037</a:t>
                       </a:r>
                     </a:p>
                   </a:txBody>
@@ -12882,7 +12882,7 @@
                           <a:ea typeface="대명체 보통" panose="020B0600000101010101" pitchFamily="50" charset="-127"/>
                           <a:cs typeface="+mn-cs"/>
                         </a:rPr>
-                        <a:t>1,842</a:t>
+                        <a:t>931</a:t>
                       </a:r>
                     </a:p>
                   </a:txBody>
@@ -12949,7 +12949,7 @@
                           <a:ea typeface="대명체 보통" panose="020B0600000101010101" pitchFamily="50" charset="-127"/>
                           <a:cs typeface="+mn-cs"/>
                         </a:rPr>
-                        <a:t>108%</a:t>
+                        <a:t>107%</a:t>
                       </a:r>
                     </a:p>
                   </a:txBody>
@@ -13016,7 +13016,7 @@
                           <a:ea typeface="대명체 보통" panose="020B0600000101010101" pitchFamily="50" charset="-127"/>
                           <a:cs typeface="+mn-cs"/>
                         </a:rPr>
-                        <a:t>20,965</a:t>
+                        <a:t>5,980</a:t>
                       </a:r>
                     </a:p>
                   </a:txBody>
@@ -13142,7 +13142,7 @@
                           <a:ea typeface="대명체 보통" panose="020B0600000101010101" pitchFamily="50" charset="-127"/>
                           <a:cs typeface="+mn-cs"/>
                         </a:rPr>
-                        <a:t>4,735</a:t>
+                        <a:t>9,057</a:t>
                       </a:r>
                     </a:p>
                   </a:txBody>
@@ -13209,7 +13209,7 @@
                           <a:ea typeface="대명체 보통" panose="020B0600000101010101" pitchFamily="50" charset="-127"/>
                           <a:cs typeface="+mn-cs"/>
                         </a:rPr>
-                        <a:t>23%</a:t>
+                        <a:t>151%</a:t>
                       </a:r>
                     </a:p>
                   </a:txBody>
@@ -13328,7 +13328,7 @@
                           <a:ea typeface="대명체 보통" panose="020B0600000101010101" pitchFamily="50" charset="-127"/>
                           <a:cs typeface="+mn-cs"/>
                         </a:rPr>
-                        <a:t>124,921</a:t>
+                        <a:t>139,028</a:t>
                       </a:r>
                     </a:p>
                   </a:txBody>
@@ -13450,7 +13450,7 @@
                           <a:ea typeface="대명체 보통" panose="020B0600000101010101" pitchFamily="50" charset="-127"/>
                           <a:cs typeface="+mn-cs"/>
                         </a:rPr>
-                        <a:t>142,171</a:t>
+                        <a:t>157,207</a:t>
                       </a:r>
                     </a:p>
                   </a:txBody>
@@ -13576,7 +13576,7 @@
                           <a:ea typeface="대명체 보통" panose="020B0600000101010101" pitchFamily="50" charset="-127"/>
                           <a:cs typeface="+mn-cs"/>
                         </a:rPr>
-                        <a:t>17,249</a:t>
+                        <a:t>18,179</a:t>
                       </a:r>
                     </a:p>
                   </a:txBody>
@@ -13643,7 +13643,7 @@
                           <a:ea typeface="대명체 보통" panose="020B0600000101010101" pitchFamily="50" charset="-127"/>
                           <a:cs typeface="+mn-cs"/>
                         </a:rPr>
-                        <a:t>114%</a:t>
+                        <a:t>113%</a:t>
                       </a:r>
                     </a:p>
                   </a:txBody>
@@ -13710,7 +13710,7 @@
                           <a:ea typeface="대명체 보통" panose="020B0600000101010101" pitchFamily="50" charset="-127"/>
                           <a:cs typeface="+mn-cs"/>
                         </a:rPr>
-                        <a:t>102,130</a:t>
+                        <a:t>108,110</a:t>
                       </a:r>
                     </a:p>
                   </a:txBody>
@@ -13836,7 +13836,7 @@
                           <a:ea typeface="대명체 보통" panose="020B0600000101010101" pitchFamily="50" charset="-127"/>
                           <a:cs typeface="+mn-cs"/>
                         </a:rPr>
-                        <a:t>40,041</a:t>
+                        <a:t>49,097</a:t>
                       </a:r>
                     </a:p>
                   </a:txBody>
@@ -13903,7 +13903,7 @@
                           <a:ea typeface="대명체 보통" panose="020B0600000101010101" pitchFamily="50" charset="-127"/>
                           <a:cs typeface="+mn-cs"/>
                         </a:rPr>
-                        <a:t>39%</a:t>
+                        <a:t>45%</a:t>
                       </a:r>
                     </a:p>
                   </a:txBody>
@@ -14119,7 +14119,7 @@
                           <a:ea typeface="대명체 보통" panose="020B0600000101010101" pitchFamily="50" charset="-127"/>
                           <a:cs typeface="+mn-cs"/>
                         </a:rPr>
-                        <a:t>14,604</a:t>
+                        <a:t>8,023</a:t>
                       </a:r>
                     </a:p>
                   </a:txBody>
@@ -14237,7 +14237,7 @@
                           <a:ea typeface="대명체 보통" panose="020B0600000101010101" pitchFamily="50" charset="-127"/>
                           <a:cs typeface="+mn-cs"/>
                         </a:rPr>
-                        <a:t>15,332</a:t>
+                        <a:t>8,172</a:t>
                       </a:r>
                     </a:p>
                   </a:txBody>
@@ -14355,7 +14355,7 @@
                           <a:ea typeface="대명체 보통" panose="020B0600000101010101" pitchFamily="50" charset="-127"/>
                           <a:cs typeface="+mn-cs"/>
                         </a:rPr>
-                        <a:t>728</a:t>
+                        <a:t>149</a:t>
                       </a:r>
                       <a:endParaRPr lang="en-US" altLang="ko-KR" sz="700" b="0" i="0" u="none" strike="noStrike" kern="1200" dirty="0">
                         <a:solidFill>
@@ -14427,7 +14427,7 @@
                           <a:ea typeface="대명체 보통" panose="020B0600000101010101" pitchFamily="50" charset="-127"/>
                           <a:cs typeface="+mn-cs"/>
                         </a:rPr>
-                        <a:t>105%</a:t>
+                        <a:t>102%</a:t>
                       </a:r>
                     </a:p>
                   </a:txBody>
@@ -14490,7 +14490,7 @@
                           <a:ea typeface="대명체 보통" panose="020B0600000101010101" pitchFamily="50" charset="-127"/>
                           <a:cs typeface="+mn-cs"/>
                         </a:rPr>
-                        <a:t>12,885</a:t>
+                        <a:t>3,397</a:t>
                       </a:r>
                     </a:p>
                   </a:txBody>
@@ -14608,7 +14608,7 @@
                           <a:ea typeface="대명체 보통" panose="020B0600000101010101" pitchFamily="50" charset="-127"/>
                           <a:cs typeface="+mn-cs"/>
                         </a:rPr>
-                        <a:t>2,446</a:t>
+                        <a:t>4,774</a:t>
                       </a:r>
                     </a:p>
                   </a:txBody>
@@ -14671,7 +14671,7 @@
                           <a:ea typeface="대명체 보통" panose="020B0600000101010101" pitchFamily="50" charset="-127"/>
                           <a:cs typeface="+mn-cs"/>
                         </a:rPr>
-                        <a:t>19%</a:t>
+                        <a:t>141%</a:t>
                       </a:r>
                     </a:p>
                   </a:txBody>
@@ -14786,7 +14786,7 @@
                           <a:ea typeface="대명체 보통" panose="020B0600000101010101" pitchFamily="50" charset="-127"/>
                           <a:cs typeface="+mn-cs"/>
                         </a:rPr>
-                        <a:t>72,351</a:t>
+                        <a:t>80,374</a:t>
                       </a:r>
                     </a:p>
                   </a:txBody>
@@ -14900,7 +14900,7 @@
                           <a:ea typeface="대명체 보통" panose="020B0600000101010101" pitchFamily="50" charset="-127"/>
                           <a:cs typeface="+mn-cs"/>
                         </a:rPr>
-                        <a:t>83,054</a:t>
+                        <a:t>91,225</a:t>
                       </a:r>
                     </a:p>
                   </a:txBody>
@@ -15018,7 +15018,7 @@
                           <a:ea typeface="대명체 보통" panose="020B0600000101010101" pitchFamily="50" charset="-127"/>
                           <a:cs typeface="+mn-cs"/>
                         </a:rPr>
-                        <a:t>10,703</a:t>
+                        <a:t>10,851</a:t>
                       </a:r>
                     </a:p>
                   </a:txBody>
@@ -15081,7 +15081,7 @@
                           <a:ea typeface="대명체 보통" panose="020B0600000101010101" pitchFamily="50" charset="-127"/>
                           <a:cs typeface="+mn-cs"/>
                         </a:rPr>
-                        <a:t>115%</a:t>
+                        <a:t>114%</a:t>
                       </a:r>
                     </a:p>
                   </a:txBody>
@@ -15144,7 +15144,7 @@
                           <a:ea typeface="대명체 보통" panose="020B0600000101010101" pitchFamily="50" charset="-127"/>
                           <a:cs typeface="+mn-cs"/>
                         </a:rPr>
-                        <a:t>58,458</a:t>
+                        <a:t>61,855</a:t>
                       </a:r>
                     </a:p>
                   </a:txBody>
@@ -15262,7 +15262,7 @@
                           <a:ea typeface="대명체 보통" panose="020B0600000101010101" pitchFamily="50" charset="-127"/>
                           <a:cs typeface="+mn-cs"/>
                         </a:rPr>
-                        <a:t>24,596</a:t>
+                        <a:t>29,370</a:t>
                       </a:r>
                     </a:p>
                   </a:txBody>
@@ -15325,7 +15325,7 @@
                           <a:ea typeface="대명체 보통" panose="020B0600000101010101" pitchFamily="50" charset="-127"/>
                           <a:cs typeface="+mn-cs"/>
                         </a:rPr>
-                        <a:t>42%</a:t>
+                        <a:t>47%</a:t>
                       </a:r>
                     </a:p>
                   </a:txBody>
@@ -15533,7 +15533,7 @@
                           <a:ea typeface="대명체 보통" panose="020B0600000101010101" pitchFamily="50" charset="-127"/>
                           <a:cs typeface="+mn-cs"/>
                         </a:rPr>
-                        <a:t>8,857</a:t>
+                        <a:t>5,681</a:t>
                       </a:r>
                     </a:p>
                   </a:txBody>
@@ -15643,7 +15643,7 @@
                           <a:ea typeface="대명체 보통" panose="020B0600000101010101" pitchFamily="50" charset="-127"/>
                           <a:cs typeface="+mn-cs"/>
                         </a:rPr>
-                        <a:t>9,859</a:t>
+                        <a:t>6,264</a:t>
                       </a:r>
                     </a:p>
                   </a:txBody>
@@ -15753,7 +15753,7 @@
                           <a:ea typeface="대명체 보통" panose="020B0600000101010101" pitchFamily="50" charset="-127"/>
                           <a:cs typeface="+mn-cs"/>
                         </a:rPr>
-                        <a:t>1,002</a:t>
+                        <a:t>583</a:t>
                       </a:r>
                       <a:endParaRPr lang="en-US" altLang="ko-KR" sz="700" b="0" i="0" u="none" strike="noStrike" kern="1200" dirty="0">
                         <a:solidFill>
@@ -15821,7 +15821,7 @@
                           <a:ea typeface="대명체 보통" panose="020B0600000101010101" pitchFamily="50" charset="-127"/>
                           <a:cs typeface="+mn-cs"/>
                         </a:rPr>
-                        <a:t>111%</a:t>
+                        <a:t>110%</a:t>
                       </a:r>
                     </a:p>
                   </a:txBody>
@@ -15880,7 +15880,7 @@
                           <a:ea typeface="대명체 보통" panose="020B0600000101010101" pitchFamily="50" charset="-127"/>
                           <a:cs typeface="+mn-cs"/>
                         </a:rPr>
-                        <a:t>7,694</a:t>
+                        <a:t>2,353</a:t>
                       </a:r>
                     </a:p>
                   </a:txBody>
@@ -15990,7 +15990,7 @@
                           <a:ea typeface="대명체 보통" panose="020B0600000101010101" pitchFamily="50" charset="-127"/>
                           <a:cs typeface="+mn-cs"/>
                         </a:rPr>
-                        <a:t>2,165</a:t>
+                        <a:t>3,911</a:t>
                       </a:r>
                     </a:p>
                   </a:txBody>
@@ -16049,7 +16049,7 @@
                           <a:ea typeface="대명체 보통" panose="020B0600000101010101" pitchFamily="50" charset="-127"/>
                           <a:cs typeface="+mn-cs"/>
                         </a:rPr>
-                        <a:t>28%</a:t>
+                        <a:t>166%</a:t>
                       </a:r>
                     </a:p>
                   </a:txBody>
@@ -16160,7 +16160,7 @@
                           <a:ea typeface="대명체 보통" panose="020B0600000101010101" pitchFamily="50" charset="-127"/>
                           <a:cs typeface="+mn-cs"/>
                         </a:rPr>
-                        <a:t>49,103</a:t>
+                        <a:t>54,784</a:t>
                       </a:r>
                     </a:p>
                   </a:txBody>
@@ -16266,7 +16266,7 @@
                           <a:ea typeface="대명체 보통" panose="020B0600000101010101" pitchFamily="50" charset="-127"/>
                           <a:cs typeface="+mn-cs"/>
                         </a:rPr>
-                        <a:t>53,953</a:t>
+                        <a:t>60,218</a:t>
                       </a:r>
                     </a:p>
                   </a:txBody>
@@ -16376,7 +16376,7 @@
                           <a:ea typeface="대명체 보통" panose="020B0600000101010101" pitchFamily="50" charset="-127"/>
                           <a:cs typeface="+mn-cs"/>
                         </a:rPr>
-                        <a:t>4,849</a:t>
+                        <a:t>5,434</a:t>
                       </a:r>
                     </a:p>
                   </a:txBody>
@@ -16494,7 +16494,7 @@
                           <a:ea typeface="대명체 보통" panose="020B0600000101010101" pitchFamily="50" charset="-127"/>
                           <a:cs typeface="+mn-cs"/>
                         </a:rPr>
-                        <a:t>40,447</a:t>
+                        <a:t>42,800</a:t>
                       </a:r>
                     </a:p>
                   </a:txBody>
@@ -16604,7 +16604,7 @@
                           <a:ea typeface="대명체 보통" panose="020B0600000101010101" pitchFamily="50" charset="-127"/>
                           <a:cs typeface="+mn-cs"/>
                         </a:rPr>
-                        <a:t>13,506</a:t>
+                        <a:t>17,418</a:t>
                       </a:r>
                     </a:p>
                   </a:txBody>
@@ -16663,7 +16663,7 @@
                           <a:ea typeface="대명체 보통" panose="020B0600000101010101" pitchFamily="50" charset="-127"/>
                           <a:cs typeface="+mn-cs"/>
                         </a:rPr>
-                        <a:t>33%</a:t>
+                        <a:t>41%</a:t>
                       </a:r>
                     </a:p>
                   </a:txBody>
@@ -16872,7 +16872,7 @@
                           <a:ea typeface="대명체 보통" panose="020B0600000101010101" pitchFamily="50" charset="-127"/>
                           <a:cs typeface="+mn-cs"/>
                         </a:rPr>
-                        <a:t>399</a:t>
+                        <a:t>403</a:t>
                       </a:r>
                       <a:endParaRPr lang="en-US" altLang="ko-KR" sz="700" b="0" i="0" u="none" strike="noStrike" kern="1200" dirty="0">
                         <a:solidFill>
@@ -16999,7 +16999,7 @@
                           <a:ea typeface="대명체 보통" panose="020B0600000101010101" pitchFamily="50" charset="-127"/>
                           <a:cs typeface="+mn-cs"/>
                         </a:rPr>
-                        <a:t>510</a:t>
+                        <a:t>601</a:t>
                       </a:r>
                       <a:endParaRPr lang="en-US" altLang="ko-KR" sz="700" b="0" i="0" u="none" strike="noStrike" kern="1200" dirty="0">
                         <a:solidFill>
@@ -17126,7 +17126,7 @@
                           <a:ea typeface="대명체 보통" panose="020B0600000101010101" pitchFamily="50" charset="-127"/>
                           <a:cs typeface="+mn-cs"/>
                         </a:rPr>
-                        <a:t>112</a:t>
+                        <a:t>199</a:t>
                       </a:r>
                       <a:endParaRPr lang="en-US" altLang="ko-KR" sz="700" b="0" i="0" u="none" strike="noStrike" kern="1200" dirty="0">
                         <a:solidFill>
@@ -17198,7 +17198,7 @@
                           <a:ea typeface="대명체 보통" panose="020B0600000101010101" pitchFamily="50" charset="-127"/>
                           <a:cs typeface="+mn-cs"/>
                         </a:rPr>
-                        <a:t>128%</a:t>
+                        <a:t>149%</a:t>
                       </a:r>
                     </a:p>
                   </a:txBody>
@@ -17261,7 +17261,7 @@
                           <a:ea typeface="대명체 보통" panose="020B0600000101010101" pitchFamily="50" charset="-127"/>
                           <a:cs typeface="+mn-cs"/>
                         </a:rPr>
-                        <a:t>386</a:t>
+                        <a:t>231</a:t>
                       </a:r>
                       <a:endParaRPr lang="en-US" altLang="ko-KR" sz="700" b="0" i="0" u="none" strike="noStrike" kern="1200" dirty="0">
                         <a:solidFill>
@@ -17388,7 +17388,7 @@
                           <a:ea typeface="대명체 보통" panose="020B0600000101010101" pitchFamily="50" charset="-127"/>
                           <a:cs typeface="+mn-cs"/>
                         </a:rPr>
-                        <a:t>124</a:t>
+                        <a:t>371</a:t>
                       </a:r>
                     </a:p>
                   </a:txBody>
@@ -17451,7 +17451,7 @@
                           <a:ea typeface="대명체 보통" panose="020B0600000101010101" pitchFamily="50" charset="-127"/>
                           <a:cs typeface="+mn-cs"/>
                         </a:rPr>
-                        <a:t>32%</a:t>
+                        <a:t>161%</a:t>
                       </a:r>
                     </a:p>
                   </a:txBody>
@@ -17566,7 +17566,7 @@
                           <a:ea typeface="대명체 보통" panose="020B0600000101010101" pitchFamily="50" charset="-127"/>
                           <a:cs typeface="+mn-cs"/>
                         </a:rPr>
-                        <a:t>3,467</a:t>
+                        <a:t>3,870</a:t>
                       </a:r>
                     </a:p>
                   </a:txBody>
@@ -17680,7 +17680,7 @@
                           <a:ea typeface="대명체 보통" panose="020B0600000101010101" pitchFamily="50" charset="-127"/>
                           <a:cs typeface="+mn-cs"/>
                         </a:rPr>
-                        <a:t>5,164</a:t>
+                        <a:t>5,764</a:t>
                       </a:r>
                     </a:p>
                   </a:txBody>
@@ -17798,7 +17798,7 @@
                           <a:ea typeface="대명체 보통" panose="020B0600000101010101" pitchFamily="50" charset="-127"/>
                           <a:cs typeface="+mn-cs"/>
                         </a:rPr>
-                        <a:t>1,697</a:t>
+                        <a:t>1,894</a:t>
                       </a:r>
                       <a:endParaRPr lang="en-US" altLang="ko-KR" sz="700" b="0" i="0" u="none" strike="noStrike" kern="1200" dirty="0">
                         <a:solidFill>
@@ -17933,7 +17933,7 @@
                           <a:ea typeface="대명체 보통" panose="020B0600000101010101" pitchFamily="50" charset="-127"/>
                           <a:cs typeface="+mn-cs"/>
                         </a:rPr>
-                        <a:t>3,225</a:t>
+                        <a:t>3,455</a:t>
                       </a:r>
                     </a:p>
                   </a:txBody>
@@ -18051,7 +18051,7 @@
                           <a:ea typeface="대명체 보통" panose="020B0600000101010101" pitchFamily="50" charset="-127"/>
                           <a:cs typeface="+mn-cs"/>
                         </a:rPr>
-                        <a:t>1,939</a:t>
+                        <a:t>2,309</a:t>
                       </a:r>
                     </a:p>
                   </a:txBody>
@@ -18114,7 +18114,7 @@
                           <a:ea typeface="대명체 보통" panose="020B0600000101010101" pitchFamily="50" charset="-127"/>
                           <a:cs typeface="+mn-cs"/>
                         </a:rPr>
-                        <a:t>60%</a:t>
+                        <a:t>67%</a:t>
                       </a:r>
                     </a:p>
                   </a:txBody>

--- a/data/세일즈마케팅_예상매출현황.pptx
+++ b/data/세일즈마케팅_예상매출현황.pptx
@@ -12756,7 +12756,7 @@
                           <a:ea typeface="대명체 보통" panose="020B0600000101010101" pitchFamily="50" charset="-127"/>
                           <a:cs typeface="+mn-cs"/>
                         </a:rPr>
-                        <a:t>15,037</a:t>
+                        <a:t>15,050</a:t>
                       </a:r>
                     </a:p>
                   </a:txBody>
@@ -12882,7 +12882,7 @@
                           <a:ea typeface="대명체 보통" panose="020B0600000101010101" pitchFamily="50" charset="-127"/>
                           <a:cs typeface="+mn-cs"/>
                         </a:rPr>
-                        <a:t>931</a:t>
+                        <a:t>944</a:t>
                       </a:r>
                     </a:p>
                   </a:txBody>
@@ -13016,7 +13016,7 @@
                           <a:ea typeface="대명체 보통" panose="020B0600000101010101" pitchFamily="50" charset="-127"/>
                           <a:cs typeface="+mn-cs"/>
                         </a:rPr>
-                        <a:t>5,980</a:t>
+                        <a:t>6,204</a:t>
                       </a:r>
                     </a:p>
                   </a:txBody>
@@ -13142,7 +13142,7 @@
                           <a:ea typeface="대명체 보통" panose="020B0600000101010101" pitchFamily="50" charset="-127"/>
                           <a:cs typeface="+mn-cs"/>
                         </a:rPr>
-                        <a:t>9,057</a:t>
+                        <a:t>8,846</a:t>
                       </a:r>
                     </a:p>
                   </a:txBody>
@@ -13209,7 +13209,7 @@
                           <a:ea typeface="대명체 보통" panose="020B0600000101010101" pitchFamily="50" charset="-127"/>
                           <a:cs typeface="+mn-cs"/>
                         </a:rPr>
-                        <a:t>151%</a:t>
+                        <a:t>143%</a:t>
                       </a:r>
                     </a:p>
                   </a:txBody>
@@ -13450,7 +13450,7 @@
                           <a:ea typeface="대명체 보통" panose="020B0600000101010101" pitchFamily="50" charset="-127"/>
                           <a:cs typeface="+mn-cs"/>
                         </a:rPr>
-                        <a:t>157,207</a:t>
+                        <a:t>157,143</a:t>
                       </a:r>
                     </a:p>
                   </a:txBody>
@@ -13576,7 +13576,7 @@
                           <a:ea typeface="대명체 보통" panose="020B0600000101010101" pitchFamily="50" charset="-127"/>
                           <a:cs typeface="+mn-cs"/>
                         </a:rPr>
-                        <a:t>18,179</a:t>
+                        <a:t>18,116</a:t>
                       </a:r>
                     </a:p>
                   </a:txBody>
@@ -13710,7 +13710,7 @@
                           <a:ea typeface="대명체 보통" panose="020B0600000101010101" pitchFamily="50" charset="-127"/>
                           <a:cs typeface="+mn-cs"/>
                         </a:rPr>
-                        <a:t>108,110</a:t>
+                        <a:t>108,437</a:t>
                       </a:r>
                     </a:p>
                   </a:txBody>
@@ -13836,7 +13836,7 @@
                           <a:ea typeface="대명체 보통" panose="020B0600000101010101" pitchFamily="50" charset="-127"/>
                           <a:cs typeface="+mn-cs"/>
                         </a:rPr>
-                        <a:t>49,097</a:t>
+                        <a:t>48,707</a:t>
                       </a:r>
                     </a:p>
                   </a:txBody>
@@ -14237,7 +14237,7 @@
                           <a:ea typeface="대명체 보통" panose="020B0600000101010101" pitchFamily="50" charset="-127"/>
                           <a:cs typeface="+mn-cs"/>
                         </a:rPr>
-                        <a:t>8,172</a:t>
+                        <a:t>8,232</a:t>
                       </a:r>
                     </a:p>
                   </a:txBody>
@@ -14355,7 +14355,7 @@
                           <a:ea typeface="대명체 보통" panose="020B0600000101010101" pitchFamily="50" charset="-127"/>
                           <a:cs typeface="+mn-cs"/>
                         </a:rPr>
-                        <a:t>149</a:t>
+                        <a:t>209</a:t>
                       </a:r>
                       <a:endParaRPr lang="en-US" altLang="ko-KR" sz="700" b="0" i="0" u="none" strike="noStrike" kern="1200" dirty="0">
                         <a:solidFill>
@@ -14427,7 +14427,7 @@
                           <a:ea typeface="대명체 보통" panose="020B0600000101010101" pitchFamily="50" charset="-127"/>
                           <a:cs typeface="+mn-cs"/>
                         </a:rPr>
-                        <a:t>102%</a:t>
+                        <a:t>103%</a:t>
                       </a:r>
                     </a:p>
                   </a:txBody>
@@ -14490,7 +14490,7 @@
                           <a:ea typeface="대명체 보통" panose="020B0600000101010101" pitchFamily="50" charset="-127"/>
                           <a:cs typeface="+mn-cs"/>
                         </a:rPr>
-                        <a:t>3,397</a:t>
+                        <a:t>3,510</a:t>
                       </a:r>
                     </a:p>
                   </a:txBody>
@@ -14608,7 +14608,7 @@
                           <a:ea typeface="대명체 보통" panose="020B0600000101010101" pitchFamily="50" charset="-127"/>
                           <a:cs typeface="+mn-cs"/>
                         </a:rPr>
-                        <a:t>4,774</a:t>
+                        <a:t>4,723</a:t>
                       </a:r>
                     </a:p>
                   </a:txBody>
@@ -14671,7 +14671,7 @@
                           <a:ea typeface="대명체 보통" panose="020B0600000101010101" pitchFamily="50" charset="-127"/>
                           <a:cs typeface="+mn-cs"/>
                         </a:rPr>
-                        <a:t>141%</a:t>
+                        <a:t>135%</a:t>
                       </a:r>
                     </a:p>
                   </a:txBody>
@@ -14900,7 +14900,7 @@
                           <a:ea typeface="대명체 보통" panose="020B0600000101010101" pitchFamily="50" charset="-127"/>
                           <a:cs typeface="+mn-cs"/>
                         </a:rPr>
-                        <a:t>91,225</a:t>
+                        <a:t>91,233</a:t>
                       </a:r>
                     </a:p>
                   </a:txBody>
@@ -15018,7 +15018,7 @@
                           <a:ea typeface="대명체 보통" panose="020B0600000101010101" pitchFamily="50" charset="-127"/>
                           <a:cs typeface="+mn-cs"/>
                         </a:rPr>
-                        <a:t>10,851</a:t>
+                        <a:t>10,859</a:t>
                       </a:r>
                     </a:p>
                   </a:txBody>
@@ -15144,7 +15144,7 @@
                           <a:ea typeface="대명체 보통" panose="020B0600000101010101" pitchFamily="50" charset="-127"/>
                           <a:cs typeface="+mn-cs"/>
                         </a:rPr>
-                        <a:t>61,855</a:t>
+                        <a:t>62,035</a:t>
                       </a:r>
                     </a:p>
                   </a:txBody>
@@ -15262,7 +15262,7 @@
                           <a:ea typeface="대명체 보통" panose="020B0600000101010101" pitchFamily="50" charset="-127"/>
                           <a:cs typeface="+mn-cs"/>
                         </a:rPr>
-                        <a:t>29,370</a:t>
+                        <a:t>29,198</a:t>
                       </a:r>
                     </a:p>
                   </a:txBody>
@@ -15643,7 +15643,7 @@
                           <a:ea typeface="대명체 보통" panose="020B0600000101010101" pitchFamily="50" charset="-127"/>
                           <a:cs typeface="+mn-cs"/>
                         </a:rPr>
-                        <a:t>6,264</a:t>
+                        <a:t>6,236</a:t>
                       </a:r>
                     </a:p>
                   </a:txBody>
@@ -15753,7 +15753,7 @@
                           <a:ea typeface="대명체 보통" panose="020B0600000101010101" pitchFamily="50" charset="-127"/>
                           <a:cs typeface="+mn-cs"/>
                         </a:rPr>
-                        <a:t>583</a:t>
+                        <a:t>555</a:t>
                       </a:r>
                       <a:endParaRPr lang="en-US" altLang="ko-KR" sz="700" b="0" i="0" u="none" strike="noStrike" kern="1200" dirty="0">
                         <a:solidFill>
@@ -15880,7 +15880,7 @@
                           <a:ea typeface="대명체 보통" panose="020B0600000101010101" pitchFamily="50" charset="-127"/>
                           <a:cs typeface="+mn-cs"/>
                         </a:rPr>
-                        <a:t>2,353</a:t>
+                        <a:t>2,415</a:t>
                       </a:r>
                     </a:p>
                   </a:txBody>
@@ -15990,7 +15990,7 @@
                           <a:ea typeface="대명체 보통" panose="020B0600000101010101" pitchFamily="50" charset="-127"/>
                           <a:cs typeface="+mn-cs"/>
                         </a:rPr>
-                        <a:t>3,911</a:t>
+                        <a:t>3,821</a:t>
                       </a:r>
                     </a:p>
                   </a:txBody>
@@ -16049,7 +16049,7 @@
                           <a:ea typeface="대명체 보통" panose="020B0600000101010101" pitchFamily="50" charset="-127"/>
                           <a:cs typeface="+mn-cs"/>
                         </a:rPr>
-                        <a:t>166%</a:t>
+                        <a:t>158%</a:t>
                       </a:r>
                     </a:p>
                   </a:txBody>
@@ -16266,7 +16266,7 @@
                           <a:ea typeface="대명체 보통" panose="020B0600000101010101" pitchFamily="50" charset="-127"/>
                           <a:cs typeface="+mn-cs"/>
                         </a:rPr>
-                        <a:t>60,218</a:t>
+                        <a:t>60,167</a:t>
                       </a:r>
                     </a:p>
                   </a:txBody>
@@ -16376,7 +16376,7 @@
                           <a:ea typeface="대명체 보통" panose="020B0600000101010101" pitchFamily="50" charset="-127"/>
                           <a:cs typeface="+mn-cs"/>
                         </a:rPr>
-                        <a:t>5,434</a:t>
+                        <a:t>5,383</a:t>
                       </a:r>
                     </a:p>
                   </a:txBody>
@@ -16494,7 +16494,7 @@
                           <a:ea typeface="대명체 보통" panose="020B0600000101010101" pitchFamily="50" charset="-127"/>
                           <a:cs typeface="+mn-cs"/>
                         </a:rPr>
-                        <a:t>42,800</a:t>
+                        <a:t>42,898</a:t>
                       </a:r>
                     </a:p>
                   </a:txBody>
@@ -16604,7 +16604,7 @@
                           <a:ea typeface="대명체 보통" panose="020B0600000101010101" pitchFamily="50" charset="-127"/>
                           <a:cs typeface="+mn-cs"/>
                         </a:rPr>
-                        <a:t>17,418</a:t>
+                        <a:t>17,269</a:t>
                       </a:r>
                     </a:p>
                   </a:txBody>
@@ -16663,7 +16663,7 @@
                           <a:ea typeface="대명체 보통" panose="020B0600000101010101" pitchFamily="50" charset="-127"/>
                           <a:cs typeface="+mn-cs"/>
                         </a:rPr>
-                        <a:t>41%</a:t>
+                        <a:t>40%</a:t>
                       </a:r>
                     </a:p>
                   </a:txBody>
@@ -16999,7 +16999,7 @@
                           <a:ea typeface="대명체 보통" panose="020B0600000101010101" pitchFamily="50" charset="-127"/>
                           <a:cs typeface="+mn-cs"/>
                         </a:rPr>
-                        <a:t>601</a:t>
+                        <a:t>582</a:t>
                       </a:r>
                       <a:endParaRPr lang="en-US" altLang="ko-KR" sz="700" b="0" i="0" u="none" strike="noStrike" kern="1200" dirty="0">
                         <a:solidFill>
@@ -17126,7 +17126,7 @@
                           <a:ea typeface="대명체 보통" panose="020B0600000101010101" pitchFamily="50" charset="-127"/>
                           <a:cs typeface="+mn-cs"/>
                         </a:rPr>
-                        <a:t>199</a:t>
+                        <a:t>179</a:t>
                       </a:r>
                       <a:endParaRPr lang="en-US" altLang="ko-KR" sz="700" b="0" i="0" u="none" strike="noStrike" kern="1200" dirty="0">
                         <a:solidFill>
@@ -17198,7 +17198,7 @@
                           <a:ea typeface="대명체 보통" panose="020B0600000101010101" pitchFamily="50" charset="-127"/>
                           <a:cs typeface="+mn-cs"/>
                         </a:rPr>
-                        <a:t>149%</a:t>
+                        <a:t>144%</a:t>
                       </a:r>
                     </a:p>
                   </a:txBody>
@@ -17261,7 +17261,7 @@
                           <a:ea typeface="대명체 보통" panose="020B0600000101010101" pitchFamily="50" charset="-127"/>
                           <a:cs typeface="+mn-cs"/>
                         </a:rPr>
-                        <a:t>231</a:t>
+                        <a:t>279</a:t>
                       </a:r>
                       <a:endParaRPr lang="en-US" altLang="ko-KR" sz="700" b="0" i="0" u="none" strike="noStrike" kern="1200" dirty="0">
                         <a:solidFill>
@@ -17388,7 +17388,7 @@
                           <a:ea typeface="대명체 보통" panose="020B0600000101010101" pitchFamily="50" charset="-127"/>
                           <a:cs typeface="+mn-cs"/>
                         </a:rPr>
-                        <a:t>371</a:t>
+                        <a:t>303</a:t>
                       </a:r>
                     </a:p>
                   </a:txBody>
@@ -17451,7 +17451,7 @@
                           <a:ea typeface="대명체 보통" panose="020B0600000101010101" pitchFamily="50" charset="-127"/>
                           <a:cs typeface="+mn-cs"/>
                         </a:rPr>
-                        <a:t>161%</a:t>
+                        <a:t>108%</a:t>
                       </a:r>
                     </a:p>
                   </a:txBody>
@@ -17680,7 +17680,7 @@
                           <a:ea typeface="대명체 보통" panose="020B0600000101010101" pitchFamily="50" charset="-127"/>
                           <a:cs typeface="+mn-cs"/>
                         </a:rPr>
-                        <a:t>5,764</a:t>
+                        <a:t>5,743</a:t>
                       </a:r>
                     </a:p>
                   </a:txBody>
@@ -17798,7 +17798,7 @@
                           <a:ea typeface="대명체 보통" panose="020B0600000101010101" pitchFamily="50" charset="-127"/>
                           <a:cs typeface="+mn-cs"/>
                         </a:rPr>
-                        <a:t>1,894</a:t>
+                        <a:t>1,874</a:t>
                       </a:r>
                       <a:endParaRPr lang="en-US" altLang="ko-KR" sz="700" b="0" i="0" u="none" strike="noStrike" kern="1200" dirty="0">
                         <a:solidFill>
@@ -17870,7 +17870,7 @@
                           <a:ea typeface="대명체 보통" panose="020B0600000101010101" pitchFamily="50" charset="-127"/>
                           <a:cs typeface="+mn-cs"/>
                         </a:rPr>
-                        <a:t>149%</a:t>
+                        <a:t>148%</a:t>
                       </a:r>
                     </a:p>
                   </a:txBody>
@@ -17933,7 +17933,7 @@
                           <a:ea typeface="대명체 보통" panose="020B0600000101010101" pitchFamily="50" charset="-127"/>
                           <a:cs typeface="+mn-cs"/>
                         </a:rPr>
-                        <a:t>3,455</a:t>
+                        <a:t>3,504</a:t>
                       </a:r>
                     </a:p>
                   </a:txBody>
@@ -18051,7 +18051,7 @@
                           <a:ea typeface="대명체 보통" panose="020B0600000101010101" pitchFamily="50" charset="-127"/>
                           <a:cs typeface="+mn-cs"/>
                         </a:rPr>
-                        <a:t>2,309</a:t>
+                        <a:t>2,239</a:t>
                       </a:r>
                     </a:p>
                   </a:txBody>
@@ -18114,7 +18114,7 @@
                           <a:ea typeface="대명체 보통" panose="020B0600000101010101" pitchFamily="50" charset="-127"/>
                           <a:cs typeface="+mn-cs"/>
                         </a:rPr>
-                        <a:t>67%</a:t>
+                        <a:t>64%</a:t>
                       </a:r>
                     </a:p>
                   </a:txBody>

--- a/data/세일즈마케팅_예상매출현황.pptx
+++ b/data/세일즈마케팅_예상매출현황.pptx
@@ -12756,7 +12756,7 @@
                           <a:ea typeface="대명체 보통" panose="020B0600000101010101" pitchFamily="50" charset="-127"/>
                           <a:cs typeface="+mn-cs"/>
                         </a:rPr>
-                        <a:t>15,050</a:t>
+                        <a:t>14,775</a:t>
                       </a:r>
                     </a:p>
                   </a:txBody>
@@ -12882,7 +12882,7 @@
                           <a:ea typeface="대명체 보통" panose="020B0600000101010101" pitchFamily="50" charset="-127"/>
                           <a:cs typeface="+mn-cs"/>
                         </a:rPr>
-                        <a:t>944</a:t>
+                        <a:t>668</a:t>
                       </a:r>
                     </a:p>
                   </a:txBody>
@@ -12949,7 +12949,7 @@
                           <a:ea typeface="대명체 보통" panose="020B0600000101010101" pitchFamily="50" charset="-127"/>
                           <a:cs typeface="+mn-cs"/>
                         </a:rPr>
-                        <a:t>107%</a:t>
+                        <a:t>105%</a:t>
                       </a:r>
                     </a:p>
                   </a:txBody>
@@ -13016,7 +13016,7 @@
                           <a:ea typeface="대명체 보통" panose="020B0600000101010101" pitchFamily="50" charset="-127"/>
                           <a:cs typeface="+mn-cs"/>
                         </a:rPr>
-                        <a:t>6,204</a:t>
+                        <a:t>6,711</a:t>
                       </a:r>
                     </a:p>
                   </a:txBody>
@@ -13142,7 +13142,7 @@
                           <a:ea typeface="대명체 보통" panose="020B0600000101010101" pitchFamily="50" charset="-127"/>
                           <a:cs typeface="+mn-cs"/>
                         </a:rPr>
-                        <a:t>8,846</a:t>
+                        <a:t>8,064</a:t>
                       </a:r>
                     </a:p>
                   </a:txBody>
@@ -13209,7 +13209,7 @@
                           <a:ea typeface="대명체 보통" panose="020B0600000101010101" pitchFamily="50" charset="-127"/>
                           <a:cs typeface="+mn-cs"/>
                         </a:rPr>
-                        <a:t>143%</a:t>
+                        <a:t>120%</a:t>
                       </a:r>
                     </a:p>
                   </a:txBody>
@@ -13450,7 +13450,7 @@
                           <a:ea typeface="대명체 보통" panose="020B0600000101010101" pitchFamily="50" charset="-127"/>
                           <a:cs typeface="+mn-cs"/>
                         </a:rPr>
-                        <a:t>157,143</a:t>
+                        <a:t>156,733</a:t>
                       </a:r>
                     </a:p>
                   </a:txBody>
@@ -13576,7 +13576,7 @@
                           <a:ea typeface="대명체 보통" panose="020B0600000101010101" pitchFamily="50" charset="-127"/>
                           <a:cs typeface="+mn-cs"/>
                         </a:rPr>
-                        <a:t>18,116</a:t>
+                        <a:t>17,705</a:t>
                       </a:r>
                     </a:p>
                   </a:txBody>
@@ -13710,7 +13710,7 @@
                           <a:ea typeface="대명체 보통" panose="020B0600000101010101" pitchFamily="50" charset="-127"/>
                           <a:cs typeface="+mn-cs"/>
                         </a:rPr>
-                        <a:t>108,437</a:t>
+                        <a:t>109,135</a:t>
                       </a:r>
                     </a:p>
                   </a:txBody>
@@ -13836,7 +13836,7 @@
                           <a:ea typeface="대명체 보통" panose="020B0600000101010101" pitchFamily="50" charset="-127"/>
                           <a:cs typeface="+mn-cs"/>
                         </a:rPr>
-                        <a:t>48,707</a:t>
+                        <a:t>47,597</a:t>
                       </a:r>
                     </a:p>
                   </a:txBody>
@@ -13903,7 +13903,7 @@
                           <a:ea typeface="대명체 보통" panose="020B0600000101010101" pitchFamily="50" charset="-127"/>
                           <a:cs typeface="+mn-cs"/>
                         </a:rPr>
-                        <a:t>45%</a:t>
+                        <a:t>44%</a:t>
                       </a:r>
                     </a:p>
                   </a:txBody>
@@ -14237,7 +14237,7 @@
                           <a:ea typeface="대명체 보통" panose="020B0600000101010101" pitchFamily="50" charset="-127"/>
                           <a:cs typeface="+mn-cs"/>
                         </a:rPr>
-                        <a:t>8,232</a:t>
+                        <a:t>8,052</a:t>
                       </a:r>
                     </a:p>
                   </a:txBody>
@@ -14355,7 +14355,7 @@
                           <a:ea typeface="대명체 보통" panose="020B0600000101010101" pitchFamily="50" charset="-127"/>
                           <a:cs typeface="+mn-cs"/>
                         </a:rPr>
-                        <a:t>209</a:t>
+                        <a:t>29</a:t>
                       </a:r>
                       <a:endParaRPr lang="en-US" altLang="ko-KR" sz="700" b="0" i="0" u="none" strike="noStrike" kern="1200" dirty="0">
                         <a:solidFill>
@@ -14427,7 +14427,7 @@
                           <a:ea typeface="대명체 보통" panose="020B0600000101010101" pitchFamily="50" charset="-127"/>
                           <a:cs typeface="+mn-cs"/>
                         </a:rPr>
-                        <a:t>103%</a:t>
+                        <a:t>100%</a:t>
                       </a:r>
                     </a:p>
                   </a:txBody>
@@ -14490,7 +14490,7 @@
                           <a:ea typeface="대명체 보통" panose="020B0600000101010101" pitchFamily="50" charset="-127"/>
                           <a:cs typeface="+mn-cs"/>
                         </a:rPr>
-                        <a:t>3,510</a:t>
+                        <a:t>3,768</a:t>
                       </a:r>
                     </a:p>
                   </a:txBody>
@@ -14608,7 +14608,7 @@
                           <a:ea typeface="대명체 보통" panose="020B0600000101010101" pitchFamily="50" charset="-127"/>
                           <a:cs typeface="+mn-cs"/>
                         </a:rPr>
-                        <a:t>4,723</a:t>
+                        <a:t>4,284</a:t>
                       </a:r>
                     </a:p>
                   </a:txBody>
@@ -14671,7 +14671,7 @@
                           <a:ea typeface="대명체 보통" panose="020B0600000101010101" pitchFamily="50" charset="-127"/>
                           <a:cs typeface="+mn-cs"/>
                         </a:rPr>
-                        <a:t>135%</a:t>
+                        <a:t>114%</a:t>
                       </a:r>
                     </a:p>
                   </a:txBody>
@@ -14900,7 +14900,7 @@
                           <a:ea typeface="대명체 보통" panose="020B0600000101010101" pitchFamily="50" charset="-127"/>
                           <a:cs typeface="+mn-cs"/>
                         </a:rPr>
-                        <a:t>91,233</a:t>
+                        <a:t>90,976</a:t>
                       </a:r>
                     </a:p>
                   </a:txBody>
@@ -15018,7 +15018,7 @@
                           <a:ea typeface="대명체 보통" panose="020B0600000101010101" pitchFamily="50" charset="-127"/>
                           <a:cs typeface="+mn-cs"/>
                         </a:rPr>
-                        <a:t>10,859</a:t>
+                        <a:t>10,602</a:t>
                       </a:r>
                     </a:p>
                   </a:txBody>
@@ -15081,7 +15081,7 @@
                           <a:ea typeface="대명체 보통" panose="020B0600000101010101" pitchFamily="50" charset="-127"/>
                           <a:cs typeface="+mn-cs"/>
                         </a:rPr>
-                        <a:t>114%</a:t>
+                        <a:t>113%</a:t>
                       </a:r>
                     </a:p>
                   </a:txBody>
@@ -15144,7 +15144,7 @@
                           <a:ea typeface="대명체 보통" panose="020B0600000101010101" pitchFamily="50" charset="-127"/>
                           <a:cs typeface="+mn-cs"/>
                         </a:rPr>
-                        <a:t>62,035</a:t>
+                        <a:t>62,415</a:t>
                       </a:r>
                     </a:p>
                   </a:txBody>
@@ -15262,7 +15262,7 @@
                           <a:ea typeface="대명체 보통" panose="020B0600000101010101" pitchFamily="50" charset="-127"/>
                           <a:cs typeface="+mn-cs"/>
                         </a:rPr>
-                        <a:t>29,198</a:t>
+                        <a:t>28,561</a:t>
                       </a:r>
                     </a:p>
                   </a:txBody>
@@ -15325,7 +15325,7 @@
                           <a:ea typeface="대명체 보통" panose="020B0600000101010101" pitchFamily="50" charset="-127"/>
                           <a:cs typeface="+mn-cs"/>
                         </a:rPr>
-                        <a:t>47%</a:t>
+                        <a:t>46%</a:t>
                       </a:r>
                     </a:p>
                   </a:txBody>
@@ -15643,7 +15643,7 @@
                           <a:ea typeface="대명체 보통" panose="020B0600000101010101" pitchFamily="50" charset="-127"/>
                           <a:cs typeface="+mn-cs"/>
                         </a:rPr>
-                        <a:t>6,236</a:t>
+                        <a:t>6,139</a:t>
                       </a:r>
                     </a:p>
                   </a:txBody>
@@ -15753,7 +15753,7 @@
                           <a:ea typeface="대명체 보통" panose="020B0600000101010101" pitchFamily="50" charset="-127"/>
                           <a:cs typeface="+mn-cs"/>
                         </a:rPr>
-                        <a:t>555</a:t>
+                        <a:t>458</a:t>
                       </a:r>
                       <a:endParaRPr lang="en-US" altLang="ko-KR" sz="700" b="0" i="0" u="none" strike="noStrike" kern="1200" dirty="0">
                         <a:solidFill>
@@ -15821,7 +15821,7 @@
                           <a:ea typeface="대명체 보통" panose="020B0600000101010101" pitchFamily="50" charset="-127"/>
                           <a:cs typeface="+mn-cs"/>
                         </a:rPr>
-                        <a:t>110%</a:t>
+                        <a:t>108%</a:t>
                       </a:r>
                     </a:p>
                   </a:txBody>
@@ -15880,7 +15880,7 @@
                           <a:ea typeface="대명체 보통" panose="020B0600000101010101" pitchFamily="50" charset="-127"/>
                           <a:cs typeface="+mn-cs"/>
                         </a:rPr>
-                        <a:t>2,415</a:t>
+                        <a:t>2,647</a:t>
                       </a:r>
                     </a:p>
                   </a:txBody>
@@ -15990,7 +15990,7 @@
                           <a:ea typeface="대명체 보통" panose="020B0600000101010101" pitchFamily="50" charset="-127"/>
                           <a:cs typeface="+mn-cs"/>
                         </a:rPr>
-                        <a:t>3,821</a:t>
+                        <a:t>3,492</a:t>
                       </a:r>
                     </a:p>
                   </a:txBody>
@@ -16049,7 +16049,7 @@
                           <a:ea typeface="대명체 보통" panose="020B0600000101010101" pitchFamily="50" charset="-127"/>
                           <a:cs typeface="+mn-cs"/>
                         </a:rPr>
-                        <a:t>158%</a:t>
+                        <a:t>132%</a:t>
                       </a:r>
                     </a:p>
                   </a:txBody>
@@ -16266,7 +16266,7 @@
                           <a:ea typeface="대명체 보통" panose="020B0600000101010101" pitchFamily="50" charset="-127"/>
                           <a:cs typeface="+mn-cs"/>
                         </a:rPr>
-                        <a:t>60,167</a:t>
+                        <a:t>60,011</a:t>
                       </a:r>
                     </a:p>
                   </a:txBody>
@@ -16376,7 +16376,7 @@
                           <a:ea typeface="대명체 보통" panose="020B0600000101010101" pitchFamily="50" charset="-127"/>
                           <a:cs typeface="+mn-cs"/>
                         </a:rPr>
-                        <a:t>5,383</a:t>
+                        <a:t>5,227</a:t>
                       </a:r>
                     </a:p>
                   </a:txBody>
@@ -16494,7 +16494,7 @@
                           <a:ea typeface="대명체 보통" panose="020B0600000101010101" pitchFamily="50" charset="-127"/>
                           <a:cs typeface="+mn-cs"/>
                         </a:rPr>
-                        <a:t>42,898</a:t>
+                        <a:t>43,197</a:t>
                       </a:r>
                     </a:p>
                   </a:txBody>
@@ -16604,7 +16604,7 @@
                           <a:ea typeface="대명체 보통" panose="020B0600000101010101" pitchFamily="50" charset="-127"/>
                           <a:cs typeface="+mn-cs"/>
                         </a:rPr>
-                        <a:t>17,269</a:t>
+                        <a:t>16,814</a:t>
                       </a:r>
                     </a:p>
                   </a:txBody>
@@ -16663,7 +16663,7 @@
                           <a:ea typeface="대명체 보통" panose="020B0600000101010101" pitchFamily="50" charset="-127"/>
                           <a:cs typeface="+mn-cs"/>
                         </a:rPr>
-                        <a:t>40%</a:t>
+                        <a:t>39%</a:t>
                       </a:r>
                     </a:p>
                   </a:txBody>
@@ -16999,7 +16999,7 @@
                           <a:ea typeface="대명체 보통" panose="020B0600000101010101" pitchFamily="50" charset="-127"/>
                           <a:cs typeface="+mn-cs"/>
                         </a:rPr>
-                        <a:t>582</a:t>
+                        <a:t>584</a:t>
                       </a:r>
                       <a:endParaRPr lang="en-US" altLang="ko-KR" sz="700" b="0" i="0" u="none" strike="noStrike" kern="1200" dirty="0">
                         <a:solidFill>
@@ -17126,7 +17126,7 @@
                           <a:ea typeface="대명체 보통" panose="020B0600000101010101" pitchFamily="50" charset="-127"/>
                           <a:cs typeface="+mn-cs"/>
                         </a:rPr>
-                        <a:t>179</a:t>
+                        <a:t>182</a:t>
                       </a:r>
                       <a:endParaRPr lang="en-US" altLang="ko-KR" sz="700" b="0" i="0" u="none" strike="noStrike" kern="1200" dirty="0">
                         <a:solidFill>
@@ -17198,7 +17198,7 @@
                           <a:ea typeface="대명체 보통" panose="020B0600000101010101" pitchFamily="50" charset="-127"/>
                           <a:cs typeface="+mn-cs"/>
                         </a:rPr>
-                        <a:t>144%</a:t>
+                        <a:t>145%</a:t>
                       </a:r>
                     </a:p>
                   </a:txBody>
@@ -17261,7 +17261,7 @@
                           <a:ea typeface="대명체 보통" panose="020B0600000101010101" pitchFamily="50" charset="-127"/>
                           <a:cs typeface="+mn-cs"/>
                         </a:rPr>
-                        <a:t>279</a:t>
+                        <a:t>296</a:t>
                       </a:r>
                       <a:endParaRPr lang="en-US" altLang="ko-KR" sz="700" b="0" i="0" u="none" strike="noStrike" kern="1200" dirty="0">
                         <a:solidFill>
@@ -17388,7 +17388,7 @@
                           <a:ea typeface="대명체 보통" panose="020B0600000101010101" pitchFamily="50" charset="-127"/>
                           <a:cs typeface="+mn-cs"/>
                         </a:rPr>
-                        <a:t>303</a:t>
+                        <a:t>288</a:t>
                       </a:r>
                     </a:p>
                   </a:txBody>
@@ -17451,7 +17451,7 @@
                           <a:ea typeface="대명체 보통" panose="020B0600000101010101" pitchFamily="50" charset="-127"/>
                           <a:cs typeface="+mn-cs"/>
                         </a:rPr>
-                        <a:t>108%</a:t>
+                        <a:t>97%</a:t>
                       </a:r>
                     </a:p>
                   </a:txBody>
@@ -17680,7 +17680,7 @@
                           <a:ea typeface="대명체 보통" panose="020B0600000101010101" pitchFamily="50" charset="-127"/>
                           <a:cs typeface="+mn-cs"/>
                         </a:rPr>
-                        <a:t>5,743</a:t>
+                        <a:t>5,746</a:t>
                       </a:r>
                     </a:p>
                   </a:txBody>
@@ -17798,7 +17798,7 @@
                           <a:ea typeface="대명체 보통" panose="020B0600000101010101" pitchFamily="50" charset="-127"/>
                           <a:cs typeface="+mn-cs"/>
                         </a:rPr>
-                        <a:t>1,874</a:t>
+                        <a:t>1,876</a:t>
                       </a:r>
                       <a:endParaRPr lang="en-US" altLang="ko-KR" sz="700" b="0" i="0" u="none" strike="noStrike" kern="1200" dirty="0">
                         <a:solidFill>
@@ -17933,7 +17933,7 @@
                           <a:ea typeface="대명체 보통" panose="020B0600000101010101" pitchFamily="50" charset="-127"/>
                           <a:cs typeface="+mn-cs"/>
                         </a:rPr>
-                        <a:t>3,504</a:t>
+                        <a:t>3,523</a:t>
                       </a:r>
                     </a:p>
                   </a:txBody>
@@ -18051,7 +18051,7 @@
                           <a:ea typeface="대명체 보통" panose="020B0600000101010101" pitchFamily="50" charset="-127"/>
                           <a:cs typeface="+mn-cs"/>
                         </a:rPr>
-                        <a:t>2,239</a:t>
+                        <a:t>2,223</a:t>
                       </a:r>
                     </a:p>
                   </a:txBody>
@@ -18114,7 +18114,7 @@
                           <a:ea typeface="대명체 보통" panose="020B0600000101010101" pitchFamily="50" charset="-127"/>
                           <a:cs typeface="+mn-cs"/>
                         </a:rPr>
-                        <a:t>64%</a:t>
+                        <a:t>63%</a:t>
                       </a:r>
                     </a:p>
                   </a:txBody>

--- a/data/세일즈마케팅_예상매출현황.pptx
+++ b/data/세일즈마케팅_예상매출현황.pptx
@@ -12756,7 +12756,7 @@
                           <a:ea typeface="대명체 보통" panose="020B0600000101010101" pitchFamily="50" charset="-127"/>
                           <a:cs typeface="+mn-cs"/>
                         </a:rPr>
-                        <a:t>14,775</a:t>
+                        <a:t>19,018</a:t>
                       </a:r>
                     </a:p>
                   </a:txBody>
@@ -12882,7 +12882,7 @@
                           <a:ea typeface="대명체 보통" panose="020B0600000101010101" pitchFamily="50" charset="-127"/>
                           <a:cs typeface="+mn-cs"/>
                         </a:rPr>
-                        <a:t>668</a:t>
+                        <a:t>4,911</a:t>
                       </a:r>
                     </a:p>
                   </a:txBody>
@@ -12949,7 +12949,7 @@
                           <a:ea typeface="대명체 보통" panose="020B0600000101010101" pitchFamily="50" charset="-127"/>
                           <a:cs typeface="+mn-cs"/>
                         </a:rPr>
-                        <a:t>105%</a:t>
+                        <a:t>135%</a:t>
                       </a:r>
                     </a:p>
                   </a:txBody>
@@ -13142,7 +13142,7 @@
                           <a:ea typeface="대명체 보통" panose="020B0600000101010101" pitchFamily="50" charset="-127"/>
                           <a:cs typeface="+mn-cs"/>
                         </a:rPr>
-                        <a:t>8,064</a:t>
+                        <a:t>12,307</a:t>
                       </a:r>
                     </a:p>
                   </a:txBody>
@@ -13209,7 +13209,7 @@
                           <a:ea typeface="대명체 보통" panose="020B0600000101010101" pitchFamily="50" charset="-127"/>
                           <a:cs typeface="+mn-cs"/>
                         </a:rPr>
-                        <a:t>120%</a:t>
+                        <a:t>183%</a:t>
                       </a:r>
                     </a:p>
                   </a:txBody>
@@ -13450,7 +13450,7 @@
                           <a:ea typeface="대명체 보통" panose="020B0600000101010101" pitchFamily="50" charset="-127"/>
                           <a:cs typeface="+mn-cs"/>
                         </a:rPr>
-                        <a:t>156,733</a:t>
+                        <a:t>163,577</a:t>
                       </a:r>
                     </a:p>
                   </a:txBody>
@@ -13576,7 +13576,7 @@
                           <a:ea typeface="대명체 보통" panose="020B0600000101010101" pitchFamily="50" charset="-127"/>
                           <a:cs typeface="+mn-cs"/>
                         </a:rPr>
-                        <a:t>17,705</a:t>
+                        <a:t>24,549</a:t>
                       </a:r>
                     </a:p>
                   </a:txBody>
@@ -13643,7 +13643,7 @@
                           <a:ea typeface="대명체 보통" panose="020B0600000101010101" pitchFamily="50" charset="-127"/>
                           <a:cs typeface="+mn-cs"/>
                         </a:rPr>
-                        <a:t>113%</a:t>
+                        <a:t>118%</a:t>
                       </a:r>
                     </a:p>
                   </a:txBody>
@@ -13710,7 +13710,7 @@
                           <a:ea typeface="대명체 보통" panose="020B0600000101010101" pitchFamily="50" charset="-127"/>
                           <a:cs typeface="+mn-cs"/>
                         </a:rPr>
-                        <a:t>109,135</a:t>
+                        <a:t>109,150</a:t>
                       </a:r>
                     </a:p>
                   </a:txBody>
@@ -13836,7 +13836,7 @@
                           <a:ea typeface="대명체 보통" panose="020B0600000101010101" pitchFamily="50" charset="-127"/>
                           <a:cs typeface="+mn-cs"/>
                         </a:rPr>
-                        <a:t>47,597</a:t>
+                        <a:t>54,427</a:t>
                       </a:r>
                     </a:p>
                   </a:txBody>
@@ -13903,7 +13903,7 @@
                           <a:ea typeface="대명체 보통" panose="020B0600000101010101" pitchFamily="50" charset="-127"/>
                           <a:cs typeface="+mn-cs"/>
                         </a:rPr>
-                        <a:t>44%</a:t>
+                        <a:t>50%</a:t>
                       </a:r>
                     </a:p>
                   </a:txBody>
@@ -14237,7 +14237,7 @@
                           <a:ea typeface="대명체 보통" panose="020B0600000101010101" pitchFamily="50" charset="-127"/>
                           <a:cs typeface="+mn-cs"/>
                         </a:rPr>
-                        <a:t>8,052</a:t>
+                        <a:t>10,020</a:t>
                       </a:r>
                     </a:p>
                   </a:txBody>
@@ -14355,7 +14355,7 @@
                           <a:ea typeface="대명체 보통" panose="020B0600000101010101" pitchFamily="50" charset="-127"/>
                           <a:cs typeface="+mn-cs"/>
                         </a:rPr>
-                        <a:t>29</a:t>
+                        <a:t>1,997</a:t>
                       </a:r>
                       <a:endParaRPr lang="en-US" altLang="ko-KR" sz="700" b="0" i="0" u="none" strike="noStrike" kern="1200" dirty="0">
                         <a:solidFill>
@@ -14427,7 +14427,7 @@
                           <a:ea typeface="대명체 보통" panose="020B0600000101010101" pitchFamily="50" charset="-127"/>
                           <a:cs typeface="+mn-cs"/>
                         </a:rPr>
-                        <a:t>100%</a:t>
+                        <a:t>125%</a:t>
                       </a:r>
                     </a:p>
                   </a:txBody>
@@ -14608,7 +14608,7 @@
                           <a:ea typeface="대명체 보통" panose="020B0600000101010101" pitchFamily="50" charset="-127"/>
                           <a:cs typeface="+mn-cs"/>
                         </a:rPr>
-                        <a:t>4,284</a:t>
+                        <a:t>6,252</a:t>
                       </a:r>
                     </a:p>
                   </a:txBody>
@@ -14671,7 +14671,7 @@
                           <a:ea typeface="대명체 보통" panose="020B0600000101010101" pitchFamily="50" charset="-127"/>
                           <a:cs typeface="+mn-cs"/>
                         </a:rPr>
-                        <a:t>114%</a:t>
+                        <a:t>166%</a:t>
                       </a:r>
                     </a:p>
                   </a:txBody>
@@ -14900,7 +14900,7 @@
                           <a:ea typeface="대명체 보통" panose="020B0600000101010101" pitchFamily="50" charset="-127"/>
                           <a:cs typeface="+mn-cs"/>
                         </a:rPr>
-                        <a:t>90,976</a:t>
+                        <a:t>94,558</a:t>
                       </a:r>
                     </a:p>
                   </a:txBody>
@@ -15018,7 +15018,7 @@
                           <a:ea typeface="대명체 보통" panose="020B0600000101010101" pitchFamily="50" charset="-127"/>
                           <a:cs typeface="+mn-cs"/>
                         </a:rPr>
-                        <a:t>10,602</a:t>
+                        <a:t>14,184</a:t>
                       </a:r>
                     </a:p>
                   </a:txBody>
@@ -15081,7 +15081,7 @@
                           <a:ea typeface="대명체 보통" panose="020B0600000101010101" pitchFamily="50" charset="-127"/>
                           <a:cs typeface="+mn-cs"/>
                         </a:rPr>
-                        <a:t>113%</a:t>
+                        <a:t>118%</a:t>
                       </a:r>
                     </a:p>
                   </a:txBody>
@@ -15144,7 +15144,7 @@
                           <a:ea typeface="대명체 보통" panose="020B0600000101010101" pitchFamily="50" charset="-127"/>
                           <a:cs typeface="+mn-cs"/>
                         </a:rPr>
-                        <a:t>62,415</a:t>
+                        <a:t>62,424</a:t>
                       </a:r>
                     </a:p>
                   </a:txBody>
@@ -15262,7 +15262,7 @@
                           <a:ea typeface="대명체 보통" panose="020B0600000101010101" pitchFamily="50" charset="-127"/>
                           <a:cs typeface="+mn-cs"/>
                         </a:rPr>
-                        <a:t>28,561</a:t>
+                        <a:t>32,134</a:t>
                       </a:r>
                     </a:p>
                   </a:txBody>
@@ -15325,7 +15325,7 @@
                           <a:ea typeface="대명체 보통" panose="020B0600000101010101" pitchFamily="50" charset="-127"/>
                           <a:cs typeface="+mn-cs"/>
                         </a:rPr>
-                        <a:t>46%</a:t>
+                        <a:t>51%</a:t>
                       </a:r>
                     </a:p>
                   </a:txBody>
@@ -15643,7 +15643,7 @@
                           <a:ea typeface="대명체 보통" panose="020B0600000101010101" pitchFamily="50" charset="-127"/>
                           <a:cs typeface="+mn-cs"/>
                         </a:rPr>
-                        <a:t>6,139</a:t>
+                        <a:t>8,262</a:t>
                       </a:r>
                     </a:p>
                   </a:txBody>
@@ -15753,7 +15753,7 @@
                           <a:ea typeface="대명체 보통" panose="020B0600000101010101" pitchFamily="50" charset="-127"/>
                           <a:cs typeface="+mn-cs"/>
                         </a:rPr>
-                        <a:t>458</a:t>
+                        <a:t>2,581</a:t>
                       </a:r>
                       <a:endParaRPr lang="en-US" altLang="ko-KR" sz="700" b="0" i="0" u="none" strike="noStrike" kern="1200" dirty="0">
                         <a:solidFill>
@@ -15821,7 +15821,7 @@
                           <a:ea typeface="대명체 보통" panose="020B0600000101010101" pitchFamily="50" charset="-127"/>
                           <a:cs typeface="+mn-cs"/>
                         </a:rPr>
-                        <a:t>108%</a:t>
+                        <a:t>145%</a:t>
                       </a:r>
                     </a:p>
                   </a:txBody>
@@ -15990,7 +15990,7 @@
                           <a:ea typeface="대명체 보통" panose="020B0600000101010101" pitchFamily="50" charset="-127"/>
                           <a:cs typeface="+mn-cs"/>
                         </a:rPr>
-                        <a:t>3,492</a:t>
+                        <a:t>5,615</a:t>
                       </a:r>
                     </a:p>
                   </a:txBody>
@@ -16049,7 +16049,7 @@
                           <a:ea typeface="대명체 보통" panose="020B0600000101010101" pitchFamily="50" charset="-127"/>
                           <a:cs typeface="+mn-cs"/>
                         </a:rPr>
-                        <a:t>132%</a:t>
+                        <a:t>212%</a:t>
                       </a:r>
                     </a:p>
                   </a:txBody>
@@ -16266,7 +16266,7 @@
                           <a:ea typeface="대명체 보통" panose="020B0600000101010101" pitchFamily="50" charset="-127"/>
                           <a:cs typeface="+mn-cs"/>
                         </a:rPr>
-                        <a:t>60,011</a:t>
+                        <a:t>63,100</a:t>
                       </a:r>
                     </a:p>
                   </a:txBody>
@@ -16376,7 +16376,7 @@
                           <a:ea typeface="대명체 보통" panose="020B0600000101010101" pitchFamily="50" charset="-127"/>
                           <a:cs typeface="+mn-cs"/>
                         </a:rPr>
-                        <a:t>5,227</a:t>
+                        <a:t>8,316</a:t>
                       </a:r>
                     </a:p>
                   </a:txBody>
@@ -16435,7 +16435,7 @@
                           <a:ea typeface="대명체 보통" panose="020B0600000101010101" pitchFamily="50" charset="-127"/>
                           <a:cs typeface="+mn-cs"/>
                         </a:rPr>
-                        <a:t>110%</a:t>
+                        <a:t>115%</a:t>
                       </a:r>
                     </a:p>
                   </a:txBody>
@@ -16494,7 +16494,7 @@
                           <a:ea typeface="대명체 보통" panose="020B0600000101010101" pitchFamily="50" charset="-127"/>
                           <a:cs typeface="+mn-cs"/>
                         </a:rPr>
-                        <a:t>43,197</a:t>
+                        <a:t>43,203</a:t>
                       </a:r>
                     </a:p>
                   </a:txBody>
@@ -16604,7 +16604,7 @@
                           <a:ea typeface="대명체 보통" panose="020B0600000101010101" pitchFamily="50" charset="-127"/>
                           <a:cs typeface="+mn-cs"/>
                         </a:rPr>
-                        <a:t>16,814</a:t>
+                        <a:t>19,897</a:t>
                       </a:r>
                     </a:p>
                   </a:txBody>
@@ -16663,7 +16663,7 @@
                           <a:ea typeface="대명체 보통" panose="020B0600000101010101" pitchFamily="50" charset="-127"/>
                           <a:cs typeface="+mn-cs"/>
                         </a:rPr>
-                        <a:t>39%</a:t>
+                        <a:t>46%</a:t>
                       </a:r>
                     </a:p>
                   </a:txBody>
@@ -16999,7 +16999,7 @@
                           <a:ea typeface="대명체 보통" panose="020B0600000101010101" pitchFamily="50" charset="-127"/>
                           <a:cs typeface="+mn-cs"/>
                         </a:rPr>
-                        <a:t>584</a:t>
+                        <a:t>736</a:t>
                       </a:r>
                       <a:endParaRPr lang="en-US" altLang="ko-KR" sz="700" b="0" i="0" u="none" strike="noStrike" kern="1200" dirty="0">
                         <a:solidFill>
@@ -17126,7 +17126,7 @@
                           <a:ea typeface="대명체 보통" panose="020B0600000101010101" pitchFamily="50" charset="-127"/>
                           <a:cs typeface="+mn-cs"/>
                         </a:rPr>
-                        <a:t>182</a:t>
+                        <a:t>333</a:t>
                       </a:r>
                       <a:endParaRPr lang="en-US" altLang="ko-KR" sz="700" b="0" i="0" u="none" strike="noStrike" kern="1200" dirty="0">
                         <a:solidFill>
@@ -17198,7 +17198,7 @@
                           <a:ea typeface="대명체 보통" panose="020B0600000101010101" pitchFamily="50" charset="-127"/>
                           <a:cs typeface="+mn-cs"/>
                         </a:rPr>
-                        <a:t>145%</a:t>
+                        <a:t>183%</a:t>
                       </a:r>
                     </a:p>
                   </a:txBody>
@@ -17388,7 +17388,7 @@
                           <a:ea typeface="대명체 보통" panose="020B0600000101010101" pitchFamily="50" charset="-127"/>
                           <a:cs typeface="+mn-cs"/>
                         </a:rPr>
-                        <a:t>288</a:t>
+                        <a:t>440</a:t>
                       </a:r>
                     </a:p>
                   </a:txBody>
@@ -17451,7 +17451,7 @@
                           <a:ea typeface="대명체 보통" panose="020B0600000101010101" pitchFamily="50" charset="-127"/>
                           <a:cs typeface="+mn-cs"/>
                         </a:rPr>
-                        <a:t>97%</a:t>
+                        <a:t>149%</a:t>
                       </a:r>
                     </a:p>
                   </a:txBody>
@@ -17680,7 +17680,7 @@
                           <a:ea typeface="대명체 보통" panose="020B0600000101010101" pitchFamily="50" charset="-127"/>
                           <a:cs typeface="+mn-cs"/>
                         </a:rPr>
-                        <a:t>5,746</a:t>
+                        <a:t>5,919</a:t>
                       </a:r>
                     </a:p>
                   </a:txBody>
@@ -17798,7 +17798,7 @@
                           <a:ea typeface="대명체 보통" panose="020B0600000101010101" pitchFamily="50" charset="-127"/>
                           <a:cs typeface="+mn-cs"/>
                         </a:rPr>
-                        <a:t>1,876</a:t>
+                        <a:t>2,049</a:t>
                       </a:r>
                       <a:endParaRPr lang="en-US" altLang="ko-KR" sz="700" b="0" i="0" u="none" strike="noStrike" kern="1200" dirty="0">
                         <a:solidFill>
@@ -17870,7 +17870,7 @@
                           <a:ea typeface="대명체 보통" panose="020B0600000101010101" pitchFamily="50" charset="-127"/>
                           <a:cs typeface="+mn-cs"/>
                         </a:rPr>
-                        <a:t>148%</a:t>
+                        <a:t>153%</a:t>
                       </a:r>
                     </a:p>
                   </a:txBody>
@@ -18051,7 +18051,7 @@
                           <a:ea typeface="대명체 보통" panose="020B0600000101010101" pitchFamily="50" charset="-127"/>
                           <a:cs typeface="+mn-cs"/>
                         </a:rPr>
-                        <a:t>2,223</a:t>
+                        <a:t>2,396</a:t>
                       </a:r>
                     </a:p>
                   </a:txBody>
@@ -18114,7 +18114,7 @@
                           <a:ea typeface="대명체 보통" panose="020B0600000101010101" pitchFamily="50" charset="-127"/>
                           <a:cs typeface="+mn-cs"/>
                         </a:rPr>
-                        <a:t>63%</a:t>
+                        <a:t>68%</a:t>
                       </a:r>
                     </a:p>
                   </a:txBody>

--- a/data/세일즈마케팅_예상매출현황.pptx
+++ b/data/세일즈마케팅_예상매출현황.pptx
@@ -12756,7 +12756,7 @@
                           <a:ea typeface="대명체 보통" panose="020B0600000101010101" pitchFamily="50" charset="-127"/>
                           <a:cs typeface="+mn-cs"/>
                         </a:rPr>
-                        <a:t>19,018</a:t>
+                        <a:t>19,508</a:t>
                       </a:r>
                     </a:p>
                   </a:txBody>
@@ -12882,7 +12882,7 @@
                           <a:ea typeface="대명체 보통" panose="020B0600000101010101" pitchFamily="50" charset="-127"/>
                           <a:cs typeface="+mn-cs"/>
                         </a:rPr>
-                        <a:t>4,911</a:t>
+                        <a:t>5,401</a:t>
                       </a:r>
                     </a:p>
                   </a:txBody>
@@ -12949,7 +12949,7 @@
                           <a:ea typeface="대명체 보통" panose="020B0600000101010101" pitchFamily="50" charset="-127"/>
                           <a:cs typeface="+mn-cs"/>
                         </a:rPr>
-                        <a:t>135%</a:t>
+                        <a:t>138%</a:t>
                       </a:r>
                     </a:p>
                   </a:txBody>
@@ -13016,7 +13016,7 @@
                           <a:ea typeface="대명체 보통" panose="020B0600000101010101" pitchFamily="50" charset="-127"/>
                           <a:cs typeface="+mn-cs"/>
                         </a:rPr>
-                        <a:t>6,711</a:t>
+                        <a:t>6,876</a:t>
                       </a:r>
                     </a:p>
                   </a:txBody>
@@ -13142,7 +13142,7 @@
                           <a:ea typeface="대명체 보통" panose="020B0600000101010101" pitchFamily="50" charset="-127"/>
                           <a:cs typeface="+mn-cs"/>
                         </a:rPr>
-                        <a:t>12,307</a:t>
+                        <a:t>12,632</a:t>
                       </a:r>
                     </a:p>
                   </a:txBody>
@@ -13209,7 +13209,7 @@
                           <a:ea typeface="대명체 보통" panose="020B0600000101010101" pitchFamily="50" charset="-127"/>
                           <a:cs typeface="+mn-cs"/>
                         </a:rPr>
-                        <a:t>183%</a:t>
+                        <a:t>184%</a:t>
                       </a:r>
                     </a:p>
                   </a:txBody>
@@ -13450,7 +13450,7 @@
                           <a:ea typeface="대명체 보통" panose="020B0600000101010101" pitchFamily="50" charset="-127"/>
                           <a:cs typeface="+mn-cs"/>
                         </a:rPr>
-                        <a:t>163,577</a:t>
+                        <a:t>164,083</a:t>
                       </a:r>
                     </a:p>
                   </a:txBody>
@@ -13576,7 +13576,7 @@
                           <a:ea typeface="대명체 보통" panose="020B0600000101010101" pitchFamily="50" charset="-127"/>
                           <a:cs typeface="+mn-cs"/>
                         </a:rPr>
-                        <a:t>24,549</a:t>
+                        <a:t>25,055</a:t>
                       </a:r>
                     </a:p>
                   </a:txBody>
@@ -13710,7 +13710,7 @@
                           <a:ea typeface="대명체 보통" panose="020B0600000101010101" pitchFamily="50" charset="-127"/>
                           <a:cs typeface="+mn-cs"/>
                         </a:rPr>
-                        <a:t>109,150</a:t>
+                        <a:t>109,315</a:t>
                       </a:r>
                     </a:p>
                   </a:txBody>
@@ -13836,7 +13836,7 @@
                           <a:ea typeface="대명체 보통" panose="020B0600000101010101" pitchFamily="50" charset="-127"/>
                           <a:cs typeface="+mn-cs"/>
                         </a:rPr>
-                        <a:t>54,427</a:t>
+                        <a:t>54,768</a:t>
                       </a:r>
                     </a:p>
                   </a:txBody>
@@ -14237,7 +14237,7 @@
                           <a:ea typeface="대명체 보통" panose="020B0600000101010101" pitchFamily="50" charset="-127"/>
                           <a:cs typeface="+mn-cs"/>
                         </a:rPr>
-                        <a:t>10,020</a:t>
+                        <a:t>10,271</a:t>
                       </a:r>
                     </a:p>
                   </a:txBody>
@@ -14355,7 +14355,7 @@
                           <a:ea typeface="대명체 보통" panose="020B0600000101010101" pitchFamily="50" charset="-127"/>
                           <a:cs typeface="+mn-cs"/>
                         </a:rPr>
-                        <a:t>1,997</a:t>
+                        <a:t>2,248</a:t>
                       </a:r>
                       <a:endParaRPr lang="en-US" altLang="ko-KR" sz="700" b="0" i="0" u="none" strike="noStrike" kern="1200" dirty="0">
                         <a:solidFill>
@@ -14427,7 +14427,7 @@
                           <a:ea typeface="대명체 보통" panose="020B0600000101010101" pitchFamily="50" charset="-127"/>
                           <a:cs typeface="+mn-cs"/>
                         </a:rPr>
-                        <a:t>125%</a:t>
+                        <a:t>128%</a:t>
                       </a:r>
                     </a:p>
                   </a:txBody>
@@ -14490,7 +14490,7 @@
                           <a:ea typeface="대명체 보통" panose="020B0600000101010101" pitchFamily="50" charset="-127"/>
                           <a:cs typeface="+mn-cs"/>
                         </a:rPr>
-                        <a:t>3,768</a:t>
+                        <a:t>3,859</a:t>
                       </a:r>
                     </a:p>
                   </a:txBody>
@@ -14608,7 +14608,7 @@
                           <a:ea typeface="대명체 보통" panose="020B0600000101010101" pitchFamily="50" charset="-127"/>
                           <a:cs typeface="+mn-cs"/>
                         </a:rPr>
-                        <a:t>6,252</a:t>
+                        <a:t>6,411</a:t>
                       </a:r>
                     </a:p>
                   </a:txBody>
@@ -14900,7 +14900,7 @@
                           <a:ea typeface="대명체 보통" panose="020B0600000101010101" pitchFamily="50" charset="-127"/>
                           <a:cs typeface="+mn-cs"/>
                         </a:rPr>
-                        <a:t>94,558</a:t>
+                        <a:t>94,821</a:t>
                       </a:r>
                     </a:p>
                   </a:txBody>
@@ -15018,7 +15018,7 @@
                           <a:ea typeface="대명체 보통" panose="020B0600000101010101" pitchFamily="50" charset="-127"/>
                           <a:cs typeface="+mn-cs"/>
                         </a:rPr>
-                        <a:t>14,184</a:t>
+                        <a:t>14,447</a:t>
                       </a:r>
                     </a:p>
                   </a:txBody>
@@ -15144,7 +15144,7 @@
                           <a:ea typeface="대명체 보통" panose="020B0600000101010101" pitchFamily="50" charset="-127"/>
                           <a:cs typeface="+mn-cs"/>
                         </a:rPr>
-                        <a:t>62,424</a:t>
+                        <a:t>62,515</a:t>
                       </a:r>
                     </a:p>
                   </a:txBody>
@@ -15262,7 +15262,7 @@
                           <a:ea typeface="대명체 보통" panose="020B0600000101010101" pitchFamily="50" charset="-127"/>
                           <a:cs typeface="+mn-cs"/>
                         </a:rPr>
-                        <a:t>32,134</a:t>
+                        <a:t>32,306</a:t>
                       </a:r>
                     </a:p>
                   </a:txBody>
@@ -15325,7 +15325,7 @@
                           <a:ea typeface="대명체 보통" panose="020B0600000101010101" pitchFamily="50" charset="-127"/>
                           <a:cs typeface="+mn-cs"/>
                         </a:rPr>
-                        <a:t>51%</a:t>
+                        <a:t>52%</a:t>
                       </a:r>
                     </a:p>
                   </a:txBody>
@@ -15643,7 +15643,7 @@
                           <a:ea typeface="대명체 보통" panose="020B0600000101010101" pitchFamily="50" charset="-127"/>
                           <a:cs typeface="+mn-cs"/>
                         </a:rPr>
-                        <a:t>8,262</a:t>
+                        <a:t>8,514</a:t>
                       </a:r>
                     </a:p>
                   </a:txBody>
@@ -15753,7 +15753,7 @@
                           <a:ea typeface="대명체 보통" panose="020B0600000101010101" pitchFamily="50" charset="-127"/>
                           <a:cs typeface="+mn-cs"/>
                         </a:rPr>
-                        <a:t>2,581</a:t>
+                        <a:t>2,833</a:t>
                       </a:r>
                       <a:endParaRPr lang="en-US" altLang="ko-KR" sz="700" b="0" i="0" u="none" strike="noStrike" kern="1200" dirty="0">
                         <a:solidFill>
@@ -15821,7 +15821,7 @@
                           <a:ea typeface="대명체 보통" panose="020B0600000101010101" pitchFamily="50" charset="-127"/>
                           <a:cs typeface="+mn-cs"/>
                         </a:rPr>
-                        <a:t>145%</a:t>
+                        <a:t>150%</a:t>
                       </a:r>
                     </a:p>
                   </a:txBody>
@@ -15880,7 +15880,7 @@
                           <a:ea typeface="대명체 보통" panose="020B0600000101010101" pitchFamily="50" charset="-127"/>
                           <a:cs typeface="+mn-cs"/>
                         </a:rPr>
-                        <a:t>2,647</a:t>
+                        <a:t>2,721</a:t>
                       </a:r>
                     </a:p>
                   </a:txBody>
@@ -15990,7 +15990,7 @@
                           <a:ea typeface="대명체 보통" panose="020B0600000101010101" pitchFamily="50" charset="-127"/>
                           <a:cs typeface="+mn-cs"/>
                         </a:rPr>
-                        <a:t>5,615</a:t>
+                        <a:t>5,794</a:t>
                       </a:r>
                     </a:p>
                   </a:txBody>
@@ -16049,7 +16049,7 @@
                           <a:ea typeface="대명체 보통" panose="020B0600000101010101" pitchFamily="50" charset="-127"/>
                           <a:cs typeface="+mn-cs"/>
                         </a:rPr>
-                        <a:t>212%</a:t>
+                        <a:t>213%</a:t>
                       </a:r>
                     </a:p>
                   </a:txBody>
@@ -16266,7 +16266,7 @@
                           <a:ea typeface="대명체 보통" panose="020B0600000101010101" pitchFamily="50" charset="-127"/>
                           <a:cs typeface="+mn-cs"/>
                         </a:rPr>
-                        <a:t>63,100</a:t>
+                        <a:t>63,357</a:t>
                       </a:r>
                     </a:p>
                   </a:txBody>
@@ -16376,7 +16376,7 @@
                           <a:ea typeface="대명체 보통" panose="020B0600000101010101" pitchFamily="50" charset="-127"/>
                           <a:cs typeface="+mn-cs"/>
                         </a:rPr>
-                        <a:t>8,316</a:t>
+                        <a:t>8,573</a:t>
                       </a:r>
                     </a:p>
                   </a:txBody>
@@ -16435,7 +16435,7 @@
                           <a:ea typeface="대명체 보통" panose="020B0600000101010101" pitchFamily="50" charset="-127"/>
                           <a:cs typeface="+mn-cs"/>
                         </a:rPr>
-                        <a:t>115%</a:t>
+                        <a:t>116%</a:t>
                       </a:r>
                     </a:p>
                   </a:txBody>
@@ -16494,7 +16494,7 @@
                           <a:ea typeface="대명체 보통" panose="020B0600000101010101" pitchFamily="50" charset="-127"/>
                           <a:cs typeface="+mn-cs"/>
                         </a:rPr>
-                        <a:t>43,203</a:t>
+                        <a:t>43,276</a:t>
                       </a:r>
                     </a:p>
                   </a:txBody>
@@ -16604,7 +16604,7 @@
                           <a:ea typeface="대명체 보통" panose="020B0600000101010101" pitchFamily="50" charset="-127"/>
                           <a:cs typeface="+mn-cs"/>
                         </a:rPr>
-                        <a:t>19,897</a:t>
+                        <a:t>20,080</a:t>
                       </a:r>
                     </a:p>
                   </a:txBody>
@@ -16999,7 +16999,7 @@
                           <a:ea typeface="대명체 보통" panose="020B0600000101010101" pitchFamily="50" charset="-127"/>
                           <a:cs typeface="+mn-cs"/>
                         </a:rPr>
-                        <a:t>736</a:t>
+                        <a:t>723</a:t>
                       </a:r>
                       <a:endParaRPr lang="en-US" altLang="ko-KR" sz="700" b="0" i="0" u="none" strike="noStrike" kern="1200" dirty="0">
                         <a:solidFill>
@@ -17126,7 +17126,7 @@
                           <a:ea typeface="대명체 보통" panose="020B0600000101010101" pitchFamily="50" charset="-127"/>
                           <a:cs typeface="+mn-cs"/>
                         </a:rPr>
-                        <a:t>333</a:t>
+                        <a:t>320</a:t>
                       </a:r>
                       <a:endParaRPr lang="en-US" altLang="ko-KR" sz="700" b="0" i="0" u="none" strike="noStrike" kern="1200" dirty="0">
                         <a:solidFill>
@@ -17198,7 +17198,7 @@
                           <a:ea typeface="대명체 보통" panose="020B0600000101010101" pitchFamily="50" charset="-127"/>
                           <a:cs typeface="+mn-cs"/>
                         </a:rPr>
-                        <a:t>183%</a:t>
+                        <a:t>179%</a:t>
                       </a:r>
                     </a:p>
                   </a:txBody>
@@ -17388,7 +17388,7 @@
                           <a:ea typeface="대명체 보통" panose="020B0600000101010101" pitchFamily="50" charset="-127"/>
                           <a:cs typeface="+mn-cs"/>
                         </a:rPr>
-                        <a:t>440</a:t>
+                        <a:t>427</a:t>
                       </a:r>
                     </a:p>
                   </a:txBody>
@@ -17451,7 +17451,7 @@
                           <a:ea typeface="대명체 보통" panose="020B0600000101010101" pitchFamily="50" charset="-127"/>
                           <a:cs typeface="+mn-cs"/>
                         </a:rPr>
-                        <a:t>149%</a:t>
+                        <a:t>144%</a:t>
                       </a:r>
                     </a:p>
                   </a:txBody>
@@ -17680,7 +17680,7 @@
                           <a:ea typeface="대명체 보통" panose="020B0600000101010101" pitchFamily="50" charset="-127"/>
                           <a:cs typeface="+mn-cs"/>
                         </a:rPr>
-                        <a:t>5,919</a:t>
+                        <a:t>5,906</a:t>
                       </a:r>
                     </a:p>
                   </a:txBody>
@@ -17798,7 +17798,7 @@
                           <a:ea typeface="대명체 보통" panose="020B0600000101010101" pitchFamily="50" charset="-127"/>
                           <a:cs typeface="+mn-cs"/>
                         </a:rPr>
-                        <a:t>2,049</a:t>
+                        <a:t>2,036</a:t>
                       </a:r>
                       <a:endParaRPr lang="en-US" altLang="ko-KR" sz="700" b="0" i="0" u="none" strike="noStrike" kern="1200" dirty="0">
                         <a:solidFill>
@@ -18051,7 +18051,7 @@
                           <a:ea typeface="대명체 보통" panose="020B0600000101010101" pitchFamily="50" charset="-127"/>
                           <a:cs typeface="+mn-cs"/>
                         </a:rPr>
-                        <a:t>2,396</a:t>
+                        <a:t>2,382</a:t>
                       </a:r>
                     </a:p>
                   </a:txBody>

--- a/data/세일즈마케팅_예상매출현황.pptx
+++ b/data/세일즈마케팅_예상매출현황.pptx
@@ -12756,7 +12756,7 @@
                           <a:ea typeface="대명체 보통" panose="020B0600000101010101" pitchFamily="50" charset="-127"/>
                           <a:cs typeface="+mn-cs"/>
                         </a:rPr>
-                        <a:t>19,508</a:t>
+                        <a:t>18,711</a:t>
                       </a:r>
                     </a:p>
                   </a:txBody>
@@ -12882,7 +12882,7 @@
                           <a:ea typeface="대명체 보통" panose="020B0600000101010101" pitchFamily="50" charset="-127"/>
                           <a:cs typeface="+mn-cs"/>
                         </a:rPr>
-                        <a:t>5,401</a:t>
+                        <a:t>4,605</a:t>
                       </a:r>
                     </a:p>
                   </a:txBody>
@@ -12949,7 +12949,7 @@
                           <a:ea typeface="대명체 보통" panose="020B0600000101010101" pitchFamily="50" charset="-127"/>
                           <a:cs typeface="+mn-cs"/>
                         </a:rPr>
-                        <a:t>138%</a:t>
+                        <a:t>133%</a:t>
                       </a:r>
                     </a:p>
                   </a:txBody>
@@ -13016,7 +13016,7 @@
                           <a:ea typeface="대명체 보통" panose="020B0600000101010101" pitchFamily="50" charset="-127"/>
                           <a:cs typeface="+mn-cs"/>
                         </a:rPr>
-                        <a:t>6,876</a:t>
+                        <a:t>7,200</a:t>
                       </a:r>
                     </a:p>
                   </a:txBody>
@@ -13142,7 +13142,7 @@
                           <a:ea typeface="대명체 보통" panose="020B0600000101010101" pitchFamily="50" charset="-127"/>
                           <a:cs typeface="+mn-cs"/>
                         </a:rPr>
-                        <a:t>12,632</a:t>
+                        <a:t>11,511</a:t>
                       </a:r>
                     </a:p>
                   </a:txBody>
@@ -13209,7 +13209,7 @@
                           <a:ea typeface="대명체 보통" panose="020B0600000101010101" pitchFamily="50" charset="-127"/>
                           <a:cs typeface="+mn-cs"/>
                         </a:rPr>
-                        <a:t>184%</a:t>
+                        <a:t>160%</a:t>
                       </a:r>
                     </a:p>
                   </a:txBody>
@@ -13450,7 +13450,7 @@
                           <a:ea typeface="대명체 보통" panose="020B0600000101010101" pitchFamily="50" charset="-127"/>
                           <a:cs typeface="+mn-cs"/>
                         </a:rPr>
-                        <a:t>164,083</a:t>
+                        <a:t>163,286</a:t>
                       </a:r>
                     </a:p>
                   </a:txBody>
@@ -13576,7 +13576,7 @@
                           <a:ea typeface="대명체 보통" panose="020B0600000101010101" pitchFamily="50" charset="-127"/>
                           <a:cs typeface="+mn-cs"/>
                         </a:rPr>
-                        <a:t>25,055</a:t>
+                        <a:t>24,258</a:t>
                       </a:r>
                     </a:p>
                   </a:txBody>
@@ -13643,7 +13643,7 @@
                           <a:ea typeface="대명체 보통" panose="020B0600000101010101" pitchFamily="50" charset="-127"/>
                           <a:cs typeface="+mn-cs"/>
                         </a:rPr>
-                        <a:t>118%</a:t>
+                        <a:t>117%</a:t>
                       </a:r>
                     </a:p>
                   </a:txBody>
@@ -13710,7 +13710,7 @@
                           <a:ea typeface="대명체 보통" panose="020B0600000101010101" pitchFamily="50" charset="-127"/>
                           <a:cs typeface="+mn-cs"/>
                         </a:rPr>
-                        <a:t>109,315</a:t>
+                        <a:t>109,638</a:t>
                       </a:r>
                     </a:p>
                   </a:txBody>
@@ -13836,7 +13836,7 @@
                           <a:ea typeface="대명체 보통" panose="020B0600000101010101" pitchFamily="50" charset="-127"/>
                           <a:cs typeface="+mn-cs"/>
                         </a:rPr>
-                        <a:t>54,768</a:t>
+                        <a:t>53,648</a:t>
                       </a:r>
                     </a:p>
                   </a:txBody>
@@ -13903,7 +13903,7 @@
                           <a:ea typeface="대명체 보통" panose="020B0600000101010101" pitchFamily="50" charset="-127"/>
                           <a:cs typeface="+mn-cs"/>
                         </a:rPr>
-                        <a:t>50%</a:t>
+                        <a:t>49%</a:t>
                       </a:r>
                     </a:p>
                   </a:txBody>
@@ -14237,7 +14237,7 @@
                           <a:ea typeface="대명체 보통" panose="020B0600000101010101" pitchFamily="50" charset="-127"/>
                           <a:cs typeface="+mn-cs"/>
                         </a:rPr>
-                        <a:t>10,271</a:t>
+                        <a:t>9,758</a:t>
                       </a:r>
                     </a:p>
                   </a:txBody>
@@ -14355,7 +14355,7 @@
                           <a:ea typeface="대명체 보통" panose="020B0600000101010101" pitchFamily="50" charset="-127"/>
                           <a:cs typeface="+mn-cs"/>
                         </a:rPr>
-                        <a:t>2,248</a:t>
+                        <a:t>1,736</a:t>
                       </a:r>
                       <a:endParaRPr lang="en-US" altLang="ko-KR" sz="700" b="0" i="0" u="none" strike="noStrike" kern="1200" dirty="0">
                         <a:solidFill>
@@ -14427,7 +14427,7 @@
                           <a:ea typeface="대명체 보통" panose="020B0600000101010101" pitchFamily="50" charset="-127"/>
                           <a:cs typeface="+mn-cs"/>
                         </a:rPr>
-                        <a:t>128%</a:t>
+                        <a:t>122%</a:t>
                       </a:r>
                     </a:p>
                   </a:txBody>
@@ -14490,7 +14490,7 @@
                           <a:ea typeface="대명체 보통" panose="020B0600000101010101" pitchFamily="50" charset="-127"/>
                           <a:cs typeface="+mn-cs"/>
                         </a:rPr>
-                        <a:t>3,859</a:t>
+                        <a:t>4,053</a:t>
                       </a:r>
                     </a:p>
                   </a:txBody>
@@ -14608,7 +14608,7 @@
                           <a:ea typeface="대명체 보통" panose="020B0600000101010101" pitchFamily="50" charset="-127"/>
                           <a:cs typeface="+mn-cs"/>
                         </a:rPr>
-                        <a:t>6,411</a:t>
+                        <a:t>5,706</a:t>
                       </a:r>
                     </a:p>
                   </a:txBody>
@@ -14671,7 +14671,7 @@
                           <a:ea typeface="대명체 보통" panose="020B0600000101010101" pitchFamily="50" charset="-127"/>
                           <a:cs typeface="+mn-cs"/>
                         </a:rPr>
-                        <a:t>166%</a:t>
+                        <a:t>141%</a:t>
                       </a:r>
                     </a:p>
                   </a:txBody>
@@ -14900,7 +14900,7 @@
                           <a:ea typeface="대명체 보통" panose="020B0600000101010101" pitchFamily="50" charset="-127"/>
                           <a:cs typeface="+mn-cs"/>
                         </a:rPr>
-                        <a:t>94,821</a:t>
+                        <a:t>94,308</a:t>
                       </a:r>
                     </a:p>
                   </a:txBody>
@@ -15018,7 +15018,7 @@
                           <a:ea typeface="대명체 보통" panose="020B0600000101010101" pitchFamily="50" charset="-127"/>
                           <a:cs typeface="+mn-cs"/>
                         </a:rPr>
-                        <a:t>14,447</a:t>
+                        <a:t>13,935</a:t>
                       </a:r>
                     </a:p>
                   </a:txBody>
@@ -15081,7 +15081,7 @@
                           <a:ea typeface="대명체 보통" panose="020B0600000101010101" pitchFamily="50" charset="-127"/>
                           <a:cs typeface="+mn-cs"/>
                         </a:rPr>
-                        <a:t>118%</a:t>
+                        <a:t>117%</a:t>
                       </a:r>
                     </a:p>
                   </a:txBody>
@@ -15144,7 +15144,7 @@
                           <a:ea typeface="대명체 보통" panose="020B0600000101010101" pitchFamily="50" charset="-127"/>
                           <a:cs typeface="+mn-cs"/>
                         </a:rPr>
-                        <a:t>62,515</a:t>
+                        <a:t>62,708</a:t>
                       </a:r>
                     </a:p>
                   </a:txBody>
@@ -15262,7 +15262,7 @@
                           <a:ea typeface="대명체 보통" panose="020B0600000101010101" pitchFamily="50" charset="-127"/>
                           <a:cs typeface="+mn-cs"/>
                         </a:rPr>
-                        <a:t>32,306</a:t>
+                        <a:t>31,600</a:t>
                       </a:r>
                     </a:p>
                   </a:txBody>
@@ -15325,7 +15325,7 @@
                           <a:ea typeface="대명체 보통" panose="020B0600000101010101" pitchFamily="50" charset="-127"/>
                           <a:cs typeface="+mn-cs"/>
                         </a:rPr>
-                        <a:t>52%</a:t>
+                        <a:t>50%</a:t>
                       </a:r>
                     </a:p>
                   </a:txBody>
@@ -15643,7 +15643,7 @@
                           <a:ea typeface="대명체 보통" panose="020B0600000101010101" pitchFamily="50" charset="-127"/>
                           <a:cs typeface="+mn-cs"/>
                         </a:rPr>
-                        <a:t>8,514</a:t>
+                        <a:t>8,250</a:t>
                       </a:r>
                     </a:p>
                   </a:txBody>
@@ -15753,7 +15753,7 @@
                           <a:ea typeface="대명체 보통" panose="020B0600000101010101" pitchFamily="50" charset="-127"/>
                           <a:cs typeface="+mn-cs"/>
                         </a:rPr>
-                        <a:t>2,833</a:t>
+                        <a:t>2,569</a:t>
                       </a:r>
                       <a:endParaRPr lang="en-US" altLang="ko-KR" sz="700" b="0" i="0" u="none" strike="noStrike" kern="1200" dirty="0">
                         <a:solidFill>
@@ -15821,7 +15821,7 @@
                           <a:ea typeface="대명체 보통" panose="020B0600000101010101" pitchFamily="50" charset="-127"/>
                           <a:cs typeface="+mn-cs"/>
                         </a:rPr>
-                        <a:t>150%</a:t>
+                        <a:t>145%</a:t>
                       </a:r>
                     </a:p>
                   </a:txBody>
@@ -15880,7 +15880,7 @@
                           <a:ea typeface="대명체 보통" panose="020B0600000101010101" pitchFamily="50" charset="-127"/>
                           <a:cs typeface="+mn-cs"/>
                         </a:rPr>
-                        <a:t>2,721</a:t>
+                        <a:t>2,844</a:t>
                       </a:r>
                     </a:p>
                   </a:txBody>
@@ -15990,7 +15990,7 @@
                           <a:ea typeface="대명체 보통" panose="020B0600000101010101" pitchFamily="50" charset="-127"/>
                           <a:cs typeface="+mn-cs"/>
                         </a:rPr>
-                        <a:t>5,794</a:t>
+                        <a:t>5,406</a:t>
                       </a:r>
                     </a:p>
                   </a:txBody>
@@ -16049,7 +16049,7 @@
                           <a:ea typeface="대명체 보통" panose="020B0600000101010101" pitchFamily="50" charset="-127"/>
                           <a:cs typeface="+mn-cs"/>
                         </a:rPr>
-                        <a:t>213%</a:t>
+                        <a:t>190%</a:t>
                       </a:r>
                     </a:p>
                   </a:txBody>
@@ -16266,7 +16266,7 @@
                           <a:ea typeface="대명체 보통" panose="020B0600000101010101" pitchFamily="50" charset="-127"/>
                           <a:cs typeface="+mn-cs"/>
                         </a:rPr>
-                        <a:t>63,357</a:t>
+                        <a:t>63,093</a:t>
                       </a:r>
                     </a:p>
                   </a:txBody>
@@ -16376,7 +16376,7 @@
                           <a:ea typeface="대명체 보통" panose="020B0600000101010101" pitchFamily="50" charset="-127"/>
                           <a:cs typeface="+mn-cs"/>
                         </a:rPr>
-                        <a:t>8,573</a:t>
+                        <a:t>8,309</a:t>
                       </a:r>
                     </a:p>
                   </a:txBody>
@@ -16435,7 +16435,7 @@
                           <a:ea typeface="대명체 보통" panose="020B0600000101010101" pitchFamily="50" charset="-127"/>
                           <a:cs typeface="+mn-cs"/>
                         </a:rPr>
-                        <a:t>116%</a:t>
+                        <a:t>115%</a:t>
                       </a:r>
                     </a:p>
                   </a:txBody>
@@ -16494,7 +16494,7 @@
                           <a:ea typeface="대명체 보통" panose="020B0600000101010101" pitchFamily="50" charset="-127"/>
                           <a:cs typeface="+mn-cs"/>
                         </a:rPr>
-                        <a:t>43,276</a:t>
+                        <a:t>43,400</a:t>
                       </a:r>
                     </a:p>
                   </a:txBody>
@@ -16604,7 +16604,7 @@
                           <a:ea typeface="대명체 보통" panose="020B0600000101010101" pitchFamily="50" charset="-127"/>
                           <a:cs typeface="+mn-cs"/>
                         </a:rPr>
-                        <a:t>20,080</a:t>
+                        <a:t>19,693</a:t>
                       </a:r>
                     </a:p>
                   </a:txBody>
@@ -16663,7 +16663,7 @@
                           <a:ea typeface="대명체 보통" panose="020B0600000101010101" pitchFamily="50" charset="-127"/>
                           <a:cs typeface="+mn-cs"/>
                         </a:rPr>
-                        <a:t>46%</a:t>
+                        <a:t>45%</a:t>
                       </a:r>
                     </a:p>
                   </a:txBody>
@@ -16999,7 +16999,7 @@
                           <a:ea typeface="대명체 보통" panose="020B0600000101010101" pitchFamily="50" charset="-127"/>
                           <a:cs typeface="+mn-cs"/>
                         </a:rPr>
-                        <a:t>723</a:t>
+                        <a:t>702</a:t>
                       </a:r>
                       <a:endParaRPr lang="en-US" altLang="ko-KR" sz="700" b="0" i="0" u="none" strike="noStrike" kern="1200" dirty="0">
                         <a:solidFill>
@@ -17126,7 +17126,7 @@
                           <a:ea typeface="대명체 보통" panose="020B0600000101010101" pitchFamily="50" charset="-127"/>
                           <a:cs typeface="+mn-cs"/>
                         </a:rPr>
-                        <a:t>320</a:t>
+                        <a:t>299</a:t>
                       </a:r>
                       <a:endParaRPr lang="en-US" altLang="ko-KR" sz="700" b="0" i="0" u="none" strike="noStrike" kern="1200" dirty="0">
                         <a:solidFill>
@@ -17198,7 +17198,7 @@
                           <a:ea typeface="대명체 보통" panose="020B0600000101010101" pitchFamily="50" charset="-127"/>
                           <a:cs typeface="+mn-cs"/>
                         </a:rPr>
-                        <a:t>179%</a:t>
+                        <a:t>174%</a:t>
                       </a:r>
                     </a:p>
                   </a:txBody>
@@ -17261,7 +17261,7 @@
                           <a:ea typeface="대명체 보통" panose="020B0600000101010101" pitchFamily="50" charset="-127"/>
                           <a:cs typeface="+mn-cs"/>
                         </a:rPr>
-                        <a:t>296</a:t>
+                        <a:t>303</a:t>
                       </a:r>
                       <a:endParaRPr lang="en-US" altLang="ko-KR" sz="700" b="0" i="0" u="none" strike="noStrike" kern="1200" dirty="0">
                         <a:solidFill>
@@ -17388,7 +17388,7 @@
                           <a:ea typeface="대명체 보통" panose="020B0600000101010101" pitchFamily="50" charset="-127"/>
                           <a:cs typeface="+mn-cs"/>
                         </a:rPr>
-                        <a:t>427</a:t>
+                        <a:t>399</a:t>
                       </a:r>
                     </a:p>
                   </a:txBody>
@@ -17451,7 +17451,7 @@
                           <a:ea typeface="대명체 보통" panose="020B0600000101010101" pitchFamily="50" charset="-127"/>
                           <a:cs typeface="+mn-cs"/>
                         </a:rPr>
-                        <a:t>144%</a:t>
+                        <a:t>132%</a:t>
                       </a:r>
                     </a:p>
                   </a:txBody>
@@ -17680,7 +17680,7 @@
                           <a:ea typeface="대명체 보통" panose="020B0600000101010101" pitchFamily="50" charset="-127"/>
                           <a:cs typeface="+mn-cs"/>
                         </a:rPr>
-                        <a:t>5,906</a:t>
+                        <a:t>5,885</a:t>
                       </a:r>
                     </a:p>
                   </a:txBody>
@@ -17798,7 +17798,7 @@
                           <a:ea typeface="대명체 보통" panose="020B0600000101010101" pitchFamily="50" charset="-127"/>
                           <a:cs typeface="+mn-cs"/>
                         </a:rPr>
-                        <a:t>2,036</a:t>
+                        <a:t>2,015</a:t>
                       </a:r>
                       <a:endParaRPr lang="en-US" altLang="ko-KR" sz="700" b="0" i="0" u="none" strike="noStrike" kern="1200" dirty="0">
                         <a:solidFill>
@@ -17870,7 +17870,7 @@
                           <a:ea typeface="대명체 보통" panose="020B0600000101010101" pitchFamily="50" charset="-127"/>
                           <a:cs typeface="+mn-cs"/>
                         </a:rPr>
-                        <a:t>153%</a:t>
+                        <a:t>152%</a:t>
                       </a:r>
                     </a:p>
                   </a:txBody>
@@ -17933,7 +17933,7 @@
                           <a:ea typeface="대명체 보통" panose="020B0600000101010101" pitchFamily="50" charset="-127"/>
                           <a:cs typeface="+mn-cs"/>
                         </a:rPr>
-                        <a:t>3,523</a:t>
+                        <a:t>3,530</a:t>
                       </a:r>
                     </a:p>
                   </a:txBody>
@@ -18051,7 +18051,7 @@
                           <a:ea typeface="대명체 보통" panose="020B0600000101010101" pitchFamily="50" charset="-127"/>
                           <a:cs typeface="+mn-cs"/>
                         </a:rPr>
-                        <a:t>2,382</a:t>
+                        <a:t>2,354</a:t>
                       </a:r>
                     </a:p>
                   </a:txBody>
@@ -18114,7 +18114,7 @@
                           <a:ea typeface="대명체 보통" panose="020B0600000101010101" pitchFamily="50" charset="-127"/>
                           <a:cs typeface="+mn-cs"/>
                         </a:rPr>
-                        <a:t>68%</a:t>
+                        <a:t>67%</a:t>
                       </a:r>
                     </a:p>
                   </a:txBody>

--- a/data/세일즈마케팅_예상매출현황.pptx
+++ b/data/세일즈마케팅_예상매출현황.pptx
@@ -12756,7 +12756,7 @@
                           <a:ea typeface="대명체 보통" panose="020B0600000101010101" pitchFamily="50" charset="-127"/>
                           <a:cs typeface="+mn-cs"/>
                         </a:rPr>
-                        <a:t>18,711</a:t>
+                        <a:t>18,669</a:t>
                       </a:r>
                     </a:p>
                   </a:txBody>
@@ -12882,7 +12882,7 @@
                           <a:ea typeface="대명체 보통" panose="020B0600000101010101" pitchFamily="50" charset="-127"/>
                           <a:cs typeface="+mn-cs"/>
                         </a:rPr>
-                        <a:t>4,605</a:t>
+                        <a:t>4,563</a:t>
                       </a:r>
                     </a:p>
                   </a:txBody>
@@ -12949,7 +12949,7 @@
                           <a:ea typeface="대명체 보통" panose="020B0600000101010101" pitchFamily="50" charset="-127"/>
                           <a:cs typeface="+mn-cs"/>
                         </a:rPr>
-                        <a:t>133%</a:t>
+                        <a:t>132%</a:t>
                       </a:r>
                     </a:p>
                   </a:txBody>
@@ -13142,7 +13142,7 @@
                           <a:ea typeface="대명체 보통" panose="020B0600000101010101" pitchFamily="50" charset="-127"/>
                           <a:cs typeface="+mn-cs"/>
                         </a:rPr>
-                        <a:t>11,511</a:t>
+                        <a:t>11,469</a:t>
                       </a:r>
                     </a:p>
                   </a:txBody>
@@ -13209,7 +13209,7 @@
                           <a:ea typeface="대명체 보통" panose="020B0600000101010101" pitchFamily="50" charset="-127"/>
                           <a:cs typeface="+mn-cs"/>
                         </a:rPr>
-                        <a:t>160%</a:t>
+                        <a:t>159%</a:t>
                       </a:r>
                     </a:p>
                   </a:txBody>
@@ -13450,7 +13450,7 @@
                           <a:ea typeface="대명체 보통" panose="020B0600000101010101" pitchFamily="50" charset="-127"/>
                           <a:cs typeface="+mn-cs"/>
                         </a:rPr>
-                        <a:t>163,286</a:t>
+                        <a:t>163,245</a:t>
                       </a:r>
                     </a:p>
                   </a:txBody>
@@ -13576,7 +13576,7 @@
                           <a:ea typeface="대명체 보통" panose="020B0600000101010101" pitchFamily="50" charset="-127"/>
                           <a:cs typeface="+mn-cs"/>
                         </a:rPr>
-                        <a:t>24,258</a:t>
+                        <a:t>24,217</a:t>
                       </a:r>
                     </a:p>
                   </a:txBody>
@@ -13836,7 +13836,7 @@
                           <a:ea typeface="대명체 보통" panose="020B0600000101010101" pitchFamily="50" charset="-127"/>
                           <a:cs typeface="+mn-cs"/>
                         </a:rPr>
-                        <a:t>53,648</a:t>
+                        <a:t>53,607</a:t>
                       </a:r>
                     </a:p>
                   </a:txBody>
@@ -14237,7 +14237,7 @@
                           <a:ea typeface="대명체 보통" panose="020B0600000101010101" pitchFamily="50" charset="-127"/>
                           <a:cs typeface="+mn-cs"/>
                         </a:rPr>
-                        <a:t>9,758</a:t>
+                        <a:t>9,726</a:t>
                       </a:r>
                     </a:p>
                   </a:txBody>
@@ -14355,7 +14355,7 @@
                           <a:ea typeface="대명체 보통" panose="020B0600000101010101" pitchFamily="50" charset="-127"/>
                           <a:cs typeface="+mn-cs"/>
                         </a:rPr>
-                        <a:t>1,736</a:t>
+                        <a:t>1,704</a:t>
                       </a:r>
                       <a:endParaRPr lang="en-US" altLang="ko-KR" sz="700" b="0" i="0" u="none" strike="noStrike" kern="1200" dirty="0">
                         <a:solidFill>
@@ -14427,7 +14427,7 @@
                           <a:ea typeface="대명체 보통" panose="020B0600000101010101" pitchFamily="50" charset="-127"/>
                           <a:cs typeface="+mn-cs"/>
                         </a:rPr>
-                        <a:t>122%</a:t>
+                        <a:t>121%</a:t>
                       </a:r>
                     </a:p>
                   </a:txBody>
@@ -14608,7 +14608,7 @@
                           <a:ea typeface="대명체 보통" panose="020B0600000101010101" pitchFamily="50" charset="-127"/>
                           <a:cs typeface="+mn-cs"/>
                         </a:rPr>
-                        <a:t>5,706</a:t>
+                        <a:t>5,674</a:t>
                       </a:r>
                     </a:p>
                   </a:txBody>
@@ -14671,7 +14671,7 @@
                           <a:ea typeface="대명체 보통" panose="020B0600000101010101" pitchFamily="50" charset="-127"/>
                           <a:cs typeface="+mn-cs"/>
                         </a:rPr>
-                        <a:t>141%</a:t>
+                        <a:t>140%</a:t>
                       </a:r>
                     </a:p>
                   </a:txBody>
@@ -14900,7 +14900,7 @@
                           <a:ea typeface="대명체 보통" panose="020B0600000101010101" pitchFamily="50" charset="-127"/>
                           <a:cs typeface="+mn-cs"/>
                         </a:rPr>
-                        <a:t>94,308</a:t>
+                        <a:t>94,276</a:t>
                       </a:r>
                     </a:p>
                   </a:txBody>
@@ -15018,7 +15018,7 @@
                           <a:ea typeface="대명체 보통" panose="020B0600000101010101" pitchFamily="50" charset="-127"/>
                           <a:cs typeface="+mn-cs"/>
                         </a:rPr>
-                        <a:t>13,935</a:t>
+                        <a:t>13,903</a:t>
                       </a:r>
                     </a:p>
                   </a:txBody>
@@ -15262,7 +15262,7 @@
                           <a:ea typeface="대명체 보통" panose="020B0600000101010101" pitchFamily="50" charset="-127"/>
                           <a:cs typeface="+mn-cs"/>
                         </a:rPr>
-                        <a:t>31,600</a:t>
+                        <a:t>31,568</a:t>
                       </a:r>
                     </a:p>
                   </a:txBody>
@@ -15643,7 +15643,7 @@
                           <a:ea typeface="대명체 보통" panose="020B0600000101010101" pitchFamily="50" charset="-127"/>
                           <a:cs typeface="+mn-cs"/>
                         </a:rPr>
-                        <a:t>8,250</a:t>
+                        <a:t>8,252</a:t>
                       </a:r>
                     </a:p>
                   </a:txBody>
@@ -15753,7 +15753,7 @@
                           <a:ea typeface="대명체 보통" panose="020B0600000101010101" pitchFamily="50" charset="-127"/>
                           <a:cs typeface="+mn-cs"/>
                         </a:rPr>
-                        <a:t>2,569</a:t>
+                        <a:t>2,571</a:t>
                       </a:r>
                       <a:endParaRPr lang="en-US" altLang="ko-KR" sz="700" b="0" i="0" u="none" strike="noStrike" kern="1200" dirty="0">
                         <a:solidFill>
@@ -15990,7 +15990,7 @@
                           <a:ea typeface="대명체 보통" panose="020B0600000101010101" pitchFamily="50" charset="-127"/>
                           <a:cs typeface="+mn-cs"/>
                         </a:rPr>
-                        <a:t>5,406</a:t>
+                        <a:t>5,408</a:t>
                       </a:r>
                     </a:p>
                   </a:txBody>
@@ -16266,7 +16266,7 @@
                           <a:ea typeface="대명체 보통" panose="020B0600000101010101" pitchFamily="50" charset="-127"/>
                           <a:cs typeface="+mn-cs"/>
                         </a:rPr>
-                        <a:t>63,093</a:t>
+                        <a:t>63,095</a:t>
                       </a:r>
                     </a:p>
                   </a:txBody>
@@ -16376,7 +16376,7 @@
                           <a:ea typeface="대명체 보통" panose="020B0600000101010101" pitchFamily="50" charset="-127"/>
                           <a:cs typeface="+mn-cs"/>
                         </a:rPr>
-                        <a:t>8,309</a:t>
+                        <a:t>8,311</a:t>
                       </a:r>
                     </a:p>
                   </a:txBody>
@@ -16604,7 +16604,7 @@
                           <a:ea typeface="대명체 보통" panose="020B0600000101010101" pitchFamily="50" charset="-127"/>
                           <a:cs typeface="+mn-cs"/>
                         </a:rPr>
-                        <a:t>19,693</a:t>
+                        <a:t>19,695</a:t>
                       </a:r>
                     </a:p>
                   </a:txBody>
@@ -16999,7 +16999,7 @@
                           <a:ea typeface="대명체 보통" panose="020B0600000101010101" pitchFamily="50" charset="-127"/>
                           <a:cs typeface="+mn-cs"/>
                         </a:rPr>
-                        <a:t>702</a:t>
+                        <a:t>690</a:t>
                       </a:r>
                       <a:endParaRPr lang="en-US" altLang="ko-KR" sz="700" b="0" i="0" u="none" strike="noStrike" kern="1200" dirty="0">
                         <a:solidFill>
@@ -17126,7 +17126,7 @@
                           <a:ea typeface="대명체 보통" panose="020B0600000101010101" pitchFamily="50" charset="-127"/>
                           <a:cs typeface="+mn-cs"/>
                         </a:rPr>
-                        <a:t>299</a:t>
+                        <a:t>287</a:t>
                       </a:r>
                       <a:endParaRPr lang="en-US" altLang="ko-KR" sz="700" b="0" i="0" u="none" strike="noStrike" kern="1200" dirty="0">
                         <a:solidFill>
@@ -17198,7 +17198,7 @@
                           <a:ea typeface="대명체 보통" panose="020B0600000101010101" pitchFamily="50" charset="-127"/>
                           <a:cs typeface="+mn-cs"/>
                         </a:rPr>
-                        <a:t>174%</a:t>
+                        <a:t>171%</a:t>
                       </a:r>
                     </a:p>
                   </a:txBody>
@@ -17388,7 +17388,7 @@
                           <a:ea typeface="대명체 보통" panose="020B0600000101010101" pitchFamily="50" charset="-127"/>
                           <a:cs typeface="+mn-cs"/>
                         </a:rPr>
-                        <a:t>399</a:t>
+                        <a:t>387</a:t>
                       </a:r>
                     </a:p>
                   </a:txBody>
@@ -17451,7 +17451,7 @@
                           <a:ea typeface="대명체 보통" panose="020B0600000101010101" pitchFamily="50" charset="-127"/>
                           <a:cs typeface="+mn-cs"/>
                         </a:rPr>
-                        <a:t>132%</a:t>
+                        <a:t>128%</a:t>
                       </a:r>
                     </a:p>
                   </a:txBody>
@@ -17680,7 +17680,7 @@
                           <a:ea typeface="대명체 보통" panose="020B0600000101010101" pitchFamily="50" charset="-127"/>
                           <a:cs typeface="+mn-cs"/>
                         </a:rPr>
-                        <a:t>5,885</a:t>
+                        <a:t>5,874</a:t>
                       </a:r>
                     </a:p>
                   </a:txBody>
@@ -17798,7 +17798,7 @@
                           <a:ea typeface="대명체 보통" panose="020B0600000101010101" pitchFamily="50" charset="-127"/>
                           <a:cs typeface="+mn-cs"/>
                         </a:rPr>
-                        <a:t>2,015</a:t>
+                        <a:t>2,004</a:t>
                       </a:r>
                       <a:endParaRPr lang="en-US" altLang="ko-KR" sz="700" b="0" i="0" u="none" strike="noStrike" kern="1200" dirty="0">
                         <a:solidFill>
@@ -18051,7 +18051,7 @@
                           <a:ea typeface="대명체 보통" panose="020B0600000101010101" pitchFamily="50" charset="-127"/>
                           <a:cs typeface="+mn-cs"/>
                         </a:rPr>
-                        <a:t>2,354</a:t>
+                        <a:t>2,343</a:t>
                       </a:r>
                     </a:p>
                   </a:txBody>
@@ -18114,7 +18114,7 @@
                           <a:ea typeface="대명체 보통" panose="020B0600000101010101" pitchFamily="50" charset="-127"/>
                           <a:cs typeface="+mn-cs"/>
                         </a:rPr>
-                        <a:t>67%</a:t>
+                        <a:t>66%</a:t>
                       </a:r>
                     </a:p>
                   </a:txBody>

--- a/data/세일즈마케팅_예상매출현황.pptx
+++ b/data/세일즈마케팅_예상매출현황.pptx
@@ -12756,7 +12756,7 @@
                           <a:ea typeface="대명체 보통" panose="020B0600000101010101" pitchFamily="50" charset="-127"/>
                           <a:cs typeface="+mn-cs"/>
                         </a:rPr>
-                        <a:t>18,669</a:t>
+                        <a:t>17,962</a:t>
                       </a:r>
                     </a:p>
                   </a:txBody>
@@ -12882,7 +12882,7 @@
                           <a:ea typeface="대명체 보통" panose="020B0600000101010101" pitchFamily="50" charset="-127"/>
                           <a:cs typeface="+mn-cs"/>
                         </a:rPr>
-                        <a:t>4,563</a:t>
+                        <a:t>3,856</a:t>
                       </a:r>
                     </a:p>
                   </a:txBody>
@@ -12949,7 +12949,7 @@
                           <a:ea typeface="대명체 보통" panose="020B0600000101010101" pitchFamily="50" charset="-127"/>
                           <a:cs typeface="+mn-cs"/>
                         </a:rPr>
-                        <a:t>132%</a:t>
+                        <a:t>127%</a:t>
                       </a:r>
                     </a:p>
                   </a:txBody>
@@ -13016,7 +13016,7 @@
                           <a:ea typeface="대명체 보통" panose="020B0600000101010101" pitchFamily="50" charset="-127"/>
                           <a:cs typeface="+mn-cs"/>
                         </a:rPr>
-                        <a:t>7,200</a:t>
+                        <a:t>7,483</a:t>
                       </a:r>
                     </a:p>
                   </a:txBody>
@@ -13142,7 +13142,7 @@
                           <a:ea typeface="대명체 보통" panose="020B0600000101010101" pitchFamily="50" charset="-127"/>
                           <a:cs typeface="+mn-cs"/>
                         </a:rPr>
-                        <a:t>11,469</a:t>
+                        <a:t>10,479</a:t>
                       </a:r>
                     </a:p>
                   </a:txBody>
@@ -13209,7 +13209,7 @@
                           <a:ea typeface="대명체 보통" panose="020B0600000101010101" pitchFamily="50" charset="-127"/>
                           <a:cs typeface="+mn-cs"/>
                         </a:rPr>
-                        <a:t>159%</a:t>
+                        <a:t>140%</a:t>
                       </a:r>
                     </a:p>
                   </a:txBody>
@@ -13450,7 +13450,7 @@
                           <a:ea typeface="대명체 보통" panose="020B0600000101010101" pitchFamily="50" charset="-127"/>
                           <a:cs typeface="+mn-cs"/>
                         </a:rPr>
-                        <a:t>163,245</a:t>
+                        <a:t>162,539</a:t>
                       </a:r>
                     </a:p>
                   </a:txBody>
@@ -13576,7 +13576,7 @@
                           <a:ea typeface="대명체 보통" panose="020B0600000101010101" pitchFamily="50" charset="-127"/>
                           <a:cs typeface="+mn-cs"/>
                         </a:rPr>
-                        <a:t>24,217</a:t>
+                        <a:t>23,511</a:t>
                       </a:r>
                     </a:p>
                   </a:txBody>
@@ -13710,7 +13710,7 @@
                           <a:ea typeface="대명체 보통" panose="020B0600000101010101" pitchFamily="50" charset="-127"/>
                           <a:cs typeface="+mn-cs"/>
                         </a:rPr>
-                        <a:t>109,638</a:t>
+                        <a:t>109,922</a:t>
                       </a:r>
                     </a:p>
                   </a:txBody>
@@ -13836,7 +13836,7 @@
                           <a:ea typeface="대명체 보통" panose="020B0600000101010101" pitchFamily="50" charset="-127"/>
                           <a:cs typeface="+mn-cs"/>
                         </a:rPr>
-                        <a:t>53,607</a:t>
+                        <a:t>52,617</a:t>
                       </a:r>
                     </a:p>
                   </a:txBody>
@@ -13903,7 +13903,7 @@
                           <a:ea typeface="대명체 보통" panose="020B0600000101010101" pitchFamily="50" charset="-127"/>
                           <a:cs typeface="+mn-cs"/>
                         </a:rPr>
-                        <a:t>49%</a:t>
+                        <a:t>48%</a:t>
                       </a:r>
                     </a:p>
                   </a:txBody>
@@ -14237,7 +14237,7 @@
                           <a:ea typeface="대명체 보통" panose="020B0600000101010101" pitchFamily="50" charset="-127"/>
                           <a:cs typeface="+mn-cs"/>
                         </a:rPr>
-                        <a:t>9,726</a:t>
+                        <a:t>9,232</a:t>
                       </a:r>
                     </a:p>
                   </a:txBody>
@@ -14355,7 +14355,7 @@
                           <a:ea typeface="대명체 보통" panose="020B0600000101010101" pitchFamily="50" charset="-127"/>
                           <a:cs typeface="+mn-cs"/>
                         </a:rPr>
-                        <a:t>1,704</a:t>
+                        <a:t>1,209</a:t>
                       </a:r>
                       <a:endParaRPr lang="en-US" altLang="ko-KR" sz="700" b="0" i="0" u="none" strike="noStrike" kern="1200" dirty="0">
                         <a:solidFill>
@@ -14427,7 +14427,7 @@
                           <a:ea typeface="대명체 보통" panose="020B0600000101010101" pitchFamily="50" charset="-127"/>
                           <a:cs typeface="+mn-cs"/>
                         </a:rPr>
-                        <a:t>121%</a:t>
+                        <a:t>115%</a:t>
                       </a:r>
                     </a:p>
                   </a:txBody>
@@ -14490,7 +14490,7 @@
                           <a:ea typeface="대명체 보통" panose="020B0600000101010101" pitchFamily="50" charset="-127"/>
                           <a:cs typeface="+mn-cs"/>
                         </a:rPr>
-                        <a:t>4,053</a:t>
+                        <a:t>4,211</a:t>
                       </a:r>
                     </a:p>
                   </a:txBody>
@@ -14608,7 +14608,7 @@
                           <a:ea typeface="대명체 보통" panose="020B0600000101010101" pitchFamily="50" charset="-127"/>
                           <a:cs typeface="+mn-cs"/>
                         </a:rPr>
-                        <a:t>5,674</a:t>
+                        <a:t>5,020</a:t>
                       </a:r>
                     </a:p>
                   </a:txBody>
@@ -14671,7 +14671,7 @@
                           <a:ea typeface="대명체 보통" panose="020B0600000101010101" pitchFamily="50" charset="-127"/>
                           <a:cs typeface="+mn-cs"/>
                         </a:rPr>
-                        <a:t>140%</a:t>
+                        <a:t>119%</a:t>
                       </a:r>
                     </a:p>
                   </a:txBody>
@@ -14900,7 +14900,7 @@
                           <a:ea typeface="대명체 보통" panose="020B0600000101010101" pitchFamily="50" charset="-127"/>
                           <a:cs typeface="+mn-cs"/>
                         </a:rPr>
-                        <a:t>94,276</a:t>
+                        <a:t>93,781</a:t>
                       </a:r>
                     </a:p>
                   </a:txBody>
@@ -15018,7 +15018,7 @@
                           <a:ea typeface="대명체 보통" panose="020B0600000101010101" pitchFamily="50" charset="-127"/>
                           <a:cs typeface="+mn-cs"/>
                         </a:rPr>
-                        <a:t>13,903</a:t>
+                        <a:t>13,408</a:t>
                       </a:r>
                     </a:p>
                   </a:txBody>
@@ -15144,7 +15144,7 @@
                           <a:ea typeface="대명체 보통" panose="020B0600000101010101" pitchFamily="50" charset="-127"/>
                           <a:cs typeface="+mn-cs"/>
                         </a:rPr>
-                        <a:t>62,708</a:t>
+                        <a:t>62,867</a:t>
                       </a:r>
                     </a:p>
                   </a:txBody>
@@ -15262,7 +15262,7 @@
                           <a:ea typeface="대명체 보통" panose="020B0600000101010101" pitchFamily="50" charset="-127"/>
                           <a:cs typeface="+mn-cs"/>
                         </a:rPr>
-                        <a:t>31,568</a:t>
+                        <a:t>30,914</a:t>
                       </a:r>
                     </a:p>
                   </a:txBody>
@@ -15325,7 +15325,7 @@
                           <a:ea typeface="대명체 보통" panose="020B0600000101010101" pitchFamily="50" charset="-127"/>
                           <a:cs typeface="+mn-cs"/>
                         </a:rPr>
-                        <a:t>50%</a:t>
+                        <a:t>49%</a:t>
                       </a:r>
                     </a:p>
                   </a:txBody>
@@ -15643,7 +15643,7 @@
                           <a:ea typeface="대명체 보통" panose="020B0600000101010101" pitchFamily="50" charset="-127"/>
                           <a:cs typeface="+mn-cs"/>
                         </a:rPr>
-                        <a:t>8,252</a:t>
+                        <a:t>8,054</a:t>
                       </a:r>
                     </a:p>
                   </a:txBody>
@@ -15753,7 +15753,7 @@
                           <a:ea typeface="대명체 보통" panose="020B0600000101010101" pitchFamily="50" charset="-127"/>
                           <a:cs typeface="+mn-cs"/>
                         </a:rPr>
-                        <a:t>2,571</a:t>
+                        <a:t>2,373</a:t>
                       </a:r>
                       <a:endParaRPr lang="en-US" altLang="ko-KR" sz="700" b="0" i="0" u="none" strike="noStrike" kern="1200" dirty="0">
                         <a:solidFill>
@@ -15821,7 +15821,7 @@
                           <a:ea typeface="대명체 보통" panose="020B0600000101010101" pitchFamily="50" charset="-127"/>
                           <a:cs typeface="+mn-cs"/>
                         </a:rPr>
-                        <a:t>145%</a:t>
+                        <a:t>142%</a:t>
                       </a:r>
                     </a:p>
                   </a:txBody>
@@ -15880,7 +15880,7 @@
                           <a:ea typeface="대명체 보통" panose="020B0600000101010101" pitchFamily="50" charset="-127"/>
                           <a:cs typeface="+mn-cs"/>
                         </a:rPr>
-                        <a:t>2,844</a:t>
+                        <a:t>2,964</a:t>
                       </a:r>
                     </a:p>
                   </a:txBody>
@@ -15990,7 +15990,7 @@
                           <a:ea typeface="대명체 보통" panose="020B0600000101010101" pitchFamily="50" charset="-127"/>
                           <a:cs typeface="+mn-cs"/>
                         </a:rPr>
-                        <a:t>5,408</a:t>
+                        <a:t>5,090</a:t>
                       </a:r>
                     </a:p>
                   </a:txBody>
@@ -16049,7 +16049,7 @@
                           <a:ea typeface="대명체 보통" panose="020B0600000101010101" pitchFamily="50" charset="-127"/>
                           <a:cs typeface="+mn-cs"/>
                         </a:rPr>
-                        <a:t>190%</a:t>
+                        <a:t>172%</a:t>
                       </a:r>
                     </a:p>
                   </a:txBody>
@@ -16266,7 +16266,7 @@
                           <a:ea typeface="대명체 보통" panose="020B0600000101010101" pitchFamily="50" charset="-127"/>
                           <a:cs typeface="+mn-cs"/>
                         </a:rPr>
-                        <a:t>63,095</a:t>
+                        <a:t>62,897</a:t>
                       </a:r>
                     </a:p>
                   </a:txBody>
@@ -16376,7 +16376,7 @@
                           <a:ea typeface="대명체 보통" panose="020B0600000101010101" pitchFamily="50" charset="-127"/>
                           <a:cs typeface="+mn-cs"/>
                         </a:rPr>
-                        <a:t>8,311</a:t>
+                        <a:t>8,112</a:t>
                       </a:r>
                     </a:p>
                   </a:txBody>
@@ -16494,7 +16494,7 @@
                           <a:ea typeface="대명체 보통" panose="020B0600000101010101" pitchFamily="50" charset="-127"/>
                           <a:cs typeface="+mn-cs"/>
                         </a:rPr>
-                        <a:t>43,400</a:t>
+                        <a:t>43,519</a:t>
                       </a:r>
                     </a:p>
                   </a:txBody>
@@ -16604,7 +16604,7 @@
                           <a:ea typeface="대명체 보통" panose="020B0600000101010101" pitchFamily="50" charset="-127"/>
                           <a:cs typeface="+mn-cs"/>
                         </a:rPr>
-                        <a:t>19,695</a:t>
+                        <a:t>19,377</a:t>
                       </a:r>
                     </a:p>
                   </a:txBody>
@@ -16999,7 +16999,7 @@
                           <a:ea typeface="대명체 보통" panose="020B0600000101010101" pitchFamily="50" charset="-127"/>
                           <a:cs typeface="+mn-cs"/>
                         </a:rPr>
-                        <a:t>690</a:t>
+                        <a:t>677</a:t>
                       </a:r>
                       <a:endParaRPr lang="en-US" altLang="ko-KR" sz="700" b="0" i="0" u="none" strike="noStrike" kern="1200" dirty="0">
                         <a:solidFill>
@@ -17126,7 +17126,7 @@
                           <a:ea typeface="대명체 보통" panose="020B0600000101010101" pitchFamily="50" charset="-127"/>
                           <a:cs typeface="+mn-cs"/>
                         </a:rPr>
-                        <a:t>287</a:t>
+                        <a:t>274</a:t>
                       </a:r>
                       <a:endParaRPr lang="en-US" altLang="ko-KR" sz="700" b="0" i="0" u="none" strike="noStrike" kern="1200" dirty="0">
                         <a:solidFill>
@@ -17198,7 +17198,7 @@
                           <a:ea typeface="대명체 보통" panose="020B0600000101010101" pitchFamily="50" charset="-127"/>
                           <a:cs typeface="+mn-cs"/>
                         </a:rPr>
-                        <a:t>171%</a:t>
+                        <a:t>168%</a:t>
                       </a:r>
                     </a:p>
                   </a:txBody>
@@ -17261,7 +17261,7 @@
                           <a:ea typeface="대명체 보통" panose="020B0600000101010101" pitchFamily="50" charset="-127"/>
                           <a:cs typeface="+mn-cs"/>
                         </a:rPr>
-                        <a:t>303</a:t>
+                        <a:t>308</a:t>
                       </a:r>
                       <a:endParaRPr lang="en-US" altLang="ko-KR" sz="700" b="0" i="0" u="none" strike="noStrike" kern="1200" dirty="0">
                         <a:solidFill>
@@ -17388,7 +17388,7 @@
                           <a:ea typeface="대명체 보통" panose="020B0600000101010101" pitchFamily="50" charset="-127"/>
                           <a:cs typeface="+mn-cs"/>
                         </a:rPr>
-                        <a:t>387</a:t>
+                        <a:t>368</a:t>
                       </a:r>
                     </a:p>
                   </a:txBody>
@@ -17451,7 +17451,7 @@
                           <a:ea typeface="대명체 보통" panose="020B0600000101010101" pitchFamily="50" charset="-127"/>
                           <a:cs typeface="+mn-cs"/>
                         </a:rPr>
-                        <a:t>128%</a:t>
+                        <a:t>120%</a:t>
                       </a:r>
                     </a:p>
                   </a:txBody>
@@ -17680,7 +17680,7 @@
                           <a:ea typeface="대명체 보통" panose="020B0600000101010101" pitchFamily="50" charset="-127"/>
                           <a:cs typeface="+mn-cs"/>
                         </a:rPr>
-                        <a:t>5,874</a:t>
+                        <a:t>5,861</a:t>
                       </a:r>
                     </a:p>
                   </a:txBody>
@@ -17798,7 +17798,7 @@
                           <a:ea typeface="대명체 보통" panose="020B0600000101010101" pitchFamily="50" charset="-127"/>
                           <a:cs typeface="+mn-cs"/>
                         </a:rPr>
-                        <a:t>2,004</a:t>
+                        <a:t>1,991</a:t>
                       </a:r>
                       <a:endParaRPr lang="en-US" altLang="ko-KR" sz="700" b="0" i="0" u="none" strike="noStrike" kern="1200" dirty="0">
                         <a:solidFill>
@@ -17870,7 +17870,7 @@
                           <a:ea typeface="대명체 보통" panose="020B0600000101010101" pitchFamily="50" charset="-127"/>
                           <a:cs typeface="+mn-cs"/>
                         </a:rPr>
-                        <a:t>152%</a:t>
+                        <a:t>151%</a:t>
                       </a:r>
                     </a:p>
                   </a:txBody>
@@ -17933,7 +17933,7 @@
                           <a:ea typeface="대명체 보통" panose="020B0600000101010101" pitchFamily="50" charset="-127"/>
                           <a:cs typeface="+mn-cs"/>
                         </a:rPr>
-                        <a:t>3,530</a:t>
+                        <a:t>3,535</a:t>
                       </a:r>
                     </a:p>
                   </a:txBody>
@@ -18051,7 +18051,7 @@
                           <a:ea typeface="대명체 보통" panose="020B0600000101010101" pitchFamily="50" charset="-127"/>
                           <a:cs typeface="+mn-cs"/>
                         </a:rPr>
-                        <a:t>2,343</a:t>
+                        <a:t>2,325</a:t>
                       </a:r>
                     </a:p>
                   </a:txBody>

--- a/data/세일즈마케팅_예상매출현황.pptx
+++ b/data/세일즈마케팅_예상매출현황.pptx
@@ -12756,7 +12756,7 @@
                           <a:ea typeface="대명체 보통" panose="020B0600000101010101" pitchFamily="50" charset="-127"/>
                           <a:cs typeface="+mn-cs"/>
                         </a:rPr>
-                        <a:t>17,962</a:t>
+                        <a:t>17,804</a:t>
                       </a:r>
                     </a:p>
                   </a:txBody>
@@ -12882,7 +12882,7 @@
                           <a:ea typeface="대명체 보통" panose="020B0600000101010101" pitchFamily="50" charset="-127"/>
                           <a:cs typeface="+mn-cs"/>
                         </a:rPr>
-                        <a:t>3,856</a:t>
+                        <a:t>3,698</a:t>
                       </a:r>
                     </a:p>
                   </a:txBody>
@@ -12949,7 +12949,7 @@
                           <a:ea typeface="대명체 보통" panose="020B0600000101010101" pitchFamily="50" charset="-127"/>
                           <a:cs typeface="+mn-cs"/>
                         </a:rPr>
-                        <a:t>127%</a:t>
+                        <a:t>126%</a:t>
                       </a:r>
                     </a:p>
                   </a:txBody>
@@ -13016,7 +13016,7 @@
                           <a:ea typeface="대명체 보통" panose="020B0600000101010101" pitchFamily="50" charset="-127"/>
                           <a:cs typeface="+mn-cs"/>
                         </a:rPr>
-                        <a:t>7,483</a:t>
+                        <a:t>7,741</a:t>
                       </a:r>
                     </a:p>
                   </a:txBody>
@@ -13142,7 +13142,7 @@
                           <a:ea typeface="대명체 보통" panose="020B0600000101010101" pitchFamily="50" charset="-127"/>
                           <a:cs typeface="+mn-cs"/>
                         </a:rPr>
-                        <a:t>10,479</a:t>
+                        <a:t>10,064</a:t>
                       </a:r>
                     </a:p>
                   </a:txBody>
@@ -13209,7 +13209,7 @@
                           <a:ea typeface="대명체 보통" panose="020B0600000101010101" pitchFamily="50" charset="-127"/>
                           <a:cs typeface="+mn-cs"/>
                         </a:rPr>
-                        <a:t>140%</a:t>
+                        <a:t>130%</a:t>
                       </a:r>
                     </a:p>
                   </a:txBody>
@@ -13450,7 +13450,7 @@
                           <a:ea typeface="대명체 보통" panose="020B0600000101010101" pitchFamily="50" charset="-127"/>
                           <a:cs typeface="+mn-cs"/>
                         </a:rPr>
-                        <a:t>162,539</a:t>
+                        <a:t>162,381</a:t>
                       </a:r>
                     </a:p>
                   </a:txBody>
@@ -13576,7 +13576,7 @@
                           <a:ea typeface="대명체 보통" panose="020B0600000101010101" pitchFamily="50" charset="-127"/>
                           <a:cs typeface="+mn-cs"/>
                         </a:rPr>
-                        <a:t>23,511</a:t>
+                        <a:t>23,353</a:t>
                       </a:r>
                     </a:p>
                   </a:txBody>
@@ -13710,7 +13710,7 @@
                           <a:ea typeface="대명체 보통" panose="020B0600000101010101" pitchFamily="50" charset="-127"/>
                           <a:cs typeface="+mn-cs"/>
                         </a:rPr>
-                        <a:t>109,922</a:t>
+                        <a:t>110,179</a:t>
                       </a:r>
                     </a:p>
                   </a:txBody>
@@ -13836,7 +13836,7 @@
                           <a:ea typeface="대명체 보통" panose="020B0600000101010101" pitchFamily="50" charset="-127"/>
                           <a:cs typeface="+mn-cs"/>
                         </a:rPr>
-                        <a:t>52,617</a:t>
+                        <a:t>52,201</a:t>
                       </a:r>
                     </a:p>
                   </a:txBody>
@@ -13903,7 +13903,7 @@
                           <a:ea typeface="대명체 보통" panose="020B0600000101010101" pitchFamily="50" charset="-127"/>
                           <a:cs typeface="+mn-cs"/>
                         </a:rPr>
-                        <a:t>48%</a:t>
+                        <a:t>47%</a:t>
                       </a:r>
                     </a:p>
                   </a:txBody>
@@ -14237,7 +14237,7 @@
                           <a:ea typeface="대명체 보통" panose="020B0600000101010101" pitchFamily="50" charset="-127"/>
                           <a:cs typeface="+mn-cs"/>
                         </a:rPr>
-                        <a:t>9,232</a:t>
+                        <a:t>9,089</a:t>
                       </a:r>
                     </a:p>
                   </a:txBody>
@@ -14355,7 +14355,7 @@
                           <a:ea typeface="대명체 보통" panose="020B0600000101010101" pitchFamily="50" charset="-127"/>
                           <a:cs typeface="+mn-cs"/>
                         </a:rPr>
-                        <a:t>1,209</a:t>
+                        <a:t>1,066</a:t>
                       </a:r>
                       <a:endParaRPr lang="en-US" altLang="ko-KR" sz="700" b="0" i="0" u="none" strike="noStrike" kern="1200" dirty="0">
                         <a:solidFill>
@@ -14427,7 +14427,7 @@
                           <a:ea typeface="대명체 보통" panose="020B0600000101010101" pitchFamily="50" charset="-127"/>
                           <a:cs typeface="+mn-cs"/>
                         </a:rPr>
-                        <a:t>115%</a:t>
+                        <a:t>113%</a:t>
                       </a:r>
                     </a:p>
                   </a:txBody>
@@ -14490,7 +14490,7 @@
                           <a:ea typeface="대명체 보통" panose="020B0600000101010101" pitchFamily="50" charset="-127"/>
                           <a:cs typeface="+mn-cs"/>
                         </a:rPr>
-                        <a:t>4,211</a:t>
+                        <a:t>4,367</a:t>
                       </a:r>
                     </a:p>
                   </a:txBody>
@@ -14608,7 +14608,7 @@
                           <a:ea typeface="대명체 보통" panose="020B0600000101010101" pitchFamily="50" charset="-127"/>
                           <a:cs typeface="+mn-cs"/>
                         </a:rPr>
-                        <a:t>5,020</a:t>
+                        <a:t>4,722</a:t>
                       </a:r>
                     </a:p>
                   </a:txBody>
@@ -14671,7 +14671,7 @@
                           <a:ea typeface="대명체 보통" panose="020B0600000101010101" pitchFamily="50" charset="-127"/>
                           <a:cs typeface="+mn-cs"/>
                         </a:rPr>
-                        <a:t>119%</a:t>
+                        <a:t>108%</a:t>
                       </a:r>
                     </a:p>
                   </a:txBody>
@@ -14900,7 +14900,7 @@
                           <a:ea typeface="대명체 보통" panose="020B0600000101010101" pitchFamily="50" charset="-127"/>
                           <a:cs typeface="+mn-cs"/>
                         </a:rPr>
-                        <a:t>93,781</a:t>
+                        <a:t>93,639</a:t>
                       </a:r>
                     </a:p>
                   </a:txBody>
@@ -15018,7 +15018,7 @@
                           <a:ea typeface="대명체 보통" panose="020B0600000101010101" pitchFamily="50" charset="-127"/>
                           <a:cs typeface="+mn-cs"/>
                         </a:rPr>
-                        <a:t>13,408</a:t>
+                        <a:t>13,265</a:t>
                       </a:r>
                     </a:p>
                   </a:txBody>
@@ -15144,7 +15144,7 @@
                           <a:ea typeface="대명체 보통" panose="020B0600000101010101" pitchFamily="50" charset="-127"/>
                           <a:cs typeface="+mn-cs"/>
                         </a:rPr>
-                        <a:t>62,867</a:t>
+                        <a:t>63,023</a:t>
                       </a:r>
                     </a:p>
                   </a:txBody>
@@ -15262,7 +15262,7 @@
                           <a:ea typeface="대명체 보통" panose="020B0600000101010101" pitchFamily="50" charset="-127"/>
                           <a:cs typeface="+mn-cs"/>
                         </a:rPr>
-                        <a:t>30,914</a:t>
+                        <a:t>30,616</a:t>
                       </a:r>
                     </a:p>
                   </a:txBody>
@@ -15643,7 +15643,7 @@
                           <a:ea typeface="대명체 보통" panose="020B0600000101010101" pitchFamily="50" charset="-127"/>
                           <a:cs typeface="+mn-cs"/>
                         </a:rPr>
-                        <a:t>8,054</a:t>
+                        <a:t>8,049</a:t>
                       </a:r>
                     </a:p>
                   </a:txBody>
@@ -15753,7 +15753,7 @@
                           <a:ea typeface="대명체 보통" panose="020B0600000101010101" pitchFamily="50" charset="-127"/>
                           <a:cs typeface="+mn-cs"/>
                         </a:rPr>
-                        <a:t>2,373</a:t>
+                        <a:t>2,368</a:t>
                       </a:r>
                       <a:endParaRPr lang="en-US" altLang="ko-KR" sz="700" b="0" i="0" u="none" strike="noStrike" kern="1200" dirty="0">
                         <a:solidFill>
@@ -15880,7 +15880,7 @@
                           <a:ea typeface="대명체 보통" panose="020B0600000101010101" pitchFamily="50" charset="-127"/>
                           <a:cs typeface="+mn-cs"/>
                         </a:rPr>
-                        <a:t>2,964</a:t>
+                        <a:t>3,064</a:t>
                       </a:r>
                     </a:p>
                   </a:txBody>
@@ -15990,7 +15990,7 @@
                           <a:ea typeface="대명체 보통" panose="020B0600000101010101" pitchFamily="50" charset="-127"/>
                           <a:cs typeface="+mn-cs"/>
                         </a:rPr>
-                        <a:t>5,090</a:t>
+                        <a:t>4,985</a:t>
                       </a:r>
                     </a:p>
                   </a:txBody>
@@ -16049,7 +16049,7 @@
                           <a:ea typeface="대명체 보통" panose="020B0600000101010101" pitchFamily="50" charset="-127"/>
                           <a:cs typeface="+mn-cs"/>
                         </a:rPr>
-                        <a:t>172%</a:t>
+                        <a:t>163%</a:t>
                       </a:r>
                     </a:p>
                   </a:txBody>
@@ -16266,7 +16266,7 @@
                           <a:ea typeface="대명체 보통" panose="020B0600000101010101" pitchFamily="50" charset="-127"/>
                           <a:cs typeface="+mn-cs"/>
                         </a:rPr>
-                        <a:t>62,897</a:t>
+                        <a:t>62,891</a:t>
                       </a:r>
                     </a:p>
                   </a:txBody>
@@ -16376,7 +16376,7 @@
                           <a:ea typeface="대명체 보통" panose="020B0600000101010101" pitchFamily="50" charset="-127"/>
                           <a:cs typeface="+mn-cs"/>
                         </a:rPr>
-                        <a:t>8,112</a:t>
+                        <a:t>8,107</a:t>
                       </a:r>
                     </a:p>
                   </a:txBody>
@@ -16494,7 +16494,7 @@
                           <a:ea typeface="대명체 보통" panose="020B0600000101010101" pitchFamily="50" charset="-127"/>
                           <a:cs typeface="+mn-cs"/>
                         </a:rPr>
-                        <a:t>43,519</a:t>
+                        <a:t>43,620</a:t>
                       </a:r>
                     </a:p>
                   </a:txBody>
@@ -16604,7 +16604,7 @@
                           <a:ea typeface="대명체 보통" panose="020B0600000101010101" pitchFamily="50" charset="-127"/>
                           <a:cs typeface="+mn-cs"/>
                         </a:rPr>
-                        <a:t>19,377</a:t>
+                        <a:t>19,272</a:t>
                       </a:r>
                     </a:p>
                   </a:txBody>
@@ -16663,7 +16663,7 @@
                           <a:ea typeface="대명체 보통" panose="020B0600000101010101" pitchFamily="50" charset="-127"/>
                           <a:cs typeface="+mn-cs"/>
                         </a:rPr>
-                        <a:t>45%</a:t>
+                        <a:t>44%</a:t>
                       </a:r>
                     </a:p>
                   </a:txBody>
@@ -16999,7 +16999,7 @@
                           <a:ea typeface="대명체 보통" panose="020B0600000101010101" pitchFamily="50" charset="-127"/>
                           <a:cs typeface="+mn-cs"/>
                         </a:rPr>
-                        <a:t>677</a:t>
+                        <a:t>666</a:t>
                       </a:r>
                       <a:endParaRPr lang="en-US" altLang="ko-KR" sz="700" b="0" i="0" u="none" strike="noStrike" kern="1200" dirty="0">
                         <a:solidFill>
@@ -17126,7 +17126,7 @@
                           <a:ea typeface="대명체 보통" panose="020B0600000101010101" pitchFamily="50" charset="-127"/>
                           <a:cs typeface="+mn-cs"/>
                         </a:rPr>
-                        <a:t>274</a:t>
+                        <a:t>264</a:t>
                       </a:r>
                       <a:endParaRPr lang="en-US" altLang="ko-KR" sz="700" b="0" i="0" u="none" strike="noStrike" kern="1200" dirty="0">
                         <a:solidFill>
@@ -17198,7 +17198,7 @@
                           <a:ea typeface="대명체 보통" panose="020B0600000101010101" pitchFamily="50" charset="-127"/>
                           <a:cs typeface="+mn-cs"/>
                         </a:rPr>
-                        <a:t>168%</a:t>
+                        <a:t>166%</a:t>
                       </a:r>
                     </a:p>
                   </a:txBody>
@@ -17261,7 +17261,7 @@
                           <a:ea typeface="대명체 보통" panose="020B0600000101010101" pitchFamily="50" charset="-127"/>
                           <a:cs typeface="+mn-cs"/>
                         </a:rPr>
-                        <a:t>308</a:t>
+                        <a:t>310</a:t>
                       </a:r>
                       <a:endParaRPr lang="en-US" altLang="ko-KR" sz="700" b="0" i="0" u="none" strike="noStrike" kern="1200" dirty="0">
                         <a:solidFill>
@@ -17388,7 +17388,7 @@
                           <a:ea typeface="대명체 보통" panose="020B0600000101010101" pitchFamily="50" charset="-127"/>
                           <a:cs typeface="+mn-cs"/>
                         </a:rPr>
-                        <a:t>368</a:t>
+                        <a:t>357</a:t>
                       </a:r>
                     </a:p>
                   </a:txBody>
@@ -17451,7 +17451,7 @@
                           <a:ea typeface="대명체 보통" panose="020B0600000101010101" pitchFamily="50" charset="-127"/>
                           <a:cs typeface="+mn-cs"/>
                         </a:rPr>
-                        <a:t>120%</a:t>
+                        <a:t>115%</a:t>
                       </a:r>
                     </a:p>
                   </a:txBody>
@@ -17680,7 +17680,7 @@
                           <a:ea typeface="대명체 보통" panose="020B0600000101010101" pitchFamily="50" charset="-127"/>
                           <a:cs typeface="+mn-cs"/>
                         </a:rPr>
-                        <a:t>5,861</a:t>
+                        <a:t>5,850</a:t>
                       </a:r>
                     </a:p>
                   </a:txBody>
@@ -17798,7 +17798,7 @@
                           <a:ea typeface="대명체 보통" panose="020B0600000101010101" pitchFamily="50" charset="-127"/>
                           <a:cs typeface="+mn-cs"/>
                         </a:rPr>
-                        <a:t>1,991</a:t>
+                        <a:t>1,981</a:t>
                       </a:r>
                       <a:endParaRPr lang="en-US" altLang="ko-KR" sz="700" b="0" i="0" u="none" strike="noStrike" kern="1200" dirty="0">
                         <a:solidFill>
@@ -17933,7 +17933,7 @@
                           <a:ea typeface="대명체 보통" panose="020B0600000101010101" pitchFamily="50" charset="-127"/>
                           <a:cs typeface="+mn-cs"/>
                         </a:rPr>
-                        <a:t>3,535</a:t>
+                        <a:t>3,537</a:t>
                       </a:r>
                     </a:p>
                   </a:txBody>
@@ -18051,7 +18051,7 @@
                           <a:ea typeface="대명체 보통" panose="020B0600000101010101" pitchFamily="50" charset="-127"/>
                           <a:cs typeface="+mn-cs"/>
                         </a:rPr>
-                        <a:t>2,325</a:t>
+                        <a:t>2,313</a:t>
                       </a:r>
                     </a:p>
                   </a:txBody>
@@ -18114,7 +18114,7 @@
                           <a:ea typeface="대명체 보통" panose="020B0600000101010101" pitchFamily="50" charset="-127"/>
                           <a:cs typeface="+mn-cs"/>
                         </a:rPr>
-                        <a:t>66%</a:t>
+                        <a:t>65%</a:t>
                       </a:r>
                     </a:p>
                   </a:txBody>

--- a/data/세일즈마케팅_예상매출현황.pptx
+++ b/data/세일즈마케팅_예상매출현황.pptx
@@ -12756,7 +12756,7 @@
                           <a:ea typeface="대명체 보통" panose="020B0600000101010101" pitchFamily="50" charset="-127"/>
                           <a:cs typeface="+mn-cs"/>
                         </a:rPr>
-                        <a:t>17,804</a:t>
+                        <a:t>16,872</a:t>
                       </a:r>
                     </a:p>
                   </a:txBody>
@@ -12882,7 +12882,7 @@
                           <a:ea typeface="대명체 보통" panose="020B0600000101010101" pitchFamily="50" charset="-127"/>
                           <a:cs typeface="+mn-cs"/>
                         </a:rPr>
-                        <a:t>3,698</a:t>
+                        <a:t>2,766</a:t>
                       </a:r>
                     </a:p>
                   </a:txBody>
@@ -12949,7 +12949,7 @@
                           <a:ea typeface="대명체 보통" panose="020B0600000101010101" pitchFamily="50" charset="-127"/>
                           <a:cs typeface="+mn-cs"/>
                         </a:rPr>
-                        <a:t>126%</a:t>
+                        <a:t>120%</a:t>
                       </a:r>
                     </a:p>
                   </a:txBody>
@@ -13016,7 +13016,7 @@
                           <a:ea typeface="대명체 보통" panose="020B0600000101010101" pitchFamily="50" charset="-127"/>
                           <a:cs typeface="+mn-cs"/>
                         </a:rPr>
-                        <a:t>7,741</a:t>
+                        <a:t>8,345</a:t>
                       </a:r>
                     </a:p>
                   </a:txBody>
@@ -13142,7 +13142,7 @@
                           <a:ea typeface="대명체 보통" panose="020B0600000101010101" pitchFamily="50" charset="-127"/>
                           <a:cs typeface="+mn-cs"/>
                         </a:rPr>
-                        <a:t>10,064</a:t>
+                        <a:t>8,528</a:t>
                       </a:r>
                     </a:p>
                   </a:txBody>
@@ -13209,7 +13209,7 @@
                           <a:ea typeface="대명체 보통" panose="020B0600000101010101" pitchFamily="50" charset="-127"/>
                           <a:cs typeface="+mn-cs"/>
                         </a:rPr>
-                        <a:t>130%</a:t>
+                        <a:t>102%</a:t>
                       </a:r>
                     </a:p>
                   </a:txBody>
@@ -13450,7 +13450,7 @@
                           <a:ea typeface="대명체 보통" panose="020B0600000101010101" pitchFamily="50" charset="-127"/>
                           <a:cs typeface="+mn-cs"/>
                         </a:rPr>
-                        <a:t>162,381</a:t>
+                        <a:t>161,448</a:t>
                       </a:r>
                     </a:p>
                   </a:txBody>
@@ -13576,7 +13576,7 @@
                           <a:ea typeface="대명체 보통" panose="020B0600000101010101" pitchFamily="50" charset="-127"/>
                           <a:cs typeface="+mn-cs"/>
                         </a:rPr>
-                        <a:t>23,353</a:t>
+                        <a:t>22,421</a:t>
                       </a:r>
                     </a:p>
                   </a:txBody>
@@ -13643,7 +13643,7 @@
                           <a:ea typeface="대명체 보통" panose="020B0600000101010101" pitchFamily="50" charset="-127"/>
                           <a:cs typeface="+mn-cs"/>
                         </a:rPr>
-                        <a:t>117%</a:t>
+                        <a:t>116%</a:t>
                       </a:r>
                     </a:p>
                   </a:txBody>
@@ -13710,7 +13710,7 @@
                           <a:ea typeface="대명체 보통" panose="020B0600000101010101" pitchFamily="50" charset="-127"/>
                           <a:cs typeface="+mn-cs"/>
                         </a:rPr>
-                        <a:t>110,179</a:t>
+                        <a:t>110,783</a:t>
                       </a:r>
                     </a:p>
                   </a:txBody>
@@ -13836,7 +13836,7 @@
                           <a:ea typeface="대명체 보통" panose="020B0600000101010101" pitchFamily="50" charset="-127"/>
                           <a:cs typeface="+mn-cs"/>
                         </a:rPr>
-                        <a:t>52,201</a:t>
+                        <a:t>50,665</a:t>
                       </a:r>
                     </a:p>
                   </a:txBody>
@@ -13903,7 +13903,7 @@
                           <a:ea typeface="대명체 보통" panose="020B0600000101010101" pitchFamily="50" charset="-127"/>
                           <a:cs typeface="+mn-cs"/>
                         </a:rPr>
-                        <a:t>47%</a:t>
+                        <a:t>46%</a:t>
                       </a:r>
                     </a:p>
                   </a:txBody>
@@ -14237,7 +14237,7 @@
                           <a:ea typeface="대명체 보통" panose="020B0600000101010101" pitchFamily="50" charset="-127"/>
                           <a:cs typeface="+mn-cs"/>
                         </a:rPr>
-                        <a:t>9,089</a:t>
+                        <a:t>8,551</a:t>
                       </a:r>
                     </a:p>
                   </a:txBody>
@@ -14355,7 +14355,7 @@
                           <a:ea typeface="대명체 보통" panose="020B0600000101010101" pitchFamily="50" charset="-127"/>
                           <a:cs typeface="+mn-cs"/>
                         </a:rPr>
-                        <a:t>1,066</a:t>
+                        <a:t>528</a:t>
                       </a:r>
                       <a:endParaRPr lang="en-US" altLang="ko-KR" sz="700" b="0" i="0" u="none" strike="noStrike" kern="1200" dirty="0">
                         <a:solidFill>
@@ -14427,7 +14427,7 @@
                           <a:ea typeface="대명체 보통" panose="020B0600000101010101" pitchFamily="50" charset="-127"/>
                           <a:cs typeface="+mn-cs"/>
                         </a:rPr>
-                        <a:t>113%</a:t>
+                        <a:t>107%</a:t>
                       </a:r>
                     </a:p>
                   </a:txBody>
@@ -14490,7 +14490,7 @@
                           <a:ea typeface="대명체 보통" panose="020B0600000101010101" pitchFamily="50" charset="-127"/>
                           <a:cs typeface="+mn-cs"/>
                         </a:rPr>
-                        <a:t>4,367</a:t>
+                        <a:t>4,716</a:t>
                       </a:r>
                     </a:p>
                   </a:txBody>
@@ -14608,7 +14608,7 @@
                           <a:ea typeface="대명체 보통" panose="020B0600000101010101" pitchFamily="50" charset="-127"/>
                           <a:cs typeface="+mn-cs"/>
                         </a:rPr>
-                        <a:t>4,722</a:t>
+                        <a:t>3,834</a:t>
                       </a:r>
                     </a:p>
                   </a:txBody>
@@ -14671,7 +14671,7 @@
                           <a:ea typeface="대명체 보통" panose="020B0600000101010101" pitchFamily="50" charset="-127"/>
                           <a:cs typeface="+mn-cs"/>
                         </a:rPr>
-                        <a:t>108%</a:t>
+                        <a:t>81%</a:t>
                       </a:r>
                     </a:p>
                   </a:txBody>
@@ -14900,7 +14900,7 @@
                           <a:ea typeface="대명체 보통" panose="020B0600000101010101" pitchFamily="50" charset="-127"/>
                           <a:cs typeface="+mn-cs"/>
                         </a:rPr>
-                        <a:t>93,639</a:t>
+                        <a:t>93,101</a:t>
                       </a:r>
                     </a:p>
                   </a:txBody>
@@ -15018,7 +15018,7 @@
                           <a:ea typeface="대명체 보통" panose="020B0600000101010101" pitchFamily="50" charset="-127"/>
                           <a:cs typeface="+mn-cs"/>
                         </a:rPr>
-                        <a:t>13,265</a:t>
+                        <a:t>12,727</a:t>
                       </a:r>
                     </a:p>
                   </a:txBody>
@@ -15081,7 +15081,7 @@
                           <a:ea typeface="대명체 보통" panose="020B0600000101010101" pitchFamily="50" charset="-127"/>
                           <a:cs typeface="+mn-cs"/>
                         </a:rPr>
-                        <a:t>117%</a:t>
+                        <a:t>116%</a:t>
                       </a:r>
                     </a:p>
                   </a:txBody>
@@ -15144,7 +15144,7 @@
                           <a:ea typeface="대명체 보통" panose="020B0600000101010101" pitchFamily="50" charset="-127"/>
                           <a:cs typeface="+mn-cs"/>
                         </a:rPr>
-                        <a:t>63,023</a:t>
+                        <a:t>63,372</a:t>
                       </a:r>
                     </a:p>
                   </a:txBody>
@@ -15262,7 +15262,7 @@
                           <a:ea typeface="대명체 보통" panose="020B0600000101010101" pitchFamily="50" charset="-127"/>
                           <a:cs typeface="+mn-cs"/>
                         </a:rPr>
-                        <a:t>30,616</a:t>
+                        <a:t>29,728</a:t>
                       </a:r>
                     </a:p>
                   </a:txBody>
@@ -15325,7 +15325,7 @@
                           <a:ea typeface="대명체 보통" panose="020B0600000101010101" pitchFamily="50" charset="-127"/>
                           <a:cs typeface="+mn-cs"/>
                         </a:rPr>
-                        <a:t>49%</a:t>
+                        <a:t>47%</a:t>
                       </a:r>
                     </a:p>
                   </a:txBody>
@@ -15643,7 +15643,7 @@
                           <a:ea typeface="대명체 보통" panose="020B0600000101010101" pitchFamily="50" charset="-127"/>
                           <a:cs typeface="+mn-cs"/>
                         </a:rPr>
-                        <a:t>8,049</a:t>
+                        <a:t>7,695</a:t>
                       </a:r>
                     </a:p>
                   </a:txBody>
@@ -15753,7 +15753,7 @@
                           <a:ea typeface="대명체 보통" panose="020B0600000101010101" pitchFamily="50" charset="-127"/>
                           <a:cs typeface="+mn-cs"/>
                         </a:rPr>
-                        <a:t>2,368</a:t>
+                        <a:t>2,014</a:t>
                       </a:r>
                       <a:endParaRPr lang="en-US" altLang="ko-KR" sz="700" b="0" i="0" u="none" strike="noStrike" kern="1200" dirty="0">
                         <a:solidFill>
@@ -15821,7 +15821,7 @@
                           <a:ea typeface="대명체 보통" panose="020B0600000101010101" pitchFamily="50" charset="-127"/>
                           <a:cs typeface="+mn-cs"/>
                         </a:rPr>
-                        <a:t>142%</a:t>
+                        <a:t>135%</a:t>
                       </a:r>
                     </a:p>
                   </a:txBody>
@@ -15880,7 +15880,7 @@
                           <a:ea typeface="대명체 보통" panose="020B0600000101010101" pitchFamily="50" charset="-127"/>
                           <a:cs typeface="+mn-cs"/>
                         </a:rPr>
-                        <a:t>3,064</a:t>
+                        <a:t>3,313</a:t>
                       </a:r>
                     </a:p>
                   </a:txBody>
@@ -15990,7 +15990,7 @@
                           <a:ea typeface="대명체 보통" panose="020B0600000101010101" pitchFamily="50" charset="-127"/>
                           <a:cs typeface="+mn-cs"/>
                         </a:rPr>
-                        <a:t>4,985</a:t>
+                        <a:t>4,382</a:t>
                       </a:r>
                     </a:p>
                   </a:txBody>
@@ -16049,7 +16049,7 @@
                           <a:ea typeface="대명체 보통" panose="020B0600000101010101" pitchFamily="50" charset="-127"/>
                           <a:cs typeface="+mn-cs"/>
                         </a:rPr>
-                        <a:t>163%</a:t>
+                        <a:t>132%</a:t>
                       </a:r>
                     </a:p>
                   </a:txBody>
@@ -16266,7 +16266,7 @@
                           <a:ea typeface="대명체 보통" panose="020B0600000101010101" pitchFamily="50" charset="-127"/>
                           <a:cs typeface="+mn-cs"/>
                         </a:rPr>
-                        <a:t>62,891</a:t>
+                        <a:t>62,538</a:t>
                       </a:r>
                     </a:p>
                   </a:txBody>
@@ -16376,7 +16376,7 @@
                           <a:ea typeface="대명체 보통" panose="020B0600000101010101" pitchFamily="50" charset="-127"/>
                           <a:cs typeface="+mn-cs"/>
                         </a:rPr>
-                        <a:t>8,107</a:t>
+                        <a:t>7,754</a:t>
                       </a:r>
                     </a:p>
                   </a:txBody>
@@ -16435,7 +16435,7 @@
                           <a:ea typeface="대명체 보통" panose="020B0600000101010101" pitchFamily="50" charset="-127"/>
                           <a:cs typeface="+mn-cs"/>
                         </a:rPr>
-                        <a:t>115%</a:t>
+                        <a:t>114%</a:t>
                       </a:r>
                     </a:p>
                   </a:txBody>
@@ -16494,7 +16494,7 @@
                           <a:ea typeface="대명체 보통" panose="020B0600000101010101" pitchFamily="50" charset="-127"/>
                           <a:cs typeface="+mn-cs"/>
                         </a:rPr>
-                        <a:t>43,620</a:t>
+                        <a:t>43,869</a:t>
                       </a:r>
                     </a:p>
                   </a:txBody>
@@ -16604,7 +16604,7 @@
                           <a:ea typeface="대명체 보통" panose="020B0600000101010101" pitchFamily="50" charset="-127"/>
                           <a:cs typeface="+mn-cs"/>
                         </a:rPr>
-                        <a:t>19,272</a:t>
+                        <a:t>18,669</a:t>
                       </a:r>
                     </a:p>
                   </a:txBody>
@@ -16663,7 +16663,7 @@
                           <a:ea typeface="대명체 보통" panose="020B0600000101010101" pitchFamily="50" charset="-127"/>
                           <a:cs typeface="+mn-cs"/>
                         </a:rPr>
-                        <a:t>44%</a:t>
+                        <a:t>43%</a:t>
                       </a:r>
                     </a:p>
                   </a:txBody>
@@ -16999,7 +16999,7 @@
                           <a:ea typeface="대명체 보통" panose="020B0600000101010101" pitchFamily="50" charset="-127"/>
                           <a:cs typeface="+mn-cs"/>
                         </a:rPr>
-                        <a:t>666</a:t>
+                        <a:t>626</a:t>
                       </a:r>
                       <a:endParaRPr lang="en-US" altLang="ko-KR" sz="700" b="0" i="0" u="none" strike="noStrike" kern="1200" dirty="0">
                         <a:solidFill>
@@ -17126,7 +17126,7 @@
                           <a:ea typeface="대명체 보통" panose="020B0600000101010101" pitchFamily="50" charset="-127"/>
                           <a:cs typeface="+mn-cs"/>
                         </a:rPr>
-                        <a:t>264</a:t>
+                        <a:t>223</a:t>
                       </a:r>
                       <a:endParaRPr lang="en-US" altLang="ko-KR" sz="700" b="0" i="0" u="none" strike="noStrike" kern="1200" dirty="0">
                         <a:solidFill>
@@ -17198,7 +17198,7 @@
                           <a:ea typeface="대명체 보통" panose="020B0600000101010101" pitchFamily="50" charset="-127"/>
                           <a:cs typeface="+mn-cs"/>
                         </a:rPr>
-                        <a:t>166%</a:t>
+                        <a:t>155%</a:t>
                       </a:r>
                     </a:p>
                   </a:txBody>
@@ -17261,7 +17261,7 @@
                           <a:ea typeface="대명체 보통" panose="020B0600000101010101" pitchFamily="50" charset="-127"/>
                           <a:cs typeface="+mn-cs"/>
                         </a:rPr>
-                        <a:t>310</a:t>
+                        <a:t>315</a:t>
                       </a:r>
                       <a:endParaRPr lang="en-US" altLang="ko-KR" sz="700" b="0" i="0" u="none" strike="noStrike" kern="1200" dirty="0">
                         <a:solidFill>
@@ -17388,7 +17388,7 @@
                           <a:ea typeface="대명체 보통" panose="020B0600000101010101" pitchFamily="50" charset="-127"/>
                           <a:cs typeface="+mn-cs"/>
                         </a:rPr>
-                        <a:t>357</a:t>
+                        <a:t>311</a:t>
                       </a:r>
                     </a:p>
                   </a:txBody>
@@ -17451,7 +17451,7 @@
                           <a:ea typeface="대명체 보통" panose="020B0600000101010101" pitchFamily="50" charset="-127"/>
                           <a:cs typeface="+mn-cs"/>
                         </a:rPr>
-                        <a:t>115%</a:t>
+                        <a:t>99%</a:t>
                       </a:r>
                     </a:p>
                   </a:txBody>
@@ -17680,7 +17680,7 @@
                           <a:ea typeface="대명체 보통" panose="020B0600000101010101" pitchFamily="50" charset="-127"/>
                           <a:cs typeface="+mn-cs"/>
                         </a:rPr>
-                        <a:t>5,850</a:t>
+                        <a:t>5,810</a:t>
                       </a:r>
                     </a:p>
                   </a:txBody>
@@ -17798,7 +17798,7 @@
                           <a:ea typeface="대명체 보통" panose="020B0600000101010101" pitchFamily="50" charset="-127"/>
                           <a:cs typeface="+mn-cs"/>
                         </a:rPr>
-                        <a:t>1,981</a:t>
+                        <a:t>1,940</a:t>
                       </a:r>
                       <a:endParaRPr lang="en-US" altLang="ko-KR" sz="700" b="0" i="0" u="none" strike="noStrike" kern="1200" dirty="0">
                         <a:solidFill>
@@ -17870,7 +17870,7 @@
                           <a:ea typeface="대명체 보통" panose="020B0600000101010101" pitchFamily="50" charset="-127"/>
                           <a:cs typeface="+mn-cs"/>
                         </a:rPr>
-                        <a:t>151%</a:t>
+                        <a:t>150%</a:t>
                       </a:r>
                     </a:p>
                   </a:txBody>
@@ -17933,7 +17933,7 @@
                           <a:ea typeface="대명체 보통" panose="020B0600000101010101" pitchFamily="50" charset="-127"/>
                           <a:cs typeface="+mn-cs"/>
                         </a:rPr>
-                        <a:t>3,537</a:t>
+                        <a:t>3,542</a:t>
                       </a:r>
                     </a:p>
                   </a:txBody>
@@ -18051,7 +18051,7 @@
                           <a:ea typeface="대명체 보통" panose="020B0600000101010101" pitchFamily="50" charset="-127"/>
                           <a:cs typeface="+mn-cs"/>
                         </a:rPr>
-                        <a:t>2,313</a:t>
+                        <a:t>2,268</a:t>
                       </a:r>
                     </a:p>
                   </a:txBody>
@@ -18114,7 +18114,7 @@
                           <a:ea typeface="대명체 보통" panose="020B0600000101010101" pitchFamily="50" charset="-127"/>
                           <a:cs typeface="+mn-cs"/>
                         </a:rPr>
-                        <a:t>65%</a:t>
+                        <a:t>64%</a:t>
                       </a:r>
                     </a:p>
                   </a:txBody>

--- a/data/세일즈마케팅_예상매출현황.pptx
+++ b/data/세일즈마케팅_예상매출현황.pptx
@@ -12756,7 +12756,7 @@
                           <a:ea typeface="대명체 보통" panose="020B0600000101010101" pitchFamily="50" charset="-127"/>
                           <a:cs typeface="+mn-cs"/>
                         </a:rPr>
-                        <a:t>16,872</a:t>
+                        <a:t>16,389</a:t>
                       </a:r>
                     </a:p>
                   </a:txBody>
@@ -12882,7 +12882,7 @@
                           <a:ea typeface="대명체 보통" panose="020B0600000101010101" pitchFamily="50" charset="-127"/>
                           <a:cs typeface="+mn-cs"/>
                         </a:rPr>
-                        <a:t>2,766</a:t>
+                        <a:t>2,282</a:t>
                       </a:r>
                     </a:p>
                   </a:txBody>
@@ -12949,7 +12949,7 @@
                           <a:ea typeface="대명체 보통" panose="020B0600000101010101" pitchFamily="50" charset="-127"/>
                           <a:cs typeface="+mn-cs"/>
                         </a:rPr>
-                        <a:t>120%</a:t>
+                        <a:t>116%</a:t>
                       </a:r>
                     </a:p>
                   </a:txBody>
@@ -13016,7 +13016,7 @@
                           <a:ea typeface="대명체 보통" panose="020B0600000101010101" pitchFamily="50" charset="-127"/>
                           <a:cs typeface="+mn-cs"/>
                         </a:rPr>
-                        <a:t>8,345</a:t>
+                        <a:t>8,519</a:t>
                       </a:r>
                     </a:p>
                   </a:txBody>
@@ -13142,7 +13142,7 @@
                           <a:ea typeface="대명체 보통" panose="020B0600000101010101" pitchFamily="50" charset="-127"/>
                           <a:cs typeface="+mn-cs"/>
                         </a:rPr>
-                        <a:t>8,528</a:t>
+                        <a:t>7,870</a:t>
                       </a:r>
                     </a:p>
                   </a:txBody>
@@ -13209,7 +13209,7 @@
                           <a:ea typeface="대명체 보통" panose="020B0600000101010101" pitchFamily="50" charset="-127"/>
                           <a:cs typeface="+mn-cs"/>
                         </a:rPr>
-                        <a:t>102%</a:t>
+                        <a:t>92%</a:t>
                       </a:r>
                     </a:p>
                   </a:txBody>
@@ -13450,7 +13450,7 @@
                           <a:ea typeface="대명체 보통" panose="020B0600000101010101" pitchFamily="50" charset="-127"/>
                           <a:cs typeface="+mn-cs"/>
                         </a:rPr>
-                        <a:t>161,448</a:t>
+                        <a:t>160,965</a:t>
                       </a:r>
                     </a:p>
                   </a:txBody>
@@ -13576,7 +13576,7 @@
                           <a:ea typeface="대명체 보통" panose="020B0600000101010101" pitchFamily="50" charset="-127"/>
                           <a:cs typeface="+mn-cs"/>
                         </a:rPr>
-                        <a:t>22,421</a:t>
+                        <a:t>21,937</a:t>
                       </a:r>
                     </a:p>
                   </a:txBody>
@@ -13710,7 +13710,7 @@
                           <a:ea typeface="대명체 보통" panose="020B0600000101010101" pitchFamily="50" charset="-127"/>
                           <a:cs typeface="+mn-cs"/>
                         </a:rPr>
-                        <a:t>110,783</a:t>
+                        <a:t>110,958</a:t>
                       </a:r>
                     </a:p>
                   </a:txBody>
@@ -13836,7 +13836,7 @@
                           <a:ea typeface="대명체 보통" panose="020B0600000101010101" pitchFamily="50" charset="-127"/>
                           <a:cs typeface="+mn-cs"/>
                         </a:rPr>
-                        <a:t>50,665</a:t>
+                        <a:t>50,007</a:t>
                       </a:r>
                     </a:p>
                   </a:txBody>
@@ -13903,7 +13903,7 @@
                           <a:ea typeface="대명체 보통" panose="020B0600000101010101" pitchFamily="50" charset="-127"/>
                           <a:cs typeface="+mn-cs"/>
                         </a:rPr>
-                        <a:t>46%</a:t>
+                        <a:t>45%</a:t>
                       </a:r>
                     </a:p>
                   </a:txBody>
@@ -14237,7 +14237,7 @@
                           <a:ea typeface="대명체 보통" panose="020B0600000101010101" pitchFamily="50" charset="-127"/>
                           <a:cs typeface="+mn-cs"/>
                         </a:rPr>
-                        <a:t>8,551</a:t>
+                        <a:t>8,238</a:t>
                       </a:r>
                     </a:p>
                   </a:txBody>
@@ -14355,7 +14355,7 @@
                           <a:ea typeface="대명체 보통" panose="020B0600000101010101" pitchFamily="50" charset="-127"/>
                           <a:cs typeface="+mn-cs"/>
                         </a:rPr>
-                        <a:t>528</a:t>
+                        <a:t>215</a:t>
                       </a:r>
                       <a:endParaRPr lang="en-US" altLang="ko-KR" sz="700" b="0" i="0" u="none" strike="noStrike" kern="1200" dirty="0">
                         <a:solidFill>
@@ -14427,7 +14427,7 @@
                           <a:ea typeface="대명체 보통" panose="020B0600000101010101" pitchFamily="50" charset="-127"/>
                           <a:cs typeface="+mn-cs"/>
                         </a:rPr>
-                        <a:t>107%</a:t>
+                        <a:t>103%</a:t>
                       </a:r>
                     </a:p>
                   </a:txBody>
@@ -14490,7 +14490,7 @@
                           <a:ea typeface="대명체 보통" panose="020B0600000101010101" pitchFamily="50" charset="-127"/>
                           <a:cs typeface="+mn-cs"/>
                         </a:rPr>
-                        <a:t>4,716</a:t>
+                        <a:t>4,824</a:t>
                       </a:r>
                     </a:p>
                   </a:txBody>
@@ -14608,7 +14608,7 @@
                           <a:ea typeface="대명체 보통" panose="020B0600000101010101" pitchFamily="50" charset="-127"/>
                           <a:cs typeface="+mn-cs"/>
                         </a:rPr>
-                        <a:t>3,834</a:t>
+                        <a:t>3,414</a:t>
                       </a:r>
                     </a:p>
                   </a:txBody>
@@ -14671,7 +14671,7 @@
                           <a:ea typeface="대명체 보통" panose="020B0600000101010101" pitchFamily="50" charset="-127"/>
                           <a:cs typeface="+mn-cs"/>
                         </a:rPr>
-                        <a:t>81%</a:t>
+                        <a:t>71%</a:t>
                       </a:r>
                     </a:p>
                   </a:txBody>
@@ -14900,7 +14900,7 @@
                           <a:ea typeface="대명체 보통" panose="020B0600000101010101" pitchFamily="50" charset="-127"/>
                           <a:cs typeface="+mn-cs"/>
                         </a:rPr>
-                        <a:t>93,101</a:t>
+                        <a:t>92,788</a:t>
                       </a:r>
                     </a:p>
                   </a:txBody>
@@ -15018,7 +15018,7 @@
                           <a:ea typeface="대명체 보통" panose="020B0600000101010101" pitchFamily="50" charset="-127"/>
                           <a:cs typeface="+mn-cs"/>
                         </a:rPr>
-                        <a:t>12,727</a:t>
+                        <a:t>12,414</a:t>
                       </a:r>
                     </a:p>
                   </a:txBody>
@@ -15081,7 +15081,7 @@
                           <a:ea typeface="대명체 보통" panose="020B0600000101010101" pitchFamily="50" charset="-127"/>
                           <a:cs typeface="+mn-cs"/>
                         </a:rPr>
-                        <a:t>116%</a:t>
+                        <a:t>115%</a:t>
                       </a:r>
                     </a:p>
                   </a:txBody>
@@ -15144,7 +15144,7 @@
                           <a:ea typeface="대명체 보통" panose="020B0600000101010101" pitchFamily="50" charset="-127"/>
                           <a:cs typeface="+mn-cs"/>
                         </a:rPr>
-                        <a:t>63,372</a:t>
+                        <a:t>63,480</a:t>
                       </a:r>
                     </a:p>
                   </a:txBody>
@@ -15262,7 +15262,7 @@
                           <a:ea typeface="대명체 보통" panose="020B0600000101010101" pitchFamily="50" charset="-127"/>
                           <a:cs typeface="+mn-cs"/>
                         </a:rPr>
-                        <a:t>29,728</a:t>
+                        <a:t>29,308</a:t>
                       </a:r>
                     </a:p>
                   </a:txBody>
@@ -15325,7 +15325,7 @@
                           <a:ea typeface="대명체 보통" panose="020B0600000101010101" pitchFamily="50" charset="-127"/>
                           <a:cs typeface="+mn-cs"/>
                         </a:rPr>
-                        <a:t>47%</a:t>
+                        <a:t>46%</a:t>
                       </a:r>
                     </a:p>
                   </a:txBody>
@@ -15643,7 +15643,7 @@
                           <a:ea typeface="대명체 보통" panose="020B0600000101010101" pitchFamily="50" charset="-127"/>
                           <a:cs typeface="+mn-cs"/>
                         </a:rPr>
-                        <a:t>7,695</a:t>
+                        <a:t>7,535</a:t>
                       </a:r>
                     </a:p>
                   </a:txBody>
@@ -15753,7 +15753,7 @@
                           <a:ea typeface="대명체 보통" panose="020B0600000101010101" pitchFamily="50" charset="-127"/>
                           <a:cs typeface="+mn-cs"/>
                         </a:rPr>
-                        <a:t>2,014</a:t>
+                        <a:t>1,854</a:t>
                       </a:r>
                       <a:endParaRPr lang="en-US" altLang="ko-KR" sz="700" b="0" i="0" u="none" strike="noStrike" kern="1200" dirty="0">
                         <a:solidFill>
@@ -15821,7 +15821,7 @@
                           <a:ea typeface="대명체 보통" panose="020B0600000101010101" pitchFamily="50" charset="-127"/>
                           <a:cs typeface="+mn-cs"/>
                         </a:rPr>
-                        <a:t>135%</a:t>
+                        <a:t>133%</a:t>
                       </a:r>
                     </a:p>
                   </a:txBody>
@@ -15880,7 +15880,7 @@
                           <a:ea typeface="대명체 보통" panose="020B0600000101010101" pitchFamily="50" charset="-127"/>
                           <a:cs typeface="+mn-cs"/>
                         </a:rPr>
-                        <a:t>3,313</a:t>
+                        <a:t>3,381</a:t>
                       </a:r>
                     </a:p>
                   </a:txBody>
@@ -15990,7 +15990,7 @@
                           <a:ea typeface="대명체 보통" panose="020B0600000101010101" pitchFamily="50" charset="-127"/>
                           <a:cs typeface="+mn-cs"/>
                         </a:rPr>
-                        <a:t>4,382</a:t>
+                        <a:t>4,154</a:t>
                       </a:r>
                     </a:p>
                   </a:txBody>
@@ -16049,7 +16049,7 @@
                           <a:ea typeface="대명체 보통" panose="020B0600000101010101" pitchFamily="50" charset="-127"/>
                           <a:cs typeface="+mn-cs"/>
                         </a:rPr>
-                        <a:t>132%</a:t>
+                        <a:t>123%</a:t>
                       </a:r>
                     </a:p>
                   </a:txBody>
@@ -16266,7 +16266,7 @@
                           <a:ea typeface="대명체 보통" panose="020B0600000101010101" pitchFamily="50" charset="-127"/>
                           <a:cs typeface="+mn-cs"/>
                         </a:rPr>
-                        <a:t>62,538</a:t>
+                        <a:t>62,377</a:t>
                       </a:r>
                     </a:p>
                   </a:txBody>
@@ -16376,7 +16376,7 @@
                           <a:ea typeface="대명체 보통" panose="020B0600000101010101" pitchFamily="50" charset="-127"/>
                           <a:cs typeface="+mn-cs"/>
                         </a:rPr>
-                        <a:t>7,754</a:t>
+                        <a:t>7,593</a:t>
                       </a:r>
                     </a:p>
                   </a:txBody>
@@ -16494,7 +16494,7 @@
                           <a:ea typeface="대명체 보통" panose="020B0600000101010101" pitchFamily="50" charset="-127"/>
                           <a:cs typeface="+mn-cs"/>
                         </a:rPr>
-                        <a:t>43,869</a:t>
+                        <a:t>43,936</a:t>
                       </a:r>
                     </a:p>
                   </a:txBody>
@@ -16604,7 +16604,7 @@
                           <a:ea typeface="대명체 보통" panose="020B0600000101010101" pitchFamily="50" charset="-127"/>
                           <a:cs typeface="+mn-cs"/>
                         </a:rPr>
-                        <a:t>18,669</a:t>
+                        <a:t>18,441</a:t>
                       </a:r>
                     </a:p>
                   </a:txBody>
@@ -16663,7 +16663,7 @@
                           <a:ea typeface="대명체 보통" panose="020B0600000101010101" pitchFamily="50" charset="-127"/>
                           <a:cs typeface="+mn-cs"/>
                         </a:rPr>
-                        <a:t>43%</a:t>
+                        <a:t>42%</a:t>
                       </a:r>
                     </a:p>
                   </a:txBody>
@@ -16999,7 +16999,7 @@
                           <a:ea typeface="대명체 보통" panose="020B0600000101010101" pitchFamily="50" charset="-127"/>
                           <a:cs typeface="+mn-cs"/>
                         </a:rPr>
-                        <a:t>626</a:t>
+                        <a:t>616</a:t>
                       </a:r>
                       <a:endParaRPr lang="en-US" altLang="ko-KR" sz="700" b="0" i="0" u="none" strike="noStrike" kern="1200" dirty="0">
                         <a:solidFill>
@@ -17126,7 +17126,7 @@
                           <a:ea typeface="대명체 보통" panose="020B0600000101010101" pitchFamily="50" charset="-127"/>
                           <a:cs typeface="+mn-cs"/>
                         </a:rPr>
-                        <a:t>223</a:t>
+                        <a:t>213</a:t>
                       </a:r>
                       <a:endParaRPr lang="en-US" altLang="ko-KR" sz="700" b="0" i="0" u="none" strike="noStrike" kern="1200" dirty="0">
                         <a:solidFill>
@@ -17198,7 +17198,7 @@
                           <a:ea typeface="대명체 보통" panose="020B0600000101010101" pitchFamily="50" charset="-127"/>
                           <a:cs typeface="+mn-cs"/>
                         </a:rPr>
-                        <a:t>155%</a:t>
+                        <a:t>153%</a:t>
                       </a:r>
                     </a:p>
                   </a:txBody>
@@ -17388,7 +17388,7 @@
                           <a:ea typeface="대명체 보통" panose="020B0600000101010101" pitchFamily="50" charset="-127"/>
                           <a:cs typeface="+mn-cs"/>
                         </a:rPr>
-                        <a:t>311</a:t>
+                        <a:t>301</a:t>
                       </a:r>
                     </a:p>
                   </a:txBody>
@@ -17451,7 +17451,7 @@
                           <a:ea typeface="대명체 보통" panose="020B0600000101010101" pitchFamily="50" charset="-127"/>
                           <a:cs typeface="+mn-cs"/>
                         </a:rPr>
-                        <a:t>99%</a:t>
+                        <a:t>96%</a:t>
                       </a:r>
                     </a:p>
                   </a:txBody>
@@ -17680,7 +17680,7 @@
                           <a:ea typeface="대명체 보통" panose="020B0600000101010101" pitchFamily="50" charset="-127"/>
                           <a:cs typeface="+mn-cs"/>
                         </a:rPr>
-                        <a:t>5,810</a:t>
+                        <a:t>5,800</a:t>
                       </a:r>
                     </a:p>
                   </a:txBody>
@@ -17798,7 +17798,7 @@
                           <a:ea typeface="대명체 보통" panose="020B0600000101010101" pitchFamily="50" charset="-127"/>
                           <a:cs typeface="+mn-cs"/>
                         </a:rPr>
-                        <a:t>1,940</a:t>
+                        <a:t>1,930</a:t>
                       </a:r>
                       <a:endParaRPr lang="en-US" altLang="ko-KR" sz="700" b="0" i="0" u="none" strike="noStrike" kern="1200" dirty="0">
                         <a:solidFill>
@@ -18051,7 +18051,7 @@
                           <a:ea typeface="대명체 보통" panose="020B0600000101010101" pitchFamily="50" charset="-127"/>
                           <a:cs typeface="+mn-cs"/>
                         </a:rPr>
-                        <a:t>2,268</a:t>
+                        <a:t>2,258</a:t>
                       </a:r>
                     </a:p>
                   </a:txBody>

--- a/data/세일즈마케팅_예상매출현황.pptx
+++ b/data/세일즈마케팅_예상매출현황.pptx
@@ -12756,7 +12756,7 @@
                           <a:ea typeface="대명체 보통" panose="020B0600000101010101" pitchFamily="50" charset="-127"/>
                           <a:cs typeface="+mn-cs"/>
                         </a:rPr>
-                        <a:t>16,389</a:t>
+                        <a:t>16,348</a:t>
                       </a:r>
                     </a:p>
                   </a:txBody>
@@ -12882,7 +12882,7 @@
                           <a:ea typeface="대명체 보통" panose="020B0600000101010101" pitchFamily="50" charset="-127"/>
                           <a:cs typeface="+mn-cs"/>
                         </a:rPr>
-                        <a:t>2,282</a:t>
+                        <a:t>2,241</a:t>
                       </a:r>
                     </a:p>
                   </a:txBody>
@@ -13142,7 +13142,7 @@
                           <a:ea typeface="대명체 보통" panose="020B0600000101010101" pitchFamily="50" charset="-127"/>
                           <a:cs typeface="+mn-cs"/>
                         </a:rPr>
-                        <a:t>7,870</a:t>
+                        <a:t>7,829</a:t>
                       </a:r>
                     </a:p>
                   </a:txBody>
@@ -13450,7 +13450,7 @@
                           <a:ea typeface="대명체 보통" panose="020B0600000101010101" pitchFamily="50" charset="-127"/>
                           <a:cs typeface="+mn-cs"/>
                         </a:rPr>
-                        <a:t>160,965</a:t>
+                        <a:t>160,924</a:t>
                       </a:r>
                     </a:p>
                   </a:txBody>
@@ -13576,7 +13576,7 @@
                           <a:ea typeface="대명체 보통" panose="020B0600000101010101" pitchFamily="50" charset="-127"/>
                           <a:cs typeface="+mn-cs"/>
                         </a:rPr>
-                        <a:t>21,937</a:t>
+                        <a:t>21,896</a:t>
                       </a:r>
                     </a:p>
                   </a:txBody>
@@ -13836,7 +13836,7 @@
                           <a:ea typeface="대명체 보통" panose="020B0600000101010101" pitchFamily="50" charset="-127"/>
                           <a:cs typeface="+mn-cs"/>
                         </a:rPr>
-                        <a:t>50,007</a:t>
+                        <a:t>49,966</a:t>
                       </a:r>
                     </a:p>
                   </a:txBody>
@@ -14237,7 +14237,7 @@
                           <a:ea typeface="대명체 보통" panose="020B0600000101010101" pitchFamily="50" charset="-127"/>
                           <a:cs typeface="+mn-cs"/>
                         </a:rPr>
-                        <a:t>8,238</a:t>
+                        <a:t>8,198</a:t>
                       </a:r>
                     </a:p>
                   </a:txBody>
@@ -14355,7 +14355,7 @@
                           <a:ea typeface="대명체 보통" panose="020B0600000101010101" pitchFamily="50" charset="-127"/>
                           <a:cs typeface="+mn-cs"/>
                         </a:rPr>
-                        <a:t>215</a:t>
+                        <a:t>175</a:t>
                       </a:r>
                       <a:endParaRPr lang="en-US" altLang="ko-KR" sz="700" b="0" i="0" u="none" strike="noStrike" kern="1200" dirty="0">
                         <a:solidFill>
@@ -14427,7 +14427,7 @@
                           <a:ea typeface="대명체 보통" panose="020B0600000101010101" pitchFamily="50" charset="-127"/>
                           <a:cs typeface="+mn-cs"/>
                         </a:rPr>
-                        <a:t>103%</a:t>
+                        <a:t>102%</a:t>
                       </a:r>
                     </a:p>
                   </a:txBody>
@@ -14608,7 +14608,7 @@
                           <a:ea typeface="대명체 보통" panose="020B0600000101010101" pitchFamily="50" charset="-127"/>
                           <a:cs typeface="+mn-cs"/>
                         </a:rPr>
-                        <a:t>3,414</a:t>
+                        <a:t>3,374</a:t>
                       </a:r>
                     </a:p>
                   </a:txBody>
@@ -14671,7 +14671,7 @@
                           <a:ea typeface="대명체 보통" panose="020B0600000101010101" pitchFamily="50" charset="-127"/>
                           <a:cs typeface="+mn-cs"/>
                         </a:rPr>
-                        <a:t>71%</a:t>
+                        <a:t>70%</a:t>
                       </a:r>
                     </a:p>
                   </a:txBody>
@@ -14900,7 +14900,7 @@
                           <a:ea typeface="대명체 보통" panose="020B0600000101010101" pitchFamily="50" charset="-127"/>
                           <a:cs typeface="+mn-cs"/>
                         </a:rPr>
-                        <a:t>92,788</a:t>
+                        <a:t>92,748</a:t>
                       </a:r>
                     </a:p>
                   </a:txBody>
@@ -15018,7 +15018,7 @@
                           <a:ea typeface="대명체 보통" panose="020B0600000101010101" pitchFamily="50" charset="-127"/>
                           <a:cs typeface="+mn-cs"/>
                         </a:rPr>
-                        <a:t>12,414</a:t>
+                        <a:t>12,374</a:t>
                       </a:r>
                     </a:p>
                   </a:txBody>
@@ -15262,7 +15262,7 @@
                           <a:ea typeface="대명체 보통" panose="020B0600000101010101" pitchFamily="50" charset="-127"/>
                           <a:cs typeface="+mn-cs"/>
                         </a:rPr>
-                        <a:t>29,308</a:t>
+                        <a:t>29,268</a:t>
                       </a:r>
                     </a:p>
                   </a:txBody>
@@ -15643,7 +15643,7 @@
                           <a:ea typeface="대명체 보통" panose="020B0600000101010101" pitchFamily="50" charset="-127"/>
                           <a:cs typeface="+mn-cs"/>
                         </a:rPr>
-                        <a:t>7,535</a:t>
+                        <a:t>7,540</a:t>
                       </a:r>
                     </a:p>
                   </a:txBody>
@@ -15753,7 +15753,7 @@
                           <a:ea typeface="대명체 보통" panose="020B0600000101010101" pitchFamily="50" charset="-127"/>
                           <a:cs typeface="+mn-cs"/>
                         </a:rPr>
-                        <a:t>1,854</a:t>
+                        <a:t>1,859</a:t>
                       </a:r>
                       <a:endParaRPr lang="en-US" altLang="ko-KR" sz="700" b="0" i="0" u="none" strike="noStrike" kern="1200" dirty="0">
                         <a:solidFill>
@@ -15990,7 +15990,7 @@
                           <a:ea typeface="대명체 보통" panose="020B0600000101010101" pitchFamily="50" charset="-127"/>
                           <a:cs typeface="+mn-cs"/>
                         </a:rPr>
-                        <a:t>4,154</a:t>
+                        <a:t>4,159</a:t>
                       </a:r>
                     </a:p>
                   </a:txBody>
@@ -16266,7 +16266,7 @@
                           <a:ea typeface="대명체 보통" panose="020B0600000101010101" pitchFamily="50" charset="-127"/>
                           <a:cs typeface="+mn-cs"/>
                         </a:rPr>
-                        <a:t>62,377</a:t>
+                        <a:t>62,382</a:t>
                       </a:r>
                     </a:p>
                   </a:txBody>
@@ -16376,7 +16376,7 @@
                           <a:ea typeface="대명체 보통" panose="020B0600000101010101" pitchFamily="50" charset="-127"/>
                           <a:cs typeface="+mn-cs"/>
                         </a:rPr>
-                        <a:t>7,593</a:t>
+                        <a:t>7,598</a:t>
                       </a:r>
                     </a:p>
                   </a:txBody>
@@ -16604,7 +16604,7 @@
                           <a:ea typeface="대명체 보통" panose="020B0600000101010101" pitchFamily="50" charset="-127"/>
                           <a:cs typeface="+mn-cs"/>
                         </a:rPr>
-                        <a:t>18,441</a:t>
+                        <a:t>18,446</a:t>
                       </a:r>
                     </a:p>
                   </a:txBody>
@@ -16999,7 +16999,7 @@
                           <a:ea typeface="대명체 보통" panose="020B0600000101010101" pitchFamily="50" charset="-127"/>
                           <a:cs typeface="+mn-cs"/>
                         </a:rPr>
-                        <a:t>616</a:t>
+                        <a:t>610</a:t>
                       </a:r>
                       <a:endParaRPr lang="en-US" altLang="ko-KR" sz="700" b="0" i="0" u="none" strike="noStrike" kern="1200" dirty="0">
                         <a:solidFill>
@@ -17126,7 +17126,7 @@
                           <a:ea typeface="대명체 보통" panose="020B0600000101010101" pitchFamily="50" charset="-127"/>
                           <a:cs typeface="+mn-cs"/>
                         </a:rPr>
-                        <a:t>213</a:t>
+                        <a:t>207</a:t>
                       </a:r>
                       <a:endParaRPr lang="en-US" altLang="ko-KR" sz="700" b="0" i="0" u="none" strike="noStrike" kern="1200" dirty="0">
                         <a:solidFill>
@@ -17198,7 +17198,7 @@
                           <a:ea typeface="대명체 보통" panose="020B0600000101010101" pitchFamily="50" charset="-127"/>
                           <a:cs typeface="+mn-cs"/>
                         </a:rPr>
-                        <a:t>153%</a:t>
+                        <a:t>151%</a:t>
                       </a:r>
                     </a:p>
                   </a:txBody>
@@ -17388,7 +17388,7 @@
                           <a:ea typeface="대명체 보통" panose="020B0600000101010101" pitchFamily="50" charset="-127"/>
                           <a:cs typeface="+mn-cs"/>
                         </a:rPr>
-                        <a:t>301</a:t>
+                        <a:t>295</a:t>
                       </a:r>
                     </a:p>
                   </a:txBody>
@@ -17451,7 +17451,7 @@
                           <a:ea typeface="대명체 보통" panose="020B0600000101010101" pitchFamily="50" charset="-127"/>
                           <a:cs typeface="+mn-cs"/>
                         </a:rPr>
-                        <a:t>96%</a:t>
+                        <a:t>94%</a:t>
                       </a:r>
                     </a:p>
                   </a:txBody>
@@ -17680,7 +17680,7 @@
                           <a:ea typeface="대명체 보통" panose="020B0600000101010101" pitchFamily="50" charset="-127"/>
                           <a:cs typeface="+mn-cs"/>
                         </a:rPr>
-                        <a:t>5,800</a:t>
+                        <a:t>5,794</a:t>
                       </a:r>
                     </a:p>
                   </a:txBody>
@@ -17798,7 +17798,7 @@
                           <a:ea typeface="대명체 보통" panose="020B0600000101010101" pitchFamily="50" charset="-127"/>
                           <a:cs typeface="+mn-cs"/>
                         </a:rPr>
-                        <a:t>1,930</a:t>
+                        <a:t>1,924</a:t>
                       </a:r>
                       <a:endParaRPr lang="en-US" altLang="ko-KR" sz="700" b="0" i="0" u="none" strike="noStrike" kern="1200" dirty="0">
                         <a:solidFill>
@@ -18051,7 +18051,7 @@
                           <a:ea typeface="대명체 보통" panose="020B0600000101010101" pitchFamily="50" charset="-127"/>
                           <a:cs typeface="+mn-cs"/>
                         </a:rPr>
-                        <a:t>2,258</a:t>
+                        <a:t>2,252</a:t>
                       </a:r>
                     </a:p>
                   </a:txBody>

--- a/data/세일즈마케팅_예상매출현황.pptx
+++ b/data/세일즈마케팅_예상매출현황.pptx
@@ -12756,7 +12756,7 @@
                           <a:ea typeface="대명체 보통" panose="020B0600000101010101" pitchFamily="50" charset="-127"/>
                           <a:cs typeface="+mn-cs"/>
                         </a:rPr>
-                        <a:t>16,348</a:t>
+                        <a:t>16,004</a:t>
                       </a:r>
                     </a:p>
                   </a:txBody>
@@ -12882,7 +12882,701 @@
                           <a:ea typeface="대명체 보통" panose="020B0600000101010101" pitchFamily="50" charset="-127"/>
                           <a:cs typeface="+mn-cs"/>
                         </a:rPr>
-                        <a:t>2,241</a:t>
+                        <a:t>1,898</a:t>
+                      </a:r>
+                    </a:p>
+                  </a:txBody>
+                  <a:tcPr marL="9525" marR="9525" marT="9525" marB="0" anchor="ctr">
+                    <a:lnL w="6350" cap="flat" cmpd="sng" algn="ctr">
+                      <a:solidFill>
+                        <a:schemeClr val="bg2">
+                          <a:lumMod val="75000"/>
+                        </a:schemeClr>
+                      </a:solidFill>
+                      <a:prstDash val="solid"/>
+                      <a:round/>
+                      <a:headEnd type="none" w="med" len="med"/>
+                      <a:tailEnd type="none" w="med" len="med"/>
+                    </a:lnL>
+                    <a:lnR w="6350" cap="flat" cmpd="sng" algn="ctr">
+                      <a:solidFill>
+                        <a:schemeClr val="bg2">
+                          <a:lumMod val="75000"/>
+                        </a:schemeClr>
+                      </a:solidFill>
+                      <a:prstDash val="solid"/>
+                      <a:round/>
+                      <a:headEnd type="none" w="med" len="med"/>
+                      <a:tailEnd type="none" w="med" len="med"/>
+                    </a:lnR>
+                    <a:lnT w="6350" cap="flat" cmpd="sng" algn="ctr">
+                      <a:solidFill>
+                        <a:schemeClr val="bg2">
+                          <a:lumMod val="75000"/>
+                        </a:schemeClr>
+                      </a:solidFill>
+                      <a:prstDash val="solid"/>
+                      <a:round/>
+                      <a:headEnd type="none" w="med" len="med"/>
+                      <a:tailEnd type="none" w="med" len="med"/>
+                    </a:lnT>
+                    <a:lnB w="6350" cap="flat" cmpd="sng" algn="ctr">
+                      <a:solidFill>
+                        <a:schemeClr val="bg2">
+                          <a:lumMod val="75000"/>
+                        </a:schemeClr>
+                      </a:solidFill>
+                      <a:prstDash val="solid"/>
+                      <a:round/>
+                      <a:headEnd type="none" w="med" len="med"/>
+                      <a:tailEnd type="none" w="med" len="med"/>
+                    </a:lnB>
+                  </a:tcPr>
+                </a:tc>
+                <a:tc>
+                  <a:txBody>
+                    <a:bodyPr/>
+                    <a:lstStyle/>
+                    <a:p>
+                      <a:pPr algn="r" rtl="0" fontAlgn="ctr"/>
+                      <a:r>
+                        <a:rPr lang="en-US" altLang="ko-KR" sz="700" b="0" i="0" u="none" strike="noStrike" kern="1200">
+                          <a:solidFill>
+                            <a:srgbClr val="000000"/>
+                          </a:solidFill>
+                          <a:effectLst/>
+                          <a:latin typeface="대명체 보통" panose="020B0600000101010101" pitchFamily="50" charset="-127"/>
+                          <a:ea typeface="대명체 보통" panose="020B0600000101010101" pitchFamily="50" charset="-127"/>
+                          <a:cs typeface="+mn-cs"/>
+                        </a:rPr>
+                        <a:t>113%</a:t>
+                      </a:r>
+                    </a:p>
+                  </a:txBody>
+                  <a:tcPr marL="9525" marR="9525" marT="9525" marB="0" anchor="ctr">
+                    <a:lnL w="6350" cap="flat" cmpd="sng" algn="ctr">
+                      <a:solidFill>
+                        <a:schemeClr val="bg2">
+                          <a:lumMod val="75000"/>
+                        </a:schemeClr>
+                      </a:solidFill>
+                      <a:prstDash val="solid"/>
+                      <a:round/>
+                      <a:headEnd type="none" w="med" len="med"/>
+                      <a:tailEnd type="none" w="med" len="med"/>
+                    </a:lnL>
+                    <a:lnR w="6350" cap="flat" cmpd="sng" algn="ctr">
+                      <a:solidFill>
+                        <a:schemeClr val="bg2">
+                          <a:lumMod val="75000"/>
+                        </a:schemeClr>
+                      </a:solidFill>
+                      <a:prstDash val="solid"/>
+                      <a:round/>
+                      <a:headEnd type="none" w="med" len="med"/>
+                      <a:tailEnd type="none" w="med" len="med"/>
+                    </a:lnR>
+                    <a:lnT w="6350" cap="flat" cmpd="sng" algn="ctr">
+                      <a:solidFill>
+                        <a:schemeClr val="bg2">
+                          <a:lumMod val="75000"/>
+                        </a:schemeClr>
+                      </a:solidFill>
+                      <a:prstDash val="solid"/>
+                      <a:round/>
+                      <a:headEnd type="none" w="med" len="med"/>
+                      <a:tailEnd type="none" w="med" len="med"/>
+                    </a:lnT>
+                    <a:lnB w="6350" cap="flat" cmpd="sng" algn="ctr">
+                      <a:solidFill>
+                        <a:schemeClr val="bg2">
+                          <a:lumMod val="75000"/>
+                        </a:schemeClr>
+                      </a:solidFill>
+                      <a:prstDash val="solid"/>
+                      <a:round/>
+                      <a:headEnd type="none" w="med" len="med"/>
+                      <a:tailEnd type="none" w="med" len="med"/>
+                    </a:lnB>
+                  </a:tcPr>
+                </a:tc>
+                <a:tc>
+                  <a:txBody>
+                    <a:bodyPr/>
+                    <a:lstStyle/>
+                    <a:p>
+                      <a:pPr algn="r" rtl="0" fontAlgn="ctr"/>
+                      <a:r>
+                        <a:rPr lang="en-US" altLang="ko-KR" sz="700" b="0" i="0" u="none" strike="noStrike" kern="1200">
+                          <a:solidFill>
+                            <a:srgbClr val="000000"/>
+                          </a:solidFill>
+                          <a:effectLst/>
+                          <a:latin typeface="대명체 보통" panose="020B0600000101010101" pitchFamily="50" charset="-127"/>
+                          <a:ea typeface="대명체 보통" panose="020B0600000101010101" pitchFamily="50" charset="-127"/>
+                          <a:cs typeface="+mn-cs"/>
+                        </a:rPr>
+                        <a:t>8,756</a:t>
+                      </a:r>
+                    </a:p>
+                  </a:txBody>
+                  <a:tcPr marL="9525" marR="9525" marT="9525" marB="0" anchor="ctr">
+                    <a:lnL w="6350" cap="flat" cmpd="sng" algn="ctr">
+                      <a:solidFill>
+                        <a:schemeClr val="bg2">
+                          <a:lumMod val="75000"/>
+                        </a:schemeClr>
+                      </a:solidFill>
+                      <a:prstDash val="solid"/>
+                      <a:round/>
+                      <a:headEnd type="none" w="med" len="med"/>
+                      <a:tailEnd type="none" w="med" len="med"/>
+                    </a:lnL>
+                    <a:lnR w="6350" cap="flat" cmpd="sng" algn="ctr">
+                      <a:noFill/>
+                      <a:prstDash val="solid"/>
+                      <a:round/>
+                      <a:headEnd type="none" w="med" len="med"/>
+                      <a:tailEnd type="none" w="med" len="med"/>
+                    </a:lnR>
+                    <a:lnT w="6350" cap="flat" cmpd="sng" algn="ctr">
+                      <a:solidFill>
+                        <a:schemeClr val="bg2">
+                          <a:lumMod val="75000"/>
+                        </a:schemeClr>
+                      </a:solidFill>
+                      <a:prstDash val="solid"/>
+                      <a:round/>
+                      <a:headEnd type="none" w="med" len="med"/>
+                      <a:tailEnd type="none" w="med" len="med"/>
+                    </a:lnT>
+                    <a:lnB w="6350" cap="flat" cmpd="sng" algn="ctr">
+                      <a:solidFill>
+                        <a:schemeClr val="bg2">
+                          <a:lumMod val="75000"/>
+                        </a:schemeClr>
+                      </a:solidFill>
+                      <a:prstDash val="solid"/>
+                      <a:round/>
+                      <a:headEnd type="none" w="med" len="med"/>
+                      <a:tailEnd type="none" w="med" len="med"/>
+                    </a:lnB>
+                  </a:tcPr>
+                </a:tc>
+                <a:tc>
+                  <a:txBody>
+                    <a:bodyPr/>
+                    <a:lstStyle/>
+                    <a:p>
+                      <a:pPr algn="r" rtl="0" fontAlgn="ctr"/>
+                      <a:r>
+                        <a:rPr lang="en-US" altLang="ko-KR" sz="700" b="0" i="0" u="none" strike="noStrike" kern="1200">
+                          <a:solidFill>
+                            <a:srgbClr val="000000"/>
+                          </a:solidFill>
+                          <a:effectLst/>
+                          <a:latin typeface="대명체 보통" panose="020B0600000101010101" pitchFamily="50" charset="-127"/>
+                          <a:ea typeface="대명체 보통" panose="020B0600000101010101" pitchFamily="50" charset="-127"/>
+                          <a:cs typeface="+mn-cs"/>
+                        </a:rPr>
+                        <a:t>23%</a:t>
+                      </a:r>
+                    </a:p>
+                  </a:txBody>
+                  <a:tcPr marL="9525" marR="9525" marT="9525" marB="0" anchor="ctr">
+                    <a:lnL w="6350" cap="flat" cmpd="sng" algn="ctr">
+                      <a:noFill/>
+                      <a:prstDash val="solid"/>
+                      <a:round/>
+                      <a:headEnd type="none" w="med" len="med"/>
+                      <a:tailEnd type="none" w="med" len="med"/>
+                    </a:lnL>
+                    <a:lnR w="6350" cap="flat" cmpd="sng" algn="ctr">
+                      <a:solidFill>
+                        <a:schemeClr val="bg2">
+                          <a:lumMod val="75000"/>
+                        </a:schemeClr>
+                      </a:solidFill>
+                      <a:prstDash val="solid"/>
+                      <a:round/>
+                      <a:headEnd type="none" w="med" len="med"/>
+                      <a:tailEnd type="none" w="med" len="med"/>
+                    </a:lnR>
+                    <a:lnT w="6350" cap="flat" cmpd="sng" algn="ctr">
+                      <a:solidFill>
+                        <a:schemeClr val="bg2">
+                          <a:lumMod val="75000"/>
+                        </a:schemeClr>
+                      </a:solidFill>
+                      <a:prstDash val="solid"/>
+                      <a:round/>
+                      <a:headEnd type="none" w="med" len="med"/>
+                      <a:tailEnd type="none" w="med" len="med"/>
+                    </a:lnT>
+                    <a:lnB w="6350" cap="flat" cmpd="sng" algn="ctr">
+                      <a:solidFill>
+                        <a:schemeClr val="bg2">
+                          <a:lumMod val="75000"/>
+                        </a:schemeClr>
+                      </a:solidFill>
+                      <a:prstDash val="solid"/>
+                      <a:round/>
+                      <a:headEnd type="none" w="med" len="med"/>
+                      <a:tailEnd type="none" w="med" len="med"/>
+                    </a:lnB>
+                  </a:tcPr>
+                </a:tc>
+                <a:tc>
+                  <a:txBody>
+                    <a:bodyPr/>
+                    <a:lstStyle/>
+                    <a:p>
+                      <a:pPr algn="r" rtl="0" fontAlgn="ctr"/>
+                      <a:r>
+                        <a:rPr lang="en-US" altLang="ko-KR" sz="700" b="0" i="0" u="none" strike="noStrike" kern="1200">
+                          <a:solidFill>
+                            <a:srgbClr val="000000"/>
+                          </a:solidFill>
+                          <a:effectLst/>
+                          <a:latin typeface="대명체 보통" panose="020B0600000101010101" pitchFamily="50" charset="-127"/>
+                          <a:ea typeface="대명체 보통" panose="020B0600000101010101" pitchFamily="50" charset="-127"/>
+                          <a:cs typeface="+mn-cs"/>
+                        </a:rPr>
+                        <a:t>7,248</a:t>
+                      </a:r>
+                    </a:p>
+                  </a:txBody>
+                  <a:tcPr marL="9525" marR="9525" marT="9525" marB="0" anchor="ctr">
+                    <a:lnL w="6350" cap="flat" cmpd="sng" algn="ctr">
+                      <a:solidFill>
+                        <a:schemeClr val="bg2">
+                          <a:lumMod val="75000"/>
+                        </a:schemeClr>
+                      </a:solidFill>
+                      <a:prstDash val="solid"/>
+                      <a:round/>
+                      <a:headEnd type="none" w="med" len="med"/>
+                      <a:tailEnd type="none" w="med" len="med"/>
+                    </a:lnL>
+                    <a:lnR w="6350" cap="flat" cmpd="sng" algn="ctr">
+                      <a:solidFill>
+                        <a:schemeClr val="bg2">
+                          <a:lumMod val="75000"/>
+                        </a:schemeClr>
+                      </a:solidFill>
+                      <a:prstDash val="solid"/>
+                      <a:round/>
+                      <a:headEnd type="none" w="med" len="med"/>
+                      <a:tailEnd type="none" w="med" len="med"/>
+                    </a:lnR>
+                    <a:lnT w="6350" cap="flat" cmpd="sng" algn="ctr">
+                      <a:solidFill>
+                        <a:schemeClr val="bg2">
+                          <a:lumMod val="75000"/>
+                        </a:schemeClr>
+                      </a:solidFill>
+                      <a:prstDash val="solid"/>
+                      <a:round/>
+                      <a:headEnd type="none" w="med" len="med"/>
+                      <a:tailEnd type="none" w="med" len="med"/>
+                    </a:lnT>
+                    <a:lnB w="6350" cap="flat" cmpd="sng" algn="ctr">
+                      <a:solidFill>
+                        <a:schemeClr val="bg2">
+                          <a:lumMod val="75000"/>
+                        </a:schemeClr>
+                      </a:solidFill>
+                      <a:prstDash val="solid"/>
+                      <a:round/>
+                      <a:headEnd type="none" w="med" len="med"/>
+                      <a:tailEnd type="none" w="med" len="med"/>
+                    </a:lnB>
+                  </a:tcPr>
+                </a:tc>
+                <a:tc>
+                  <a:txBody>
+                    <a:bodyPr/>
+                    <a:lstStyle/>
+                    <a:p>
+                      <a:pPr algn="r" rtl="0" fontAlgn="ctr"/>
+                      <a:r>
+                        <a:rPr lang="en-US" altLang="ko-KR" sz="700" b="0" i="0" u="none" strike="noStrike" kern="1200">
+                          <a:solidFill>
+                            <a:srgbClr val="000000"/>
+                          </a:solidFill>
+                          <a:effectLst/>
+                          <a:latin typeface="대명체 보통" panose="020B0600000101010101" pitchFamily="50" charset="-127"/>
+                          <a:ea typeface="대명체 보통" panose="020B0600000101010101" pitchFamily="50" charset="-127"/>
+                          <a:cs typeface="+mn-cs"/>
+                        </a:rPr>
+                        <a:t>83%</a:t>
+                      </a:r>
+                    </a:p>
+                  </a:txBody>
+                  <a:tcPr marL="9525" marR="9525" marT="9525" marB="0" anchor="ctr">
+                    <a:lnL w="6350" cap="flat" cmpd="sng" algn="ctr">
+                      <a:solidFill>
+                        <a:schemeClr val="bg2">
+                          <a:lumMod val="75000"/>
+                        </a:schemeClr>
+                      </a:solidFill>
+                      <a:prstDash val="solid"/>
+                      <a:round/>
+                      <a:headEnd type="none" w="med" len="med"/>
+                      <a:tailEnd type="none" w="med" len="med"/>
+                    </a:lnL>
+                    <a:lnR w="6350" cap="flat" cmpd="sng" algn="ctr">
+                      <a:noFill/>
+                      <a:prstDash val="solid"/>
+                      <a:round/>
+                      <a:headEnd type="none" w="med" len="med"/>
+                      <a:tailEnd type="none" w="med" len="med"/>
+                    </a:lnR>
+                    <a:lnT w="6350" cap="flat" cmpd="sng" algn="ctr">
+                      <a:solidFill>
+                        <a:schemeClr val="bg2">
+                          <a:lumMod val="75000"/>
+                        </a:schemeClr>
+                      </a:solidFill>
+                      <a:prstDash val="solid"/>
+                      <a:round/>
+                      <a:headEnd type="none" w="med" len="med"/>
+                      <a:tailEnd type="none" w="med" len="med"/>
+                    </a:lnT>
+                    <a:lnB w="6350" cap="flat" cmpd="sng" algn="ctr">
+                      <a:solidFill>
+                        <a:schemeClr val="bg2">
+                          <a:lumMod val="75000"/>
+                        </a:schemeClr>
+                      </a:solidFill>
+                      <a:prstDash val="solid"/>
+                      <a:round/>
+                      <a:headEnd type="none" w="med" len="med"/>
+                      <a:tailEnd type="none" w="med" len="med"/>
+                    </a:lnB>
+                  </a:tcPr>
+                </a:tc>
+                <a:tc>
+                  <a:txBody>
+                    <a:bodyPr/>
+                    <a:lstStyle/>
+                    <a:p>
+                      <a:pPr algn="r" fontAlgn="ctr"/>
+                      <a:endParaRPr lang="ko-KR" altLang="en-US" sz="700" b="0" i="0" u="none" strike="noStrike" kern="1200">
+                        <a:solidFill>
+                          <a:srgbClr val="000000"/>
+                        </a:solidFill>
+                        <a:effectLst/>
+                        <a:latin typeface="대명체 보통" panose="020B0600000101010101" pitchFamily="50" charset="-127"/>
+                        <a:ea typeface="대명체 보통" panose="020B0600000101010101" pitchFamily="50" charset="-127"/>
+                        <a:cs typeface="+mn-cs"/>
+                      </a:endParaRPr>
+                    </a:p>
+                  </a:txBody>
+                  <a:tcPr marL="9525" marR="9525" marT="9525" marB="0" anchor="ctr">
+                    <a:lnL w="6350" cap="flat" cmpd="sng" algn="ctr">
+                      <a:noFill/>
+                      <a:prstDash val="solid"/>
+                      <a:round/>
+                      <a:headEnd type="none" w="med" len="med"/>
+                      <a:tailEnd type="none" w="med" len="med"/>
+                    </a:lnL>
+                    <a:lnR w="6350" cap="flat" cmpd="sng" algn="ctr">
+                      <a:noFill/>
+                      <a:prstDash val="solid"/>
+                      <a:round/>
+                      <a:headEnd type="none" w="med" len="med"/>
+                      <a:tailEnd type="none" w="med" len="med"/>
+                    </a:lnR>
+                    <a:lnT w="6350" cap="flat" cmpd="sng" algn="ctr">
+                      <a:noFill/>
+                      <a:prstDash val="solid"/>
+                      <a:round/>
+                      <a:headEnd type="none" w="med" len="med"/>
+                      <a:tailEnd type="none" w="med" len="med"/>
+                    </a:lnT>
+                    <a:lnB w="6350" cap="flat" cmpd="sng" algn="ctr">
+                      <a:noFill/>
+                      <a:prstDash val="solid"/>
+                      <a:round/>
+                      <a:headEnd type="none" w="med" len="med"/>
+                      <a:tailEnd type="none" w="med" len="med"/>
+                    </a:lnB>
+                    <a:lnTlToBr w="12700" cmpd="sng">
+                      <a:noFill/>
+                      <a:prstDash val="solid"/>
+                    </a:lnTlToBr>
+                    <a:lnBlToTr w="12700" cmpd="sng">
+                      <a:noFill/>
+                      <a:prstDash val="solid"/>
+                    </a:lnBlToTr>
+                  </a:tcPr>
+                </a:tc>
+                <a:tc>
+                  <a:txBody>
+                    <a:bodyPr/>
+                    <a:lstStyle/>
+                    <a:p>
+                      <a:pPr algn="r" rtl="0" fontAlgn="ctr"/>
+                      <a:r>
+                        <a:rPr lang="en-US" altLang="ko-KR" sz="700" b="0" i="0" u="none" strike="noStrike" kern="1200">
+                          <a:solidFill>
+                            <a:srgbClr val="000000"/>
+                          </a:solidFill>
+                          <a:effectLst/>
+                          <a:latin typeface="대명체 보통" panose="020B0600000101010101" pitchFamily="50" charset="-127"/>
+                          <a:ea typeface="대명체 보통" panose="020B0600000101010101" pitchFamily="50" charset="-127"/>
+                          <a:cs typeface="+mn-cs"/>
+                        </a:rPr>
+                        <a:t>139,028</a:t>
+                      </a:r>
+                    </a:p>
+                  </a:txBody>
+                  <a:tcPr marL="9525" marR="9525" marT="9525" marB="0" anchor="ctr">
+                    <a:lnL w="6350" cap="flat" cmpd="sng" algn="ctr">
+                      <a:noFill/>
+                      <a:prstDash val="solid"/>
+                      <a:round/>
+                      <a:headEnd type="none" w="med" len="med"/>
+                      <a:tailEnd type="none" w="med" len="med"/>
+                    </a:lnL>
+                    <a:lnR w="6350" cap="flat" cmpd="sng" algn="ctr">
+                      <a:noFill/>
+                      <a:prstDash val="solid"/>
+                      <a:round/>
+                      <a:headEnd type="none" w="med" len="med"/>
+                      <a:tailEnd type="none" w="med" len="med"/>
+                    </a:lnR>
+                    <a:lnT w="6350" cap="flat" cmpd="sng" algn="ctr">
+                      <a:solidFill>
+                        <a:schemeClr val="bg2">
+                          <a:lumMod val="75000"/>
+                        </a:schemeClr>
+                      </a:solidFill>
+                      <a:prstDash val="solid"/>
+                      <a:round/>
+                      <a:headEnd type="none" w="med" len="med"/>
+                      <a:tailEnd type="none" w="med" len="med"/>
+                    </a:lnT>
+                    <a:lnB w="6350" cap="flat" cmpd="sng" algn="ctr">
+                      <a:solidFill>
+                        <a:schemeClr val="bg2">
+                          <a:lumMod val="75000"/>
+                        </a:schemeClr>
+                      </a:solidFill>
+                      <a:prstDash val="solid"/>
+                      <a:round/>
+                      <a:headEnd type="none" w="med" len="med"/>
+                      <a:tailEnd type="none" w="med" len="med"/>
+                    </a:lnB>
+                  </a:tcPr>
+                </a:tc>
+                <a:tc>
+                  <a:txBody>
+                    <a:bodyPr/>
+                    <a:lstStyle/>
+                    <a:p>
+                      <a:pPr algn="r" rtl="0" fontAlgn="ctr"/>
+                      <a:r>
+                        <a:rPr lang="en-US" altLang="ko-KR" sz="700" b="0" i="0" u="none" strike="noStrike" kern="1200">
+                          <a:solidFill>
+                            <a:srgbClr val="000000"/>
+                          </a:solidFill>
+                          <a:effectLst/>
+                          <a:latin typeface="대명체 보통" panose="020B0600000101010101" pitchFamily="50" charset="-127"/>
+                          <a:ea typeface="대명체 보통" panose="020B0600000101010101" pitchFamily="50" charset="-127"/>
+                          <a:cs typeface="+mn-cs"/>
+                        </a:rPr>
+                        <a:t>26%</a:t>
+                      </a:r>
+                    </a:p>
+                  </a:txBody>
+                  <a:tcPr marL="9525" marR="9525" marT="9525" marB="0" anchor="ctr">
+                    <a:lnL w="6350" cap="flat" cmpd="sng" algn="ctr">
+                      <a:noFill/>
+                      <a:prstDash val="solid"/>
+                      <a:round/>
+                      <a:headEnd type="none" w="med" len="med"/>
+                      <a:tailEnd type="none" w="med" len="med"/>
+                    </a:lnL>
+                    <a:lnR w="6350" cap="flat" cmpd="sng" algn="ctr">
+                      <a:solidFill>
+                        <a:schemeClr val="bg2">
+                          <a:lumMod val="75000"/>
+                        </a:schemeClr>
+                      </a:solidFill>
+                      <a:prstDash val="solid"/>
+                      <a:round/>
+                      <a:headEnd type="none" w="med" len="med"/>
+                      <a:tailEnd type="none" w="med" len="med"/>
+                    </a:lnR>
+                    <a:lnT w="6350" cap="flat" cmpd="sng" algn="ctr">
+                      <a:solidFill>
+                        <a:schemeClr val="bg2">
+                          <a:lumMod val="75000"/>
+                        </a:schemeClr>
+                      </a:solidFill>
+                      <a:prstDash val="solid"/>
+                      <a:round/>
+                      <a:headEnd type="none" w="med" len="med"/>
+                      <a:tailEnd type="none" w="med" len="med"/>
+                    </a:lnT>
+                    <a:lnB w="6350" cap="flat" cmpd="sng" algn="ctr">
+                      <a:solidFill>
+                        <a:schemeClr val="bg2">
+                          <a:lumMod val="75000"/>
+                        </a:schemeClr>
+                      </a:solidFill>
+                      <a:prstDash val="solid"/>
+                      <a:round/>
+                      <a:headEnd type="none" w="med" len="med"/>
+                      <a:tailEnd type="none" w="med" len="med"/>
+                    </a:lnB>
+                  </a:tcPr>
+                </a:tc>
+                <a:tc>
+                  <a:txBody>
+                    <a:bodyPr/>
+                    <a:lstStyle/>
+                    <a:p>
+                      <a:pPr algn="r" rtl="0" fontAlgn="ctr"/>
+                      <a:r>
+                        <a:rPr lang="en-US" altLang="ko-KR" sz="700" b="0" i="0" u="none" strike="noStrike" kern="1200">
+                          <a:solidFill>
+                            <a:srgbClr val="000000"/>
+                          </a:solidFill>
+                          <a:effectLst/>
+                          <a:latin typeface="대명체 보통" panose="020B0600000101010101" pitchFamily="50" charset="-127"/>
+                          <a:ea typeface="대명체 보통" panose="020B0600000101010101" pitchFamily="50" charset="-127"/>
+                          <a:cs typeface="+mn-cs"/>
+                        </a:rPr>
+                        <a:t>160,580</a:t>
+                      </a:r>
+                    </a:p>
+                  </a:txBody>
+                  <a:tcPr marL="9525" marR="9525" marT="9525" marB="0" anchor="ctr">
+                    <a:lnL w="6350" cap="flat" cmpd="sng" algn="ctr">
+                      <a:solidFill>
+                        <a:schemeClr val="bg2">
+                          <a:lumMod val="75000"/>
+                        </a:schemeClr>
+                      </a:solidFill>
+                      <a:prstDash val="solid"/>
+                      <a:round/>
+                      <a:headEnd type="none" w="med" len="med"/>
+                      <a:tailEnd type="none" w="med" len="med"/>
+                    </a:lnL>
+                    <a:lnR w="6350" cap="flat" cmpd="sng" algn="ctr">
+                      <a:noFill/>
+                      <a:prstDash val="solid"/>
+                      <a:round/>
+                      <a:headEnd type="none" w="med" len="med"/>
+                      <a:tailEnd type="none" w="med" len="med"/>
+                    </a:lnR>
+                    <a:lnT w="6350" cap="flat" cmpd="sng" algn="ctr">
+                      <a:solidFill>
+                        <a:schemeClr val="bg2">
+                          <a:lumMod val="75000"/>
+                        </a:schemeClr>
+                      </a:solidFill>
+                      <a:prstDash val="solid"/>
+                      <a:round/>
+                      <a:headEnd type="none" w="med" len="med"/>
+                      <a:tailEnd type="none" w="med" len="med"/>
+                    </a:lnT>
+                    <a:lnB w="6350" cap="flat" cmpd="sng" algn="ctr">
+                      <a:solidFill>
+                        <a:schemeClr val="bg2">
+                          <a:lumMod val="75000"/>
+                        </a:schemeClr>
+                      </a:solidFill>
+                      <a:prstDash val="solid"/>
+                      <a:round/>
+                      <a:headEnd type="none" w="med" len="med"/>
+                      <a:tailEnd type="none" w="med" len="med"/>
+                    </a:lnB>
+                  </a:tcPr>
+                </a:tc>
+                <a:tc>
+                  <a:txBody>
+                    <a:bodyPr/>
+                    <a:lstStyle/>
+                    <a:p>
+                      <a:pPr algn="r" rtl="0" fontAlgn="ctr"/>
+                      <a:r>
+                        <a:rPr lang="en-US" altLang="ko-KR" sz="700" b="0" i="0" u="none" strike="noStrike" kern="1200">
+                          <a:solidFill>
+                            <a:srgbClr val="000000"/>
+                          </a:solidFill>
+                          <a:effectLst/>
+                          <a:latin typeface="대명체 보통" panose="020B0600000101010101" pitchFamily="50" charset="-127"/>
+                          <a:ea typeface="대명체 보통" panose="020B0600000101010101" pitchFamily="50" charset="-127"/>
+                          <a:cs typeface="+mn-cs"/>
+                        </a:rPr>
+                        <a:t>40%</a:t>
+                      </a:r>
+                    </a:p>
+                  </a:txBody>
+                  <a:tcPr marL="9525" marR="9525" marT="9525" marB="0" anchor="ctr">
+                    <a:lnL w="6350" cap="flat" cmpd="sng" algn="ctr">
+                      <a:noFill/>
+                      <a:prstDash val="solid"/>
+                      <a:round/>
+                      <a:headEnd type="none" w="med" len="med"/>
+                      <a:tailEnd type="none" w="med" len="med"/>
+                    </a:lnL>
+                    <a:lnR w="6350" cap="flat" cmpd="sng" algn="ctr">
+                      <a:solidFill>
+                        <a:schemeClr val="bg2">
+                          <a:lumMod val="75000"/>
+                        </a:schemeClr>
+                      </a:solidFill>
+                      <a:prstDash val="solid"/>
+                      <a:round/>
+                      <a:headEnd type="none" w="med" len="med"/>
+                      <a:tailEnd type="none" w="med" len="med"/>
+                    </a:lnR>
+                    <a:lnT w="6350" cap="flat" cmpd="sng" algn="ctr">
+                      <a:solidFill>
+                        <a:schemeClr val="bg2">
+                          <a:lumMod val="75000"/>
+                        </a:schemeClr>
+                      </a:solidFill>
+                      <a:prstDash val="solid"/>
+                      <a:round/>
+                      <a:headEnd type="none" w="med" len="med"/>
+                      <a:tailEnd type="none" w="med" len="med"/>
+                    </a:lnT>
+                    <a:lnB w="6350" cap="flat" cmpd="sng" algn="ctr">
+                      <a:solidFill>
+                        <a:schemeClr val="bg2">
+                          <a:lumMod val="75000"/>
+                        </a:schemeClr>
+                      </a:solidFill>
+                      <a:prstDash val="solid"/>
+                      <a:round/>
+                      <a:headEnd type="none" w="med" len="med"/>
+                      <a:tailEnd type="none" w="med" len="med"/>
+                    </a:lnB>
+                  </a:tcPr>
+                </a:tc>
+                <a:tc>
+                  <a:txBody>
+                    <a:bodyPr/>
+                    <a:lstStyle/>
+                    <a:p>
+                      <a:pPr algn="r" rtl="0" fontAlgn="ctr"/>
+                      <a:r>
+                        <a:rPr lang="en-US" altLang="ko-KR" sz="700" b="0" i="0" u="none" strike="noStrike" kern="1200">
+                          <a:solidFill>
+                            <a:srgbClr val="000000"/>
+                          </a:solidFill>
+                          <a:effectLst/>
+                          <a:latin typeface="대명체 보통" panose="020B0600000101010101" pitchFamily="50" charset="-127"/>
+                          <a:ea typeface="대명체 보통" panose="020B0600000101010101" pitchFamily="50" charset="-127"/>
+                          <a:cs typeface="+mn-cs"/>
+                        </a:rPr>
+                        <a:t>21,553</a:t>
                       </a:r>
                     </a:p>
                   </a:txBody>
@@ -13016,701 +13710,7 @@
                           <a:ea typeface="대명체 보통" panose="020B0600000101010101" pitchFamily="50" charset="-127"/>
                           <a:cs typeface="+mn-cs"/>
                         </a:rPr>
-                        <a:t>8,519</a:t>
-                      </a:r>
-                    </a:p>
-                  </a:txBody>
-                  <a:tcPr marL="9525" marR="9525" marT="9525" marB="0" anchor="ctr">
-                    <a:lnL w="6350" cap="flat" cmpd="sng" algn="ctr">
-                      <a:solidFill>
-                        <a:schemeClr val="bg2">
-                          <a:lumMod val="75000"/>
-                        </a:schemeClr>
-                      </a:solidFill>
-                      <a:prstDash val="solid"/>
-                      <a:round/>
-                      <a:headEnd type="none" w="med" len="med"/>
-                      <a:tailEnd type="none" w="med" len="med"/>
-                    </a:lnL>
-                    <a:lnR w="6350" cap="flat" cmpd="sng" algn="ctr">
-                      <a:noFill/>
-                      <a:prstDash val="solid"/>
-                      <a:round/>
-                      <a:headEnd type="none" w="med" len="med"/>
-                      <a:tailEnd type="none" w="med" len="med"/>
-                    </a:lnR>
-                    <a:lnT w="6350" cap="flat" cmpd="sng" algn="ctr">
-                      <a:solidFill>
-                        <a:schemeClr val="bg2">
-                          <a:lumMod val="75000"/>
-                        </a:schemeClr>
-                      </a:solidFill>
-                      <a:prstDash val="solid"/>
-                      <a:round/>
-                      <a:headEnd type="none" w="med" len="med"/>
-                      <a:tailEnd type="none" w="med" len="med"/>
-                    </a:lnT>
-                    <a:lnB w="6350" cap="flat" cmpd="sng" algn="ctr">
-                      <a:solidFill>
-                        <a:schemeClr val="bg2">
-                          <a:lumMod val="75000"/>
-                        </a:schemeClr>
-                      </a:solidFill>
-                      <a:prstDash val="solid"/>
-                      <a:round/>
-                      <a:headEnd type="none" w="med" len="med"/>
-                      <a:tailEnd type="none" w="med" len="med"/>
-                    </a:lnB>
-                  </a:tcPr>
-                </a:tc>
-                <a:tc>
-                  <a:txBody>
-                    <a:bodyPr/>
-                    <a:lstStyle/>
-                    <a:p>
-                      <a:pPr algn="r" rtl="0" fontAlgn="ctr"/>
-                      <a:r>
-                        <a:rPr lang="en-US" altLang="ko-KR" sz="700" b="0" i="0" u="none" strike="noStrike" kern="1200">
-                          <a:solidFill>
-                            <a:srgbClr val="000000"/>
-                          </a:solidFill>
-                          <a:effectLst/>
-                          <a:latin typeface="대명체 보통" panose="020B0600000101010101" pitchFamily="50" charset="-127"/>
-                          <a:ea typeface="대명체 보통" panose="020B0600000101010101" pitchFamily="50" charset="-127"/>
-                          <a:cs typeface="+mn-cs"/>
-                        </a:rPr>
-                        <a:t>23%</a:t>
-                      </a:r>
-                    </a:p>
-                  </a:txBody>
-                  <a:tcPr marL="9525" marR="9525" marT="9525" marB="0" anchor="ctr">
-                    <a:lnL w="6350" cap="flat" cmpd="sng" algn="ctr">
-                      <a:noFill/>
-                      <a:prstDash val="solid"/>
-                      <a:round/>
-                      <a:headEnd type="none" w="med" len="med"/>
-                      <a:tailEnd type="none" w="med" len="med"/>
-                    </a:lnL>
-                    <a:lnR w="6350" cap="flat" cmpd="sng" algn="ctr">
-                      <a:solidFill>
-                        <a:schemeClr val="bg2">
-                          <a:lumMod val="75000"/>
-                        </a:schemeClr>
-                      </a:solidFill>
-                      <a:prstDash val="solid"/>
-                      <a:round/>
-                      <a:headEnd type="none" w="med" len="med"/>
-                      <a:tailEnd type="none" w="med" len="med"/>
-                    </a:lnR>
-                    <a:lnT w="6350" cap="flat" cmpd="sng" algn="ctr">
-                      <a:solidFill>
-                        <a:schemeClr val="bg2">
-                          <a:lumMod val="75000"/>
-                        </a:schemeClr>
-                      </a:solidFill>
-                      <a:prstDash val="solid"/>
-                      <a:round/>
-                      <a:headEnd type="none" w="med" len="med"/>
-                      <a:tailEnd type="none" w="med" len="med"/>
-                    </a:lnT>
-                    <a:lnB w="6350" cap="flat" cmpd="sng" algn="ctr">
-                      <a:solidFill>
-                        <a:schemeClr val="bg2">
-                          <a:lumMod val="75000"/>
-                        </a:schemeClr>
-                      </a:solidFill>
-                      <a:prstDash val="solid"/>
-                      <a:round/>
-                      <a:headEnd type="none" w="med" len="med"/>
-                      <a:tailEnd type="none" w="med" len="med"/>
-                    </a:lnB>
-                  </a:tcPr>
-                </a:tc>
-                <a:tc>
-                  <a:txBody>
-                    <a:bodyPr/>
-                    <a:lstStyle/>
-                    <a:p>
-                      <a:pPr algn="r" rtl="0" fontAlgn="ctr"/>
-                      <a:r>
-                        <a:rPr lang="en-US" altLang="ko-KR" sz="700" b="0" i="0" u="none" strike="noStrike" kern="1200">
-                          <a:solidFill>
-                            <a:srgbClr val="000000"/>
-                          </a:solidFill>
-                          <a:effectLst/>
-                          <a:latin typeface="대명체 보통" panose="020B0600000101010101" pitchFamily="50" charset="-127"/>
-                          <a:ea typeface="대명체 보통" panose="020B0600000101010101" pitchFamily="50" charset="-127"/>
-                          <a:cs typeface="+mn-cs"/>
-                        </a:rPr>
-                        <a:t>7,829</a:t>
-                      </a:r>
-                    </a:p>
-                  </a:txBody>
-                  <a:tcPr marL="9525" marR="9525" marT="9525" marB="0" anchor="ctr">
-                    <a:lnL w="6350" cap="flat" cmpd="sng" algn="ctr">
-                      <a:solidFill>
-                        <a:schemeClr val="bg2">
-                          <a:lumMod val="75000"/>
-                        </a:schemeClr>
-                      </a:solidFill>
-                      <a:prstDash val="solid"/>
-                      <a:round/>
-                      <a:headEnd type="none" w="med" len="med"/>
-                      <a:tailEnd type="none" w="med" len="med"/>
-                    </a:lnL>
-                    <a:lnR w="6350" cap="flat" cmpd="sng" algn="ctr">
-                      <a:solidFill>
-                        <a:schemeClr val="bg2">
-                          <a:lumMod val="75000"/>
-                        </a:schemeClr>
-                      </a:solidFill>
-                      <a:prstDash val="solid"/>
-                      <a:round/>
-                      <a:headEnd type="none" w="med" len="med"/>
-                      <a:tailEnd type="none" w="med" len="med"/>
-                    </a:lnR>
-                    <a:lnT w="6350" cap="flat" cmpd="sng" algn="ctr">
-                      <a:solidFill>
-                        <a:schemeClr val="bg2">
-                          <a:lumMod val="75000"/>
-                        </a:schemeClr>
-                      </a:solidFill>
-                      <a:prstDash val="solid"/>
-                      <a:round/>
-                      <a:headEnd type="none" w="med" len="med"/>
-                      <a:tailEnd type="none" w="med" len="med"/>
-                    </a:lnT>
-                    <a:lnB w="6350" cap="flat" cmpd="sng" algn="ctr">
-                      <a:solidFill>
-                        <a:schemeClr val="bg2">
-                          <a:lumMod val="75000"/>
-                        </a:schemeClr>
-                      </a:solidFill>
-                      <a:prstDash val="solid"/>
-                      <a:round/>
-                      <a:headEnd type="none" w="med" len="med"/>
-                      <a:tailEnd type="none" w="med" len="med"/>
-                    </a:lnB>
-                  </a:tcPr>
-                </a:tc>
-                <a:tc>
-                  <a:txBody>
-                    <a:bodyPr/>
-                    <a:lstStyle/>
-                    <a:p>
-                      <a:pPr algn="r" rtl="0" fontAlgn="ctr"/>
-                      <a:r>
-                        <a:rPr lang="en-US" altLang="ko-KR" sz="700" b="0" i="0" u="none" strike="noStrike" kern="1200">
-                          <a:solidFill>
-                            <a:srgbClr val="000000"/>
-                          </a:solidFill>
-                          <a:effectLst/>
-                          <a:latin typeface="대명체 보통" panose="020B0600000101010101" pitchFamily="50" charset="-127"/>
-                          <a:ea typeface="대명체 보통" panose="020B0600000101010101" pitchFamily="50" charset="-127"/>
-                          <a:cs typeface="+mn-cs"/>
-                        </a:rPr>
-                        <a:t>92%</a:t>
-                      </a:r>
-                    </a:p>
-                  </a:txBody>
-                  <a:tcPr marL="9525" marR="9525" marT="9525" marB="0" anchor="ctr">
-                    <a:lnL w="6350" cap="flat" cmpd="sng" algn="ctr">
-                      <a:solidFill>
-                        <a:schemeClr val="bg2">
-                          <a:lumMod val="75000"/>
-                        </a:schemeClr>
-                      </a:solidFill>
-                      <a:prstDash val="solid"/>
-                      <a:round/>
-                      <a:headEnd type="none" w="med" len="med"/>
-                      <a:tailEnd type="none" w="med" len="med"/>
-                    </a:lnL>
-                    <a:lnR w="6350" cap="flat" cmpd="sng" algn="ctr">
-                      <a:noFill/>
-                      <a:prstDash val="solid"/>
-                      <a:round/>
-                      <a:headEnd type="none" w="med" len="med"/>
-                      <a:tailEnd type="none" w="med" len="med"/>
-                    </a:lnR>
-                    <a:lnT w="6350" cap="flat" cmpd="sng" algn="ctr">
-                      <a:solidFill>
-                        <a:schemeClr val="bg2">
-                          <a:lumMod val="75000"/>
-                        </a:schemeClr>
-                      </a:solidFill>
-                      <a:prstDash val="solid"/>
-                      <a:round/>
-                      <a:headEnd type="none" w="med" len="med"/>
-                      <a:tailEnd type="none" w="med" len="med"/>
-                    </a:lnT>
-                    <a:lnB w="6350" cap="flat" cmpd="sng" algn="ctr">
-                      <a:solidFill>
-                        <a:schemeClr val="bg2">
-                          <a:lumMod val="75000"/>
-                        </a:schemeClr>
-                      </a:solidFill>
-                      <a:prstDash val="solid"/>
-                      <a:round/>
-                      <a:headEnd type="none" w="med" len="med"/>
-                      <a:tailEnd type="none" w="med" len="med"/>
-                    </a:lnB>
-                  </a:tcPr>
-                </a:tc>
-                <a:tc>
-                  <a:txBody>
-                    <a:bodyPr/>
-                    <a:lstStyle/>
-                    <a:p>
-                      <a:pPr algn="r" fontAlgn="ctr"/>
-                      <a:endParaRPr lang="ko-KR" altLang="en-US" sz="700" b="0" i="0" u="none" strike="noStrike" kern="1200">
-                        <a:solidFill>
-                          <a:srgbClr val="000000"/>
-                        </a:solidFill>
-                        <a:effectLst/>
-                        <a:latin typeface="대명체 보통" panose="020B0600000101010101" pitchFamily="50" charset="-127"/>
-                        <a:ea typeface="대명체 보통" panose="020B0600000101010101" pitchFamily="50" charset="-127"/>
-                        <a:cs typeface="+mn-cs"/>
-                      </a:endParaRPr>
-                    </a:p>
-                  </a:txBody>
-                  <a:tcPr marL="9525" marR="9525" marT="9525" marB="0" anchor="ctr">
-                    <a:lnL w="6350" cap="flat" cmpd="sng" algn="ctr">
-                      <a:noFill/>
-                      <a:prstDash val="solid"/>
-                      <a:round/>
-                      <a:headEnd type="none" w="med" len="med"/>
-                      <a:tailEnd type="none" w="med" len="med"/>
-                    </a:lnL>
-                    <a:lnR w="6350" cap="flat" cmpd="sng" algn="ctr">
-                      <a:noFill/>
-                      <a:prstDash val="solid"/>
-                      <a:round/>
-                      <a:headEnd type="none" w="med" len="med"/>
-                      <a:tailEnd type="none" w="med" len="med"/>
-                    </a:lnR>
-                    <a:lnT w="6350" cap="flat" cmpd="sng" algn="ctr">
-                      <a:noFill/>
-                      <a:prstDash val="solid"/>
-                      <a:round/>
-                      <a:headEnd type="none" w="med" len="med"/>
-                      <a:tailEnd type="none" w="med" len="med"/>
-                    </a:lnT>
-                    <a:lnB w="6350" cap="flat" cmpd="sng" algn="ctr">
-                      <a:noFill/>
-                      <a:prstDash val="solid"/>
-                      <a:round/>
-                      <a:headEnd type="none" w="med" len="med"/>
-                      <a:tailEnd type="none" w="med" len="med"/>
-                    </a:lnB>
-                    <a:lnTlToBr w="12700" cmpd="sng">
-                      <a:noFill/>
-                      <a:prstDash val="solid"/>
-                    </a:lnTlToBr>
-                    <a:lnBlToTr w="12700" cmpd="sng">
-                      <a:noFill/>
-                      <a:prstDash val="solid"/>
-                    </a:lnBlToTr>
-                  </a:tcPr>
-                </a:tc>
-                <a:tc>
-                  <a:txBody>
-                    <a:bodyPr/>
-                    <a:lstStyle/>
-                    <a:p>
-                      <a:pPr algn="r" rtl="0" fontAlgn="ctr"/>
-                      <a:r>
-                        <a:rPr lang="en-US" altLang="ko-KR" sz="700" b="0" i="0" u="none" strike="noStrike" kern="1200">
-                          <a:solidFill>
-                            <a:srgbClr val="000000"/>
-                          </a:solidFill>
-                          <a:effectLst/>
-                          <a:latin typeface="대명체 보통" panose="020B0600000101010101" pitchFamily="50" charset="-127"/>
-                          <a:ea typeface="대명체 보통" panose="020B0600000101010101" pitchFamily="50" charset="-127"/>
-                          <a:cs typeface="+mn-cs"/>
-                        </a:rPr>
-                        <a:t>139,028</a:t>
-                      </a:r>
-                    </a:p>
-                  </a:txBody>
-                  <a:tcPr marL="9525" marR="9525" marT="9525" marB="0" anchor="ctr">
-                    <a:lnL w="6350" cap="flat" cmpd="sng" algn="ctr">
-                      <a:noFill/>
-                      <a:prstDash val="solid"/>
-                      <a:round/>
-                      <a:headEnd type="none" w="med" len="med"/>
-                      <a:tailEnd type="none" w="med" len="med"/>
-                    </a:lnL>
-                    <a:lnR w="6350" cap="flat" cmpd="sng" algn="ctr">
-                      <a:noFill/>
-                      <a:prstDash val="solid"/>
-                      <a:round/>
-                      <a:headEnd type="none" w="med" len="med"/>
-                      <a:tailEnd type="none" w="med" len="med"/>
-                    </a:lnR>
-                    <a:lnT w="6350" cap="flat" cmpd="sng" algn="ctr">
-                      <a:solidFill>
-                        <a:schemeClr val="bg2">
-                          <a:lumMod val="75000"/>
-                        </a:schemeClr>
-                      </a:solidFill>
-                      <a:prstDash val="solid"/>
-                      <a:round/>
-                      <a:headEnd type="none" w="med" len="med"/>
-                      <a:tailEnd type="none" w="med" len="med"/>
-                    </a:lnT>
-                    <a:lnB w="6350" cap="flat" cmpd="sng" algn="ctr">
-                      <a:solidFill>
-                        <a:schemeClr val="bg2">
-                          <a:lumMod val="75000"/>
-                        </a:schemeClr>
-                      </a:solidFill>
-                      <a:prstDash val="solid"/>
-                      <a:round/>
-                      <a:headEnd type="none" w="med" len="med"/>
-                      <a:tailEnd type="none" w="med" len="med"/>
-                    </a:lnB>
-                  </a:tcPr>
-                </a:tc>
-                <a:tc>
-                  <a:txBody>
-                    <a:bodyPr/>
-                    <a:lstStyle/>
-                    <a:p>
-                      <a:pPr algn="r" rtl="0" fontAlgn="ctr"/>
-                      <a:r>
-                        <a:rPr lang="en-US" altLang="ko-KR" sz="700" b="0" i="0" u="none" strike="noStrike" kern="1200">
-                          <a:solidFill>
-                            <a:srgbClr val="000000"/>
-                          </a:solidFill>
-                          <a:effectLst/>
-                          <a:latin typeface="대명체 보통" panose="020B0600000101010101" pitchFamily="50" charset="-127"/>
-                          <a:ea typeface="대명체 보통" panose="020B0600000101010101" pitchFamily="50" charset="-127"/>
-                          <a:cs typeface="+mn-cs"/>
-                        </a:rPr>
-                        <a:t>26%</a:t>
-                      </a:r>
-                    </a:p>
-                  </a:txBody>
-                  <a:tcPr marL="9525" marR="9525" marT="9525" marB="0" anchor="ctr">
-                    <a:lnL w="6350" cap="flat" cmpd="sng" algn="ctr">
-                      <a:noFill/>
-                      <a:prstDash val="solid"/>
-                      <a:round/>
-                      <a:headEnd type="none" w="med" len="med"/>
-                      <a:tailEnd type="none" w="med" len="med"/>
-                    </a:lnL>
-                    <a:lnR w="6350" cap="flat" cmpd="sng" algn="ctr">
-                      <a:solidFill>
-                        <a:schemeClr val="bg2">
-                          <a:lumMod val="75000"/>
-                        </a:schemeClr>
-                      </a:solidFill>
-                      <a:prstDash val="solid"/>
-                      <a:round/>
-                      <a:headEnd type="none" w="med" len="med"/>
-                      <a:tailEnd type="none" w="med" len="med"/>
-                    </a:lnR>
-                    <a:lnT w="6350" cap="flat" cmpd="sng" algn="ctr">
-                      <a:solidFill>
-                        <a:schemeClr val="bg2">
-                          <a:lumMod val="75000"/>
-                        </a:schemeClr>
-                      </a:solidFill>
-                      <a:prstDash val="solid"/>
-                      <a:round/>
-                      <a:headEnd type="none" w="med" len="med"/>
-                      <a:tailEnd type="none" w="med" len="med"/>
-                    </a:lnT>
-                    <a:lnB w="6350" cap="flat" cmpd="sng" algn="ctr">
-                      <a:solidFill>
-                        <a:schemeClr val="bg2">
-                          <a:lumMod val="75000"/>
-                        </a:schemeClr>
-                      </a:solidFill>
-                      <a:prstDash val="solid"/>
-                      <a:round/>
-                      <a:headEnd type="none" w="med" len="med"/>
-                      <a:tailEnd type="none" w="med" len="med"/>
-                    </a:lnB>
-                  </a:tcPr>
-                </a:tc>
-                <a:tc>
-                  <a:txBody>
-                    <a:bodyPr/>
-                    <a:lstStyle/>
-                    <a:p>
-                      <a:pPr algn="r" rtl="0" fontAlgn="ctr"/>
-                      <a:r>
-                        <a:rPr lang="en-US" altLang="ko-KR" sz="700" b="0" i="0" u="none" strike="noStrike" kern="1200">
-                          <a:solidFill>
-                            <a:srgbClr val="000000"/>
-                          </a:solidFill>
-                          <a:effectLst/>
-                          <a:latin typeface="대명체 보통" panose="020B0600000101010101" pitchFamily="50" charset="-127"/>
-                          <a:ea typeface="대명체 보통" panose="020B0600000101010101" pitchFamily="50" charset="-127"/>
-                          <a:cs typeface="+mn-cs"/>
-                        </a:rPr>
-                        <a:t>160,924</a:t>
-                      </a:r>
-                    </a:p>
-                  </a:txBody>
-                  <a:tcPr marL="9525" marR="9525" marT="9525" marB="0" anchor="ctr">
-                    <a:lnL w="6350" cap="flat" cmpd="sng" algn="ctr">
-                      <a:solidFill>
-                        <a:schemeClr val="bg2">
-                          <a:lumMod val="75000"/>
-                        </a:schemeClr>
-                      </a:solidFill>
-                      <a:prstDash val="solid"/>
-                      <a:round/>
-                      <a:headEnd type="none" w="med" len="med"/>
-                      <a:tailEnd type="none" w="med" len="med"/>
-                    </a:lnL>
-                    <a:lnR w="6350" cap="flat" cmpd="sng" algn="ctr">
-                      <a:noFill/>
-                      <a:prstDash val="solid"/>
-                      <a:round/>
-                      <a:headEnd type="none" w="med" len="med"/>
-                      <a:tailEnd type="none" w="med" len="med"/>
-                    </a:lnR>
-                    <a:lnT w="6350" cap="flat" cmpd="sng" algn="ctr">
-                      <a:solidFill>
-                        <a:schemeClr val="bg2">
-                          <a:lumMod val="75000"/>
-                        </a:schemeClr>
-                      </a:solidFill>
-                      <a:prstDash val="solid"/>
-                      <a:round/>
-                      <a:headEnd type="none" w="med" len="med"/>
-                      <a:tailEnd type="none" w="med" len="med"/>
-                    </a:lnT>
-                    <a:lnB w="6350" cap="flat" cmpd="sng" algn="ctr">
-                      <a:solidFill>
-                        <a:schemeClr val="bg2">
-                          <a:lumMod val="75000"/>
-                        </a:schemeClr>
-                      </a:solidFill>
-                      <a:prstDash val="solid"/>
-                      <a:round/>
-                      <a:headEnd type="none" w="med" len="med"/>
-                      <a:tailEnd type="none" w="med" len="med"/>
-                    </a:lnB>
-                  </a:tcPr>
-                </a:tc>
-                <a:tc>
-                  <a:txBody>
-                    <a:bodyPr/>
-                    <a:lstStyle/>
-                    <a:p>
-                      <a:pPr algn="r" rtl="0" fontAlgn="ctr"/>
-                      <a:r>
-                        <a:rPr lang="en-US" altLang="ko-KR" sz="700" b="0" i="0" u="none" strike="noStrike" kern="1200">
-                          <a:solidFill>
-                            <a:srgbClr val="000000"/>
-                          </a:solidFill>
-                          <a:effectLst/>
-                          <a:latin typeface="대명체 보통" panose="020B0600000101010101" pitchFamily="50" charset="-127"/>
-                          <a:ea typeface="대명체 보통" panose="020B0600000101010101" pitchFamily="50" charset="-127"/>
-                          <a:cs typeface="+mn-cs"/>
-                        </a:rPr>
-                        <a:t>40%</a:t>
-                      </a:r>
-                    </a:p>
-                  </a:txBody>
-                  <a:tcPr marL="9525" marR="9525" marT="9525" marB="0" anchor="ctr">
-                    <a:lnL w="6350" cap="flat" cmpd="sng" algn="ctr">
-                      <a:noFill/>
-                      <a:prstDash val="solid"/>
-                      <a:round/>
-                      <a:headEnd type="none" w="med" len="med"/>
-                      <a:tailEnd type="none" w="med" len="med"/>
-                    </a:lnL>
-                    <a:lnR w="6350" cap="flat" cmpd="sng" algn="ctr">
-                      <a:solidFill>
-                        <a:schemeClr val="bg2">
-                          <a:lumMod val="75000"/>
-                        </a:schemeClr>
-                      </a:solidFill>
-                      <a:prstDash val="solid"/>
-                      <a:round/>
-                      <a:headEnd type="none" w="med" len="med"/>
-                      <a:tailEnd type="none" w="med" len="med"/>
-                    </a:lnR>
-                    <a:lnT w="6350" cap="flat" cmpd="sng" algn="ctr">
-                      <a:solidFill>
-                        <a:schemeClr val="bg2">
-                          <a:lumMod val="75000"/>
-                        </a:schemeClr>
-                      </a:solidFill>
-                      <a:prstDash val="solid"/>
-                      <a:round/>
-                      <a:headEnd type="none" w="med" len="med"/>
-                      <a:tailEnd type="none" w="med" len="med"/>
-                    </a:lnT>
-                    <a:lnB w="6350" cap="flat" cmpd="sng" algn="ctr">
-                      <a:solidFill>
-                        <a:schemeClr val="bg2">
-                          <a:lumMod val="75000"/>
-                        </a:schemeClr>
-                      </a:solidFill>
-                      <a:prstDash val="solid"/>
-                      <a:round/>
-                      <a:headEnd type="none" w="med" len="med"/>
-                      <a:tailEnd type="none" w="med" len="med"/>
-                    </a:lnB>
-                  </a:tcPr>
-                </a:tc>
-                <a:tc>
-                  <a:txBody>
-                    <a:bodyPr/>
-                    <a:lstStyle/>
-                    <a:p>
-                      <a:pPr algn="r" rtl="0" fontAlgn="ctr"/>
-                      <a:r>
-                        <a:rPr lang="en-US" altLang="ko-KR" sz="700" b="0" i="0" u="none" strike="noStrike" kern="1200">
-                          <a:solidFill>
-                            <a:srgbClr val="000000"/>
-                          </a:solidFill>
-                          <a:effectLst/>
-                          <a:latin typeface="대명체 보통" panose="020B0600000101010101" pitchFamily="50" charset="-127"/>
-                          <a:ea typeface="대명체 보통" panose="020B0600000101010101" pitchFamily="50" charset="-127"/>
-                          <a:cs typeface="+mn-cs"/>
-                        </a:rPr>
-                        <a:t>21,896</a:t>
-                      </a:r>
-                    </a:p>
-                  </a:txBody>
-                  <a:tcPr marL="9525" marR="9525" marT="9525" marB="0" anchor="ctr">
-                    <a:lnL w="6350" cap="flat" cmpd="sng" algn="ctr">
-                      <a:solidFill>
-                        <a:schemeClr val="bg2">
-                          <a:lumMod val="75000"/>
-                        </a:schemeClr>
-                      </a:solidFill>
-                      <a:prstDash val="solid"/>
-                      <a:round/>
-                      <a:headEnd type="none" w="med" len="med"/>
-                      <a:tailEnd type="none" w="med" len="med"/>
-                    </a:lnL>
-                    <a:lnR w="6350" cap="flat" cmpd="sng" algn="ctr">
-                      <a:solidFill>
-                        <a:schemeClr val="bg2">
-                          <a:lumMod val="75000"/>
-                        </a:schemeClr>
-                      </a:solidFill>
-                      <a:prstDash val="solid"/>
-                      <a:round/>
-                      <a:headEnd type="none" w="med" len="med"/>
-                      <a:tailEnd type="none" w="med" len="med"/>
-                    </a:lnR>
-                    <a:lnT w="6350" cap="flat" cmpd="sng" algn="ctr">
-                      <a:solidFill>
-                        <a:schemeClr val="bg2">
-                          <a:lumMod val="75000"/>
-                        </a:schemeClr>
-                      </a:solidFill>
-                      <a:prstDash val="solid"/>
-                      <a:round/>
-                      <a:headEnd type="none" w="med" len="med"/>
-                      <a:tailEnd type="none" w="med" len="med"/>
-                    </a:lnT>
-                    <a:lnB w="6350" cap="flat" cmpd="sng" algn="ctr">
-                      <a:solidFill>
-                        <a:schemeClr val="bg2">
-                          <a:lumMod val="75000"/>
-                        </a:schemeClr>
-                      </a:solidFill>
-                      <a:prstDash val="solid"/>
-                      <a:round/>
-                      <a:headEnd type="none" w="med" len="med"/>
-                      <a:tailEnd type="none" w="med" len="med"/>
-                    </a:lnB>
-                  </a:tcPr>
-                </a:tc>
-                <a:tc>
-                  <a:txBody>
-                    <a:bodyPr/>
-                    <a:lstStyle/>
-                    <a:p>
-                      <a:pPr algn="r" rtl="0" fontAlgn="ctr"/>
-                      <a:r>
-                        <a:rPr lang="en-US" altLang="ko-KR" sz="700" b="0" i="0" u="none" strike="noStrike" kern="1200">
-                          <a:solidFill>
-                            <a:srgbClr val="000000"/>
-                          </a:solidFill>
-                          <a:effectLst/>
-                          <a:latin typeface="대명체 보통" panose="020B0600000101010101" pitchFamily="50" charset="-127"/>
-                          <a:ea typeface="대명체 보통" panose="020B0600000101010101" pitchFamily="50" charset="-127"/>
-                          <a:cs typeface="+mn-cs"/>
-                        </a:rPr>
-                        <a:t>116%</a:t>
-                      </a:r>
-                    </a:p>
-                  </a:txBody>
-                  <a:tcPr marL="9525" marR="9525" marT="9525" marB="0" anchor="ctr">
-                    <a:lnL w="6350" cap="flat" cmpd="sng" algn="ctr">
-                      <a:solidFill>
-                        <a:schemeClr val="bg2">
-                          <a:lumMod val="75000"/>
-                        </a:schemeClr>
-                      </a:solidFill>
-                      <a:prstDash val="solid"/>
-                      <a:round/>
-                      <a:headEnd type="none" w="med" len="med"/>
-                      <a:tailEnd type="none" w="med" len="med"/>
-                    </a:lnL>
-                    <a:lnR w="6350" cap="flat" cmpd="sng" algn="ctr">
-                      <a:solidFill>
-                        <a:schemeClr val="bg2">
-                          <a:lumMod val="75000"/>
-                        </a:schemeClr>
-                      </a:solidFill>
-                      <a:prstDash val="solid"/>
-                      <a:round/>
-                      <a:headEnd type="none" w="med" len="med"/>
-                      <a:tailEnd type="none" w="med" len="med"/>
-                    </a:lnR>
-                    <a:lnT w="6350" cap="flat" cmpd="sng" algn="ctr">
-                      <a:solidFill>
-                        <a:schemeClr val="bg2">
-                          <a:lumMod val="75000"/>
-                        </a:schemeClr>
-                      </a:solidFill>
-                      <a:prstDash val="solid"/>
-                      <a:round/>
-                      <a:headEnd type="none" w="med" len="med"/>
-                      <a:tailEnd type="none" w="med" len="med"/>
-                    </a:lnT>
-                    <a:lnB w="6350" cap="flat" cmpd="sng" algn="ctr">
-                      <a:solidFill>
-                        <a:schemeClr val="bg2">
-                          <a:lumMod val="75000"/>
-                        </a:schemeClr>
-                      </a:solidFill>
-                      <a:prstDash val="solid"/>
-                      <a:round/>
-                      <a:headEnd type="none" w="med" len="med"/>
-                      <a:tailEnd type="none" w="med" len="med"/>
-                    </a:lnB>
-                  </a:tcPr>
-                </a:tc>
-                <a:tc>
-                  <a:txBody>
-                    <a:bodyPr/>
-                    <a:lstStyle/>
-                    <a:p>
-                      <a:pPr algn="r" rtl="0" fontAlgn="ctr"/>
-                      <a:r>
-                        <a:rPr lang="en-US" altLang="ko-KR" sz="700" b="0" i="0" u="none" strike="noStrike" kern="1200">
-                          <a:solidFill>
-                            <a:srgbClr val="000000"/>
-                          </a:solidFill>
-                          <a:effectLst/>
-                          <a:latin typeface="대명체 보통" panose="020B0600000101010101" pitchFamily="50" charset="-127"/>
-                          <a:ea typeface="대명체 보통" panose="020B0600000101010101" pitchFamily="50" charset="-127"/>
-                          <a:cs typeface="+mn-cs"/>
-                        </a:rPr>
-                        <a:t>110,958</a:t>
+                        <a:t>111,194</a:t>
                       </a:r>
                     </a:p>
                   </a:txBody>
@@ -13836,7 +13836,7 @@
                           <a:ea typeface="대명체 보통" panose="020B0600000101010101" pitchFamily="50" charset="-127"/>
                           <a:cs typeface="+mn-cs"/>
                         </a:rPr>
-                        <a:t>49,966</a:t>
+                        <a:t>49,386</a:t>
                       </a:r>
                     </a:p>
                   </a:txBody>
@@ -13903,7 +13903,7 @@
                           <a:ea typeface="대명체 보통" panose="020B0600000101010101" pitchFamily="50" charset="-127"/>
                           <a:cs typeface="+mn-cs"/>
                         </a:rPr>
-                        <a:t>45%</a:t>
+                        <a:t>44%</a:t>
                       </a:r>
                     </a:p>
                   </a:txBody>
@@ -14237,7 +14237,7 @@
                           <a:ea typeface="대명체 보통" panose="020B0600000101010101" pitchFamily="50" charset="-127"/>
                           <a:cs typeface="+mn-cs"/>
                         </a:rPr>
-                        <a:t>8,198</a:t>
+                        <a:t>8,040</a:t>
                       </a:r>
                     </a:p>
                   </a:txBody>
@@ -14355,7 +14355,7 @@
                           <a:ea typeface="대명체 보통" panose="020B0600000101010101" pitchFamily="50" charset="-127"/>
                           <a:cs typeface="+mn-cs"/>
                         </a:rPr>
-                        <a:t>175</a:t>
+                        <a:t>17</a:t>
                       </a:r>
                       <a:endParaRPr lang="en-US" altLang="ko-KR" sz="700" b="0" i="0" u="none" strike="noStrike" kern="1200" dirty="0">
                         <a:solidFill>
@@ -14427,7 +14427,7 @@
                           <a:ea typeface="대명체 보통" panose="020B0600000101010101" pitchFamily="50" charset="-127"/>
                           <a:cs typeface="+mn-cs"/>
                         </a:rPr>
-                        <a:t>102%</a:t>
+                        <a:t>100%</a:t>
                       </a:r>
                     </a:p>
                   </a:txBody>
@@ -14490,7 +14490,7 @@
                           <a:ea typeface="대명체 보통" panose="020B0600000101010101" pitchFamily="50" charset="-127"/>
                           <a:cs typeface="+mn-cs"/>
                         </a:rPr>
-                        <a:t>4,824</a:t>
+                        <a:t>4,958</a:t>
                       </a:r>
                     </a:p>
                   </a:txBody>
@@ -14608,7 +14608,7 @@
                           <a:ea typeface="대명체 보통" panose="020B0600000101010101" pitchFamily="50" charset="-127"/>
                           <a:cs typeface="+mn-cs"/>
                         </a:rPr>
-                        <a:t>3,374</a:t>
+                        <a:t>3,082</a:t>
                       </a:r>
                     </a:p>
                   </a:txBody>
@@ -14671,7 +14671,7 @@
                           <a:ea typeface="대명체 보통" panose="020B0600000101010101" pitchFamily="50" charset="-127"/>
                           <a:cs typeface="+mn-cs"/>
                         </a:rPr>
-                        <a:t>70%</a:t>
+                        <a:t>62%</a:t>
                       </a:r>
                     </a:p>
                   </a:txBody>
@@ -14900,7 +14900,7 @@
                           <a:ea typeface="대명체 보통" panose="020B0600000101010101" pitchFamily="50" charset="-127"/>
                           <a:cs typeface="+mn-cs"/>
                         </a:rPr>
-                        <a:t>92,748</a:t>
+                        <a:t>92,589</a:t>
                       </a:r>
                     </a:p>
                   </a:txBody>
@@ -15018,7 +15018,7 @@
                           <a:ea typeface="대명체 보통" panose="020B0600000101010101" pitchFamily="50" charset="-127"/>
                           <a:cs typeface="+mn-cs"/>
                         </a:rPr>
-                        <a:t>12,374</a:t>
+                        <a:t>12,216</a:t>
                       </a:r>
                     </a:p>
                   </a:txBody>
@@ -15144,7 +15144,7 @@
                           <a:ea typeface="대명체 보통" panose="020B0600000101010101" pitchFamily="50" charset="-127"/>
                           <a:cs typeface="+mn-cs"/>
                         </a:rPr>
-                        <a:t>63,480</a:t>
+                        <a:t>63,614</a:t>
                       </a:r>
                     </a:p>
                   </a:txBody>
@@ -15262,7 +15262,7 @@
                           <a:ea typeface="대명체 보통" panose="020B0600000101010101" pitchFamily="50" charset="-127"/>
                           <a:cs typeface="+mn-cs"/>
                         </a:rPr>
-                        <a:t>29,268</a:t>
+                        <a:t>28,976</a:t>
                       </a:r>
                     </a:p>
                   </a:txBody>
@@ -15643,7 +15643,7 @@
                           <a:ea typeface="대명체 보통" panose="020B0600000101010101" pitchFamily="50" charset="-127"/>
                           <a:cs typeface="+mn-cs"/>
                         </a:rPr>
-                        <a:t>7,540</a:t>
+                        <a:t>7,359</a:t>
                       </a:r>
                     </a:p>
                   </a:txBody>
@@ -15753,7 +15753,7 @@
                           <a:ea typeface="대명체 보통" panose="020B0600000101010101" pitchFamily="50" charset="-127"/>
                           <a:cs typeface="+mn-cs"/>
                         </a:rPr>
-                        <a:t>1,859</a:t>
+                        <a:t>1,678</a:t>
                       </a:r>
                       <a:endParaRPr lang="en-US" altLang="ko-KR" sz="700" b="0" i="0" u="none" strike="noStrike" kern="1200" dirty="0">
                         <a:solidFill>
@@ -15821,7 +15821,7 @@
                           <a:ea typeface="대명체 보통" panose="020B0600000101010101" pitchFamily="50" charset="-127"/>
                           <a:cs typeface="+mn-cs"/>
                         </a:rPr>
-                        <a:t>133%</a:t>
+                        <a:t>130%</a:t>
                       </a:r>
                     </a:p>
                   </a:txBody>
@@ -15880,7 +15880,7 @@
                           <a:ea typeface="대명체 보통" panose="020B0600000101010101" pitchFamily="50" charset="-127"/>
                           <a:cs typeface="+mn-cs"/>
                         </a:rPr>
-                        <a:t>3,381</a:t>
+                        <a:t>3,476</a:t>
                       </a:r>
                     </a:p>
                   </a:txBody>
@@ -15990,7 +15990,7 @@
                           <a:ea typeface="대명체 보통" panose="020B0600000101010101" pitchFamily="50" charset="-127"/>
                           <a:cs typeface="+mn-cs"/>
                         </a:rPr>
-                        <a:t>4,159</a:t>
+                        <a:t>3,883</a:t>
                       </a:r>
                     </a:p>
                   </a:txBody>
@@ -16049,7 +16049,7 @@
                           <a:ea typeface="대명체 보통" panose="020B0600000101010101" pitchFamily="50" charset="-127"/>
                           <a:cs typeface="+mn-cs"/>
                         </a:rPr>
-                        <a:t>123%</a:t>
+                        <a:t>112%</a:t>
                       </a:r>
                     </a:p>
                   </a:txBody>
@@ -16266,7 +16266,7 @@
                           <a:ea typeface="대명체 보통" panose="020B0600000101010101" pitchFamily="50" charset="-127"/>
                           <a:cs typeface="+mn-cs"/>
                         </a:rPr>
-                        <a:t>62,382</a:t>
+                        <a:t>62,202</a:t>
                       </a:r>
                     </a:p>
                   </a:txBody>
@@ -16376,7 +16376,7 @@
                           <a:ea typeface="대명체 보통" panose="020B0600000101010101" pitchFamily="50" charset="-127"/>
                           <a:cs typeface="+mn-cs"/>
                         </a:rPr>
-                        <a:t>7,598</a:t>
+                        <a:t>7,417</a:t>
                       </a:r>
                     </a:p>
                   </a:txBody>
@@ -16494,7 +16494,7 @@
                           <a:ea typeface="대명체 보통" panose="020B0600000101010101" pitchFamily="50" charset="-127"/>
                           <a:cs typeface="+mn-cs"/>
                         </a:rPr>
-                        <a:t>43,936</a:t>
+                        <a:t>44,032</a:t>
                       </a:r>
                     </a:p>
                   </a:txBody>
@@ -16604,7 +16604,7 @@
                           <a:ea typeface="대명체 보통" panose="020B0600000101010101" pitchFamily="50" charset="-127"/>
                           <a:cs typeface="+mn-cs"/>
                         </a:rPr>
-                        <a:t>18,446</a:t>
+                        <a:t>18,170</a:t>
                       </a:r>
                     </a:p>
                   </a:txBody>
@@ -16663,7 +16663,7 @@
                           <a:ea typeface="대명체 보통" panose="020B0600000101010101" pitchFamily="50" charset="-127"/>
                           <a:cs typeface="+mn-cs"/>
                         </a:rPr>
-                        <a:t>42%</a:t>
+                        <a:t>41%</a:t>
                       </a:r>
                     </a:p>
                   </a:txBody>
@@ -16999,7 +16999,7 @@
                           <a:ea typeface="대명체 보통" panose="020B0600000101010101" pitchFamily="50" charset="-127"/>
                           <a:cs typeface="+mn-cs"/>
                         </a:rPr>
-                        <a:t>610</a:t>
+                        <a:t>605</a:t>
                       </a:r>
                       <a:endParaRPr lang="en-US" altLang="ko-KR" sz="700" b="0" i="0" u="none" strike="noStrike" kern="1200" dirty="0">
                         <a:solidFill>
@@ -17126,7 +17126,7 @@
                           <a:ea typeface="대명체 보통" panose="020B0600000101010101" pitchFamily="50" charset="-127"/>
                           <a:cs typeface="+mn-cs"/>
                         </a:rPr>
-                        <a:t>207</a:t>
+                        <a:t>203</a:t>
                       </a:r>
                       <a:endParaRPr lang="en-US" altLang="ko-KR" sz="700" b="0" i="0" u="none" strike="noStrike" kern="1200" dirty="0">
                         <a:solidFill>
@@ -17198,7 +17198,7 @@
                           <a:ea typeface="대명체 보통" panose="020B0600000101010101" pitchFamily="50" charset="-127"/>
                           <a:cs typeface="+mn-cs"/>
                         </a:rPr>
-                        <a:t>151%</a:t>
+                        <a:t>150%</a:t>
                       </a:r>
                     </a:p>
                   </a:txBody>
@@ -17261,7 +17261,7 @@
                           <a:ea typeface="대명체 보통" panose="020B0600000101010101" pitchFamily="50" charset="-127"/>
                           <a:cs typeface="+mn-cs"/>
                         </a:rPr>
-                        <a:t>315</a:t>
+                        <a:t>322</a:t>
                       </a:r>
                       <a:endParaRPr lang="en-US" altLang="ko-KR" sz="700" b="0" i="0" u="none" strike="noStrike" kern="1200" dirty="0">
                         <a:solidFill>
@@ -17388,7 +17388,7 @@
                           <a:ea typeface="대명체 보통" panose="020B0600000101010101" pitchFamily="50" charset="-127"/>
                           <a:cs typeface="+mn-cs"/>
                         </a:rPr>
-                        <a:t>295</a:t>
+                        <a:t>284</a:t>
                       </a:r>
                     </a:p>
                   </a:txBody>
@@ -17451,7 +17451,7 @@
                           <a:ea typeface="대명체 보통" panose="020B0600000101010101" pitchFamily="50" charset="-127"/>
                           <a:cs typeface="+mn-cs"/>
                         </a:rPr>
-                        <a:t>94%</a:t>
+                        <a:t>88%</a:t>
                       </a:r>
                     </a:p>
                   </a:txBody>
@@ -17680,7 +17680,7 @@
                           <a:ea typeface="대명체 보통" panose="020B0600000101010101" pitchFamily="50" charset="-127"/>
                           <a:cs typeface="+mn-cs"/>
                         </a:rPr>
-                        <a:t>5,794</a:t>
+                        <a:t>5,789</a:t>
                       </a:r>
                     </a:p>
                   </a:txBody>
@@ -17798,7 +17798,7 @@
                           <a:ea typeface="대명체 보통" panose="020B0600000101010101" pitchFamily="50" charset="-127"/>
                           <a:cs typeface="+mn-cs"/>
                         </a:rPr>
-                        <a:t>1,924</a:t>
+                        <a:t>1,919</a:t>
                       </a:r>
                       <a:endParaRPr lang="en-US" altLang="ko-KR" sz="700" b="0" i="0" u="none" strike="noStrike" kern="1200" dirty="0">
                         <a:solidFill>
@@ -17933,7 +17933,7 @@
                           <a:ea typeface="대명체 보통" panose="020B0600000101010101" pitchFamily="50" charset="-127"/>
                           <a:cs typeface="+mn-cs"/>
                         </a:rPr>
-                        <a:t>3,542</a:t>
+                        <a:t>3,549</a:t>
                       </a:r>
                     </a:p>
                   </a:txBody>
@@ -18051,7 +18051,7 @@
                           <a:ea typeface="대명체 보통" panose="020B0600000101010101" pitchFamily="50" charset="-127"/>
                           <a:cs typeface="+mn-cs"/>
                         </a:rPr>
-                        <a:t>2,252</a:t>
+                        <a:t>2,240</a:t>
                       </a:r>
                     </a:p>
                   </a:txBody>
@@ -18114,7 +18114,7 @@
                           <a:ea typeface="대명체 보통" panose="020B0600000101010101" pitchFamily="50" charset="-127"/>
                           <a:cs typeface="+mn-cs"/>
                         </a:rPr>
-                        <a:t>64%</a:t>
+                        <a:t>63%</a:t>
                       </a:r>
                     </a:p>
                   </a:txBody>

--- a/data/세일즈마케팅_예상매출현황.pptx
+++ b/data/세일즈마케팅_예상매출현황.pptx
@@ -12756,7 +12756,7 @@
                           <a:ea typeface="대명체 보통" panose="020B0600000101010101" pitchFamily="50" charset="-127"/>
                           <a:cs typeface="+mn-cs"/>
                         </a:rPr>
-                        <a:t>16,004</a:t>
+                        <a:t>15,927</a:t>
                       </a:r>
                     </a:p>
                   </a:txBody>
@@ -12882,7 +12882,7 @@
                           <a:ea typeface="대명체 보통" panose="020B0600000101010101" pitchFamily="50" charset="-127"/>
                           <a:cs typeface="+mn-cs"/>
                         </a:rPr>
-                        <a:t>1,898</a:t>
+                        <a:t>1,820</a:t>
                       </a:r>
                     </a:p>
                   </a:txBody>
@@ -13016,7 +13016,7 @@
                           <a:ea typeface="대명체 보통" panose="020B0600000101010101" pitchFamily="50" charset="-127"/>
                           <a:cs typeface="+mn-cs"/>
                         </a:rPr>
-                        <a:t>8,756</a:t>
+                        <a:t>8,943</a:t>
                       </a:r>
                     </a:p>
                   </a:txBody>
@@ -13142,7 +13142,7 @@
                           <a:ea typeface="대명체 보통" panose="020B0600000101010101" pitchFamily="50" charset="-127"/>
                           <a:cs typeface="+mn-cs"/>
                         </a:rPr>
-                        <a:t>7,248</a:t>
+                        <a:t>6,984</a:t>
                       </a:r>
                     </a:p>
                   </a:txBody>
@@ -13209,7 +13209,7 @@
                           <a:ea typeface="대명체 보통" panose="020B0600000101010101" pitchFamily="50" charset="-127"/>
                           <a:cs typeface="+mn-cs"/>
                         </a:rPr>
-                        <a:t>83%</a:t>
+                        <a:t>78%</a:t>
                       </a:r>
                     </a:p>
                   </a:txBody>
@@ -13450,7 +13450,7 @@
                           <a:ea typeface="대명체 보통" panose="020B0600000101010101" pitchFamily="50" charset="-127"/>
                           <a:cs typeface="+mn-cs"/>
                         </a:rPr>
-                        <a:t>160,580</a:t>
+                        <a:t>160,503</a:t>
                       </a:r>
                     </a:p>
                   </a:txBody>
@@ -13576,7 +13576,7 @@
                           <a:ea typeface="대명체 보통" panose="020B0600000101010101" pitchFamily="50" charset="-127"/>
                           <a:cs typeface="+mn-cs"/>
                         </a:rPr>
-                        <a:t>21,553</a:t>
+                        <a:t>21,475</a:t>
                       </a:r>
                     </a:p>
                   </a:txBody>
@@ -13643,7 +13643,7 @@
                           <a:ea typeface="대명체 보통" panose="020B0600000101010101" pitchFamily="50" charset="-127"/>
                           <a:cs typeface="+mn-cs"/>
                         </a:rPr>
-                        <a:t>116%</a:t>
+                        <a:t>115%</a:t>
                       </a:r>
                     </a:p>
                   </a:txBody>
@@ -13710,7 +13710,7 @@
                           <a:ea typeface="대명체 보통" panose="020B0600000101010101" pitchFamily="50" charset="-127"/>
                           <a:cs typeface="+mn-cs"/>
                         </a:rPr>
-                        <a:t>111,194</a:t>
+                        <a:t>111,382</a:t>
                       </a:r>
                     </a:p>
                   </a:txBody>
@@ -13836,7 +13836,7 @@
                           <a:ea typeface="대명체 보통" panose="020B0600000101010101" pitchFamily="50" charset="-127"/>
                           <a:cs typeface="+mn-cs"/>
                         </a:rPr>
-                        <a:t>49,386</a:t>
+                        <a:t>49,121</a:t>
                       </a:r>
                     </a:p>
                   </a:txBody>
@@ -14237,7 +14237,7 @@
                           <a:ea typeface="대명체 보통" panose="020B0600000101010101" pitchFamily="50" charset="-127"/>
                           <a:cs typeface="+mn-cs"/>
                         </a:rPr>
-                        <a:t>8,040</a:t>
+                        <a:t>8,020</a:t>
                       </a:r>
                     </a:p>
                   </a:txBody>
@@ -14348,14 +14348,14 @@
                       <a:r>
                         <a:rPr lang="en-US" altLang="ko-KR" sz="700" b="0" i="0" u="none" strike="noStrike" kern="1200" dirty="0" smtClean="0">
                           <a:solidFill>
-                            <a:srgbClr val="000000"/>
+                            <a:srgbClr val="FF0000"/>
                           </a:solidFill>
                           <a:effectLst/>
                           <a:latin typeface="대명체 보통" panose="020B0600000101010101" pitchFamily="50" charset="-127"/>
                           <a:ea typeface="대명체 보통" panose="020B0600000101010101" pitchFamily="50" charset="-127"/>
                           <a:cs typeface="+mn-cs"/>
                         </a:rPr>
-                        <a:t>17</a:t>
+                        <a:t>-3</a:t>
                       </a:r>
                       <a:endParaRPr lang="en-US" altLang="ko-KR" sz="700" b="0" i="0" u="none" strike="noStrike" kern="1200" dirty="0">
                         <a:solidFill>
@@ -14490,7 +14490,7 @@
                           <a:ea typeface="대명체 보통" panose="020B0600000101010101" pitchFamily="50" charset="-127"/>
                           <a:cs typeface="+mn-cs"/>
                         </a:rPr>
-                        <a:t>4,958</a:t>
+                        <a:t>5,070</a:t>
                       </a:r>
                     </a:p>
                   </a:txBody>
@@ -14608,7 +14608,7 @@
                           <a:ea typeface="대명체 보통" panose="020B0600000101010101" pitchFamily="50" charset="-127"/>
                           <a:cs typeface="+mn-cs"/>
                         </a:rPr>
-                        <a:t>3,082</a:t>
+                        <a:t>2,950</a:t>
                       </a:r>
                     </a:p>
                   </a:txBody>
@@ -14671,7 +14671,7 @@
                           <a:ea typeface="대명체 보통" panose="020B0600000101010101" pitchFamily="50" charset="-127"/>
                           <a:cs typeface="+mn-cs"/>
                         </a:rPr>
-                        <a:t>62%</a:t>
+                        <a:t>58%</a:t>
                       </a:r>
                     </a:p>
                   </a:txBody>
@@ -14900,7 +14900,7 @@
                           <a:ea typeface="대명체 보통" panose="020B0600000101010101" pitchFamily="50" charset="-127"/>
                           <a:cs typeface="+mn-cs"/>
                         </a:rPr>
-                        <a:t>92,589</a:t>
+                        <a:t>92,570</a:t>
                       </a:r>
                     </a:p>
                   </a:txBody>
@@ -15018,7 +15018,7 @@
                           <a:ea typeface="대명체 보통" panose="020B0600000101010101" pitchFamily="50" charset="-127"/>
                           <a:cs typeface="+mn-cs"/>
                         </a:rPr>
-                        <a:t>12,216</a:t>
+                        <a:t>12,196</a:t>
                       </a:r>
                     </a:p>
                   </a:txBody>
@@ -15144,7 +15144,7 @@
                           <a:ea typeface="대명체 보통" panose="020B0600000101010101" pitchFamily="50" charset="-127"/>
                           <a:cs typeface="+mn-cs"/>
                         </a:rPr>
-                        <a:t>63,614</a:t>
+                        <a:t>63,726</a:t>
                       </a:r>
                     </a:p>
                   </a:txBody>
@@ -15262,7 +15262,7 @@
                           <a:ea typeface="대명체 보통" panose="020B0600000101010101" pitchFamily="50" charset="-127"/>
                           <a:cs typeface="+mn-cs"/>
                         </a:rPr>
-                        <a:t>28,976</a:t>
+                        <a:t>28,844</a:t>
                       </a:r>
                     </a:p>
                   </a:txBody>
@@ -15325,7 +15325,7 @@
                           <a:ea typeface="대명체 보통" panose="020B0600000101010101" pitchFamily="50" charset="-127"/>
                           <a:cs typeface="+mn-cs"/>
                         </a:rPr>
-                        <a:t>46%</a:t>
+                        <a:t>45%</a:t>
                       </a:r>
                     </a:p>
                   </a:txBody>
@@ -15643,7 +15643,7 @@
                           <a:ea typeface="대명체 보통" panose="020B0600000101010101" pitchFamily="50" charset="-127"/>
                           <a:cs typeface="+mn-cs"/>
                         </a:rPr>
-                        <a:t>7,359</a:t>
+                        <a:t>7,305</a:t>
                       </a:r>
                     </a:p>
                   </a:txBody>
@@ -15753,7 +15753,7 @@
                           <a:ea typeface="대명체 보통" panose="020B0600000101010101" pitchFamily="50" charset="-127"/>
                           <a:cs typeface="+mn-cs"/>
                         </a:rPr>
-                        <a:t>1,678</a:t>
+                        <a:t>1,624</a:t>
                       </a:r>
                       <a:endParaRPr lang="en-US" altLang="ko-KR" sz="700" b="0" i="0" u="none" strike="noStrike" kern="1200" dirty="0">
                         <a:solidFill>
@@ -15821,7 +15821,7 @@
                           <a:ea typeface="대명체 보통" panose="020B0600000101010101" pitchFamily="50" charset="-127"/>
                           <a:cs typeface="+mn-cs"/>
                         </a:rPr>
-                        <a:t>130%</a:t>
+                        <a:t>129%</a:t>
                       </a:r>
                     </a:p>
                   </a:txBody>
@@ -15880,7 +15880,7 @@
                           <a:ea typeface="대명체 보통" panose="020B0600000101010101" pitchFamily="50" charset="-127"/>
                           <a:cs typeface="+mn-cs"/>
                         </a:rPr>
-                        <a:t>3,476</a:t>
+                        <a:t>3,549</a:t>
                       </a:r>
                     </a:p>
                   </a:txBody>
@@ -15990,7 +15990,7 @@
                           <a:ea typeface="대명체 보통" panose="020B0600000101010101" pitchFamily="50" charset="-127"/>
                           <a:cs typeface="+mn-cs"/>
                         </a:rPr>
-                        <a:t>3,883</a:t>
+                        <a:t>3,756</a:t>
                       </a:r>
                     </a:p>
                   </a:txBody>
@@ -16049,7 +16049,7 @@
                           <a:ea typeface="대명체 보통" panose="020B0600000101010101" pitchFamily="50" charset="-127"/>
                           <a:cs typeface="+mn-cs"/>
                         </a:rPr>
-                        <a:t>112%</a:t>
+                        <a:t>106%</a:t>
                       </a:r>
                     </a:p>
                   </a:txBody>
@@ -16266,7 +16266,7 @@
                           <a:ea typeface="대명체 보통" panose="020B0600000101010101" pitchFamily="50" charset="-127"/>
                           <a:cs typeface="+mn-cs"/>
                         </a:rPr>
-                        <a:t>62,202</a:t>
+                        <a:t>62,147</a:t>
                       </a:r>
                     </a:p>
                   </a:txBody>
@@ -16376,7 +16376,7 @@
                           <a:ea typeface="대명체 보통" panose="020B0600000101010101" pitchFamily="50" charset="-127"/>
                           <a:cs typeface="+mn-cs"/>
                         </a:rPr>
-                        <a:t>7,417</a:t>
+                        <a:t>7,363</a:t>
                       </a:r>
                     </a:p>
                   </a:txBody>
@@ -16435,7 +16435,7 @@
                           <a:ea typeface="대명체 보통" panose="020B0600000101010101" pitchFamily="50" charset="-127"/>
                           <a:cs typeface="+mn-cs"/>
                         </a:rPr>
-                        <a:t>114%</a:t>
+                        <a:t>113%</a:t>
                       </a:r>
                     </a:p>
                   </a:txBody>
@@ -16494,7 +16494,7 @@
                           <a:ea typeface="대명체 보통" panose="020B0600000101010101" pitchFamily="50" charset="-127"/>
                           <a:cs typeface="+mn-cs"/>
                         </a:rPr>
-                        <a:t>44,032</a:t>
+                        <a:t>44,105</a:t>
                       </a:r>
                     </a:p>
                   </a:txBody>
@@ -16604,7 +16604,7 @@
                           <a:ea typeface="대명체 보통" panose="020B0600000101010101" pitchFamily="50" charset="-127"/>
                           <a:cs typeface="+mn-cs"/>
                         </a:rPr>
-                        <a:t>18,170</a:t>
+                        <a:t>18,042</a:t>
                       </a:r>
                     </a:p>
                   </a:txBody>
@@ -16999,7 +16999,7 @@
                           <a:ea typeface="대명체 보통" panose="020B0600000101010101" pitchFamily="50" charset="-127"/>
                           <a:cs typeface="+mn-cs"/>
                         </a:rPr>
-                        <a:t>605</a:t>
+                        <a:t>602</a:t>
                       </a:r>
                       <a:endParaRPr lang="en-US" altLang="ko-KR" sz="700" b="0" i="0" u="none" strike="noStrike" kern="1200" dirty="0">
                         <a:solidFill>
@@ -17126,7 +17126,7 @@
                           <a:ea typeface="대명체 보통" panose="020B0600000101010101" pitchFamily="50" charset="-127"/>
                           <a:cs typeface="+mn-cs"/>
                         </a:rPr>
-                        <a:t>203</a:t>
+                        <a:t>199</a:t>
                       </a:r>
                       <a:endParaRPr lang="en-US" altLang="ko-KR" sz="700" b="0" i="0" u="none" strike="noStrike" kern="1200" dirty="0">
                         <a:solidFill>
@@ -17198,7 +17198,7 @@
                           <a:ea typeface="대명체 보통" panose="020B0600000101010101" pitchFamily="50" charset="-127"/>
                           <a:cs typeface="+mn-cs"/>
                         </a:rPr>
-                        <a:t>150%</a:t>
+                        <a:t>149%</a:t>
                       </a:r>
                     </a:p>
                   </a:txBody>
@@ -17261,7 +17261,7 @@
                           <a:ea typeface="대명체 보통" panose="020B0600000101010101" pitchFamily="50" charset="-127"/>
                           <a:cs typeface="+mn-cs"/>
                         </a:rPr>
-                        <a:t>322</a:t>
+                        <a:t>323</a:t>
                       </a:r>
                       <a:endParaRPr lang="en-US" altLang="ko-KR" sz="700" b="0" i="0" u="none" strike="noStrike" kern="1200" dirty="0">
                         <a:solidFill>
@@ -17388,7 +17388,7 @@
                           <a:ea typeface="대명체 보통" panose="020B0600000101010101" pitchFamily="50" charset="-127"/>
                           <a:cs typeface="+mn-cs"/>
                         </a:rPr>
-                        <a:t>284</a:t>
+                        <a:t>278</a:t>
                       </a:r>
                     </a:p>
                   </a:txBody>
@@ -17451,7 +17451,7 @@
                           <a:ea typeface="대명체 보통" panose="020B0600000101010101" pitchFamily="50" charset="-127"/>
                           <a:cs typeface="+mn-cs"/>
                         </a:rPr>
-                        <a:t>88%</a:t>
+                        <a:t>86%</a:t>
                       </a:r>
                     </a:p>
                   </a:txBody>
@@ -17680,7 +17680,7 @@
                           <a:ea typeface="대명체 보통" panose="020B0600000101010101" pitchFamily="50" charset="-127"/>
                           <a:cs typeface="+mn-cs"/>
                         </a:rPr>
-                        <a:t>5,789</a:t>
+                        <a:t>5,786</a:t>
                       </a:r>
                     </a:p>
                   </a:txBody>
@@ -17798,7 +17798,7 @@
                           <a:ea typeface="대명체 보통" panose="020B0600000101010101" pitchFamily="50" charset="-127"/>
                           <a:cs typeface="+mn-cs"/>
                         </a:rPr>
-                        <a:t>1,919</a:t>
+                        <a:t>1,916</a:t>
                       </a:r>
                       <a:endParaRPr lang="en-US" altLang="ko-KR" sz="700" b="0" i="0" u="none" strike="noStrike" kern="1200" dirty="0">
                         <a:solidFill>
@@ -17933,7 +17933,7 @@
                           <a:ea typeface="대명체 보통" panose="020B0600000101010101" pitchFamily="50" charset="-127"/>
                           <a:cs typeface="+mn-cs"/>
                         </a:rPr>
-                        <a:t>3,549</a:t>
+                        <a:t>3,551</a:t>
                       </a:r>
                     </a:p>
                   </a:txBody>
@@ -18051,7 +18051,7 @@
                           <a:ea typeface="대명체 보통" panose="020B0600000101010101" pitchFamily="50" charset="-127"/>
                           <a:cs typeface="+mn-cs"/>
                         </a:rPr>
-                        <a:t>2,240</a:t>
+                        <a:t>2,235</a:t>
                       </a:r>
                     </a:p>
                   </a:txBody>

--- a/data/세일즈마케팅_예상매출현황.pptx
+++ b/data/세일즈마케팅_예상매출현황.pptx
@@ -12756,7 +12756,7 @@
                           <a:ea typeface="대명체 보통" panose="020B0600000101010101" pitchFamily="50" charset="-127"/>
                           <a:cs typeface="+mn-cs"/>
                         </a:rPr>
-                        <a:t>15,927</a:t>
+                        <a:t>15,798</a:t>
                       </a:r>
                     </a:p>
                   </a:txBody>
@@ -12882,7 +12882,7 @@
                           <a:ea typeface="대명체 보통" panose="020B0600000101010101" pitchFamily="50" charset="-127"/>
                           <a:cs typeface="+mn-cs"/>
                         </a:rPr>
-                        <a:t>1,820</a:t>
+                        <a:t>1,692</a:t>
                       </a:r>
                     </a:p>
                   </a:txBody>
@@ -12949,7 +12949,7 @@
                           <a:ea typeface="대명체 보통" panose="020B0600000101010101" pitchFamily="50" charset="-127"/>
                           <a:cs typeface="+mn-cs"/>
                         </a:rPr>
-                        <a:t>113%</a:t>
+                        <a:t>112%</a:t>
                       </a:r>
                     </a:p>
                   </a:txBody>
@@ -13016,7 +13016,7 @@
                           <a:ea typeface="대명체 보통" panose="020B0600000101010101" pitchFamily="50" charset="-127"/>
                           <a:cs typeface="+mn-cs"/>
                         </a:rPr>
-                        <a:t>8,943</a:t>
+                        <a:t>9,147</a:t>
                       </a:r>
                     </a:p>
                   </a:txBody>
@@ -13142,7 +13142,7 @@
                           <a:ea typeface="대명체 보통" panose="020B0600000101010101" pitchFamily="50" charset="-127"/>
                           <a:cs typeface="+mn-cs"/>
                         </a:rPr>
-                        <a:t>6,984</a:t>
+                        <a:t>6,651</a:t>
                       </a:r>
                     </a:p>
                   </a:txBody>
@@ -13209,7 +13209,7 @@
                           <a:ea typeface="대명체 보통" panose="020B0600000101010101" pitchFamily="50" charset="-127"/>
                           <a:cs typeface="+mn-cs"/>
                         </a:rPr>
-                        <a:t>78%</a:t>
+                        <a:t>73%</a:t>
                       </a:r>
                     </a:p>
                   </a:txBody>
@@ -13450,7 +13450,7 @@
                           <a:ea typeface="대명체 보통" panose="020B0600000101010101" pitchFamily="50" charset="-127"/>
                           <a:cs typeface="+mn-cs"/>
                         </a:rPr>
-                        <a:t>160,503</a:t>
+                        <a:t>160,375</a:t>
                       </a:r>
                     </a:p>
                   </a:txBody>
@@ -13576,7 +13576,7 @@
                           <a:ea typeface="대명체 보통" panose="020B0600000101010101" pitchFamily="50" charset="-127"/>
                           <a:cs typeface="+mn-cs"/>
                         </a:rPr>
-                        <a:t>21,475</a:t>
+                        <a:t>21,347</a:t>
                       </a:r>
                     </a:p>
                   </a:txBody>
@@ -13710,7 +13710,7 @@
                           <a:ea typeface="대명체 보통" panose="020B0600000101010101" pitchFamily="50" charset="-127"/>
                           <a:cs typeface="+mn-cs"/>
                         </a:rPr>
-                        <a:t>111,382</a:t>
+                        <a:t>111,586</a:t>
                       </a:r>
                     </a:p>
                   </a:txBody>
@@ -13836,7 +13836,7 @@
                           <a:ea typeface="대명체 보통" panose="020B0600000101010101" pitchFamily="50" charset="-127"/>
                           <a:cs typeface="+mn-cs"/>
                         </a:rPr>
-                        <a:t>49,121</a:t>
+                        <a:t>48,789</a:t>
                       </a:r>
                     </a:p>
                   </a:txBody>
@@ -14237,7 +14237,7 @@
                           <a:ea typeface="대명체 보통" panose="020B0600000101010101" pitchFamily="50" charset="-127"/>
                           <a:cs typeface="+mn-cs"/>
                         </a:rPr>
-                        <a:t>8,020</a:t>
+                        <a:t>7,919</a:t>
                       </a:r>
                     </a:p>
                   </a:txBody>
@@ -14355,7 +14355,7 @@
                           <a:ea typeface="대명체 보통" panose="020B0600000101010101" pitchFamily="50" charset="-127"/>
                           <a:cs typeface="+mn-cs"/>
                         </a:rPr>
-                        <a:t>-3</a:t>
+                        <a:t>-104</a:t>
                       </a:r>
                       <a:endParaRPr lang="en-US" altLang="ko-KR" sz="700" b="0" i="0" u="none" strike="noStrike" kern="1200" dirty="0">
                         <a:solidFill>
@@ -14427,7 +14427,7 @@
                           <a:ea typeface="대명체 보통" panose="020B0600000101010101" pitchFamily="50" charset="-127"/>
                           <a:cs typeface="+mn-cs"/>
                         </a:rPr>
-                        <a:t>100%</a:t>
+                        <a:t>99%</a:t>
                       </a:r>
                     </a:p>
                   </a:txBody>
@@ -14490,7 +14490,7 @@
                           <a:ea typeface="대명체 보통" panose="020B0600000101010101" pitchFamily="50" charset="-127"/>
                           <a:cs typeface="+mn-cs"/>
                         </a:rPr>
-                        <a:t>5,070</a:t>
+                        <a:t>5,179</a:t>
                       </a:r>
                     </a:p>
                   </a:txBody>
@@ -14608,7 +14608,7 @@
                           <a:ea typeface="대명체 보통" panose="020B0600000101010101" pitchFamily="50" charset="-127"/>
                           <a:cs typeface="+mn-cs"/>
                         </a:rPr>
-                        <a:t>2,950</a:t>
+                        <a:t>2,739</a:t>
                       </a:r>
                     </a:p>
                   </a:txBody>
@@ -14671,7 +14671,7 @@
                           <a:ea typeface="대명체 보통" panose="020B0600000101010101" pitchFamily="50" charset="-127"/>
                           <a:cs typeface="+mn-cs"/>
                         </a:rPr>
-                        <a:t>58%</a:t>
+                        <a:t>53%</a:t>
                       </a:r>
                     </a:p>
                   </a:txBody>
@@ -14900,7 +14900,7 @@
                           <a:ea typeface="대명체 보통" panose="020B0600000101010101" pitchFamily="50" charset="-127"/>
                           <a:cs typeface="+mn-cs"/>
                         </a:rPr>
-                        <a:t>92,570</a:t>
+                        <a:t>92,469</a:t>
                       </a:r>
                     </a:p>
                   </a:txBody>
@@ -15018,7 +15018,7 @@
                           <a:ea typeface="대명체 보통" panose="020B0600000101010101" pitchFamily="50" charset="-127"/>
                           <a:cs typeface="+mn-cs"/>
                         </a:rPr>
-                        <a:t>12,196</a:t>
+                        <a:t>12,095</a:t>
                       </a:r>
                     </a:p>
                   </a:txBody>
@@ -15144,7 +15144,7 @@
                           <a:ea typeface="대명체 보통" panose="020B0600000101010101" pitchFamily="50" charset="-127"/>
                           <a:cs typeface="+mn-cs"/>
                         </a:rPr>
-                        <a:t>63,726</a:t>
+                        <a:t>63,835</a:t>
                       </a:r>
                     </a:p>
                   </a:txBody>
@@ -15262,7 +15262,7 @@
                           <a:ea typeface="대명체 보통" panose="020B0600000101010101" pitchFamily="50" charset="-127"/>
                           <a:cs typeface="+mn-cs"/>
                         </a:rPr>
-                        <a:t>28,844</a:t>
+                        <a:t>28,633</a:t>
                       </a:r>
                     </a:p>
                   </a:txBody>
@@ -15643,7 +15643,7 @@
                           <a:ea typeface="대명체 보통" panose="020B0600000101010101" pitchFamily="50" charset="-127"/>
                           <a:cs typeface="+mn-cs"/>
                         </a:rPr>
-                        <a:t>7,305</a:t>
+                        <a:t>7,271</a:t>
                       </a:r>
                     </a:p>
                   </a:txBody>
@@ -15753,7 +15753,7 @@
                           <a:ea typeface="대명체 보통" panose="020B0600000101010101" pitchFamily="50" charset="-127"/>
                           <a:cs typeface="+mn-cs"/>
                         </a:rPr>
-                        <a:t>1,624</a:t>
+                        <a:t>1,590</a:t>
                       </a:r>
                       <a:endParaRPr lang="en-US" altLang="ko-KR" sz="700" b="0" i="0" u="none" strike="noStrike" kern="1200" dirty="0">
                         <a:solidFill>
@@ -15821,7 +15821,7 @@
                           <a:ea typeface="대명체 보통" panose="020B0600000101010101" pitchFamily="50" charset="-127"/>
                           <a:cs typeface="+mn-cs"/>
                         </a:rPr>
-                        <a:t>129%</a:t>
+                        <a:t>128%</a:t>
                       </a:r>
                     </a:p>
                   </a:txBody>
@@ -15880,7 +15880,7 @@
                           <a:ea typeface="대명체 보통" panose="020B0600000101010101" pitchFamily="50" charset="-127"/>
                           <a:cs typeface="+mn-cs"/>
                         </a:rPr>
-                        <a:t>3,549</a:t>
+                        <a:t>3,637</a:t>
                       </a:r>
                     </a:p>
                   </a:txBody>
@@ -15990,7 +15990,7 @@
                           <a:ea typeface="대명체 보통" panose="020B0600000101010101" pitchFamily="50" charset="-127"/>
                           <a:cs typeface="+mn-cs"/>
                         </a:rPr>
-                        <a:t>3,756</a:t>
+                        <a:t>3,634</a:t>
                       </a:r>
                     </a:p>
                   </a:txBody>
@@ -16049,7 +16049,7 @@
                           <a:ea typeface="대명체 보통" panose="020B0600000101010101" pitchFamily="50" charset="-127"/>
                           <a:cs typeface="+mn-cs"/>
                         </a:rPr>
-                        <a:t>106%</a:t>
+                        <a:t>100%</a:t>
                       </a:r>
                     </a:p>
                   </a:txBody>
@@ -16266,7 +16266,7 @@
                           <a:ea typeface="대명체 보통" panose="020B0600000101010101" pitchFamily="50" charset="-127"/>
                           <a:cs typeface="+mn-cs"/>
                         </a:rPr>
-                        <a:t>62,147</a:t>
+                        <a:t>62,113</a:t>
                       </a:r>
                     </a:p>
                   </a:txBody>
@@ -16376,7 +16376,7 @@
                           <a:ea typeface="대명체 보통" panose="020B0600000101010101" pitchFamily="50" charset="-127"/>
                           <a:cs typeface="+mn-cs"/>
                         </a:rPr>
-                        <a:t>7,363</a:t>
+                        <a:t>7,329</a:t>
                       </a:r>
                     </a:p>
                   </a:txBody>
@@ -16494,7 +16494,7 @@
                           <a:ea typeface="대명체 보통" panose="020B0600000101010101" pitchFamily="50" charset="-127"/>
                           <a:cs typeface="+mn-cs"/>
                         </a:rPr>
-                        <a:t>44,105</a:t>
+                        <a:t>44,193</a:t>
                       </a:r>
                     </a:p>
                   </a:txBody>
@@ -16604,7 +16604,7 @@
                           <a:ea typeface="대명체 보통" panose="020B0600000101010101" pitchFamily="50" charset="-127"/>
                           <a:cs typeface="+mn-cs"/>
                         </a:rPr>
-                        <a:t>18,042</a:t>
+                        <a:t>17,921</a:t>
                       </a:r>
                     </a:p>
                   </a:txBody>
@@ -16999,7 +16999,7 @@
                           <a:ea typeface="대명체 보통" panose="020B0600000101010101" pitchFamily="50" charset="-127"/>
                           <a:cs typeface="+mn-cs"/>
                         </a:rPr>
-                        <a:t>602</a:t>
+                        <a:t>609</a:t>
                       </a:r>
                       <a:endParaRPr lang="en-US" altLang="ko-KR" sz="700" b="0" i="0" u="none" strike="noStrike" kern="1200" dirty="0">
                         <a:solidFill>
@@ -17126,7 +17126,7 @@
                           <a:ea typeface="대명체 보통" panose="020B0600000101010101" pitchFamily="50" charset="-127"/>
                           <a:cs typeface="+mn-cs"/>
                         </a:rPr>
-                        <a:t>199</a:t>
+                        <a:t>206</a:t>
                       </a:r>
                       <a:endParaRPr lang="en-US" altLang="ko-KR" sz="700" b="0" i="0" u="none" strike="noStrike" kern="1200" dirty="0">
                         <a:solidFill>
@@ -17198,7 +17198,7 @@
                           <a:ea typeface="대명체 보통" panose="020B0600000101010101" pitchFamily="50" charset="-127"/>
                           <a:cs typeface="+mn-cs"/>
                         </a:rPr>
-                        <a:t>149%</a:t>
+                        <a:t>151%</a:t>
                       </a:r>
                     </a:p>
                   </a:txBody>
@@ -17261,7 +17261,7 @@
                           <a:ea typeface="대명체 보통" panose="020B0600000101010101" pitchFamily="50" charset="-127"/>
                           <a:cs typeface="+mn-cs"/>
                         </a:rPr>
-                        <a:t>323</a:t>
+                        <a:t>331</a:t>
                       </a:r>
                       <a:endParaRPr lang="en-US" altLang="ko-KR" sz="700" b="0" i="0" u="none" strike="noStrike" kern="1200" dirty="0">
                         <a:solidFill>
@@ -17451,7 +17451,7 @@
                           <a:ea typeface="대명체 보통" panose="020B0600000101010101" pitchFamily="50" charset="-127"/>
                           <a:cs typeface="+mn-cs"/>
                         </a:rPr>
-                        <a:t>86%</a:t>
+                        <a:t>84%</a:t>
                       </a:r>
                     </a:p>
                   </a:txBody>
@@ -17680,7 +17680,7 @@
                           <a:ea typeface="대명체 보통" panose="020B0600000101010101" pitchFamily="50" charset="-127"/>
                           <a:cs typeface="+mn-cs"/>
                         </a:rPr>
-                        <a:t>5,786</a:t>
+                        <a:t>5,793</a:t>
                       </a:r>
                     </a:p>
                   </a:txBody>
@@ -17798,7 +17798,7 @@
                           <a:ea typeface="대명체 보통" panose="020B0600000101010101" pitchFamily="50" charset="-127"/>
                           <a:cs typeface="+mn-cs"/>
                         </a:rPr>
-                        <a:t>1,916</a:t>
+                        <a:t>1,923</a:t>
                       </a:r>
                       <a:endParaRPr lang="en-US" altLang="ko-KR" sz="700" b="0" i="0" u="none" strike="noStrike" kern="1200" dirty="0">
                         <a:solidFill>
@@ -17933,7 +17933,7 @@
                           <a:ea typeface="대명체 보통" panose="020B0600000101010101" pitchFamily="50" charset="-127"/>
                           <a:cs typeface="+mn-cs"/>
                         </a:rPr>
-                        <a:t>3,551</a:t>
+                        <a:t>3,558</a:t>
                       </a:r>
                     </a:p>
                   </a:txBody>
